--- a/docs/【EC】ECサービス部_2026年7月度部会_Ver1.1.pptx
+++ b/docs/【EC】ECサービス部_2026年7月度部会_Ver1.1.pptx
@@ -11726,8 +11726,8 @@
         </p:nvSpPr>
         <p:spPr>
           <a:xfrm>
-            <a:off x="776537" y="780000"/>
-            <a:ext cx="8500000" cy="420000"/>
+            <a:off x="700000" y="700000"/>
+            <a:ext cx="8800000" cy="320000"/>
           </a:xfrm>
           <a:prstGeom prst="rect">
             <a:avLst/>
@@ -11745,27 +11745,7 @@
                 <a:spcPts val="0"/>
               </a:spcBef>
               <a:spcAft>
-                <a:spcPts val="200"/>
-              </a:spcAft>
-            </a:pPr>
-            <a:r>
-              <a:rPr sz="1600" b="1">
-                <a:solidFill>
-                  <a:srgbClr val="333333"/>
-                </a:solidFill>
-                <a:latin typeface="メイリオ"/>
-                <a:ea typeface="メイリオ"/>
-              </a:rPr>
-              <a:t>EC-RiderB2B Primo（B2BⅡ）　バージョンアップ状況</a:t>
-            </a:r>
-          </a:p>
-          <a:p>
-            <a:pPr>
-              <a:spcBef>
-                <a:spcPts val="0"/>
-              </a:spcBef>
-              <a:spcAft>
-                <a:spcPts val="200"/>
+                <a:spcPts val="100"/>
               </a:spcAft>
             </a:pPr>
             <a:r>
@@ -11776,7 +11756,7 @@
                 <a:latin typeface="メイリオ"/>
                 <a:ea typeface="メイリオ"/>
               </a:rPr>
-              <a:t>① バージョンアップ内容（リリース済み）</a:t>
+              <a:t>EC-RiderB2B Primo（B2BⅡ）　バージョンアップ状況（リリース済み）</a:t>
             </a:r>
           </a:p>
         </p:txBody>
@@ -11790,8 +11770,8 @@
           <p:nvPr/>
         </p:nvGraphicFramePr>
         <p:xfrm>
-          <a:off x="776537" y="1350000"/>
-          <a:ext cx="8350000" cy="1700000"/>
+          <a:off x="700000" y="1020000"/>
+          <a:ext cx="8500000" cy="1250000"/>
         </p:xfrm>
         <a:graphic>
           <a:graphicData uri="http://schemas.openxmlformats.org/drawingml/2006/table">
@@ -11800,12 +11780,12 @@
                 <a:tableStyleId>{5C22544A-7EE6-4342-B048-85BDC9FD1C3A}</a:tableStyleId>
               </a:tblPr>
               <a:tblGrid>
-                <a:gridCol w="2087500"/>
-                <a:gridCol w="2087500"/>
-                <a:gridCol w="2087500"/>
-                <a:gridCol w="2087500"/>
+                <a:gridCol w="2125000"/>
+                <a:gridCol w="2125000"/>
+                <a:gridCol w="2125000"/>
+                <a:gridCol w="2125000"/>
               </a:tblGrid>
-              <a:tr h="425000">
+              <a:tr h="312500">
                 <a:tc>
                   <a:txBody>
                     <a:bodyPr/>
@@ -11813,7 +11793,7 @@
                     <a:p>
                       <a:pPr algn="ctr"/>
                       <a:r>
-                        <a:rPr sz="1200" b="1">
+                        <a:rPr sz="1100" b="1">
                           <a:solidFill>
                             <a:srgbClr val="FFFFFF"/>
                           </a:solidFill>
@@ -11837,7 +11817,7 @@
                     <a:p>
                       <a:pPr algn="ctr"/>
                       <a:r>
-                        <a:rPr sz="1200" b="1">
+                        <a:rPr sz="1100" b="1">
                           <a:solidFill>
                             <a:srgbClr val="FFFFFF"/>
                           </a:solidFill>
@@ -11861,7 +11841,7 @@
                     <a:p>
                       <a:pPr algn="ctr"/>
                       <a:r>
-                        <a:rPr sz="1200" b="1">
+                        <a:rPr sz="1100" b="1">
                           <a:solidFill>
                             <a:srgbClr val="FFFFFF"/>
                           </a:solidFill>
@@ -11885,14 +11865,14 @@
                     <a:p>
                       <a:pPr algn="ctr"/>
                       <a:r>
-                        <a:rPr sz="1200" b="1">
+                        <a:rPr sz="1100" b="1">
                           <a:solidFill>
                             <a:srgbClr val="FFFFFF"/>
                           </a:solidFill>
                           <a:latin typeface="メイリオ"/>
                           <a:ea typeface="メイリオ"/>
                         </a:rPr>
-                        <a:t>サポート期限（目安）</a:t>
+                        <a:t>サポート期限</a:t>
                       </a:r>
                     </a:p>
                   </a:txBody>
@@ -11903,7 +11883,7 @@
                   </a:tcPr>
                 </a:tc>
               </a:tr>
-              <a:tr h="425000">
+              <a:tr h="312500">
                 <a:tc>
                   <a:txBody>
                     <a:bodyPr/>
@@ -11911,7 +11891,7 @@
                     <a:p>
                       <a:pPr algn="l"/>
                       <a:r>
-                        <a:rPr sz="1200" b="0">
+                        <a:rPr sz="1100" b="0">
                           <a:solidFill>
                             <a:srgbClr val="333333"/>
                           </a:solidFill>
@@ -11931,7 +11911,7 @@
                     <a:p>
                       <a:pPr algn="ctr"/>
                       <a:r>
-                        <a:rPr sz="1200" b="0">
+                        <a:rPr sz="1100" b="0">
                           <a:solidFill>
                             <a:srgbClr val="333333"/>
                           </a:solidFill>
@@ -11951,7 +11931,7 @@
                     <a:p>
                       <a:pPr algn="ctr"/>
                       <a:r>
-                        <a:rPr sz="1200" b="1">
+                        <a:rPr sz="1100" b="1">
                           <a:solidFill>
                             <a:srgbClr val="333333"/>
                           </a:solidFill>
@@ -11971,7 +11951,7 @@
                     <a:p>
                       <a:pPr algn="ctr"/>
                       <a:r>
-                        <a:rPr sz="1200" b="0">
+                        <a:rPr sz="1100" b="0">
                           <a:solidFill>
                             <a:srgbClr val="333333"/>
                           </a:solidFill>
@@ -11985,7 +11965,7 @@
                   <a:tcPr anchor="ctr"/>
                 </a:tc>
               </a:tr>
-              <a:tr h="425000">
+              <a:tr h="312500">
                 <a:tc>
                   <a:txBody>
                     <a:bodyPr/>
@@ -11993,14 +11973,14 @@
                     <a:p>
                       <a:pPr algn="l"/>
                       <a:r>
-                        <a:rPr sz="1200" b="0">
+                        <a:rPr sz="1100" b="0">
                           <a:solidFill>
                             <a:srgbClr val="333333"/>
                           </a:solidFill>
                           <a:latin typeface="メイリオ"/>
                           <a:ea typeface="メイリオ"/>
                         </a:rPr>
-                        <a:t>Ruby on Rails</a:t>
+                        <a:t>Rails</a:t>
                       </a:r>
                     </a:p>
                   </a:txBody>
@@ -12017,7 +11997,7 @@
                     <a:p>
                       <a:pPr algn="ctr"/>
                       <a:r>
-                        <a:rPr sz="1200" b="0">
+                        <a:rPr sz="1100" b="0">
                           <a:solidFill>
                             <a:srgbClr val="333333"/>
                           </a:solidFill>
@@ -12041,7 +12021,7 @@
                     <a:p>
                       <a:pPr algn="ctr"/>
                       <a:r>
-                        <a:rPr sz="1200" b="1">
+                        <a:rPr sz="1100" b="1">
                           <a:solidFill>
                             <a:srgbClr val="333333"/>
                           </a:solidFill>
@@ -12065,7 +12045,7 @@
                     <a:p>
                       <a:pPr algn="ctr"/>
                       <a:r>
-                        <a:rPr sz="1200" b="0">
+                        <a:rPr sz="1100" b="0">
                           <a:solidFill>
                             <a:srgbClr val="333333"/>
                           </a:solidFill>
@@ -12083,7 +12063,7 @@
                   </a:tcPr>
                 </a:tc>
               </a:tr>
-              <a:tr h="425000">
+              <a:tr h="312500">
                 <a:tc>
                   <a:txBody>
                     <a:bodyPr/>
@@ -12091,7 +12071,7 @@
                     <a:p>
                       <a:pPr algn="l"/>
                       <a:r>
-                        <a:rPr sz="1200" b="0">
+                        <a:rPr sz="1100" b="0">
                           <a:solidFill>
                             <a:srgbClr val="333333"/>
                           </a:solidFill>
@@ -12111,7 +12091,7 @@
                     <a:p>
                       <a:pPr algn="ctr"/>
                       <a:r>
-                        <a:rPr sz="1200" b="0">
+                        <a:rPr sz="1100" b="0">
                           <a:solidFill>
                             <a:srgbClr val="333333"/>
                           </a:solidFill>
@@ -12131,7 +12111,7 @@
                     <a:p>
                       <a:pPr algn="ctr"/>
                       <a:r>
-                        <a:rPr sz="1200" b="1">
+                        <a:rPr sz="1100" b="1">
                           <a:solidFill>
                             <a:srgbClr val="333333"/>
                           </a:solidFill>
@@ -12151,7 +12131,7 @@
                     <a:p>
                       <a:pPr algn="ctr"/>
                       <a:r>
-                        <a:rPr sz="1200" b="0">
+                        <a:rPr sz="1100" b="0">
                           <a:solidFill>
                             <a:srgbClr val="333333"/>
                           </a:solidFill>
@@ -12177,8 +12157,8 @@
         </p:nvSpPr>
         <p:spPr>
           <a:xfrm>
-            <a:off x="776537" y="3200000"/>
-            <a:ext cx="8500000" cy="3200000"/>
+            <a:off x="700000" y="2350000"/>
+            <a:ext cx="8800000" cy="4200000"/>
           </a:xfrm>
           <a:prstGeom prst="rect">
             <a:avLst/>
@@ -12196,18 +12176,38 @@
                 <a:spcPts val="0"/>
               </a:spcBef>
               <a:spcAft>
-                <a:spcPts val="200"/>
+                <a:spcPts val="100"/>
               </a:spcAft>
             </a:pPr>
             <a:r>
-              <a:rPr sz="1400" b="1">
+              <a:rPr sz="1300" b="1">
+                <a:solidFill>
+                  <a:srgbClr val="C00000"/>
+                </a:solidFill>
+                <a:latin typeface="メイリオ"/>
+                <a:ea typeface="メイリオ"/>
+              </a:rPr>
+              <a:t>■ 期限対応だけではないアップデートの狙い</a:t>
+            </a:r>
+          </a:p>
+          <a:p>
+            <a:pPr>
+              <a:spcBef>
+                <a:spcPts val="0"/>
+              </a:spcBef>
+              <a:spcAft>
+                <a:spcPts val="100"/>
+              </a:spcAft>
+            </a:pPr>
+            <a:r>
+              <a:rPr sz="1100" b="0">
                 <a:solidFill>
                   <a:srgbClr val="333333"/>
                 </a:solidFill>
                 <a:latin typeface="メイリオ"/>
                 <a:ea typeface="メイリオ"/>
               </a:rPr>
-              <a:t>② 顧客適用状況</a:t>
+              <a:t>【性能】Ruby YJIT強化・JSON処理高速化 → レスポンス改善の土台</a:t>
             </a:r>
           </a:p>
           <a:p>
@@ -12216,18 +12216,18 @@
                 <a:spcPts val="0"/>
               </a:spcBef>
               <a:spcAft>
-                <a:spcPts val="200"/>
+                <a:spcPts val="100"/>
               </a:spcAft>
             </a:pPr>
             <a:r>
-              <a:rPr sz="1300" b="0">
+              <a:rPr sz="1100" b="0">
                 <a:solidFill>
                   <a:srgbClr val="333333"/>
                 </a:solidFill>
                 <a:latin typeface="メイリオ"/>
                 <a:ea typeface="メイリオ"/>
               </a:rPr>
-              <a:t>・リリース済み</a:t>
+              <a:t>【運用】Rails 8.1：長時間ジョブ継続・構造化イベント → バッチ／監視を強化しやすい</a:t>
             </a:r>
           </a:p>
           <a:p>
@@ -12236,18 +12236,18 @@
                 <a:spcPts val="0"/>
               </a:spcBef>
               <a:spcAft>
-                <a:spcPts val="200"/>
+                <a:spcPts val="100"/>
               </a:spcAft>
             </a:pPr>
             <a:r>
-              <a:rPr sz="1300" b="0">
+              <a:rPr sz="1100" b="0">
                 <a:solidFill>
                   <a:srgbClr val="333333"/>
                 </a:solidFill>
                 <a:latin typeface="メイリオ"/>
                 <a:ea typeface="メイリオ"/>
               </a:rPr>
-              <a:t>・導入済み顧客（キャンドゥ／ポディウム）へは提供準備完了、顧客都合待ち</a:t>
+              <a:t>【DB】MariaDB 10.11：オプティマイザ改善・動的InnoDB設定 → 大量データ／負荷時の安定性</a:t>
             </a:r>
           </a:p>
           <a:p>
@@ -12256,18 +12256,18 @@
                 <a:spcPts val="0"/>
               </a:spcBef>
               <a:spcAft>
-                <a:spcPts val="200"/>
+                <a:spcPts val="100"/>
               </a:spcAft>
             </a:pPr>
             <a:r>
-              <a:rPr sz="800" b="0">
+              <a:rPr sz="1100" b="0">
                 <a:solidFill>
                   <a:srgbClr val="333333"/>
                 </a:solidFill>
                 <a:latin typeface="メイリオ"/>
                 <a:ea typeface="メイリオ"/>
               </a:rPr>
-              <a:t/>
+              <a:t>【開発】最新FWに乗ることで、今後の機能追加・改修スピードを上げる</a:t>
             </a:r>
           </a:p>
           <a:p>
@@ -12276,18 +12276,18 @@
                 <a:spcPts val="0"/>
               </a:spcBef>
               <a:spcAft>
-                <a:spcPts val="200"/>
+                <a:spcPts val="100"/>
               </a:spcAft>
             </a:pPr>
             <a:r>
-              <a:rPr sz="1400" b="1">
+              <a:rPr sz="1100" b="0">
                 <a:solidFill>
                   <a:srgbClr val="333333"/>
                 </a:solidFill>
                 <a:latin typeface="メイリオ"/>
                 <a:ea typeface="メイリオ"/>
               </a:rPr>
-              <a:t>③ 今後</a:t>
+              <a:t>【セキュア】セキュリティパッチ継続適用・古い依存の淘汰</a:t>
             </a:r>
           </a:p>
           <a:p>
@@ -12296,18 +12296,18 @@
                 <a:spcPts val="0"/>
               </a:spcBef>
               <a:spcAft>
-                <a:spcPts val="200"/>
+                <a:spcPts val="100"/>
               </a:spcAft>
             </a:pPr>
             <a:r>
-              <a:rPr sz="1300" b="0">
+              <a:rPr sz="600" b="0">
                 <a:solidFill>
                   <a:srgbClr val="333333"/>
                 </a:solidFill>
                 <a:latin typeface="メイリオ"/>
                 <a:ea typeface="メイリオ"/>
               </a:rPr>
-              <a:t>・OS：Ubuntu 22.04 → 24.04 を実施中</a:t>
+              <a:t/>
             </a:r>
           </a:p>
           <a:p>
@@ -12316,18 +12316,98 @@
                 <a:spcPts val="0"/>
               </a:spcBef>
               <a:spcAft>
-                <a:spcPts val="200"/>
+                <a:spcPts val="100"/>
               </a:spcAft>
             </a:pPr>
             <a:r>
-              <a:rPr sz="1300" b="0">
+              <a:rPr sz="1300" b="1">
+                <a:solidFill>
+                  <a:srgbClr val="333333"/>
+                </a:solidFill>
+                <a:latin typeface="メイリオ"/>
+                <a:ea typeface="メイリオ"/>
+              </a:rPr>
+              <a:t>■ 顧客適用／今後</a:t>
+            </a:r>
+          </a:p>
+          <a:p>
+            <a:pPr>
+              <a:spcBef>
+                <a:spcPts val="0"/>
+              </a:spcBef>
+              <a:spcAft>
+                <a:spcPts val="100"/>
+              </a:spcAft>
+            </a:pPr>
+            <a:r>
+              <a:rPr sz="1100" b="0">
+                <a:solidFill>
+                  <a:srgbClr val="333333"/>
+                </a:solidFill>
+                <a:latin typeface="メイリオ"/>
+                <a:ea typeface="メイリオ"/>
+              </a:rPr>
+              <a:t>・キャンドゥ／ポディウム：提供準備完了、顧客都合待ち</a:t>
+            </a:r>
+          </a:p>
+          <a:p>
+            <a:pPr>
+              <a:spcBef>
+                <a:spcPts val="0"/>
+              </a:spcBef>
+              <a:spcAft>
+                <a:spcPts val="100"/>
+              </a:spcAft>
+            </a:pPr>
+            <a:r>
+              <a:rPr sz="1100" b="0">
+                <a:solidFill>
+                  <a:srgbClr val="333333"/>
+                </a:solidFill>
+                <a:latin typeface="メイリオ"/>
+                <a:ea typeface="メイリオ"/>
+              </a:rPr>
+              <a:t>・次：Ubuntu 22.04 → 24.04（8月末までにサーバー含め完了見込み）</a:t>
+            </a:r>
+          </a:p>
+          <a:p>
+            <a:pPr>
+              <a:spcBef>
+                <a:spcPts val="0"/>
+              </a:spcBef>
+              <a:spcAft>
+                <a:spcPts val="100"/>
+              </a:spcAft>
+            </a:pPr>
+            <a:r>
+              <a:rPr sz="400" b="0">
+                <a:solidFill>
+                  <a:srgbClr val="333333"/>
+                </a:solidFill>
+                <a:latin typeface="メイリオ"/>
+                <a:ea typeface="メイリオ"/>
+              </a:rPr>
+              <a:t/>
+            </a:r>
+          </a:p>
+          <a:p>
+            <a:pPr>
+              <a:spcBef>
+                <a:spcPts val="0"/>
+              </a:spcBef>
+              <a:spcAft>
+                <a:spcPts val="100"/>
+              </a:spcAft>
+            </a:pPr>
+            <a:r>
+              <a:rPr sz="1000" b="0">
                 <a:solidFill>
                   <a:srgbClr val="C00000"/>
                 </a:solidFill>
                 <a:latin typeface="メイリオ"/>
                 <a:ea typeface="メイリオ"/>
               </a:rPr>
-              <a:t>・8月末までにサーバー含め完了見込み</a:t>
+              <a:t>※ 今回は基盤更新が主。画面の新機能追加というより「速く・安定・これから伸ばせる」土台づくり</a:t>
             </a:r>
           </a:p>
         </p:txBody>

--- a/docs/【EC】ECサービス部_2026年7月度部会_Ver1.1.pptx
+++ b/docs/【EC】ECサービス部_2026年7月度部会_Ver1.1.pptx
@@ -11726,8 +11726,8 @@
         </p:nvSpPr>
         <p:spPr>
           <a:xfrm>
-            <a:off x="700000" y="700000"/>
-            <a:ext cx="8800000" cy="320000"/>
+            <a:off x="700000" y="680000"/>
+            <a:ext cx="8800000" cy="300000"/>
           </a:xfrm>
           <a:prstGeom prst="rect">
             <a:avLst/>
@@ -11749,7 +11749,7 @@
               </a:spcAft>
             </a:pPr>
             <a:r>
-              <a:rPr sz="1400" b="1">
+              <a:rPr sz="1300" b="1">
                 <a:solidFill>
                   <a:srgbClr val="333333"/>
                 </a:solidFill>
@@ -11770,8 +11770,8 @@
           <p:nvPr/>
         </p:nvGraphicFramePr>
         <p:xfrm>
-          <a:off x="700000" y="1020000"/>
-          <a:ext cx="8500000" cy="1250000"/>
+          <a:off x="700000" y="980000"/>
+          <a:ext cx="8500000" cy="1180000"/>
         </p:xfrm>
         <a:graphic>
           <a:graphicData uri="http://schemas.openxmlformats.org/drawingml/2006/table">
@@ -11785,7 +11785,7 @@
                 <a:gridCol w="2125000"/>
                 <a:gridCol w="2125000"/>
               </a:tblGrid>
-              <a:tr h="312500">
+              <a:tr h="295000">
                 <a:tc>
                   <a:txBody>
                     <a:bodyPr/>
@@ -11883,7 +11883,7 @@
                   </a:tcPr>
                 </a:tc>
               </a:tr>
-              <a:tr h="312500">
+              <a:tr h="295000">
                 <a:tc>
                   <a:txBody>
                     <a:bodyPr/>
@@ -11965,7 +11965,7 @@
                   <a:tcPr anchor="ctr"/>
                 </a:tc>
               </a:tr>
-              <a:tr h="312500">
+              <a:tr h="295000">
                 <a:tc>
                   <a:txBody>
                     <a:bodyPr/>
@@ -12063,7 +12063,7 @@
                   </a:tcPr>
                 </a:tc>
               </a:tr>
-              <a:tr h="312500">
+              <a:tr h="295000">
                 <a:tc>
                   <a:txBody>
                     <a:bodyPr/>
@@ -12157,8 +12157,8 @@
         </p:nvSpPr>
         <p:spPr>
           <a:xfrm>
-            <a:off x="700000" y="2350000"/>
-            <a:ext cx="8800000" cy="4200000"/>
+            <a:off x="700000" y="2250000"/>
+            <a:ext cx="8800000" cy="280000"/>
           </a:xfrm>
           <a:prstGeom prst="rect">
             <a:avLst/>
@@ -12180,16 +12180,414 @@
               </a:spcAft>
             </a:pPr>
             <a:r>
-              <a:rPr sz="1300" b="1">
+              <a:rPr sz="1200" b="1">
                 <a:solidFill>
                   <a:srgbClr val="C00000"/>
                 </a:solidFill>
                 <a:latin typeface="メイリオ"/>
                 <a:ea typeface="メイリオ"/>
               </a:rPr>
-              <a:t>■ 期限対応だけではないアップデートの狙い</a:t>
-            </a:r>
-          </a:p>
+              <a:t>■ 今回のVUで“新しくできること”（真新しい機能のピックアップ）</a:t>
+            </a:r>
+          </a:p>
+        </p:txBody>
+      </p:sp>
+      <p:graphicFrame>
+        <p:nvGraphicFramePr>
+          <p:cNvPr id="6" name="Table 5"/>
+          <p:cNvGraphicFramePr>
+            <a:graphicFrameLocks noGrp="1"/>
+          </p:cNvGraphicFramePr>
+          <p:nvPr/>
+        </p:nvGraphicFramePr>
+        <p:xfrm>
+          <a:off x="700000" y="2550000"/>
+          <a:ext cx="8500000" cy="2300000"/>
+        </p:xfrm>
+        <a:graphic>
+          <a:graphicData uri="http://schemas.openxmlformats.org/drawingml/2006/table">
+            <a:tbl>
+              <a:tblPr firstRow="1" bandRow="1">
+                <a:tableStyleId>{5C22544A-7EE6-4342-B048-85BDC9FD1C3A}</a:tableStyleId>
+              </a:tblPr>
+              <a:tblGrid>
+                <a:gridCol w="1500000"/>
+                <a:gridCol w="2800000"/>
+                <a:gridCol w="4200000"/>
+              </a:tblGrid>
+              <a:tr h="460000">
+                <a:tc>
+                  <a:txBody>
+                    <a:bodyPr/>
+                    <a:lstStyle/>
+                    <a:p>
+                      <a:pPr algn="ctr"/>
+                      <a:r>
+                        <a:rPr sz="1000" b="1">
+                          <a:solidFill>
+                            <a:srgbClr val="FFFFFF"/>
+                          </a:solidFill>
+                          <a:latin typeface="メイリオ"/>
+                          <a:ea typeface="メイリオ"/>
+                        </a:rPr>
+                        <a:t>領域</a:t>
+                      </a:r>
+                    </a:p>
+                  </a:txBody>
+                  <a:tcPr anchor="ctr">
+                    <a:solidFill>
+                      <a:srgbClr val="1F4E79"/>
+                    </a:solidFill>
+                  </a:tcPr>
+                </a:tc>
+                <a:tc>
+                  <a:txBody>
+                    <a:bodyPr/>
+                    <a:lstStyle/>
+                    <a:p>
+                      <a:pPr algn="ctr"/>
+                      <a:r>
+                        <a:rPr sz="1000" b="1">
+                          <a:solidFill>
+                            <a:srgbClr val="FFFFFF"/>
+                          </a:solidFill>
+                          <a:latin typeface="メイリオ"/>
+                          <a:ea typeface="メイリオ"/>
+                        </a:rPr>
+                        <a:t>新機能</a:t>
+                      </a:r>
+                    </a:p>
+                  </a:txBody>
+                  <a:tcPr anchor="ctr">
+                    <a:solidFill>
+                      <a:srgbClr val="1F4E79"/>
+                    </a:solidFill>
+                  </a:tcPr>
+                </a:tc>
+                <a:tc>
+                  <a:txBody>
+                    <a:bodyPr/>
+                    <a:lstStyle/>
+                    <a:p>
+                      <a:pPr algn="ctr"/>
+                      <a:r>
+                        <a:rPr sz="1000" b="1">
+                          <a:solidFill>
+                            <a:srgbClr val="FFFFFF"/>
+                          </a:solidFill>
+                          <a:latin typeface="メイリオ"/>
+                          <a:ea typeface="メイリオ"/>
+                        </a:rPr>
+                        <a:t>できるようになること（例）</a:t>
+                      </a:r>
+                    </a:p>
+                  </a:txBody>
+                  <a:tcPr anchor="ctr">
+                    <a:solidFill>
+                      <a:srgbClr val="1F4E79"/>
+                    </a:solidFill>
+                  </a:tcPr>
+                </a:tc>
+              </a:tr>
+              <a:tr h="460000">
+                <a:tc>
+                  <a:txBody>
+                    <a:bodyPr/>
+                    <a:lstStyle/>
+                    <a:p>
+                      <a:pPr algn="l"/>
+                      <a:r>
+                        <a:rPr sz="900" b="1">
+                          <a:solidFill>
+                            <a:srgbClr val="333333"/>
+                          </a:solidFill>
+                          <a:latin typeface="メイリオ"/>
+                          <a:ea typeface="メイリオ"/>
+                        </a:rPr>
+                        <a:t>Rails 8.1</a:t>
+                      </a:r>
+                    </a:p>
+                  </a:txBody>
+                  <a:tcPr anchor="ctr"/>
+                </a:tc>
+                <a:tc>
+                  <a:txBody>
+                    <a:bodyPr/>
+                    <a:lstStyle/>
+                    <a:p>
+                      <a:pPr algn="l"/>
+                      <a:r>
+                        <a:rPr sz="900" b="0">
+                          <a:solidFill>
+                            <a:srgbClr val="333333"/>
+                          </a:solidFill>
+                          <a:latin typeface="メイリオ"/>
+                          <a:ea typeface="メイリオ"/>
+                        </a:rPr>
+                        <a:t>ジョブ途中再開
+（Active Job Continuations）</a:t>
+                      </a:r>
+                    </a:p>
+                  </a:txBody>
+                  <a:tcPr anchor="ctr"/>
+                </a:tc>
+                <a:tc>
+                  <a:txBody>
+                    <a:bodyPr/>
+                    <a:lstStyle/>
+                    <a:p>
+                      <a:pPr algn="l"/>
+                      <a:r>
+                        <a:rPr sz="900" b="0">
+                          <a:solidFill>
+                            <a:srgbClr val="333333"/>
+                          </a:solidFill>
+                          <a:latin typeface="メイリオ"/>
+                          <a:ea typeface="メイリオ"/>
+                        </a:rPr>
+                        <a:t>長い取込・同期バッチを、途中で止まっても最初からやり直さず再開できる</a:t>
+                      </a:r>
+                    </a:p>
+                  </a:txBody>
+                  <a:tcPr anchor="ctr"/>
+                </a:tc>
+              </a:tr>
+              <a:tr h="460000">
+                <a:tc>
+                  <a:txBody>
+                    <a:bodyPr/>
+                    <a:lstStyle/>
+                    <a:p>
+                      <a:pPr algn="l"/>
+                      <a:r>
+                        <a:rPr sz="900" b="1">
+                          <a:solidFill>
+                            <a:srgbClr val="333333"/>
+                          </a:solidFill>
+                          <a:latin typeface="メイリオ"/>
+                          <a:ea typeface="メイリオ"/>
+                        </a:rPr>
+                        <a:t>Rails 8.1</a:t>
+                      </a:r>
+                    </a:p>
+                  </a:txBody>
+                  <a:tcPr anchor="ctr">
+                    <a:solidFill>
+                      <a:srgbClr val="D6E3F0"/>
+                    </a:solidFill>
+                  </a:tcPr>
+                </a:tc>
+                <a:tc>
+                  <a:txBody>
+                    <a:bodyPr/>
+                    <a:lstStyle/>
+                    <a:p>
+                      <a:pPr algn="l"/>
+                      <a:r>
+                        <a:rPr sz="900" b="0">
+                          <a:solidFill>
+                            <a:srgbClr val="333333"/>
+                          </a:solidFill>
+                          <a:latin typeface="メイリオ"/>
+                          <a:ea typeface="メイリオ"/>
+                        </a:rPr>
+                        <a:t>構造化イベント通知
+（Event Reporter）</a:t>
+                      </a:r>
+                    </a:p>
+                  </a:txBody>
+                  <a:tcPr anchor="ctr">
+                    <a:solidFill>
+                      <a:srgbClr val="D6E3F0"/>
+                    </a:solidFill>
+                  </a:tcPr>
+                </a:tc>
+                <a:tc>
+                  <a:txBody>
+                    <a:bodyPr/>
+                    <a:lstStyle/>
+                    <a:p>
+                      <a:pPr algn="l"/>
+                      <a:r>
+                        <a:rPr sz="900" b="0">
+                          <a:solidFill>
+                            <a:srgbClr val="333333"/>
+                          </a:solidFill>
+                          <a:latin typeface="メイリオ"/>
+                          <a:ea typeface="メイリオ"/>
+                        </a:rPr>
+                        <a:t>「誰が・いつ・何をした」を機械可読イベントとして出せる（監視・追跡向け）</a:t>
+                      </a:r>
+                    </a:p>
+                  </a:txBody>
+                  <a:tcPr anchor="ctr">
+                    <a:solidFill>
+                      <a:srgbClr val="D6E3F0"/>
+                    </a:solidFill>
+                  </a:tcPr>
+                </a:tc>
+              </a:tr>
+              <a:tr h="460000">
+                <a:tc>
+                  <a:txBody>
+                    <a:bodyPr/>
+                    <a:lstStyle/>
+                    <a:p>
+                      <a:pPr algn="l"/>
+                      <a:r>
+                        <a:rPr sz="900" b="1">
+                          <a:solidFill>
+                            <a:srgbClr val="333333"/>
+                          </a:solidFill>
+                          <a:latin typeface="メイリオ"/>
+                          <a:ea typeface="メイリオ"/>
+                        </a:rPr>
+                        <a:t>Rails 8.1</a:t>
+                      </a:r>
+                    </a:p>
+                  </a:txBody>
+                  <a:tcPr anchor="ctr"/>
+                </a:tc>
+                <a:tc>
+                  <a:txBody>
+                    <a:bodyPr/>
+                    <a:lstStyle/>
+                    <a:p>
+                      <a:pPr algn="l"/>
+                      <a:r>
+                        <a:rPr sz="900" b="0">
+                          <a:solidFill>
+                            <a:srgbClr val="333333"/>
+                          </a:solidFill>
+                          <a:latin typeface="メイリオ"/>
+                          <a:ea typeface="メイリオ"/>
+                        </a:rPr>
+                        <a:t>Markdown標準描画</a:t>
+                      </a:r>
+                    </a:p>
+                  </a:txBody>
+                  <a:tcPr anchor="ctr"/>
+                </a:tc>
+                <a:tc>
+                  <a:txBody>
+                    <a:bodyPr/>
+                    <a:lstStyle/>
+                    <a:p>
+                      <a:pPr algn="l"/>
+                      <a:r>
+                        <a:rPr sz="900" b="0">
+                          <a:solidFill>
+                            <a:srgbClr val="333333"/>
+                          </a:solidFill>
+                          <a:latin typeface="メイリオ"/>
+                          <a:ea typeface="メイリオ"/>
+                        </a:rPr>
+                        <a:t>Markdownをそのまま画面／応答に使える（資料・AI連携の土台）</a:t>
+                      </a:r>
+                    </a:p>
+                  </a:txBody>
+                  <a:tcPr anchor="ctr"/>
+                </a:tc>
+              </a:tr>
+              <a:tr h="460000">
+                <a:tc>
+                  <a:txBody>
+                    <a:bodyPr/>
+                    <a:lstStyle/>
+                    <a:p>
+                      <a:pPr algn="l"/>
+                      <a:r>
+                        <a:rPr sz="900" b="1">
+                          <a:solidFill>
+                            <a:srgbClr val="333333"/>
+                          </a:solidFill>
+                          <a:latin typeface="メイリオ"/>
+                          <a:ea typeface="メイリオ"/>
+                        </a:rPr>
+                        <a:t>MariaDB 10.11</a:t>
+                      </a:r>
+                    </a:p>
+                  </a:txBody>
+                  <a:tcPr anchor="ctr">
+                    <a:solidFill>
+                      <a:srgbClr val="D6E3F0"/>
+                    </a:solidFill>
+                  </a:tcPr>
+                </a:tc>
+                <a:tc>
+                  <a:txBody>
+                    <a:bodyPr/>
+                    <a:lstStyle/>
+                    <a:p>
+                      <a:pPr algn="l"/>
+                      <a:r>
+                        <a:rPr sz="900" b="0">
+                          <a:solidFill>
+                            <a:srgbClr val="333333"/>
+                          </a:solidFill>
+                          <a:latin typeface="メイリオ"/>
+                          <a:ea typeface="メイリオ"/>
+                        </a:rPr>
+                        <a:t>UUID型／設定の動的変更</a:t>
+                      </a:r>
+                    </a:p>
+                  </a:txBody>
+                  <a:tcPr anchor="ctr">
+                    <a:solidFill>
+                      <a:srgbClr val="D6E3F0"/>
+                    </a:solidFill>
+                  </a:tcPr>
+                </a:tc>
+                <a:tc>
+                  <a:txBody>
+                    <a:bodyPr/>
+                    <a:lstStyle/>
+                    <a:p>
+                      <a:pPr algn="l"/>
+                      <a:r>
+                        <a:rPr sz="900" b="0">
+                          <a:solidFill>
+                            <a:srgbClr val="333333"/>
+                          </a:solidFill>
+                          <a:latin typeface="メイリオ"/>
+                          <a:ea typeface="メイリオ"/>
+                        </a:rPr>
+                        <a:t>UUIDをDB型として扱える／一部DB設定を再起動なしで変更できる</a:t>
+                      </a:r>
+                    </a:p>
+                  </a:txBody>
+                  <a:tcPr anchor="ctr">
+                    <a:solidFill>
+                      <a:srgbClr val="D6E3F0"/>
+                    </a:solidFill>
+                  </a:tcPr>
+                </a:tc>
+              </a:tr>
+            </a:tbl>
+          </a:graphicData>
+        </a:graphic>
+      </p:graphicFrame>
+      <p:sp>
+        <p:nvSpPr>
+          <p:cNvPr id="7" name="TextBox 6"/>
+          <p:cNvSpPr txBox="1"/>
+          <p:nvPr/>
+        </p:nvSpPr>
+        <p:spPr>
+          <a:xfrm>
+            <a:off x="700000" y="4950000"/>
+            <a:ext cx="8800000" cy="1500000"/>
+          </a:xfrm>
+          <a:prstGeom prst="rect">
+            <a:avLst/>
+          </a:prstGeom>
+          <a:noFill/>
+        </p:spPr>
+        <p:txBody>
+          <a:bodyPr wrap="square">
+            <a:spAutoFit/>
+          </a:bodyPr>
+          <a:lstStyle/>
           <a:p>
             <a:pPr>
               <a:spcBef>
@@ -12200,14 +12598,14 @@
               </a:spcAft>
             </a:pPr>
             <a:r>
-              <a:rPr sz="1100" b="0">
+              <a:rPr sz="1200" b="1">
                 <a:solidFill>
                   <a:srgbClr val="333333"/>
                 </a:solidFill>
                 <a:latin typeface="メイリオ"/>
                 <a:ea typeface="メイリオ"/>
               </a:rPr>
-              <a:t>【性能】Ruby YJIT強化・JSON処理高速化 → レスポンス改善の土台</a:t>
+              <a:t>■ 顧客適用／今後</a:t>
             </a:r>
           </a:p>
           <a:p>
@@ -12227,7 +12625,7 @@
                 <a:latin typeface="メイリオ"/>
                 <a:ea typeface="メイリオ"/>
               </a:rPr>
-              <a:t>【運用】Rails 8.1：長時間ジョブ継続・構造化イベント → バッチ／監視を強化しやすい</a:t>
+              <a:t>・キャンドゥ／ポディウム：提供準備完了、顧客都合待ち</a:t>
             </a:r>
           </a:p>
           <a:p>
@@ -12247,7 +12645,7 @@
                 <a:latin typeface="メイリオ"/>
                 <a:ea typeface="メイリオ"/>
               </a:rPr>
-              <a:t>【DB】MariaDB 10.11：オプティマイザ改善・動的InnoDB設定 → 大量データ／負荷時の安定性</a:t>
+              <a:t>・次：Ubuntu 22.04 → 24.04（8月末までにサーバー含め完了見込み）</a:t>
             </a:r>
           </a:p>
           <a:p>
@@ -12260,146 +12658,6 @@
               </a:spcAft>
             </a:pPr>
             <a:r>
-              <a:rPr sz="1100" b="0">
-                <a:solidFill>
-                  <a:srgbClr val="333333"/>
-                </a:solidFill>
-                <a:latin typeface="メイリオ"/>
-                <a:ea typeface="メイリオ"/>
-              </a:rPr>
-              <a:t>【開発】最新FWに乗ることで、今後の機能追加・改修スピードを上げる</a:t>
-            </a:r>
-          </a:p>
-          <a:p>
-            <a:pPr>
-              <a:spcBef>
-                <a:spcPts val="0"/>
-              </a:spcBef>
-              <a:spcAft>
-                <a:spcPts val="100"/>
-              </a:spcAft>
-            </a:pPr>
-            <a:r>
-              <a:rPr sz="1100" b="0">
-                <a:solidFill>
-                  <a:srgbClr val="333333"/>
-                </a:solidFill>
-                <a:latin typeface="メイリオ"/>
-                <a:ea typeface="メイリオ"/>
-              </a:rPr>
-              <a:t>【セキュア】セキュリティパッチ継続適用・古い依存の淘汰</a:t>
-            </a:r>
-          </a:p>
-          <a:p>
-            <a:pPr>
-              <a:spcBef>
-                <a:spcPts val="0"/>
-              </a:spcBef>
-              <a:spcAft>
-                <a:spcPts val="100"/>
-              </a:spcAft>
-            </a:pPr>
-            <a:r>
-              <a:rPr sz="600" b="0">
-                <a:solidFill>
-                  <a:srgbClr val="333333"/>
-                </a:solidFill>
-                <a:latin typeface="メイリオ"/>
-                <a:ea typeface="メイリオ"/>
-              </a:rPr>
-              <a:t/>
-            </a:r>
-          </a:p>
-          <a:p>
-            <a:pPr>
-              <a:spcBef>
-                <a:spcPts val="0"/>
-              </a:spcBef>
-              <a:spcAft>
-                <a:spcPts val="100"/>
-              </a:spcAft>
-            </a:pPr>
-            <a:r>
-              <a:rPr sz="1300" b="1">
-                <a:solidFill>
-                  <a:srgbClr val="333333"/>
-                </a:solidFill>
-                <a:latin typeface="メイリオ"/>
-                <a:ea typeface="メイリオ"/>
-              </a:rPr>
-              <a:t>■ 顧客適用／今後</a:t>
-            </a:r>
-          </a:p>
-          <a:p>
-            <a:pPr>
-              <a:spcBef>
-                <a:spcPts val="0"/>
-              </a:spcBef>
-              <a:spcAft>
-                <a:spcPts val="100"/>
-              </a:spcAft>
-            </a:pPr>
-            <a:r>
-              <a:rPr sz="1100" b="0">
-                <a:solidFill>
-                  <a:srgbClr val="333333"/>
-                </a:solidFill>
-                <a:latin typeface="メイリオ"/>
-                <a:ea typeface="メイリオ"/>
-              </a:rPr>
-              <a:t>・キャンドゥ／ポディウム：提供準備完了、顧客都合待ち</a:t>
-            </a:r>
-          </a:p>
-          <a:p>
-            <a:pPr>
-              <a:spcBef>
-                <a:spcPts val="0"/>
-              </a:spcBef>
-              <a:spcAft>
-                <a:spcPts val="100"/>
-              </a:spcAft>
-            </a:pPr>
-            <a:r>
-              <a:rPr sz="1100" b="0">
-                <a:solidFill>
-                  <a:srgbClr val="333333"/>
-                </a:solidFill>
-                <a:latin typeface="メイリオ"/>
-                <a:ea typeface="メイリオ"/>
-              </a:rPr>
-              <a:t>・次：Ubuntu 22.04 → 24.04（8月末までにサーバー含め完了見込み）</a:t>
-            </a:r>
-          </a:p>
-          <a:p>
-            <a:pPr>
-              <a:spcBef>
-                <a:spcPts val="0"/>
-              </a:spcBef>
-              <a:spcAft>
-                <a:spcPts val="100"/>
-              </a:spcAft>
-            </a:pPr>
-            <a:r>
-              <a:rPr sz="400" b="0">
-                <a:solidFill>
-                  <a:srgbClr val="333333"/>
-                </a:solidFill>
-                <a:latin typeface="メイリオ"/>
-                <a:ea typeface="メイリオ"/>
-              </a:rPr>
-              <a:t/>
-            </a:r>
-          </a:p>
-          <a:p>
-            <a:pPr>
-              <a:spcBef>
-                <a:spcPts val="0"/>
-              </a:spcBef>
-              <a:spcAft>
-                <a:spcPts val="100"/>
-              </a:spcAft>
-            </a:pPr>
-            <a:r>
               <a:rPr sz="1000" b="0">
                 <a:solidFill>
                   <a:srgbClr val="C00000"/>
@@ -12407,7 +12665,7 @@
                 <a:latin typeface="メイリオ"/>
                 <a:ea typeface="メイリオ"/>
               </a:rPr>
-              <a:t>※ 今回は基盤更新が主。画面の新機能追加というより「速く・安定・これから伸ばせる」土台づくり</a:t>
+              <a:t>※ 画面の新UI追加ではなく、基盤として“使える新機能”が増えた更新</a:t>
             </a:r>
           </a:p>
         </p:txBody>

--- a/docs/【EC】ECサービス部_2026年7月度部会_Ver1.1.pptx
+++ b/docs/【EC】ECサービス部_2026年7月度部会_Ver1.1.pptx
@@ -21,6 +21,7 @@
     <p:sldId id="261" r:id="rId15"/>
     <p:sldId id="1024" r:id="rId16"/>
     <p:sldId id="1026" r:id="rId17"/>
+    <p:sldId id="1029" r:id="rId30"/>
     <p:sldId id="264" r:id="rId18"/>
     <p:sldId id="1016" r:id="rId19"/>
     <p:sldId id="1025" r:id="rId20"/>
@@ -11726,8 +11727,8 @@
         </p:nvSpPr>
         <p:spPr>
           <a:xfrm>
-            <a:off x="700000" y="680000"/>
-            <a:ext cx="8800000" cy="300000"/>
+            <a:off x="650000" y="700000"/>
+            <a:ext cx="9000000" cy="260000"/>
           </a:xfrm>
           <a:prstGeom prst="rect">
             <a:avLst/>
@@ -11770,8 +11771,8 @@
           <p:nvPr/>
         </p:nvGraphicFramePr>
         <p:xfrm>
-          <a:off x="700000" y="980000"/>
-          <a:ext cx="8500000" cy="1180000"/>
+          <a:off x="650000" y="1000000"/>
+          <a:ext cx="8600000" cy="1400000"/>
         </p:xfrm>
         <a:graphic>
           <a:graphicData uri="http://schemas.openxmlformats.org/drawingml/2006/table">
@@ -11780,12 +11781,12 @@
                 <a:tableStyleId>{5C22544A-7EE6-4342-B048-85BDC9FD1C3A}</a:tableStyleId>
               </a:tblPr>
               <a:tblGrid>
-                <a:gridCol w="2125000"/>
-                <a:gridCol w="2125000"/>
-                <a:gridCol w="2125000"/>
-                <a:gridCol w="2125000"/>
+                <a:gridCol w="2150000"/>
+                <a:gridCol w="2150000"/>
+                <a:gridCol w="2150000"/>
+                <a:gridCol w="2150000"/>
               </a:tblGrid>
-              <a:tr h="295000">
+              <a:tr h="350000">
                 <a:tc>
                   <a:txBody>
                     <a:bodyPr/>
@@ -11883,7 +11884,7 @@
                   </a:tcPr>
                 </a:tc>
               </a:tr>
-              <a:tr h="295000">
+              <a:tr h="350000">
                 <a:tc>
                   <a:txBody>
                     <a:bodyPr/>
@@ -11891,7 +11892,7 @@
                     <a:p>
                       <a:pPr algn="l"/>
                       <a:r>
-                        <a:rPr sz="1100" b="0">
+                        <a:rPr sz="1200" b="0">
                           <a:solidFill>
                             <a:srgbClr val="333333"/>
                           </a:solidFill>
@@ -11911,7 +11912,7 @@
                     <a:p>
                       <a:pPr algn="ctr"/>
                       <a:r>
-                        <a:rPr sz="1100" b="0">
+                        <a:rPr sz="1200" b="0">
                           <a:solidFill>
                             <a:srgbClr val="333333"/>
                           </a:solidFill>
@@ -11931,7 +11932,7 @@
                     <a:p>
                       <a:pPr algn="ctr"/>
                       <a:r>
-                        <a:rPr sz="1100" b="1">
+                        <a:rPr sz="1200" b="1">
                           <a:solidFill>
                             <a:srgbClr val="333333"/>
                           </a:solidFill>
@@ -11951,7 +11952,7 @@
                     <a:p>
                       <a:pPr algn="ctr"/>
                       <a:r>
-                        <a:rPr sz="1100" b="0">
+                        <a:rPr sz="1200" b="0">
                           <a:solidFill>
                             <a:srgbClr val="333333"/>
                           </a:solidFill>
@@ -11965,7 +11966,7 @@
                   <a:tcPr anchor="ctr"/>
                 </a:tc>
               </a:tr>
-              <a:tr h="295000">
+              <a:tr h="350000">
                 <a:tc>
                   <a:txBody>
                     <a:bodyPr/>
@@ -11973,7 +11974,7 @@
                     <a:p>
                       <a:pPr algn="l"/>
                       <a:r>
-                        <a:rPr sz="1100" b="0">
+                        <a:rPr sz="1200" b="0">
                           <a:solidFill>
                             <a:srgbClr val="333333"/>
                           </a:solidFill>
@@ -11997,7 +11998,7 @@
                     <a:p>
                       <a:pPr algn="ctr"/>
                       <a:r>
-                        <a:rPr sz="1100" b="0">
+                        <a:rPr sz="1200" b="0">
                           <a:solidFill>
                             <a:srgbClr val="333333"/>
                           </a:solidFill>
@@ -12021,7 +12022,7 @@
                     <a:p>
                       <a:pPr algn="ctr"/>
                       <a:r>
-                        <a:rPr sz="1100" b="1">
+                        <a:rPr sz="1200" b="1">
                           <a:solidFill>
                             <a:srgbClr val="333333"/>
                           </a:solidFill>
@@ -12045,7 +12046,7 @@
                     <a:p>
                       <a:pPr algn="ctr"/>
                       <a:r>
-                        <a:rPr sz="1100" b="0">
+                        <a:rPr sz="1200" b="0">
                           <a:solidFill>
                             <a:srgbClr val="333333"/>
                           </a:solidFill>
@@ -12063,7 +12064,7 @@
                   </a:tcPr>
                 </a:tc>
               </a:tr>
-              <a:tr h="295000">
+              <a:tr h="350000">
                 <a:tc>
                   <a:txBody>
                     <a:bodyPr/>
@@ -12071,7 +12072,7 @@
                     <a:p>
                       <a:pPr algn="l"/>
                       <a:r>
-                        <a:rPr sz="1100" b="0">
+                        <a:rPr sz="1200" b="0">
                           <a:solidFill>
                             <a:srgbClr val="333333"/>
                           </a:solidFill>
@@ -12091,7 +12092,7 @@
                     <a:p>
                       <a:pPr algn="ctr"/>
                       <a:r>
-                        <a:rPr sz="1100" b="0">
+                        <a:rPr sz="1200" b="0">
                           <a:solidFill>
                             <a:srgbClr val="333333"/>
                           </a:solidFill>
@@ -12111,7 +12112,7 @@
                     <a:p>
                       <a:pPr algn="ctr"/>
                       <a:r>
-                        <a:rPr sz="1100" b="1">
+                        <a:rPr sz="1200" b="1">
                           <a:solidFill>
                             <a:srgbClr val="333333"/>
                           </a:solidFill>
@@ -12131,7 +12132,7 @@
                     <a:p>
                       <a:pPr algn="ctr"/>
                       <a:r>
-                        <a:rPr sz="1100" b="0">
+                        <a:rPr sz="1200" b="0">
                           <a:solidFill>
                             <a:srgbClr val="333333"/>
                           </a:solidFill>
@@ -12157,8 +12158,8 @@
         </p:nvSpPr>
         <p:spPr>
           <a:xfrm>
-            <a:off x="700000" y="2250000"/>
-            <a:ext cx="8800000" cy="280000"/>
+            <a:off x="650000" y="2600000"/>
+            <a:ext cx="9000000" cy="3200000"/>
           </a:xfrm>
           <a:prstGeom prst="rect">
             <a:avLst/>
@@ -12180,414 +12181,16 @@
               </a:spcAft>
             </a:pPr>
             <a:r>
-              <a:rPr sz="1200" b="1">
+              <a:rPr sz="1400" b="1">
                 <a:solidFill>
-                  <a:srgbClr val="C00000"/>
+                  <a:srgbClr val="333333"/>
                 </a:solidFill>
                 <a:latin typeface="メイリオ"/>
                 <a:ea typeface="メイリオ"/>
               </a:rPr>
-              <a:t>■ 今回のVUで“新しくできること”（真新しい機能のピックアップ）</a:t>
-            </a:r>
-          </a:p>
-        </p:txBody>
-      </p:sp>
-      <p:graphicFrame>
-        <p:nvGraphicFramePr>
-          <p:cNvPr id="6" name="Table 5"/>
-          <p:cNvGraphicFramePr>
-            <a:graphicFrameLocks noGrp="1"/>
-          </p:cNvGraphicFramePr>
-          <p:nvPr/>
-        </p:nvGraphicFramePr>
-        <p:xfrm>
-          <a:off x="700000" y="2550000"/>
-          <a:ext cx="8500000" cy="2300000"/>
-        </p:xfrm>
-        <a:graphic>
-          <a:graphicData uri="http://schemas.openxmlformats.org/drawingml/2006/table">
-            <a:tbl>
-              <a:tblPr firstRow="1" bandRow="1">
-                <a:tableStyleId>{5C22544A-7EE6-4342-B048-85BDC9FD1C3A}</a:tableStyleId>
-              </a:tblPr>
-              <a:tblGrid>
-                <a:gridCol w="1500000"/>
-                <a:gridCol w="2800000"/>
-                <a:gridCol w="4200000"/>
-              </a:tblGrid>
-              <a:tr h="460000">
-                <a:tc>
-                  <a:txBody>
-                    <a:bodyPr/>
-                    <a:lstStyle/>
-                    <a:p>
-                      <a:pPr algn="ctr"/>
-                      <a:r>
-                        <a:rPr sz="1000" b="1">
-                          <a:solidFill>
-                            <a:srgbClr val="FFFFFF"/>
-                          </a:solidFill>
-                          <a:latin typeface="メイリオ"/>
-                          <a:ea typeface="メイリオ"/>
-                        </a:rPr>
-                        <a:t>領域</a:t>
-                      </a:r>
-                    </a:p>
-                  </a:txBody>
-                  <a:tcPr anchor="ctr">
-                    <a:solidFill>
-                      <a:srgbClr val="1F4E79"/>
-                    </a:solidFill>
-                  </a:tcPr>
-                </a:tc>
-                <a:tc>
-                  <a:txBody>
-                    <a:bodyPr/>
-                    <a:lstStyle/>
-                    <a:p>
-                      <a:pPr algn="ctr"/>
-                      <a:r>
-                        <a:rPr sz="1000" b="1">
-                          <a:solidFill>
-                            <a:srgbClr val="FFFFFF"/>
-                          </a:solidFill>
-                          <a:latin typeface="メイリオ"/>
-                          <a:ea typeface="メイリオ"/>
-                        </a:rPr>
-                        <a:t>新機能</a:t>
-                      </a:r>
-                    </a:p>
-                  </a:txBody>
-                  <a:tcPr anchor="ctr">
-                    <a:solidFill>
-                      <a:srgbClr val="1F4E79"/>
-                    </a:solidFill>
-                  </a:tcPr>
-                </a:tc>
-                <a:tc>
-                  <a:txBody>
-                    <a:bodyPr/>
-                    <a:lstStyle/>
-                    <a:p>
-                      <a:pPr algn="ctr"/>
-                      <a:r>
-                        <a:rPr sz="1000" b="1">
-                          <a:solidFill>
-                            <a:srgbClr val="FFFFFF"/>
-                          </a:solidFill>
-                          <a:latin typeface="メイリオ"/>
-                          <a:ea typeface="メイリオ"/>
-                        </a:rPr>
-                        <a:t>できるようになること（例）</a:t>
-                      </a:r>
-                    </a:p>
-                  </a:txBody>
-                  <a:tcPr anchor="ctr">
-                    <a:solidFill>
-                      <a:srgbClr val="1F4E79"/>
-                    </a:solidFill>
-                  </a:tcPr>
-                </a:tc>
-              </a:tr>
-              <a:tr h="460000">
-                <a:tc>
-                  <a:txBody>
-                    <a:bodyPr/>
-                    <a:lstStyle/>
-                    <a:p>
-                      <a:pPr algn="l"/>
-                      <a:r>
-                        <a:rPr sz="900" b="1">
-                          <a:solidFill>
-                            <a:srgbClr val="333333"/>
-                          </a:solidFill>
-                          <a:latin typeface="メイリオ"/>
-                          <a:ea typeface="メイリオ"/>
-                        </a:rPr>
-                        <a:t>Rails 8.1</a:t>
-                      </a:r>
-                    </a:p>
-                  </a:txBody>
-                  <a:tcPr anchor="ctr"/>
-                </a:tc>
-                <a:tc>
-                  <a:txBody>
-                    <a:bodyPr/>
-                    <a:lstStyle/>
-                    <a:p>
-                      <a:pPr algn="l"/>
-                      <a:r>
-                        <a:rPr sz="900" b="0">
-                          <a:solidFill>
-                            <a:srgbClr val="333333"/>
-                          </a:solidFill>
-                          <a:latin typeface="メイリオ"/>
-                          <a:ea typeface="メイリオ"/>
-                        </a:rPr>
-                        <a:t>ジョブ途中再開
-（Active Job Continuations）</a:t>
-                      </a:r>
-                    </a:p>
-                  </a:txBody>
-                  <a:tcPr anchor="ctr"/>
-                </a:tc>
-                <a:tc>
-                  <a:txBody>
-                    <a:bodyPr/>
-                    <a:lstStyle/>
-                    <a:p>
-                      <a:pPr algn="l"/>
-                      <a:r>
-                        <a:rPr sz="900" b="0">
-                          <a:solidFill>
-                            <a:srgbClr val="333333"/>
-                          </a:solidFill>
-                          <a:latin typeface="メイリオ"/>
-                          <a:ea typeface="メイリオ"/>
-                        </a:rPr>
-                        <a:t>長い取込・同期バッチを、途中で止まっても最初からやり直さず再開できる</a:t>
-                      </a:r>
-                    </a:p>
-                  </a:txBody>
-                  <a:tcPr anchor="ctr"/>
-                </a:tc>
-              </a:tr>
-              <a:tr h="460000">
-                <a:tc>
-                  <a:txBody>
-                    <a:bodyPr/>
-                    <a:lstStyle/>
-                    <a:p>
-                      <a:pPr algn="l"/>
-                      <a:r>
-                        <a:rPr sz="900" b="1">
-                          <a:solidFill>
-                            <a:srgbClr val="333333"/>
-                          </a:solidFill>
-                          <a:latin typeface="メイリオ"/>
-                          <a:ea typeface="メイリオ"/>
-                        </a:rPr>
-                        <a:t>Rails 8.1</a:t>
-                      </a:r>
-                    </a:p>
-                  </a:txBody>
-                  <a:tcPr anchor="ctr">
-                    <a:solidFill>
-                      <a:srgbClr val="D6E3F0"/>
-                    </a:solidFill>
-                  </a:tcPr>
-                </a:tc>
-                <a:tc>
-                  <a:txBody>
-                    <a:bodyPr/>
-                    <a:lstStyle/>
-                    <a:p>
-                      <a:pPr algn="l"/>
-                      <a:r>
-                        <a:rPr sz="900" b="0">
-                          <a:solidFill>
-                            <a:srgbClr val="333333"/>
-                          </a:solidFill>
-                          <a:latin typeface="メイリオ"/>
-                          <a:ea typeface="メイリオ"/>
-                        </a:rPr>
-                        <a:t>構造化イベント通知
-（Event Reporter）</a:t>
-                      </a:r>
-                    </a:p>
-                  </a:txBody>
-                  <a:tcPr anchor="ctr">
-                    <a:solidFill>
-                      <a:srgbClr val="D6E3F0"/>
-                    </a:solidFill>
-                  </a:tcPr>
-                </a:tc>
-                <a:tc>
-                  <a:txBody>
-                    <a:bodyPr/>
-                    <a:lstStyle/>
-                    <a:p>
-                      <a:pPr algn="l"/>
-                      <a:r>
-                        <a:rPr sz="900" b="0">
-                          <a:solidFill>
-                            <a:srgbClr val="333333"/>
-                          </a:solidFill>
-                          <a:latin typeface="メイリオ"/>
-                          <a:ea typeface="メイリオ"/>
-                        </a:rPr>
-                        <a:t>「誰が・いつ・何をした」を機械可読イベントとして出せる（監視・追跡向け）</a:t>
-                      </a:r>
-                    </a:p>
-                  </a:txBody>
-                  <a:tcPr anchor="ctr">
-                    <a:solidFill>
-                      <a:srgbClr val="D6E3F0"/>
-                    </a:solidFill>
-                  </a:tcPr>
-                </a:tc>
-              </a:tr>
-              <a:tr h="460000">
-                <a:tc>
-                  <a:txBody>
-                    <a:bodyPr/>
-                    <a:lstStyle/>
-                    <a:p>
-                      <a:pPr algn="l"/>
-                      <a:r>
-                        <a:rPr sz="900" b="1">
-                          <a:solidFill>
-                            <a:srgbClr val="333333"/>
-                          </a:solidFill>
-                          <a:latin typeface="メイリオ"/>
-                          <a:ea typeface="メイリオ"/>
-                        </a:rPr>
-                        <a:t>Rails 8.1</a:t>
-                      </a:r>
-                    </a:p>
-                  </a:txBody>
-                  <a:tcPr anchor="ctr"/>
-                </a:tc>
-                <a:tc>
-                  <a:txBody>
-                    <a:bodyPr/>
-                    <a:lstStyle/>
-                    <a:p>
-                      <a:pPr algn="l"/>
-                      <a:r>
-                        <a:rPr sz="900" b="0">
-                          <a:solidFill>
-                            <a:srgbClr val="333333"/>
-                          </a:solidFill>
-                          <a:latin typeface="メイリオ"/>
-                          <a:ea typeface="メイリオ"/>
-                        </a:rPr>
-                        <a:t>Markdown標準描画</a:t>
-                      </a:r>
-                    </a:p>
-                  </a:txBody>
-                  <a:tcPr anchor="ctr"/>
-                </a:tc>
-                <a:tc>
-                  <a:txBody>
-                    <a:bodyPr/>
-                    <a:lstStyle/>
-                    <a:p>
-                      <a:pPr algn="l"/>
-                      <a:r>
-                        <a:rPr sz="900" b="0">
-                          <a:solidFill>
-                            <a:srgbClr val="333333"/>
-                          </a:solidFill>
-                          <a:latin typeface="メイリオ"/>
-                          <a:ea typeface="メイリオ"/>
-                        </a:rPr>
-                        <a:t>Markdownをそのまま画面／応答に使える（資料・AI連携の土台）</a:t>
-                      </a:r>
-                    </a:p>
-                  </a:txBody>
-                  <a:tcPr anchor="ctr"/>
-                </a:tc>
-              </a:tr>
-              <a:tr h="460000">
-                <a:tc>
-                  <a:txBody>
-                    <a:bodyPr/>
-                    <a:lstStyle/>
-                    <a:p>
-                      <a:pPr algn="l"/>
-                      <a:r>
-                        <a:rPr sz="900" b="1">
-                          <a:solidFill>
-                            <a:srgbClr val="333333"/>
-                          </a:solidFill>
-                          <a:latin typeface="メイリオ"/>
-                          <a:ea typeface="メイリオ"/>
-                        </a:rPr>
-                        <a:t>MariaDB 10.11</a:t>
-                      </a:r>
-                    </a:p>
-                  </a:txBody>
-                  <a:tcPr anchor="ctr">
-                    <a:solidFill>
-                      <a:srgbClr val="D6E3F0"/>
-                    </a:solidFill>
-                  </a:tcPr>
-                </a:tc>
-                <a:tc>
-                  <a:txBody>
-                    <a:bodyPr/>
-                    <a:lstStyle/>
-                    <a:p>
-                      <a:pPr algn="l"/>
-                      <a:r>
-                        <a:rPr sz="900" b="0">
-                          <a:solidFill>
-                            <a:srgbClr val="333333"/>
-                          </a:solidFill>
-                          <a:latin typeface="メイリオ"/>
-                          <a:ea typeface="メイリオ"/>
-                        </a:rPr>
-                        <a:t>UUID型／設定の動的変更</a:t>
-                      </a:r>
-                    </a:p>
-                  </a:txBody>
-                  <a:tcPr anchor="ctr">
-                    <a:solidFill>
-                      <a:srgbClr val="D6E3F0"/>
-                    </a:solidFill>
-                  </a:tcPr>
-                </a:tc>
-                <a:tc>
-                  <a:txBody>
-                    <a:bodyPr/>
-                    <a:lstStyle/>
-                    <a:p>
-                      <a:pPr algn="l"/>
-                      <a:r>
-                        <a:rPr sz="900" b="0">
-                          <a:solidFill>
-                            <a:srgbClr val="333333"/>
-                          </a:solidFill>
-                          <a:latin typeface="メイリオ"/>
-                          <a:ea typeface="メイリオ"/>
-                        </a:rPr>
-                        <a:t>UUIDをDB型として扱える／一部DB設定を再起動なしで変更できる</a:t>
-                      </a:r>
-                    </a:p>
-                  </a:txBody>
-                  <a:tcPr anchor="ctr">
-                    <a:solidFill>
-                      <a:srgbClr val="D6E3F0"/>
-                    </a:solidFill>
-                  </a:tcPr>
-                </a:tc>
-              </a:tr>
-            </a:tbl>
-          </a:graphicData>
-        </a:graphic>
-      </p:graphicFrame>
-      <p:sp>
-        <p:nvSpPr>
-          <p:cNvPr id="7" name="TextBox 6"/>
-          <p:cNvSpPr txBox="1"/>
-          <p:nvPr/>
-        </p:nvSpPr>
-        <p:spPr>
-          <a:xfrm>
-            <a:off x="700000" y="4950000"/>
-            <a:ext cx="8800000" cy="1500000"/>
-          </a:xfrm>
-          <a:prstGeom prst="rect">
-            <a:avLst/>
-          </a:prstGeom>
-          <a:noFill/>
-        </p:spPr>
-        <p:txBody>
-          <a:bodyPr wrap="square">
-            <a:spAutoFit/>
-          </a:bodyPr>
-          <a:lstStyle/>
+              <a:t>■ 顧客適用状況</a:t>
+            </a:r>
+          </a:p>
           <a:p>
             <a:pPr>
               <a:spcBef>
@@ -12598,14 +12201,14 @@
               </a:spcAft>
             </a:pPr>
             <a:r>
-              <a:rPr sz="1200" b="1">
+              <a:rPr sz="1300" b="0">
                 <a:solidFill>
                   <a:srgbClr val="333333"/>
                 </a:solidFill>
                 <a:latin typeface="メイリオ"/>
                 <a:ea typeface="メイリオ"/>
               </a:rPr>
-              <a:t>■ 顧客適用／今後</a:t>
+              <a:t>・リリース済み</a:t>
             </a:r>
           </a:p>
           <a:p>
@@ -12618,7 +12221,7 @@
               </a:spcAft>
             </a:pPr>
             <a:r>
-              <a:rPr sz="1100" b="0">
+              <a:rPr sz="1300" b="0">
                 <a:solidFill>
                   <a:srgbClr val="333333"/>
                 </a:solidFill>
@@ -12638,14 +12241,14 @@
               </a:spcAft>
             </a:pPr>
             <a:r>
-              <a:rPr sz="1100" b="0">
+              <a:rPr sz="800" b="0">
                 <a:solidFill>
                   <a:srgbClr val="333333"/>
                 </a:solidFill>
                 <a:latin typeface="メイリオ"/>
                 <a:ea typeface="メイリオ"/>
               </a:rPr>
-              <a:t>・次：Ubuntu 22.04 → 24.04（8月末までにサーバー含め完了見込み）</a:t>
+              <a:t/>
             </a:r>
           </a:p>
           <a:p>
@@ -12658,14 +12261,94 @@
               </a:spcAft>
             </a:pPr>
             <a:r>
-              <a:rPr sz="1000" b="0">
+              <a:rPr sz="1400" b="1">
+                <a:solidFill>
+                  <a:srgbClr val="333333"/>
+                </a:solidFill>
+                <a:latin typeface="メイリオ"/>
+                <a:ea typeface="メイリオ"/>
+              </a:rPr>
+              <a:t>■ 今後（OS）</a:t>
+            </a:r>
+          </a:p>
+          <a:p>
+            <a:pPr>
+              <a:spcBef>
+                <a:spcPts val="0"/>
+              </a:spcBef>
+              <a:spcAft>
+                <a:spcPts val="100"/>
+              </a:spcAft>
+            </a:pPr>
+            <a:r>
+              <a:rPr sz="1300" b="0">
+                <a:solidFill>
+                  <a:srgbClr val="333333"/>
+                </a:solidFill>
+                <a:latin typeface="メイリオ"/>
+                <a:ea typeface="メイリオ"/>
+              </a:rPr>
+              <a:t>・Ubuntu 22.04 → 24.04 を実施中</a:t>
+            </a:r>
+          </a:p>
+          <a:p>
+            <a:pPr>
+              <a:spcBef>
+                <a:spcPts val="0"/>
+              </a:spcBef>
+              <a:spcAft>
+                <a:spcPts val="100"/>
+              </a:spcAft>
+            </a:pPr>
+            <a:r>
+              <a:rPr sz="1300" b="0">
                 <a:solidFill>
                   <a:srgbClr val="C00000"/>
                 </a:solidFill>
                 <a:latin typeface="メイリオ"/>
                 <a:ea typeface="メイリオ"/>
               </a:rPr>
-              <a:t>※ 画面の新UI追加ではなく、基盤として“使える新機能”が増えた更新</a:t>
+              <a:t>・8月末までにサーバー含め完了見込み</a:t>
+            </a:r>
+          </a:p>
+          <a:p>
+            <a:pPr>
+              <a:spcBef>
+                <a:spcPts val="0"/>
+              </a:spcBef>
+              <a:spcAft>
+                <a:spcPts val="100"/>
+              </a:spcAft>
+            </a:pPr>
+            <a:r>
+              <a:rPr sz="800" b="0">
+                <a:solidFill>
+                  <a:srgbClr val="333333"/>
+                </a:solidFill>
+                <a:latin typeface="メイリオ"/>
+                <a:ea typeface="メイリオ"/>
+              </a:rPr>
+              <a:t/>
+            </a:r>
+          </a:p>
+          <a:p>
+            <a:pPr>
+              <a:spcBef>
+                <a:spcPts val="0"/>
+              </a:spcBef>
+              <a:spcAft>
+                <a:spcPts val="100"/>
+              </a:spcAft>
+            </a:pPr>
+            <a:r>
+              <a:rPr sz="1300" b="0">
+                <a:solidFill>
+                  <a:srgbClr val="C00000"/>
+                </a:solidFill>
+                <a:latin typeface="メイリオ"/>
+                <a:ea typeface="メイリオ"/>
+              </a:rPr>
+              <a:t>→ 次ページ：どのアップデートで何ができて、今後どう使えるか</a:t>
             </a:r>
           </a:p>
         </p:txBody>
@@ -16936,6 +16619,765 @@
   <p:transition>
     <p:fade/>
   </p:transition>
+</p:sld>
+</file>
+
+<file path=ppt/slides/slide21.xml><?xml version="1.0" encoding="utf-8"?>
+<p:sld xmlns:a="http://schemas.openxmlformats.org/drawingml/2006/main" xmlns:p="http://schemas.openxmlformats.org/presentationml/2006/main" xmlns:r="http://schemas.openxmlformats.org/officeDocument/2006/relationships">
+  <p:cSld>
+    <p:spTree>
+      <p:nvGrpSpPr>
+        <p:cNvPr id="1" name=""/>
+        <p:cNvGrpSpPr/>
+        <p:nvPr/>
+      </p:nvGrpSpPr>
+      <p:grpSpPr/>
+      <p:sp>
+        <p:nvSpPr>
+          <p:cNvPr id="2" name="Google Shape;152;p7">
+            <a:extLst>
+              <a:ext uri="{FF2B5EF4-FFF2-40B4-BE49-F238E27FC236}">
+                <a16:creationId xmlns:a16="http://schemas.microsoft.com/office/drawing/2014/main" id="{7C0885C2-88AC-DAC0-C4FE-135C29624CDD}"/>
+              </a:ext>
+            </a:extLst>
+          </p:cNvPr>
+          <p:cNvSpPr txBox="1">
+            <a:spLocks noGrp="1"/>
+          </p:cNvSpPr>
+          <p:nvPr>
+            <p:ph type="title"/>
+          </p:nvPr>
+        </p:nvSpPr>
+        <p:spPr>
+          <a:xfrm>
+            <a:off x="835852" y="142852"/>
+            <a:ext cx="8915400" cy="582594"/>
+          </a:xfrm>
+          <a:prstGeom prst="rect">
+            <a:avLst/>
+          </a:prstGeom>
+          <a:noFill/>
+          <a:ln>
+            <a:noFill/>
+          </a:ln>
+        </p:spPr>
+        <p:txBody>
+          <a:bodyPr spcFirstLastPara="1" wrap="square" lIns="91425" tIns="45700" rIns="91425" bIns="45700" anchor="b" anchorCtr="0">
+            <a:noAutofit/>
+          </a:bodyPr>
+          <a:lstStyle/>
+          <a:p>
+            <a:pPr>
+              <a:lnSpc>
+                <a:spcPct val="130000"/>
+              </a:lnSpc>
+            </a:pPr>
+            <a:r>
+              <a:rPr sz="2000" b="0">
+                <a:solidFill>
+                  <a:srgbClr val="333333"/>
+                </a:solidFill>
+                <a:latin typeface="メイリオ"/>
+                <a:ea typeface="メイリオ"/>
+              </a:rPr>
+              <a:t>5. </a:t>
+            </a:r>
+            <a:r>
+              <a:rPr sz="1800" b="0">
+                <a:solidFill>
+                  <a:srgbClr val="333333"/>
+                </a:solidFill>
+                <a:latin typeface="メイリオ"/>
+                <a:ea typeface="メイリオ"/>
+              </a:rPr>
+              <a:t>新パッケージのバージョンアップ状況について　その２</a:t>
+            </a:r>
+            <a:endParaRPr lang="ja-JP" altLang="en-US" sz="2000" dirty="0">
+              <a:latin typeface="メイリオ" pitchFamily="50" charset="-128"/>
+              <a:ea typeface="メイリオ" pitchFamily="50" charset="-128"/>
+              <a:cs typeface="メイリオ" pitchFamily="50" charset="-128"/>
+            </a:endParaRPr>
+          </a:p>
+        </p:txBody>
+      </p:sp>
+      <p:sp>
+        <p:nvSpPr>
+          <p:cNvPr id="3" name="TextBox 2"/>
+          <p:cNvSpPr txBox="1"/>
+          <p:nvPr/>
+        </p:nvSpPr>
+        <p:spPr>
+          <a:xfrm>
+            <a:off x="450000" y="680000"/>
+            <a:ext cx="9200000" cy="300000"/>
+          </a:xfrm>
+          <a:prstGeom prst="rect">
+            <a:avLst/>
+          </a:prstGeom>
+          <a:noFill/>
+        </p:spPr>
+        <p:txBody>
+          <a:bodyPr wrap="square">
+            <a:spAutoFit/>
+          </a:bodyPr>
+          <a:lstStyle/>
+          <a:p>
+            <a:pPr>
+              <a:spcBef>
+                <a:spcPts val="0"/>
+              </a:spcBef>
+              <a:spcAft>
+                <a:spcPts val="100"/>
+              </a:spcAft>
+            </a:pPr>
+            <a:r>
+              <a:rPr sz="1300" b="1">
+                <a:solidFill>
+                  <a:srgbClr val="C00000"/>
+                </a:solidFill>
+                <a:latin typeface="メイリオ"/>
+                <a:ea typeface="メイリオ"/>
+              </a:rPr>
+              <a:t>どのアップデートで → 何ができて → 今後どう使えるか</a:t>
+            </a:r>
+          </a:p>
+        </p:txBody>
+      </p:sp>
+      <p:graphicFrame>
+        <p:nvGraphicFramePr>
+          <p:cNvPr id="4" name="Table 3"/>
+          <p:cNvGraphicFramePr>
+            <a:graphicFrameLocks noGrp="1"/>
+          </p:cNvGraphicFramePr>
+          <p:nvPr/>
+        </p:nvGraphicFramePr>
+        <p:xfrm>
+          <a:off x="350000" y="1000000"/>
+          <a:ext cx="9200000" cy="5200000"/>
+        </p:xfrm>
+        <a:graphic>
+          <a:graphicData uri="http://schemas.openxmlformats.org/drawingml/2006/table">
+            <a:tbl>
+              <a:tblPr firstRow="1" bandRow="1">
+                <a:tableStyleId>{5C22544A-7EE6-4342-B048-85BDC9FD1C3A}</a:tableStyleId>
+              </a:tblPr>
+              <a:tblGrid>
+                <a:gridCol w="1400000"/>
+                <a:gridCol w="2300000"/>
+                <a:gridCol w="2700000"/>
+                <a:gridCol w="2800000"/>
+              </a:tblGrid>
+              <a:tr h="866666">
+                <a:tc>
+                  <a:txBody>
+                    <a:bodyPr/>
+                    <a:lstStyle/>
+                    <a:p>
+                      <a:pPr algn="ctr"/>
+                      <a:r>
+                        <a:rPr sz="1100" b="1">
+                          <a:solidFill>
+                            <a:srgbClr val="FFFFFF"/>
+                          </a:solidFill>
+                          <a:latin typeface="メイリオ"/>
+                          <a:ea typeface="メイリオ"/>
+                        </a:rPr>
+                        <a:t>アップデート</a:t>
+                      </a:r>
+                    </a:p>
+                  </a:txBody>
+                  <a:tcPr anchor="ctr">
+                    <a:solidFill>
+                      <a:srgbClr val="1F4E79"/>
+                    </a:solidFill>
+                  </a:tcPr>
+                </a:tc>
+                <a:tc>
+                  <a:txBody>
+                    <a:bodyPr/>
+                    <a:lstStyle/>
+                    <a:p>
+                      <a:pPr algn="ctr"/>
+                      <a:r>
+                        <a:rPr sz="1100" b="1">
+                          <a:solidFill>
+                            <a:srgbClr val="FFFFFF"/>
+                          </a:solidFill>
+                          <a:latin typeface="メイリオ"/>
+                          <a:ea typeface="メイリオ"/>
+                        </a:rPr>
+                        <a:t>新機能</a:t>
+                      </a:r>
+                    </a:p>
+                  </a:txBody>
+                  <a:tcPr anchor="ctr">
+                    <a:solidFill>
+                      <a:srgbClr val="1F4E79"/>
+                    </a:solidFill>
+                  </a:tcPr>
+                </a:tc>
+                <a:tc>
+                  <a:txBody>
+                    <a:bodyPr/>
+                    <a:lstStyle/>
+                    <a:p>
+                      <a:pPr algn="ctr"/>
+                      <a:r>
+                        <a:rPr sz="1100" b="1">
+                          <a:solidFill>
+                            <a:srgbClr val="FFFFFF"/>
+                          </a:solidFill>
+                          <a:latin typeface="メイリオ"/>
+                          <a:ea typeface="メイリオ"/>
+                        </a:rPr>
+                        <a:t>できるようになること</a:t>
+                      </a:r>
+                    </a:p>
+                  </a:txBody>
+                  <a:tcPr anchor="ctr">
+                    <a:solidFill>
+                      <a:srgbClr val="1F4E79"/>
+                    </a:solidFill>
+                  </a:tcPr>
+                </a:tc>
+                <a:tc>
+                  <a:txBody>
+                    <a:bodyPr/>
+                    <a:lstStyle/>
+                    <a:p>
+                      <a:pPr algn="ctr"/>
+                      <a:r>
+                        <a:rPr sz="1100" b="1">
+                          <a:solidFill>
+                            <a:srgbClr val="FFFFFF"/>
+                          </a:solidFill>
+                          <a:latin typeface="メイリオ"/>
+                          <a:ea typeface="メイリオ"/>
+                        </a:rPr>
+                        <a:t>今後の活用イメージ</a:t>
+                      </a:r>
+                    </a:p>
+                  </a:txBody>
+                  <a:tcPr anchor="ctr">
+                    <a:solidFill>
+                      <a:srgbClr val="1F4E79"/>
+                    </a:solidFill>
+                  </a:tcPr>
+                </a:tc>
+              </a:tr>
+              <a:tr h="866666">
+                <a:tc>
+                  <a:txBody>
+                    <a:bodyPr/>
+                    <a:lstStyle/>
+                    <a:p>
+                      <a:pPr algn="l"/>
+                      <a:r>
+                        <a:rPr sz="1000" b="1">
+                          <a:solidFill>
+                            <a:srgbClr val="333333"/>
+                          </a:solidFill>
+                          <a:latin typeface="メイリオ"/>
+                          <a:ea typeface="メイリオ"/>
+                        </a:rPr>
+                        <a:t>Ruby
+3.2→3.4</a:t>
+                      </a:r>
+                    </a:p>
+                  </a:txBody>
+                  <a:tcPr anchor="ctr"/>
+                </a:tc>
+                <a:tc>
+                  <a:txBody>
+                    <a:bodyPr/>
+                    <a:lstStyle/>
+                    <a:p>
+                      <a:pPr algn="l"/>
+                      <a:r>
+                        <a:rPr sz="1000" b="0">
+                          <a:solidFill>
+                            <a:srgbClr val="333333"/>
+                          </a:solidFill>
+                          <a:latin typeface="メイリオ"/>
+                          <a:ea typeface="メイリオ"/>
+                        </a:rPr>
+                        <a:t>外部接続の改善
+(Happy Eyeballs v2)</a:t>
+                      </a:r>
+                    </a:p>
+                  </a:txBody>
+                  <a:tcPr anchor="ctr"/>
+                </a:tc>
+                <a:tc>
+                  <a:txBody>
+                    <a:bodyPr/>
+                    <a:lstStyle/>
+                    <a:p>
+                      <a:pPr algn="l"/>
+                      <a:r>
+                        <a:rPr sz="1000" b="0">
+                          <a:solidFill>
+                            <a:srgbClr val="333333"/>
+                          </a:solidFill>
+                          <a:latin typeface="メイリオ"/>
+                          <a:ea typeface="メイリオ"/>
+                        </a:rPr>
+                        <a:t>IPv4/IPv6を並行して接続試行し、
+外部通信の確立をより確実にできる</a:t>
+                      </a:r>
+                    </a:p>
+                  </a:txBody>
+                  <a:tcPr anchor="ctr"/>
+                </a:tc>
+                <a:tc>
+                  <a:txBody>
+                    <a:bodyPr/>
+                    <a:lstStyle/>
+                    <a:p>
+                      <a:pPr algn="l"/>
+                      <a:r>
+                        <a:rPr sz="1000" b="0">
+                          <a:solidFill>
+                            <a:srgbClr val="333333"/>
+                          </a:solidFill>
+                          <a:latin typeface="メイリオ"/>
+                          <a:ea typeface="メイリオ"/>
+                        </a:rPr>
+                        <a:t>基幹・決済・配送など外部API連携の
+接続まわりを安定させやすい</a:t>
+                      </a:r>
+                    </a:p>
+                  </a:txBody>
+                  <a:tcPr anchor="ctr"/>
+                </a:tc>
+              </a:tr>
+              <a:tr h="866666">
+                <a:tc>
+                  <a:txBody>
+                    <a:bodyPr/>
+                    <a:lstStyle/>
+                    <a:p>
+                      <a:pPr algn="l"/>
+                      <a:r>
+                        <a:rPr sz="1000" b="1">
+                          <a:solidFill>
+                            <a:srgbClr val="333333"/>
+                          </a:solidFill>
+                          <a:latin typeface="メイリオ"/>
+                          <a:ea typeface="メイリオ"/>
+                        </a:rPr>
+                        <a:t>Rails
+7.2→8.1</a:t>
+                      </a:r>
+                    </a:p>
+                  </a:txBody>
+                  <a:tcPr anchor="ctr">
+                    <a:solidFill>
+                      <a:srgbClr val="D6E3F0"/>
+                    </a:solidFill>
+                  </a:tcPr>
+                </a:tc>
+                <a:tc>
+                  <a:txBody>
+                    <a:bodyPr/>
+                    <a:lstStyle/>
+                    <a:p>
+                      <a:pPr algn="l"/>
+                      <a:r>
+                        <a:rPr sz="1000" b="0">
+                          <a:solidFill>
+                            <a:srgbClr val="333333"/>
+                          </a:solidFill>
+                          <a:latin typeface="メイリオ"/>
+                          <a:ea typeface="メイリオ"/>
+                        </a:rPr>
+                        <a:t>ジョブ途中再開
+(Active Job Continuations)</a:t>
+                      </a:r>
+                    </a:p>
+                  </a:txBody>
+                  <a:tcPr anchor="ctr">
+                    <a:solidFill>
+                      <a:srgbClr val="D6E3F0"/>
+                    </a:solidFill>
+                  </a:tcPr>
+                </a:tc>
+                <a:tc>
+                  <a:txBody>
+                    <a:bodyPr/>
+                    <a:lstStyle/>
+                    <a:p>
+                      <a:pPr algn="l"/>
+                      <a:r>
+                        <a:rPr sz="1000" b="0">
+                          <a:solidFill>
+                            <a:srgbClr val="333333"/>
+                          </a:solidFill>
+                          <a:latin typeface="メイリオ"/>
+                          <a:ea typeface="メイリオ"/>
+                        </a:rPr>
+                        <a:t>長いバッチを途中で止めても、
+最初からやり直さず再開できる</a:t>
+                      </a:r>
+                    </a:p>
+                  </a:txBody>
+                  <a:tcPr anchor="ctr">
+                    <a:solidFill>
+                      <a:srgbClr val="D6E3F0"/>
+                    </a:solidFill>
+                  </a:tcPr>
+                </a:tc>
+                <a:tc>
+                  <a:txBody>
+                    <a:bodyPr/>
+                    <a:lstStyle/>
+                    <a:p>
+                      <a:pPr algn="l"/>
+                      <a:r>
+                        <a:rPr sz="1000" b="0">
+                          <a:solidFill>
+                            <a:srgbClr val="333333"/>
+                          </a:solidFill>
+                          <a:latin typeface="メイリオ"/>
+                          <a:ea typeface="メイリオ"/>
+                        </a:rPr>
+                        <a:t>受注取込・在庫同期・帳票一括など
+夜間処理の安定運用に使える</a:t>
+                      </a:r>
+                    </a:p>
+                  </a:txBody>
+                  <a:tcPr anchor="ctr">
+                    <a:solidFill>
+                      <a:srgbClr val="D6E3F0"/>
+                    </a:solidFill>
+                  </a:tcPr>
+                </a:tc>
+              </a:tr>
+              <a:tr h="866666">
+                <a:tc>
+                  <a:txBody>
+                    <a:bodyPr/>
+                    <a:lstStyle/>
+                    <a:p>
+                      <a:pPr algn="l"/>
+                      <a:r>
+                        <a:rPr sz="1000" b="1">
+                          <a:solidFill>
+                            <a:srgbClr val="333333"/>
+                          </a:solidFill>
+                          <a:latin typeface="メイリオ"/>
+                          <a:ea typeface="メイリオ"/>
+                        </a:rPr>
+                        <a:t>Rails
+7.2→8.1</a:t>
+                      </a:r>
+                    </a:p>
+                  </a:txBody>
+                  <a:tcPr anchor="ctr"/>
+                </a:tc>
+                <a:tc>
+                  <a:txBody>
+                    <a:bodyPr/>
+                    <a:lstStyle/>
+                    <a:p>
+                      <a:pPr algn="l"/>
+                      <a:r>
+                        <a:rPr sz="1000" b="0">
+                          <a:solidFill>
+                            <a:srgbClr val="333333"/>
+                          </a:solidFill>
+                          <a:latin typeface="メイリオ"/>
+                          <a:ea typeface="メイリオ"/>
+                        </a:rPr>
+                        <a:t>構造化イベント通知
+(Event Reporter)</a:t>
+                      </a:r>
+                    </a:p>
+                  </a:txBody>
+                  <a:tcPr anchor="ctr"/>
+                </a:tc>
+                <a:tc>
+                  <a:txBody>
+                    <a:bodyPr/>
+                    <a:lstStyle/>
+                    <a:p>
+                      <a:pPr algn="l"/>
+                      <a:r>
+                        <a:rPr sz="1000" b="0">
+                          <a:solidFill>
+                            <a:srgbClr val="333333"/>
+                          </a:solidFill>
+                          <a:latin typeface="メイリオ"/>
+                          <a:ea typeface="メイリオ"/>
+                        </a:rPr>
+                        <a:t>「誰が・いつ・何をした」を
+機械可読イベントとして出せる</a:t>
+                      </a:r>
+                    </a:p>
+                  </a:txBody>
+                  <a:tcPr anchor="ctr"/>
+                </a:tc>
+                <a:tc>
+                  <a:txBody>
+                    <a:bodyPr/>
+                    <a:lstStyle/>
+                    <a:p>
+                      <a:pPr algn="l"/>
+                      <a:r>
+                        <a:rPr sz="1000" b="0">
+                          <a:solidFill>
+                            <a:srgbClr val="333333"/>
+                          </a:solidFill>
+                          <a:latin typeface="メイリオ"/>
+                          <a:ea typeface="メイリオ"/>
+                        </a:rPr>
+                        <a:t>監査ログ／障害調査／監視連携で
+運用品質と説明責任を強化できる</a:t>
+                      </a:r>
+                    </a:p>
+                  </a:txBody>
+                  <a:tcPr anchor="ctr"/>
+                </a:tc>
+              </a:tr>
+              <a:tr h="866666">
+                <a:tc>
+                  <a:txBody>
+                    <a:bodyPr/>
+                    <a:lstStyle/>
+                    <a:p>
+                      <a:pPr algn="l"/>
+                      <a:r>
+                        <a:rPr sz="1000" b="1">
+                          <a:solidFill>
+                            <a:srgbClr val="333333"/>
+                          </a:solidFill>
+                          <a:latin typeface="メイリオ"/>
+                          <a:ea typeface="メイリオ"/>
+                        </a:rPr>
+                        <a:t>Rails
+7.2→8.1</a:t>
+                      </a:r>
+                    </a:p>
+                  </a:txBody>
+                  <a:tcPr anchor="ctr">
+                    <a:solidFill>
+                      <a:srgbClr val="D6E3F0"/>
+                    </a:solidFill>
+                  </a:tcPr>
+                </a:tc>
+                <a:tc>
+                  <a:txBody>
+                    <a:bodyPr/>
+                    <a:lstStyle/>
+                    <a:p>
+                      <a:pPr algn="l"/>
+                      <a:r>
+                        <a:rPr sz="1000" b="0">
+                          <a:solidFill>
+                            <a:srgbClr val="333333"/>
+                          </a:solidFill>
+                          <a:latin typeface="メイリオ"/>
+                          <a:ea typeface="メイリオ"/>
+                        </a:rPr>
+                        <a:t>Markdown標準描画</a:t>
+                      </a:r>
+                    </a:p>
+                  </a:txBody>
+                  <a:tcPr anchor="ctr">
+                    <a:solidFill>
+                      <a:srgbClr val="D6E3F0"/>
+                    </a:solidFill>
+                  </a:tcPr>
+                </a:tc>
+                <a:tc>
+                  <a:txBody>
+                    <a:bodyPr/>
+                    <a:lstStyle/>
+                    <a:p>
+                      <a:pPr algn="l"/>
+                      <a:r>
+                        <a:rPr sz="1000" b="0">
+                          <a:solidFill>
+                            <a:srgbClr val="333333"/>
+                          </a:solidFill>
+                          <a:latin typeface="メイリオ"/>
+                          <a:ea typeface="メイリオ"/>
+                        </a:rPr>
+                        <a:t>Markdownをそのまま
+画面やAPI応答に使える</a:t>
+                      </a:r>
+                    </a:p>
+                  </a:txBody>
+                  <a:tcPr anchor="ctr">
+                    <a:solidFill>
+                      <a:srgbClr val="D6E3F0"/>
+                    </a:solidFill>
+                  </a:tcPr>
+                </a:tc>
+                <a:tc>
+                  <a:txBody>
+                    <a:bodyPr/>
+                    <a:lstStyle/>
+                    <a:p>
+                      <a:pPr algn="l"/>
+                      <a:r>
+                        <a:rPr sz="1000" b="0">
+                          <a:solidFill>
+                            <a:srgbClr val="333333"/>
+                          </a:solidFill>
+                          <a:latin typeface="メイリオ"/>
+                          <a:ea typeface="メイリオ"/>
+                        </a:rPr>
+                        <a:t>ヘルプ・提案資料・AI出力の表示基盤
+（Primo伴走支援の説明にも応用可）</a:t>
+                      </a:r>
+                    </a:p>
+                  </a:txBody>
+                  <a:tcPr anchor="ctr">
+                    <a:solidFill>
+                      <a:srgbClr val="D6E3F0"/>
+                    </a:solidFill>
+                  </a:tcPr>
+                </a:tc>
+              </a:tr>
+              <a:tr h="866670">
+                <a:tc>
+                  <a:txBody>
+                    <a:bodyPr/>
+                    <a:lstStyle/>
+                    <a:p>
+                      <a:pPr algn="l"/>
+                      <a:r>
+                        <a:rPr sz="1000" b="1">
+                          <a:solidFill>
+                            <a:srgbClr val="333333"/>
+                          </a:solidFill>
+                          <a:latin typeface="メイリオ"/>
+                          <a:ea typeface="メイリオ"/>
+                        </a:rPr>
+                        <a:t>MariaDB
+10.6→10.11</a:t>
+                      </a:r>
+                    </a:p>
+                  </a:txBody>
+                  <a:tcPr anchor="ctr"/>
+                </a:tc>
+                <a:tc>
+                  <a:txBody>
+                    <a:bodyPr/>
+                    <a:lstStyle/>
+                    <a:p>
+                      <a:pPr algn="l"/>
+                      <a:r>
+                        <a:rPr sz="1000" b="0">
+                          <a:solidFill>
+                            <a:srgbClr val="333333"/>
+                          </a:solidFill>
+                          <a:latin typeface="メイリオ"/>
+                          <a:ea typeface="メイリオ"/>
+                        </a:rPr>
+                        <a:t>UUID型
+／設定の動的変更</a:t>
+                      </a:r>
+                    </a:p>
+                  </a:txBody>
+                  <a:tcPr anchor="ctr"/>
+                </a:tc>
+                <a:tc>
+                  <a:txBody>
+                    <a:bodyPr/>
+                    <a:lstStyle/>
+                    <a:p>
+                      <a:pPr algn="l"/>
+                      <a:r>
+                        <a:rPr sz="1000" b="0">
+                          <a:solidFill>
+                            <a:srgbClr val="333333"/>
+                          </a:solidFill>
+                          <a:latin typeface="メイリオ"/>
+                          <a:ea typeface="メイリオ"/>
+                        </a:rPr>
+                        <a:t>UUIDをDB型で持てる
+一部設定を再起動なしで変更できる</a:t>
+                      </a:r>
+                    </a:p>
+                  </a:txBody>
+                  <a:tcPr anchor="ctr"/>
+                </a:tc>
+                <a:tc>
+                  <a:txBody>
+                    <a:bodyPr/>
+                    <a:lstStyle/>
+                    <a:p>
+                      <a:pPr algn="l"/>
+                      <a:r>
+                        <a:rPr sz="1000" b="0">
+                          <a:solidFill>
+                            <a:srgbClr val="333333"/>
+                          </a:solidFill>
+                          <a:latin typeface="メイリオ"/>
+                          <a:ea typeface="メイリオ"/>
+                        </a:rPr>
+                        <a:t>基幹連携IDの整備や、ピーク時の
+運用チューニングに使える</a:t>
+                      </a:r>
+                    </a:p>
+                  </a:txBody>
+                  <a:tcPr anchor="ctr"/>
+                </a:tc>
+              </a:tr>
+            </a:tbl>
+          </a:graphicData>
+        </a:graphic>
+      </p:graphicFrame>
+      <p:sp>
+        <p:nvSpPr>
+          <p:cNvPr id="5" name="TextBox 4"/>
+          <p:cNvSpPr txBox="1"/>
+          <p:nvPr/>
+        </p:nvSpPr>
+        <p:spPr>
+          <a:xfrm>
+            <a:off x="450000" y="6300000"/>
+            <a:ext cx="9200000" cy="400000"/>
+          </a:xfrm>
+          <a:prstGeom prst="rect">
+            <a:avLst/>
+          </a:prstGeom>
+          <a:noFill/>
+        </p:spPr>
+        <p:txBody>
+          <a:bodyPr wrap="square">
+            <a:spAutoFit/>
+          </a:bodyPr>
+          <a:lstStyle/>
+          <a:p>
+            <a:pPr>
+              <a:spcBef>
+                <a:spcPts val="0"/>
+              </a:spcBef>
+              <a:spcAft>
+                <a:spcPts val="100"/>
+              </a:spcAft>
+            </a:pPr>
+            <a:r>
+              <a:rPr sz="1000" b="0">
+                <a:solidFill>
+                  <a:srgbClr val="C00000"/>
+                </a:solidFill>
+                <a:latin typeface="メイリオ"/>
+                <a:ea typeface="メイリオ"/>
+              </a:rPr>
+              <a:t>※ いますぐ全部を使う話ではない。今後の機能追加・運用改善で選べる選択肢を増やしたアップデート</a:t>
+            </a:r>
+          </a:p>
+        </p:txBody>
+      </p:sp>
+    </p:spTree>
+  </p:cSld>
+  <p:clrMapOvr>
+    <a:masterClrMapping/>
+  </p:clrMapOvr>
 </p:sld>
 </file>
 

--- a/docs/【EC】ECサービス部_2026年7月度部会_Ver1.1.pptx
+++ b/docs/【EC】ECサービス部_2026年7月度部会_Ver1.1.pptx
@@ -22,6 +22,7 @@
     <p:sldId id="1024" r:id="rId16"/>
     <p:sldId id="1026" r:id="rId17"/>
     <p:sldId id="1029" r:id="rId30"/>
+    <p:sldId id="1030" r:id="rId31"/>
     <p:sldId id="264" r:id="rId18"/>
     <p:sldId id="1016" r:id="rId19"/>
     <p:sldId id="1025" r:id="rId20"/>
@@ -12367,6 +12368,785 @@
 </file>
 
 <file path=ppt/slides/slide14.xml><?xml version="1.0" encoding="utf-8"?>
+<p:sld xmlns:a="http://schemas.openxmlformats.org/drawingml/2006/main" xmlns:p="http://schemas.openxmlformats.org/presentationml/2006/main" xmlns:r="http://schemas.openxmlformats.org/officeDocument/2006/relationships">
+  <p:cSld>
+    <p:spTree>
+      <p:nvGrpSpPr>
+        <p:cNvPr id="1" name=""/>
+        <p:cNvGrpSpPr/>
+        <p:nvPr/>
+      </p:nvGrpSpPr>
+      <p:grpSpPr/>
+      <p:sp>
+        <p:nvSpPr>
+          <p:cNvPr id="2" name="Google Shape;152;p7">
+            <a:extLst>
+              <a:ext uri="{FF2B5EF4-FFF2-40B4-BE49-F238E27FC236}">
+                <a16:creationId xmlns:a16="http://schemas.microsoft.com/office/drawing/2014/main" id="{7C0885C2-88AC-DAC0-C4FE-135C29624CDD}"/>
+              </a:ext>
+            </a:extLst>
+          </p:cNvPr>
+          <p:cNvSpPr txBox="1">
+            <a:spLocks noGrp="1"/>
+          </p:cNvSpPr>
+          <p:nvPr>
+            <p:ph type="title"/>
+          </p:nvPr>
+        </p:nvSpPr>
+        <p:spPr>
+          <a:xfrm>
+            <a:off x="835852" y="142852"/>
+            <a:ext cx="8915400" cy="582594"/>
+          </a:xfrm>
+          <a:prstGeom prst="rect">
+            <a:avLst/>
+          </a:prstGeom>
+          <a:noFill/>
+          <a:ln>
+            <a:noFill/>
+          </a:ln>
+        </p:spPr>
+        <p:txBody>
+          <a:bodyPr spcFirstLastPara="1" wrap="square" lIns="91425" tIns="45700" rIns="91425" bIns="45700" anchor="b" anchorCtr="0">
+            <a:noAutofit/>
+          </a:bodyPr>
+          <a:lstStyle/>
+          <a:p>
+            <a:pPr>
+              <a:lnSpc>
+                <a:spcPct val="130000"/>
+              </a:lnSpc>
+            </a:pPr>
+            <a:r>
+              <a:rPr sz="1800" b="0">
+                <a:solidFill>
+                  <a:srgbClr val="333333"/>
+                </a:solidFill>
+                <a:latin typeface="メイリオ"/>
+                <a:ea typeface="メイリオ"/>
+              </a:rPr>
+              <a:t>5. </a:t>
+            </a:r>
+            <a:r>
+              <a:rPr sz="1600" b="0">
+                <a:solidFill>
+                  <a:srgbClr val="333333"/>
+                </a:solidFill>
+                <a:latin typeface="メイリオ"/>
+                <a:ea typeface="メイリオ"/>
+              </a:rPr>
+              <a:t>新パッケージのバージョンアップ状況について　その２</a:t>
+            </a:r>
+            <a:endParaRPr lang="ja-JP" altLang="en-US" sz="2000" dirty="0">
+              <a:latin typeface="メイリオ" pitchFamily="50" charset="-128"/>
+              <a:ea typeface="メイリオ" pitchFamily="50" charset="-128"/>
+              <a:cs typeface="メイリオ" pitchFamily="50" charset="-128"/>
+            </a:endParaRPr>
+          </a:p>
+        </p:txBody>
+      </p:sp>
+      <p:sp>
+        <p:nvSpPr>
+          <p:cNvPr id="3" name="TextBox 2"/>
+          <p:cNvSpPr txBox="1"/>
+          <p:nvPr/>
+        </p:nvSpPr>
+        <p:spPr>
+          <a:xfrm>
+            <a:off x="450000" y="680000"/>
+            <a:ext cx="9200000" cy="280000"/>
+          </a:xfrm>
+          <a:prstGeom prst="rect">
+            <a:avLst/>
+          </a:prstGeom>
+          <a:noFill/>
+        </p:spPr>
+        <p:txBody>
+          <a:bodyPr wrap="square">
+            <a:spAutoFit/>
+          </a:bodyPr>
+          <a:lstStyle/>
+          <a:p>
+            <a:pPr>
+              <a:spcBef>
+                <a:spcPts val="0"/>
+              </a:spcBef>
+              <a:spcAft>
+                <a:spcPts val="100"/>
+              </a:spcAft>
+            </a:pPr>
+            <a:r>
+              <a:rPr sz="1200" b="1">
+                <a:solidFill>
+                  <a:srgbClr val="C00000"/>
+                </a:solidFill>
+                <a:latin typeface="メイリオ"/>
+                <a:ea typeface="メイリオ"/>
+              </a:rPr>
+              <a:t>どのアップデートで → 何ができて → 今後どう使えるか</a:t>
+            </a:r>
+          </a:p>
+        </p:txBody>
+      </p:sp>
+      <p:graphicFrame>
+        <p:nvGraphicFramePr>
+          <p:cNvPr id="4" name="Table 3"/>
+          <p:cNvGraphicFramePr>
+            <a:graphicFrameLocks noGrp="1"/>
+          </p:cNvGraphicFramePr>
+          <p:nvPr/>
+        </p:nvGraphicFramePr>
+        <p:xfrm>
+          <a:off x="350000" y="980000"/>
+          <a:ext cx="9200000" cy="4800000"/>
+        </p:xfrm>
+        <a:graphic>
+          <a:graphicData uri="http://schemas.openxmlformats.org/drawingml/2006/table">
+            <a:tbl>
+              <a:tblPr firstRow="1" bandRow="1">
+                <a:tableStyleId>{5C22544A-7EE6-4342-B048-85BDC9FD1C3A}</a:tableStyleId>
+              </a:tblPr>
+              <a:tblGrid>
+                <a:gridCol w="1400000"/>
+                <a:gridCol w="2300000"/>
+                <a:gridCol w="2700000"/>
+                <a:gridCol w="2800000"/>
+              </a:tblGrid>
+              <a:tr h="800000">
+                <a:tc>
+                  <a:txBody>
+                    <a:bodyPr/>
+                    <a:lstStyle/>
+                    <a:p>
+                      <a:pPr algn="ctr"/>
+                      <a:r>
+                        <a:rPr sz="1000" b="1">
+                          <a:solidFill>
+                            <a:srgbClr val="FFFFFF"/>
+                          </a:solidFill>
+                          <a:latin typeface="メイリオ"/>
+                          <a:ea typeface="メイリオ"/>
+                        </a:rPr>
+                        <a:t>アップデート</a:t>
+                      </a:r>
+                    </a:p>
+                  </a:txBody>
+                  <a:tcPr anchor="ctr">
+                    <a:solidFill>
+                      <a:srgbClr val="1F4E79"/>
+                    </a:solidFill>
+                  </a:tcPr>
+                </a:tc>
+                <a:tc>
+                  <a:txBody>
+                    <a:bodyPr/>
+                    <a:lstStyle/>
+                    <a:p>
+                      <a:pPr algn="ctr"/>
+                      <a:r>
+                        <a:rPr sz="1000" b="1">
+                          <a:solidFill>
+                            <a:srgbClr val="FFFFFF"/>
+                          </a:solidFill>
+                          <a:latin typeface="メイリオ"/>
+                          <a:ea typeface="メイリオ"/>
+                        </a:rPr>
+                        <a:t>新機能</a:t>
+                      </a:r>
+                    </a:p>
+                  </a:txBody>
+                  <a:tcPr anchor="ctr">
+                    <a:solidFill>
+                      <a:srgbClr val="1F4E79"/>
+                    </a:solidFill>
+                  </a:tcPr>
+                </a:tc>
+                <a:tc>
+                  <a:txBody>
+                    <a:bodyPr/>
+                    <a:lstStyle/>
+                    <a:p>
+                      <a:pPr algn="ctr"/>
+                      <a:r>
+                        <a:rPr sz="1000" b="1">
+                          <a:solidFill>
+                            <a:srgbClr val="FFFFFF"/>
+                          </a:solidFill>
+                          <a:latin typeface="メイリオ"/>
+                          <a:ea typeface="メイリオ"/>
+                        </a:rPr>
+                        <a:t>できるようになること</a:t>
+                      </a:r>
+                    </a:p>
+                  </a:txBody>
+                  <a:tcPr anchor="ctr">
+                    <a:solidFill>
+                      <a:srgbClr val="1F4E79"/>
+                    </a:solidFill>
+                  </a:tcPr>
+                </a:tc>
+                <a:tc>
+                  <a:txBody>
+                    <a:bodyPr/>
+                    <a:lstStyle/>
+                    <a:p>
+                      <a:pPr algn="ctr"/>
+                      <a:r>
+                        <a:rPr sz="1000" b="1">
+                          <a:solidFill>
+                            <a:srgbClr val="FFFFFF"/>
+                          </a:solidFill>
+                          <a:latin typeface="メイリオ"/>
+                          <a:ea typeface="メイリオ"/>
+                        </a:rPr>
+                        <a:t>今後の活用イメージ</a:t>
+                      </a:r>
+                    </a:p>
+                  </a:txBody>
+                  <a:tcPr anchor="ctr">
+                    <a:solidFill>
+                      <a:srgbClr val="1F4E79"/>
+                    </a:solidFill>
+                  </a:tcPr>
+                </a:tc>
+              </a:tr>
+              <a:tr h="800000">
+                <a:tc>
+                  <a:txBody>
+                    <a:bodyPr/>
+                    <a:lstStyle/>
+                    <a:p>
+                      <a:pPr algn="l"/>
+                      <a:r>
+                        <a:rPr sz="900" b="1">
+                          <a:solidFill>
+                            <a:srgbClr val="333333"/>
+                          </a:solidFill>
+                          <a:latin typeface="メイリオ"/>
+                          <a:ea typeface="メイリオ"/>
+                        </a:rPr>
+                        <a:t>Ruby
+3.2→3.4</a:t>
+                      </a:r>
+                    </a:p>
+                  </a:txBody>
+                  <a:tcPr anchor="ctr"/>
+                </a:tc>
+                <a:tc>
+                  <a:txBody>
+                    <a:bodyPr/>
+                    <a:lstStyle/>
+                    <a:p>
+                      <a:pPr algn="l"/>
+                      <a:r>
+                        <a:rPr sz="900" b="0">
+                          <a:solidFill>
+                            <a:srgbClr val="333333"/>
+                          </a:solidFill>
+                          <a:latin typeface="メイリオ"/>
+                          <a:ea typeface="メイリオ"/>
+                        </a:rPr>
+                        <a:t>外部接続の改善
+(Happy Eyeballs v2)</a:t>
+                      </a:r>
+                    </a:p>
+                  </a:txBody>
+                  <a:tcPr anchor="ctr"/>
+                </a:tc>
+                <a:tc>
+                  <a:txBody>
+                    <a:bodyPr/>
+                    <a:lstStyle/>
+                    <a:p>
+                      <a:pPr algn="l"/>
+                      <a:r>
+                        <a:rPr sz="900" b="0">
+                          <a:solidFill>
+                            <a:srgbClr val="333333"/>
+                          </a:solidFill>
+                          <a:latin typeface="メイリオ"/>
+                          <a:ea typeface="メイリオ"/>
+                        </a:rPr>
+                        <a:t>IPv4/IPv6を並行して接続試行し、
+外部通信の確立をより確実にできる</a:t>
+                      </a:r>
+                    </a:p>
+                  </a:txBody>
+                  <a:tcPr anchor="ctr"/>
+                </a:tc>
+                <a:tc>
+                  <a:txBody>
+                    <a:bodyPr/>
+                    <a:lstStyle/>
+                    <a:p>
+                      <a:pPr algn="l"/>
+                      <a:r>
+                        <a:rPr sz="900" b="0">
+                          <a:solidFill>
+                            <a:srgbClr val="333333"/>
+                          </a:solidFill>
+                          <a:latin typeface="メイリオ"/>
+                          <a:ea typeface="メイリオ"/>
+                        </a:rPr>
+                        <a:t>基幹・決済・配送など外部API連携の
+接続まわりを安定させやすい</a:t>
+                      </a:r>
+                    </a:p>
+                  </a:txBody>
+                  <a:tcPr anchor="ctr"/>
+                </a:tc>
+              </a:tr>
+              <a:tr h="800000">
+                <a:tc>
+                  <a:txBody>
+                    <a:bodyPr/>
+                    <a:lstStyle/>
+                    <a:p>
+                      <a:pPr algn="l"/>
+                      <a:r>
+                        <a:rPr sz="900" b="1">
+                          <a:solidFill>
+                            <a:srgbClr val="333333"/>
+                          </a:solidFill>
+                          <a:latin typeface="メイリオ"/>
+                          <a:ea typeface="メイリオ"/>
+                        </a:rPr>
+                        <a:t>Rails
+7.2→8.1</a:t>
+                      </a:r>
+                    </a:p>
+                  </a:txBody>
+                  <a:tcPr anchor="ctr">
+                    <a:solidFill>
+                      <a:srgbClr val="D6E3F0"/>
+                    </a:solidFill>
+                  </a:tcPr>
+                </a:tc>
+                <a:tc>
+                  <a:txBody>
+                    <a:bodyPr/>
+                    <a:lstStyle/>
+                    <a:p>
+                      <a:pPr algn="l"/>
+                      <a:r>
+                        <a:rPr sz="900" b="0">
+                          <a:solidFill>
+                            <a:srgbClr val="333333"/>
+                          </a:solidFill>
+                          <a:latin typeface="メイリオ"/>
+                          <a:ea typeface="メイリオ"/>
+                        </a:rPr>
+                        <a:t>ジョブ途中再開
+(Active Job Continuations)</a:t>
+                      </a:r>
+                    </a:p>
+                  </a:txBody>
+                  <a:tcPr anchor="ctr">
+                    <a:solidFill>
+                      <a:srgbClr val="D6E3F0"/>
+                    </a:solidFill>
+                  </a:tcPr>
+                </a:tc>
+                <a:tc>
+                  <a:txBody>
+                    <a:bodyPr/>
+                    <a:lstStyle/>
+                    <a:p>
+                      <a:pPr algn="l"/>
+                      <a:r>
+                        <a:rPr sz="900" b="0">
+                          <a:solidFill>
+                            <a:srgbClr val="333333"/>
+                          </a:solidFill>
+                          <a:latin typeface="メイリオ"/>
+                          <a:ea typeface="メイリオ"/>
+                        </a:rPr>
+                        <a:t>同じ実行ジョブが途中停止しても、
+続きから再開しやすくなる</a:t>
+                      </a:r>
+                    </a:p>
+                  </a:txBody>
+                  <a:tcPr anchor="ctr">
+                    <a:solidFill>
+                      <a:srgbClr val="D6E3F0"/>
+                    </a:solidFill>
+                  </a:tcPr>
+                </a:tc>
+                <a:tc>
+                  <a:txBody>
+                    <a:bodyPr/>
+                    <a:lstStyle/>
+                    <a:p>
+                      <a:pPr algn="l"/>
+                      <a:r>
+                        <a:rPr sz="900" b="0">
+                          <a:solidFill>
+                            <a:srgbClr val="333333"/>
+                          </a:solidFill>
+                          <a:latin typeface="メイリオ"/>
+                          <a:ea typeface="メイリオ"/>
+                        </a:rPr>
+                        <a:t>CSV取込／出力などの長時間ジョブに適用可
+（詳細は次ページ）</a:t>
+                      </a:r>
+                    </a:p>
+                  </a:txBody>
+                  <a:tcPr anchor="ctr">
+                    <a:solidFill>
+                      <a:srgbClr val="D6E3F0"/>
+                    </a:solidFill>
+                  </a:tcPr>
+                </a:tc>
+              </a:tr>
+              <a:tr h="800000">
+                <a:tc>
+                  <a:txBody>
+                    <a:bodyPr/>
+                    <a:lstStyle/>
+                    <a:p>
+                      <a:pPr algn="l"/>
+                      <a:r>
+                        <a:rPr sz="900" b="1">
+                          <a:solidFill>
+                            <a:srgbClr val="333333"/>
+                          </a:solidFill>
+                          <a:latin typeface="メイリオ"/>
+                          <a:ea typeface="メイリオ"/>
+                        </a:rPr>
+                        <a:t>Rails
+7.2→8.1</a:t>
+                      </a:r>
+                    </a:p>
+                  </a:txBody>
+                  <a:tcPr anchor="ctr"/>
+                </a:tc>
+                <a:tc>
+                  <a:txBody>
+                    <a:bodyPr/>
+                    <a:lstStyle/>
+                    <a:p>
+                      <a:pPr algn="l"/>
+                      <a:r>
+                        <a:rPr sz="900" b="0">
+                          <a:solidFill>
+                            <a:srgbClr val="333333"/>
+                          </a:solidFill>
+                          <a:latin typeface="メイリオ"/>
+                          <a:ea typeface="メイリオ"/>
+                        </a:rPr>
+                        <a:t>構造化イベント通知
+(Event Reporter)</a:t>
+                      </a:r>
+                    </a:p>
+                  </a:txBody>
+                  <a:tcPr anchor="ctr"/>
+                </a:tc>
+                <a:tc>
+                  <a:txBody>
+                    <a:bodyPr/>
+                    <a:lstStyle/>
+                    <a:p>
+                      <a:pPr algn="l"/>
+                      <a:r>
+                        <a:rPr sz="900" b="0">
+                          <a:solidFill>
+                            <a:srgbClr val="333333"/>
+                          </a:solidFill>
+                          <a:latin typeface="メイリオ"/>
+                          <a:ea typeface="メイリオ"/>
+                        </a:rPr>
+                        <a:t>「誰が・いつ・何をした」を
+機械可読イベントとして出せる</a:t>
+                      </a:r>
+                    </a:p>
+                  </a:txBody>
+                  <a:tcPr anchor="ctr"/>
+                </a:tc>
+                <a:tc>
+                  <a:txBody>
+                    <a:bodyPr/>
+                    <a:lstStyle/>
+                    <a:p>
+                      <a:pPr algn="l"/>
+                      <a:r>
+                        <a:rPr sz="900" b="0">
+                          <a:solidFill>
+                            <a:srgbClr val="333333"/>
+                          </a:solidFill>
+                          <a:latin typeface="メイリオ"/>
+                          <a:ea typeface="メイリオ"/>
+                        </a:rPr>
+                        <a:t>監査ログ／障害調査／監視連携で
+運用品質と説明責任を強化できる</a:t>
+                      </a:r>
+                    </a:p>
+                  </a:txBody>
+                  <a:tcPr anchor="ctr"/>
+                </a:tc>
+              </a:tr>
+              <a:tr h="800000">
+                <a:tc>
+                  <a:txBody>
+                    <a:bodyPr/>
+                    <a:lstStyle/>
+                    <a:p>
+                      <a:pPr algn="l"/>
+                      <a:r>
+                        <a:rPr sz="900" b="1">
+                          <a:solidFill>
+                            <a:srgbClr val="333333"/>
+                          </a:solidFill>
+                          <a:latin typeface="メイリオ"/>
+                          <a:ea typeface="メイリオ"/>
+                        </a:rPr>
+                        <a:t>Rails
+7.2→8.1</a:t>
+                      </a:r>
+                    </a:p>
+                  </a:txBody>
+                  <a:tcPr anchor="ctr">
+                    <a:solidFill>
+                      <a:srgbClr val="D6E3F0"/>
+                    </a:solidFill>
+                  </a:tcPr>
+                </a:tc>
+                <a:tc>
+                  <a:txBody>
+                    <a:bodyPr/>
+                    <a:lstStyle/>
+                    <a:p>
+                      <a:pPr algn="l"/>
+                      <a:r>
+                        <a:rPr sz="900" b="0">
+                          <a:solidFill>
+                            <a:srgbClr val="333333"/>
+                          </a:solidFill>
+                          <a:latin typeface="メイリオ"/>
+                          <a:ea typeface="メイリオ"/>
+                        </a:rPr>
+                        <a:t>Markdown標準描画</a:t>
+                      </a:r>
+                    </a:p>
+                  </a:txBody>
+                  <a:tcPr anchor="ctr">
+                    <a:solidFill>
+                      <a:srgbClr val="D6E3F0"/>
+                    </a:solidFill>
+                  </a:tcPr>
+                </a:tc>
+                <a:tc>
+                  <a:txBody>
+                    <a:bodyPr/>
+                    <a:lstStyle/>
+                    <a:p>
+                      <a:pPr algn="l"/>
+                      <a:r>
+                        <a:rPr sz="900" b="0">
+                          <a:solidFill>
+                            <a:srgbClr val="333333"/>
+                          </a:solidFill>
+                          <a:latin typeface="メイリオ"/>
+                          <a:ea typeface="メイリオ"/>
+                        </a:rPr>
+                        <a:t>Markdownをそのまま
+画面やAPI応答に使える</a:t>
+                      </a:r>
+                    </a:p>
+                  </a:txBody>
+                  <a:tcPr anchor="ctr">
+                    <a:solidFill>
+                      <a:srgbClr val="D6E3F0"/>
+                    </a:solidFill>
+                  </a:tcPr>
+                </a:tc>
+                <a:tc>
+                  <a:txBody>
+                    <a:bodyPr/>
+                    <a:lstStyle/>
+                    <a:p>
+                      <a:pPr algn="l"/>
+                      <a:r>
+                        <a:rPr sz="900" b="0">
+                          <a:solidFill>
+                            <a:srgbClr val="333333"/>
+                          </a:solidFill>
+                          <a:latin typeface="メイリオ"/>
+                          <a:ea typeface="メイリオ"/>
+                        </a:rPr>
+                        <a:t>ヘルプ・提案資料・AI出力の表示基盤
+（Primo伴走支援の説明にも応用可）</a:t>
+                      </a:r>
+                    </a:p>
+                  </a:txBody>
+                  <a:tcPr anchor="ctr">
+                    <a:solidFill>
+                      <a:srgbClr val="D6E3F0"/>
+                    </a:solidFill>
+                  </a:tcPr>
+                </a:tc>
+              </a:tr>
+              <a:tr h="800000">
+                <a:tc>
+                  <a:txBody>
+                    <a:bodyPr/>
+                    <a:lstStyle/>
+                    <a:p>
+                      <a:pPr algn="l"/>
+                      <a:r>
+                        <a:rPr sz="900" b="1">
+                          <a:solidFill>
+                            <a:srgbClr val="333333"/>
+                          </a:solidFill>
+                          <a:latin typeface="メイリオ"/>
+                          <a:ea typeface="メイリオ"/>
+                        </a:rPr>
+                        <a:t>MariaDB
+10.6→10.11</a:t>
+                      </a:r>
+                    </a:p>
+                  </a:txBody>
+                  <a:tcPr anchor="ctr"/>
+                </a:tc>
+                <a:tc>
+                  <a:txBody>
+                    <a:bodyPr/>
+                    <a:lstStyle/>
+                    <a:p>
+                      <a:pPr algn="l"/>
+                      <a:r>
+                        <a:rPr sz="900" b="0">
+                          <a:solidFill>
+                            <a:srgbClr val="333333"/>
+                          </a:solidFill>
+                          <a:latin typeface="メイリオ"/>
+                          <a:ea typeface="メイリオ"/>
+                        </a:rPr>
+                        <a:t>UUID型
+／設定の動的変更</a:t>
+                      </a:r>
+                    </a:p>
+                  </a:txBody>
+                  <a:tcPr anchor="ctr"/>
+                </a:tc>
+                <a:tc>
+                  <a:txBody>
+                    <a:bodyPr/>
+                    <a:lstStyle/>
+                    <a:p>
+                      <a:pPr algn="l"/>
+                      <a:r>
+                        <a:rPr sz="900" b="0">
+                          <a:solidFill>
+                            <a:srgbClr val="333333"/>
+                          </a:solidFill>
+                          <a:latin typeface="メイリオ"/>
+                          <a:ea typeface="メイリオ"/>
+                        </a:rPr>
+                        <a:t>UUIDをDB型で持てる
+一部設定を再起動なしで変更できる</a:t>
+                      </a:r>
+                    </a:p>
+                  </a:txBody>
+                  <a:tcPr anchor="ctr"/>
+                </a:tc>
+                <a:tc>
+                  <a:txBody>
+                    <a:bodyPr/>
+                    <a:lstStyle/>
+                    <a:p>
+                      <a:pPr algn="l"/>
+                      <a:r>
+                        <a:rPr sz="900" b="0">
+                          <a:solidFill>
+                            <a:srgbClr val="333333"/>
+                          </a:solidFill>
+                          <a:latin typeface="メイリオ"/>
+                          <a:ea typeface="メイリオ"/>
+                        </a:rPr>
+                        <a:t>基幹連携IDの整備や、ピーク時の
+運用チューニングに使える</a:t>
+                      </a:r>
+                    </a:p>
+                  </a:txBody>
+                  <a:tcPr anchor="ctr"/>
+                </a:tc>
+              </a:tr>
+            </a:tbl>
+          </a:graphicData>
+        </a:graphic>
+      </p:graphicFrame>
+      <p:sp>
+        <p:nvSpPr>
+          <p:cNvPr id="5" name="TextBox 4"/>
+          <p:cNvSpPr txBox="1"/>
+          <p:nvPr/>
+        </p:nvSpPr>
+        <p:spPr>
+          <a:xfrm>
+            <a:off x="450000" y="5900000"/>
+            <a:ext cx="9200000" cy="700000"/>
+          </a:xfrm>
+          <a:prstGeom prst="rect">
+            <a:avLst/>
+          </a:prstGeom>
+          <a:noFill/>
+        </p:spPr>
+        <p:txBody>
+          <a:bodyPr wrap="square">
+            <a:spAutoFit/>
+          </a:bodyPr>
+          <a:lstStyle/>
+          <a:p>
+            <a:pPr>
+              <a:spcBef>
+                <a:spcPts val="0"/>
+              </a:spcBef>
+              <a:spcAft>
+                <a:spcPts val="100"/>
+              </a:spcAft>
+            </a:pPr>
+            <a:r>
+              <a:rPr sz="1000" b="0">
+                <a:solidFill>
+                  <a:srgbClr val="C00000"/>
+                </a:solidFill>
+                <a:latin typeface="メイリオ"/>
+                <a:ea typeface="メイリオ"/>
+              </a:rPr>
+              <a:t>※ いますぐ全部を使う話ではない。今後の機能追加・運用改善で選べる選択肢を増やしたアップデート</a:t>
+            </a:r>
+          </a:p>
+          <a:p>
+            <a:pPr>
+              <a:spcBef>
+                <a:spcPts val="0"/>
+              </a:spcBef>
+              <a:spcAft>
+                <a:spcPts val="100"/>
+              </a:spcAft>
+            </a:pPr>
+            <a:r>
+              <a:rPr sz="1000" b="0">
+                <a:solidFill>
+                  <a:srgbClr val="333333"/>
+                </a:solidFill>
+                <a:latin typeface="メイリオ"/>
+                <a:ea typeface="メイリオ"/>
+              </a:rPr>
+              <a:t>→ 次ページで「ジョブ途中再開」を、ECのCSV取込／出力に寄せて説明</a:t>
+            </a:r>
+          </a:p>
+        </p:txBody>
+      </p:sp>
+    </p:spTree>
+  </p:cSld>
+  <p:clrMapOvr>
+    <a:masterClrMapping/>
+  </p:clrMapOvr>
+</p:sld>
+</file>
+
+<file path=ppt/slides/slide15.xml><?xml version="1.0" encoding="utf-8"?>
 <p:sld xmlns:a="http://schemas.openxmlformats.org/drawingml/2006/main" xmlns:r="http://schemas.openxmlformats.org/officeDocument/2006/relationships" xmlns:p="http://schemas.openxmlformats.org/presentationml/2006/main">
   <p:cSld>
     <p:spTree>
@@ -12980,7 +13760,7 @@
 </p:sld>
 </file>
 
-<file path=ppt/slides/slide15.xml><?xml version="1.0" encoding="utf-8"?>
+<file path=ppt/slides/slide16.xml><?xml version="1.0" encoding="utf-8"?>
 <p:sld xmlns:a="http://schemas.openxmlformats.org/drawingml/2006/main" xmlns:r="http://schemas.openxmlformats.org/officeDocument/2006/relationships" xmlns:p="http://schemas.openxmlformats.org/presentationml/2006/main">
   <p:cSld>
     <p:spTree>
@@ -13560,7 +14340,7 @@
 </p:sld>
 </file>
 
-<file path=ppt/slides/slide16.xml><?xml version="1.0" encoding="utf-8"?>
+<file path=ppt/slides/slide17.xml><?xml version="1.0" encoding="utf-8"?>
 <p:sld xmlns:a="http://schemas.openxmlformats.org/drawingml/2006/main" xmlns:r="http://schemas.openxmlformats.org/officeDocument/2006/relationships" xmlns:p="http://schemas.openxmlformats.org/presentationml/2006/main">
   <p:cSld>
     <p:spTree>
@@ -13771,7 +14551,7 @@
 </p:sld>
 </file>
 
-<file path=ppt/slides/slide17.xml><?xml version="1.0" encoding="utf-8"?>
+<file path=ppt/slides/slide18.xml><?xml version="1.0" encoding="utf-8"?>
 <p:sld xmlns:a="http://schemas.openxmlformats.org/drawingml/2006/main" xmlns:r="http://schemas.openxmlformats.org/officeDocument/2006/relationships" xmlns:p="http://schemas.openxmlformats.org/presentationml/2006/main">
   <p:cSld>
     <p:spTree>
@@ -14174,7 +14954,7 @@
 </p:sld>
 </file>
 
-<file path=ppt/slides/slide18.xml><?xml version="1.0" encoding="utf-8"?>
+<file path=ppt/slides/slide19.xml><?xml version="1.0" encoding="utf-8"?>
 <p:sld xmlns:a="http://schemas.openxmlformats.org/drawingml/2006/main" xmlns:p="http://schemas.openxmlformats.org/presentationml/2006/main" xmlns:r="http://schemas.openxmlformats.org/officeDocument/2006/relationships">
   <p:cSld>
     <p:spTree>
@@ -15196,7 +15976,598 @@
 </p:sld>
 </file>
 
-<file path=ppt/slides/slide19.xml><?xml version="1.0" encoding="utf-8"?>
+<file path=ppt/slides/slide2.xml><?xml version="1.0" encoding="utf-8"?>
+<p:sld xmlns:a="http://schemas.openxmlformats.org/drawingml/2006/main" xmlns:r="http://schemas.openxmlformats.org/officeDocument/2006/relationships" xmlns:p="http://schemas.openxmlformats.org/presentationml/2006/main">
+  <p:cSld>
+    <p:spTree>
+      <p:nvGrpSpPr>
+        <p:cNvPr id="1" name=""/>
+        <p:cNvGrpSpPr/>
+        <p:nvPr/>
+      </p:nvGrpSpPr>
+      <p:grpSpPr>
+        <a:xfrm>
+          <a:off x="0" y="0"/>
+          <a:ext cx="0" cy="0"/>
+          <a:chOff x="0" y="0"/>
+          <a:chExt cx="0" cy="0"/>
+        </a:xfrm>
+      </p:grpSpPr>
+      <p:sp>
+        <p:nvSpPr>
+          <p:cNvPr id="6" name="テキスト ボックス 5"/>
+          <p:cNvSpPr txBox="1">
+            <a:spLocks/>
+          </p:cNvSpPr>
+          <p:nvPr/>
+        </p:nvSpPr>
+        <p:spPr>
+          <a:xfrm>
+            <a:off x="1136576" y="188641"/>
+            <a:ext cx="6408712" cy="469359"/>
+          </a:xfrm>
+          <a:prstGeom prst="rect">
+            <a:avLst/>
+          </a:prstGeom>
+          <a:noFill/>
+        </p:spPr>
+        <p:txBody>
+          <a:bodyPr wrap="square" rtlCol="0">
+            <a:spAutoFit/>
+          </a:bodyPr>
+          <a:lstStyle/>
+          <a:p>
+            <a:pPr algn="l">
+              <a:lnSpc>
+                <a:spcPct val="130000"/>
+              </a:lnSpc>
+            </a:pPr>
+            <a:r>
+              <a:rPr lang="en-US" altLang="ja-JP" sz="2000" dirty="0">
+                <a:latin typeface="メイリオ" pitchFamily="50" charset="-128"/>
+                <a:ea typeface="メイリオ" pitchFamily="50" charset="-128"/>
+                <a:cs typeface="メイリオ" pitchFamily="50" charset="-128"/>
+              </a:rPr>
+              <a:t>2026/7/30</a:t>
+            </a:r>
+            <a:r>
+              <a:rPr lang="ja-JP" altLang="en-US" sz="2000" dirty="0">
+                <a:latin typeface="メイリオ" pitchFamily="50" charset="-128"/>
+                <a:ea typeface="メイリオ" pitchFamily="50" charset="-128"/>
+                <a:cs typeface="メイリオ" pitchFamily="50" charset="-128"/>
+              </a:rPr>
+              <a:t>　</a:t>
+            </a:r>
+            <a:r>
+              <a:rPr lang="en-US" altLang="ja-JP" sz="2000" dirty="0">
+                <a:latin typeface="メイリオ" pitchFamily="50" charset="-128"/>
+                <a:ea typeface="メイリオ" pitchFamily="50" charset="-128"/>
+                <a:cs typeface="メイリオ" pitchFamily="50" charset="-128"/>
+              </a:rPr>
+              <a:t>EC</a:t>
+            </a:r>
+            <a:r>
+              <a:rPr lang="ja-JP" altLang="en-US" sz="2000" dirty="0">
+                <a:latin typeface="メイリオ" pitchFamily="50" charset="-128"/>
+                <a:ea typeface="メイリオ" pitchFamily="50" charset="-128"/>
+                <a:cs typeface="メイリオ" pitchFamily="50" charset="-128"/>
+              </a:rPr>
+              <a:t>サービス部部会　アジェンダ</a:t>
+            </a:r>
+          </a:p>
+        </p:txBody>
+      </p:sp>
+      <p:sp>
+        <p:nvSpPr>
+          <p:cNvPr id="38" name="テキスト ボックス 37"/>
+          <p:cNvSpPr txBox="1">
+            <a:spLocks/>
+          </p:cNvSpPr>
+          <p:nvPr/>
+        </p:nvSpPr>
+        <p:spPr>
+          <a:xfrm>
+            <a:off x="1064569" y="856357"/>
+            <a:ext cx="8064895" cy="5109091"/>
+          </a:xfrm>
+          <a:prstGeom prst="rect">
+            <a:avLst/>
+          </a:prstGeom>
+          <a:noFill/>
+        </p:spPr>
+        <p:txBody>
+          <a:bodyPr wrap="square" rtlCol="0">
+            <a:spAutoFit/>
+          </a:bodyPr>
+          <a:lstStyle/>
+          <a:p>
+            <a:r>
+              <a:rPr lang="en-US" altLang="ja-JP" sz="1600" dirty="0">
+                <a:latin typeface="メイリオ"/>
+                <a:ea typeface="メイリオ"/>
+                <a:cs typeface="メイリオ"/>
+              </a:rPr>
+              <a:t>2026</a:t>
+            </a:r>
+            <a:r>
+              <a:rPr lang="ja-JP" altLang="en-US" sz="1600" dirty="0">
+                <a:latin typeface="メイリオ"/>
+                <a:ea typeface="メイリオ"/>
+                <a:cs typeface="メイリオ"/>
+              </a:rPr>
+              <a:t>年</a:t>
+            </a:r>
+            <a:r>
+              <a:rPr lang="en-US" altLang="ja-JP" sz="1600" dirty="0">
+                <a:latin typeface="メイリオ"/>
+                <a:ea typeface="メイリオ"/>
+                <a:cs typeface="メイリオ"/>
+              </a:rPr>
+              <a:t>7</a:t>
+            </a:r>
+            <a:r>
+              <a:rPr lang="ja-JP" altLang="en-US" sz="1600" dirty="0">
+                <a:latin typeface="メイリオ"/>
+                <a:ea typeface="メイリオ"/>
+                <a:cs typeface="メイリオ"/>
+              </a:rPr>
+              <a:t>月</a:t>
+            </a:r>
+            <a:r>
+              <a:rPr lang="en-US" altLang="ja-JP" sz="1600" dirty="0">
+                <a:latin typeface="メイリオ"/>
+                <a:ea typeface="メイリオ"/>
+                <a:cs typeface="メイリオ"/>
+              </a:rPr>
+              <a:t>30</a:t>
+            </a:r>
+            <a:r>
+              <a:rPr lang="ja-JP" altLang="en-US" sz="1600" dirty="0">
+                <a:latin typeface="メイリオ"/>
+                <a:ea typeface="メイリオ"/>
+                <a:cs typeface="メイリオ"/>
+              </a:rPr>
+              <a:t>日 </a:t>
+            </a:r>
+            <a:r>
+              <a:rPr lang="en-US" altLang="ja-JP" sz="1600" dirty="0">
+                <a:latin typeface="メイリオ"/>
+                <a:ea typeface="メイリオ"/>
+                <a:cs typeface="メイリオ"/>
+              </a:rPr>
+              <a:t>17</a:t>
+            </a:r>
+            <a:r>
+              <a:rPr lang="ja-JP" altLang="en-US" sz="1600" dirty="0">
+                <a:latin typeface="メイリオ"/>
+                <a:ea typeface="メイリオ"/>
+                <a:cs typeface="メイリオ"/>
+              </a:rPr>
+              <a:t>：</a:t>
+            </a:r>
+            <a:r>
+              <a:rPr lang="en-US" altLang="ja-JP" sz="1600" dirty="0">
+                <a:latin typeface="メイリオ"/>
+                <a:ea typeface="メイリオ"/>
+                <a:cs typeface="メイリオ"/>
+              </a:rPr>
+              <a:t>00</a:t>
+            </a:r>
+            <a:r>
+              <a:rPr lang="ja-JP" altLang="en-US" sz="1600" dirty="0">
+                <a:latin typeface="メイリオ"/>
+                <a:ea typeface="メイリオ"/>
+                <a:cs typeface="メイリオ"/>
+              </a:rPr>
+              <a:t>～</a:t>
+            </a:r>
+            <a:r>
+              <a:rPr lang="en-US" altLang="ja-JP" sz="1600" dirty="0">
+                <a:latin typeface="メイリオ"/>
+                <a:ea typeface="メイリオ"/>
+                <a:cs typeface="メイリオ"/>
+              </a:rPr>
+              <a:t>18</a:t>
+            </a:r>
+            <a:r>
+              <a:rPr lang="ja-JP" altLang="en-US" sz="1600" dirty="0">
+                <a:latin typeface="メイリオ"/>
+                <a:ea typeface="メイリオ"/>
+                <a:cs typeface="メイリオ"/>
+              </a:rPr>
+              <a:t>：</a:t>
+            </a:r>
+            <a:r>
+              <a:rPr lang="en-US" altLang="ja-JP" sz="1600" dirty="0">
+                <a:latin typeface="メイリオ"/>
+                <a:ea typeface="メイリオ"/>
+                <a:cs typeface="メイリオ"/>
+              </a:rPr>
+              <a:t>00 </a:t>
+            </a:r>
+            <a:r>
+              <a:rPr lang="ja-JP" altLang="en-US" sz="1600" dirty="0">
+                <a:latin typeface="メイリオ"/>
+                <a:ea typeface="メイリオ"/>
+                <a:cs typeface="メイリオ"/>
+              </a:rPr>
+              <a:t>　</a:t>
+            </a:r>
+            <a:r>
+              <a:rPr lang="en-US" altLang="ja-JP" sz="1600" dirty="0">
+                <a:latin typeface="メイリオ" pitchFamily="50" charset="-128"/>
+                <a:ea typeface="メイリオ" pitchFamily="50" charset="-128"/>
+                <a:cs typeface="メイリオ" pitchFamily="50" charset="-128"/>
+              </a:rPr>
+              <a:t> EC</a:t>
+            </a:r>
+            <a:r>
+              <a:rPr lang="ja-JP" altLang="en-US" sz="1600" dirty="0">
+                <a:latin typeface="メイリオ" pitchFamily="50" charset="-128"/>
+                <a:ea typeface="メイリオ" pitchFamily="50" charset="-128"/>
+                <a:cs typeface="メイリオ" pitchFamily="50" charset="-128"/>
+              </a:rPr>
+              <a:t>サービス部部会</a:t>
+            </a:r>
+            <a:endParaRPr lang="en-US" altLang="ja-JP" sz="1600" dirty="0">
+              <a:latin typeface="メイリオ"/>
+              <a:ea typeface="メイリオ"/>
+              <a:cs typeface="メイリオ"/>
+            </a:endParaRPr>
+          </a:p>
+          <a:p>
+            <a:endParaRPr lang="en-US" altLang="ja-JP" sz="1600" dirty="0">
+              <a:latin typeface="メイリオ"/>
+              <a:ea typeface="メイリオ"/>
+              <a:cs typeface="メイリオ"/>
+            </a:endParaRPr>
+          </a:p>
+          <a:p>
+            <a:r>
+              <a:rPr lang="ja-JP" altLang="en-US" sz="1400" dirty="0">
+                <a:latin typeface="メイリオ"/>
+                <a:ea typeface="メイリオ"/>
+                <a:cs typeface="メイリオ"/>
+              </a:rPr>
+              <a:t>　議題①：ＥＣサービス部の現状と今後の展開について</a:t>
+            </a:r>
+            <a:endParaRPr lang="en-US" altLang="zh-TW" sz="1400" dirty="0">
+              <a:latin typeface="メイリオ"/>
+              <a:ea typeface="メイリオ"/>
+              <a:cs typeface="メイリオ"/>
+            </a:endParaRPr>
+          </a:p>
+          <a:p>
+            <a:endParaRPr lang="en-US" altLang="ja-JP" sz="1400" dirty="0">
+              <a:solidFill>
+                <a:srgbClr val="FF0000"/>
+              </a:solidFill>
+              <a:latin typeface="メイリオ"/>
+              <a:ea typeface="メイリオ"/>
+              <a:cs typeface="メイリオ"/>
+            </a:endParaRPr>
+          </a:p>
+          <a:p>
+            <a:r>
+              <a:rPr lang="ja-JP" altLang="en-US" sz="1400" dirty="0">
+                <a:latin typeface="メイリオ"/>
+                <a:ea typeface="メイリオ"/>
+                <a:cs typeface="メイリオ"/>
+              </a:rPr>
+              <a:t>　議題②：既存顧客について</a:t>
+            </a:r>
+            <a:endParaRPr lang="en-US" altLang="ja-JP" sz="1400" dirty="0">
+              <a:latin typeface="メイリオ"/>
+              <a:ea typeface="メイリオ"/>
+              <a:cs typeface="メイリオ"/>
+            </a:endParaRPr>
+          </a:p>
+          <a:p>
+            <a:endParaRPr lang="en-US" altLang="ja-JP" sz="1400" dirty="0">
+              <a:latin typeface="メイリオ"/>
+              <a:ea typeface="メイリオ"/>
+              <a:cs typeface="メイリオ"/>
+            </a:endParaRPr>
+          </a:p>
+          <a:p>
+            <a:r>
+              <a:rPr lang="ja-JP" altLang="en-US" sz="1400" dirty="0">
+                <a:latin typeface="メイリオ"/>
+                <a:ea typeface="メイリオ"/>
+                <a:cs typeface="メイリオ"/>
+              </a:rPr>
+              <a:t>　議題③：旧パッケージの開発案件について</a:t>
+            </a:r>
+            <a:endParaRPr lang="en-US" altLang="ja-JP" sz="1400" dirty="0">
+              <a:latin typeface="メイリオ"/>
+              <a:ea typeface="メイリオ"/>
+              <a:cs typeface="メイリオ"/>
+            </a:endParaRPr>
+          </a:p>
+          <a:p>
+            <a:endParaRPr lang="ja-JP" altLang="en-US" sz="1400" dirty="0">
+              <a:latin typeface="メイリオ"/>
+              <a:ea typeface="メイリオ"/>
+              <a:cs typeface="メイリオ"/>
+            </a:endParaRPr>
+          </a:p>
+          <a:p>
+            <a:r>
+              <a:rPr lang="ja-JP" altLang="en-US" sz="1400" dirty="0">
+                <a:latin typeface="メイリオ"/>
+                <a:ea typeface="メイリオ"/>
+                <a:cs typeface="メイリオ"/>
+              </a:rPr>
+              <a:t>　議題④：セキュリティ強化対応状況について</a:t>
+            </a:r>
+            <a:endParaRPr lang="en-US" altLang="ja-JP" sz="1400" dirty="0">
+              <a:latin typeface="メイリオ"/>
+              <a:ea typeface="メイリオ"/>
+              <a:cs typeface="メイリオ"/>
+            </a:endParaRPr>
+          </a:p>
+          <a:p>
+            <a:endParaRPr lang="en-US" altLang="ja-JP" sz="1400" dirty="0">
+              <a:latin typeface="メイリオ"/>
+              <a:ea typeface="メイリオ"/>
+              <a:cs typeface="メイリオ"/>
+            </a:endParaRPr>
+          </a:p>
+          <a:p>
+            <a:r>
+              <a:rPr lang="ja-JP" altLang="en-US" sz="1400" dirty="0">
+                <a:latin typeface="メイリオ"/>
+                <a:ea typeface="メイリオ"/>
+                <a:cs typeface="メイリオ"/>
+              </a:rPr>
+              <a:t>　議題⑤：新パッケージのバージョンアップ状況について</a:t>
+            </a:r>
+            <a:endParaRPr lang="en-US" altLang="ja-JP" sz="1400" dirty="0">
+              <a:latin typeface="メイリオ"/>
+              <a:ea typeface="メイリオ"/>
+              <a:cs typeface="メイリオ"/>
+            </a:endParaRPr>
+          </a:p>
+          <a:p>
+            <a:endParaRPr lang="en-US" altLang="ja-JP" sz="1400" dirty="0">
+              <a:latin typeface="メイリオ"/>
+              <a:ea typeface="メイリオ"/>
+              <a:cs typeface="メイリオ"/>
+            </a:endParaRPr>
+          </a:p>
+          <a:p>
+            <a:r>
+              <a:rPr lang="ja-JP" altLang="en-US" sz="1400" dirty="0">
+                <a:latin typeface="メイリオ"/>
+                <a:ea typeface="メイリオ"/>
+                <a:cs typeface="メイリオ"/>
+              </a:rPr>
+              <a:t>　議題⑥：</a:t>
+            </a:r>
+            <a:r>
+              <a:rPr lang="en-US" altLang="ja-JP" sz="1400" dirty="0"/>
+              <a:t> </a:t>
+            </a:r>
+            <a:r>
+              <a:rPr lang="en-US" altLang="ja-JP" sz="1400" dirty="0" err="1">
+                <a:latin typeface="メイリオ" panose="020B0604030504040204" pitchFamily="50" charset="-128"/>
+                <a:ea typeface="メイリオ" panose="020B0604030504040204" pitchFamily="50" charset="-128"/>
+              </a:rPr>
+              <a:t>ECRider</a:t>
+            </a:r>
+            <a:r>
+              <a:rPr lang="ja-JP" altLang="en-US" sz="1400" dirty="0">
+                <a:latin typeface="メイリオ" panose="020B0604030504040204" pitchFamily="50" charset="-128"/>
+                <a:ea typeface="メイリオ" panose="020B0604030504040204" pitchFamily="50" charset="-128"/>
+              </a:rPr>
+              <a:t> </a:t>
+            </a:r>
+            <a:r>
+              <a:rPr lang="en-US" altLang="ja-JP" sz="1400" dirty="0">
+                <a:latin typeface="メイリオ" panose="020B0604030504040204" pitchFamily="50" charset="-128"/>
+                <a:ea typeface="メイリオ" panose="020B0604030504040204" pitchFamily="50" charset="-128"/>
+              </a:rPr>
+              <a:t>Primo</a:t>
+            </a:r>
+            <a:r>
+              <a:rPr lang="ja-JP" altLang="en-US" sz="1400" dirty="0">
+                <a:latin typeface="メイリオ" panose="020B0604030504040204" pitchFamily="50" charset="-128"/>
+                <a:ea typeface="メイリオ" panose="020B0604030504040204" pitchFamily="50" charset="-128"/>
+              </a:rPr>
+              <a:t>の受注状況</a:t>
+            </a:r>
+            <a:r>
+              <a:rPr lang="ja-JP" altLang="en-US" sz="1400" dirty="0">
+                <a:latin typeface="メイリオ" panose="020B0604030504040204" pitchFamily="50" charset="-128"/>
+                <a:ea typeface="メイリオ" panose="020B0604030504040204" pitchFamily="50" charset="-128"/>
+                <a:cs typeface="メイリオ"/>
+              </a:rPr>
+              <a:t>について</a:t>
+            </a:r>
+            <a:endParaRPr lang="en-US" altLang="ja-JP" sz="1400" dirty="0">
+              <a:latin typeface="メイリオ" panose="020B0604030504040204" pitchFamily="50" charset="-128"/>
+              <a:ea typeface="メイリオ" panose="020B0604030504040204" pitchFamily="50" charset="-128"/>
+              <a:cs typeface="メイリオ"/>
+            </a:endParaRPr>
+          </a:p>
+          <a:p>
+            <a:endParaRPr lang="en-US" altLang="ja-JP" sz="1400" dirty="0">
+              <a:latin typeface="メイリオ"/>
+              <a:ea typeface="メイリオ"/>
+              <a:cs typeface="メイリオ"/>
+            </a:endParaRPr>
+          </a:p>
+          <a:p>
+            <a:r>
+              <a:rPr lang="ja-JP" altLang="en-US" sz="1400" dirty="0">
+                <a:latin typeface="メイリオ"/>
+                <a:ea typeface="メイリオ"/>
+                <a:cs typeface="メイリオ"/>
+              </a:rPr>
+              <a:t>　議題⑦：営業案件について</a:t>
+            </a:r>
+            <a:endParaRPr lang="en-US" altLang="ja-JP" sz="1400" dirty="0">
+              <a:latin typeface="メイリオ"/>
+              <a:ea typeface="メイリオ"/>
+              <a:cs typeface="メイリオ"/>
+            </a:endParaRPr>
+          </a:p>
+          <a:p>
+            <a:endParaRPr lang="en-US" altLang="ja-JP" sz="1400" dirty="0">
+              <a:latin typeface="メイリオ"/>
+              <a:ea typeface="メイリオ"/>
+              <a:cs typeface="メイリオ"/>
+            </a:endParaRPr>
+          </a:p>
+          <a:p>
+            <a:r>
+              <a:rPr lang="ja-JP" altLang="en-US" sz="1400" dirty="0">
+                <a:latin typeface="メイリオ"/>
+                <a:ea typeface="メイリオ"/>
+                <a:cs typeface="メイリオ"/>
+              </a:rPr>
+              <a:t>　議題⑧：</a:t>
+            </a:r>
+            <a:r>
+              <a:rPr lang="en-US" altLang="ja-JP" sz="1400" dirty="0">
+                <a:latin typeface="メイリオ"/>
+                <a:ea typeface="メイリオ"/>
+                <a:cs typeface="メイリオ"/>
+              </a:rPr>
+              <a:t>AI</a:t>
+            </a:r>
+            <a:r>
+              <a:rPr lang="ja-JP" altLang="en-US" sz="1400" dirty="0">
+                <a:latin typeface="メイリオ"/>
+                <a:ea typeface="メイリオ"/>
+                <a:cs typeface="メイリオ"/>
+              </a:rPr>
+              <a:t>エージェント「</a:t>
+            </a:r>
+            <a:r>
+              <a:rPr lang="en-US" altLang="ja-JP" sz="1400" dirty="0">
+                <a:latin typeface="メイリオ"/>
+                <a:ea typeface="メイリオ"/>
+                <a:cs typeface="メイリオ"/>
+              </a:rPr>
+              <a:t>Kiro</a:t>
+            </a:r>
+            <a:r>
+              <a:rPr lang="ja-JP" altLang="en-US" sz="1400" dirty="0">
+                <a:latin typeface="メイリオ"/>
+                <a:ea typeface="メイリオ"/>
+                <a:cs typeface="メイリオ"/>
+              </a:rPr>
+              <a:t>」セミナー受講報告と社内活用について</a:t>
+            </a:r>
+            <a:endParaRPr lang="en-US" altLang="ja-JP" sz="1400" dirty="0">
+              <a:latin typeface="メイリオ"/>
+              <a:ea typeface="メイリオ"/>
+              <a:cs typeface="メイリオ"/>
+            </a:endParaRPr>
+          </a:p>
+          <a:p>
+            <a:endParaRPr lang="en-US" altLang="ja-JP" sz="1400" dirty="0">
+              <a:latin typeface="メイリオ"/>
+              <a:ea typeface="メイリオ"/>
+              <a:cs typeface="メイリオ"/>
+            </a:endParaRPr>
+          </a:p>
+          <a:p>
+            <a:r>
+              <a:rPr lang="ja-JP" altLang="en-US" sz="1400" dirty="0">
+                <a:latin typeface="メイリオ"/>
+                <a:ea typeface="メイリオ"/>
+                <a:cs typeface="メイリオ"/>
+              </a:rPr>
+              <a:t>　議題⑨：</a:t>
+            </a:r>
+            <a:r>
+              <a:rPr lang="en-US" altLang="ja-JP" sz="1400" dirty="0">
+                <a:latin typeface="メイリオ"/>
+                <a:ea typeface="メイリオ"/>
+                <a:cs typeface="メイリオ"/>
+              </a:rPr>
+              <a:t>AI</a:t>
+            </a:r>
+            <a:r>
+              <a:rPr lang="ja-JP" altLang="en-US" sz="1400" dirty="0">
+                <a:latin typeface="メイリオ"/>
+                <a:ea typeface="メイリオ"/>
+                <a:cs typeface="メイリオ"/>
+              </a:rPr>
+              <a:t>活用・業務効率化についての共有</a:t>
+            </a:r>
+            <a:endParaRPr lang="en-US" altLang="ja-JP" sz="1400" dirty="0">
+              <a:latin typeface="メイリオ"/>
+              <a:ea typeface="メイリオ"/>
+              <a:cs typeface="メイリオ"/>
+            </a:endParaRPr>
+          </a:p>
+          <a:p>
+            <a:endParaRPr lang="en-US" altLang="ja-JP" sz="1400" dirty="0">
+              <a:latin typeface="メイリオ"/>
+              <a:ea typeface="メイリオ"/>
+              <a:cs typeface="メイリオ"/>
+            </a:endParaRPr>
+          </a:p>
+          <a:p>
+            <a:r>
+              <a:rPr lang="ja-JP" altLang="en-US" sz="1400" dirty="0">
+                <a:latin typeface="メイリオ"/>
+                <a:ea typeface="メイリオ"/>
+                <a:cs typeface="メイリオ"/>
+              </a:rPr>
+              <a:t>　議題⑩：</a:t>
+            </a:r>
+            <a:r>
+              <a:rPr lang="ja-JP" altLang="en-US" sz="1400" dirty="0">
+                <a:uFillTx/>
+                <a:latin typeface="メイリオ"/>
+                <a:ea typeface="メイリオ"/>
+                <a:cs typeface="メイリオ"/>
+              </a:rPr>
+              <a:t>ＥＣサービス部部会の今後の予定</a:t>
+            </a:r>
+            <a:endParaRPr lang="en-US" altLang="ja-JP" sz="1400" dirty="0">
+              <a:latin typeface="メイリオ"/>
+              <a:ea typeface="メイリオ"/>
+              <a:cs typeface="メイリオ"/>
+            </a:endParaRPr>
+          </a:p>
+          <a:p>
+            <a:endParaRPr lang="en-US" altLang="ja-JP" sz="1400" dirty="0">
+              <a:latin typeface="メイリオ"/>
+              <a:ea typeface="メイリオ"/>
+              <a:cs typeface="メイリオ"/>
+            </a:endParaRPr>
+          </a:p>
+          <a:p>
+            <a:r>
+              <a:rPr lang="ja-JP" altLang="en-US" sz="1400" dirty="0">
+                <a:latin typeface="メイリオ"/>
+                <a:ea typeface="メイリオ"/>
+                <a:cs typeface="メイリオ"/>
+              </a:rPr>
+              <a:t>　議題⑪：連絡事項</a:t>
+            </a:r>
+            <a:endParaRPr lang="en-US" altLang="ja-JP" sz="1400" dirty="0">
+              <a:latin typeface="メイリオ"/>
+              <a:ea typeface="メイリオ"/>
+              <a:cs typeface="メイリオ"/>
+            </a:endParaRPr>
+          </a:p>
+        </p:txBody>
+      </p:sp>
+    </p:spTree>
+  </p:cSld>
+  <p:clrMapOvr>
+    <a:masterClrMapping/>
+  </p:clrMapOvr>
+</p:sld>
+</file>
+
+<file path=ppt/slides/slide20.xml><?xml version="1.0" encoding="utf-8"?>
 <p:sld xmlns:a="http://schemas.openxmlformats.org/drawingml/2006/main" xmlns:r="http://schemas.openxmlformats.org/officeDocument/2006/relationships" xmlns:p="http://schemas.openxmlformats.org/presentationml/2006/main">
   <p:cSld>
     <p:spTree>
@@ -15503,598 +16874,7 @@
 </p:sld>
 </file>
 
-<file path=ppt/slides/slide2.xml><?xml version="1.0" encoding="utf-8"?>
-<p:sld xmlns:a="http://schemas.openxmlformats.org/drawingml/2006/main" xmlns:r="http://schemas.openxmlformats.org/officeDocument/2006/relationships" xmlns:p="http://schemas.openxmlformats.org/presentationml/2006/main">
-  <p:cSld>
-    <p:spTree>
-      <p:nvGrpSpPr>
-        <p:cNvPr id="1" name=""/>
-        <p:cNvGrpSpPr/>
-        <p:nvPr/>
-      </p:nvGrpSpPr>
-      <p:grpSpPr>
-        <a:xfrm>
-          <a:off x="0" y="0"/>
-          <a:ext cx="0" cy="0"/>
-          <a:chOff x="0" y="0"/>
-          <a:chExt cx="0" cy="0"/>
-        </a:xfrm>
-      </p:grpSpPr>
-      <p:sp>
-        <p:nvSpPr>
-          <p:cNvPr id="6" name="テキスト ボックス 5"/>
-          <p:cNvSpPr txBox="1">
-            <a:spLocks/>
-          </p:cNvSpPr>
-          <p:nvPr/>
-        </p:nvSpPr>
-        <p:spPr>
-          <a:xfrm>
-            <a:off x="1136576" y="188641"/>
-            <a:ext cx="6408712" cy="469359"/>
-          </a:xfrm>
-          <a:prstGeom prst="rect">
-            <a:avLst/>
-          </a:prstGeom>
-          <a:noFill/>
-        </p:spPr>
-        <p:txBody>
-          <a:bodyPr wrap="square" rtlCol="0">
-            <a:spAutoFit/>
-          </a:bodyPr>
-          <a:lstStyle/>
-          <a:p>
-            <a:pPr algn="l">
-              <a:lnSpc>
-                <a:spcPct val="130000"/>
-              </a:lnSpc>
-            </a:pPr>
-            <a:r>
-              <a:rPr lang="en-US" altLang="ja-JP" sz="2000" dirty="0">
-                <a:latin typeface="メイリオ" pitchFamily="50" charset="-128"/>
-                <a:ea typeface="メイリオ" pitchFamily="50" charset="-128"/>
-                <a:cs typeface="メイリオ" pitchFamily="50" charset="-128"/>
-              </a:rPr>
-              <a:t>2026/7/30</a:t>
-            </a:r>
-            <a:r>
-              <a:rPr lang="ja-JP" altLang="en-US" sz="2000" dirty="0">
-                <a:latin typeface="メイリオ" pitchFamily="50" charset="-128"/>
-                <a:ea typeface="メイリオ" pitchFamily="50" charset="-128"/>
-                <a:cs typeface="メイリオ" pitchFamily="50" charset="-128"/>
-              </a:rPr>
-              <a:t>　</a:t>
-            </a:r>
-            <a:r>
-              <a:rPr lang="en-US" altLang="ja-JP" sz="2000" dirty="0">
-                <a:latin typeface="メイリオ" pitchFamily="50" charset="-128"/>
-                <a:ea typeface="メイリオ" pitchFamily="50" charset="-128"/>
-                <a:cs typeface="メイリオ" pitchFamily="50" charset="-128"/>
-              </a:rPr>
-              <a:t>EC</a:t>
-            </a:r>
-            <a:r>
-              <a:rPr lang="ja-JP" altLang="en-US" sz="2000" dirty="0">
-                <a:latin typeface="メイリオ" pitchFamily="50" charset="-128"/>
-                <a:ea typeface="メイリオ" pitchFamily="50" charset="-128"/>
-                <a:cs typeface="メイリオ" pitchFamily="50" charset="-128"/>
-              </a:rPr>
-              <a:t>サービス部部会　アジェンダ</a:t>
-            </a:r>
-          </a:p>
-        </p:txBody>
-      </p:sp>
-      <p:sp>
-        <p:nvSpPr>
-          <p:cNvPr id="38" name="テキスト ボックス 37"/>
-          <p:cNvSpPr txBox="1">
-            <a:spLocks/>
-          </p:cNvSpPr>
-          <p:nvPr/>
-        </p:nvSpPr>
-        <p:spPr>
-          <a:xfrm>
-            <a:off x="1064569" y="856357"/>
-            <a:ext cx="8064895" cy="5109091"/>
-          </a:xfrm>
-          <a:prstGeom prst="rect">
-            <a:avLst/>
-          </a:prstGeom>
-          <a:noFill/>
-        </p:spPr>
-        <p:txBody>
-          <a:bodyPr wrap="square" rtlCol="0">
-            <a:spAutoFit/>
-          </a:bodyPr>
-          <a:lstStyle/>
-          <a:p>
-            <a:r>
-              <a:rPr lang="en-US" altLang="ja-JP" sz="1600" dirty="0">
-                <a:latin typeface="メイリオ"/>
-                <a:ea typeface="メイリオ"/>
-                <a:cs typeface="メイリオ"/>
-              </a:rPr>
-              <a:t>2026</a:t>
-            </a:r>
-            <a:r>
-              <a:rPr lang="ja-JP" altLang="en-US" sz="1600" dirty="0">
-                <a:latin typeface="メイリオ"/>
-                <a:ea typeface="メイリオ"/>
-                <a:cs typeface="メイリオ"/>
-              </a:rPr>
-              <a:t>年</a:t>
-            </a:r>
-            <a:r>
-              <a:rPr lang="en-US" altLang="ja-JP" sz="1600" dirty="0">
-                <a:latin typeface="メイリオ"/>
-                <a:ea typeface="メイリオ"/>
-                <a:cs typeface="メイリオ"/>
-              </a:rPr>
-              <a:t>7</a:t>
-            </a:r>
-            <a:r>
-              <a:rPr lang="ja-JP" altLang="en-US" sz="1600" dirty="0">
-                <a:latin typeface="メイリオ"/>
-                <a:ea typeface="メイリオ"/>
-                <a:cs typeface="メイリオ"/>
-              </a:rPr>
-              <a:t>月</a:t>
-            </a:r>
-            <a:r>
-              <a:rPr lang="en-US" altLang="ja-JP" sz="1600" dirty="0">
-                <a:latin typeface="メイリオ"/>
-                <a:ea typeface="メイリオ"/>
-                <a:cs typeface="メイリオ"/>
-              </a:rPr>
-              <a:t>30</a:t>
-            </a:r>
-            <a:r>
-              <a:rPr lang="ja-JP" altLang="en-US" sz="1600" dirty="0">
-                <a:latin typeface="メイリオ"/>
-                <a:ea typeface="メイリオ"/>
-                <a:cs typeface="メイリオ"/>
-              </a:rPr>
-              <a:t>日 </a:t>
-            </a:r>
-            <a:r>
-              <a:rPr lang="en-US" altLang="ja-JP" sz="1600" dirty="0">
-                <a:latin typeface="メイリオ"/>
-                <a:ea typeface="メイリオ"/>
-                <a:cs typeface="メイリオ"/>
-              </a:rPr>
-              <a:t>17</a:t>
-            </a:r>
-            <a:r>
-              <a:rPr lang="ja-JP" altLang="en-US" sz="1600" dirty="0">
-                <a:latin typeface="メイリオ"/>
-                <a:ea typeface="メイリオ"/>
-                <a:cs typeface="メイリオ"/>
-              </a:rPr>
-              <a:t>：</a:t>
-            </a:r>
-            <a:r>
-              <a:rPr lang="en-US" altLang="ja-JP" sz="1600" dirty="0">
-                <a:latin typeface="メイリオ"/>
-                <a:ea typeface="メイリオ"/>
-                <a:cs typeface="メイリオ"/>
-              </a:rPr>
-              <a:t>00</a:t>
-            </a:r>
-            <a:r>
-              <a:rPr lang="ja-JP" altLang="en-US" sz="1600" dirty="0">
-                <a:latin typeface="メイリオ"/>
-                <a:ea typeface="メイリオ"/>
-                <a:cs typeface="メイリオ"/>
-              </a:rPr>
-              <a:t>～</a:t>
-            </a:r>
-            <a:r>
-              <a:rPr lang="en-US" altLang="ja-JP" sz="1600" dirty="0">
-                <a:latin typeface="メイリオ"/>
-                <a:ea typeface="メイリオ"/>
-                <a:cs typeface="メイリオ"/>
-              </a:rPr>
-              <a:t>18</a:t>
-            </a:r>
-            <a:r>
-              <a:rPr lang="ja-JP" altLang="en-US" sz="1600" dirty="0">
-                <a:latin typeface="メイリオ"/>
-                <a:ea typeface="メイリオ"/>
-                <a:cs typeface="メイリオ"/>
-              </a:rPr>
-              <a:t>：</a:t>
-            </a:r>
-            <a:r>
-              <a:rPr lang="en-US" altLang="ja-JP" sz="1600" dirty="0">
-                <a:latin typeface="メイリオ"/>
-                <a:ea typeface="メイリオ"/>
-                <a:cs typeface="メイリオ"/>
-              </a:rPr>
-              <a:t>00 </a:t>
-            </a:r>
-            <a:r>
-              <a:rPr lang="ja-JP" altLang="en-US" sz="1600" dirty="0">
-                <a:latin typeface="メイリオ"/>
-                <a:ea typeface="メイリオ"/>
-                <a:cs typeface="メイリオ"/>
-              </a:rPr>
-              <a:t>　</a:t>
-            </a:r>
-            <a:r>
-              <a:rPr lang="en-US" altLang="ja-JP" sz="1600" dirty="0">
-                <a:latin typeface="メイリオ" pitchFamily="50" charset="-128"/>
-                <a:ea typeface="メイリオ" pitchFamily="50" charset="-128"/>
-                <a:cs typeface="メイリオ" pitchFamily="50" charset="-128"/>
-              </a:rPr>
-              <a:t> EC</a:t>
-            </a:r>
-            <a:r>
-              <a:rPr lang="ja-JP" altLang="en-US" sz="1600" dirty="0">
-                <a:latin typeface="メイリオ" pitchFamily="50" charset="-128"/>
-                <a:ea typeface="メイリオ" pitchFamily="50" charset="-128"/>
-                <a:cs typeface="メイリオ" pitchFamily="50" charset="-128"/>
-              </a:rPr>
-              <a:t>サービス部部会</a:t>
-            </a:r>
-            <a:endParaRPr lang="en-US" altLang="ja-JP" sz="1600" dirty="0">
-              <a:latin typeface="メイリオ"/>
-              <a:ea typeface="メイリオ"/>
-              <a:cs typeface="メイリオ"/>
-            </a:endParaRPr>
-          </a:p>
-          <a:p>
-            <a:endParaRPr lang="en-US" altLang="ja-JP" sz="1600" dirty="0">
-              <a:latin typeface="メイリオ"/>
-              <a:ea typeface="メイリオ"/>
-              <a:cs typeface="メイリオ"/>
-            </a:endParaRPr>
-          </a:p>
-          <a:p>
-            <a:r>
-              <a:rPr lang="ja-JP" altLang="en-US" sz="1400" dirty="0">
-                <a:latin typeface="メイリオ"/>
-                <a:ea typeface="メイリオ"/>
-                <a:cs typeface="メイリオ"/>
-              </a:rPr>
-              <a:t>　議題①：ＥＣサービス部の現状と今後の展開について</a:t>
-            </a:r>
-            <a:endParaRPr lang="en-US" altLang="zh-TW" sz="1400" dirty="0">
-              <a:latin typeface="メイリオ"/>
-              <a:ea typeface="メイリオ"/>
-              <a:cs typeface="メイリオ"/>
-            </a:endParaRPr>
-          </a:p>
-          <a:p>
-            <a:endParaRPr lang="en-US" altLang="ja-JP" sz="1400" dirty="0">
-              <a:solidFill>
-                <a:srgbClr val="FF0000"/>
-              </a:solidFill>
-              <a:latin typeface="メイリオ"/>
-              <a:ea typeface="メイリオ"/>
-              <a:cs typeface="メイリオ"/>
-            </a:endParaRPr>
-          </a:p>
-          <a:p>
-            <a:r>
-              <a:rPr lang="ja-JP" altLang="en-US" sz="1400" dirty="0">
-                <a:latin typeface="メイリオ"/>
-                <a:ea typeface="メイリオ"/>
-                <a:cs typeface="メイリオ"/>
-              </a:rPr>
-              <a:t>　議題②：既存顧客について</a:t>
-            </a:r>
-            <a:endParaRPr lang="en-US" altLang="ja-JP" sz="1400" dirty="0">
-              <a:latin typeface="メイリオ"/>
-              <a:ea typeface="メイリオ"/>
-              <a:cs typeface="メイリオ"/>
-            </a:endParaRPr>
-          </a:p>
-          <a:p>
-            <a:endParaRPr lang="en-US" altLang="ja-JP" sz="1400" dirty="0">
-              <a:latin typeface="メイリオ"/>
-              <a:ea typeface="メイリオ"/>
-              <a:cs typeface="メイリオ"/>
-            </a:endParaRPr>
-          </a:p>
-          <a:p>
-            <a:r>
-              <a:rPr lang="ja-JP" altLang="en-US" sz="1400" dirty="0">
-                <a:latin typeface="メイリオ"/>
-                <a:ea typeface="メイリオ"/>
-                <a:cs typeface="メイリオ"/>
-              </a:rPr>
-              <a:t>　議題③：旧パッケージの開発案件について</a:t>
-            </a:r>
-            <a:endParaRPr lang="en-US" altLang="ja-JP" sz="1400" dirty="0">
-              <a:latin typeface="メイリオ"/>
-              <a:ea typeface="メイリオ"/>
-              <a:cs typeface="メイリオ"/>
-            </a:endParaRPr>
-          </a:p>
-          <a:p>
-            <a:endParaRPr lang="ja-JP" altLang="en-US" sz="1400" dirty="0">
-              <a:latin typeface="メイリオ"/>
-              <a:ea typeface="メイリオ"/>
-              <a:cs typeface="メイリオ"/>
-            </a:endParaRPr>
-          </a:p>
-          <a:p>
-            <a:r>
-              <a:rPr lang="ja-JP" altLang="en-US" sz="1400" dirty="0">
-                <a:latin typeface="メイリオ"/>
-                <a:ea typeface="メイリオ"/>
-                <a:cs typeface="メイリオ"/>
-              </a:rPr>
-              <a:t>　議題④：セキュリティ強化対応状況について</a:t>
-            </a:r>
-            <a:endParaRPr lang="en-US" altLang="ja-JP" sz="1400" dirty="0">
-              <a:latin typeface="メイリオ"/>
-              <a:ea typeface="メイリオ"/>
-              <a:cs typeface="メイリオ"/>
-            </a:endParaRPr>
-          </a:p>
-          <a:p>
-            <a:endParaRPr lang="en-US" altLang="ja-JP" sz="1400" dirty="0">
-              <a:latin typeface="メイリオ"/>
-              <a:ea typeface="メイリオ"/>
-              <a:cs typeface="メイリオ"/>
-            </a:endParaRPr>
-          </a:p>
-          <a:p>
-            <a:r>
-              <a:rPr lang="ja-JP" altLang="en-US" sz="1400" dirty="0">
-                <a:latin typeface="メイリオ"/>
-                <a:ea typeface="メイリオ"/>
-                <a:cs typeface="メイリオ"/>
-              </a:rPr>
-              <a:t>　議題⑤：新パッケージのバージョンアップ状況について</a:t>
-            </a:r>
-            <a:endParaRPr lang="en-US" altLang="ja-JP" sz="1400" dirty="0">
-              <a:latin typeface="メイリオ"/>
-              <a:ea typeface="メイリオ"/>
-              <a:cs typeface="メイリオ"/>
-            </a:endParaRPr>
-          </a:p>
-          <a:p>
-            <a:endParaRPr lang="en-US" altLang="ja-JP" sz="1400" dirty="0">
-              <a:latin typeface="メイリオ"/>
-              <a:ea typeface="メイリオ"/>
-              <a:cs typeface="メイリオ"/>
-            </a:endParaRPr>
-          </a:p>
-          <a:p>
-            <a:r>
-              <a:rPr lang="ja-JP" altLang="en-US" sz="1400" dirty="0">
-                <a:latin typeface="メイリオ"/>
-                <a:ea typeface="メイリオ"/>
-                <a:cs typeface="メイリオ"/>
-              </a:rPr>
-              <a:t>　議題⑥：</a:t>
-            </a:r>
-            <a:r>
-              <a:rPr lang="en-US" altLang="ja-JP" sz="1400" dirty="0"/>
-              <a:t> </a:t>
-            </a:r>
-            <a:r>
-              <a:rPr lang="en-US" altLang="ja-JP" sz="1400" dirty="0" err="1">
-                <a:latin typeface="メイリオ" panose="020B0604030504040204" pitchFamily="50" charset="-128"/>
-                <a:ea typeface="メイリオ" panose="020B0604030504040204" pitchFamily="50" charset="-128"/>
-              </a:rPr>
-              <a:t>ECRider</a:t>
-            </a:r>
-            <a:r>
-              <a:rPr lang="ja-JP" altLang="en-US" sz="1400" dirty="0">
-                <a:latin typeface="メイリオ" panose="020B0604030504040204" pitchFamily="50" charset="-128"/>
-                <a:ea typeface="メイリオ" panose="020B0604030504040204" pitchFamily="50" charset="-128"/>
-              </a:rPr>
-              <a:t> </a:t>
-            </a:r>
-            <a:r>
-              <a:rPr lang="en-US" altLang="ja-JP" sz="1400" dirty="0">
-                <a:latin typeface="メイリオ" panose="020B0604030504040204" pitchFamily="50" charset="-128"/>
-                <a:ea typeface="メイリオ" panose="020B0604030504040204" pitchFamily="50" charset="-128"/>
-              </a:rPr>
-              <a:t>Primo</a:t>
-            </a:r>
-            <a:r>
-              <a:rPr lang="ja-JP" altLang="en-US" sz="1400" dirty="0">
-                <a:latin typeface="メイリオ" panose="020B0604030504040204" pitchFamily="50" charset="-128"/>
-                <a:ea typeface="メイリオ" panose="020B0604030504040204" pitchFamily="50" charset="-128"/>
-              </a:rPr>
-              <a:t>の受注状況</a:t>
-            </a:r>
-            <a:r>
-              <a:rPr lang="ja-JP" altLang="en-US" sz="1400" dirty="0">
-                <a:latin typeface="メイリオ" panose="020B0604030504040204" pitchFamily="50" charset="-128"/>
-                <a:ea typeface="メイリオ" panose="020B0604030504040204" pitchFamily="50" charset="-128"/>
-                <a:cs typeface="メイリオ"/>
-              </a:rPr>
-              <a:t>について</a:t>
-            </a:r>
-            <a:endParaRPr lang="en-US" altLang="ja-JP" sz="1400" dirty="0">
-              <a:latin typeface="メイリオ" panose="020B0604030504040204" pitchFamily="50" charset="-128"/>
-              <a:ea typeface="メイリオ" panose="020B0604030504040204" pitchFamily="50" charset="-128"/>
-              <a:cs typeface="メイリオ"/>
-            </a:endParaRPr>
-          </a:p>
-          <a:p>
-            <a:endParaRPr lang="en-US" altLang="ja-JP" sz="1400" dirty="0">
-              <a:latin typeface="メイリオ"/>
-              <a:ea typeface="メイリオ"/>
-              <a:cs typeface="メイリオ"/>
-            </a:endParaRPr>
-          </a:p>
-          <a:p>
-            <a:r>
-              <a:rPr lang="ja-JP" altLang="en-US" sz="1400" dirty="0">
-                <a:latin typeface="メイリオ"/>
-                <a:ea typeface="メイリオ"/>
-                <a:cs typeface="メイリオ"/>
-              </a:rPr>
-              <a:t>　議題⑦：営業案件について</a:t>
-            </a:r>
-            <a:endParaRPr lang="en-US" altLang="ja-JP" sz="1400" dirty="0">
-              <a:latin typeface="メイリオ"/>
-              <a:ea typeface="メイリオ"/>
-              <a:cs typeface="メイリオ"/>
-            </a:endParaRPr>
-          </a:p>
-          <a:p>
-            <a:endParaRPr lang="en-US" altLang="ja-JP" sz="1400" dirty="0">
-              <a:latin typeface="メイリオ"/>
-              <a:ea typeface="メイリオ"/>
-              <a:cs typeface="メイリオ"/>
-            </a:endParaRPr>
-          </a:p>
-          <a:p>
-            <a:r>
-              <a:rPr lang="ja-JP" altLang="en-US" sz="1400" dirty="0">
-                <a:latin typeface="メイリオ"/>
-                <a:ea typeface="メイリオ"/>
-                <a:cs typeface="メイリオ"/>
-              </a:rPr>
-              <a:t>　議題⑧：</a:t>
-            </a:r>
-            <a:r>
-              <a:rPr lang="en-US" altLang="ja-JP" sz="1400" dirty="0">
-                <a:latin typeface="メイリオ"/>
-                <a:ea typeface="メイリオ"/>
-                <a:cs typeface="メイリオ"/>
-              </a:rPr>
-              <a:t>AI</a:t>
-            </a:r>
-            <a:r>
-              <a:rPr lang="ja-JP" altLang="en-US" sz="1400" dirty="0">
-                <a:latin typeface="メイリオ"/>
-                <a:ea typeface="メイリオ"/>
-                <a:cs typeface="メイリオ"/>
-              </a:rPr>
-              <a:t>エージェント「</a:t>
-            </a:r>
-            <a:r>
-              <a:rPr lang="en-US" altLang="ja-JP" sz="1400" dirty="0">
-                <a:latin typeface="メイリオ"/>
-                <a:ea typeface="メイリオ"/>
-                <a:cs typeface="メイリオ"/>
-              </a:rPr>
-              <a:t>Kiro</a:t>
-            </a:r>
-            <a:r>
-              <a:rPr lang="ja-JP" altLang="en-US" sz="1400" dirty="0">
-                <a:latin typeface="メイリオ"/>
-                <a:ea typeface="メイリオ"/>
-                <a:cs typeface="メイリオ"/>
-              </a:rPr>
-              <a:t>」セミナー受講報告と社内活用について</a:t>
-            </a:r>
-            <a:endParaRPr lang="en-US" altLang="ja-JP" sz="1400" dirty="0">
-              <a:latin typeface="メイリオ"/>
-              <a:ea typeface="メイリオ"/>
-              <a:cs typeface="メイリオ"/>
-            </a:endParaRPr>
-          </a:p>
-          <a:p>
-            <a:endParaRPr lang="en-US" altLang="ja-JP" sz="1400" dirty="0">
-              <a:latin typeface="メイリオ"/>
-              <a:ea typeface="メイリオ"/>
-              <a:cs typeface="メイリオ"/>
-            </a:endParaRPr>
-          </a:p>
-          <a:p>
-            <a:r>
-              <a:rPr lang="ja-JP" altLang="en-US" sz="1400" dirty="0">
-                <a:latin typeface="メイリオ"/>
-                <a:ea typeface="メイリオ"/>
-                <a:cs typeface="メイリオ"/>
-              </a:rPr>
-              <a:t>　議題⑨：</a:t>
-            </a:r>
-            <a:r>
-              <a:rPr lang="en-US" altLang="ja-JP" sz="1400" dirty="0">
-                <a:latin typeface="メイリオ"/>
-                <a:ea typeface="メイリオ"/>
-                <a:cs typeface="メイリオ"/>
-              </a:rPr>
-              <a:t>AI</a:t>
-            </a:r>
-            <a:r>
-              <a:rPr lang="ja-JP" altLang="en-US" sz="1400" dirty="0">
-                <a:latin typeface="メイリオ"/>
-                <a:ea typeface="メイリオ"/>
-                <a:cs typeface="メイリオ"/>
-              </a:rPr>
-              <a:t>活用・業務効率化についての共有</a:t>
-            </a:r>
-            <a:endParaRPr lang="en-US" altLang="ja-JP" sz="1400" dirty="0">
-              <a:latin typeface="メイリオ"/>
-              <a:ea typeface="メイリオ"/>
-              <a:cs typeface="メイリオ"/>
-            </a:endParaRPr>
-          </a:p>
-          <a:p>
-            <a:endParaRPr lang="en-US" altLang="ja-JP" sz="1400" dirty="0">
-              <a:latin typeface="メイリオ"/>
-              <a:ea typeface="メイリオ"/>
-              <a:cs typeface="メイリオ"/>
-            </a:endParaRPr>
-          </a:p>
-          <a:p>
-            <a:r>
-              <a:rPr lang="ja-JP" altLang="en-US" sz="1400" dirty="0">
-                <a:latin typeface="メイリオ"/>
-                <a:ea typeface="メイリオ"/>
-                <a:cs typeface="メイリオ"/>
-              </a:rPr>
-              <a:t>　議題⑩：</a:t>
-            </a:r>
-            <a:r>
-              <a:rPr lang="ja-JP" altLang="en-US" sz="1400" dirty="0">
-                <a:uFillTx/>
-                <a:latin typeface="メイリオ"/>
-                <a:ea typeface="メイリオ"/>
-                <a:cs typeface="メイリオ"/>
-              </a:rPr>
-              <a:t>ＥＣサービス部部会の今後の予定</a:t>
-            </a:r>
-            <a:endParaRPr lang="en-US" altLang="ja-JP" sz="1400" dirty="0">
-              <a:latin typeface="メイリオ"/>
-              <a:ea typeface="メイリオ"/>
-              <a:cs typeface="メイリオ"/>
-            </a:endParaRPr>
-          </a:p>
-          <a:p>
-            <a:endParaRPr lang="en-US" altLang="ja-JP" sz="1400" dirty="0">
-              <a:latin typeface="メイリオ"/>
-              <a:ea typeface="メイリオ"/>
-              <a:cs typeface="メイリオ"/>
-            </a:endParaRPr>
-          </a:p>
-          <a:p>
-            <a:r>
-              <a:rPr lang="ja-JP" altLang="en-US" sz="1400" dirty="0">
-                <a:latin typeface="メイリオ"/>
-                <a:ea typeface="メイリオ"/>
-                <a:cs typeface="メイリオ"/>
-              </a:rPr>
-              <a:t>　議題⑪：連絡事項</a:t>
-            </a:r>
-            <a:endParaRPr lang="en-US" altLang="ja-JP" sz="1400" dirty="0">
-              <a:latin typeface="メイリオ"/>
-              <a:ea typeface="メイリオ"/>
-              <a:cs typeface="メイリオ"/>
-            </a:endParaRPr>
-          </a:p>
-        </p:txBody>
-      </p:sp>
-    </p:spTree>
-  </p:cSld>
-  <p:clrMapOvr>
-    <a:masterClrMapping/>
-  </p:clrMapOvr>
-</p:sld>
-</file>
-
-<file path=ppt/slides/slide20.xml><?xml version="1.0" encoding="utf-8"?>
+<file path=ppt/slides/slide21.xml><?xml version="1.0" encoding="utf-8"?>
 <p:sld xmlns:a="http://schemas.openxmlformats.org/drawingml/2006/main" xmlns:r="http://schemas.openxmlformats.org/officeDocument/2006/relationships" xmlns:p="http://schemas.openxmlformats.org/presentationml/2006/main">
   <p:cSld>
     <p:spTree>
@@ -16622,7 +17402,7 @@
 </p:sld>
 </file>
 
-<file path=ppt/slides/slide21.xml><?xml version="1.0" encoding="utf-8"?>
+<file path=ppt/slides/slide22.xml><?xml version="1.0" encoding="utf-8"?>
 <p:sld xmlns:a="http://schemas.openxmlformats.org/drawingml/2006/main" xmlns:p="http://schemas.openxmlformats.org/presentationml/2006/main" xmlns:r="http://schemas.openxmlformats.org/officeDocument/2006/relationships">
   <p:cSld>
     <p:spTree>
@@ -16673,16 +17453,6 @@
               </a:lnSpc>
             </a:pPr>
             <a:r>
-              <a:rPr sz="2000" b="0">
-                <a:solidFill>
-                  <a:srgbClr val="333333"/>
-                </a:solidFill>
-                <a:latin typeface="メイリオ"/>
-                <a:ea typeface="メイリオ"/>
-              </a:rPr>
-              <a:t>5. </a:t>
-            </a:r>
-            <a:r>
               <a:rPr sz="1800" b="0">
                 <a:solidFill>
                   <a:srgbClr val="333333"/>
@@ -16690,7 +17460,17 @@
                 <a:latin typeface="メイリオ"/>
                 <a:ea typeface="メイリオ"/>
               </a:rPr>
-              <a:t>新パッケージのバージョンアップ状況について　その２</a:t>
+              <a:t>5. </a:t>
+            </a:r>
+            <a:r>
+              <a:rPr sz="1600" b="0">
+                <a:solidFill>
+                  <a:srgbClr val="333333"/>
+                </a:solidFill>
+                <a:latin typeface="メイリオ"/>
+                <a:ea typeface="メイリオ"/>
+              </a:rPr>
+              <a:t>ジョブ途中再開（Active Job Continuations）とは</a:t>
             </a:r>
             <a:endParaRPr lang="ja-JP" altLang="en-US" sz="2000" dirty="0">
               <a:latin typeface="メイリオ" pitchFamily="50" charset="-128"/>
@@ -16708,8 +17488,8 @@
         </p:nvSpPr>
         <p:spPr>
           <a:xfrm>
-            <a:off x="450000" y="680000"/>
-            <a:ext cx="9200000" cy="300000"/>
+            <a:off x="500000" y="700000"/>
+            <a:ext cx="9000000" cy="900000"/>
           </a:xfrm>
           <a:prstGeom prst="rect">
             <a:avLst/>
@@ -16738,7 +17518,47 @@
                 <a:latin typeface="メイリオ"/>
                 <a:ea typeface="メイリオ"/>
               </a:rPr>
-              <a:t>どのアップデートで → 何ができて → 今後どう使えるか</a:t>
+              <a:t>■ 何の話か（重要）</a:t>
+            </a:r>
+          </a:p>
+          <a:p>
+            <a:pPr>
+              <a:spcBef>
+                <a:spcPts val="0"/>
+              </a:spcBef>
+              <a:spcAft>
+                <a:spcPts val="100"/>
+              </a:spcAft>
+            </a:pPr>
+            <a:r>
+              <a:rPr sz="1200" b="0">
+                <a:solidFill>
+                  <a:srgbClr val="333333"/>
+                </a:solidFill>
+                <a:latin typeface="メイリオ"/>
+                <a:ea typeface="メイリオ"/>
+              </a:rPr>
+              <a:t>・対象は「同じ実行ジョブ」の続き　例：CSV取込／CSV出力ジョブ</a:t>
+            </a:r>
+          </a:p>
+          <a:p>
+            <a:pPr>
+              <a:spcBef>
+                <a:spcPts val="0"/>
+              </a:spcBef>
+              <a:spcAft>
+                <a:spcPts val="100"/>
+              </a:spcAft>
+            </a:pPr>
+            <a:r>
+              <a:rPr sz="1200" b="0">
+                <a:solidFill>
+                  <a:srgbClr val="333333"/>
+                </a:solidFill>
+                <a:latin typeface="メイリオ"/>
+                <a:ea typeface="メイリオ"/>
+              </a:rPr>
+              <a:t>・別ファイルをもう一度取り込む＝新規ジョブ（続き再開ではない）</a:t>
             </a:r>
           </a:p>
         </p:txBody>
@@ -16752,8 +17572,8 @@
           <p:nvPr/>
         </p:nvGraphicFramePr>
         <p:xfrm>
-          <a:off x="350000" y="1000000"/>
-          <a:ext cx="9200000" cy="5200000"/>
+          <a:off x="500000" y="1650000"/>
+          <a:ext cx="9000000" cy="1600000"/>
         </p:xfrm>
         <a:graphic>
           <a:graphicData uri="http://schemas.openxmlformats.org/drawingml/2006/table">
@@ -16762,12 +17582,11 @@
                 <a:tableStyleId>{5C22544A-7EE6-4342-B048-85BDC9FD1C3A}</a:tableStyleId>
               </a:tblPr>
               <a:tblGrid>
-                <a:gridCol w="1400000"/>
-                <a:gridCol w="2300000"/>
-                <a:gridCol w="2700000"/>
-                <a:gridCol w="2800000"/>
+                <a:gridCol w="2200000"/>
+                <a:gridCol w="3400000"/>
+                <a:gridCol w="3400000"/>
               </a:tblGrid>
-              <a:tr h="866666">
+              <a:tr h="533333">
                 <a:tc>
                   <a:txBody>
                     <a:bodyPr/>
@@ -16775,14 +17594,14 @@
                     <a:p>
                       <a:pPr algn="ctr"/>
                       <a:r>
-                        <a:rPr sz="1100" b="1">
+                        <a:rPr sz="1000" b="1">
                           <a:solidFill>
                             <a:srgbClr val="FFFFFF"/>
                           </a:solidFill>
                           <a:latin typeface="メイリオ"/>
                           <a:ea typeface="メイリオ"/>
                         </a:rPr>
-                        <a:t>アップデート</a:t>
+                        <a:t>観点</a:t>
                       </a:r>
                     </a:p>
                   </a:txBody>
@@ -16799,14 +17618,14 @@
                     <a:p>
                       <a:pPr algn="ctr"/>
                       <a:r>
-                        <a:rPr sz="1100" b="1">
+                        <a:rPr sz="1000" b="1">
                           <a:solidFill>
                             <a:srgbClr val="FFFFFF"/>
                           </a:solidFill>
                           <a:latin typeface="メイリオ"/>
                           <a:ea typeface="メイリオ"/>
                         </a:rPr>
-                        <a:t>新機能</a:t>
+                        <a:t>これまで（標準のまま）</a:t>
                       </a:r>
                     </a:p>
                   </a:txBody>
@@ -16823,14 +17642,14 @@
                     <a:p>
                       <a:pPr algn="ctr"/>
                       <a:r>
-                        <a:rPr sz="1100" b="1">
+                        <a:rPr sz="1000" b="1">
                           <a:solidFill>
                             <a:srgbClr val="FFFFFF"/>
                           </a:solidFill>
                           <a:latin typeface="メイリオ"/>
                           <a:ea typeface="メイリオ"/>
                         </a:rPr>
-                        <a:t>できるようになること</a:t>
+                        <a:t>Rails 8.1 Continuations</a:t>
                       </a:r>
                     </a:p>
                   </a:txBody>
@@ -16840,32 +17659,8 @@
                     </a:solidFill>
                   </a:tcPr>
                 </a:tc>
-                <a:tc>
-                  <a:txBody>
-                    <a:bodyPr/>
-                    <a:lstStyle/>
-                    <a:p>
-                      <a:pPr algn="ctr"/>
-                      <a:r>
-                        <a:rPr sz="1100" b="1">
-                          <a:solidFill>
-                            <a:srgbClr val="FFFFFF"/>
-                          </a:solidFill>
-                          <a:latin typeface="メイリオ"/>
-                          <a:ea typeface="メイリオ"/>
-                        </a:rPr>
-                        <a:t>今後の活用イメージ</a:t>
-                      </a:r>
-                    </a:p>
-                  </a:txBody>
-                  <a:tcPr anchor="ctr">
-                    <a:solidFill>
-                      <a:srgbClr val="1F4E79"/>
-                    </a:solidFill>
-                  </a:tcPr>
-                </a:tc>
               </a:tr>
-              <a:tr h="866666">
+              <a:tr h="533333">
                 <a:tc>
                   <a:txBody>
                     <a:bodyPr/>
@@ -16880,8 +17675,8 @@
                           <a:latin typeface="メイリオ"/>
                           <a:ea typeface="メイリオ"/>
                         </a:rPr>
-                        <a:t>Ruby
-3.2→3.4</a:t>
+                        <a:t>途中でジョブ停止
+（デプロイ・再起動など）</a:t>
                       </a:r>
                     </a:p>
                   </a:txBody>
@@ -16901,8 +17696,8 @@
                           <a:latin typeface="メイリオ"/>
                           <a:ea typeface="メイリオ"/>
                         </a:rPr>
-                        <a:t>外部接続の改善
-(Happy Eyeballs v2)</a:t>
+                        <a:t>同じジョブを続きから再開する仕組みは
+基本手作りが必要</a:t>
                       </a:r>
                     </a:p>
                   </a:txBody>
@@ -16922,12 +17717,38 @@
                           <a:latin typeface="メイリオ"/>
                           <a:ea typeface="メイリオ"/>
                         </a:rPr>
-                        <a:t>IPv4/IPv6を並行して接続試行し、
-外部通信の確立をより確実にできる</a:t>
+                        <a:t>ステップ／進捗を残して
+同じジョブを続きから再開しやすい</a:t>
                       </a:r>
                     </a:p>
                   </a:txBody>
                   <a:tcPr anchor="ctr"/>
+                </a:tc>
+              </a:tr>
+              <a:tr h="533334">
+                <a:tc>
+                  <a:txBody>
+                    <a:bodyPr/>
+                    <a:lstStyle/>
+                    <a:p>
+                      <a:pPr algn="l"/>
+                      <a:r>
+                        <a:rPr sz="1000" b="1">
+                          <a:solidFill>
+                            <a:srgbClr val="333333"/>
+                          </a:solidFill>
+                          <a:latin typeface="メイリオ"/>
+                          <a:ea typeface="メイリオ"/>
+                        </a:rPr>
+                        <a:t>もう一度取り込み直す</a:t>
+                      </a:r>
+                    </a:p>
+                  </a:txBody>
+                  <a:tcPr anchor="ctr">
+                    <a:solidFill>
+                      <a:srgbClr val="D6E3F0"/>
+                    </a:solidFill>
+                  </a:tcPr>
                 </a:tc>
                 <a:tc>
                   <a:txBody>
@@ -16943,31 +17764,8 @@
                           <a:latin typeface="メイリオ"/>
                           <a:ea typeface="メイリオ"/>
                         </a:rPr>
-                        <a:t>基幹・決済・配送など外部API連携の
-接続まわりを安定させやすい</a:t>
-                      </a:r>
-                    </a:p>
-                  </a:txBody>
-                  <a:tcPr anchor="ctr"/>
-                </a:tc>
-              </a:tr>
-              <a:tr h="866666">
-                <a:tc>
-                  <a:txBody>
-                    <a:bodyPr/>
-                    <a:lstStyle/>
-                    <a:p>
-                      <a:pPr algn="l"/>
-                      <a:r>
-                        <a:rPr sz="1000" b="1">
-                          <a:solidFill>
-                            <a:srgbClr val="333333"/>
-                          </a:solidFill>
-                          <a:latin typeface="メイリオ"/>
-                          <a:ea typeface="メイリオ"/>
-                        </a:rPr>
-                        <a:t>Rails
-7.2→8.1</a:t>
+                        <a:t>履歴・ジョブが新規にできる
+＝別の命令</a:t>
                       </a:r>
                     </a:p>
                   </a:txBody>
@@ -16991,8 +17789,8 @@
                           <a:latin typeface="メイリオ"/>
                           <a:ea typeface="メイリオ"/>
                         </a:rPr>
-                        <a:t>ジョブ途中再開
-(Active Job Continuations)</a:t>
+                        <a:t>同様に新規ジョブ
+（再開機能の対象外）</a:t>
                       </a:r>
                     </a:p>
                   </a:txBody>
@@ -17001,329 +17799,6 @@
                       <a:srgbClr val="D6E3F0"/>
                     </a:solidFill>
                   </a:tcPr>
-                </a:tc>
-                <a:tc>
-                  <a:txBody>
-                    <a:bodyPr/>
-                    <a:lstStyle/>
-                    <a:p>
-                      <a:pPr algn="l"/>
-                      <a:r>
-                        <a:rPr sz="1000" b="0">
-                          <a:solidFill>
-                            <a:srgbClr val="333333"/>
-                          </a:solidFill>
-                          <a:latin typeface="メイリオ"/>
-                          <a:ea typeface="メイリオ"/>
-                        </a:rPr>
-                        <a:t>長いバッチを途中で止めても、
-最初からやり直さず再開できる</a:t>
-                      </a:r>
-                    </a:p>
-                  </a:txBody>
-                  <a:tcPr anchor="ctr">
-                    <a:solidFill>
-                      <a:srgbClr val="D6E3F0"/>
-                    </a:solidFill>
-                  </a:tcPr>
-                </a:tc>
-                <a:tc>
-                  <a:txBody>
-                    <a:bodyPr/>
-                    <a:lstStyle/>
-                    <a:p>
-                      <a:pPr algn="l"/>
-                      <a:r>
-                        <a:rPr sz="1000" b="0">
-                          <a:solidFill>
-                            <a:srgbClr val="333333"/>
-                          </a:solidFill>
-                          <a:latin typeface="メイリオ"/>
-                          <a:ea typeface="メイリオ"/>
-                        </a:rPr>
-                        <a:t>受注取込・在庫同期・帳票一括など
-夜間処理の安定運用に使える</a:t>
-                      </a:r>
-                    </a:p>
-                  </a:txBody>
-                  <a:tcPr anchor="ctr">
-                    <a:solidFill>
-                      <a:srgbClr val="D6E3F0"/>
-                    </a:solidFill>
-                  </a:tcPr>
-                </a:tc>
-              </a:tr>
-              <a:tr h="866666">
-                <a:tc>
-                  <a:txBody>
-                    <a:bodyPr/>
-                    <a:lstStyle/>
-                    <a:p>
-                      <a:pPr algn="l"/>
-                      <a:r>
-                        <a:rPr sz="1000" b="1">
-                          <a:solidFill>
-                            <a:srgbClr val="333333"/>
-                          </a:solidFill>
-                          <a:latin typeface="メイリオ"/>
-                          <a:ea typeface="メイリオ"/>
-                        </a:rPr>
-                        <a:t>Rails
-7.2→8.1</a:t>
-                      </a:r>
-                    </a:p>
-                  </a:txBody>
-                  <a:tcPr anchor="ctr"/>
-                </a:tc>
-                <a:tc>
-                  <a:txBody>
-                    <a:bodyPr/>
-                    <a:lstStyle/>
-                    <a:p>
-                      <a:pPr algn="l"/>
-                      <a:r>
-                        <a:rPr sz="1000" b="0">
-                          <a:solidFill>
-                            <a:srgbClr val="333333"/>
-                          </a:solidFill>
-                          <a:latin typeface="メイリオ"/>
-                          <a:ea typeface="メイリオ"/>
-                        </a:rPr>
-                        <a:t>構造化イベント通知
-(Event Reporter)</a:t>
-                      </a:r>
-                    </a:p>
-                  </a:txBody>
-                  <a:tcPr anchor="ctr"/>
-                </a:tc>
-                <a:tc>
-                  <a:txBody>
-                    <a:bodyPr/>
-                    <a:lstStyle/>
-                    <a:p>
-                      <a:pPr algn="l"/>
-                      <a:r>
-                        <a:rPr sz="1000" b="0">
-                          <a:solidFill>
-                            <a:srgbClr val="333333"/>
-                          </a:solidFill>
-                          <a:latin typeface="メイリオ"/>
-                          <a:ea typeface="メイリオ"/>
-                        </a:rPr>
-                        <a:t>「誰が・いつ・何をした」を
-機械可読イベントとして出せる</a:t>
-                      </a:r>
-                    </a:p>
-                  </a:txBody>
-                  <a:tcPr anchor="ctr"/>
-                </a:tc>
-                <a:tc>
-                  <a:txBody>
-                    <a:bodyPr/>
-                    <a:lstStyle/>
-                    <a:p>
-                      <a:pPr algn="l"/>
-                      <a:r>
-                        <a:rPr sz="1000" b="0">
-                          <a:solidFill>
-                            <a:srgbClr val="333333"/>
-                          </a:solidFill>
-                          <a:latin typeface="メイリオ"/>
-                          <a:ea typeface="メイリオ"/>
-                        </a:rPr>
-                        <a:t>監査ログ／障害調査／監視連携で
-運用品質と説明責任を強化できる</a:t>
-                      </a:r>
-                    </a:p>
-                  </a:txBody>
-                  <a:tcPr anchor="ctr"/>
-                </a:tc>
-              </a:tr>
-              <a:tr h="866666">
-                <a:tc>
-                  <a:txBody>
-                    <a:bodyPr/>
-                    <a:lstStyle/>
-                    <a:p>
-                      <a:pPr algn="l"/>
-                      <a:r>
-                        <a:rPr sz="1000" b="1">
-                          <a:solidFill>
-                            <a:srgbClr val="333333"/>
-                          </a:solidFill>
-                          <a:latin typeface="メイリオ"/>
-                          <a:ea typeface="メイリオ"/>
-                        </a:rPr>
-                        <a:t>Rails
-7.2→8.1</a:t>
-                      </a:r>
-                    </a:p>
-                  </a:txBody>
-                  <a:tcPr anchor="ctr">
-                    <a:solidFill>
-                      <a:srgbClr val="D6E3F0"/>
-                    </a:solidFill>
-                  </a:tcPr>
-                </a:tc>
-                <a:tc>
-                  <a:txBody>
-                    <a:bodyPr/>
-                    <a:lstStyle/>
-                    <a:p>
-                      <a:pPr algn="l"/>
-                      <a:r>
-                        <a:rPr sz="1000" b="0">
-                          <a:solidFill>
-                            <a:srgbClr val="333333"/>
-                          </a:solidFill>
-                          <a:latin typeface="メイリオ"/>
-                          <a:ea typeface="メイリオ"/>
-                        </a:rPr>
-                        <a:t>Markdown標準描画</a:t>
-                      </a:r>
-                    </a:p>
-                  </a:txBody>
-                  <a:tcPr anchor="ctr">
-                    <a:solidFill>
-                      <a:srgbClr val="D6E3F0"/>
-                    </a:solidFill>
-                  </a:tcPr>
-                </a:tc>
-                <a:tc>
-                  <a:txBody>
-                    <a:bodyPr/>
-                    <a:lstStyle/>
-                    <a:p>
-                      <a:pPr algn="l"/>
-                      <a:r>
-                        <a:rPr sz="1000" b="0">
-                          <a:solidFill>
-                            <a:srgbClr val="333333"/>
-                          </a:solidFill>
-                          <a:latin typeface="メイリオ"/>
-                          <a:ea typeface="メイリオ"/>
-                        </a:rPr>
-                        <a:t>Markdownをそのまま
-画面やAPI応答に使える</a:t>
-                      </a:r>
-                    </a:p>
-                  </a:txBody>
-                  <a:tcPr anchor="ctr">
-                    <a:solidFill>
-                      <a:srgbClr val="D6E3F0"/>
-                    </a:solidFill>
-                  </a:tcPr>
-                </a:tc>
-                <a:tc>
-                  <a:txBody>
-                    <a:bodyPr/>
-                    <a:lstStyle/>
-                    <a:p>
-                      <a:pPr algn="l"/>
-                      <a:r>
-                        <a:rPr sz="1000" b="0">
-                          <a:solidFill>
-                            <a:srgbClr val="333333"/>
-                          </a:solidFill>
-                          <a:latin typeface="メイリオ"/>
-                          <a:ea typeface="メイリオ"/>
-                        </a:rPr>
-                        <a:t>ヘルプ・提案資料・AI出力の表示基盤
-（Primo伴走支援の説明にも応用可）</a:t>
-                      </a:r>
-                    </a:p>
-                  </a:txBody>
-                  <a:tcPr anchor="ctr">
-                    <a:solidFill>
-                      <a:srgbClr val="D6E3F0"/>
-                    </a:solidFill>
-                  </a:tcPr>
-                </a:tc>
-              </a:tr>
-              <a:tr h="866670">
-                <a:tc>
-                  <a:txBody>
-                    <a:bodyPr/>
-                    <a:lstStyle/>
-                    <a:p>
-                      <a:pPr algn="l"/>
-                      <a:r>
-                        <a:rPr sz="1000" b="1">
-                          <a:solidFill>
-                            <a:srgbClr val="333333"/>
-                          </a:solidFill>
-                          <a:latin typeface="メイリオ"/>
-                          <a:ea typeface="メイリオ"/>
-                        </a:rPr>
-                        <a:t>MariaDB
-10.6→10.11</a:t>
-                      </a:r>
-                    </a:p>
-                  </a:txBody>
-                  <a:tcPr anchor="ctr"/>
-                </a:tc>
-                <a:tc>
-                  <a:txBody>
-                    <a:bodyPr/>
-                    <a:lstStyle/>
-                    <a:p>
-                      <a:pPr algn="l"/>
-                      <a:r>
-                        <a:rPr sz="1000" b="0">
-                          <a:solidFill>
-                            <a:srgbClr val="333333"/>
-                          </a:solidFill>
-                          <a:latin typeface="メイリオ"/>
-                          <a:ea typeface="メイリオ"/>
-                        </a:rPr>
-                        <a:t>UUID型
-／設定の動的変更</a:t>
-                      </a:r>
-                    </a:p>
-                  </a:txBody>
-                  <a:tcPr anchor="ctr"/>
-                </a:tc>
-                <a:tc>
-                  <a:txBody>
-                    <a:bodyPr/>
-                    <a:lstStyle/>
-                    <a:p>
-                      <a:pPr algn="l"/>
-                      <a:r>
-                        <a:rPr sz="1000" b="0">
-                          <a:solidFill>
-                            <a:srgbClr val="333333"/>
-                          </a:solidFill>
-                          <a:latin typeface="メイリオ"/>
-                          <a:ea typeface="メイリオ"/>
-                        </a:rPr>
-                        <a:t>UUIDをDB型で持てる
-一部設定を再起動なしで変更できる</a:t>
-                      </a:r>
-                    </a:p>
-                  </a:txBody>
-                  <a:tcPr anchor="ctr"/>
-                </a:tc>
-                <a:tc>
-                  <a:txBody>
-                    <a:bodyPr/>
-                    <a:lstStyle/>
-                    <a:p>
-                      <a:pPr algn="l"/>
-                      <a:r>
-                        <a:rPr sz="1000" b="0">
-                          <a:solidFill>
-                            <a:srgbClr val="333333"/>
-                          </a:solidFill>
-                          <a:latin typeface="メイリオ"/>
-                          <a:ea typeface="メイリオ"/>
-                        </a:rPr>
-                        <a:t>基幹連携IDの整備や、ピーク時の
-運用チューニングに使える</a:t>
-                      </a:r>
-                    </a:p>
-                  </a:txBody>
-                  <a:tcPr anchor="ctr"/>
                 </a:tc>
               </a:tr>
             </a:tbl>
@@ -17338,8 +17813,8 @@
         </p:nvSpPr>
         <p:spPr>
           <a:xfrm>
-            <a:off x="450000" y="6300000"/>
-            <a:ext cx="9200000" cy="400000"/>
+            <a:off x="500000" y="3400000"/>
+            <a:ext cx="9000000" cy="3000000"/>
           </a:xfrm>
           <a:prstGeom prst="rect">
             <a:avLst/>
@@ -17361,14 +17836,214 @@
               </a:spcAft>
             </a:pPr>
             <a:r>
-              <a:rPr sz="1000" b="0">
+              <a:rPr sz="1300" b="1">
+                <a:solidFill>
+                  <a:srgbClr val="333333"/>
+                </a:solidFill>
+                <a:latin typeface="メイリオ"/>
+                <a:ea typeface="メイリオ"/>
+              </a:rPr>
+              <a:t>■ ECでの当てはめイメージ（CsvFileUploadJob など）</a:t>
+            </a:r>
+          </a:p>
+          <a:p>
+            <a:pPr>
+              <a:spcBef>
+                <a:spcPts val="0"/>
+              </a:spcBef>
+              <a:spcAft>
+                <a:spcPts val="100"/>
+              </a:spcAft>
+            </a:pPr>
+            <a:r>
+              <a:rPr sz="1100" b="0">
+                <a:solidFill>
+                  <a:srgbClr val="333333"/>
+                </a:solidFill>
+                <a:latin typeface="メイリオ"/>
+                <a:ea typeface="メイリオ"/>
+              </a:rPr>
+              <a:t>1. 画面／APIで取込開始 → 取込履歴を作成 → Jobをキュー投入（ここは入口）</a:t>
+            </a:r>
+          </a:p>
+          <a:p>
+            <a:pPr>
+              <a:spcBef>
+                <a:spcPts val="0"/>
+              </a:spcBef>
+              <a:spcAft>
+                <a:spcPts val="100"/>
+              </a:spcAft>
+            </a:pPr>
+            <a:r>
+              <a:rPr sz="1100" b="0">
+                <a:solidFill>
+                  <a:srgbClr val="333333"/>
+                </a:solidFill>
+                <a:latin typeface="メイリオ"/>
+                <a:ea typeface="メイリオ"/>
+              </a:rPr>
+              <a:t>2. Job本体で長時間の行処理を実行（ここが Continuations の適用先）</a:t>
+            </a:r>
+          </a:p>
+          <a:p>
+            <a:pPr>
+              <a:spcBef>
+                <a:spcPts val="0"/>
+              </a:spcBef>
+              <a:spcAft>
+                <a:spcPts val="100"/>
+              </a:spcAft>
+            </a:pPr>
+            <a:r>
+              <a:rPr sz="1100" b="0">
+                <a:solidFill>
+                  <a:srgbClr val="333333"/>
+                </a:solidFill>
+                <a:latin typeface="メイリオ"/>
+                <a:ea typeface="メイリオ"/>
+              </a:rPr>
+              <a:t>3. デプロイ等でJobが途中停止 → 同じ履歴IDのJobを続きから再開しやすくなる</a:t>
+            </a:r>
+          </a:p>
+          <a:p>
+            <a:pPr>
+              <a:spcBef>
+                <a:spcPts val="0"/>
+              </a:spcBef>
+              <a:spcAft>
+                <a:spcPts val="100"/>
+              </a:spcAft>
+            </a:pPr>
+            <a:r>
+              <a:rPr sz="600" b="0">
+                <a:solidFill>
+                  <a:srgbClr val="333333"/>
+                </a:solidFill>
+                <a:latin typeface="メイリオ"/>
+                <a:ea typeface="メイリオ"/>
+              </a:rPr>
+              <a:t/>
+            </a:r>
+          </a:p>
+          <a:p>
+            <a:pPr>
+              <a:spcBef>
+                <a:spcPts val="0"/>
+              </a:spcBef>
+              <a:spcAft>
+                <a:spcPts val="100"/>
+              </a:spcAft>
+            </a:pPr>
+            <a:r>
+              <a:rPr sz="1300" b="1">
                 <a:solidFill>
                   <a:srgbClr val="C00000"/>
                 </a:solidFill>
                 <a:latin typeface="メイリオ"/>
                 <a:ea typeface="メイリオ"/>
               </a:rPr>
-              <a:t>※ いますぐ全部を使う話ではない。今後の機能追加・運用改善で選べる選択肢を増やしたアップデート</a:t>
+              <a:t>■ 誤解しやすい点</a:t>
+            </a:r>
+          </a:p>
+          <a:p>
+            <a:pPr>
+              <a:spcBef>
+                <a:spcPts val="0"/>
+              </a:spcBef>
+              <a:spcAft>
+                <a:spcPts val="100"/>
+              </a:spcAft>
+            </a:pPr>
+            <a:r>
+              <a:rPr sz="1100" b="0">
+                <a:solidFill>
+                  <a:srgbClr val="333333"/>
+                </a:solidFill>
+                <a:latin typeface="メイリオ"/>
+                <a:ea typeface="メイリオ"/>
+              </a:rPr>
+              <a:t>・行単位コミット＝自動で続きから、ではない（進捗管理の設計が別途必要）</a:t>
+            </a:r>
+          </a:p>
+          <a:p>
+            <a:pPr>
+              <a:spcBef>
+                <a:spcPts val="0"/>
+              </a:spcBef>
+              <a:spcAft>
+                <a:spcPts val="100"/>
+              </a:spcAft>
+            </a:pPr>
+            <a:r>
+              <a:rPr sz="1100" b="0">
+                <a:solidFill>
+                  <a:srgbClr val="333333"/>
+                </a:solidFill>
+                <a:latin typeface="メイリオ"/>
+                <a:ea typeface="メイリオ"/>
+              </a:rPr>
+              <a:t>・全体を1トランザクションで囲む処理は、落ちるとロールバック→最初から</a:t>
+            </a:r>
+          </a:p>
+          <a:p>
+            <a:pPr>
+              <a:spcBef>
+                <a:spcPts val="0"/>
+              </a:spcBef>
+              <a:spcAft>
+                <a:spcPts val="100"/>
+              </a:spcAft>
+            </a:pPr>
+            <a:r>
+              <a:rPr sz="1100" b="0">
+                <a:solidFill>
+                  <a:srgbClr val="333333"/>
+                </a:solidFill>
+                <a:latin typeface="メイリオ"/>
+                <a:ea typeface="メイリオ"/>
+              </a:rPr>
+              <a:t>・Rails 8.1にしただけでは自動適用されない。Job側の改修が必要</a:t>
+            </a:r>
+          </a:p>
+          <a:p>
+            <a:pPr>
+              <a:spcBef>
+                <a:spcPts val="0"/>
+              </a:spcBef>
+              <a:spcAft>
+                <a:spcPts val="100"/>
+              </a:spcAft>
+            </a:pPr>
+            <a:r>
+              <a:rPr sz="400" b="0">
+                <a:solidFill>
+                  <a:srgbClr val="333333"/>
+                </a:solidFill>
+                <a:latin typeface="メイリオ"/>
+                <a:ea typeface="メイリオ"/>
+              </a:rPr>
+              <a:t/>
+            </a:r>
+          </a:p>
+          <a:p>
+            <a:pPr>
+              <a:spcBef>
+                <a:spcPts val="0"/>
+              </a:spcBef>
+              <a:spcAft>
+                <a:spcPts val="100"/>
+              </a:spcAft>
+            </a:pPr>
+            <a:r>
+              <a:rPr sz="1100" b="0">
+                <a:solidFill>
+                  <a:srgbClr val="C00000"/>
+                </a:solidFill>
+                <a:latin typeface="メイリオ"/>
+                <a:ea typeface="メイリオ"/>
+              </a:rPr>
+              <a:t>→ 今後：CSV取込／出力など重いJobから、段階的に適用を検討できる</a:t>
             </a:r>
           </a:p>
         </p:txBody>

--- a/docs/【EC】ECサービス部_2026年7月度部会_Ver1.1.pptx
+++ b/docs/【EC】ECサービス部_2026年7月度部会_Ver1.1.pptx
@@ -22,7 +22,6 @@
     <p:sldId id="1024" r:id="rId16"/>
     <p:sldId id="1026" r:id="rId17"/>
     <p:sldId id="1029" r:id="rId30"/>
-    <p:sldId id="1030" r:id="rId31"/>
     <p:sldId id="264" r:id="rId18"/>
     <p:sldId id="1016" r:id="rId19"/>
     <p:sldId id="1025" r:id="rId20"/>
@@ -12453,8 +12452,8 @@
         </p:nvSpPr>
         <p:spPr>
           <a:xfrm>
-            <a:off x="450000" y="680000"/>
-            <a:ext cx="9200000" cy="280000"/>
+            <a:off x="400000" y="680000"/>
+            <a:ext cx="9200000" cy="260000"/>
           </a:xfrm>
           <a:prstGeom prst="rect">
             <a:avLst/>
@@ -12497,8 +12496,8 @@
           <p:nvPr/>
         </p:nvGraphicFramePr>
         <p:xfrm>
-          <a:off x="350000" y="980000"/>
-          <a:ext cx="9200000" cy="4800000"/>
+          <a:off x="300000" y="960000"/>
+          <a:ext cx="9300000" cy="3600000"/>
         </p:xfrm>
         <a:graphic>
           <a:graphicData uri="http://schemas.openxmlformats.org/drawingml/2006/table">
@@ -12507,12 +12506,12 @@
                 <a:tableStyleId>{5C22544A-7EE6-4342-B048-85BDC9FD1C3A}</a:tableStyleId>
               </a:tblPr>
               <a:tblGrid>
-                <a:gridCol w="1400000"/>
+                <a:gridCol w="1300000"/>
                 <a:gridCol w="2300000"/>
-                <a:gridCol w="2700000"/>
+                <a:gridCol w="2900000"/>
                 <a:gridCol w="2800000"/>
               </a:tblGrid>
-              <a:tr h="800000">
+              <a:tr h="600000">
                 <a:tc>
                   <a:txBody>
                     <a:bodyPr/>
@@ -12610,7 +12609,7 @@
                   </a:tcPr>
                 </a:tc>
               </a:tr>
-              <a:tr h="800000">
+              <a:tr h="600000">
                 <a:tc>
                   <a:txBody>
                     <a:bodyPr/>
@@ -12696,7 +12695,7 @@
                   <a:tcPr anchor="ctr"/>
                 </a:tc>
               </a:tr>
-              <a:tr h="800000">
+              <a:tr h="600000">
                 <a:tc>
                   <a:txBody>
                     <a:bodyPr/>
@@ -12736,7 +12735,7 @@
                           <a:latin typeface="メイリオ"/>
                           <a:ea typeface="メイリオ"/>
                         </a:rPr>
-                        <a:t>ジョブ途中再開
+                        <a:t>同じジョブの途中再開
 (Active Job Continuations)</a:t>
                       </a:r>
                     </a:p>
@@ -12761,8 +12760,9 @@
                           <a:latin typeface="メイリオ"/>
                           <a:ea typeface="メイリオ"/>
                         </a:rPr>
-                        <a:t>同じ実行ジョブが途中停止しても、
-続きから再開しやすくなる</a:t>
+                        <a:t>長時間ジョブが途中停止しても、
+同じ実行を続きから再開しやすい
+※再実行（新規ジョブ）とは別物</a:t>
                       </a:r>
                     </a:p>
                   </a:txBody>
@@ -12786,8 +12786,8 @@
                           <a:latin typeface="メイリオ"/>
                           <a:ea typeface="メイリオ"/>
                         </a:rPr>
-                        <a:t>CSV取込／出力などの長時間ジョブに適用可
-（詳細は次ページ）</a:t>
+                        <a:t>CSV取込／出力など
+長時間ジョブの安定運用に使える</a:t>
                       </a:r>
                     </a:p>
                   </a:txBody>
@@ -12798,7 +12798,7 @@
                   </a:tcPr>
                 </a:tc>
               </a:tr>
-              <a:tr h="800000">
+              <a:tr h="600000">
                 <a:tc>
                   <a:txBody>
                     <a:bodyPr/>
@@ -12835,7 +12835,7 @@
                           <a:ea typeface="メイリオ"/>
                         </a:rPr>
                         <a:t>構造化イベント通知
-(Event Reporter)</a:t>
+(Rails.event)</a:t>
                       </a:r>
                     </a:p>
                   </a:txBody>
@@ -12855,8 +12855,9 @@
                           <a:latin typeface="メイリオ"/>
                           <a:ea typeface="メイリオ"/>
                         </a:rPr>
-                        <a:t>「誰が・いつ・何をした」を
-機械可読イベントとして出せる</a:t>
+                        <a:t>人が読むログ文だけでなく、
+出来事をJSON等で構造化して出せる
+（詳細は下表）</a:t>
                       </a:r>
                     </a:p>
                   </a:txBody>
@@ -12876,15 +12877,15 @@
                           <a:latin typeface="メイリオ"/>
                           <a:ea typeface="メイリオ"/>
                         </a:rPr>
-                        <a:t>監査ログ／障害調査／監視連携で
-運用品質と説明責任を強化できる</a:t>
+                        <a:t>監視・監査・障害調査を
+標準の仕組みで進めやすい</a:t>
                       </a:r>
                     </a:p>
                   </a:txBody>
                   <a:tcPr anchor="ctr"/>
                 </a:tc>
               </a:tr>
-              <a:tr h="800000">
+              <a:tr h="600000">
                 <a:tc>
                   <a:txBody>
                     <a:bodyPr/>
@@ -12974,7 +12975,7 @@
                           <a:ea typeface="メイリオ"/>
                         </a:rPr>
                         <a:t>ヘルプ・提案資料・AI出力の表示基盤
-（Primo伴走支援の説明にも応用可）</a:t>
+（伴走支援の説明にも応用可）</a:t>
                       </a:r>
                     </a:p>
                   </a:txBody>
@@ -12985,7 +12986,7 @@
                   </a:tcPr>
                 </a:tc>
               </a:tr>
-              <a:tr h="800000">
+              <a:tr h="600000">
                 <a:tc>
                   <a:txBody>
                     <a:bodyPr/>
@@ -13083,8 +13084,8 @@
         </p:nvSpPr>
         <p:spPr>
           <a:xfrm>
-            <a:off x="450000" y="5900000"/>
-            <a:ext cx="9200000" cy="700000"/>
+            <a:off x="400000" y="4650000"/>
+            <a:ext cx="9200000" cy="260000"/>
           </a:xfrm>
           <a:prstGeom prst="rect">
             <a:avLst/>
@@ -13106,34 +13107,356 @@
               </a:spcAft>
             </a:pPr>
             <a:r>
-              <a:rPr sz="1000" b="0">
+              <a:rPr sz="1200" b="1">
                 <a:solidFill>
                   <a:srgbClr val="C00000"/>
                 </a:solidFill>
                 <a:latin typeface="メイリオ"/>
                 <a:ea typeface="メイリオ"/>
               </a:rPr>
-              <a:t>※ いますぐ全部を使う話ではない。今後の機能追加・運用改善で選べる選択肢を増やしたアップデート</a:t>
-            </a:r>
-          </a:p>
-          <a:p>
-            <a:pPr>
-              <a:spcBef>
-                <a:spcPts val="0"/>
-              </a:spcBef>
-              <a:spcAft>
-                <a:spcPts val="100"/>
-              </a:spcAft>
-            </a:pPr>
-            <a:r>
-              <a:rPr sz="1000" b="0">
+              <a:t>■ 構造化イベント（Rails.event）：以前 → 今回</a:t>
+            </a:r>
+          </a:p>
+        </p:txBody>
+      </p:sp>
+      <p:graphicFrame>
+        <p:nvGraphicFramePr>
+          <p:cNvPr id="6" name="Table 5"/>
+          <p:cNvGraphicFramePr>
+            <a:graphicFrameLocks noGrp="1"/>
+          </p:cNvGraphicFramePr>
+          <p:nvPr/>
+        </p:nvGraphicFramePr>
+        <p:xfrm>
+          <a:off x="300000" y="4950000"/>
+          <a:ext cx="9300000" cy="1500000"/>
+        </p:xfrm>
+        <a:graphic>
+          <a:graphicData uri="http://schemas.openxmlformats.org/drawingml/2006/table">
+            <a:tbl>
+              <a:tblPr firstRow="1" bandRow="1">
+                <a:tableStyleId>{5C22544A-7EE6-4342-B048-85BDC9FD1C3A}</a:tableStyleId>
+              </a:tblPr>
+              <a:tblGrid>
+                <a:gridCol w="1800000"/>
+                <a:gridCol w="3500000"/>
+                <a:gridCol w="4000000"/>
+              </a:tblGrid>
+              <a:tr h="375000">
+                <a:tc>
+                  <a:txBody>
+                    <a:bodyPr/>
+                    <a:lstStyle/>
+                    <a:p>
+                      <a:pPr algn="ctr"/>
+                      <a:r>
+                        <a:rPr sz="1000" b="1">
+                          <a:solidFill>
+                            <a:srgbClr val="FFFFFF"/>
+                          </a:solidFill>
+                          <a:latin typeface="メイリオ"/>
+                          <a:ea typeface="メイリオ"/>
+                        </a:rPr>
+                        <a:t>仕組み</a:t>
+                      </a:r>
+                    </a:p>
+                  </a:txBody>
+                  <a:tcPr anchor="ctr">
+                    <a:solidFill>
+                      <a:srgbClr val="1F4E79"/>
+                    </a:solidFill>
+                  </a:tcPr>
+                </a:tc>
+                <a:tc>
+                  <a:txBody>
+                    <a:bodyPr/>
+                    <a:lstStyle/>
+                    <a:p>
+                      <a:pPr algn="ctr"/>
+                      <a:r>
+                        <a:rPr sz="1000" b="1">
+                          <a:solidFill>
+                            <a:srgbClr val="FFFFFF"/>
+                          </a:solidFill>
+                          <a:latin typeface="メイリオ"/>
+                          <a:ea typeface="メイリオ"/>
+                        </a:rPr>
+                        <a:t>以前</a:t>
+                      </a:r>
+                    </a:p>
+                  </a:txBody>
+                  <a:tcPr anchor="ctr">
+                    <a:solidFill>
+                      <a:srgbClr val="1F4E79"/>
+                    </a:solidFill>
+                  </a:tcPr>
+                </a:tc>
+                <a:tc>
+                  <a:txBody>
+                    <a:bodyPr/>
+                    <a:lstStyle/>
+                    <a:p>
+                      <a:pPr algn="ctr"/>
+                      <a:r>
+                        <a:rPr sz="1000" b="1">
+                          <a:solidFill>
+                            <a:srgbClr val="FFFFFF"/>
+                          </a:solidFill>
+                          <a:latin typeface="メイリオ"/>
+                          <a:ea typeface="メイリオ"/>
+                        </a:rPr>
+                        <a:t>今回（Rails 8.1）</a:t>
+                      </a:r>
+                    </a:p>
+                  </a:txBody>
+                  <a:tcPr anchor="ctr">
+                    <a:solidFill>
+                      <a:srgbClr val="1F4E79"/>
+                    </a:solidFill>
+                  </a:tcPr>
+                </a:tc>
+              </a:tr>
+              <a:tr h="375000">
+                <a:tc>
+                  <a:txBody>
+                    <a:bodyPr/>
+                    <a:lstStyle/>
+                    <a:p>
+                      <a:pPr algn="l"/>
+                      <a:r>
+                        <a:rPr sz="900" b="1">
+                          <a:solidFill>
+                            <a:srgbClr val="333333"/>
+                          </a:solidFill>
+                          <a:latin typeface="メイリオ"/>
+                          <a:ea typeface="メイリオ"/>
+                        </a:rPr>
+                        <a:t>Rails.logger</a:t>
+                      </a:r>
+                    </a:p>
+                  </a:txBody>
+                  <a:tcPr anchor="ctr"/>
+                </a:tc>
+                <a:tc>
+                  <a:txBody>
+                    <a:bodyPr/>
+                    <a:lstStyle/>
+                    <a:p>
+                      <a:pPr algn="l"/>
+                      <a:r>
+                        <a:rPr sz="900" b="0">
+                          <a:solidFill>
+                            <a:srgbClr val="333333"/>
+                          </a:solidFill>
+                          <a:latin typeface="メイリオ"/>
+                          <a:ea typeface="メイリオ"/>
+                        </a:rPr>
+                        <a:t>人が読むテキストログが中心
+後から集計・検索しにくい</a:t>
+                      </a:r>
+                    </a:p>
+                  </a:txBody>
+                  <a:tcPr anchor="ctr"/>
+                </a:tc>
+                <a:tc>
+                  <a:txBody>
+                    <a:bodyPr/>
+                    <a:lstStyle/>
+                    <a:p>
+                      <a:pPr algn="l"/>
+                      <a:r>
+                        <a:rPr sz="900" b="0">
+                          <a:solidFill>
+                            <a:srgbClr val="333333"/>
+                          </a:solidFill>
+                          <a:latin typeface="メイリオ"/>
+                          <a:ea typeface="メイリオ"/>
+                        </a:rPr>
+                        <a:t>必要に応じて併用
+（人間向けログとしては継続）</a:t>
+                      </a:r>
+                    </a:p>
+                  </a:txBody>
+                  <a:tcPr anchor="ctr"/>
+                </a:tc>
+              </a:tr>
+              <a:tr h="375000">
+                <a:tc>
+                  <a:txBody>
+                    <a:bodyPr/>
+                    <a:lstStyle/>
+                    <a:p>
+                      <a:pPr algn="l"/>
+                      <a:r>
+                        <a:rPr sz="900" b="1">
+                          <a:solidFill>
+                            <a:srgbClr val="333333"/>
+                          </a:solidFill>
+                          <a:latin typeface="メイリオ"/>
+                          <a:ea typeface="メイリオ"/>
+                        </a:rPr>
+                        <a:t>ActiveSupport::
+Notifications</a:t>
+                      </a:r>
+                    </a:p>
+                  </a:txBody>
+                  <a:tcPr anchor="ctr">
+                    <a:solidFill>
+                      <a:srgbClr val="D6E3F0"/>
+                    </a:solidFill>
+                  </a:tcPr>
+                </a:tc>
+                <a:tc>
+                  <a:txBody>
+                    <a:bodyPr/>
+                    <a:lstStyle/>
+                    <a:p>
+                      <a:pPr algn="l"/>
+                      <a:r>
+                        <a:rPr sz="900" b="0">
+                          <a:solidFill>
+                            <a:srgbClr val="333333"/>
+                          </a:solidFill>
+                          <a:latin typeface="メイリオ"/>
+                          <a:ea typeface="メイリオ"/>
+                        </a:rPr>
+                        <a:t>内部計測・subscribe向け
+統一的な文脈付与は弱い</a:t>
+                      </a:r>
+                    </a:p>
+                  </a:txBody>
+                  <a:tcPr anchor="ctr">
+                    <a:solidFill>
+                      <a:srgbClr val="D6E3F0"/>
+                    </a:solidFill>
+                  </a:tcPr>
+                </a:tc>
+                <a:tc>
+                  <a:txBody>
+                    <a:bodyPr/>
+                    <a:lstStyle/>
+                    <a:p>
+                      <a:pPr algn="l"/>
+                      <a:r>
+                        <a:rPr sz="900" b="0">
+                          <a:solidFill>
+                            <a:srgbClr val="333333"/>
+                          </a:solidFill>
+                          <a:latin typeface="メイリオ"/>
+                          <a:ea typeface="メイリオ"/>
+                        </a:rPr>
+                        <a:t>計測用途としては継続しつつ、
+業務イベントは Rails.event へ寄せられる</a:t>
+                      </a:r>
+                    </a:p>
+                  </a:txBody>
+                  <a:tcPr anchor="ctr">
+                    <a:solidFill>
+                      <a:srgbClr val="D6E3F0"/>
+                    </a:solidFill>
+                  </a:tcPr>
+                </a:tc>
+              </a:tr>
+              <a:tr h="375000">
+                <a:tc>
+                  <a:txBody>
+                    <a:bodyPr/>
+                    <a:lstStyle/>
+                    <a:p>
+                      <a:pPr algn="l"/>
+                      <a:r>
+                        <a:rPr sz="900" b="1">
+                          <a:solidFill>
+                            <a:srgbClr val="333333"/>
+                          </a:solidFill>
+                          <a:latin typeface="メイリオ"/>
+                          <a:ea typeface="メイリオ"/>
+                        </a:rPr>
+                        <a:t>Rails.event
+（新機能）</a:t>
+                      </a:r>
+                    </a:p>
+                  </a:txBody>
+                  <a:tcPr anchor="ctr"/>
+                </a:tc>
+                <a:tc>
+                  <a:txBody>
+                    <a:bodyPr/>
+                    <a:lstStyle/>
+                    <a:p>
+                      <a:pPr algn="l"/>
+                      <a:r>
+                        <a:rPr sz="900" b="0">
+                          <a:solidFill>
+                            <a:srgbClr val="333333"/>
+                          </a:solidFill>
+                          <a:latin typeface="メイリオ"/>
+                          <a:ea typeface="メイリオ"/>
+                        </a:rPr>
+                        <a:t>—（なし）</a:t>
+                      </a:r>
+                    </a:p>
+                  </a:txBody>
+                  <a:tcPr anchor="ctr"/>
+                </a:tc>
+                <a:tc>
+                  <a:txBody>
+                    <a:bodyPr/>
+                    <a:lstStyle/>
+                    <a:p>
+                      <a:pPr algn="l"/>
+                      <a:r>
+                        <a:rPr sz="900" b="0">
+                          <a:solidFill>
+                            <a:srgbClr val="333333"/>
+                          </a:solidFill>
+                          <a:latin typeface="メイリオ"/>
+                          <a:ea typeface="メイリオ"/>
+                        </a:rPr>
+                        <a:t>出来事を構造化データで統一出力
+文脈（誰・どの要求）やタグを付与可能
+監視基盤（CloudWatch等）へつなぎやすい</a:t>
+                      </a:r>
+                    </a:p>
+                  </a:txBody>
+                  <a:tcPr anchor="ctr"/>
+                </a:tc>
+              </a:tr>
+            </a:tbl>
+          </a:graphicData>
+        </a:graphic>
+      </p:graphicFrame>
+      <p:sp>
+        <p:nvSpPr>
+          <p:cNvPr id="7" name="TextBox 6"/>
+          <p:cNvSpPr txBox="1"/>
+          <p:nvPr/>
+        </p:nvSpPr>
+        <p:spPr>
+          <a:xfrm>
+            <a:off x="400000" y="6550000"/>
+            <a:ext cx="9200000" cy="250000"/>
+          </a:xfrm>
+          <a:prstGeom prst="rect">
+            <a:avLst/>
+          </a:prstGeom>
+          <a:noFill/>
+        </p:spPr>
+        <p:txBody>
+          <a:bodyPr wrap="square">
+            <a:spAutoFit/>
+          </a:bodyPr>
+          <a:lstStyle/>
+          <a:p>
+            <a:r>
+              <a:rPr sz="800" b="0">
                 <a:solidFill>
-                  <a:srgbClr val="333333"/>
+                  <a:srgbClr val="666666"/>
                 </a:solidFill>
                 <a:latin typeface="メイリオ"/>
                 <a:ea typeface="メイリオ"/>
               </a:rPr>
-              <a:t>→ 次ページで「ジョブ途中再開」を、ECのCSV取込／出力に寄せて説明</a:t>
+              <a:t>参考：Zenet Tech Blog「Rails 8.1.0で追加されたStructured Event Reporterについて整理してみた」</a:t>
             </a:r>
           </a:p>
         </p:txBody>
@@ -17399,660 +17722,6 @@
   <p:transition>
     <p:fade/>
   </p:transition>
-</p:sld>
-</file>
-
-<file path=ppt/slides/slide22.xml><?xml version="1.0" encoding="utf-8"?>
-<p:sld xmlns:a="http://schemas.openxmlformats.org/drawingml/2006/main" xmlns:p="http://schemas.openxmlformats.org/presentationml/2006/main" xmlns:r="http://schemas.openxmlformats.org/officeDocument/2006/relationships">
-  <p:cSld>
-    <p:spTree>
-      <p:nvGrpSpPr>
-        <p:cNvPr id="1" name=""/>
-        <p:cNvGrpSpPr/>
-        <p:nvPr/>
-      </p:nvGrpSpPr>
-      <p:grpSpPr/>
-      <p:sp>
-        <p:nvSpPr>
-          <p:cNvPr id="2" name="Google Shape;152;p7">
-            <a:extLst>
-              <a:ext uri="{FF2B5EF4-FFF2-40B4-BE49-F238E27FC236}">
-                <a16:creationId xmlns:a16="http://schemas.microsoft.com/office/drawing/2014/main" id="{7C0885C2-88AC-DAC0-C4FE-135C29624CDD}"/>
-              </a:ext>
-            </a:extLst>
-          </p:cNvPr>
-          <p:cNvSpPr txBox="1">
-            <a:spLocks noGrp="1"/>
-          </p:cNvSpPr>
-          <p:nvPr>
-            <p:ph type="title"/>
-          </p:nvPr>
-        </p:nvSpPr>
-        <p:spPr>
-          <a:xfrm>
-            <a:off x="835852" y="142852"/>
-            <a:ext cx="8915400" cy="582594"/>
-          </a:xfrm>
-          <a:prstGeom prst="rect">
-            <a:avLst/>
-          </a:prstGeom>
-          <a:noFill/>
-          <a:ln>
-            <a:noFill/>
-          </a:ln>
-        </p:spPr>
-        <p:txBody>
-          <a:bodyPr spcFirstLastPara="1" wrap="square" lIns="91425" tIns="45700" rIns="91425" bIns="45700" anchor="b" anchorCtr="0">
-            <a:noAutofit/>
-          </a:bodyPr>
-          <a:lstStyle/>
-          <a:p>
-            <a:pPr>
-              <a:lnSpc>
-                <a:spcPct val="130000"/>
-              </a:lnSpc>
-            </a:pPr>
-            <a:r>
-              <a:rPr sz="1800" b="0">
-                <a:solidFill>
-                  <a:srgbClr val="333333"/>
-                </a:solidFill>
-                <a:latin typeface="メイリオ"/>
-                <a:ea typeface="メイリオ"/>
-              </a:rPr>
-              <a:t>5. </a:t>
-            </a:r>
-            <a:r>
-              <a:rPr sz="1600" b="0">
-                <a:solidFill>
-                  <a:srgbClr val="333333"/>
-                </a:solidFill>
-                <a:latin typeface="メイリオ"/>
-                <a:ea typeface="メイリオ"/>
-              </a:rPr>
-              <a:t>ジョブ途中再開（Active Job Continuations）とは</a:t>
-            </a:r>
-            <a:endParaRPr lang="ja-JP" altLang="en-US" sz="2000" dirty="0">
-              <a:latin typeface="メイリオ" pitchFamily="50" charset="-128"/>
-              <a:ea typeface="メイリオ" pitchFamily="50" charset="-128"/>
-              <a:cs typeface="メイリオ" pitchFamily="50" charset="-128"/>
-            </a:endParaRPr>
-          </a:p>
-        </p:txBody>
-      </p:sp>
-      <p:sp>
-        <p:nvSpPr>
-          <p:cNvPr id="3" name="TextBox 2"/>
-          <p:cNvSpPr txBox="1"/>
-          <p:nvPr/>
-        </p:nvSpPr>
-        <p:spPr>
-          <a:xfrm>
-            <a:off x="500000" y="700000"/>
-            <a:ext cx="9000000" cy="900000"/>
-          </a:xfrm>
-          <a:prstGeom prst="rect">
-            <a:avLst/>
-          </a:prstGeom>
-          <a:noFill/>
-        </p:spPr>
-        <p:txBody>
-          <a:bodyPr wrap="square">
-            <a:spAutoFit/>
-          </a:bodyPr>
-          <a:lstStyle/>
-          <a:p>
-            <a:pPr>
-              <a:spcBef>
-                <a:spcPts val="0"/>
-              </a:spcBef>
-              <a:spcAft>
-                <a:spcPts val="100"/>
-              </a:spcAft>
-            </a:pPr>
-            <a:r>
-              <a:rPr sz="1300" b="1">
-                <a:solidFill>
-                  <a:srgbClr val="C00000"/>
-                </a:solidFill>
-                <a:latin typeface="メイリオ"/>
-                <a:ea typeface="メイリオ"/>
-              </a:rPr>
-              <a:t>■ 何の話か（重要）</a:t>
-            </a:r>
-          </a:p>
-          <a:p>
-            <a:pPr>
-              <a:spcBef>
-                <a:spcPts val="0"/>
-              </a:spcBef>
-              <a:spcAft>
-                <a:spcPts val="100"/>
-              </a:spcAft>
-            </a:pPr>
-            <a:r>
-              <a:rPr sz="1200" b="0">
-                <a:solidFill>
-                  <a:srgbClr val="333333"/>
-                </a:solidFill>
-                <a:latin typeface="メイリオ"/>
-                <a:ea typeface="メイリオ"/>
-              </a:rPr>
-              <a:t>・対象は「同じ実行ジョブ」の続き　例：CSV取込／CSV出力ジョブ</a:t>
-            </a:r>
-          </a:p>
-          <a:p>
-            <a:pPr>
-              <a:spcBef>
-                <a:spcPts val="0"/>
-              </a:spcBef>
-              <a:spcAft>
-                <a:spcPts val="100"/>
-              </a:spcAft>
-            </a:pPr>
-            <a:r>
-              <a:rPr sz="1200" b="0">
-                <a:solidFill>
-                  <a:srgbClr val="333333"/>
-                </a:solidFill>
-                <a:latin typeface="メイリオ"/>
-                <a:ea typeface="メイリオ"/>
-              </a:rPr>
-              <a:t>・別ファイルをもう一度取り込む＝新規ジョブ（続き再開ではない）</a:t>
-            </a:r>
-          </a:p>
-        </p:txBody>
-      </p:sp>
-      <p:graphicFrame>
-        <p:nvGraphicFramePr>
-          <p:cNvPr id="4" name="Table 3"/>
-          <p:cNvGraphicFramePr>
-            <a:graphicFrameLocks noGrp="1"/>
-          </p:cNvGraphicFramePr>
-          <p:nvPr/>
-        </p:nvGraphicFramePr>
-        <p:xfrm>
-          <a:off x="500000" y="1650000"/>
-          <a:ext cx="9000000" cy="1600000"/>
-        </p:xfrm>
-        <a:graphic>
-          <a:graphicData uri="http://schemas.openxmlformats.org/drawingml/2006/table">
-            <a:tbl>
-              <a:tblPr firstRow="1" bandRow="1">
-                <a:tableStyleId>{5C22544A-7EE6-4342-B048-85BDC9FD1C3A}</a:tableStyleId>
-              </a:tblPr>
-              <a:tblGrid>
-                <a:gridCol w="2200000"/>
-                <a:gridCol w="3400000"/>
-                <a:gridCol w="3400000"/>
-              </a:tblGrid>
-              <a:tr h="533333">
-                <a:tc>
-                  <a:txBody>
-                    <a:bodyPr/>
-                    <a:lstStyle/>
-                    <a:p>
-                      <a:pPr algn="ctr"/>
-                      <a:r>
-                        <a:rPr sz="1000" b="1">
-                          <a:solidFill>
-                            <a:srgbClr val="FFFFFF"/>
-                          </a:solidFill>
-                          <a:latin typeface="メイリオ"/>
-                          <a:ea typeface="メイリオ"/>
-                        </a:rPr>
-                        <a:t>観点</a:t>
-                      </a:r>
-                    </a:p>
-                  </a:txBody>
-                  <a:tcPr anchor="ctr">
-                    <a:solidFill>
-                      <a:srgbClr val="1F4E79"/>
-                    </a:solidFill>
-                  </a:tcPr>
-                </a:tc>
-                <a:tc>
-                  <a:txBody>
-                    <a:bodyPr/>
-                    <a:lstStyle/>
-                    <a:p>
-                      <a:pPr algn="ctr"/>
-                      <a:r>
-                        <a:rPr sz="1000" b="1">
-                          <a:solidFill>
-                            <a:srgbClr val="FFFFFF"/>
-                          </a:solidFill>
-                          <a:latin typeface="メイリオ"/>
-                          <a:ea typeface="メイリオ"/>
-                        </a:rPr>
-                        <a:t>これまで（標準のまま）</a:t>
-                      </a:r>
-                    </a:p>
-                  </a:txBody>
-                  <a:tcPr anchor="ctr">
-                    <a:solidFill>
-                      <a:srgbClr val="1F4E79"/>
-                    </a:solidFill>
-                  </a:tcPr>
-                </a:tc>
-                <a:tc>
-                  <a:txBody>
-                    <a:bodyPr/>
-                    <a:lstStyle/>
-                    <a:p>
-                      <a:pPr algn="ctr"/>
-                      <a:r>
-                        <a:rPr sz="1000" b="1">
-                          <a:solidFill>
-                            <a:srgbClr val="FFFFFF"/>
-                          </a:solidFill>
-                          <a:latin typeface="メイリオ"/>
-                          <a:ea typeface="メイリオ"/>
-                        </a:rPr>
-                        <a:t>Rails 8.1 Continuations</a:t>
-                      </a:r>
-                    </a:p>
-                  </a:txBody>
-                  <a:tcPr anchor="ctr">
-                    <a:solidFill>
-                      <a:srgbClr val="1F4E79"/>
-                    </a:solidFill>
-                  </a:tcPr>
-                </a:tc>
-              </a:tr>
-              <a:tr h="533333">
-                <a:tc>
-                  <a:txBody>
-                    <a:bodyPr/>
-                    <a:lstStyle/>
-                    <a:p>
-                      <a:pPr algn="l"/>
-                      <a:r>
-                        <a:rPr sz="1000" b="1">
-                          <a:solidFill>
-                            <a:srgbClr val="333333"/>
-                          </a:solidFill>
-                          <a:latin typeface="メイリオ"/>
-                          <a:ea typeface="メイリオ"/>
-                        </a:rPr>
-                        <a:t>途中でジョブ停止
-（デプロイ・再起動など）</a:t>
-                      </a:r>
-                    </a:p>
-                  </a:txBody>
-                  <a:tcPr anchor="ctr"/>
-                </a:tc>
-                <a:tc>
-                  <a:txBody>
-                    <a:bodyPr/>
-                    <a:lstStyle/>
-                    <a:p>
-                      <a:pPr algn="l"/>
-                      <a:r>
-                        <a:rPr sz="1000" b="0">
-                          <a:solidFill>
-                            <a:srgbClr val="333333"/>
-                          </a:solidFill>
-                          <a:latin typeface="メイリオ"/>
-                          <a:ea typeface="メイリオ"/>
-                        </a:rPr>
-                        <a:t>同じジョブを続きから再開する仕組みは
-基本手作りが必要</a:t>
-                      </a:r>
-                    </a:p>
-                  </a:txBody>
-                  <a:tcPr anchor="ctr"/>
-                </a:tc>
-                <a:tc>
-                  <a:txBody>
-                    <a:bodyPr/>
-                    <a:lstStyle/>
-                    <a:p>
-                      <a:pPr algn="l"/>
-                      <a:r>
-                        <a:rPr sz="1000" b="0">
-                          <a:solidFill>
-                            <a:srgbClr val="333333"/>
-                          </a:solidFill>
-                          <a:latin typeface="メイリオ"/>
-                          <a:ea typeface="メイリオ"/>
-                        </a:rPr>
-                        <a:t>ステップ／進捗を残して
-同じジョブを続きから再開しやすい</a:t>
-                      </a:r>
-                    </a:p>
-                  </a:txBody>
-                  <a:tcPr anchor="ctr"/>
-                </a:tc>
-              </a:tr>
-              <a:tr h="533334">
-                <a:tc>
-                  <a:txBody>
-                    <a:bodyPr/>
-                    <a:lstStyle/>
-                    <a:p>
-                      <a:pPr algn="l"/>
-                      <a:r>
-                        <a:rPr sz="1000" b="1">
-                          <a:solidFill>
-                            <a:srgbClr val="333333"/>
-                          </a:solidFill>
-                          <a:latin typeface="メイリオ"/>
-                          <a:ea typeface="メイリオ"/>
-                        </a:rPr>
-                        <a:t>もう一度取り込み直す</a:t>
-                      </a:r>
-                    </a:p>
-                  </a:txBody>
-                  <a:tcPr anchor="ctr">
-                    <a:solidFill>
-                      <a:srgbClr val="D6E3F0"/>
-                    </a:solidFill>
-                  </a:tcPr>
-                </a:tc>
-                <a:tc>
-                  <a:txBody>
-                    <a:bodyPr/>
-                    <a:lstStyle/>
-                    <a:p>
-                      <a:pPr algn="l"/>
-                      <a:r>
-                        <a:rPr sz="1000" b="0">
-                          <a:solidFill>
-                            <a:srgbClr val="333333"/>
-                          </a:solidFill>
-                          <a:latin typeface="メイリオ"/>
-                          <a:ea typeface="メイリオ"/>
-                        </a:rPr>
-                        <a:t>履歴・ジョブが新規にできる
-＝別の命令</a:t>
-                      </a:r>
-                    </a:p>
-                  </a:txBody>
-                  <a:tcPr anchor="ctr">
-                    <a:solidFill>
-                      <a:srgbClr val="D6E3F0"/>
-                    </a:solidFill>
-                  </a:tcPr>
-                </a:tc>
-                <a:tc>
-                  <a:txBody>
-                    <a:bodyPr/>
-                    <a:lstStyle/>
-                    <a:p>
-                      <a:pPr algn="l"/>
-                      <a:r>
-                        <a:rPr sz="1000" b="0">
-                          <a:solidFill>
-                            <a:srgbClr val="333333"/>
-                          </a:solidFill>
-                          <a:latin typeface="メイリオ"/>
-                          <a:ea typeface="メイリオ"/>
-                        </a:rPr>
-                        <a:t>同様に新規ジョブ
-（再開機能の対象外）</a:t>
-                      </a:r>
-                    </a:p>
-                  </a:txBody>
-                  <a:tcPr anchor="ctr">
-                    <a:solidFill>
-                      <a:srgbClr val="D6E3F0"/>
-                    </a:solidFill>
-                  </a:tcPr>
-                </a:tc>
-              </a:tr>
-            </a:tbl>
-          </a:graphicData>
-        </a:graphic>
-      </p:graphicFrame>
-      <p:sp>
-        <p:nvSpPr>
-          <p:cNvPr id="5" name="TextBox 4"/>
-          <p:cNvSpPr txBox="1"/>
-          <p:nvPr/>
-        </p:nvSpPr>
-        <p:spPr>
-          <a:xfrm>
-            <a:off x="500000" y="3400000"/>
-            <a:ext cx="9000000" cy="3000000"/>
-          </a:xfrm>
-          <a:prstGeom prst="rect">
-            <a:avLst/>
-          </a:prstGeom>
-          <a:noFill/>
-        </p:spPr>
-        <p:txBody>
-          <a:bodyPr wrap="square">
-            <a:spAutoFit/>
-          </a:bodyPr>
-          <a:lstStyle/>
-          <a:p>
-            <a:pPr>
-              <a:spcBef>
-                <a:spcPts val="0"/>
-              </a:spcBef>
-              <a:spcAft>
-                <a:spcPts val="100"/>
-              </a:spcAft>
-            </a:pPr>
-            <a:r>
-              <a:rPr sz="1300" b="1">
-                <a:solidFill>
-                  <a:srgbClr val="333333"/>
-                </a:solidFill>
-                <a:latin typeface="メイリオ"/>
-                <a:ea typeface="メイリオ"/>
-              </a:rPr>
-              <a:t>■ ECでの当てはめイメージ（CsvFileUploadJob など）</a:t>
-            </a:r>
-          </a:p>
-          <a:p>
-            <a:pPr>
-              <a:spcBef>
-                <a:spcPts val="0"/>
-              </a:spcBef>
-              <a:spcAft>
-                <a:spcPts val="100"/>
-              </a:spcAft>
-            </a:pPr>
-            <a:r>
-              <a:rPr sz="1100" b="0">
-                <a:solidFill>
-                  <a:srgbClr val="333333"/>
-                </a:solidFill>
-                <a:latin typeface="メイリオ"/>
-                <a:ea typeface="メイリオ"/>
-              </a:rPr>
-              <a:t>1. 画面／APIで取込開始 → 取込履歴を作成 → Jobをキュー投入（ここは入口）</a:t>
-            </a:r>
-          </a:p>
-          <a:p>
-            <a:pPr>
-              <a:spcBef>
-                <a:spcPts val="0"/>
-              </a:spcBef>
-              <a:spcAft>
-                <a:spcPts val="100"/>
-              </a:spcAft>
-            </a:pPr>
-            <a:r>
-              <a:rPr sz="1100" b="0">
-                <a:solidFill>
-                  <a:srgbClr val="333333"/>
-                </a:solidFill>
-                <a:latin typeface="メイリオ"/>
-                <a:ea typeface="メイリオ"/>
-              </a:rPr>
-              <a:t>2. Job本体で長時間の行処理を実行（ここが Continuations の適用先）</a:t>
-            </a:r>
-          </a:p>
-          <a:p>
-            <a:pPr>
-              <a:spcBef>
-                <a:spcPts val="0"/>
-              </a:spcBef>
-              <a:spcAft>
-                <a:spcPts val="100"/>
-              </a:spcAft>
-            </a:pPr>
-            <a:r>
-              <a:rPr sz="1100" b="0">
-                <a:solidFill>
-                  <a:srgbClr val="333333"/>
-                </a:solidFill>
-                <a:latin typeface="メイリオ"/>
-                <a:ea typeface="メイリオ"/>
-              </a:rPr>
-              <a:t>3. デプロイ等でJobが途中停止 → 同じ履歴IDのJobを続きから再開しやすくなる</a:t>
-            </a:r>
-          </a:p>
-          <a:p>
-            <a:pPr>
-              <a:spcBef>
-                <a:spcPts val="0"/>
-              </a:spcBef>
-              <a:spcAft>
-                <a:spcPts val="100"/>
-              </a:spcAft>
-            </a:pPr>
-            <a:r>
-              <a:rPr sz="600" b="0">
-                <a:solidFill>
-                  <a:srgbClr val="333333"/>
-                </a:solidFill>
-                <a:latin typeface="メイリオ"/>
-                <a:ea typeface="メイリオ"/>
-              </a:rPr>
-              <a:t/>
-            </a:r>
-          </a:p>
-          <a:p>
-            <a:pPr>
-              <a:spcBef>
-                <a:spcPts val="0"/>
-              </a:spcBef>
-              <a:spcAft>
-                <a:spcPts val="100"/>
-              </a:spcAft>
-            </a:pPr>
-            <a:r>
-              <a:rPr sz="1300" b="1">
-                <a:solidFill>
-                  <a:srgbClr val="C00000"/>
-                </a:solidFill>
-                <a:latin typeface="メイリオ"/>
-                <a:ea typeface="メイリオ"/>
-              </a:rPr>
-              <a:t>■ 誤解しやすい点</a:t>
-            </a:r>
-          </a:p>
-          <a:p>
-            <a:pPr>
-              <a:spcBef>
-                <a:spcPts val="0"/>
-              </a:spcBef>
-              <a:spcAft>
-                <a:spcPts val="100"/>
-              </a:spcAft>
-            </a:pPr>
-            <a:r>
-              <a:rPr sz="1100" b="0">
-                <a:solidFill>
-                  <a:srgbClr val="333333"/>
-                </a:solidFill>
-                <a:latin typeface="メイリオ"/>
-                <a:ea typeface="メイリオ"/>
-              </a:rPr>
-              <a:t>・行単位コミット＝自動で続きから、ではない（進捗管理の設計が別途必要）</a:t>
-            </a:r>
-          </a:p>
-          <a:p>
-            <a:pPr>
-              <a:spcBef>
-                <a:spcPts val="0"/>
-              </a:spcBef>
-              <a:spcAft>
-                <a:spcPts val="100"/>
-              </a:spcAft>
-            </a:pPr>
-            <a:r>
-              <a:rPr sz="1100" b="0">
-                <a:solidFill>
-                  <a:srgbClr val="333333"/>
-                </a:solidFill>
-                <a:latin typeface="メイリオ"/>
-                <a:ea typeface="メイリオ"/>
-              </a:rPr>
-              <a:t>・全体を1トランザクションで囲む処理は、落ちるとロールバック→最初から</a:t>
-            </a:r>
-          </a:p>
-          <a:p>
-            <a:pPr>
-              <a:spcBef>
-                <a:spcPts val="0"/>
-              </a:spcBef>
-              <a:spcAft>
-                <a:spcPts val="100"/>
-              </a:spcAft>
-            </a:pPr>
-            <a:r>
-              <a:rPr sz="1100" b="0">
-                <a:solidFill>
-                  <a:srgbClr val="333333"/>
-                </a:solidFill>
-                <a:latin typeface="メイリオ"/>
-                <a:ea typeface="メイリオ"/>
-              </a:rPr>
-              <a:t>・Rails 8.1にしただけでは自動適用されない。Job側の改修が必要</a:t>
-            </a:r>
-          </a:p>
-          <a:p>
-            <a:pPr>
-              <a:spcBef>
-                <a:spcPts val="0"/>
-              </a:spcBef>
-              <a:spcAft>
-                <a:spcPts val="100"/>
-              </a:spcAft>
-            </a:pPr>
-            <a:r>
-              <a:rPr sz="400" b="0">
-                <a:solidFill>
-                  <a:srgbClr val="333333"/>
-                </a:solidFill>
-                <a:latin typeface="メイリオ"/>
-                <a:ea typeface="メイリオ"/>
-              </a:rPr>
-              <a:t/>
-            </a:r>
-          </a:p>
-          <a:p>
-            <a:pPr>
-              <a:spcBef>
-                <a:spcPts val="0"/>
-              </a:spcBef>
-              <a:spcAft>
-                <a:spcPts val="100"/>
-              </a:spcAft>
-            </a:pPr>
-            <a:r>
-              <a:rPr sz="1100" b="0">
-                <a:solidFill>
-                  <a:srgbClr val="C00000"/>
-                </a:solidFill>
-                <a:latin typeface="メイリオ"/>
-                <a:ea typeface="メイリオ"/>
-              </a:rPr>
-              <a:t>→ 今後：CSV取込／出力など重いJobから、段階的に適用を検討できる</a:t>
-            </a:r>
-          </a:p>
-        </p:txBody>
-      </p:sp>
-    </p:spTree>
-  </p:cSld>
-  <p:clrMapOvr>
-    <a:masterClrMapping/>
-  </p:clrMapOvr>
 </p:sld>
 </file>
 

--- a/docs/【EC】ECサービス部_2026年7月度部会_Ver1.1.pptx
+++ b/docs/【EC】ECサービス部_2026年7月度部会_Ver1.1.pptx
@@ -12496,8 +12496,8 @@
           <p:nvPr/>
         </p:nvGraphicFramePr>
         <p:xfrm>
-          <a:off x="300000" y="960000"/>
-          <a:ext cx="9300000" cy="3600000"/>
+          <a:off x="300000" y="980000"/>
+          <a:ext cx="9300000" cy="4650000"/>
         </p:xfrm>
         <a:graphic>
           <a:graphicData uri="http://schemas.openxmlformats.org/drawingml/2006/table">
@@ -12507,11 +12507,11 @@
               </a:tblPr>
               <a:tblGrid>
                 <a:gridCol w="1300000"/>
-                <a:gridCol w="2300000"/>
-                <a:gridCol w="2900000"/>
-                <a:gridCol w="2800000"/>
+                <a:gridCol w="2200000"/>
+                <a:gridCol w="3200000"/>
+                <a:gridCol w="2600000"/>
               </a:tblGrid>
-              <a:tr h="600000">
+              <a:tr h="450000">
                 <a:tc>
                   <a:txBody>
                     <a:bodyPr/>
@@ -12609,7 +12609,7 @@
                   </a:tcPr>
                 </a:tc>
               </a:tr>
-              <a:tr h="600000">
+              <a:tr h="750000">
                 <a:tc>
                   <a:txBody>
                     <a:bodyPr/>
@@ -12695,7 +12695,7 @@
                   <a:tcPr anchor="ctr"/>
                 </a:tc>
               </a:tr>
-              <a:tr h="600000">
+              <a:tr h="750000">
                 <a:tc>
                   <a:txBody>
                     <a:bodyPr/>
@@ -12798,7 +12798,7 @@
                   </a:tcPr>
                 </a:tc>
               </a:tr>
-              <a:tr h="600000">
+              <a:tr h="1200000">
                 <a:tc>
                   <a:txBody>
                     <a:bodyPr/>
@@ -12848,6 +12848,77 @@
                     <a:p>
                       <a:pPr algn="l"/>
                       <a:r>
+                        <a:rPr sz="800" b="0">
+                          <a:solidFill>
+                            <a:srgbClr val="333333"/>
+                          </a:solidFill>
+                          <a:latin typeface="メイリオ"/>
+                          <a:ea typeface="メイリオ"/>
+                        </a:rPr>
+                        <a:t>以前は Rails.logger（人が読むログ）と
+ActiveSupport::Notifications（内部計測）が中心。
+今回それらを継続しつつ、業務イベントを
+構造化データとして出せるようになった</a:t>
+                      </a:r>
+                    </a:p>
+                  </a:txBody>
+                  <a:tcPr anchor="ctr"/>
+                </a:tc>
+                <a:tc>
+                  <a:txBody>
+                    <a:bodyPr/>
+                    <a:lstStyle/>
+                    <a:p>
+                      <a:pPr algn="l"/>
+                      <a:r>
+                        <a:rPr sz="800" b="0">
+                          <a:solidFill>
+                            <a:srgbClr val="333333"/>
+                          </a:solidFill>
+                          <a:latin typeface="メイリオ"/>
+                          <a:ea typeface="メイリオ"/>
+                        </a:rPr>
+                        <a:t>監視・監査・障害調査を、
+標準の仕組みで進めやすい</a:t>
+                      </a:r>
+                    </a:p>
+                  </a:txBody>
+                  <a:tcPr anchor="ctr"/>
+                </a:tc>
+              </a:tr>
+              <a:tr h="750000">
+                <a:tc>
+                  <a:txBody>
+                    <a:bodyPr/>
+                    <a:lstStyle/>
+                    <a:p>
+                      <a:pPr algn="l"/>
+                      <a:r>
+                        <a:rPr sz="900" b="1">
+                          <a:solidFill>
+                            <a:srgbClr val="333333"/>
+                          </a:solidFill>
+                          <a:latin typeface="メイリオ"/>
+                          <a:ea typeface="メイリオ"/>
+                        </a:rPr>
+                        <a:t>Rails
+7.2→8.1</a:t>
+                      </a:r>
+                    </a:p>
+                  </a:txBody>
+                  <a:tcPr anchor="ctr">
+                    <a:solidFill>
+                      <a:srgbClr val="D6E3F0"/>
+                    </a:solidFill>
+                  </a:tcPr>
+                </a:tc>
+                <a:tc>
+                  <a:txBody>
+                    <a:bodyPr/>
+                    <a:lstStyle/>
+                    <a:p>
+                      <a:pPr algn="l"/>
+                      <a:r>
                         <a:rPr sz="900" b="0">
                           <a:solidFill>
                             <a:srgbClr val="333333"/>
@@ -12855,13 +12926,15 @@
                           <a:latin typeface="メイリオ"/>
                           <a:ea typeface="メイリオ"/>
                         </a:rPr>
-                        <a:t>人が読むログ文だけでなく、
-出来事をJSON等で構造化して出せる
-（詳細は下表）</a:t>
-                      </a:r>
-                    </a:p>
-                  </a:txBody>
-                  <a:tcPr anchor="ctr"/>
+                        <a:t>Markdown標準描画</a:t>
+                      </a:r>
+                    </a:p>
+                  </a:txBody>
+                  <a:tcPr anchor="ctr">
+                    <a:solidFill>
+                      <a:srgbClr val="D6E3F0"/>
+                    </a:solidFill>
+                  </a:tcPr>
                 </a:tc>
                 <a:tc>
                   <a:txBody>
@@ -12877,31 +12950,8 @@
                           <a:latin typeface="メイリオ"/>
                           <a:ea typeface="メイリオ"/>
                         </a:rPr>
-                        <a:t>監視・監査・障害調査を
-標準の仕組みで進めやすい</a:t>
-                      </a:r>
-                    </a:p>
-                  </a:txBody>
-                  <a:tcPr anchor="ctr"/>
-                </a:tc>
-              </a:tr>
-              <a:tr h="600000">
-                <a:tc>
-                  <a:txBody>
-                    <a:bodyPr/>
-                    <a:lstStyle/>
-                    <a:p>
-                      <a:pPr algn="l"/>
-                      <a:r>
-                        <a:rPr sz="900" b="1">
-                          <a:solidFill>
-                            <a:srgbClr val="333333"/>
-                          </a:solidFill>
-                          <a:latin typeface="メイリオ"/>
-                          <a:ea typeface="メイリオ"/>
-                        </a:rPr>
-                        <a:t>Rails
-7.2→8.1</a:t>
+                        <a:t>Markdownをそのまま
+画面やAPI応答に使える</a:t>
                       </a:r>
                     </a:p>
                   </a:txBody>
@@ -12925,7 +12975,8 @@
                           <a:latin typeface="メイリオ"/>
                           <a:ea typeface="メイリオ"/>
                         </a:rPr>
-                        <a:t>Markdown標準描画</a:t>
+                        <a:t>ヘルプ・提案資料・AI出力の表示基盤
+（伴走支援の説明にも応用可）</a:t>
                       </a:r>
                     </a:p>
                   </a:txBody>
@@ -12935,58 +12986,8 @@
                     </a:solidFill>
                   </a:tcPr>
                 </a:tc>
-                <a:tc>
-                  <a:txBody>
-                    <a:bodyPr/>
-                    <a:lstStyle/>
-                    <a:p>
-                      <a:pPr algn="l"/>
-                      <a:r>
-                        <a:rPr sz="900" b="0">
-                          <a:solidFill>
-                            <a:srgbClr val="333333"/>
-                          </a:solidFill>
-                          <a:latin typeface="メイリオ"/>
-                          <a:ea typeface="メイリオ"/>
-                        </a:rPr>
-                        <a:t>Markdownをそのまま
-画面やAPI応答に使える</a:t>
-                      </a:r>
-                    </a:p>
-                  </a:txBody>
-                  <a:tcPr anchor="ctr">
-                    <a:solidFill>
-                      <a:srgbClr val="D6E3F0"/>
-                    </a:solidFill>
-                  </a:tcPr>
-                </a:tc>
-                <a:tc>
-                  <a:txBody>
-                    <a:bodyPr/>
-                    <a:lstStyle/>
-                    <a:p>
-                      <a:pPr algn="l"/>
-                      <a:r>
-                        <a:rPr sz="900" b="0">
-                          <a:solidFill>
-                            <a:srgbClr val="333333"/>
-                          </a:solidFill>
-                          <a:latin typeface="メイリオ"/>
-                          <a:ea typeface="メイリオ"/>
-                        </a:rPr>
-                        <a:t>ヘルプ・提案資料・AI出力の表示基盤
-（伴走支援の説明にも応用可）</a:t>
-                      </a:r>
-                    </a:p>
-                  </a:txBody>
-                  <a:tcPr anchor="ctr">
-                    <a:solidFill>
-                      <a:srgbClr val="D6E3F0"/>
-                    </a:solidFill>
-                  </a:tcPr>
-                </a:tc>
               </a:tr>
-              <a:tr h="600000">
+              <a:tr h="750000">
                 <a:tc>
                   <a:txBody>
                     <a:bodyPr/>
@@ -13084,8 +13085,8 @@
         </p:nvSpPr>
         <p:spPr>
           <a:xfrm>
-            <a:off x="400000" y="4650000"/>
-            <a:ext cx="9200000" cy="260000"/>
+            <a:off x="400000" y="6350000"/>
+            <a:ext cx="9200000" cy="300000"/>
           </a:xfrm>
           <a:prstGeom prst="rect">
             <a:avLst/>
@@ -13107,356 +13108,14 @@
               </a:spcAft>
             </a:pPr>
             <a:r>
-              <a:rPr sz="1200" b="1">
+              <a:rPr sz="1000" b="0">
                 <a:solidFill>
                   <a:srgbClr val="C00000"/>
                 </a:solidFill>
                 <a:latin typeface="メイリオ"/>
                 <a:ea typeface="メイリオ"/>
               </a:rPr>
-              <a:t>■ 構造化イベント（Rails.event）：以前 → 今回</a:t>
-            </a:r>
-          </a:p>
-        </p:txBody>
-      </p:sp>
-      <p:graphicFrame>
-        <p:nvGraphicFramePr>
-          <p:cNvPr id="6" name="Table 5"/>
-          <p:cNvGraphicFramePr>
-            <a:graphicFrameLocks noGrp="1"/>
-          </p:cNvGraphicFramePr>
-          <p:nvPr/>
-        </p:nvGraphicFramePr>
-        <p:xfrm>
-          <a:off x="300000" y="4950000"/>
-          <a:ext cx="9300000" cy="1500000"/>
-        </p:xfrm>
-        <a:graphic>
-          <a:graphicData uri="http://schemas.openxmlformats.org/drawingml/2006/table">
-            <a:tbl>
-              <a:tblPr firstRow="1" bandRow="1">
-                <a:tableStyleId>{5C22544A-7EE6-4342-B048-85BDC9FD1C3A}</a:tableStyleId>
-              </a:tblPr>
-              <a:tblGrid>
-                <a:gridCol w="1800000"/>
-                <a:gridCol w="3500000"/>
-                <a:gridCol w="4000000"/>
-              </a:tblGrid>
-              <a:tr h="375000">
-                <a:tc>
-                  <a:txBody>
-                    <a:bodyPr/>
-                    <a:lstStyle/>
-                    <a:p>
-                      <a:pPr algn="ctr"/>
-                      <a:r>
-                        <a:rPr sz="1000" b="1">
-                          <a:solidFill>
-                            <a:srgbClr val="FFFFFF"/>
-                          </a:solidFill>
-                          <a:latin typeface="メイリオ"/>
-                          <a:ea typeface="メイリオ"/>
-                        </a:rPr>
-                        <a:t>仕組み</a:t>
-                      </a:r>
-                    </a:p>
-                  </a:txBody>
-                  <a:tcPr anchor="ctr">
-                    <a:solidFill>
-                      <a:srgbClr val="1F4E79"/>
-                    </a:solidFill>
-                  </a:tcPr>
-                </a:tc>
-                <a:tc>
-                  <a:txBody>
-                    <a:bodyPr/>
-                    <a:lstStyle/>
-                    <a:p>
-                      <a:pPr algn="ctr"/>
-                      <a:r>
-                        <a:rPr sz="1000" b="1">
-                          <a:solidFill>
-                            <a:srgbClr val="FFFFFF"/>
-                          </a:solidFill>
-                          <a:latin typeface="メイリオ"/>
-                          <a:ea typeface="メイリオ"/>
-                        </a:rPr>
-                        <a:t>以前</a:t>
-                      </a:r>
-                    </a:p>
-                  </a:txBody>
-                  <a:tcPr anchor="ctr">
-                    <a:solidFill>
-                      <a:srgbClr val="1F4E79"/>
-                    </a:solidFill>
-                  </a:tcPr>
-                </a:tc>
-                <a:tc>
-                  <a:txBody>
-                    <a:bodyPr/>
-                    <a:lstStyle/>
-                    <a:p>
-                      <a:pPr algn="ctr"/>
-                      <a:r>
-                        <a:rPr sz="1000" b="1">
-                          <a:solidFill>
-                            <a:srgbClr val="FFFFFF"/>
-                          </a:solidFill>
-                          <a:latin typeface="メイリオ"/>
-                          <a:ea typeface="メイリオ"/>
-                        </a:rPr>
-                        <a:t>今回（Rails 8.1）</a:t>
-                      </a:r>
-                    </a:p>
-                  </a:txBody>
-                  <a:tcPr anchor="ctr">
-                    <a:solidFill>
-                      <a:srgbClr val="1F4E79"/>
-                    </a:solidFill>
-                  </a:tcPr>
-                </a:tc>
-              </a:tr>
-              <a:tr h="375000">
-                <a:tc>
-                  <a:txBody>
-                    <a:bodyPr/>
-                    <a:lstStyle/>
-                    <a:p>
-                      <a:pPr algn="l"/>
-                      <a:r>
-                        <a:rPr sz="900" b="1">
-                          <a:solidFill>
-                            <a:srgbClr val="333333"/>
-                          </a:solidFill>
-                          <a:latin typeface="メイリオ"/>
-                          <a:ea typeface="メイリオ"/>
-                        </a:rPr>
-                        <a:t>Rails.logger</a:t>
-                      </a:r>
-                    </a:p>
-                  </a:txBody>
-                  <a:tcPr anchor="ctr"/>
-                </a:tc>
-                <a:tc>
-                  <a:txBody>
-                    <a:bodyPr/>
-                    <a:lstStyle/>
-                    <a:p>
-                      <a:pPr algn="l"/>
-                      <a:r>
-                        <a:rPr sz="900" b="0">
-                          <a:solidFill>
-                            <a:srgbClr val="333333"/>
-                          </a:solidFill>
-                          <a:latin typeface="メイリオ"/>
-                          <a:ea typeface="メイリオ"/>
-                        </a:rPr>
-                        <a:t>人が読むテキストログが中心
-後から集計・検索しにくい</a:t>
-                      </a:r>
-                    </a:p>
-                  </a:txBody>
-                  <a:tcPr anchor="ctr"/>
-                </a:tc>
-                <a:tc>
-                  <a:txBody>
-                    <a:bodyPr/>
-                    <a:lstStyle/>
-                    <a:p>
-                      <a:pPr algn="l"/>
-                      <a:r>
-                        <a:rPr sz="900" b="0">
-                          <a:solidFill>
-                            <a:srgbClr val="333333"/>
-                          </a:solidFill>
-                          <a:latin typeface="メイリオ"/>
-                          <a:ea typeface="メイリオ"/>
-                        </a:rPr>
-                        <a:t>必要に応じて併用
-（人間向けログとしては継続）</a:t>
-                      </a:r>
-                    </a:p>
-                  </a:txBody>
-                  <a:tcPr anchor="ctr"/>
-                </a:tc>
-              </a:tr>
-              <a:tr h="375000">
-                <a:tc>
-                  <a:txBody>
-                    <a:bodyPr/>
-                    <a:lstStyle/>
-                    <a:p>
-                      <a:pPr algn="l"/>
-                      <a:r>
-                        <a:rPr sz="900" b="1">
-                          <a:solidFill>
-                            <a:srgbClr val="333333"/>
-                          </a:solidFill>
-                          <a:latin typeface="メイリオ"/>
-                          <a:ea typeface="メイリオ"/>
-                        </a:rPr>
-                        <a:t>ActiveSupport::
-Notifications</a:t>
-                      </a:r>
-                    </a:p>
-                  </a:txBody>
-                  <a:tcPr anchor="ctr">
-                    <a:solidFill>
-                      <a:srgbClr val="D6E3F0"/>
-                    </a:solidFill>
-                  </a:tcPr>
-                </a:tc>
-                <a:tc>
-                  <a:txBody>
-                    <a:bodyPr/>
-                    <a:lstStyle/>
-                    <a:p>
-                      <a:pPr algn="l"/>
-                      <a:r>
-                        <a:rPr sz="900" b="0">
-                          <a:solidFill>
-                            <a:srgbClr val="333333"/>
-                          </a:solidFill>
-                          <a:latin typeface="メイリオ"/>
-                          <a:ea typeface="メイリオ"/>
-                        </a:rPr>
-                        <a:t>内部計測・subscribe向け
-統一的な文脈付与は弱い</a:t>
-                      </a:r>
-                    </a:p>
-                  </a:txBody>
-                  <a:tcPr anchor="ctr">
-                    <a:solidFill>
-                      <a:srgbClr val="D6E3F0"/>
-                    </a:solidFill>
-                  </a:tcPr>
-                </a:tc>
-                <a:tc>
-                  <a:txBody>
-                    <a:bodyPr/>
-                    <a:lstStyle/>
-                    <a:p>
-                      <a:pPr algn="l"/>
-                      <a:r>
-                        <a:rPr sz="900" b="0">
-                          <a:solidFill>
-                            <a:srgbClr val="333333"/>
-                          </a:solidFill>
-                          <a:latin typeface="メイリオ"/>
-                          <a:ea typeface="メイリオ"/>
-                        </a:rPr>
-                        <a:t>計測用途としては継続しつつ、
-業務イベントは Rails.event へ寄せられる</a:t>
-                      </a:r>
-                    </a:p>
-                  </a:txBody>
-                  <a:tcPr anchor="ctr">
-                    <a:solidFill>
-                      <a:srgbClr val="D6E3F0"/>
-                    </a:solidFill>
-                  </a:tcPr>
-                </a:tc>
-              </a:tr>
-              <a:tr h="375000">
-                <a:tc>
-                  <a:txBody>
-                    <a:bodyPr/>
-                    <a:lstStyle/>
-                    <a:p>
-                      <a:pPr algn="l"/>
-                      <a:r>
-                        <a:rPr sz="900" b="1">
-                          <a:solidFill>
-                            <a:srgbClr val="333333"/>
-                          </a:solidFill>
-                          <a:latin typeface="メイリオ"/>
-                          <a:ea typeface="メイリオ"/>
-                        </a:rPr>
-                        <a:t>Rails.event
-（新機能）</a:t>
-                      </a:r>
-                    </a:p>
-                  </a:txBody>
-                  <a:tcPr anchor="ctr"/>
-                </a:tc>
-                <a:tc>
-                  <a:txBody>
-                    <a:bodyPr/>
-                    <a:lstStyle/>
-                    <a:p>
-                      <a:pPr algn="l"/>
-                      <a:r>
-                        <a:rPr sz="900" b="0">
-                          <a:solidFill>
-                            <a:srgbClr val="333333"/>
-                          </a:solidFill>
-                          <a:latin typeface="メイリオ"/>
-                          <a:ea typeface="メイリオ"/>
-                        </a:rPr>
-                        <a:t>—（なし）</a:t>
-                      </a:r>
-                    </a:p>
-                  </a:txBody>
-                  <a:tcPr anchor="ctr"/>
-                </a:tc>
-                <a:tc>
-                  <a:txBody>
-                    <a:bodyPr/>
-                    <a:lstStyle/>
-                    <a:p>
-                      <a:pPr algn="l"/>
-                      <a:r>
-                        <a:rPr sz="900" b="0">
-                          <a:solidFill>
-                            <a:srgbClr val="333333"/>
-                          </a:solidFill>
-                          <a:latin typeface="メイリオ"/>
-                          <a:ea typeface="メイリオ"/>
-                        </a:rPr>
-                        <a:t>出来事を構造化データで統一出力
-文脈（誰・どの要求）やタグを付与可能
-監視基盤（CloudWatch等）へつなぎやすい</a:t>
-                      </a:r>
-                    </a:p>
-                  </a:txBody>
-                  <a:tcPr anchor="ctr"/>
-                </a:tc>
-              </a:tr>
-            </a:tbl>
-          </a:graphicData>
-        </a:graphic>
-      </p:graphicFrame>
-      <p:sp>
-        <p:nvSpPr>
-          <p:cNvPr id="7" name="TextBox 6"/>
-          <p:cNvSpPr txBox="1"/>
-          <p:nvPr/>
-        </p:nvSpPr>
-        <p:spPr>
-          <a:xfrm>
-            <a:off x="400000" y="6550000"/>
-            <a:ext cx="9200000" cy="250000"/>
-          </a:xfrm>
-          <a:prstGeom prst="rect">
-            <a:avLst/>
-          </a:prstGeom>
-          <a:noFill/>
-        </p:spPr>
-        <p:txBody>
-          <a:bodyPr wrap="square">
-            <a:spAutoFit/>
-          </a:bodyPr>
-          <a:lstStyle/>
-          <a:p>
-            <a:r>
-              <a:rPr sz="800" b="0">
-                <a:solidFill>
-                  <a:srgbClr val="666666"/>
-                </a:solidFill>
-                <a:latin typeface="メイリオ"/>
-                <a:ea typeface="メイリオ"/>
-              </a:rPr>
-              <a:t>参考：Zenet Tech Blog「Rails 8.1.0で追加されたStructured Event Reporterについて整理してみた」</a:t>
+              <a:t>※ いますぐ全部を使う話ではない。今後の機能追加・運用改善で選べる選択肢を増やしたアップデート</a:t>
             </a:r>
           </a:p>
         </p:txBody>

--- a/docs/【EC】ECサービス部_2026年7月度部会_Ver1.1.pptx
+++ b/docs/【EC】ECサービス部_2026年7月度部会_Ver1.1.pptx
@@ -12497,7 +12497,7 @@
         </p:nvGraphicFramePr>
         <p:xfrm>
           <a:off x="300000" y="980000"/>
-          <a:ext cx="9300000" cy="4650000"/>
+          <a:ext cx="9300000" cy="4770000"/>
         </p:xfrm>
         <a:graphic>
           <a:graphicData uri="http://schemas.openxmlformats.org/drawingml/2006/table">
@@ -12609,7 +12609,7 @@
                   </a:tcPr>
                 </a:tc>
               </a:tr>
-              <a:tr h="750000">
+              <a:tr h="780000">
                 <a:tc>
                   <a:txBody>
                     <a:bodyPr/>
@@ -12695,7 +12695,7 @@
                   <a:tcPr anchor="ctr"/>
                 </a:tc>
               </a:tr>
-              <a:tr h="750000">
+              <a:tr h="780000">
                 <a:tc>
                   <a:txBody>
                     <a:bodyPr/>
@@ -12855,10 +12855,11 @@
                           <a:latin typeface="メイリオ"/>
                           <a:ea typeface="メイリオ"/>
                         </a:rPr>
-                        <a:t>以前は Rails.logger（人が読むログ）と
-ActiveSupport::Notifications（内部計測）が中心。
-今回それらを継続しつつ、業務イベントを
-構造化データとして出せるようになった</a:t>
+                        <a:t>以前は logger（人が読むログ）と
+Notifications（内部計測）が中心。
+それらを継続しつつ、業務イベント
+（受注確定・価格変更・CSV取込完了など）を
+同じ形式で出せるようになった</a:t>
                       </a:r>
                     </a:p>
                   </a:txBody>
@@ -12878,15 +12879,16 @@
                           <a:latin typeface="メイリオ"/>
                           <a:ea typeface="メイリオ"/>
                         </a:rPr>
-                        <a:t>監視・監査・障害調査を、
-標準の仕組みで進めやすい</a:t>
+                        <a:t>「いつ・誰が・何をした」を
+横断検索しやすくなり、
+障害調査・監査・監視連携がやりやすい</a:t>
                       </a:r>
                     </a:p>
                   </a:txBody>
                   <a:tcPr anchor="ctr"/>
                 </a:tc>
               </a:tr>
-              <a:tr h="750000">
+              <a:tr h="780000">
                 <a:tc>
                   <a:txBody>
                     <a:bodyPr/>
@@ -12987,7 +12989,7 @@
                   </a:tcPr>
                 </a:tc>
               </a:tr>
-              <a:tr h="750000">
+              <a:tr h="780000">
                 <a:tc>
                   <a:txBody>
                     <a:bodyPr/>

--- a/docs/【EC】ECサービス部_2026年7月度部会_Ver1.1.pptx
+++ b/docs/【EC】ECサービス部_2026年7月度部会_Ver1.1.pptx
@@ -12497,7 +12497,7 @@
         </p:nvGraphicFramePr>
         <p:xfrm>
           <a:off x="300000" y="980000"/>
-          <a:ext cx="9300000" cy="4770000"/>
+          <a:ext cx="9300000" cy="4960000"/>
         </p:xfrm>
         <a:graphic>
           <a:graphicData uri="http://schemas.openxmlformats.org/drawingml/2006/table">
@@ -12511,7 +12511,7 @@
                 <a:gridCol w="3200000"/>
                 <a:gridCol w="2600000"/>
               </a:tblGrid>
-              <a:tr h="450000">
+              <a:tr h="420000">
                 <a:tc>
                   <a:txBody>
                     <a:bodyPr/>
@@ -12798,7 +12798,7 @@
                   </a:tcPr>
                 </a:tc>
               </a:tr>
-              <a:tr h="1200000">
+              <a:tr h="1100000">
                 <a:tc>
                   <a:txBody>
                     <a:bodyPr/>
@@ -12855,11 +12855,9 @@
                           <a:latin typeface="メイリオ"/>
                           <a:ea typeface="メイリオ"/>
                         </a:rPr>
-                        <a:t>以前は logger（人が読むログ）と
-Notifications（内部計測）が中心。
-それらを継続しつつ、業務イベント
-（受注確定・価格変更・CSV取込完了など）を
-同じ形式で出せるようになった</a:t>
+                        <a:t>自由文ログに頼るのではなく、
+解析に必要な項目を型（項目名）として決め、
+その形で業務イベントを出せるようになった</a:t>
                       </a:r>
                     </a:p>
                   </a:txBody>
@@ -12879,8 +12877,8 @@
                           <a:latin typeface="メイリオ"/>
                           <a:ea typeface="メイリオ"/>
                         </a:rPr>
-                        <a:t>「いつ・誰が・何をした」を
-横断検索しやすくなり、
+                        <a:t>受注確定・価格変更・CSV取込完了などについて
+「いつ・誰が・何をした」を横断検索しやすく、
 障害調査・監査・監視連携がやりやすい</a:t>
                       </a:r>
                     </a:p>
@@ -12888,7 +12886,7 @@
                   <a:tcPr anchor="ctr"/>
                 </a:tc>
               </a:tr>
-              <a:tr h="780000">
+              <a:tr h="1100000">
                 <a:tc>
                   <a:txBody>
                     <a:bodyPr/>
@@ -12945,15 +12943,16 @@
                     <a:p>
                       <a:pPr algn="l"/>
                       <a:r>
-                        <a:rPr sz="900" b="0">
+                        <a:rPr sz="800" b="0">
                           <a:solidFill>
                             <a:srgbClr val="333333"/>
                           </a:solidFill>
                           <a:latin typeface="メイリオ"/>
                           <a:ea typeface="メイリオ"/>
                         </a:rPr>
-                        <a:t>Markdownをそのまま
-画面やAPI応答に使える</a:t>
+                        <a:t>Markdown（.md）を、追加ライブラリなしで
+画面表示やAPI応答に使えるようになった
+例：#見出し・箇条書き・表などをそのまま描画</a:t>
                       </a:r>
                     </a:p>
                   </a:txBody>
@@ -12970,15 +12969,16 @@
                     <a:p>
                       <a:pPr algn="l"/>
                       <a:r>
-                        <a:rPr sz="900" b="0">
+                        <a:rPr sz="800" b="0">
                           <a:solidFill>
                             <a:srgbClr val="333333"/>
                           </a:solidFill>
                           <a:latin typeface="メイリオ"/>
                           <a:ea typeface="メイリオ"/>
                         </a:rPr>
-                        <a:t>ヘルプ・提案資料・AI出力の表示基盤
-（伴走支援の説明にも応用可）</a:t>
+                        <a:t>ヘルプ／リリースノート／提案説明を
+テキスト管理したまま画面表示できる
+AI出力（Markdown）も変換なしで見せやすい</a:t>
                       </a:r>
                     </a:p>
                   </a:txBody>

--- a/docs/【EC】ECサービス部_2026年7月度部会_Ver1.1.pptx
+++ b/docs/【EC】ECサービス部_2026年7月度部会_Ver1.1.pptx
@@ -14630,8 +14630,8 @@
         </p:nvSpPr>
         <p:spPr>
           <a:xfrm>
-            <a:off x="776537" y="740000"/>
-            <a:ext cx="8500000" cy="5600000"/>
+            <a:off x="650000" y="700000"/>
+            <a:ext cx="8800000" cy="280000"/>
           </a:xfrm>
           <a:prstGeom prst="rect">
             <a:avLst/>
@@ -14660,9 +14660,272 @@
                 <a:latin typeface="メイリオ"/>
                 <a:ea typeface="メイリオ"/>
               </a:rPr>
-              <a:t>① ツール方針</a:t>
-            </a:r>
-          </a:p>
+              <a:t>① ツール方針（ASIS → TOBE）</a:t>
+            </a:r>
+          </a:p>
+        </p:txBody>
+      </p:sp>
+      <p:graphicFrame>
+        <p:nvGraphicFramePr>
+          <p:cNvPr id="4" name="Table 3"/>
+          <p:cNvGraphicFramePr>
+            <a:graphicFrameLocks noGrp="1"/>
+          </p:cNvGraphicFramePr>
+          <p:nvPr/>
+        </p:nvGraphicFramePr>
+        <p:xfrm>
+          <a:off x="650000" y="1000000"/>
+          <a:ext cx="8600000" cy="1300000"/>
+        </p:xfrm>
+        <a:graphic>
+          <a:graphicData uri="http://schemas.openxmlformats.org/drawingml/2006/table">
+            <a:tbl>
+              <a:tblPr firstRow="1" bandRow="1">
+                <a:tableStyleId>{5C22544A-7EE6-4342-B048-85BDC9FD1C3A}</a:tableStyleId>
+              </a:tblPr>
+              <a:tblGrid>
+                <a:gridCol w="2400000"/>
+                <a:gridCol w="3000000"/>
+                <a:gridCol w="3200000"/>
+              </a:tblGrid>
+              <a:tr h="433333">
+                <a:tc>
+                  <a:txBody>
+                    <a:bodyPr/>
+                    <a:lstStyle/>
+                    <a:p>
+                      <a:pPr algn="ctr"/>
+                      <a:r>
+                        <a:rPr sz="1100" b="1">
+                          <a:solidFill>
+                            <a:srgbClr val="FFFFFF"/>
+                          </a:solidFill>
+                          <a:latin typeface="メイリオ"/>
+                          <a:ea typeface="メイリオ"/>
+                        </a:rPr>
+                        <a:t>領域</a:t>
+                      </a:r>
+                    </a:p>
+                  </a:txBody>
+                  <a:tcPr anchor="ctr">
+                    <a:solidFill>
+                      <a:srgbClr val="1F4E79"/>
+                    </a:solidFill>
+                  </a:tcPr>
+                </a:tc>
+                <a:tc>
+                  <a:txBody>
+                    <a:bodyPr/>
+                    <a:lstStyle/>
+                    <a:p>
+                      <a:pPr algn="ctr"/>
+                      <a:r>
+                        <a:rPr sz="1100" b="1">
+                          <a:solidFill>
+                            <a:srgbClr val="FFFFFF"/>
+                          </a:solidFill>
+                          <a:latin typeface="メイリオ"/>
+                          <a:ea typeface="メイリオ"/>
+                        </a:rPr>
+                        <a:t>ASIS（これまで）</a:t>
+                      </a:r>
+                    </a:p>
+                  </a:txBody>
+                  <a:tcPr anchor="ctr">
+                    <a:solidFill>
+                      <a:srgbClr val="1F4E79"/>
+                    </a:solidFill>
+                  </a:tcPr>
+                </a:tc>
+                <a:tc>
+                  <a:txBody>
+                    <a:bodyPr/>
+                    <a:lstStyle/>
+                    <a:p>
+                      <a:pPr algn="ctr"/>
+                      <a:r>
+                        <a:rPr sz="1100" b="1">
+                          <a:solidFill>
+                            <a:srgbClr val="FFFFFF"/>
+                          </a:solidFill>
+                          <a:latin typeface="メイリオ"/>
+                          <a:ea typeface="メイリオ"/>
+                        </a:rPr>
+                        <a:t>TOBE（これから）</a:t>
+                      </a:r>
+                    </a:p>
+                  </a:txBody>
+                  <a:tcPr anchor="ctr">
+                    <a:solidFill>
+                      <a:srgbClr val="1F4E79"/>
+                    </a:solidFill>
+                  </a:tcPr>
+                </a:tc>
+              </a:tr>
+              <a:tr h="433333">
+                <a:tc>
+                  <a:txBody>
+                    <a:bodyPr/>
+                    <a:lstStyle/>
+                    <a:p>
+                      <a:pPr algn="l"/>
+                      <a:r>
+                        <a:rPr sz="1100" b="1">
+                          <a:solidFill>
+                            <a:srgbClr val="333333"/>
+                          </a:solidFill>
+                          <a:latin typeface="メイリオ"/>
+                          <a:ea typeface="メイリオ"/>
+                        </a:rPr>
+                        <a:t>プログラム開発</a:t>
+                      </a:r>
+                    </a:p>
+                  </a:txBody>
+                  <a:tcPr anchor="ctr"/>
+                </a:tc>
+                <a:tc>
+                  <a:txBody>
+                    <a:bodyPr/>
+                    <a:lstStyle/>
+                    <a:p>
+                      <a:pPr algn="l"/>
+                      <a:r>
+                        <a:rPr sz="1100" b="0">
+                          <a:solidFill>
+                            <a:srgbClr val="333333"/>
+                          </a:solidFill>
+                          <a:latin typeface="メイリオ"/>
+                          <a:ea typeface="メイリオ"/>
+                        </a:rPr>
+                        <a:t>VS Code + GitHub Copilot</a:t>
+                      </a:r>
+                    </a:p>
+                  </a:txBody>
+                  <a:tcPr anchor="ctr"/>
+                </a:tc>
+                <a:tc>
+                  <a:txBody>
+                    <a:bodyPr/>
+                    <a:lstStyle/>
+                    <a:p>
+                      <a:pPr algn="l"/>
+                      <a:r>
+                        <a:rPr sz="1100" b="0">
+                          <a:solidFill>
+                            <a:srgbClr val="333333"/>
+                          </a:solidFill>
+                          <a:latin typeface="メイリオ"/>
+                          <a:ea typeface="メイリオ"/>
+                        </a:rPr>
+                        <a:t>Cursor + Claude
+／ Claude Desktop + Claude Code</a:t>
+                      </a:r>
+                    </a:p>
+                  </a:txBody>
+                  <a:tcPr anchor="ctr"/>
+                </a:tc>
+              </a:tr>
+              <a:tr h="433334">
+                <a:tc>
+                  <a:txBody>
+                    <a:bodyPr/>
+                    <a:lstStyle/>
+                    <a:p>
+                      <a:pPr algn="l"/>
+                      <a:r>
+                        <a:rPr sz="1100" b="1">
+                          <a:solidFill>
+                            <a:srgbClr val="333333"/>
+                          </a:solidFill>
+                          <a:latin typeface="メイリオ"/>
+                          <a:ea typeface="メイリオ"/>
+                        </a:rPr>
+                        <a:t>ビジネス業務
+（資料作成・業界分析など）</a:t>
+                      </a:r>
+                    </a:p>
+                  </a:txBody>
+                  <a:tcPr anchor="ctr">
+                    <a:solidFill>
+                      <a:srgbClr val="D6E3F0"/>
+                    </a:solidFill>
+                  </a:tcPr>
+                </a:tc>
+                <a:tc>
+                  <a:txBody>
+                    <a:bodyPr/>
+                    <a:lstStyle/>
+                    <a:p>
+                      <a:pPr algn="l"/>
+                      <a:r>
+                        <a:rPr sz="1100" b="0">
+                          <a:solidFill>
+                            <a:srgbClr val="333333"/>
+                          </a:solidFill>
+                          <a:latin typeface="メイリオ"/>
+                          <a:ea typeface="メイリオ"/>
+                        </a:rPr>
+                        <a:t>Gemini</a:t>
+                      </a:r>
+                    </a:p>
+                  </a:txBody>
+                  <a:tcPr anchor="ctr">
+                    <a:solidFill>
+                      <a:srgbClr val="D6E3F0"/>
+                    </a:solidFill>
+                  </a:tcPr>
+                </a:tc>
+                <a:tc>
+                  <a:txBody>
+                    <a:bodyPr/>
+                    <a:lstStyle/>
+                    <a:p>
+                      <a:pPr algn="l"/>
+                      <a:r>
+                        <a:rPr sz="1100" b="0">
+                          <a:solidFill>
+                            <a:srgbClr val="333333"/>
+                          </a:solidFill>
+                          <a:latin typeface="メイリオ"/>
+                          <a:ea typeface="メイリオ"/>
+                        </a:rPr>
+                        <a:t>Claude
+（Claude Desktop 等）</a:t>
+                      </a:r>
+                    </a:p>
+                  </a:txBody>
+                  <a:tcPr anchor="ctr">
+                    <a:solidFill>
+                      <a:srgbClr val="D6E3F0"/>
+                    </a:solidFill>
+                  </a:tcPr>
+                </a:tc>
+              </a:tr>
+            </a:tbl>
+          </a:graphicData>
+        </a:graphic>
+      </p:graphicFrame>
+      <p:sp>
+        <p:nvSpPr>
+          <p:cNvPr id="5" name="TextBox 4"/>
+          <p:cNvSpPr txBox="1"/>
+          <p:nvPr/>
+        </p:nvSpPr>
+        <p:spPr>
+          <a:xfrm>
+            <a:off x="650000" y="2500000"/>
+            <a:ext cx="8800000" cy="3800000"/>
+          </a:xfrm>
+          <a:prstGeom prst="rect">
+            <a:avLst/>
+          </a:prstGeom>
+          <a:noFill/>
+        </p:spPr>
+        <p:txBody>
+          <a:bodyPr wrap="square">
+            <a:spAutoFit/>
+          </a:bodyPr>
+          <a:lstStyle/>
           <a:p>
             <a:pPr>
               <a:spcBef>
@@ -14673,14 +14936,14 @@
               </a:spcAft>
             </a:pPr>
             <a:r>
-              <a:rPr sz="1300" b="0">
+              <a:rPr sz="1400" b="1">
                 <a:solidFill>
                   <a:srgbClr val="333333"/>
                 </a:solidFill>
                 <a:latin typeface="メイリオ"/>
                 <a:ea typeface="メイリオ"/>
               </a:rPr>
-              <a:t>・これまで：VS Code + GitHub Copilot</a:t>
+              <a:t>② 1か月使ってみた所感（Claude）</a:t>
             </a:r>
           </a:p>
           <a:p>
@@ -14693,14 +14956,14 @@
               </a:spcAft>
             </a:pPr>
             <a:r>
-              <a:rPr sz="1300" b="0">
+              <a:rPr sz="1200" b="0">
                 <a:solidFill>
                   <a:srgbClr val="333333"/>
                 </a:solidFill>
                 <a:latin typeface="メイリオ"/>
                 <a:ea typeface="メイリオ"/>
               </a:rPr>
-              <a:t>・これから：Cursor + Claude　／　Claude Desktop + Claude Code</a:t>
+              <a:t>・回答精度にかなり優秀さを感じる</a:t>
             </a:r>
           </a:p>
           <a:p>
@@ -14713,14 +14976,14 @@
               </a:spcAft>
             </a:pPr>
             <a:r>
-              <a:rPr sz="1300" b="0">
+              <a:rPr sz="1200" b="0">
                 <a:solidFill>
                   <a:srgbClr val="333333"/>
                 </a:solidFill>
                 <a:latin typeface="メイリオ"/>
                 <a:ea typeface="メイリオ"/>
               </a:rPr>
-              <a:t>・目的：現状の開発の効率化・品質向上</a:t>
+              <a:t>・特に、表面的な答えではなく、前提や理由まで踏み込んだ深い思考の回答が多い印象</a:t>
             </a:r>
           </a:p>
           <a:p>
@@ -14733,14 +14996,14 @@
               </a:spcAft>
             </a:pPr>
             <a:r>
-              <a:rPr sz="800" b="0">
+              <a:rPr sz="1200" b="0">
                 <a:solidFill>
                   <a:srgbClr val="333333"/>
                 </a:solidFill>
                 <a:latin typeface="メイリオ"/>
                 <a:ea typeface="メイリオ"/>
               </a:rPr>
-              <a:t/>
+              <a:t>・開発：補完中心から、要件〜実装〜レビュー伴走へシフトできる</a:t>
             </a:r>
           </a:p>
           <a:p>
@@ -14753,14 +15016,14 @@
               </a:spcAft>
             </a:pPr>
             <a:r>
-              <a:rPr sz="1400" b="1">
+              <a:rPr sz="1200" b="0">
                 <a:solidFill>
                   <a:srgbClr val="333333"/>
                 </a:solidFill>
                 <a:latin typeface="メイリオ"/>
                 <a:ea typeface="メイリオ"/>
               </a:rPr>
-              <a:t>② 1か月使ってみた所感</a:t>
+              <a:t>・業務：資料作成・分析でも、構成と論点を丁寧に組み立ててくれる感覚</a:t>
             </a:r>
           </a:p>
           <a:p>
@@ -14773,14 +15036,14 @@
               </a:spcAft>
             </a:pPr>
             <a:r>
-              <a:rPr sz="1300" b="0">
+              <a:rPr sz="800" b="0">
                 <a:solidFill>
                   <a:srgbClr val="333333"/>
                 </a:solidFill>
                 <a:latin typeface="メイリオ"/>
                 <a:ea typeface="メイリオ"/>
               </a:rPr>
-              <a:t>・回答精度にかなり優秀さを感じる</a:t>
+              <a:t/>
             </a:r>
           </a:p>
           <a:p>
@@ -14793,14 +15056,14 @@
               </a:spcAft>
             </a:pPr>
             <a:r>
-              <a:rPr sz="1300" b="0">
+              <a:rPr sz="1400" b="1">
                 <a:solidFill>
                   <a:srgbClr val="333333"/>
                 </a:solidFill>
                 <a:latin typeface="メイリオ"/>
                 <a:ea typeface="メイリオ"/>
               </a:rPr>
-              <a:t>・「補完」から「要件〜実装〜レビュー伴走」へシフトできる</a:t>
+              <a:t>③ いま進めている取り組み（言及）</a:t>
             </a:r>
           </a:p>
           <a:p>
@@ -14813,14 +15076,14 @@
               </a:spcAft>
             </a:pPr>
             <a:r>
-              <a:rPr sz="800" b="0">
+              <a:rPr sz="1200" b="0">
                 <a:solidFill>
                   <a:srgbClr val="333333"/>
                 </a:solidFill>
                 <a:latin typeface="メイリオ"/>
                 <a:ea typeface="メイリオ"/>
               </a:rPr>
-              <a:t/>
+              <a:t>・EC-Rider用プロンプト／実装ガイドを読込 → EC-Rider AI を構築中</a:t>
             </a:r>
           </a:p>
           <a:p>
@@ -14833,14 +15096,14 @@
               </a:spcAft>
             </a:pPr>
             <a:r>
-              <a:rPr sz="1400" b="1">
+              <a:rPr sz="1200" b="0">
                 <a:solidFill>
                   <a:srgbClr val="333333"/>
                 </a:solidFill>
                 <a:latin typeface="メイリオ"/>
                 <a:ea typeface="メイリオ"/>
               </a:rPr>
-              <a:t>③ いま進めている取り組み（言及）</a:t>
+              <a:t>・提案時に使えるモックベースを整備し、お客様へのイメージ共有を容易に</a:t>
             </a:r>
           </a:p>
           <a:p>
@@ -14853,14 +15116,14 @@
               </a:spcAft>
             </a:pPr>
             <a:r>
-              <a:rPr sz="1300" b="0">
+              <a:rPr sz="800" b="0">
                 <a:solidFill>
                   <a:srgbClr val="333333"/>
                 </a:solidFill>
                 <a:latin typeface="メイリオ"/>
                 <a:ea typeface="メイリオ"/>
               </a:rPr>
-              <a:t>・EC-Rider用プロンプト／実装ガイドを読込 → EC-Rider AI を構築中</a:t>
+              <a:t/>
             </a:r>
           </a:p>
           <a:p>
@@ -14873,54 +15136,14 @@
               </a:spcAft>
             </a:pPr>
             <a:r>
-              <a:rPr sz="1300" b="0">
-                <a:solidFill>
-                  <a:srgbClr val="333333"/>
-                </a:solidFill>
-                <a:latin typeface="メイリオ"/>
-                <a:ea typeface="メイリオ"/>
-              </a:rPr>
-              <a:t>・提案時に使えるモックベースを整備し、お客様へのイメージ共有を容易に</a:t>
-            </a:r>
-          </a:p>
-          <a:p>
-            <a:pPr>
-              <a:spcBef>
-                <a:spcPts val="0"/>
-              </a:spcBef>
-              <a:spcAft>
-                <a:spcPts val="100"/>
-              </a:spcAft>
-            </a:pPr>
-            <a:r>
-              <a:rPr sz="800" b="0">
-                <a:solidFill>
-                  <a:srgbClr val="333333"/>
-                </a:solidFill>
-                <a:latin typeface="メイリオ"/>
-                <a:ea typeface="メイリオ"/>
-              </a:rPr>
-              <a:t/>
-            </a:r>
-          </a:p>
-          <a:p>
-            <a:pPr>
-              <a:spcBef>
-                <a:spcPts val="0"/>
-              </a:spcBef>
-              <a:spcAft>
-                <a:spcPts val="100"/>
-              </a:spcAft>
-            </a:pPr>
-            <a:r>
-              <a:rPr sz="1300" b="0">
+              <a:rPr sz="1200" b="0">
                 <a:solidFill>
                   <a:srgbClr val="C00000"/>
                 </a:solidFill>
                 <a:latin typeface="メイリオ"/>
                 <a:ea typeface="メイリオ"/>
               </a:rPr>
-              <a:t>→ 比較・リスク・加速施策は次ページ</a:t>
+              <a:t>→ 次ページ：比較表／リスク／加速施策</a:t>
             </a:r>
           </a:p>
         </p:txBody>
@@ -15024,8 +15247,8 @@
         </p:nvSpPr>
         <p:spPr>
           <a:xfrm>
-            <a:off x="600000" y="700000"/>
-            <a:ext cx="9000000" cy="280000"/>
+            <a:off x="500000" y="680000"/>
+            <a:ext cx="9000000" cy="250000"/>
           </a:xfrm>
           <a:prstGeom prst="rect">
             <a:avLst/>
@@ -15049,12 +15272,12 @@
             <a:r>
               <a:rPr sz="1200" b="1">
                 <a:solidFill>
-                  <a:srgbClr val="333333"/>
+                  <a:srgbClr val="C00000"/>
                 </a:solidFill>
                 <a:latin typeface="メイリオ"/>
                 <a:ea typeface="メイリオ"/>
               </a:rPr>
-              <a:t>④ 比較：VS Code Copilot vs Cursor + Claude</a:t>
+              <a:t>④ 比較（ビジネス業務観点）：Claude vs ChatGPT vs Gemini</a:t>
             </a:r>
           </a:p>
         </p:txBody>
@@ -15068,8 +15291,8 @@
           <p:nvPr/>
         </p:nvGraphicFramePr>
         <p:xfrm>
-          <a:off x="600000" y="980000"/>
-          <a:ext cx="8700000" cy="1320000"/>
+          <a:off x="400000" y="960000"/>
+          <a:ext cx="9100000" cy="2100000"/>
         </p:xfrm>
         <a:graphic>
           <a:graphicData uri="http://schemas.openxmlformats.org/drawingml/2006/table">
@@ -15079,10 +15302,11 @@
               </a:tblPr>
               <a:tblGrid>
                 <a:gridCol w="1400000"/>
-                <a:gridCol w="3650000"/>
-                <a:gridCol w="3650000"/>
+                <a:gridCol w="2600000"/>
+                <a:gridCol w="2550000"/>
+                <a:gridCol w="2550000"/>
               </a:tblGrid>
-              <a:tr h="330000">
+              <a:tr h="420000">
                 <a:tc>
                   <a:txBody>
                     <a:bodyPr/>
@@ -15121,7 +15345,7 @@
                           <a:latin typeface="メイリオ"/>
                           <a:ea typeface="メイリオ"/>
                         </a:rPr>
-                        <a:t>VS Code + Copilot</a:t>
+                        <a:t>Claude</a:t>
                       </a:r>
                     </a:p>
                   </a:txBody>
@@ -15145,7 +15369,7 @@
                           <a:latin typeface="メイリオ"/>
                           <a:ea typeface="メイリオ"/>
                         </a:rPr>
-                        <a:t>Cursor + Claude</a:t>
+                        <a:t>ChatGPT</a:t>
                       </a:r>
                     </a:p>
                   </a:txBody>
@@ -15155,23 +15379,47 @@
                     </a:solidFill>
                   </a:tcPr>
                 </a:tc>
+                <a:tc>
+                  <a:txBody>
+                    <a:bodyPr/>
+                    <a:lstStyle/>
+                    <a:p>
+                      <a:pPr algn="ctr"/>
+                      <a:r>
+                        <a:rPr sz="1000" b="1">
+                          <a:solidFill>
+                            <a:srgbClr val="FFFFFF"/>
+                          </a:solidFill>
+                          <a:latin typeface="メイリオ"/>
+                          <a:ea typeface="メイリオ"/>
+                        </a:rPr>
+                        <a:t>Gemini</a:t>
+                      </a:r>
+                    </a:p>
+                  </a:txBody>
+                  <a:tcPr anchor="ctr">
+                    <a:solidFill>
+                      <a:srgbClr val="1F4E79"/>
+                    </a:solidFill>
+                  </a:tcPr>
+                </a:tc>
               </a:tr>
-              <a:tr h="330000">
-                <a:tc>
-                  <a:txBody>
-                    <a:bodyPr/>
-                    <a:lstStyle/>
-                    <a:p>
-                      <a:pPr algn="ctr"/>
-                      <a:r>
-                        <a:rPr sz="1000" b="0">
+              <a:tr h="420000">
+                <a:tc>
+                  <a:txBody>
+                    <a:bodyPr/>
+                    <a:lstStyle/>
+                    <a:p>
+                      <a:pPr algn="l"/>
+                      <a:r>
+                        <a:rPr sz="800" b="1">
                           <a:solidFill>
                             <a:srgbClr val="333333"/>
                           </a:solidFill>
                           <a:latin typeface="メイリオ"/>
                           <a:ea typeface="メイリオ"/>
                         </a:rPr>
-                        <a:t>得意</a:t>
+                        <a:t>思考の深さ</a:t>
                       </a:r>
                     </a:p>
                   </a:txBody>
@@ -15184,14 +15432,15 @@
                     <a:p>
                       <a:pPr algn="l"/>
                       <a:r>
-                        <a:rPr sz="1000" b="0">
+                        <a:rPr sz="800" b="0">
                           <a:solidFill>
                             <a:srgbClr val="333333"/>
                           </a:solidFill>
                           <a:latin typeface="メイリオ"/>
                           <a:ea typeface="メイリオ"/>
                         </a:rPr>
-                        <a:t>行・関数単位の補完が速い</a:t>
+                        <a:t>前提・理由まで踏み込む
+丁寧な深掘りが強い</a:t>
                       </a:r>
                     </a:p>
                   </a:txBody>
@@ -15204,36 +15453,58 @@
                     <a:p>
                       <a:pPr algn="l"/>
                       <a:r>
-                        <a:rPr sz="1000" b="0">
+                        <a:rPr sz="800" b="0">
                           <a:solidFill>
                             <a:srgbClr val="333333"/>
                           </a:solidFill>
                           <a:latin typeface="メイリオ"/>
                           <a:ea typeface="メイリオ"/>
                         </a:rPr>
-                        <a:t>複数ファイル横断の設計・実装・修正</a:t>
+                        <a:t>幅広いアイデア出しや
+壁打ちが得意</a:t>
                       </a:r>
                     </a:p>
                   </a:txBody>
                   <a:tcPr anchor="ctr"/>
                 </a:tc>
-              </a:tr>
-              <a:tr h="330000">
-                <a:tc>
-                  <a:txBody>
-                    <a:bodyPr/>
-                    <a:lstStyle/>
-                    <a:p>
-                      <a:pPr algn="ctr"/>
-                      <a:r>
-                        <a:rPr sz="1000" b="0">
+                <a:tc>
+                  <a:txBody>
+                    <a:bodyPr/>
+                    <a:lstStyle/>
+                    <a:p>
+                      <a:pPr algn="l"/>
+                      <a:r>
+                        <a:rPr sz="800" b="0">
                           <a:solidFill>
                             <a:srgbClr val="333333"/>
                           </a:solidFill>
                           <a:latin typeface="メイリオ"/>
                           <a:ea typeface="メイリオ"/>
                         </a:rPr>
-                        <a:t>文脈</a:t>
+                        <a:t>広く拾う・素早い概観が得意
+（深さは用途次第）</a:t>
+                      </a:r>
+                    </a:p>
+                  </a:txBody>
+                  <a:tcPr anchor="ctr"/>
+                </a:tc>
+              </a:tr>
+              <a:tr h="420000">
+                <a:tc>
+                  <a:txBody>
+                    <a:bodyPr/>
+                    <a:lstStyle/>
+                    <a:p>
+                      <a:pPr algn="l"/>
+                      <a:r>
+                        <a:rPr sz="800" b="1">
+                          <a:solidFill>
+                            <a:srgbClr val="333333"/>
+                          </a:solidFill>
+                          <a:latin typeface="メイリオ"/>
+                          <a:ea typeface="メイリオ"/>
+                        </a:rPr>
+                        <a:t>資料作成</a:t>
                       </a:r>
                     </a:p>
                   </a:txBody>
@@ -15250,14 +15521,15 @@
                     <a:p>
                       <a:pPr algn="l"/>
                       <a:r>
-                        <a:rPr sz="1000" b="0">
+                        <a:rPr sz="800" b="0">
                           <a:solidFill>
                             <a:srgbClr val="333333"/>
                           </a:solidFill>
                           <a:latin typeface="メイリオ"/>
                           <a:ea typeface="メイリオ"/>
                         </a:rPr>
-                        <a:t>編集中の周辺が中心</a:t>
+                        <a:t>構成・論点が整理されやすい
+長文でも一貫しやすい</a:t>
                       </a:r>
                     </a:p>
                   </a:txBody>
@@ -15274,14 +15546,15 @@
                     <a:p>
                       <a:pPr algn="l"/>
                       <a:r>
-                        <a:rPr sz="1000" b="0">
+                        <a:rPr sz="800" b="0">
                           <a:solidFill>
                             <a:srgbClr val="333333"/>
                           </a:solidFill>
                           <a:latin typeface="メイリオ"/>
                           <a:ea typeface="メイリオ"/>
                         </a:rPr>
-                        <a:t>リポジトリ／ガイドを広く読ませやすい</a:t>
+                        <a:t>たたき台作成が速く
+表現のバリエーションも豊富</a:t>
                       </a:r>
                     </a:p>
                   </a:txBody>
@@ -15291,28 +15564,33 @@
                     </a:solidFill>
                   </a:tcPr>
                 </a:tc>
-              </a:tr>
-              <a:tr h="330000">
-                <a:tc>
-                  <a:txBody>
-                    <a:bodyPr/>
-                    <a:lstStyle/>
-                    <a:p>
-                      <a:pPr algn="ctr"/>
-                      <a:r>
-                        <a:rPr sz="1000" b="0">
+                <a:tc>
+                  <a:txBody>
+                    <a:bodyPr/>
+                    <a:lstStyle/>
+                    <a:p>
+                      <a:pPr algn="l"/>
+                      <a:r>
+                        <a:rPr sz="800" b="0">
                           <a:solidFill>
                             <a:srgbClr val="333333"/>
                           </a:solidFill>
                           <a:latin typeface="メイリオ"/>
                           <a:ea typeface="メイリオ"/>
                         </a:rPr>
-                        <a:t>向く作業</a:t>
-                      </a:r>
-                    </a:p>
-                  </a:txBody>
-                  <a:tcPr anchor="ctr"/>
-                </a:tc>
+                        <a:t>草案づくりや要約に強い
+Google系資料との相性あり</a:t>
+                      </a:r>
+                    </a:p>
+                  </a:txBody>
+                  <a:tcPr anchor="ctr">
+                    <a:solidFill>
+                      <a:srgbClr val="D6E3F0"/>
+                    </a:solidFill>
+                  </a:tcPr>
+                </a:tc>
+              </a:tr>
+              <a:tr h="420000">
                 <a:tc>
                   <a:txBody>
                     <a:bodyPr/>
@@ -15320,14 +15598,14 @@
                     <a:p>
                       <a:pPr algn="l"/>
                       <a:r>
-                        <a:rPr sz="1000" b="0">
+                        <a:rPr sz="800" b="1">
                           <a:solidFill>
                             <a:srgbClr val="333333"/>
                           </a:solidFill>
                           <a:latin typeface="メイリオ"/>
                           <a:ea typeface="メイリオ"/>
                         </a:rPr>
-                        <a:t>小改修・定型実装</a:t>
+                        <a:t>業界分析</a:t>
                       </a:r>
                     </a:p>
                   </a:txBody>
@@ -15340,18 +15618,161 @@
                     <a:p>
                       <a:pPr algn="l"/>
                       <a:r>
-                        <a:rPr sz="1000" b="0">
+                        <a:rPr sz="800" b="0">
                           <a:solidFill>
                             <a:srgbClr val="333333"/>
                           </a:solidFill>
                           <a:latin typeface="メイリオ"/>
                           <a:ea typeface="メイリオ"/>
                         </a:rPr>
-                        <a:t>調査・横断改修・品質向上の伴走</a:t>
+                        <a:t>仮説→根拠→示唆まで
+一段深く組み立てやすい</a:t>
                       </a:r>
                     </a:p>
                   </a:txBody>
                   <a:tcPr anchor="ctr"/>
+                </a:tc>
+                <a:tc>
+                  <a:txBody>
+                    <a:bodyPr/>
+                    <a:lstStyle/>
+                    <a:p>
+                      <a:pPr algn="l"/>
+                      <a:r>
+                        <a:rPr sz="800" b="0">
+                          <a:solidFill>
+                            <a:srgbClr val="333333"/>
+                          </a:solidFill>
+                          <a:latin typeface="メイリオ"/>
+                          <a:ea typeface="メイリオ"/>
+                        </a:rPr>
+                        <a:t>多面的な切り口の洗い出し
+ブレインストーム向き</a:t>
+                      </a:r>
+                    </a:p>
+                  </a:txBody>
+                  <a:tcPr anchor="ctr"/>
+                </a:tc>
+                <a:tc>
+                  <a:txBody>
+                    <a:bodyPr/>
+                    <a:lstStyle/>
+                    <a:p>
+                      <a:pPr algn="l"/>
+                      <a:r>
+                        <a:rPr sz="800" b="0">
+                          <a:solidFill>
+                            <a:srgbClr val="333333"/>
+                          </a:solidFill>
+                          <a:latin typeface="メイリオ"/>
+                          <a:ea typeface="メイリオ"/>
+                        </a:rPr>
+                        <a:t>最新情報の拾い上げや
+俯瞰整理の入口に向く</a:t>
+                      </a:r>
+                    </a:p>
+                  </a:txBody>
+                  <a:tcPr anchor="ctr"/>
+                </a:tc>
+              </a:tr>
+              <a:tr h="420000">
+                <a:tc>
+                  <a:txBody>
+                    <a:bodyPr/>
+                    <a:lstStyle/>
+                    <a:p>
+                      <a:pPr algn="l"/>
+                      <a:r>
+                        <a:rPr sz="800" b="1">
+                          <a:solidFill>
+                            <a:srgbClr val="333333"/>
+                          </a:solidFill>
+                          <a:latin typeface="メイリオ"/>
+                          <a:ea typeface="メイリオ"/>
+                        </a:rPr>
+                        <a:t>部内の使い分け</a:t>
+                      </a:r>
+                    </a:p>
+                  </a:txBody>
+                  <a:tcPr anchor="ctr">
+                    <a:solidFill>
+                      <a:srgbClr val="D6E3F0"/>
+                    </a:solidFill>
+                  </a:tcPr>
+                </a:tc>
+                <a:tc>
+                  <a:txBody>
+                    <a:bodyPr/>
+                    <a:lstStyle/>
+                    <a:p>
+                      <a:pPr algn="l"/>
+                      <a:r>
+                        <a:rPr sz="800" b="0">
+                          <a:solidFill>
+                            <a:srgbClr val="333333"/>
+                          </a:solidFill>
+                          <a:latin typeface="メイリオ"/>
+                          <a:ea typeface="メイリオ"/>
+                        </a:rPr>
+                        <a:t>業務の主戦候補
+（分析・資料の品質重視）</a:t>
+                      </a:r>
+                    </a:p>
+                  </a:txBody>
+                  <a:tcPr anchor="ctr">
+                    <a:solidFill>
+                      <a:srgbClr val="D6E3F0"/>
+                    </a:solidFill>
+                  </a:tcPr>
+                </a:tc>
+                <a:tc>
+                  <a:txBody>
+                    <a:bodyPr/>
+                    <a:lstStyle/>
+                    <a:p>
+                      <a:pPr algn="l"/>
+                      <a:r>
+                        <a:rPr sz="800" b="0">
+                          <a:solidFill>
+                            <a:srgbClr val="333333"/>
+                          </a:solidFill>
+                          <a:latin typeface="メイリオ"/>
+                          <a:ea typeface="メイリオ"/>
+                        </a:rPr>
+                        <a:t>発散・下書き・広く聞く用途</a:t>
+                      </a:r>
+                    </a:p>
+                  </a:txBody>
+                  <a:tcPr anchor="ctr">
+                    <a:solidFill>
+                      <a:srgbClr val="D6E3F0"/>
+                    </a:solidFill>
+                  </a:tcPr>
+                </a:tc>
+                <a:tc>
+                  <a:txBody>
+                    <a:bodyPr/>
+                    <a:lstStyle/>
+                    <a:p>
+                      <a:pPr algn="l"/>
+                      <a:r>
+                        <a:rPr sz="800" b="0">
+                          <a:solidFill>
+                            <a:srgbClr val="333333"/>
+                          </a:solidFill>
+                          <a:latin typeface="メイリオ"/>
+                          <a:ea typeface="メイリオ"/>
+                        </a:rPr>
+                        <a:t>ASIS／補助用途
+（概観・別視点の確認）</a:t>
+                      </a:r>
+                    </a:p>
+                  </a:txBody>
+                  <a:tcPr anchor="ctr">
+                    <a:solidFill>
+                      <a:srgbClr val="D6E3F0"/>
+                    </a:solidFill>
+                  </a:tcPr>
                 </a:tc>
               </a:tr>
             </a:tbl>
@@ -15366,8 +15787,8 @@
         </p:nvSpPr>
         <p:spPr>
           <a:xfrm>
-            <a:off x="600000" y="2360000"/>
-            <a:ext cx="9000000" cy="260000"/>
+            <a:off x="500000" y="3150000"/>
+            <a:ext cx="9000000" cy="230000"/>
           </a:xfrm>
           <a:prstGeom prst="rect">
             <a:avLst/>
@@ -15396,7 +15817,7 @@
                 <a:latin typeface="メイリオ"/>
                 <a:ea typeface="メイリオ"/>
               </a:rPr>
-              <a:t>Claude vs ChatGPT vs Gemini（開発用途）</a:t>
+              <a:t>④’ 比較（プログラム観点）：VS Code Copilot vs Cursor + Claude</a:t>
             </a:r>
           </a:p>
         </p:txBody>
@@ -15410,8 +15831,8 @@
           <p:nvPr/>
         </p:nvGraphicFramePr>
         <p:xfrm>
-          <a:off x="600000" y="2620000"/>
-          <a:ext cx="8700000" cy="1320000"/>
+          <a:off x="400000" y="3400000"/>
+          <a:ext cx="9100000" cy="1250000"/>
         </p:xfrm>
         <a:graphic>
           <a:graphicData uri="http://schemas.openxmlformats.org/drawingml/2006/table">
@@ -15420,12 +15841,11 @@
                 <a:tableStyleId>{5C22544A-7EE6-4342-B048-85BDC9FD1C3A}</a:tableStyleId>
               </a:tblPr>
               <a:tblGrid>
-                <a:gridCol w="2175000"/>
-                <a:gridCol w="2175000"/>
-                <a:gridCol w="2175000"/>
-                <a:gridCol w="2175000"/>
+                <a:gridCol w="1400000"/>
+                <a:gridCol w="3850000"/>
+                <a:gridCol w="3850000"/>
               </a:tblGrid>
-              <a:tr h="330000">
+              <a:tr h="312500">
                 <a:tc>
                   <a:txBody>
                     <a:bodyPr/>
@@ -15464,7 +15884,7 @@
                           <a:latin typeface="メイリオ"/>
                           <a:ea typeface="メイリオ"/>
                         </a:rPr>
-                        <a:t>Claude</a:t>
+                        <a:t>VS Code + Copilot（ASIS）</a:t>
                       </a:r>
                     </a:p>
                   </a:txBody>
@@ -15488,7 +15908,7 @@
                           <a:latin typeface="メイリオ"/>
                           <a:ea typeface="メイリオ"/>
                         </a:rPr>
-                        <a:t>ChatGPT</a:t>
+                        <a:t>Cursor + Claude（TOBE）</a:t>
                       </a:r>
                     </a:p>
                   </a:txBody>
@@ -15498,47 +15918,23 @@
                     </a:solidFill>
                   </a:tcPr>
                 </a:tc>
-                <a:tc>
-                  <a:txBody>
-                    <a:bodyPr/>
-                    <a:lstStyle/>
-                    <a:p>
-                      <a:pPr algn="ctr"/>
-                      <a:r>
-                        <a:rPr sz="1000" b="1">
-                          <a:solidFill>
-                            <a:srgbClr val="FFFFFF"/>
-                          </a:solidFill>
-                          <a:latin typeface="メイリオ"/>
-                          <a:ea typeface="メイリオ"/>
-                        </a:rPr>
-                        <a:t>Gemini</a:t>
-                      </a:r>
-                    </a:p>
-                  </a:txBody>
-                  <a:tcPr anchor="ctr">
-                    <a:solidFill>
-                      <a:srgbClr val="1F4E79"/>
-                    </a:solidFill>
-                  </a:tcPr>
-                </a:tc>
               </a:tr>
-              <a:tr h="330000">
-                <a:tc>
-                  <a:txBody>
-                    <a:bodyPr/>
-                    <a:lstStyle/>
-                    <a:p>
-                      <a:pPr algn="ctr"/>
-                      <a:r>
-                        <a:rPr sz="1000" b="0">
+              <a:tr h="312500">
+                <a:tc>
+                  <a:txBody>
+                    <a:bodyPr/>
+                    <a:lstStyle/>
+                    <a:p>
+                      <a:pPr algn="l"/>
+                      <a:r>
+                        <a:rPr sz="900" b="1">
                           <a:solidFill>
                             <a:srgbClr val="333333"/>
                           </a:solidFill>
                           <a:latin typeface="メイリオ"/>
                           <a:ea typeface="メイリオ"/>
                         </a:rPr>
-                        <a:t>強み</a:t>
+                        <a:t>得意</a:t>
                       </a:r>
                     </a:p>
                   </a:txBody>
@@ -15551,14 +15947,14 @@
                     <a:p>
                       <a:pPr algn="l"/>
                       <a:r>
-                        <a:rPr sz="1000" b="0">
+                        <a:rPr sz="900" b="0">
                           <a:solidFill>
                             <a:srgbClr val="333333"/>
                           </a:solidFill>
                           <a:latin typeface="メイリオ"/>
                           <a:ea typeface="メイリオ"/>
                         </a:rPr>
-                        <a:t>実装の一貫性・指示遵守</a:t>
+                        <a:t>行・関数単位の補完が速い</a:t>
                       </a:r>
                     </a:p>
                   </a:txBody>
@@ -15571,19 +15967,21 @@
                     <a:p>
                       <a:pPr algn="l"/>
                       <a:r>
-                        <a:rPr sz="1000" b="0">
+                        <a:rPr sz="900" b="0">
                           <a:solidFill>
                             <a:srgbClr val="333333"/>
                           </a:solidFill>
                           <a:latin typeface="メイリオ"/>
                           <a:ea typeface="メイリオ"/>
                         </a:rPr>
-                        <a:t>汎用壁打ち・文書作成</a:t>
+                        <a:t>複数ファイル横断の設計・実装・修正</a:t>
                       </a:r>
                     </a:p>
                   </a:txBody>
                   <a:tcPr anchor="ctr"/>
                 </a:tc>
+              </a:tr>
+              <a:tr h="312500">
                 <a:tc>
                   <a:txBody>
                     <a:bodyPr/>
@@ -15591,36 +15989,38 @@
                     <a:p>
                       <a:pPr algn="l"/>
                       <a:r>
-                        <a:rPr sz="1000" b="0">
+                        <a:rPr sz="900" b="1">
                           <a:solidFill>
                             <a:srgbClr val="333333"/>
                           </a:solidFill>
                           <a:latin typeface="メイリオ"/>
                           <a:ea typeface="メイリオ"/>
                         </a:rPr>
-                        <a:t>調査・別視点・マルチモーダル</a:t>
-                      </a:r>
-                    </a:p>
-                  </a:txBody>
-                  <a:tcPr anchor="ctr"/>
-                </a:tc>
-              </a:tr>
-              <a:tr h="330000">
-                <a:tc>
-                  <a:txBody>
-                    <a:bodyPr/>
-                    <a:lstStyle/>
-                    <a:p>
-                      <a:pPr algn="ctr"/>
-                      <a:r>
-                        <a:rPr sz="1000" b="0">
+                        <a:t>文脈</a:t>
+                      </a:r>
+                    </a:p>
+                  </a:txBody>
+                  <a:tcPr anchor="ctr">
+                    <a:solidFill>
+                      <a:srgbClr val="D6E3F0"/>
+                    </a:solidFill>
+                  </a:tcPr>
+                </a:tc>
+                <a:tc>
+                  <a:txBody>
+                    <a:bodyPr/>
+                    <a:lstStyle/>
+                    <a:p>
+                      <a:pPr algn="l"/>
+                      <a:r>
+                        <a:rPr sz="900" b="0">
                           <a:solidFill>
                             <a:srgbClr val="333333"/>
                           </a:solidFill>
                           <a:latin typeface="メイリオ"/>
                           <a:ea typeface="メイリオ"/>
                         </a:rPr>
-                        <a:t>向く用途</a:t>
+                        <a:t>編集中の周辺が中心</a:t>
                       </a:r>
                     </a:p>
                   </a:txBody>
@@ -15637,14 +16037,14 @@
                     <a:p>
                       <a:pPr algn="l"/>
                       <a:r>
-                        <a:rPr sz="1000" b="0">
+                        <a:rPr sz="900" b="0">
                           <a:solidFill>
                             <a:srgbClr val="333333"/>
                           </a:solidFill>
                           <a:latin typeface="メイリオ"/>
                           <a:ea typeface="メイリオ"/>
                         </a:rPr>
-                        <a:t>実装の主戦</a:t>
+                        <a:t>リポジトリ／ガイドを広く読ませやすい</a:t>
                       </a:r>
                     </a:p>
                   </a:txBody>
@@ -15654,6 +16054,8 @@
                     </a:solidFill>
                   </a:tcPr>
                 </a:tc>
+              </a:tr>
+              <a:tr h="312500">
                 <a:tc>
                   <a:txBody>
                     <a:bodyPr/>
@@ -15661,22 +16063,18 @@
                     <a:p>
                       <a:pPr algn="l"/>
                       <a:r>
-                        <a:rPr sz="1000" b="0">
+                        <a:rPr sz="900" b="1">
                           <a:solidFill>
                             <a:srgbClr val="333333"/>
                           </a:solidFill>
                           <a:latin typeface="メイリオ"/>
                           <a:ea typeface="メイリオ"/>
                         </a:rPr>
-                        <a:t>企画・文章・広く聞く</a:t>
-                      </a:r>
-                    </a:p>
-                  </a:txBody>
-                  <a:tcPr anchor="ctr">
-                    <a:solidFill>
-                      <a:srgbClr val="D6E3F0"/>
-                    </a:solidFill>
-                  </a:tcPr>
+                        <a:t>向く作業</a:t>
+                      </a:r>
+                    </a:p>
+                  </a:txBody>
+                  <a:tcPr anchor="ctr"/>
                 </a:tc>
                 <a:tc>
                   <a:txBody>
@@ -15685,100 +16083,34 @@
                     <a:p>
                       <a:pPr algn="l"/>
                       <a:r>
-                        <a:rPr sz="1000" b="0">
+                        <a:rPr sz="900" b="0">
                           <a:solidFill>
                             <a:srgbClr val="333333"/>
                           </a:solidFill>
                           <a:latin typeface="メイリオ"/>
                           <a:ea typeface="メイリオ"/>
                         </a:rPr>
-                        <a:t>検算・調査の補助</a:t>
-                      </a:r>
-                    </a:p>
-                  </a:txBody>
-                  <a:tcPr anchor="ctr">
-                    <a:solidFill>
-                      <a:srgbClr val="D6E3F0"/>
-                    </a:solidFill>
-                  </a:tcPr>
-                </a:tc>
-              </a:tr>
-              <a:tr h="330000">
-                <a:tc>
-                  <a:txBody>
-                    <a:bodyPr/>
-                    <a:lstStyle/>
-                    <a:p>
-                      <a:pPr algn="ctr"/>
-                      <a:r>
-                        <a:rPr sz="1000" b="1">
+                        <a:t>小改修・定型実装</a:t>
+                      </a:r>
+                    </a:p>
+                  </a:txBody>
+                  <a:tcPr anchor="ctr"/>
+                </a:tc>
+                <a:tc>
+                  <a:txBody>
+                    <a:bodyPr/>
+                    <a:lstStyle/>
+                    <a:p>
+                      <a:pPr algn="l"/>
+                      <a:r>
+                        <a:rPr sz="900" b="0">
                           <a:solidFill>
                             <a:srgbClr val="333333"/>
                           </a:solidFill>
                           <a:latin typeface="メイリオ"/>
                           <a:ea typeface="メイリオ"/>
                         </a:rPr>
-                        <a:t>結論</a:t>
-                      </a:r>
-                    </a:p>
-                  </a:txBody>
-                  <a:tcPr anchor="ctr"/>
-                </a:tc>
-                <a:tc>
-                  <a:txBody>
-                    <a:bodyPr/>
-                    <a:lstStyle/>
-                    <a:p>
-                      <a:pPr algn="l"/>
-                      <a:r>
-                        <a:rPr sz="1000" b="1">
-                          <a:solidFill>
-                            <a:srgbClr val="333333"/>
-                          </a:solidFill>
-                          <a:latin typeface="メイリオ"/>
-                          <a:ea typeface="メイリオ"/>
-                        </a:rPr>
-                        <a:t>開発主戦候補</a:t>
-                      </a:r>
-                    </a:p>
-                  </a:txBody>
-                  <a:tcPr anchor="ctr"/>
-                </a:tc>
-                <a:tc>
-                  <a:txBody>
-                    <a:bodyPr/>
-                    <a:lstStyle/>
-                    <a:p>
-                      <a:pPr algn="l"/>
-                      <a:r>
-                        <a:rPr sz="1000" b="1">
-                          <a:solidFill>
-                            <a:srgbClr val="333333"/>
-                          </a:solidFill>
-                          <a:latin typeface="メイリオ"/>
-                          <a:ea typeface="メイリオ"/>
-                        </a:rPr>
-                        <a:t>役割分担で併用</a:t>
-                      </a:r>
-                    </a:p>
-                  </a:txBody>
-                  <a:tcPr anchor="ctr"/>
-                </a:tc>
-                <a:tc>
-                  <a:txBody>
-                    <a:bodyPr/>
-                    <a:lstStyle/>
-                    <a:p>
-                      <a:pPr algn="l"/>
-                      <a:r>
-                        <a:rPr sz="1000" b="1">
-                          <a:solidFill>
-                            <a:srgbClr val="333333"/>
-                          </a:solidFill>
-                          <a:latin typeface="メイリオ"/>
-                          <a:ea typeface="メイリオ"/>
-                        </a:rPr>
-                        <a:t>役割分担で併用</a:t>
+                        <a:t>調査・横断改修・品質向上の伴走</a:t>
                       </a:r>
                     </a:p>
                   </a:txBody>
@@ -15797,8 +16129,8 @@
         </p:nvSpPr>
         <p:spPr>
           <a:xfrm>
-            <a:off x="600000" y="4020000"/>
-            <a:ext cx="9000000" cy="2500000"/>
+            <a:off x="500000" y="4800000"/>
+            <a:ext cx="9000000" cy="1800000"/>
           </a:xfrm>
           <a:prstGeom prst="rect">
             <a:avLst/>
@@ -15887,7 +16219,7 @@
                 <a:latin typeface="メイリオ"/>
                 <a:ea typeface="メイリオ"/>
               </a:rPr>
-              <a:t>・その他：誤実装（ハルシネーション）、テスト不足マージ、チャット残存、属人化</a:t>
+              <a:t>・その他：誤情報、根拠確認不足、チャット残存、属人化</a:t>
             </a:r>
           </a:p>
           <a:p>

--- a/docs/【EC】ECサービス部_2026年7月度部会_Ver1.1.pptx
+++ b/docs/【EC】ECサービス部_2026年7月度部会_Ver1.1.pptx
@@ -12497,7 +12497,7 @@
         </p:nvGraphicFramePr>
         <p:xfrm>
           <a:off x="300000" y="980000"/>
-          <a:ext cx="9300000" cy="4960000"/>
+          <a:ext cx="9300000" cy="4770000"/>
         </p:xfrm>
         <a:graphic>
           <a:graphicData uri="http://schemas.openxmlformats.org/drawingml/2006/table">
@@ -12511,7 +12511,7 @@
                 <a:gridCol w="3200000"/>
                 <a:gridCol w="2600000"/>
               </a:tblGrid>
-              <a:tr h="420000">
+              <a:tr h="450000">
                 <a:tc>
                   <a:txBody>
                     <a:bodyPr/>
@@ -12798,7 +12798,7 @@
                   </a:tcPr>
                 </a:tc>
               </a:tr>
-              <a:tr h="1100000">
+              <a:tr h="1200000">
                 <a:tc>
                   <a:txBody>
                     <a:bodyPr/>
@@ -12855,9 +12855,11 @@
                           <a:latin typeface="メイリオ"/>
                           <a:ea typeface="メイリオ"/>
                         </a:rPr>
-                        <a:t>自由文ログに頼るのではなく、
-解析に必要な項目を型（項目名）として決め、
-その形で業務イベントを出せるようになった</a:t>
+                        <a:t>以前は logger（人が読むログ）と
+Notifications（内部計測）が中心。
+それらを継続しつつ、業務イベント
+（受注確定・価格変更・CSV取込完了など）を
+同じ形式で出せるようになった</a:t>
                       </a:r>
                     </a:p>
                   </a:txBody>
@@ -12877,8 +12879,8 @@
                           <a:latin typeface="メイリオ"/>
                           <a:ea typeface="メイリオ"/>
                         </a:rPr>
-                        <a:t>受注確定・価格変更・CSV取込完了などについて
-「いつ・誰が・何をした」を横断検索しやすく、
+                        <a:t>「いつ・誰が・何をした」を
+横断検索しやすくなり、
 障害調査・監査・監視連携がやりやすい</a:t>
                       </a:r>
                     </a:p>
@@ -12886,7 +12888,7 @@
                   <a:tcPr anchor="ctr"/>
                 </a:tc>
               </a:tr>
-              <a:tr h="1100000">
+              <a:tr h="780000">
                 <a:tc>
                   <a:txBody>
                     <a:bodyPr/>
@@ -12943,16 +12945,15 @@
                     <a:p>
                       <a:pPr algn="l"/>
                       <a:r>
-                        <a:rPr sz="800" b="0">
+                        <a:rPr sz="900" b="0">
                           <a:solidFill>
                             <a:srgbClr val="333333"/>
                           </a:solidFill>
                           <a:latin typeface="メイリオ"/>
                           <a:ea typeface="メイリオ"/>
                         </a:rPr>
-                        <a:t>Markdown（.md）を、追加ライブラリなしで
-画面表示やAPI応答に使えるようになった
-例：#見出し・箇条書き・表などをそのまま描画</a:t>
+                        <a:t>Markdownをそのまま
+画面やAPI応答に使える</a:t>
                       </a:r>
                     </a:p>
                   </a:txBody>
@@ -12969,16 +12970,15 @@
                     <a:p>
                       <a:pPr algn="l"/>
                       <a:r>
-                        <a:rPr sz="800" b="0">
+                        <a:rPr sz="900" b="0">
                           <a:solidFill>
                             <a:srgbClr val="333333"/>
                           </a:solidFill>
                           <a:latin typeface="メイリオ"/>
                           <a:ea typeface="メイリオ"/>
                         </a:rPr>
-                        <a:t>ヘルプ／リリースノート／提案説明を
-テキスト管理したまま画面表示できる
-AI出力（Markdown）も変換なしで見せやすい</a:t>
+                        <a:t>ヘルプ・提案資料・AI出力の表示基盤
+（伴走支援の説明にも応用可）</a:t>
                       </a:r>
                     </a:p>
                   </a:txBody>

--- a/docs/【EC】ECサービス部_2026年7月度部会_Ver1.1.pptx
+++ b/docs/【EC】ECサービス部_2026年7月度部会_Ver1.1.pptx
@@ -15277,7 +15277,7 @@
                 <a:latin typeface="メイリオ"/>
                 <a:ea typeface="メイリオ"/>
               </a:rPr>
-              <a:t>④ 比較（ビジネス業務観点）：Claude vs ChatGPT vs Gemini</a:t>
+              <a:t>④ 比較（ビジネス業務観点）：ASIS → TOBE</a:t>
             </a:r>
           </a:p>
         </p:txBody>
@@ -15302,9 +15302,9 @@
               </a:tblPr>
               <a:tblGrid>
                 <a:gridCol w="1400000"/>
-                <a:gridCol w="2600000"/>
                 <a:gridCol w="2550000"/>
                 <a:gridCol w="2550000"/>
+                <a:gridCol w="2600000"/>
               </a:tblGrid>
               <a:tr h="420000">
                 <a:tc>
@@ -15345,7 +15345,7 @@
                           <a:latin typeface="メイリオ"/>
                           <a:ea typeface="メイリオ"/>
                         </a:rPr>
-                        <a:t>Claude</a:t>
+                        <a:t>ASIS：ChatGPT</a:t>
                       </a:r>
                     </a:p>
                   </a:txBody>
@@ -15369,7 +15369,7 @@
                           <a:latin typeface="メイリオ"/>
                           <a:ea typeface="メイリオ"/>
                         </a:rPr>
-                        <a:t>ChatGPT</a:t>
+                        <a:t>ASIS：Gemini</a:t>
                       </a:r>
                     </a:p>
                   </a:txBody>
@@ -15393,7 +15393,7 @@
                           <a:latin typeface="メイリオ"/>
                           <a:ea typeface="メイリオ"/>
                         </a:rPr>
-                        <a:t>Gemini</a:t>
+                        <a:t>TOBE：Claude</a:t>
                       </a:r>
                     </a:p>
                   </a:txBody>
@@ -15439,8 +15439,8 @@
                           <a:latin typeface="メイリオ"/>
                           <a:ea typeface="メイリオ"/>
                         </a:rPr>
-                        <a:t>前提・理由まで踏み込む
-丁寧な深掘りが強い</a:t>
+                        <a:t>幅広いアイデア出しや
+壁打ちが得意</a:t>
                       </a:r>
                     </a:p>
                   </a:txBody>
@@ -15460,8 +15460,8 @@
                           <a:latin typeface="メイリオ"/>
                           <a:ea typeface="メイリオ"/>
                         </a:rPr>
-                        <a:t>幅広いアイデア出しや
-壁打ちが得意</a:t>
+                        <a:t>広く拾う・素早い概観が得意
+（深さは用途次第）</a:t>
                       </a:r>
                     </a:p>
                   </a:txBody>
@@ -15481,8 +15481,8 @@
                           <a:latin typeface="メイリオ"/>
                           <a:ea typeface="メイリオ"/>
                         </a:rPr>
-                        <a:t>広く拾う・素早い概観が得意
-（深さは用途次第）</a:t>
+                        <a:t>前提・理由まで踏み込む
+丁寧な深掘りが強い</a:t>
                       </a:r>
                     </a:p>
                   </a:txBody>
@@ -15528,8 +15528,8 @@
                           <a:latin typeface="メイリオ"/>
                           <a:ea typeface="メイリオ"/>
                         </a:rPr>
-                        <a:t>構成・論点が整理されやすい
-長文でも一貫しやすい</a:t>
+                        <a:t>たたき台作成が速く
+表現のバリエーションも豊富</a:t>
                       </a:r>
                     </a:p>
                   </a:txBody>
@@ -15553,8 +15553,8 @@
                           <a:latin typeface="メイリオ"/>
                           <a:ea typeface="メイリオ"/>
                         </a:rPr>
-                        <a:t>たたき台作成が速く
-表現のバリエーションも豊富</a:t>
+                        <a:t>草案づくりや要約に強い
+Google系資料との相性あり</a:t>
                       </a:r>
                     </a:p>
                   </a:txBody>
@@ -15578,8 +15578,8 @@
                           <a:latin typeface="メイリオ"/>
                           <a:ea typeface="メイリオ"/>
                         </a:rPr>
-                        <a:t>草案づくりや要約に強い
-Google系資料との相性あり</a:t>
+                        <a:t>構成・論点が整理されやすい
+長文でも一貫しやすい</a:t>
                       </a:r>
                     </a:p>
                   </a:txBody>
@@ -15625,8 +15625,8 @@
                           <a:latin typeface="メイリオ"/>
                           <a:ea typeface="メイリオ"/>
                         </a:rPr>
-                        <a:t>仮説→根拠→示唆まで
-一段深く組み立てやすい</a:t>
+                        <a:t>多面的な切り口の洗い出し
+ブレインストーム向き</a:t>
                       </a:r>
                     </a:p>
                   </a:txBody>
@@ -15646,8 +15646,8 @@
                           <a:latin typeface="メイリオ"/>
                           <a:ea typeface="メイリオ"/>
                         </a:rPr>
-                        <a:t>多面的な切り口の洗い出し
-ブレインストーム向き</a:t>
+                        <a:t>最新情報の拾い上げや
+俯瞰整理の入口に向く</a:t>
                       </a:r>
                     </a:p>
                   </a:txBody>
@@ -15667,8 +15667,8 @@
                           <a:latin typeface="メイリオ"/>
                           <a:ea typeface="メイリオ"/>
                         </a:rPr>
-                        <a:t>最新情報の拾い上げや
-俯瞰整理の入口に向く</a:t>
+                        <a:t>仮説→根拠→示唆まで
+一段深く組み立てやすい</a:t>
                       </a:r>
                     </a:p>
                   </a:txBody>
@@ -15714,8 +15714,7 @@
                           <a:latin typeface="メイリオ"/>
                           <a:ea typeface="メイリオ"/>
                         </a:rPr>
-                        <a:t>業務の主戦候補
-（分析・資料の品質重視）</a:t>
+                        <a:t>発散・下書き・広く聞く用途</a:t>
                       </a:r>
                     </a:p>
                   </a:txBody>
@@ -15739,7 +15738,8 @@
                           <a:latin typeface="メイリオ"/>
                           <a:ea typeface="メイリオ"/>
                         </a:rPr>
-                        <a:t>発散・下書き・広く聞く用途</a:t>
+                        <a:t>概観・別視点の確認
+（これまで主に利用）</a:t>
                       </a:r>
                     </a:p>
                   </a:txBody>
@@ -15763,8 +15763,8 @@
                           <a:latin typeface="メイリオ"/>
                           <a:ea typeface="メイリオ"/>
                         </a:rPr>
-                        <a:t>ASIS／補助用途
-（概観・別視点の確認）</a:t>
+                        <a:t>業務の主戦へ
+（分析・資料の品質重視）</a:t>
                       </a:r>
                     </a:p>
                   </a:txBody>
@@ -15817,7 +15817,7 @@
                 <a:latin typeface="メイリオ"/>
                 <a:ea typeface="メイリオ"/>
               </a:rPr>
-              <a:t>④’ 比較（プログラム観点）：VS Code Copilot vs Cursor + Claude</a:t>
+              <a:t>④’ 比較（プログラム観点）：ASIS → TOBE</a:t>
             </a:r>
           </a:p>
         </p:txBody>
@@ -15884,7 +15884,7 @@
                           <a:latin typeface="メイリオ"/>
                           <a:ea typeface="メイリオ"/>
                         </a:rPr>
-                        <a:t>VS Code + Copilot（ASIS）</a:t>
+                        <a:t>ASIS：VS Code + Copilot</a:t>
                       </a:r>
                     </a:p>
                   </a:txBody>
@@ -15908,7 +15908,7 @@
                           <a:latin typeface="メイリオ"/>
                           <a:ea typeface="メイリオ"/>
                         </a:rPr>
-                        <a:t>Cursor + Claude（TOBE）</a:t>
+                        <a:t>TOBE：Cursor + Claude</a:t>
                       </a:r>
                     </a:p>
                   </a:txBody>

--- a/docs/【EC】ECサービス部_2026年7月度部会_Ver1.1.pptx
+++ b/docs/【EC】ECサービス部_2026年7月度部会_Ver1.1.pptx
@@ -14858,14 +14858,14 @@
                     <a:p>
                       <a:pPr algn="l"/>
                       <a:r>
-                        <a:rPr sz="1100" b="0">
+                        <a:rPr sz="1100">
                           <a:solidFill>
                             <a:srgbClr val="333333"/>
                           </a:solidFill>
                           <a:latin typeface="メイリオ"/>
                           <a:ea typeface="メイリオ"/>
                         </a:rPr>
-                        <a:t>Gemini</a:t>
+                        <a:t>ChatGPT／Gemini</a:t>
                       </a:r>
                     </a:p>
                   </a:txBody>

--- a/docs/【EC】ECサービス部_2026年7月度部会_Ver1.1.pptx
+++ b/docs/【EC】ECサービス部_2026年7月度部会_Ver1.1.pptx
@@ -14630,8 +14630,8 @@
         </p:nvSpPr>
         <p:spPr>
           <a:xfrm>
-            <a:off x="650000" y="700000"/>
-            <a:ext cx="8800000" cy="280000"/>
+            <a:off x="776537" y="740000"/>
+            <a:ext cx="8500000" cy="5600000"/>
           </a:xfrm>
           <a:prstGeom prst="rect">
             <a:avLst/>
@@ -14649,7 +14649,7 @@
                 <a:spcPts val="0"/>
               </a:spcBef>
               <a:spcAft>
-                <a:spcPts val="100"/>
+                <a:spcPts val="200"/>
               </a:spcAft>
             </a:pPr>
             <a:r>
@@ -14663,276 +14663,153 @@
               <a:t>① ツール方針（ASIS → TOBE）</a:t>
             </a:r>
           </a:p>
-        </p:txBody>
-      </p:sp>
-      <p:graphicFrame>
-        <p:nvGraphicFramePr>
-          <p:cNvPr id="4" name="Table 3"/>
-          <p:cNvGraphicFramePr>
-            <a:graphicFrameLocks noGrp="1"/>
-          </p:cNvGraphicFramePr>
-          <p:nvPr/>
-        </p:nvGraphicFramePr>
-        <p:xfrm>
-          <a:off x="650000" y="1000000"/>
-          <a:ext cx="8600000" cy="1300000"/>
-        </p:xfrm>
-        <a:graphic>
-          <a:graphicData uri="http://schemas.openxmlformats.org/drawingml/2006/table">
-            <a:tbl>
-              <a:tblPr firstRow="1" bandRow="1">
-                <a:tableStyleId>{5C22544A-7EE6-4342-B048-85BDC9FD1C3A}</a:tableStyleId>
-              </a:tblPr>
-              <a:tblGrid>
-                <a:gridCol w="2400000"/>
-                <a:gridCol w="3000000"/>
-                <a:gridCol w="3200000"/>
-              </a:tblGrid>
-              <a:tr h="433333">
-                <a:tc>
-                  <a:txBody>
-                    <a:bodyPr/>
-                    <a:lstStyle/>
-                    <a:p>
-                      <a:pPr algn="ctr"/>
-                      <a:r>
-                        <a:rPr sz="1100" b="1">
-                          <a:solidFill>
-                            <a:srgbClr val="FFFFFF"/>
-                          </a:solidFill>
-                          <a:latin typeface="メイリオ"/>
-                          <a:ea typeface="メイリオ"/>
-                        </a:rPr>
-                        <a:t>領域</a:t>
-                      </a:r>
-                    </a:p>
-                  </a:txBody>
-                  <a:tcPr anchor="ctr">
-                    <a:solidFill>
-                      <a:srgbClr val="1F4E79"/>
-                    </a:solidFill>
-                  </a:tcPr>
-                </a:tc>
-                <a:tc>
-                  <a:txBody>
-                    <a:bodyPr/>
-                    <a:lstStyle/>
-                    <a:p>
-                      <a:pPr algn="ctr"/>
-                      <a:r>
-                        <a:rPr sz="1100" b="1">
-                          <a:solidFill>
-                            <a:srgbClr val="FFFFFF"/>
-                          </a:solidFill>
-                          <a:latin typeface="メイリオ"/>
-                          <a:ea typeface="メイリオ"/>
-                        </a:rPr>
-                        <a:t>ASIS（これまで）</a:t>
-                      </a:r>
-                    </a:p>
-                  </a:txBody>
-                  <a:tcPr anchor="ctr">
-                    <a:solidFill>
-                      <a:srgbClr val="1F4E79"/>
-                    </a:solidFill>
-                  </a:tcPr>
-                </a:tc>
-                <a:tc>
-                  <a:txBody>
-                    <a:bodyPr/>
-                    <a:lstStyle/>
-                    <a:p>
-                      <a:pPr algn="ctr"/>
-                      <a:r>
-                        <a:rPr sz="1100" b="1">
-                          <a:solidFill>
-                            <a:srgbClr val="FFFFFF"/>
-                          </a:solidFill>
-                          <a:latin typeface="メイリオ"/>
-                          <a:ea typeface="メイリオ"/>
-                        </a:rPr>
-                        <a:t>TOBE（これから）</a:t>
-                      </a:r>
-                    </a:p>
-                  </a:txBody>
-                  <a:tcPr anchor="ctr">
-                    <a:solidFill>
-                      <a:srgbClr val="1F4E79"/>
-                    </a:solidFill>
-                  </a:tcPr>
-                </a:tc>
-              </a:tr>
-              <a:tr h="433333">
-                <a:tc>
-                  <a:txBody>
-                    <a:bodyPr/>
-                    <a:lstStyle/>
-                    <a:p>
-                      <a:pPr algn="l"/>
-                      <a:r>
-                        <a:rPr sz="1100" b="1">
-                          <a:solidFill>
-                            <a:srgbClr val="333333"/>
-                          </a:solidFill>
-                          <a:latin typeface="メイリオ"/>
-                          <a:ea typeface="メイリオ"/>
-                        </a:rPr>
-                        <a:t>プログラム開発</a:t>
-                      </a:r>
-                    </a:p>
-                  </a:txBody>
-                  <a:tcPr anchor="ctr"/>
-                </a:tc>
-                <a:tc>
-                  <a:txBody>
-                    <a:bodyPr/>
-                    <a:lstStyle/>
-                    <a:p>
-                      <a:pPr algn="l"/>
-                      <a:r>
-                        <a:rPr sz="1100" b="0">
-                          <a:solidFill>
-                            <a:srgbClr val="333333"/>
-                          </a:solidFill>
-                          <a:latin typeface="メイリオ"/>
-                          <a:ea typeface="メイリオ"/>
-                        </a:rPr>
-                        <a:t>VS Code + GitHub Copilot</a:t>
-                      </a:r>
-                    </a:p>
-                  </a:txBody>
-                  <a:tcPr anchor="ctr"/>
-                </a:tc>
-                <a:tc>
-                  <a:txBody>
-                    <a:bodyPr/>
-                    <a:lstStyle/>
-                    <a:p>
-                      <a:pPr algn="l"/>
-                      <a:r>
-                        <a:rPr sz="1100" b="0">
-                          <a:solidFill>
-                            <a:srgbClr val="333333"/>
-                          </a:solidFill>
-                          <a:latin typeface="メイリオ"/>
-                          <a:ea typeface="メイリオ"/>
-                        </a:rPr>
-                        <a:t>Cursor + Claude
-／ Claude Desktop + Claude Code</a:t>
-                      </a:r>
-                    </a:p>
-                  </a:txBody>
-                  <a:tcPr anchor="ctr"/>
-                </a:tc>
-              </a:tr>
-              <a:tr h="433334">
-                <a:tc>
-                  <a:txBody>
-                    <a:bodyPr/>
-                    <a:lstStyle/>
-                    <a:p>
-                      <a:pPr algn="l"/>
-                      <a:r>
-                        <a:rPr sz="1100" b="1">
-                          <a:solidFill>
-                            <a:srgbClr val="333333"/>
-                          </a:solidFill>
-                          <a:latin typeface="メイリオ"/>
-                          <a:ea typeface="メイリオ"/>
-                        </a:rPr>
-                        <a:t>ビジネス業務
-（資料作成・業界分析など）</a:t>
-                      </a:r>
-                    </a:p>
-                  </a:txBody>
-                  <a:tcPr anchor="ctr">
-                    <a:solidFill>
-                      <a:srgbClr val="D6E3F0"/>
-                    </a:solidFill>
-                  </a:tcPr>
-                </a:tc>
-                <a:tc>
-                  <a:txBody>
-                    <a:bodyPr/>
-                    <a:lstStyle/>
-                    <a:p>
-                      <a:pPr algn="l"/>
-                      <a:r>
-                        <a:rPr sz="1100">
-                          <a:solidFill>
-                            <a:srgbClr val="333333"/>
-                          </a:solidFill>
-                          <a:latin typeface="メイリオ"/>
-                          <a:ea typeface="メイリオ"/>
-                        </a:rPr>
-                        <a:t>ChatGPT／Gemini</a:t>
-                      </a:r>
-                    </a:p>
-                  </a:txBody>
-                  <a:tcPr anchor="ctr">
-                    <a:solidFill>
-                      <a:srgbClr val="D6E3F0"/>
-                    </a:solidFill>
-                  </a:tcPr>
-                </a:tc>
-                <a:tc>
-                  <a:txBody>
-                    <a:bodyPr/>
-                    <a:lstStyle/>
-                    <a:p>
-                      <a:pPr algn="l"/>
-                      <a:r>
-                        <a:rPr sz="1100" b="0">
-                          <a:solidFill>
-                            <a:srgbClr val="333333"/>
-                          </a:solidFill>
-                          <a:latin typeface="メイリオ"/>
-                          <a:ea typeface="メイリオ"/>
-                        </a:rPr>
-                        <a:t>Claude
-（Claude Desktop 等）</a:t>
-                      </a:r>
-                    </a:p>
-                  </a:txBody>
-                  <a:tcPr anchor="ctr">
-                    <a:solidFill>
-                      <a:srgbClr val="D6E3F0"/>
-                    </a:solidFill>
-                  </a:tcPr>
-                </a:tc>
-              </a:tr>
-            </a:tbl>
-          </a:graphicData>
-        </a:graphic>
-      </p:graphicFrame>
-      <p:sp>
-        <p:nvSpPr>
-          <p:cNvPr id="5" name="TextBox 4"/>
-          <p:cNvSpPr txBox="1"/>
-          <p:nvPr/>
-        </p:nvSpPr>
-        <p:spPr>
-          <a:xfrm>
-            <a:off x="650000" y="2500000"/>
-            <a:ext cx="8800000" cy="3800000"/>
-          </a:xfrm>
-          <a:prstGeom prst="rect">
-            <a:avLst/>
-          </a:prstGeom>
-          <a:noFill/>
-        </p:spPr>
-        <p:txBody>
-          <a:bodyPr wrap="square">
-            <a:spAutoFit/>
-          </a:bodyPr>
-          <a:lstStyle/>
           <a:p>
             <a:pPr>
               <a:spcBef>
                 <a:spcPts val="0"/>
               </a:spcBef>
               <a:spcAft>
-                <a:spcPts val="100"/>
+                <a:spcPts val="200"/>
+              </a:spcAft>
+            </a:pPr>
+            <a:r>
+              <a:rPr sz="1300" b="1">
+                <a:solidFill>
+                  <a:srgbClr val="333333"/>
+                </a:solidFill>
+                <a:latin typeface="メイリオ"/>
+                <a:ea typeface="メイリオ"/>
+              </a:rPr>
+              <a:t>【プログラム開発】</a:t>
+            </a:r>
+          </a:p>
+          <a:p>
+            <a:pPr>
+              <a:spcBef>
+                <a:spcPts val="0"/>
+              </a:spcBef>
+              <a:spcAft>
+                <a:spcPts val="200"/>
+              </a:spcAft>
+            </a:pPr>
+            <a:r>
+              <a:rPr sz="1300" b="0">
+                <a:solidFill>
+                  <a:srgbClr val="333333"/>
+                </a:solidFill>
+                <a:latin typeface="メイリオ"/>
+                <a:ea typeface="メイリオ"/>
+              </a:rPr>
+              <a:t>・ASIS：VS Code + GitHub Copilot</a:t>
+            </a:r>
+          </a:p>
+          <a:p>
+            <a:pPr>
+              <a:spcBef>
+                <a:spcPts val="0"/>
+              </a:spcBef>
+              <a:spcAft>
+                <a:spcPts val="200"/>
+              </a:spcAft>
+            </a:pPr>
+            <a:r>
+              <a:rPr sz="1300" b="0">
+                <a:solidFill>
+                  <a:srgbClr val="333333"/>
+                </a:solidFill>
+                <a:latin typeface="メイリオ"/>
+                <a:ea typeface="メイリオ"/>
+              </a:rPr>
+              <a:t>・TOBE：Cursor + Claude ／ Claude Desktop + Claude Code</a:t>
+            </a:r>
+          </a:p>
+          <a:p>
+            <a:pPr>
+              <a:spcBef>
+                <a:spcPts val="0"/>
+              </a:spcBef>
+              <a:spcAft>
+                <a:spcPts val="200"/>
+              </a:spcAft>
+            </a:pPr>
+            <a:r>
+              <a:rPr sz="1300" b="1">
+                <a:solidFill>
+                  <a:srgbClr val="333333"/>
+                </a:solidFill>
+                <a:latin typeface="メイリオ"/>
+                <a:ea typeface="メイリオ"/>
+              </a:rPr>
+              <a:t>【ビジネス業務（資料作成・業界分析など）】</a:t>
+            </a:r>
+          </a:p>
+          <a:p>
+            <a:pPr>
+              <a:spcBef>
+                <a:spcPts val="0"/>
+              </a:spcBef>
+              <a:spcAft>
+                <a:spcPts val="200"/>
+              </a:spcAft>
+            </a:pPr>
+            <a:r>
+              <a:rPr sz="1300" b="0">
+                <a:solidFill>
+                  <a:srgbClr val="333333"/>
+                </a:solidFill>
+                <a:latin typeface="メイリオ"/>
+                <a:ea typeface="メイリオ"/>
+              </a:rPr>
+              <a:t>・ASIS：ChatGPT／Gemini</a:t>
+            </a:r>
+          </a:p>
+          <a:p>
+            <a:pPr>
+              <a:spcBef>
+                <a:spcPts val="0"/>
+              </a:spcBef>
+              <a:spcAft>
+                <a:spcPts val="200"/>
+              </a:spcAft>
+            </a:pPr>
+            <a:r>
+              <a:rPr sz="1300" b="0">
+                <a:solidFill>
+                  <a:srgbClr val="333333"/>
+                </a:solidFill>
+                <a:latin typeface="メイリオ"/>
+                <a:ea typeface="メイリオ"/>
+              </a:rPr>
+              <a:t>・TOBE：Claude（Claude Desktop 等）</a:t>
+            </a:r>
+          </a:p>
+          <a:p>
+            <a:pPr>
+              <a:spcBef>
+                <a:spcPts val="0"/>
+              </a:spcBef>
+              <a:spcAft>
+                <a:spcPts val="200"/>
+              </a:spcAft>
+            </a:pPr>
+            <a:r>
+              <a:rPr sz="800" b="0">
+                <a:solidFill>
+                  <a:srgbClr val="333333"/>
+                </a:solidFill>
+                <a:latin typeface="メイリオ"/>
+                <a:ea typeface="メイリオ"/>
+              </a:rPr>
+              <a:t/>
+            </a:r>
+          </a:p>
+          <a:p>
+            <a:pPr>
+              <a:spcBef>
+                <a:spcPts val="0"/>
+              </a:spcBef>
+              <a:spcAft>
+                <a:spcPts val="200"/>
               </a:spcAft>
             </a:pPr>
             <a:r>
@@ -14952,11 +14829,11 @@
                 <a:spcPts val="0"/>
               </a:spcBef>
               <a:spcAft>
-                <a:spcPts val="100"/>
+                <a:spcPts val="200"/>
               </a:spcAft>
             </a:pPr>
             <a:r>
-              <a:rPr sz="1200" b="0">
+              <a:rPr sz="1300" b="0">
                 <a:solidFill>
                   <a:srgbClr val="333333"/>
                 </a:solidFill>
@@ -14972,11 +14849,11 @@
                 <a:spcPts val="0"/>
               </a:spcBef>
               <a:spcAft>
-                <a:spcPts val="100"/>
+                <a:spcPts val="200"/>
               </a:spcAft>
             </a:pPr>
             <a:r>
-              <a:rPr sz="1200" b="0">
+              <a:rPr sz="1300" b="0">
                 <a:solidFill>
                   <a:srgbClr val="333333"/>
                 </a:solidFill>
@@ -14992,11 +14869,11 @@
                 <a:spcPts val="0"/>
               </a:spcBef>
               <a:spcAft>
-                <a:spcPts val="100"/>
+                <a:spcPts val="200"/>
               </a:spcAft>
             </a:pPr>
             <a:r>
-              <a:rPr sz="1200" b="0">
+              <a:rPr sz="1300" b="0">
                 <a:solidFill>
                   <a:srgbClr val="333333"/>
                 </a:solidFill>
@@ -15012,11 +14889,11 @@
                 <a:spcPts val="0"/>
               </a:spcBef>
               <a:spcAft>
-                <a:spcPts val="100"/>
+                <a:spcPts val="200"/>
               </a:spcAft>
             </a:pPr>
             <a:r>
-              <a:rPr sz="1200" b="0">
+              <a:rPr sz="1300" b="0">
                 <a:solidFill>
                   <a:srgbClr val="333333"/>
                 </a:solidFill>
@@ -15032,7 +14909,7 @@
                 <a:spcPts val="0"/>
               </a:spcBef>
               <a:spcAft>
-                <a:spcPts val="100"/>
+                <a:spcPts val="200"/>
               </a:spcAft>
             </a:pPr>
             <a:r>
@@ -15052,7 +14929,7 @@
                 <a:spcPts val="0"/>
               </a:spcBef>
               <a:spcAft>
-                <a:spcPts val="100"/>
+                <a:spcPts val="200"/>
               </a:spcAft>
             </a:pPr>
             <a:r>
@@ -15072,11 +14949,11 @@
                 <a:spcPts val="0"/>
               </a:spcBef>
               <a:spcAft>
-                <a:spcPts val="100"/>
+                <a:spcPts val="200"/>
               </a:spcAft>
             </a:pPr>
             <a:r>
-              <a:rPr sz="1200" b="0">
+              <a:rPr sz="1300" b="0">
                 <a:solidFill>
                   <a:srgbClr val="333333"/>
                 </a:solidFill>
@@ -15092,11 +14969,11 @@
                 <a:spcPts val="0"/>
               </a:spcBef>
               <a:spcAft>
-                <a:spcPts val="100"/>
+                <a:spcPts val="200"/>
               </a:spcAft>
             </a:pPr>
             <a:r>
-              <a:rPr sz="1200" b="0">
+              <a:rPr sz="1300" b="0">
                 <a:solidFill>
                   <a:srgbClr val="333333"/>
                 </a:solidFill>
@@ -15112,7 +14989,7 @@
                 <a:spcPts val="0"/>
               </a:spcBef>
               <a:spcAft>
-                <a:spcPts val="100"/>
+                <a:spcPts val="200"/>
               </a:spcAft>
             </a:pPr>
             <a:r>
@@ -15132,18 +15009,18 @@
                 <a:spcPts val="0"/>
               </a:spcBef>
               <a:spcAft>
-                <a:spcPts val="100"/>
+                <a:spcPts val="200"/>
               </a:spcAft>
             </a:pPr>
             <a:r>
-              <a:rPr sz="1200" b="0">
+              <a:rPr sz="1300" b="0">
                 <a:solidFill>
                   <a:srgbClr val="C00000"/>
                 </a:solidFill>
                 <a:latin typeface="メイリオ"/>
                 <a:ea typeface="メイリオ"/>
               </a:rPr>
-              <a:t>→ 次ページ：比較表／リスク／加速施策</a:t>
+              <a:t>→ 比較・リスク・加速施策は次ページ</a:t>
             </a:r>
           </a:p>
         </p:txBody>
@@ -15247,8 +15124,8 @@
         </p:nvSpPr>
         <p:spPr>
           <a:xfrm>
-            <a:off x="500000" y="680000"/>
-            <a:ext cx="9000000" cy="250000"/>
+            <a:off x="600000" y="700000"/>
+            <a:ext cx="9000000" cy="280000"/>
           </a:xfrm>
           <a:prstGeom prst="rect">
             <a:avLst/>
@@ -15266,13 +15143,13 @@
                 <a:spcPts val="0"/>
               </a:spcBef>
               <a:spcAft>
-                <a:spcPts val="100"/>
+                <a:spcPts val="200"/>
               </a:spcAft>
             </a:pPr>
             <a:r>
               <a:rPr sz="1200" b="1">
                 <a:solidFill>
-                  <a:srgbClr val="C00000"/>
+                  <a:srgbClr val="333333"/>
                 </a:solidFill>
                 <a:latin typeface="メイリオ"/>
                 <a:ea typeface="メイリオ"/>
@@ -15291,8 +15168,8 @@
           <p:nvPr/>
         </p:nvGraphicFramePr>
         <p:xfrm>
-          <a:off x="400000" y="960000"/>
-          <a:ext cx="9100000" cy="2100000"/>
+          <a:off x="600000" y="2620000"/>
+          <a:ext cx="8700000" cy="1320000"/>
         </p:xfrm>
         <a:graphic>
           <a:graphicData uri="http://schemas.openxmlformats.org/drawingml/2006/table">
@@ -15302,11 +15179,10 @@
               </a:tblPr>
               <a:tblGrid>
                 <a:gridCol w="1400000"/>
-                <a:gridCol w="2550000"/>
-                <a:gridCol w="2550000"/>
-                <a:gridCol w="2600000"/>
+                <a:gridCol w="3650000"/>
+                <a:gridCol w="3650000"/>
               </a:tblGrid>
-              <a:tr h="420000">
+              <a:tr h="330000">
                 <a:tc>
                   <a:txBody>
                     <a:bodyPr/>
@@ -15345,7 +15221,7 @@
                           <a:latin typeface="メイリオ"/>
                           <a:ea typeface="メイリオ"/>
                         </a:rPr>
-                        <a:t>ASIS：ChatGPT</a:t>
+                        <a:t>ASIS：VS Code + Copilot</a:t>
                       </a:r>
                     </a:p>
                   </a:txBody>
@@ -15369,7 +15245,7 @@
                           <a:latin typeface="メイリオ"/>
                           <a:ea typeface="メイリオ"/>
                         </a:rPr>
-                        <a:t>ASIS：Gemini</a:t>
+                        <a:t>TOBE：Cursor + Claude</a:t>
                       </a:r>
                     </a:p>
                   </a:txBody>
@@ -15379,32 +15255,8 @@
                     </a:solidFill>
                   </a:tcPr>
                 </a:tc>
-                <a:tc>
-                  <a:txBody>
-                    <a:bodyPr/>
-                    <a:lstStyle/>
-                    <a:p>
-                      <a:pPr algn="ctr"/>
-                      <a:r>
-                        <a:rPr sz="1000" b="1">
-                          <a:solidFill>
-                            <a:srgbClr val="FFFFFF"/>
-                          </a:solidFill>
-                          <a:latin typeface="メイリオ"/>
-                          <a:ea typeface="メイリオ"/>
-                        </a:rPr>
-                        <a:t>TOBE：Claude</a:t>
-                      </a:r>
-                    </a:p>
-                  </a:txBody>
-                  <a:tcPr anchor="ctr">
-                    <a:solidFill>
-                      <a:srgbClr val="1F4E79"/>
-                    </a:solidFill>
-                  </a:tcPr>
-                </a:tc>
               </a:tr>
-              <a:tr h="420000">
+              <a:tr h="330000">
                 <a:tc>
                   <a:txBody>
                     <a:bodyPr/>
@@ -15412,14 +15264,14 @@
                     <a:p>
                       <a:pPr algn="l"/>
                       <a:r>
-                        <a:rPr sz="800" b="1">
+                        <a:rPr sz="1000" b="0">
                           <a:solidFill>
                             <a:srgbClr val="333333"/>
                           </a:solidFill>
                           <a:latin typeface="メイリオ"/>
                           <a:ea typeface="メイリオ"/>
                         </a:rPr>
-                        <a:t>思考の深さ</a:t>
+                        <a:t>得意</a:t>
                       </a:r>
                     </a:p>
                   </a:txBody>
@@ -15432,15 +15284,14 @@
                     <a:p>
                       <a:pPr algn="l"/>
                       <a:r>
-                        <a:rPr sz="800" b="0">
+                        <a:rPr sz="1000" b="0">
                           <a:solidFill>
                             <a:srgbClr val="333333"/>
                           </a:solidFill>
                           <a:latin typeface="メイリオ"/>
                           <a:ea typeface="メイリオ"/>
                         </a:rPr>
-                        <a:t>幅広いアイデア出しや
-壁打ちが得意</a:t>
+                        <a:t>行・関数単位の補完が速い</a:t>
                       </a:r>
                     </a:p>
                   </a:txBody>
@@ -15453,20 +15304,21 @@
                     <a:p>
                       <a:pPr algn="l"/>
                       <a:r>
-                        <a:rPr sz="800" b="0">
+                        <a:rPr sz="1000" b="0">
                           <a:solidFill>
                             <a:srgbClr val="333333"/>
                           </a:solidFill>
                           <a:latin typeface="メイリオ"/>
                           <a:ea typeface="メイリオ"/>
                         </a:rPr>
-                        <a:t>広く拾う・素早い概観が得意
-（深さは用途次第）</a:t>
+                        <a:t>複数ファイル横断の設計・実装・修正</a:t>
                       </a:r>
                     </a:p>
                   </a:txBody>
                   <a:tcPr anchor="ctr"/>
                 </a:tc>
+              </a:tr>
+              <a:tr h="330000">
                 <a:tc>
                   <a:txBody>
                     <a:bodyPr/>
@@ -15474,22 +15326,23 @@
                     <a:p>
                       <a:pPr algn="l"/>
                       <a:r>
-                        <a:rPr sz="800" b="0">
+                        <a:rPr sz="1000" b="0">
                           <a:solidFill>
                             <a:srgbClr val="333333"/>
                           </a:solidFill>
                           <a:latin typeface="メイリオ"/>
                           <a:ea typeface="メイリオ"/>
                         </a:rPr>
-                        <a:t>前提・理由まで踏み込む
-丁寧な深掘りが強い</a:t>
-                      </a:r>
-                    </a:p>
-                  </a:txBody>
-                  <a:tcPr anchor="ctr"/>
-                </a:tc>
-              </a:tr>
-              <a:tr h="420000">
+                        <a:t>文脈</a:t>
+                      </a:r>
+                    </a:p>
+                  </a:txBody>
+                  <a:tcPr anchor="ctr">
+                    <a:solidFill>
+                      <a:srgbClr val="D6E3F0"/>
+                    </a:solidFill>
+                  </a:tcPr>
+                </a:tc>
                 <a:tc>
                   <a:txBody>
                     <a:bodyPr/>
@@ -15497,14 +15350,14 @@
                     <a:p>
                       <a:pPr algn="l"/>
                       <a:r>
-                        <a:rPr sz="800" b="1">
+                        <a:rPr sz="1000" b="0">
                           <a:solidFill>
                             <a:srgbClr val="333333"/>
                           </a:solidFill>
                           <a:latin typeface="メイリオ"/>
                           <a:ea typeface="メイリオ"/>
                         </a:rPr>
-                        <a:t>資料作成</a:t>
+                        <a:t>編集中の周辺が中心</a:t>
                       </a:r>
                     </a:p>
                   </a:txBody>
@@ -15521,15 +15374,14 @@
                     <a:p>
                       <a:pPr algn="l"/>
                       <a:r>
-                        <a:rPr sz="800" b="0">
+                        <a:rPr sz="1000" b="0">
                           <a:solidFill>
                             <a:srgbClr val="333333"/>
                           </a:solidFill>
                           <a:latin typeface="メイリオ"/>
                           <a:ea typeface="メイリオ"/>
                         </a:rPr>
-                        <a:t>たたき台作成が速く
-表現のバリエーションも豊富</a:t>
+                        <a:t>リポジトリ／ガイドを広く読ませやすい</a:t>
                       </a:r>
                     </a:p>
                   </a:txBody>
@@ -15539,6 +15391,8 @@
                     </a:solidFill>
                   </a:tcPr>
                 </a:tc>
+              </a:tr>
+              <a:tr h="330000">
                 <a:tc>
                   <a:txBody>
                     <a:bodyPr/>
@@ -15546,23 +15400,18 @@
                     <a:p>
                       <a:pPr algn="l"/>
                       <a:r>
-                        <a:rPr sz="800" b="0">
+                        <a:rPr sz="1000" b="0">
                           <a:solidFill>
                             <a:srgbClr val="333333"/>
                           </a:solidFill>
                           <a:latin typeface="メイリオ"/>
                           <a:ea typeface="メイリオ"/>
                         </a:rPr>
-                        <a:t>草案づくりや要約に強い
-Google系資料との相性あり</a:t>
-                      </a:r>
-                    </a:p>
-                  </a:txBody>
-                  <a:tcPr anchor="ctr">
-                    <a:solidFill>
-                      <a:srgbClr val="D6E3F0"/>
-                    </a:solidFill>
-                  </a:tcPr>
+                        <a:t>向く作業</a:t>
+                      </a:r>
+                    </a:p>
+                  </a:txBody>
+                  <a:tcPr anchor="ctr"/>
                 </a:tc>
                 <a:tc>
                   <a:txBody>
@@ -15571,26 +15420,19 @@
                     <a:p>
                       <a:pPr algn="l"/>
                       <a:r>
-                        <a:rPr sz="800" b="0">
+                        <a:rPr sz="1000" b="0">
                           <a:solidFill>
                             <a:srgbClr val="333333"/>
                           </a:solidFill>
                           <a:latin typeface="メイリオ"/>
                           <a:ea typeface="メイリオ"/>
                         </a:rPr>
-                        <a:t>構成・論点が整理されやすい
-長文でも一貫しやすい</a:t>
-                      </a:r>
-                    </a:p>
-                  </a:txBody>
-                  <a:tcPr anchor="ctr">
-                    <a:solidFill>
-                      <a:srgbClr val="D6E3F0"/>
-                    </a:solidFill>
-                  </a:tcPr>
-                </a:tc>
-              </a:tr>
-              <a:tr h="420000">
+                        <a:t>小改修・定型実装</a:t>
+                      </a:r>
+                    </a:p>
+                  </a:txBody>
+                  <a:tcPr anchor="ctr"/>
+                </a:tc>
                 <a:tc>
                   <a:txBody>
                     <a:bodyPr/>
@@ -15598,181 +15440,18 @@
                     <a:p>
                       <a:pPr algn="l"/>
                       <a:r>
-                        <a:rPr sz="800" b="1">
+                        <a:rPr sz="1000" b="0">
                           <a:solidFill>
                             <a:srgbClr val="333333"/>
                           </a:solidFill>
                           <a:latin typeface="メイリオ"/>
                           <a:ea typeface="メイリオ"/>
                         </a:rPr>
-                        <a:t>業界分析</a:t>
+                        <a:t>調査・横断改修・品質向上の伴走</a:t>
                       </a:r>
                     </a:p>
                   </a:txBody>
                   <a:tcPr anchor="ctr"/>
-                </a:tc>
-                <a:tc>
-                  <a:txBody>
-                    <a:bodyPr/>
-                    <a:lstStyle/>
-                    <a:p>
-                      <a:pPr algn="l"/>
-                      <a:r>
-                        <a:rPr sz="800" b="0">
-                          <a:solidFill>
-                            <a:srgbClr val="333333"/>
-                          </a:solidFill>
-                          <a:latin typeface="メイリオ"/>
-                          <a:ea typeface="メイリオ"/>
-                        </a:rPr>
-                        <a:t>多面的な切り口の洗い出し
-ブレインストーム向き</a:t>
-                      </a:r>
-                    </a:p>
-                  </a:txBody>
-                  <a:tcPr anchor="ctr"/>
-                </a:tc>
-                <a:tc>
-                  <a:txBody>
-                    <a:bodyPr/>
-                    <a:lstStyle/>
-                    <a:p>
-                      <a:pPr algn="l"/>
-                      <a:r>
-                        <a:rPr sz="800" b="0">
-                          <a:solidFill>
-                            <a:srgbClr val="333333"/>
-                          </a:solidFill>
-                          <a:latin typeface="メイリオ"/>
-                          <a:ea typeface="メイリオ"/>
-                        </a:rPr>
-                        <a:t>最新情報の拾い上げや
-俯瞰整理の入口に向く</a:t>
-                      </a:r>
-                    </a:p>
-                  </a:txBody>
-                  <a:tcPr anchor="ctr"/>
-                </a:tc>
-                <a:tc>
-                  <a:txBody>
-                    <a:bodyPr/>
-                    <a:lstStyle/>
-                    <a:p>
-                      <a:pPr algn="l"/>
-                      <a:r>
-                        <a:rPr sz="800" b="0">
-                          <a:solidFill>
-                            <a:srgbClr val="333333"/>
-                          </a:solidFill>
-                          <a:latin typeface="メイリオ"/>
-                          <a:ea typeface="メイリオ"/>
-                        </a:rPr>
-                        <a:t>仮説→根拠→示唆まで
-一段深く組み立てやすい</a:t>
-                      </a:r>
-                    </a:p>
-                  </a:txBody>
-                  <a:tcPr anchor="ctr"/>
-                </a:tc>
-              </a:tr>
-              <a:tr h="420000">
-                <a:tc>
-                  <a:txBody>
-                    <a:bodyPr/>
-                    <a:lstStyle/>
-                    <a:p>
-                      <a:pPr algn="l"/>
-                      <a:r>
-                        <a:rPr sz="800" b="1">
-                          <a:solidFill>
-                            <a:srgbClr val="333333"/>
-                          </a:solidFill>
-                          <a:latin typeface="メイリオ"/>
-                          <a:ea typeface="メイリオ"/>
-                        </a:rPr>
-                        <a:t>部内の使い分け</a:t>
-                      </a:r>
-                    </a:p>
-                  </a:txBody>
-                  <a:tcPr anchor="ctr">
-                    <a:solidFill>
-                      <a:srgbClr val="D6E3F0"/>
-                    </a:solidFill>
-                  </a:tcPr>
-                </a:tc>
-                <a:tc>
-                  <a:txBody>
-                    <a:bodyPr/>
-                    <a:lstStyle/>
-                    <a:p>
-                      <a:pPr algn="l"/>
-                      <a:r>
-                        <a:rPr sz="800" b="0">
-                          <a:solidFill>
-                            <a:srgbClr val="333333"/>
-                          </a:solidFill>
-                          <a:latin typeface="メイリオ"/>
-                          <a:ea typeface="メイリオ"/>
-                        </a:rPr>
-                        <a:t>発散・下書き・広く聞く用途</a:t>
-                      </a:r>
-                    </a:p>
-                  </a:txBody>
-                  <a:tcPr anchor="ctr">
-                    <a:solidFill>
-                      <a:srgbClr val="D6E3F0"/>
-                    </a:solidFill>
-                  </a:tcPr>
-                </a:tc>
-                <a:tc>
-                  <a:txBody>
-                    <a:bodyPr/>
-                    <a:lstStyle/>
-                    <a:p>
-                      <a:pPr algn="l"/>
-                      <a:r>
-                        <a:rPr sz="800" b="0">
-                          <a:solidFill>
-                            <a:srgbClr val="333333"/>
-                          </a:solidFill>
-                          <a:latin typeface="メイリオ"/>
-                          <a:ea typeface="メイリオ"/>
-                        </a:rPr>
-                        <a:t>概観・別視点の確認
-（これまで主に利用）</a:t>
-                      </a:r>
-                    </a:p>
-                  </a:txBody>
-                  <a:tcPr anchor="ctr">
-                    <a:solidFill>
-                      <a:srgbClr val="D6E3F0"/>
-                    </a:solidFill>
-                  </a:tcPr>
-                </a:tc>
-                <a:tc>
-                  <a:txBody>
-                    <a:bodyPr/>
-                    <a:lstStyle/>
-                    <a:p>
-                      <a:pPr algn="l"/>
-                      <a:r>
-                        <a:rPr sz="800" b="0">
-                          <a:solidFill>
-                            <a:srgbClr val="333333"/>
-                          </a:solidFill>
-                          <a:latin typeface="メイリオ"/>
-                          <a:ea typeface="メイリオ"/>
-                        </a:rPr>
-                        <a:t>業務の主戦へ
-（分析・資料の品質重視）</a:t>
-                      </a:r>
-                    </a:p>
-                  </a:txBody>
-                  <a:tcPr anchor="ctr">
-                    <a:solidFill>
-                      <a:srgbClr val="D6E3F0"/>
-                    </a:solidFill>
-                  </a:tcPr>
                 </a:tc>
               </a:tr>
             </a:tbl>
@@ -15787,8 +15466,8 @@
         </p:nvSpPr>
         <p:spPr>
           <a:xfrm>
-            <a:off x="500000" y="3150000"/>
-            <a:ext cx="9000000" cy="230000"/>
+            <a:off x="600000" y="2360000"/>
+            <a:ext cx="9000000" cy="260000"/>
           </a:xfrm>
           <a:prstGeom prst="rect">
             <a:avLst/>
@@ -15806,7 +15485,7 @@
                 <a:spcPts val="0"/>
               </a:spcBef>
               <a:spcAft>
-                <a:spcPts val="100"/>
+                <a:spcPts val="200"/>
               </a:spcAft>
             </a:pPr>
             <a:r>
@@ -15831,8 +15510,8 @@
           <p:nvPr/>
         </p:nvGraphicFramePr>
         <p:xfrm>
-          <a:off x="400000" y="3400000"/>
-          <a:ext cx="9100000" cy="1250000"/>
+          <a:off x="600000" y="980000"/>
+          <a:ext cx="8700000" cy="1320000"/>
         </p:xfrm>
         <a:graphic>
           <a:graphicData uri="http://schemas.openxmlformats.org/drawingml/2006/table">
@@ -15841,11 +15520,12 @@
                 <a:tableStyleId>{5C22544A-7EE6-4342-B048-85BDC9FD1C3A}</a:tableStyleId>
               </a:tblPr>
               <a:tblGrid>
-                <a:gridCol w="1400000"/>
-                <a:gridCol w="3850000"/>
-                <a:gridCol w="3850000"/>
+                <a:gridCol w="2175000"/>
+                <a:gridCol w="2175000"/>
+                <a:gridCol w="2175000"/>
+                <a:gridCol w="2175000"/>
               </a:tblGrid>
-              <a:tr h="312500">
+              <a:tr h="330000">
                 <a:tc>
                   <a:txBody>
                     <a:bodyPr/>
@@ -15884,7 +15564,7 @@
                           <a:latin typeface="メイリオ"/>
                           <a:ea typeface="メイリオ"/>
                         </a:rPr>
-                        <a:t>ASIS：VS Code + Copilot</a:t>
+                        <a:t>ASIS：ChatGPT</a:t>
                       </a:r>
                     </a:p>
                   </a:txBody>
@@ -15908,7 +15588,7 @@
                           <a:latin typeface="メイリオ"/>
                           <a:ea typeface="メイリオ"/>
                         </a:rPr>
-                        <a:t>TOBE：Cursor + Claude</a:t>
+                        <a:t>ASIS：Gemini</a:t>
                       </a:r>
                     </a:p>
                   </a:txBody>
@@ -15918,8 +15598,32 @@
                     </a:solidFill>
                   </a:tcPr>
                 </a:tc>
+                <a:tc>
+                  <a:txBody>
+                    <a:bodyPr/>
+                    <a:lstStyle/>
+                    <a:p>
+                      <a:pPr algn="ctr"/>
+                      <a:r>
+                        <a:rPr sz="1000" b="1">
+                          <a:solidFill>
+                            <a:srgbClr val="FFFFFF"/>
+                          </a:solidFill>
+                          <a:latin typeface="メイリオ"/>
+                          <a:ea typeface="メイリオ"/>
+                        </a:rPr>
+                        <a:t>TOBE：Claude</a:t>
+                      </a:r>
+                    </a:p>
+                  </a:txBody>
+                  <a:tcPr anchor="ctr">
+                    <a:solidFill>
+                      <a:srgbClr val="1F4E79"/>
+                    </a:solidFill>
+                  </a:tcPr>
+                </a:tc>
               </a:tr>
-              <a:tr h="312500">
+              <a:tr h="330000">
                 <a:tc>
                   <a:txBody>
                     <a:bodyPr/>
@@ -15927,14 +15631,14 @@
                     <a:p>
                       <a:pPr algn="l"/>
                       <a:r>
-                        <a:rPr sz="900" b="1">
+                        <a:rPr sz="1000" b="0">
                           <a:solidFill>
                             <a:srgbClr val="333333"/>
                           </a:solidFill>
                           <a:latin typeface="メイリオ"/>
                           <a:ea typeface="メイリオ"/>
                         </a:rPr>
-                        <a:t>得意</a:t>
+                        <a:t>思考の深さ</a:t>
                       </a:r>
                     </a:p>
                   </a:txBody>
@@ -15947,41 +15651,32 @@
                     <a:p>
                       <a:pPr algn="l"/>
                       <a:r>
-                        <a:rPr sz="900" b="0">
+                        <a:rPr sz="1000" b="0">
                           <a:solidFill>
                             <a:srgbClr val="333333"/>
                           </a:solidFill>
                           <a:latin typeface="メイリオ"/>
                           <a:ea typeface="メイリオ"/>
                         </a:rPr>
-                        <a:t>行・関数単位の補完が速い</a:t>
-                      </a:r>
-                    </a:p>
-                  </a:txBody>
-                  <a:tcPr anchor="ctr"/>
-                </a:tc>
-                <a:tc>
-                  <a:txBody>
-                    <a:bodyPr/>
-                    <a:lstStyle/>
+                        <a:t>幅広いアイデア出しや</a:t>
+                      </a:r>
+                    </a:p>
                     <a:p>
                       <a:pPr algn="l"/>
                       <a:r>
-                        <a:rPr sz="900" b="0">
+                        <a:rPr sz="1000" b="0">
                           <a:solidFill>
                             <a:srgbClr val="333333"/>
                           </a:solidFill>
                           <a:latin typeface="メイリオ"/>
                           <a:ea typeface="メイリオ"/>
                         </a:rPr>
-                        <a:t>複数ファイル横断の設計・実装・修正</a:t>
+                        <a:t>壁打ちが得意</a:t>
                       </a:r>
                     </a:p>
                   </a:txBody>
                   <a:tcPr anchor="ctr"/>
                 </a:tc>
-              </a:tr>
-              <a:tr h="312500">
                 <a:tc>
                   <a:txBody>
                     <a:bodyPr/>
@@ -15989,14 +15684,82 @@
                     <a:p>
                       <a:pPr algn="l"/>
                       <a:r>
-                        <a:rPr sz="900" b="1">
+                        <a:rPr sz="1000" b="0">
                           <a:solidFill>
                             <a:srgbClr val="333333"/>
                           </a:solidFill>
                           <a:latin typeface="メイリオ"/>
                           <a:ea typeface="メイリオ"/>
                         </a:rPr>
-                        <a:t>文脈</a:t>
+                        <a:t>広く拾う・素早い概観が得意</a:t>
+                      </a:r>
+                    </a:p>
+                    <a:p>
+                      <a:pPr algn="l"/>
+                      <a:r>
+                        <a:rPr sz="1000" b="0">
+                          <a:solidFill>
+                            <a:srgbClr val="333333"/>
+                          </a:solidFill>
+                          <a:latin typeface="メイリオ"/>
+                          <a:ea typeface="メイリオ"/>
+                        </a:rPr>
+                        <a:t>（深さは用途次第）</a:t>
+                      </a:r>
+                    </a:p>
+                  </a:txBody>
+                  <a:tcPr anchor="ctr"/>
+                </a:tc>
+                <a:tc>
+                  <a:txBody>
+                    <a:bodyPr/>
+                    <a:lstStyle/>
+                    <a:p>
+                      <a:pPr algn="l"/>
+                      <a:r>
+                        <a:rPr sz="1000" b="0">
+                          <a:solidFill>
+                            <a:srgbClr val="333333"/>
+                          </a:solidFill>
+                          <a:latin typeface="メイリオ"/>
+                          <a:ea typeface="メイリオ"/>
+                        </a:rPr>
+                        <a:t>前提・理由まで踏み込む</a:t>
+                      </a:r>
+                    </a:p>
+                    <a:p>
+                      <a:pPr algn="l"/>
+                      <a:r>
+                        <a:rPr sz="1000" b="0">
+                          <a:solidFill>
+                            <a:srgbClr val="333333"/>
+                          </a:solidFill>
+                          <a:latin typeface="メイリオ"/>
+                          <a:ea typeface="メイリオ"/>
+                        </a:rPr>
+                        <a:t>丁寧な深掘りが強い</a:t>
+                      </a:r>
+                    </a:p>
+                  </a:txBody>
+                  <a:tcPr anchor="ctr"/>
+                </a:tc>
+              </a:tr>
+              <a:tr h="330000">
+                <a:tc>
+                  <a:txBody>
+                    <a:bodyPr/>
+                    <a:lstStyle/>
+                    <a:p>
+                      <a:pPr algn="l"/>
+                      <a:r>
+                        <a:rPr sz="1000" b="0">
+                          <a:solidFill>
+                            <a:srgbClr val="333333"/>
+                          </a:solidFill>
+                          <a:latin typeface="メイリオ"/>
+                          <a:ea typeface="メイリオ"/>
+                        </a:rPr>
+                        <a:t>資料作成</a:t>
                       </a:r>
                     </a:p>
                   </a:txBody>
@@ -16013,14 +15776,27 @@
                     <a:p>
                       <a:pPr algn="l"/>
                       <a:r>
-                        <a:rPr sz="900" b="0">
+                        <a:rPr sz="1000" b="0">
                           <a:solidFill>
                             <a:srgbClr val="333333"/>
                           </a:solidFill>
                           <a:latin typeface="メイリオ"/>
                           <a:ea typeface="メイリオ"/>
                         </a:rPr>
-                        <a:t>編集中の周辺が中心</a:t>
+                        <a:t>たたき台作成が速く</a:t>
+                      </a:r>
+                    </a:p>
+                    <a:p>
+                      <a:pPr algn="l"/>
+                      <a:r>
+                        <a:rPr sz="1000" b="0">
+                          <a:solidFill>
+                            <a:srgbClr val="333333"/>
+                          </a:solidFill>
+                          <a:latin typeface="メイリオ"/>
+                          <a:ea typeface="メイリオ"/>
+                        </a:rPr>
+                        <a:t>表現のバリエーションも豊富</a:t>
                       </a:r>
                     </a:p>
                   </a:txBody>
@@ -16037,14 +15813,27 @@
                     <a:p>
                       <a:pPr algn="l"/>
                       <a:r>
-                        <a:rPr sz="900" b="0">
+                        <a:rPr sz="1000" b="0">
                           <a:solidFill>
                             <a:srgbClr val="333333"/>
                           </a:solidFill>
                           <a:latin typeface="メイリオ"/>
                           <a:ea typeface="メイリオ"/>
                         </a:rPr>
-                        <a:t>リポジトリ／ガイドを広く読ませやすい</a:t>
+                        <a:t>草案づくりや要約に強い</a:t>
+                      </a:r>
+                    </a:p>
+                    <a:p>
+                      <a:pPr algn="l"/>
+                      <a:r>
+                        <a:rPr sz="1000" b="0">
+                          <a:solidFill>
+                            <a:srgbClr val="333333"/>
+                          </a:solidFill>
+                          <a:latin typeface="メイリオ"/>
+                          <a:ea typeface="メイリオ"/>
+                        </a:rPr>
+                        <a:t>Google系資料との相性あり</a:t>
                       </a:r>
                     </a:p>
                   </a:txBody>
@@ -16054,8 +15843,6 @@
                     </a:solidFill>
                   </a:tcPr>
                 </a:tc>
-              </a:tr>
-              <a:tr h="312500">
                 <a:tc>
                   <a:txBody>
                     <a:bodyPr/>
@@ -16063,39 +15850,38 @@
                     <a:p>
                       <a:pPr algn="l"/>
                       <a:r>
-                        <a:rPr sz="900" b="1">
+                        <a:rPr sz="1000" b="0">
                           <a:solidFill>
                             <a:srgbClr val="333333"/>
                           </a:solidFill>
                           <a:latin typeface="メイリオ"/>
                           <a:ea typeface="メイリオ"/>
                         </a:rPr>
-                        <a:t>向く作業</a:t>
-                      </a:r>
-                    </a:p>
-                  </a:txBody>
-                  <a:tcPr anchor="ctr"/>
-                </a:tc>
-                <a:tc>
-                  <a:txBody>
-                    <a:bodyPr/>
-                    <a:lstStyle/>
+                        <a:t>構成・論点が整理されやすい</a:t>
+                      </a:r>
+                    </a:p>
                     <a:p>
                       <a:pPr algn="l"/>
                       <a:r>
-                        <a:rPr sz="900" b="0">
+                        <a:rPr sz="1000" b="0">
                           <a:solidFill>
                             <a:srgbClr val="333333"/>
                           </a:solidFill>
                           <a:latin typeface="メイリオ"/>
                           <a:ea typeface="メイリオ"/>
                         </a:rPr>
-                        <a:t>小改修・定型実装</a:t>
-                      </a:r>
-                    </a:p>
-                  </a:txBody>
-                  <a:tcPr anchor="ctr"/>
-                </a:tc>
+                        <a:t>長文でも一貫しやすい</a:t>
+                      </a:r>
+                    </a:p>
+                  </a:txBody>
+                  <a:tcPr anchor="ctr">
+                    <a:solidFill>
+                      <a:srgbClr val="D6E3F0"/>
+                    </a:solidFill>
+                  </a:tcPr>
+                </a:tc>
+              </a:tr>
+              <a:tr h="330000">
                 <a:tc>
                   <a:txBody>
                     <a:bodyPr/>
@@ -16103,14 +15889,113 @@
                     <a:p>
                       <a:pPr algn="l"/>
                       <a:r>
-                        <a:rPr sz="900" b="0">
+                        <a:rPr sz="1000" b="0">
                           <a:solidFill>
                             <a:srgbClr val="333333"/>
                           </a:solidFill>
                           <a:latin typeface="メイリオ"/>
                           <a:ea typeface="メイリオ"/>
                         </a:rPr>
-                        <a:t>調査・横断改修・品質向上の伴走</a:t>
+                        <a:t>業界分析</a:t>
+                      </a:r>
+                    </a:p>
+                  </a:txBody>
+                  <a:tcPr anchor="ctr"/>
+                </a:tc>
+                <a:tc>
+                  <a:txBody>
+                    <a:bodyPr/>
+                    <a:lstStyle/>
+                    <a:p>
+                      <a:pPr algn="l"/>
+                      <a:r>
+                        <a:rPr sz="1000" b="0">
+                          <a:solidFill>
+                            <a:srgbClr val="333333"/>
+                          </a:solidFill>
+                          <a:latin typeface="メイリオ"/>
+                          <a:ea typeface="メイリオ"/>
+                        </a:rPr>
+                        <a:t>多面的な切り口の洗い出し</a:t>
+                      </a:r>
+                    </a:p>
+                    <a:p>
+                      <a:pPr algn="l"/>
+                      <a:r>
+                        <a:rPr sz="1000" b="0">
+                          <a:solidFill>
+                            <a:srgbClr val="333333"/>
+                          </a:solidFill>
+                          <a:latin typeface="メイリオ"/>
+                          <a:ea typeface="メイリオ"/>
+                        </a:rPr>
+                        <a:t>ブレインストーム向き</a:t>
+                      </a:r>
+                    </a:p>
+                  </a:txBody>
+                  <a:tcPr anchor="ctr"/>
+                </a:tc>
+                <a:tc>
+                  <a:txBody>
+                    <a:bodyPr/>
+                    <a:lstStyle/>
+                    <a:p>
+                      <a:pPr algn="l"/>
+                      <a:r>
+                        <a:rPr sz="1000" b="0">
+                          <a:solidFill>
+                            <a:srgbClr val="333333"/>
+                          </a:solidFill>
+                          <a:latin typeface="メイリオ"/>
+                          <a:ea typeface="メイリオ"/>
+                        </a:rPr>
+                        <a:t>最新情報の拾い上げや</a:t>
+                      </a:r>
+                    </a:p>
+                    <a:p>
+                      <a:pPr algn="l"/>
+                      <a:r>
+                        <a:rPr sz="1000" b="0">
+                          <a:solidFill>
+                            <a:srgbClr val="333333"/>
+                          </a:solidFill>
+                          <a:latin typeface="メイリオ"/>
+                          <a:ea typeface="メイリオ"/>
+                        </a:rPr>
+                        <a:t>俯瞰整理の入口に向く</a:t>
+                      </a:r>
+                    </a:p>
+                  </a:txBody>
+                  <a:tcPr anchor="ctr"/>
+                </a:tc>
+                <a:tc>
+                  <a:txBody>
+                    <a:bodyPr/>
+                    <a:lstStyle/>
+                    <a:p>
+                      <a:pPr algn="l"/>
+                      <a:r>
+                        <a:rPr sz="1000" b="0">
+                          <a:solidFill>
+                            <a:srgbClr val="333333"/>
+                          </a:solidFill>
+                          <a:latin typeface="メイリオ"/>
+                          <a:ea typeface="メイリオ"/>
+                        </a:rPr>
+                        <a:t>仮説→根拠→示唆まで</a:t>
+                      </a:r>
+                    </a:p>
+                    <a:p>
+                      <a:pPr algn="l"/>
+                      <a:r>
+                        <a:rPr sz="1000" b="0">
+                          <a:solidFill>
+                            <a:srgbClr val="333333"/>
+                          </a:solidFill>
+                          <a:latin typeface="メイリオ"/>
+                          <a:ea typeface="メイリオ"/>
+                        </a:rPr>
+                        <a:t>一段深く組み立てやすい</a:t>
                       </a:r>
                     </a:p>
                   </a:txBody>
@@ -16129,8 +16014,8 @@
         </p:nvSpPr>
         <p:spPr>
           <a:xfrm>
-            <a:off x="500000" y="4800000"/>
-            <a:ext cx="9000000" cy="1800000"/>
+            <a:off x="600000" y="4020000"/>
+            <a:ext cx="9000000" cy="2500000"/>
           </a:xfrm>
           <a:prstGeom prst="rect">
             <a:avLst/>
@@ -16148,7 +16033,7 @@
                 <a:spcPts val="0"/>
               </a:spcBef>
               <a:spcAft>
-                <a:spcPts val="100"/>
+                <a:spcPts val="200"/>
               </a:spcAft>
             </a:pPr>
             <a:r>
@@ -16168,7 +16053,7 @@
                 <a:spcPts val="0"/>
               </a:spcBef>
               <a:spcAft>
-                <a:spcPts val="100"/>
+                <a:spcPts val="200"/>
               </a:spcAft>
             </a:pPr>
             <a:r>
@@ -16188,7 +16073,7 @@
                 <a:spcPts val="0"/>
               </a:spcBef>
               <a:spcAft>
-                <a:spcPts val="100"/>
+                <a:spcPts val="200"/>
               </a:spcAft>
             </a:pPr>
             <a:r>
@@ -16208,7 +16093,7 @@
                 <a:spcPts val="0"/>
               </a:spcBef>
               <a:spcAft>
-                <a:spcPts val="100"/>
+                <a:spcPts val="200"/>
               </a:spcAft>
             </a:pPr>
             <a:r>
@@ -16228,7 +16113,7 @@
                 <a:spcPts val="0"/>
               </a:spcBef>
               <a:spcAft>
-                <a:spcPts val="100"/>
+                <a:spcPts val="200"/>
               </a:spcAft>
             </a:pPr>
             <a:r>
@@ -16248,7 +16133,7 @@
                 <a:spcPts val="0"/>
               </a:spcBef>
               <a:spcAft>
-                <a:spcPts val="100"/>
+                <a:spcPts val="200"/>
               </a:spcAft>
             </a:pPr>
             <a:r>
@@ -16268,7 +16153,7 @@
                 <a:spcPts val="0"/>
               </a:spcBef>
               <a:spcAft>
-                <a:spcPts val="100"/>
+                <a:spcPts val="200"/>
               </a:spcAft>
             </a:pPr>
             <a:r>

--- a/docs/【EC】ECサービス部_2026年7月度部会_Ver1.1.pptx
+++ b/docs/【EC】ECサービス部_2026年7月度部会_Ver1.1.pptx
@@ -5,7 +5,7 @@
     <p:sldMasterId id="2147483660" r:id="rId4"/>
   </p:sldMasterIdLst>
   <p:notesMasterIdLst>
-    <p:notesMasterId r:id="rId24"/>
+    <p:notesMasterId r:id="rId26"/>
   </p:notesMasterIdLst>
   <p:sldIdLst>
     <p:sldId id="256" r:id="rId5"/>
@@ -21,14 +21,14 @@
     <p:sldId id="261" r:id="rId15"/>
     <p:sldId id="1024" r:id="rId16"/>
     <p:sldId id="1026" r:id="rId17"/>
-    <p:sldId id="1029" r:id="rId30"/>
-    <p:sldId id="264" r:id="rId18"/>
-    <p:sldId id="1016" r:id="rId19"/>
-    <p:sldId id="1025" r:id="rId20"/>
-    <p:sldId id="1027" r:id="rId21"/>
-    <p:sldId id="1028" r:id="rId29"/>
-    <p:sldId id="1017" r:id="rId22"/>
-    <p:sldId id="297" r:id="rId23"/>
+    <p:sldId id="1030" r:id="rId18"/>
+    <p:sldId id="264" r:id="rId19"/>
+    <p:sldId id="1016" r:id="rId20"/>
+    <p:sldId id="1025" r:id="rId21"/>
+    <p:sldId id="1027" r:id="rId22"/>
+    <p:sldId id="1031" r:id="rId23"/>
+    <p:sldId id="1017" r:id="rId24"/>
+    <p:sldId id="297" r:id="rId25"/>
   </p:sldIdLst>
   <p:sldSz cx="9906000" cy="6858000" type="A4"/>
   <p:notesSz cx="6735763" cy="9866313"/>
@@ -232,7 +232,7 @@
             <a:fld id="{146D2F6B-CC15-9347-BDA9-2E2E9ED97C42}" type="datetimeFigureOut">
               <a:rPr kumimoji="1" lang="ja-JP" altLang="en-US" smtClean="0"/>
               <a:pPr/>
-              <a:t>2026/7/13</a:t>
+              <a:t>2026/7/16</a:t>
             </a:fld>
             <a:endParaRPr kumimoji="1" lang="ja-JP" altLang="en-US"/>
           </a:p>
@@ -1085,6 +1085,121 @@
         <p:cNvPr id="1" name="">
           <a:extLst>
             <a:ext uri="{FF2B5EF4-FFF2-40B4-BE49-F238E27FC236}">
+              <a16:creationId xmlns:a16="http://schemas.microsoft.com/office/drawing/2014/main" id="{36387169-E318-986A-F482-854EF6138215}"/>
+            </a:ext>
+          </a:extLst>
+        </p:cNvPr>
+        <p:cNvGrpSpPr/>
+        <p:nvPr/>
+      </p:nvGrpSpPr>
+      <p:grpSpPr>
+        <a:xfrm>
+          <a:off x="0" y="0"/>
+          <a:ext cx="0" cy="0"/>
+          <a:chOff x="0" y="0"/>
+          <a:chExt cx="0" cy="0"/>
+        </a:xfrm>
+      </p:grpSpPr>
+      <p:sp>
+        <p:nvSpPr>
+          <p:cNvPr id="2" name="スライド イメージ プレースホルダー 1">
+            <a:extLst>
+              <a:ext uri="{FF2B5EF4-FFF2-40B4-BE49-F238E27FC236}">
+                <a16:creationId xmlns:a16="http://schemas.microsoft.com/office/drawing/2014/main" id="{5F0A557D-9DEA-0C90-D032-748D215D02ED}"/>
+              </a:ext>
+            </a:extLst>
+          </p:cNvPr>
+          <p:cNvSpPr>
+            <a:spLocks noGrp="1" noRot="1" noChangeAspect="1"/>
+          </p:cNvSpPr>
+          <p:nvPr>
+            <p:ph type="sldImg"/>
+          </p:nvPr>
+        </p:nvSpPr>
+        <p:spPr/>
+      </p:sp>
+      <p:sp>
+        <p:nvSpPr>
+          <p:cNvPr id="3" name="ノート プレースホルダー 2">
+            <a:extLst>
+              <a:ext uri="{FF2B5EF4-FFF2-40B4-BE49-F238E27FC236}">
+                <a16:creationId xmlns:a16="http://schemas.microsoft.com/office/drawing/2014/main" id="{A1BB921F-B79B-EDD9-A4B7-45EF31D69362}"/>
+              </a:ext>
+            </a:extLst>
+          </p:cNvPr>
+          <p:cNvSpPr>
+            <a:spLocks noGrp="1"/>
+          </p:cNvSpPr>
+          <p:nvPr>
+            <p:ph type="body" idx="1"/>
+          </p:nvPr>
+        </p:nvSpPr>
+        <p:spPr/>
+        <p:txBody>
+          <a:bodyPr/>
+          <a:lstStyle/>
+          <a:p>
+            <a:endParaRPr kumimoji="1" lang="ja-JP" altLang="en-US">
+              <a:uFillTx/>
+            </a:endParaRPr>
+          </a:p>
+        </p:txBody>
+      </p:sp>
+      <p:sp>
+        <p:nvSpPr>
+          <p:cNvPr id="4" name="スライド番号プレースホルダー 3">
+            <a:extLst>
+              <a:ext uri="{FF2B5EF4-FFF2-40B4-BE49-F238E27FC236}">
+                <a16:creationId xmlns:a16="http://schemas.microsoft.com/office/drawing/2014/main" id="{C12F37C2-ED26-C4F8-A1C7-D24B9AAC4D26}"/>
+              </a:ext>
+            </a:extLst>
+          </p:cNvPr>
+          <p:cNvSpPr>
+            <a:spLocks noGrp="1"/>
+          </p:cNvSpPr>
+          <p:nvPr>
+            <p:ph type="sldNum" sz="quarter" idx="10"/>
+          </p:nvPr>
+        </p:nvSpPr>
+        <p:spPr/>
+        <p:txBody>
+          <a:bodyPr/>
+          <a:lstStyle/>
+          <a:p>
+            <a:fld id="{13BBDFF2-C854-42AB-A0A1-39EE2E1232B0}" type="slidenum">
+              <a:rPr kumimoji="1" lang="ja-JP" altLang="en-US" smtClean="0">
+                <a:uFillTx/>
+              </a:rPr>
+              <a:pPr/>
+              <a:t>13</a:t>
+            </a:fld>
+            <a:endParaRPr kumimoji="1" lang="ja-JP" altLang="en-US">
+              <a:uFillTx/>
+            </a:endParaRPr>
+          </a:p>
+        </p:txBody>
+      </p:sp>
+    </p:spTree>
+    <p:extLst>
+      <p:ext uri="{BB962C8B-B14F-4D97-AF65-F5344CB8AC3E}">
+        <p14:creationId xmlns:p14="http://schemas.microsoft.com/office/powerpoint/2010/main" val="1344886907"/>
+      </p:ext>
+    </p:extLst>
+  </p:cSld>
+  <p:clrMapOvr>
+    <a:masterClrMapping/>
+  </p:clrMapOvr>
+</p:notes>
+</file>
+
+<file path=ppt/notesSlides/notesSlide15.xml><?xml version="1.0" encoding="utf-8"?>
+<p:notes xmlns:a="http://schemas.openxmlformats.org/drawingml/2006/main" xmlns:r="http://schemas.openxmlformats.org/officeDocument/2006/relationships" xmlns:p="http://schemas.openxmlformats.org/presentationml/2006/main">
+  <p:cSld>
+    <p:spTree>
+      <p:nvGrpSpPr>
+        <p:cNvPr id="1" name="">
+          <a:extLst>
+            <a:ext uri="{FF2B5EF4-FFF2-40B4-BE49-F238E27FC236}">
               <a16:creationId xmlns:a16="http://schemas.microsoft.com/office/drawing/2014/main" id="{B12FF49A-15AD-6923-9DC6-3E7F49298B56}"/>
             </a:ext>
           </a:extLst>
@@ -1171,7 +1286,7 @@
                 <a:uFillTx/>
               </a:rPr>
               <a:pPr/>
-              <a:t>13</a:t>
+              <a:t>14</a:t>
             </a:fld>
             <a:endParaRPr kumimoji="1" lang="ja-JP" altLang="en-US">
               <a:uFillTx/>
@@ -1192,7 +1307,7 @@
 </p:notes>
 </file>
 
-<file path=ppt/notesSlides/notesSlide15.xml><?xml version="1.0" encoding="utf-8"?>
+<file path=ppt/notesSlides/notesSlide16.xml><?xml version="1.0" encoding="utf-8"?>
 <p:notes xmlns:a="http://schemas.openxmlformats.org/drawingml/2006/main" xmlns:r="http://schemas.openxmlformats.org/officeDocument/2006/relationships" xmlns:p="http://schemas.openxmlformats.org/presentationml/2006/main">
   <p:cSld>
     <p:spTree>
@@ -1286,7 +1401,7 @@
                 <a:uFillTx/>
               </a:rPr>
               <a:pPr/>
-              <a:t>14</a:t>
+              <a:t>15</a:t>
             </a:fld>
             <a:endParaRPr kumimoji="1" lang="ja-JP" altLang="en-US">
               <a:uFillTx/>
@@ -1307,7 +1422,7 @@
 </p:notes>
 </file>
 
-<file path=ppt/notesSlides/notesSlide16.xml><?xml version="1.0" encoding="utf-8"?>
+<file path=ppt/notesSlides/notesSlide17.xml><?xml version="1.0" encoding="utf-8"?>
 <p:notes xmlns:a="http://schemas.openxmlformats.org/drawingml/2006/main" xmlns:r="http://schemas.openxmlformats.org/officeDocument/2006/relationships" xmlns:p="http://schemas.openxmlformats.org/presentationml/2006/main">
   <p:cSld>
     <p:spTree>
@@ -1401,7 +1516,7 @@
                 <a:uFillTx/>
               </a:rPr>
               <a:pPr/>
-              <a:t>15</a:t>
+              <a:t>16</a:t>
             </a:fld>
             <a:endParaRPr kumimoji="1" lang="ja-JP" altLang="en-US">
               <a:uFillTx/>
@@ -1422,7 +1537,7 @@
 </p:notes>
 </file>
 
-<file path=ppt/notesSlides/notesSlide17.xml><?xml version="1.0" encoding="utf-8"?>
+<file path=ppt/notesSlides/notesSlide18.xml><?xml version="1.0" encoding="utf-8"?>
 <p:notes xmlns:a="http://schemas.openxmlformats.org/drawingml/2006/main" xmlns:r="http://schemas.openxmlformats.org/officeDocument/2006/relationships" xmlns:p="http://schemas.openxmlformats.org/presentationml/2006/main">
   <p:cSld>
     <p:spTree>
@@ -1516,7 +1631,7 @@
                 <a:uFillTx/>
               </a:rPr>
               <a:pPr/>
-              <a:t>16</a:t>
+              <a:t>17</a:t>
             </a:fld>
             <a:endParaRPr kumimoji="1" lang="ja-JP" altLang="en-US">
               <a:uFillTx/>
@@ -1537,7 +1652,208 @@
 </p:notes>
 </file>
 
-<file path=ppt/notesSlides/notesSlide18.xml><?xml version="1.0" encoding="utf-8"?>
+<file path=ppt/notesSlides/notesSlide19.xml><?xml version="1.0" encoding="utf-8"?>
+<p:notes xmlns:a="http://schemas.openxmlformats.org/drawingml/2006/main" xmlns:r="http://schemas.openxmlformats.org/officeDocument/2006/relationships" xmlns:p="http://schemas.openxmlformats.org/presentationml/2006/main">
+  <p:cSld>
+    <p:spTree>
+      <p:nvGrpSpPr>
+        <p:cNvPr id="1" name="">
+          <a:extLst>
+            <a:ext uri="{FF2B5EF4-FFF2-40B4-BE49-F238E27FC236}">
+              <a16:creationId xmlns:a16="http://schemas.microsoft.com/office/drawing/2014/main" id="{D2EBBD3B-B5C6-9CF8-6250-95E5F9D1ACF8}"/>
+            </a:ext>
+          </a:extLst>
+        </p:cNvPr>
+        <p:cNvGrpSpPr/>
+        <p:nvPr/>
+      </p:nvGrpSpPr>
+      <p:grpSpPr>
+        <a:xfrm>
+          <a:off x="0" y="0"/>
+          <a:ext cx="0" cy="0"/>
+          <a:chOff x="0" y="0"/>
+          <a:chExt cx="0" cy="0"/>
+        </a:xfrm>
+      </p:grpSpPr>
+      <p:sp>
+        <p:nvSpPr>
+          <p:cNvPr id="2" name="スライド イメージ プレースホルダー 1">
+            <a:extLst>
+              <a:ext uri="{FF2B5EF4-FFF2-40B4-BE49-F238E27FC236}">
+                <a16:creationId xmlns:a16="http://schemas.microsoft.com/office/drawing/2014/main" id="{8D9EA8D1-A9B1-8A04-FD76-481DED06DEE8}"/>
+              </a:ext>
+            </a:extLst>
+          </p:cNvPr>
+          <p:cNvSpPr>
+            <a:spLocks noGrp="1" noRot="1" noChangeAspect="1"/>
+          </p:cNvSpPr>
+          <p:nvPr>
+            <p:ph type="sldImg"/>
+          </p:nvPr>
+        </p:nvSpPr>
+        <p:spPr/>
+      </p:sp>
+      <p:sp>
+        <p:nvSpPr>
+          <p:cNvPr id="3" name="ノート プレースホルダー 2">
+            <a:extLst>
+              <a:ext uri="{FF2B5EF4-FFF2-40B4-BE49-F238E27FC236}">
+                <a16:creationId xmlns:a16="http://schemas.microsoft.com/office/drawing/2014/main" id="{D80B2F48-5766-BC0A-AE9A-390CE9B561FE}"/>
+              </a:ext>
+            </a:extLst>
+          </p:cNvPr>
+          <p:cNvSpPr>
+            <a:spLocks noGrp="1"/>
+          </p:cNvSpPr>
+          <p:nvPr>
+            <p:ph type="body" idx="1"/>
+          </p:nvPr>
+        </p:nvSpPr>
+        <p:spPr/>
+        <p:txBody>
+          <a:bodyPr/>
+          <a:lstStyle/>
+          <a:p>
+            <a:endParaRPr kumimoji="1" lang="ja-JP" altLang="en-US">
+              <a:uFillTx/>
+            </a:endParaRPr>
+          </a:p>
+        </p:txBody>
+      </p:sp>
+      <p:sp>
+        <p:nvSpPr>
+          <p:cNvPr id="4" name="スライド番号プレースホルダー 3">
+            <a:extLst>
+              <a:ext uri="{FF2B5EF4-FFF2-40B4-BE49-F238E27FC236}">
+                <a16:creationId xmlns:a16="http://schemas.microsoft.com/office/drawing/2014/main" id="{56E6C641-35E3-F80E-4C4C-20552D2B3A24}"/>
+              </a:ext>
+            </a:extLst>
+          </p:cNvPr>
+          <p:cNvSpPr>
+            <a:spLocks noGrp="1"/>
+          </p:cNvSpPr>
+          <p:nvPr>
+            <p:ph type="sldNum" sz="quarter" idx="10"/>
+          </p:nvPr>
+        </p:nvSpPr>
+        <p:spPr/>
+        <p:txBody>
+          <a:bodyPr/>
+          <a:lstStyle/>
+          <a:p>
+            <a:fld id="{13BBDFF2-C854-42AB-A0A1-39EE2E1232B0}" type="slidenum">
+              <a:rPr kumimoji="1" lang="ja-JP" altLang="en-US" smtClean="0">
+                <a:uFillTx/>
+              </a:rPr>
+              <a:pPr/>
+              <a:t>18</a:t>
+            </a:fld>
+            <a:endParaRPr kumimoji="1" lang="ja-JP" altLang="en-US">
+              <a:uFillTx/>
+            </a:endParaRPr>
+          </a:p>
+        </p:txBody>
+      </p:sp>
+    </p:spTree>
+    <p:extLst>
+      <p:ext uri="{BB962C8B-B14F-4D97-AF65-F5344CB8AC3E}">
+        <p14:creationId xmlns:p14="http://schemas.microsoft.com/office/powerpoint/2010/main" val="1846870486"/>
+      </p:ext>
+    </p:extLst>
+  </p:cSld>
+  <p:clrMapOvr>
+    <a:masterClrMapping/>
+  </p:clrMapOvr>
+</p:notes>
+</file>
+
+<file path=ppt/notesSlides/notesSlide2.xml><?xml version="1.0" encoding="utf-8"?>
+<p:notes xmlns:a="http://schemas.openxmlformats.org/drawingml/2006/main" xmlns:r="http://schemas.openxmlformats.org/officeDocument/2006/relationships" xmlns:p="http://schemas.openxmlformats.org/presentationml/2006/main">
+  <p:cSld>
+    <p:spTree>
+      <p:nvGrpSpPr>
+        <p:cNvPr id="1" name=""/>
+        <p:cNvGrpSpPr/>
+        <p:nvPr/>
+      </p:nvGrpSpPr>
+      <p:grpSpPr>
+        <a:xfrm>
+          <a:off x="0" y="0"/>
+          <a:ext cx="0" cy="0"/>
+          <a:chOff x="0" y="0"/>
+          <a:chExt cx="0" cy="0"/>
+        </a:xfrm>
+      </p:grpSpPr>
+      <p:sp>
+        <p:nvSpPr>
+          <p:cNvPr id="2" name="スライド イメージ プレースホルダー 1"/>
+          <p:cNvSpPr>
+            <a:spLocks noGrp="1" noRot="1" noChangeAspect="1"/>
+          </p:cNvSpPr>
+          <p:nvPr>
+            <p:ph type="sldImg"/>
+          </p:nvPr>
+        </p:nvSpPr>
+        <p:spPr/>
+      </p:sp>
+      <p:sp>
+        <p:nvSpPr>
+          <p:cNvPr id="3" name="ノート プレースホルダー 2"/>
+          <p:cNvSpPr>
+            <a:spLocks noGrp="1"/>
+          </p:cNvSpPr>
+          <p:nvPr>
+            <p:ph type="body" idx="1"/>
+          </p:nvPr>
+        </p:nvSpPr>
+        <p:spPr/>
+        <p:txBody>
+          <a:bodyPr/>
+          <a:lstStyle/>
+          <a:p>
+            <a:endParaRPr kumimoji="1" lang="ja-JP" altLang="en-US">
+              <a:uFillTx/>
+            </a:endParaRPr>
+          </a:p>
+        </p:txBody>
+      </p:sp>
+      <p:sp>
+        <p:nvSpPr>
+          <p:cNvPr id="4" name="スライド番号プレースホルダー 3"/>
+          <p:cNvSpPr>
+            <a:spLocks noGrp="1"/>
+          </p:cNvSpPr>
+          <p:nvPr>
+            <p:ph type="sldNum" sz="quarter" idx="10"/>
+          </p:nvPr>
+        </p:nvSpPr>
+        <p:spPr/>
+        <p:txBody>
+          <a:bodyPr/>
+          <a:lstStyle/>
+          <a:p>
+            <a:fld id="{13BBDFF2-C854-42AB-A0A1-39EE2E1232B0}" type="slidenum">
+              <a:rPr kumimoji="1" lang="ja-JP" altLang="en-US" smtClean="0">
+                <a:uFillTx/>
+              </a:rPr>
+              <a:pPr/>
+              <a:t>1</a:t>
+            </a:fld>
+            <a:endParaRPr kumimoji="1" lang="ja-JP" altLang="en-US">
+              <a:uFillTx/>
+            </a:endParaRPr>
+          </a:p>
+        </p:txBody>
+      </p:sp>
+    </p:spTree>
+  </p:cSld>
+  <p:clrMapOvr>
+    <a:masterClrMapping/>
+  </p:clrMapOvr>
+</p:notes>
+</file>
+
+<file path=ppt/notesSlides/notesSlide20.xml><?xml version="1.0" encoding="utf-8"?>
 <p:notes xmlns:a="http://schemas.openxmlformats.org/drawingml/2006/main" xmlns:r="http://schemas.openxmlformats.org/officeDocument/2006/relationships" xmlns:p="http://schemas.openxmlformats.org/presentationml/2006/main">
   <p:cSld>
     <p:spTree>
@@ -1631,7 +1947,7 @@
                 <a:uFillTx/>
               </a:rPr>
               <a:pPr/>
-              <a:t>17</a:t>
+              <a:t>19</a:t>
             </a:fld>
             <a:endParaRPr kumimoji="1" lang="ja-JP" altLang="en-US">
               <a:uFillTx/>
@@ -1645,92 +1961,6 @@
         <p14:creationId xmlns:p14="http://schemas.microsoft.com/office/powerpoint/2010/main" val="1564027566"/>
       </p:ext>
     </p:extLst>
-  </p:cSld>
-  <p:clrMapOvr>
-    <a:masterClrMapping/>
-  </p:clrMapOvr>
-</p:notes>
-</file>
-
-<file path=ppt/notesSlides/notesSlide2.xml><?xml version="1.0" encoding="utf-8"?>
-<p:notes xmlns:a="http://schemas.openxmlformats.org/drawingml/2006/main" xmlns:r="http://schemas.openxmlformats.org/officeDocument/2006/relationships" xmlns:p="http://schemas.openxmlformats.org/presentationml/2006/main">
-  <p:cSld>
-    <p:spTree>
-      <p:nvGrpSpPr>
-        <p:cNvPr id="1" name=""/>
-        <p:cNvGrpSpPr/>
-        <p:nvPr/>
-      </p:nvGrpSpPr>
-      <p:grpSpPr>
-        <a:xfrm>
-          <a:off x="0" y="0"/>
-          <a:ext cx="0" cy="0"/>
-          <a:chOff x="0" y="0"/>
-          <a:chExt cx="0" cy="0"/>
-        </a:xfrm>
-      </p:grpSpPr>
-      <p:sp>
-        <p:nvSpPr>
-          <p:cNvPr id="2" name="スライド イメージ プレースホルダー 1"/>
-          <p:cNvSpPr>
-            <a:spLocks noGrp="1" noRot="1" noChangeAspect="1"/>
-          </p:cNvSpPr>
-          <p:nvPr>
-            <p:ph type="sldImg"/>
-          </p:nvPr>
-        </p:nvSpPr>
-        <p:spPr/>
-      </p:sp>
-      <p:sp>
-        <p:nvSpPr>
-          <p:cNvPr id="3" name="ノート プレースホルダー 2"/>
-          <p:cNvSpPr>
-            <a:spLocks noGrp="1"/>
-          </p:cNvSpPr>
-          <p:nvPr>
-            <p:ph type="body" idx="1"/>
-          </p:nvPr>
-        </p:nvSpPr>
-        <p:spPr/>
-        <p:txBody>
-          <a:bodyPr/>
-          <a:lstStyle/>
-          <a:p>
-            <a:endParaRPr kumimoji="1" lang="ja-JP" altLang="en-US">
-              <a:uFillTx/>
-            </a:endParaRPr>
-          </a:p>
-        </p:txBody>
-      </p:sp>
-      <p:sp>
-        <p:nvSpPr>
-          <p:cNvPr id="4" name="スライド番号プレースホルダー 3"/>
-          <p:cNvSpPr>
-            <a:spLocks noGrp="1"/>
-          </p:cNvSpPr>
-          <p:nvPr>
-            <p:ph type="sldNum" sz="quarter" idx="10"/>
-          </p:nvPr>
-        </p:nvSpPr>
-        <p:spPr/>
-        <p:txBody>
-          <a:bodyPr/>
-          <a:lstStyle/>
-          <a:p>
-            <a:fld id="{13BBDFF2-C854-42AB-A0A1-39EE2E1232B0}" type="slidenum">
-              <a:rPr kumimoji="1" lang="ja-JP" altLang="en-US" smtClean="0">
-                <a:uFillTx/>
-              </a:rPr>
-              <a:pPr/>
-              <a:t>1</a:t>
-            </a:fld>
-            <a:endParaRPr kumimoji="1" lang="ja-JP" altLang="en-US">
-              <a:uFillTx/>
-            </a:endParaRPr>
-          </a:p>
-        </p:txBody>
-      </p:sp>
-    </p:spTree>
   </p:cSld>
   <p:clrMapOvr>
     <a:masterClrMapping/>
@@ -2625,14 +2855,14 @@
           </a:ln>
           <a:extLst>
             <a:ext uri="{909E8E84-426E-40dd-AFC4-6F175D3DCCD1}">
-              <a14:hiddenFill xmlns:a14="http://schemas.microsoft.com/office/drawing/2010/main" xmlns="">
+              <a14:hiddenFill xmlns="" xmlns:a14="http://schemas.microsoft.com/office/drawing/2010/main">
                 <a:solidFill>
                   <a:srgbClr val="FFFFFF"/>
                 </a:solidFill>
               </a14:hiddenFill>
             </a:ext>
             <a:ext uri="{91240B29-F687-4f45-9708-019B960494DF}">
-              <a14:hiddenLine xmlns:a14="http://schemas.microsoft.com/office/drawing/2010/main" xmlns="" w="9525">
+              <a14:hiddenLine xmlns="" xmlns:a14="http://schemas.microsoft.com/office/drawing/2010/main" w="9525">
                 <a:solidFill>
                   <a:srgbClr val="000000"/>
                 </a:solidFill>
@@ -2761,7 +2991,7 @@
           </a:ln>
           <a:extLst>
             <a:ext uri="{909E8E84-426E-40dd-AFC4-6F175D3DCCD1}">
-              <a14:hiddenFill xmlns:a14="http://schemas.microsoft.com/office/drawing/2010/main" xmlns="">
+              <a14:hiddenFill xmlns="" xmlns:a14="http://schemas.microsoft.com/office/drawing/2010/main">
                 <a:noFill/>
               </a14:hiddenFill>
             </a:ext>
@@ -2803,14 +3033,14 @@
           </a:ln>
           <a:extLst>
             <a:ext uri="{909E8E84-426E-40dd-AFC4-6F175D3DCCD1}">
-              <a14:hiddenFill xmlns:a14="http://schemas.microsoft.com/office/drawing/2010/main" xmlns="">
+              <a14:hiddenFill xmlns="" xmlns:a14="http://schemas.microsoft.com/office/drawing/2010/main">
                 <a:solidFill>
                   <a:srgbClr val="FFFFFF"/>
                 </a:solidFill>
               </a14:hiddenFill>
             </a:ext>
             <a:ext uri="{91240B29-F687-4f45-9708-019B960494DF}">
-              <a14:hiddenLine xmlns:a14="http://schemas.microsoft.com/office/drawing/2010/main" xmlns="" w="9525">
+              <a14:hiddenLine xmlns="" xmlns:a14="http://schemas.microsoft.com/office/drawing/2010/main" w="9525">
                 <a:solidFill>
                   <a:srgbClr val="000000"/>
                 </a:solidFill>
@@ -4225,7 +4455,7 @@
           </a:ln>
           <a:extLst>
             <a:ext uri="{91240B29-F687-4f45-9708-019B960494DF}">
-              <a14:hiddenLine xmlns:a14="http://schemas.microsoft.com/office/drawing/2010/main" xmlns="" w="9525">
+              <a14:hiddenLine xmlns="" xmlns:a14="http://schemas.microsoft.com/office/drawing/2010/main" w="9525">
                 <a:solidFill>
                   <a:srgbClr val="000000"/>
                 </a:solidFill>
@@ -4916,7 +5146,7 @@
           </a:ln>
           <a:extLst>
             <a:ext uri="{909E8E84-426E-40dd-AFC4-6F175D3DCCD1}">
-              <a14:hiddenFill xmlns:a14="http://schemas.microsoft.com/office/drawing/2010/main" xmlns="">
+              <a14:hiddenFill xmlns="" xmlns:a14="http://schemas.microsoft.com/office/drawing/2010/main">
                 <a:noFill/>
               </a14:hiddenFill>
             </a:ext>
@@ -4950,7 +5180,7 @@
           </a:ln>
           <a:extLst>
             <a:ext uri="{909E8E84-426E-40dd-AFC4-6F175D3DCCD1}">
-              <a14:hiddenFill xmlns:a14="http://schemas.microsoft.com/office/drawing/2010/main" xmlns="">
+              <a14:hiddenFill xmlns="" xmlns:a14="http://schemas.microsoft.com/office/drawing/2010/main">
                 <a:noFill/>
               </a14:hiddenFill>
             </a:ext>
@@ -5525,7 +5755,7 @@
           </a:ln>
           <a:extLst>
             <a:ext uri="{91240B29-F687-4f45-9708-019B960494DF}">
-              <a14:hiddenLine xmlns:a14="http://schemas.microsoft.com/office/drawing/2010/main" xmlns="" w="9525">
+              <a14:hiddenLine xmlns="" xmlns:a14="http://schemas.microsoft.com/office/drawing/2010/main" w="9525">
                 <a:solidFill>
                   <a:srgbClr val="000000"/>
                 </a:solidFill>
@@ -5758,7 +5988,7 @@
           </a:ln>
           <a:extLst>
             <a:ext uri="{91240B29-F687-4f45-9708-019B960494DF}">
-              <a14:hiddenLine xmlns:a14="http://schemas.microsoft.com/office/drawing/2010/main" xmlns="" w="9525">
+              <a14:hiddenLine xmlns="" xmlns:a14="http://schemas.microsoft.com/office/drawing/2010/main" w="9525">
                 <a:solidFill>
                   <a:srgbClr val="000000"/>
                 </a:solidFill>
@@ -6505,14 +6735,14 @@
           </a:ln>
           <a:extLst>
             <a:ext uri="{909E8E84-426E-40dd-AFC4-6F175D3DCCD1}">
-              <a14:hiddenFill xmlns:a14="http://schemas.microsoft.com/office/drawing/2010/main" xmlns="">
+              <a14:hiddenFill xmlns="" xmlns:a14="http://schemas.microsoft.com/office/drawing/2010/main">
                 <a:solidFill>
                   <a:srgbClr val="FFFFFF"/>
                 </a:solidFill>
               </a14:hiddenFill>
             </a:ext>
             <a:ext uri="{91240B29-F687-4f45-9708-019B960494DF}">
-              <a14:hiddenLine xmlns:a14="http://schemas.microsoft.com/office/drawing/2010/main" xmlns="" w="9525">
+              <a14:hiddenLine xmlns="" xmlns:a14="http://schemas.microsoft.com/office/drawing/2010/main" w="9525">
                 <a:solidFill>
                   <a:srgbClr val="000000"/>
                 </a:solidFill>
@@ -6548,14 +6778,14 @@
           </a:ln>
           <a:extLst>
             <a:ext uri="{909E8E84-426E-40dd-AFC4-6F175D3DCCD1}">
-              <a14:hiddenFill xmlns:a14="http://schemas.microsoft.com/office/drawing/2010/main" xmlns="">
+              <a14:hiddenFill xmlns="" xmlns:a14="http://schemas.microsoft.com/office/drawing/2010/main">
                 <a:solidFill>
                   <a:srgbClr val="FFFFFF"/>
                 </a:solidFill>
               </a14:hiddenFill>
             </a:ext>
             <a:ext uri="{91240B29-F687-4f45-9708-019B960494DF}">
-              <a14:hiddenLine xmlns:a14="http://schemas.microsoft.com/office/drawing/2010/main" xmlns="" w="9525">
+              <a14:hiddenLine xmlns="" xmlns:a14="http://schemas.microsoft.com/office/drawing/2010/main" w="9525">
                 <a:solidFill>
                   <a:srgbClr val="000000"/>
                 </a:solidFill>
@@ -6565,7 +6795,7 @@
               </a14:hiddenLine>
             </a:ext>
             <a:ext uri="{FAA26D3D-D897-4be2-8F04-BA451C77F1D7}">
-              <ma14:placeholderFlag xmlns:ma14="http://schemas.microsoft.com/office/mac/drawingml/2011/main" xmlns="" val="1"/>
+              <ma14:placeholderFlag xmlns="" xmlns:ma14="http://schemas.microsoft.com/office/mac/drawingml/2011/main" val="1"/>
             </a:ext>
           </a:extLst>
         </p:spPr>
@@ -6609,14 +6839,14 @@
           </a:ln>
           <a:extLst>
             <a:ext uri="{909E8E84-426E-40dd-AFC4-6F175D3DCCD1}">
-              <a14:hiddenFill xmlns:a14="http://schemas.microsoft.com/office/drawing/2010/main" xmlns="">
+              <a14:hiddenFill xmlns="" xmlns:a14="http://schemas.microsoft.com/office/drawing/2010/main">
                 <a:solidFill>
                   <a:srgbClr val="FFFFFF"/>
                 </a:solidFill>
               </a14:hiddenFill>
             </a:ext>
             <a:ext uri="{91240B29-F687-4f45-9708-019B960494DF}">
-              <a14:hiddenLine xmlns:a14="http://schemas.microsoft.com/office/drawing/2010/main" xmlns="" w="9525">
+              <a14:hiddenLine xmlns="" xmlns:a14="http://schemas.microsoft.com/office/drawing/2010/main" w="9525">
                 <a:solidFill>
                   <a:srgbClr val="000000"/>
                 </a:solidFill>
@@ -6626,7 +6856,7 @@
               </a14:hiddenLine>
             </a:ext>
             <a:ext uri="{FAA26D3D-D897-4be2-8F04-BA451C77F1D7}">
-              <ma14:placeholderFlag xmlns:ma14="http://schemas.microsoft.com/office/mac/drawingml/2011/main" xmlns="" val="1"/>
+              <ma14:placeholderFlag xmlns="" xmlns:ma14="http://schemas.microsoft.com/office/mac/drawingml/2011/main" val="1"/>
             </a:ext>
           </a:extLst>
         </p:spPr>
@@ -6828,7 +7058,7 @@
           </a:ln>
           <a:extLst>
             <a:ext uri="{909E8E84-426E-40dd-AFC4-6F175D3DCCD1}">
-              <a14:hiddenFill xmlns:a14="http://schemas.microsoft.com/office/drawing/2010/main" xmlns="">
+              <a14:hiddenFill xmlns="" xmlns:a14="http://schemas.microsoft.com/office/drawing/2010/main">
                 <a:noFill/>
               </a14:hiddenFill>
             </a:ext>
@@ -7977,7 +8207,7 @@
           <p:nvPr>
             <p:extLst>
               <p:ext uri="{D42A27DB-BD31-4B8C-83A1-F6EECF244321}">
-                <p14:modId xmlns:p14="http://schemas.microsoft.com/office/powerpoint/2010/main" val="2298980403"/>
+                <p14:modId xmlns:p14="http://schemas.microsoft.com/office/powerpoint/2010/main" val="3180151754"/>
               </p:ext>
             </p:extLst>
           </p:nvPr>
@@ -8021,10 +8251,13 @@
                     <a:bodyPr/>
                     <a:lstStyle/>
                     <a:p>
-                      <a:endParaRPr kumimoji="1" lang="ja-JP" altLang="en-US" dirty="0"/>
-                    </a:p>
-                  </a:txBody>
-                  <a:tcPr/>
+                      <a:endParaRPr kumimoji="1" lang="ja-JP" altLang="en-US" sz="1100" dirty="0">
+                        <a:latin typeface="メイリオ" panose="020B0604030504040204" pitchFamily="50" charset="-128"/>
+                        <a:ea typeface="メイリオ" panose="020B0604030504040204" pitchFamily="50" charset="-128"/>
+                      </a:endParaRPr>
+                    </a:p>
+                  </a:txBody>
+                  <a:tcPr anchor="ctr"/>
                 </a:tc>
                 <a:tc>
                   <a:txBody>
@@ -8032,12 +8265,15 @@
                     <a:lstStyle/>
                     <a:p>
                       <a:r>
-                        <a:rPr kumimoji="1" lang="ja-JP" altLang="en-US" sz="1400" dirty="0"/>
+                        <a:rPr kumimoji="1" lang="ja-JP" altLang="en-US" sz="1100" dirty="0">
+                          <a:latin typeface="メイリオ" panose="020B0604030504040204" pitchFamily="50" charset="-128"/>
+                          <a:ea typeface="メイリオ" panose="020B0604030504040204" pitchFamily="50" charset="-128"/>
+                        </a:rPr>
                         <a:t>対象ユーザ</a:t>
                       </a:r>
                     </a:p>
                   </a:txBody>
-                  <a:tcPr/>
+                  <a:tcPr anchor="ctr"/>
                 </a:tc>
                 <a:tc>
                   <a:txBody>
@@ -8045,12 +8281,15 @@
                     <a:lstStyle/>
                     <a:p>
                       <a:r>
-                        <a:rPr kumimoji="1" lang="ja-JP" altLang="en-US" sz="1400" dirty="0"/>
+                        <a:rPr kumimoji="1" lang="ja-JP" altLang="en-US" sz="1100" dirty="0">
+                          <a:latin typeface="メイリオ" panose="020B0604030504040204" pitchFamily="50" charset="-128"/>
+                          <a:ea typeface="メイリオ" panose="020B0604030504040204" pitchFamily="50" charset="-128"/>
+                        </a:rPr>
                         <a:t>対応状況</a:t>
                       </a:r>
                     </a:p>
                   </a:txBody>
-                  <a:tcPr/>
+                  <a:tcPr anchor="ctr"/>
                 </a:tc>
                 <a:extLst>
                   <a:ext uri="{0D108BD9-81ED-4DB2-BD59-A6C34878D82A}">
@@ -8066,19 +8305,19 @@
                     <a:p>
                       <a:pPr algn="r"/>
                       <a:r>
-                        <a:rPr kumimoji="1" lang="en-US" altLang="ja-JP" sz="1400" dirty="0">
-                          <a:latin typeface="+mn-ea"/>
-                          <a:ea typeface="+mn-ea"/>
+                        <a:rPr kumimoji="1" lang="en-US" altLang="ja-JP" sz="1100" dirty="0">
+                          <a:latin typeface="メイリオ" panose="020B0604030504040204" pitchFamily="50" charset="-128"/>
+                          <a:ea typeface="メイリオ" panose="020B0604030504040204" pitchFamily="50" charset="-128"/>
                         </a:rPr>
                         <a:t>1</a:t>
                       </a:r>
-                      <a:endParaRPr kumimoji="1" lang="ja-JP" altLang="en-US" sz="1400" dirty="0">
-                        <a:latin typeface="+mn-ea"/>
-                        <a:ea typeface="+mn-ea"/>
+                      <a:endParaRPr kumimoji="1" lang="ja-JP" altLang="en-US" sz="1100" dirty="0">
+                        <a:latin typeface="メイリオ" panose="020B0604030504040204" pitchFamily="50" charset="-128"/>
+                        <a:ea typeface="メイリオ" panose="020B0604030504040204" pitchFamily="50" charset="-128"/>
                       </a:endParaRPr>
                     </a:p>
                   </a:txBody>
-                  <a:tcPr/>
+                  <a:tcPr anchor="ctr"/>
                 </a:tc>
                 <a:tc>
                   <a:txBody>
@@ -8086,15 +8325,15 @@
                     <a:lstStyle/>
                     <a:p>
                       <a:r>
-                        <a:rPr kumimoji="1" lang="ja-JP" altLang="en-US" sz="1400" dirty="0">
-                          <a:latin typeface="+mn-ea"/>
-                          <a:ea typeface="+mn-ea"/>
+                        <a:rPr kumimoji="1" lang="ja-JP" altLang="en-US" sz="1100" dirty="0">
+                          <a:latin typeface="メイリオ" panose="020B0604030504040204" pitchFamily="50" charset="-128"/>
+                          <a:ea typeface="メイリオ" panose="020B0604030504040204" pitchFamily="50" charset="-128"/>
                         </a:rPr>
                         <a:t>ナイガイ</a:t>
                       </a:r>
                     </a:p>
                   </a:txBody>
-                  <a:tcPr/>
+                  <a:tcPr anchor="ctr"/>
                 </a:tc>
                 <a:tc>
                   <a:txBody>
@@ -8102,15 +8341,15 @@
                     <a:lstStyle/>
                     <a:p>
                       <a:r>
-                        <a:rPr kumimoji="1" lang="ja-JP" altLang="en-US" sz="1400" dirty="0">
-                          <a:latin typeface="+mn-ea"/>
-                          <a:ea typeface="+mn-ea"/>
+                        <a:rPr kumimoji="1" lang="ja-JP" altLang="en-US" sz="1100" dirty="0">
+                          <a:latin typeface="メイリオ" panose="020B0604030504040204" pitchFamily="50" charset="-128"/>
+                          <a:ea typeface="メイリオ" panose="020B0604030504040204" pitchFamily="50" charset="-128"/>
                         </a:rPr>
                         <a:t>完了</a:t>
                       </a:r>
                     </a:p>
                   </a:txBody>
-                  <a:tcPr/>
+                  <a:tcPr anchor="ctr"/>
                 </a:tc>
                 <a:extLst>
                   <a:ext uri="{0D108BD9-81ED-4DB2-BD59-A6C34878D82A}">
@@ -8126,19 +8365,19 @@
                     <a:p>
                       <a:pPr algn="r"/>
                       <a:r>
-                        <a:rPr kumimoji="1" lang="en-US" altLang="ja-JP" sz="1400" dirty="0">
-                          <a:latin typeface="+mn-ea"/>
-                          <a:ea typeface="+mn-ea"/>
+                        <a:rPr kumimoji="1" lang="en-US" altLang="ja-JP" sz="1100" dirty="0">
+                          <a:latin typeface="メイリオ" panose="020B0604030504040204" pitchFamily="50" charset="-128"/>
+                          <a:ea typeface="メイリオ" panose="020B0604030504040204" pitchFamily="50" charset="-128"/>
                         </a:rPr>
                         <a:t>2</a:t>
                       </a:r>
-                      <a:endParaRPr kumimoji="1" lang="ja-JP" altLang="en-US" sz="1400" dirty="0">
-                        <a:latin typeface="+mn-ea"/>
-                        <a:ea typeface="+mn-ea"/>
+                      <a:endParaRPr kumimoji="1" lang="ja-JP" altLang="en-US" sz="1100" dirty="0">
+                        <a:latin typeface="メイリオ" panose="020B0604030504040204" pitchFamily="50" charset="-128"/>
+                        <a:ea typeface="メイリオ" panose="020B0604030504040204" pitchFamily="50" charset="-128"/>
                       </a:endParaRPr>
                     </a:p>
                   </a:txBody>
-                  <a:tcPr/>
+                  <a:tcPr anchor="ctr"/>
                 </a:tc>
                 <a:tc>
                   <a:txBody>
@@ -8146,15 +8385,15 @@
                     <a:lstStyle/>
                     <a:p>
                       <a:r>
-                        <a:rPr kumimoji="1" lang="ja-JP" altLang="en-US" sz="1400" dirty="0">
-                          <a:latin typeface="+mn-ea"/>
-                          <a:ea typeface="+mn-ea"/>
+                        <a:rPr kumimoji="1" lang="ja-JP" altLang="en-US" sz="1100" dirty="0">
+                          <a:latin typeface="メイリオ" panose="020B0604030504040204" pitchFamily="50" charset="-128"/>
+                          <a:ea typeface="メイリオ" panose="020B0604030504040204" pitchFamily="50" charset="-128"/>
                         </a:rPr>
                         <a:t>ジャクソン・ラボラトリー・ジャパン</a:t>
                       </a:r>
                     </a:p>
                   </a:txBody>
-                  <a:tcPr/>
+                  <a:tcPr anchor="ctr"/>
                 </a:tc>
                 <a:tc>
                   <a:txBody>
@@ -8179,15 +8418,15 @@
                         <a:defRPr/>
                       </a:pPr>
                       <a:r>
-                        <a:rPr kumimoji="1" lang="ja-JP" altLang="en-US" sz="1400" dirty="0">
-                          <a:latin typeface="+mn-ea"/>
-                          <a:ea typeface="+mn-ea"/>
+                        <a:rPr kumimoji="1" lang="ja-JP" altLang="en-US" sz="1100" dirty="0">
+                          <a:latin typeface="メイリオ" panose="020B0604030504040204" pitchFamily="50" charset="-128"/>
+                          <a:ea typeface="メイリオ" panose="020B0604030504040204" pitchFamily="50" charset="-128"/>
                         </a:rPr>
                         <a:t>完了</a:t>
                       </a:r>
                     </a:p>
                   </a:txBody>
-                  <a:tcPr/>
+                  <a:tcPr anchor="ctr"/>
                 </a:tc>
                 <a:extLst>
                   <a:ext uri="{0D108BD9-81ED-4DB2-BD59-A6C34878D82A}">
@@ -8203,19 +8442,19 @@
                     <a:p>
                       <a:pPr algn="r"/>
                       <a:r>
-                        <a:rPr kumimoji="1" lang="en-US" altLang="ja-JP" sz="1400" dirty="0">
-                          <a:latin typeface="+mn-ea"/>
-                          <a:ea typeface="+mn-ea"/>
+                        <a:rPr kumimoji="1" lang="en-US" altLang="ja-JP" sz="1100" dirty="0">
+                          <a:latin typeface="メイリオ" panose="020B0604030504040204" pitchFamily="50" charset="-128"/>
+                          <a:ea typeface="メイリオ" panose="020B0604030504040204" pitchFamily="50" charset="-128"/>
                         </a:rPr>
                         <a:t>3</a:t>
                       </a:r>
-                      <a:endParaRPr kumimoji="1" lang="ja-JP" altLang="en-US" sz="1400" dirty="0">
-                        <a:latin typeface="+mn-ea"/>
-                        <a:ea typeface="+mn-ea"/>
+                      <a:endParaRPr kumimoji="1" lang="ja-JP" altLang="en-US" sz="1100" dirty="0">
+                        <a:latin typeface="メイリオ" panose="020B0604030504040204" pitchFamily="50" charset="-128"/>
+                        <a:ea typeface="メイリオ" panose="020B0604030504040204" pitchFamily="50" charset="-128"/>
                       </a:endParaRPr>
                     </a:p>
                   </a:txBody>
-                  <a:tcPr/>
+                  <a:tcPr anchor="ctr"/>
                 </a:tc>
                 <a:tc>
                   <a:txBody>
@@ -8223,15 +8462,15 @@
                     <a:lstStyle/>
                     <a:p>
                       <a:r>
-                        <a:rPr kumimoji="1" lang="ja-JP" altLang="en-US" sz="1400" dirty="0">
-                          <a:latin typeface="+mn-ea"/>
-                          <a:ea typeface="+mn-ea"/>
+                        <a:rPr kumimoji="1" lang="ja-JP" altLang="en-US" sz="1100" dirty="0">
+                          <a:latin typeface="メイリオ" panose="020B0604030504040204" pitchFamily="50" charset="-128"/>
+                          <a:ea typeface="メイリオ" panose="020B0604030504040204" pitchFamily="50" charset="-128"/>
                         </a:rPr>
                         <a:t>タイロテック</a:t>
                       </a:r>
                     </a:p>
                   </a:txBody>
-                  <a:tcPr/>
+                  <a:tcPr anchor="ctr"/>
                 </a:tc>
                 <a:tc>
                   <a:txBody>
@@ -8256,15 +8495,15 @@
                         <a:defRPr/>
                       </a:pPr>
                       <a:r>
-                        <a:rPr kumimoji="1" lang="ja-JP" altLang="en-US" sz="1400" dirty="0">
-                          <a:latin typeface="+mn-ea"/>
-                          <a:ea typeface="+mn-ea"/>
+                        <a:rPr kumimoji="1" lang="ja-JP" altLang="en-US" sz="1100" dirty="0">
+                          <a:latin typeface="メイリオ" panose="020B0604030504040204" pitchFamily="50" charset="-128"/>
+                          <a:ea typeface="メイリオ" panose="020B0604030504040204" pitchFamily="50" charset="-128"/>
                         </a:rPr>
                         <a:t>完了</a:t>
                       </a:r>
                     </a:p>
                   </a:txBody>
-                  <a:tcPr/>
+                  <a:tcPr anchor="ctr"/>
                 </a:tc>
                 <a:extLst>
                   <a:ext uri="{0D108BD9-81ED-4DB2-BD59-A6C34878D82A}">
@@ -8280,19 +8519,19 @@
                     <a:p>
                       <a:pPr algn="r"/>
                       <a:r>
-                        <a:rPr kumimoji="1" lang="en-US" altLang="ja-JP" sz="1400" dirty="0">
-                          <a:latin typeface="+mn-ea"/>
-                          <a:ea typeface="+mn-ea"/>
+                        <a:rPr kumimoji="1" lang="en-US" altLang="ja-JP" sz="1100" dirty="0">
+                          <a:latin typeface="メイリオ" panose="020B0604030504040204" pitchFamily="50" charset="-128"/>
+                          <a:ea typeface="メイリオ" panose="020B0604030504040204" pitchFamily="50" charset="-128"/>
                         </a:rPr>
                         <a:t>4</a:t>
                       </a:r>
-                      <a:endParaRPr kumimoji="1" lang="ja-JP" altLang="en-US" sz="1400" dirty="0">
-                        <a:latin typeface="+mn-ea"/>
-                        <a:ea typeface="+mn-ea"/>
+                      <a:endParaRPr kumimoji="1" lang="ja-JP" altLang="en-US" sz="1100" dirty="0">
+                        <a:latin typeface="メイリオ" panose="020B0604030504040204" pitchFamily="50" charset="-128"/>
+                        <a:ea typeface="メイリオ" panose="020B0604030504040204" pitchFamily="50" charset="-128"/>
                       </a:endParaRPr>
                     </a:p>
                   </a:txBody>
-                  <a:tcPr/>
+                  <a:tcPr anchor="ctr"/>
                 </a:tc>
                 <a:tc>
                   <a:txBody>
@@ -8300,15 +8539,15 @@
                     <a:lstStyle/>
                     <a:p>
                       <a:r>
-                        <a:rPr kumimoji="1" lang="ja-JP" altLang="en-US" sz="1400" dirty="0">
-                          <a:latin typeface="+mn-ea"/>
-                          <a:ea typeface="+mn-ea"/>
+                        <a:rPr kumimoji="1" lang="ja-JP" altLang="en-US" sz="1100" dirty="0">
+                          <a:latin typeface="メイリオ" panose="020B0604030504040204" pitchFamily="50" charset="-128"/>
+                          <a:ea typeface="メイリオ" panose="020B0604030504040204" pitchFamily="50" charset="-128"/>
                         </a:rPr>
                         <a:t>カーコンビニ倶楽部</a:t>
                       </a:r>
                     </a:p>
                   </a:txBody>
-                  <a:tcPr/>
+                  <a:tcPr anchor="ctr"/>
                 </a:tc>
                 <a:tc>
                   <a:txBody>
@@ -8333,15 +8572,15 @@
                         <a:defRPr/>
                       </a:pPr>
                       <a:r>
-                        <a:rPr kumimoji="1" lang="ja-JP" altLang="en-US" sz="1400" dirty="0">
-                          <a:latin typeface="+mn-ea"/>
-                          <a:ea typeface="+mn-ea"/>
+                        <a:rPr kumimoji="1" lang="ja-JP" altLang="en-US" sz="1100" dirty="0">
+                          <a:latin typeface="メイリオ" panose="020B0604030504040204" pitchFamily="50" charset="-128"/>
+                          <a:ea typeface="メイリオ" panose="020B0604030504040204" pitchFamily="50" charset="-128"/>
                         </a:rPr>
                         <a:t>調整中</a:t>
                       </a:r>
                     </a:p>
                   </a:txBody>
-                  <a:tcPr/>
+                  <a:tcPr anchor="ctr"/>
                 </a:tc>
                 <a:extLst>
                   <a:ext uri="{0D108BD9-81ED-4DB2-BD59-A6C34878D82A}">
@@ -8357,19 +8596,19 @@
                     <a:p>
                       <a:pPr algn="r"/>
                       <a:r>
-                        <a:rPr kumimoji="1" lang="en-US" altLang="ja-JP" sz="1400" dirty="0">
-                          <a:latin typeface="+mn-ea"/>
-                          <a:ea typeface="+mn-ea"/>
+                        <a:rPr kumimoji="1" lang="en-US" altLang="ja-JP" sz="1100" dirty="0">
+                          <a:latin typeface="メイリオ" panose="020B0604030504040204" pitchFamily="50" charset="-128"/>
+                          <a:ea typeface="メイリオ" panose="020B0604030504040204" pitchFamily="50" charset="-128"/>
                         </a:rPr>
                         <a:t>5</a:t>
                       </a:r>
-                      <a:endParaRPr kumimoji="1" lang="ja-JP" altLang="en-US" sz="1400" dirty="0">
-                        <a:latin typeface="+mn-ea"/>
-                        <a:ea typeface="+mn-ea"/>
+                      <a:endParaRPr kumimoji="1" lang="ja-JP" altLang="en-US" sz="1100" dirty="0">
+                        <a:latin typeface="メイリオ" panose="020B0604030504040204" pitchFamily="50" charset="-128"/>
+                        <a:ea typeface="メイリオ" panose="020B0604030504040204" pitchFamily="50" charset="-128"/>
                       </a:endParaRPr>
                     </a:p>
                   </a:txBody>
-                  <a:tcPr/>
+                  <a:tcPr anchor="ctr"/>
                 </a:tc>
                 <a:tc>
                   <a:txBody>
@@ -8377,15 +8616,15 @@
                     <a:lstStyle/>
                     <a:p>
                       <a:r>
-                        <a:rPr kumimoji="1" lang="ja-JP" altLang="en-US" sz="1400" dirty="0">
-                          <a:latin typeface="+mn-ea"/>
-                          <a:ea typeface="+mn-ea"/>
+                        <a:rPr kumimoji="1" lang="ja-JP" altLang="en-US" sz="1100" dirty="0">
+                          <a:latin typeface="メイリオ" panose="020B0604030504040204" pitchFamily="50" charset="-128"/>
+                          <a:ea typeface="メイリオ" panose="020B0604030504040204" pitchFamily="50" charset="-128"/>
                         </a:rPr>
                         <a:t>フジキ工芸産業</a:t>
                       </a:r>
                     </a:p>
                   </a:txBody>
-                  <a:tcPr/>
+                  <a:tcPr anchor="ctr"/>
                 </a:tc>
                 <a:tc>
                   <a:txBody>
@@ -8410,15 +8649,15 @@
                         <a:defRPr/>
                       </a:pPr>
                       <a:r>
-                        <a:rPr kumimoji="1" lang="ja-JP" altLang="en-US" sz="1400" dirty="0">
-                          <a:latin typeface="+mn-ea"/>
-                          <a:ea typeface="+mn-ea"/>
+                        <a:rPr kumimoji="1" lang="ja-JP" altLang="en-US" sz="1100" dirty="0">
+                          <a:latin typeface="メイリオ" panose="020B0604030504040204" pitchFamily="50" charset="-128"/>
+                          <a:ea typeface="メイリオ" panose="020B0604030504040204" pitchFamily="50" charset="-128"/>
                         </a:rPr>
                         <a:t>完了</a:t>
                       </a:r>
                     </a:p>
                   </a:txBody>
-                  <a:tcPr/>
+                  <a:tcPr anchor="ctr"/>
                 </a:tc>
                 <a:extLst>
                   <a:ext uri="{0D108BD9-81ED-4DB2-BD59-A6C34878D82A}">
@@ -8434,19 +8673,19 @@
                     <a:p>
                       <a:pPr algn="r"/>
                       <a:r>
-                        <a:rPr kumimoji="1" lang="en-US" altLang="ja-JP" sz="1400" dirty="0">
-                          <a:latin typeface="+mn-ea"/>
-                          <a:ea typeface="+mn-ea"/>
+                        <a:rPr kumimoji="1" lang="en-US" altLang="ja-JP" sz="1100" dirty="0">
+                          <a:latin typeface="メイリオ" panose="020B0604030504040204" pitchFamily="50" charset="-128"/>
+                          <a:ea typeface="メイリオ" panose="020B0604030504040204" pitchFamily="50" charset="-128"/>
                         </a:rPr>
                         <a:t>6</a:t>
                       </a:r>
-                      <a:endParaRPr kumimoji="1" lang="ja-JP" altLang="en-US" sz="1400" dirty="0">
-                        <a:latin typeface="+mn-ea"/>
-                        <a:ea typeface="+mn-ea"/>
+                      <a:endParaRPr kumimoji="1" lang="ja-JP" altLang="en-US" sz="1100" dirty="0">
+                        <a:latin typeface="メイリオ" panose="020B0604030504040204" pitchFamily="50" charset="-128"/>
+                        <a:ea typeface="メイリオ" panose="020B0604030504040204" pitchFamily="50" charset="-128"/>
                       </a:endParaRPr>
                     </a:p>
                   </a:txBody>
-                  <a:tcPr/>
+                  <a:tcPr anchor="ctr"/>
                 </a:tc>
                 <a:tc>
                   <a:txBody>
@@ -8454,15 +8693,15 @@
                     <a:lstStyle/>
                     <a:p>
                       <a:r>
-                        <a:rPr kumimoji="1" lang="ja-JP" altLang="en-US" sz="1400" dirty="0">
-                          <a:latin typeface="+mn-ea"/>
-                          <a:ea typeface="+mn-ea"/>
+                        <a:rPr kumimoji="1" lang="ja-JP" altLang="en-US" sz="1100" dirty="0">
+                          <a:latin typeface="メイリオ" panose="020B0604030504040204" pitchFamily="50" charset="-128"/>
+                          <a:ea typeface="メイリオ" panose="020B0604030504040204" pitchFamily="50" charset="-128"/>
                         </a:rPr>
                         <a:t>加納コーポレーション</a:t>
                       </a:r>
                     </a:p>
                   </a:txBody>
-                  <a:tcPr/>
+                  <a:tcPr anchor="ctr"/>
                 </a:tc>
                 <a:tc>
                   <a:txBody>
@@ -8487,15 +8726,15 @@
                         <a:defRPr/>
                       </a:pPr>
                       <a:r>
-                        <a:rPr kumimoji="1" lang="ja-JP" altLang="en-US" sz="1400" dirty="0">
-                          <a:latin typeface="+mn-ea"/>
-                          <a:ea typeface="+mn-ea"/>
+                        <a:rPr kumimoji="1" lang="ja-JP" altLang="en-US" sz="1100" dirty="0">
+                          <a:latin typeface="メイリオ" panose="020B0604030504040204" pitchFamily="50" charset="-128"/>
+                          <a:ea typeface="メイリオ" panose="020B0604030504040204" pitchFamily="50" charset="-128"/>
                         </a:rPr>
                         <a:t>調整中</a:t>
                       </a:r>
                     </a:p>
                   </a:txBody>
-                  <a:tcPr/>
+                  <a:tcPr anchor="ctr"/>
                 </a:tc>
                 <a:extLst>
                   <a:ext uri="{0D108BD9-81ED-4DB2-BD59-A6C34878D82A}">
@@ -8511,19 +8750,19 @@
                     <a:p>
                       <a:pPr algn="r"/>
                       <a:r>
-                        <a:rPr kumimoji="1" lang="en-US" altLang="ja-JP" sz="1400" dirty="0">
-                          <a:latin typeface="+mn-ea"/>
-                          <a:ea typeface="+mn-ea"/>
+                        <a:rPr kumimoji="1" lang="en-US" altLang="ja-JP" sz="1100" dirty="0">
+                          <a:latin typeface="メイリオ" panose="020B0604030504040204" pitchFamily="50" charset="-128"/>
+                          <a:ea typeface="メイリオ" panose="020B0604030504040204" pitchFamily="50" charset="-128"/>
                         </a:rPr>
                         <a:t>7</a:t>
                       </a:r>
-                      <a:endParaRPr kumimoji="1" lang="ja-JP" altLang="en-US" sz="1400" dirty="0">
-                        <a:latin typeface="+mn-ea"/>
-                        <a:ea typeface="+mn-ea"/>
+                      <a:endParaRPr kumimoji="1" lang="ja-JP" altLang="en-US" sz="1100" dirty="0">
+                        <a:latin typeface="メイリオ" panose="020B0604030504040204" pitchFamily="50" charset="-128"/>
+                        <a:ea typeface="メイリオ" panose="020B0604030504040204" pitchFamily="50" charset="-128"/>
                       </a:endParaRPr>
                     </a:p>
                   </a:txBody>
-                  <a:tcPr/>
+                  <a:tcPr anchor="ctr"/>
                 </a:tc>
                 <a:tc>
                   <a:txBody>
@@ -8531,15 +8770,15 @@
                     <a:lstStyle/>
                     <a:p>
                       <a:r>
-                        <a:rPr kumimoji="1" lang="ja-JP" altLang="en-US" sz="1400" dirty="0">
-                          <a:latin typeface="+mn-ea"/>
-                          <a:ea typeface="+mn-ea"/>
+                        <a:rPr kumimoji="1" lang="ja-JP" altLang="en-US" sz="1100" dirty="0">
+                          <a:latin typeface="メイリオ" panose="020B0604030504040204" pitchFamily="50" charset="-128"/>
+                          <a:ea typeface="メイリオ" panose="020B0604030504040204" pitchFamily="50" charset="-128"/>
                         </a:rPr>
                         <a:t>日本ウエイン</a:t>
                       </a:r>
                     </a:p>
                   </a:txBody>
-                  <a:tcPr/>
+                  <a:tcPr anchor="ctr"/>
                 </a:tc>
                 <a:tc>
                   <a:txBody>
@@ -8547,15 +8786,15 @@
                     <a:lstStyle/>
                     <a:p>
                       <a:r>
-                        <a:rPr kumimoji="1" lang="ja-JP" altLang="en-US" sz="1400" dirty="0">
-                          <a:latin typeface="+mn-ea"/>
-                          <a:ea typeface="+mn-ea"/>
+                        <a:rPr kumimoji="1" lang="ja-JP" altLang="en-US" sz="1100" dirty="0">
+                          <a:latin typeface="メイリオ" panose="020B0604030504040204" pitchFamily="50" charset="-128"/>
+                          <a:ea typeface="メイリオ" panose="020B0604030504040204" pitchFamily="50" charset="-128"/>
                         </a:rPr>
                         <a:t>完了</a:t>
                       </a:r>
                     </a:p>
                   </a:txBody>
-                  <a:tcPr/>
+                  <a:tcPr anchor="ctr"/>
                 </a:tc>
                 <a:extLst>
                   <a:ext uri="{0D108BD9-81ED-4DB2-BD59-A6C34878D82A}">
@@ -8571,19 +8810,19 @@
                     <a:p>
                       <a:pPr algn="r"/>
                       <a:r>
-                        <a:rPr kumimoji="1" lang="en-US" altLang="ja-JP" sz="1400" dirty="0">
-                          <a:latin typeface="+mn-ea"/>
-                          <a:ea typeface="+mn-ea"/>
+                        <a:rPr kumimoji="1" lang="en-US" altLang="ja-JP" sz="1100" dirty="0">
+                          <a:latin typeface="メイリオ" panose="020B0604030504040204" pitchFamily="50" charset="-128"/>
+                          <a:ea typeface="メイリオ" panose="020B0604030504040204" pitchFamily="50" charset="-128"/>
                         </a:rPr>
                         <a:t>8</a:t>
                       </a:r>
-                      <a:endParaRPr kumimoji="1" lang="ja-JP" altLang="en-US" sz="1400" dirty="0">
-                        <a:latin typeface="+mn-ea"/>
-                        <a:ea typeface="+mn-ea"/>
+                      <a:endParaRPr kumimoji="1" lang="ja-JP" altLang="en-US" sz="1100" dirty="0">
+                        <a:latin typeface="メイリオ" panose="020B0604030504040204" pitchFamily="50" charset="-128"/>
+                        <a:ea typeface="メイリオ" panose="020B0604030504040204" pitchFamily="50" charset="-128"/>
                       </a:endParaRPr>
                     </a:p>
                   </a:txBody>
-                  <a:tcPr/>
+                  <a:tcPr anchor="ctr"/>
                 </a:tc>
                 <a:tc>
                   <a:txBody>
@@ -8591,26 +8830,26 @@
                     <a:lstStyle/>
                     <a:p>
                       <a:r>
-                        <a:rPr kumimoji="1" lang="ja-JP" altLang="en-US" sz="1400" dirty="0">
-                          <a:latin typeface="+mn-ea"/>
-                          <a:ea typeface="+mn-ea"/>
+                        <a:rPr kumimoji="1" lang="ja-JP" altLang="en-US" sz="1100" dirty="0">
+                          <a:latin typeface="メイリオ" panose="020B0604030504040204" pitchFamily="50" charset="-128"/>
+                          <a:ea typeface="メイリオ" panose="020B0604030504040204" pitchFamily="50" charset="-128"/>
                         </a:rPr>
                         <a:t>日東電工</a:t>
                       </a:r>
                       <a:r>
-                        <a:rPr kumimoji="1" lang="en-US" altLang="ja-JP" sz="1400" dirty="0">
-                          <a:latin typeface="+mn-ea"/>
-                          <a:ea typeface="+mn-ea"/>
+                        <a:rPr kumimoji="1" lang="en-US" altLang="ja-JP" sz="1100" dirty="0">
+                          <a:latin typeface="メイリオ" panose="020B0604030504040204" pitchFamily="50" charset="-128"/>
+                          <a:ea typeface="メイリオ" panose="020B0604030504040204" pitchFamily="50" charset="-128"/>
                         </a:rPr>
                         <a:t>BM</a:t>
                       </a:r>
-                      <a:endParaRPr kumimoji="1" lang="ja-JP" altLang="en-US" sz="1400" dirty="0">
-                        <a:latin typeface="+mn-ea"/>
-                        <a:ea typeface="+mn-ea"/>
+                      <a:endParaRPr kumimoji="1" lang="ja-JP" altLang="en-US" sz="1100" dirty="0">
+                        <a:latin typeface="メイリオ" panose="020B0604030504040204" pitchFamily="50" charset="-128"/>
+                        <a:ea typeface="メイリオ" panose="020B0604030504040204" pitchFamily="50" charset="-128"/>
                       </a:endParaRPr>
                     </a:p>
                   </a:txBody>
-                  <a:tcPr/>
+                  <a:tcPr anchor="ctr"/>
                 </a:tc>
                 <a:tc>
                   <a:txBody>
@@ -8635,15 +8874,15 @@
                         <a:defRPr/>
                       </a:pPr>
                       <a:r>
-                        <a:rPr kumimoji="1" lang="ja-JP" altLang="en-US" sz="1400" dirty="0">
-                          <a:latin typeface="+mn-ea"/>
-                          <a:ea typeface="+mn-ea"/>
+                        <a:rPr kumimoji="1" lang="ja-JP" altLang="en-US" sz="1100" dirty="0">
+                          <a:latin typeface="メイリオ" panose="020B0604030504040204" pitchFamily="50" charset="-128"/>
+                          <a:ea typeface="メイリオ" panose="020B0604030504040204" pitchFamily="50" charset="-128"/>
                         </a:rPr>
                         <a:t>完了</a:t>
                       </a:r>
                     </a:p>
                   </a:txBody>
-                  <a:tcPr/>
+                  <a:tcPr anchor="ctr"/>
                 </a:tc>
                 <a:extLst>
                   <a:ext uri="{0D108BD9-81ED-4DB2-BD59-A6C34878D82A}">
@@ -8659,19 +8898,19 @@
                     <a:p>
                       <a:pPr algn="r"/>
                       <a:r>
-                        <a:rPr kumimoji="1" lang="en-US" altLang="ja-JP" sz="1400" dirty="0">
-                          <a:latin typeface="+mn-ea"/>
-                          <a:ea typeface="+mn-ea"/>
+                        <a:rPr kumimoji="1" lang="en-US" altLang="ja-JP" sz="1100" dirty="0">
+                          <a:latin typeface="メイリオ" panose="020B0604030504040204" pitchFamily="50" charset="-128"/>
+                          <a:ea typeface="メイリオ" panose="020B0604030504040204" pitchFamily="50" charset="-128"/>
                         </a:rPr>
                         <a:t>9</a:t>
                       </a:r>
-                      <a:endParaRPr kumimoji="1" lang="ja-JP" altLang="en-US" sz="1400" dirty="0">
-                        <a:latin typeface="+mn-ea"/>
-                        <a:ea typeface="+mn-ea"/>
+                      <a:endParaRPr kumimoji="1" lang="ja-JP" altLang="en-US" sz="1100" dirty="0">
+                        <a:latin typeface="メイリオ" panose="020B0604030504040204" pitchFamily="50" charset="-128"/>
+                        <a:ea typeface="メイリオ" panose="020B0604030504040204" pitchFamily="50" charset="-128"/>
                       </a:endParaRPr>
                     </a:p>
                   </a:txBody>
-                  <a:tcPr/>
+                  <a:tcPr anchor="ctr"/>
                 </a:tc>
                 <a:tc>
                   <a:txBody>
@@ -8679,15 +8918,15 @@
                     <a:lstStyle/>
                     <a:p>
                       <a:r>
-                        <a:rPr kumimoji="1" lang="ja-JP" altLang="en-US" sz="1400" dirty="0">
-                          <a:latin typeface="+mn-ea"/>
-                          <a:ea typeface="+mn-ea"/>
+                        <a:rPr kumimoji="1" lang="ja-JP" altLang="en-US" sz="1100" dirty="0">
+                          <a:latin typeface="メイリオ" panose="020B0604030504040204" pitchFamily="50" charset="-128"/>
+                          <a:ea typeface="メイリオ" panose="020B0604030504040204" pitchFamily="50" charset="-128"/>
                         </a:rPr>
                         <a:t>貴和製作所</a:t>
                       </a:r>
                     </a:p>
                   </a:txBody>
-                  <a:tcPr/>
+                  <a:tcPr anchor="ctr"/>
                 </a:tc>
                 <a:tc>
                   <a:txBody>
@@ -8712,15 +8951,15 @@
                         <a:defRPr/>
                       </a:pPr>
                       <a:r>
-                        <a:rPr kumimoji="1" lang="ja-JP" altLang="en-US" sz="1400" dirty="0">
-                          <a:latin typeface="+mn-ea"/>
-                          <a:ea typeface="+mn-ea"/>
+                        <a:rPr kumimoji="1" lang="ja-JP" altLang="en-US" sz="1100" dirty="0">
+                          <a:latin typeface="メイリオ" panose="020B0604030504040204" pitchFamily="50" charset="-128"/>
+                          <a:ea typeface="メイリオ" panose="020B0604030504040204" pitchFamily="50" charset="-128"/>
                         </a:rPr>
                         <a:t>完了</a:t>
                       </a:r>
                     </a:p>
                   </a:txBody>
-                  <a:tcPr/>
+                  <a:tcPr anchor="ctr"/>
                 </a:tc>
                 <a:extLst>
                   <a:ext uri="{0D108BD9-81ED-4DB2-BD59-A6C34878D82A}">
@@ -8736,19 +8975,19 @@
                     <a:p>
                       <a:pPr algn="r"/>
                       <a:r>
-                        <a:rPr kumimoji="1" lang="en-US" altLang="ja-JP" sz="1400" dirty="0">
-                          <a:latin typeface="+mn-ea"/>
-                          <a:ea typeface="+mn-ea"/>
+                        <a:rPr kumimoji="1" lang="en-US" altLang="ja-JP" sz="1100" dirty="0">
+                          <a:latin typeface="メイリオ" panose="020B0604030504040204" pitchFamily="50" charset="-128"/>
+                          <a:ea typeface="メイリオ" panose="020B0604030504040204" pitchFamily="50" charset="-128"/>
                         </a:rPr>
                         <a:t>10</a:t>
                       </a:r>
-                      <a:endParaRPr kumimoji="1" lang="ja-JP" altLang="en-US" sz="1400" dirty="0">
-                        <a:latin typeface="+mn-ea"/>
-                        <a:ea typeface="+mn-ea"/>
+                      <a:endParaRPr kumimoji="1" lang="ja-JP" altLang="en-US" sz="1100" dirty="0">
+                        <a:latin typeface="メイリオ" panose="020B0604030504040204" pitchFamily="50" charset="-128"/>
+                        <a:ea typeface="メイリオ" panose="020B0604030504040204" pitchFamily="50" charset="-128"/>
                       </a:endParaRPr>
                     </a:p>
                   </a:txBody>
-                  <a:tcPr/>
+                  <a:tcPr anchor="ctr"/>
                 </a:tc>
                 <a:tc>
                   <a:txBody>
@@ -8756,15 +8995,15 @@
                     <a:lstStyle/>
                     <a:p>
                       <a:r>
-                        <a:rPr kumimoji="1" lang="ja-JP" altLang="en-US" sz="1400" dirty="0">
-                          <a:latin typeface="+mn-ea"/>
-                          <a:ea typeface="+mn-ea"/>
+                        <a:rPr kumimoji="1" lang="ja-JP" altLang="en-US" sz="1100" dirty="0">
+                          <a:latin typeface="メイリオ" panose="020B0604030504040204" pitchFamily="50" charset="-128"/>
+                          <a:ea typeface="メイリオ" panose="020B0604030504040204" pitchFamily="50" charset="-128"/>
                         </a:rPr>
                         <a:t>マルサン</a:t>
                       </a:r>
                     </a:p>
                   </a:txBody>
-                  <a:tcPr/>
+                  <a:tcPr anchor="ctr"/>
                 </a:tc>
                 <a:tc>
                   <a:txBody>
@@ -8789,15 +9028,15 @@
                         <a:defRPr/>
                       </a:pPr>
                       <a:r>
-                        <a:rPr kumimoji="1" lang="ja-JP" altLang="en-US" sz="1400" dirty="0">
-                          <a:latin typeface="+mn-ea"/>
-                          <a:ea typeface="+mn-ea"/>
+                        <a:rPr kumimoji="1" lang="ja-JP" altLang="en-US" sz="1100" dirty="0">
+                          <a:latin typeface="メイリオ" panose="020B0604030504040204" pitchFamily="50" charset="-128"/>
+                          <a:ea typeface="メイリオ" panose="020B0604030504040204" pitchFamily="50" charset="-128"/>
                         </a:rPr>
                         <a:t>完了</a:t>
                       </a:r>
                     </a:p>
                   </a:txBody>
-                  <a:tcPr/>
+                  <a:tcPr anchor="ctr"/>
                 </a:tc>
                 <a:extLst>
                   <a:ext uri="{0D108BD9-81ED-4DB2-BD59-A6C34878D82A}">
@@ -8824,7 +9063,7 @@
           <p:nvPr>
             <p:extLst>
               <p:ext uri="{D42A27DB-BD31-4B8C-83A1-F6EECF244321}">
-                <p14:modId xmlns:p14="http://schemas.microsoft.com/office/powerpoint/2010/main" val="442666631"/>
+                <p14:modId xmlns:p14="http://schemas.microsoft.com/office/powerpoint/2010/main" val="2402957185"/>
               </p:ext>
             </p:extLst>
           </p:nvPr>
@@ -8868,10 +9107,13 @@
                     <a:bodyPr/>
                     <a:lstStyle/>
                     <a:p>
-                      <a:endParaRPr kumimoji="1" lang="ja-JP" altLang="en-US" dirty="0"/>
-                    </a:p>
-                  </a:txBody>
-                  <a:tcPr/>
+                      <a:endParaRPr kumimoji="1" lang="ja-JP" altLang="en-US" sz="1100" dirty="0">
+                        <a:latin typeface="メイリオ" panose="020B0604030504040204" pitchFamily="50" charset="-128"/>
+                        <a:ea typeface="メイリオ" panose="020B0604030504040204" pitchFamily="50" charset="-128"/>
+                      </a:endParaRPr>
+                    </a:p>
+                  </a:txBody>
+                  <a:tcPr anchor="ctr"/>
                 </a:tc>
                 <a:tc>
                   <a:txBody>
@@ -8879,12 +9121,15 @@
                     <a:lstStyle/>
                     <a:p>
                       <a:r>
-                        <a:rPr kumimoji="1" lang="ja-JP" altLang="en-US" sz="1400" dirty="0"/>
+                        <a:rPr kumimoji="1" lang="ja-JP" altLang="en-US" sz="1100" dirty="0">
+                          <a:latin typeface="メイリオ" panose="020B0604030504040204" pitchFamily="50" charset="-128"/>
+                          <a:ea typeface="メイリオ" panose="020B0604030504040204" pitchFamily="50" charset="-128"/>
+                        </a:rPr>
                         <a:t>対象ユーザ</a:t>
                       </a:r>
                     </a:p>
                   </a:txBody>
-                  <a:tcPr/>
+                  <a:tcPr anchor="ctr"/>
                 </a:tc>
                 <a:tc>
                   <a:txBody>
@@ -8892,12 +9137,15 @@
                     <a:lstStyle/>
                     <a:p>
                       <a:r>
-                        <a:rPr kumimoji="1" lang="ja-JP" altLang="en-US" sz="1400" dirty="0"/>
+                        <a:rPr kumimoji="1" lang="ja-JP" altLang="en-US" sz="1100" dirty="0">
+                          <a:latin typeface="メイリオ" panose="020B0604030504040204" pitchFamily="50" charset="-128"/>
+                          <a:ea typeface="メイリオ" panose="020B0604030504040204" pitchFamily="50" charset="-128"/>
+                        </a:rPr>
                         <a:t>対応状況</a:t>
                       </a:r>
                     </a:p>
                   </a:txBody>
-                  <a:tcPr/>
+                  <a:tcPr anchor="ctr"/>
                 </a:tc>
                 <a:extLst>
                   <a:ext uri="{0D108BD9-81ED-4DB2-BD59-A6C34878D82A}">
@@ -8913,19 +9161,19 @@
                     <a:p>
                       <a:pPr algn="r"/>
                       <a:r>
-                        <a:rPr kumimoji="1" lang="en-US" altLang="ja-JP" sz="1400" dirty="0">
-                          <a:latin typeface="+mn-ea"/>
-                          <a:ea typeface="+mn-ea"/>
+                        <a:rPr kumimoji="1" lang="en-US" altLang="ja-JP" sz="1100" dirty="0">
+                          <a:latin typeface="メイリオ" panose="020B0604030504040204" pitchFamily="50" charset="-128"/>
+                          <a:ea typeface="メイリオ" panose="020B0604030504040204" pitchFamily="50" charset="-128"/>
                         </a:rPr>
                         <a:t>11</a:t>
                       </a:r>
-                      <a:endParaRPr kumimoji="1" lang="ja-JP" altLang="en-US" sz="1400" dirty="0">
-                        <a:latin typeface="+mn-ea"/>
-                        <a:ea typeface="+mn-ea"/>
+                      <a:endParaRPr kumimoji="1" lang="ja-JP" altLang="en-US" sz="1100" dirty="0">
+                        <a:latin typeface="メイリオ" panose="020B0604030504040204" pitchFamily="50" charset="-128"/>
+                        <a:ea typeface="メイリオ" panose="020B0604030504040204" pitchFamily="50" charset="-128"/>
                       </a:endParaRPr>
                     </a:p>
                   </a:txBody>
-                  <a:tcPr/>
+                  <a:tcPr anchor="ctr"/>
                 </a:tc>
                 <a:tc>
                   <a:txBody>
@@ -8933,22 +9181,22 @@
                     <a:lstStyle/>
                     <a:p>
                       <a:r>
-                        <a:rPr kumimoji="1" lang="en-US" altLang="ja-JP" sz="1400" dirty="0">
-                          <a:latin typeface="+mn-ea"/>
-                          <a:ea typeface="+mn-ea"/>
+                        <a:rPr kumimoji="1" lang="en-US" altLang="ja-JP" sz="1100" dirty="0">
+                          <a:latin typeface="メイリオ" panose="020B0604030504040204" pitchFamily="50" charset="-128"/>
+                          <a:ea typeface="メイリオ" panose="020B0604030504040204" pitchFamily="50" charset="-128"/>
                         </a:rPr>
                         <a:t>EM</a:t>
                       </a:r>
                       <a:r>
-                        <a:rPr kumimoji="1" lang="ja-JP" altLang="en-US" sz="1400" dirty="0">
-                          <a:latin typeface="+mn-ea"/>
-                          <a:ea typeface="+mn-ea"/>
+                        <a:rPr kumimoji="1" lang="ja-JP" altLang="en-US" sz="1100" dirty="0">
+                          <a:latin typeface="メイリオ" panose="020B0604030504040204" pitchFamily="50" charset="-128"/>
+                          <a:ea typeface="メイリオ" panose="020B0604030504040204" pitchFamily="50" charset="-128"/>
                         </a:rPr>
                         <a:t>システムズ</a:t>
                       </a:r>
                     </a:p>
                   </a:txBody>
-                  <a:tcPr/>
+                  <a:tcPr anchor="ctr"/>
                 </a:tc>
                 <a:tc>
                   <a:txBody>
@@ -8973,15 +9221,15 @@
                         <a:defRPr/>
                       </a:pPr>
                       <a:r>
-                        <a:rPr kumimoji="1" lang="ja-JP" altLang="en-US" sz="1400" dirty="0">
-                          <a:latin typeface="+mn-ea"/>
-                          <a:ea typeface="+mn-ea"/>
+                        <a:rPr kumimoji="1" lang="ja-JP" altLang="en-US" sz="1100" dirty="0">
+                          <a:latin typeface="メイリオ" panose="020B0604030504040204" pitchFamily="50" charset="-128"/>
+                          <a:ea typeface="メイリオ" panose="020B0604030504040204" pitchFamily="50" charset="-128"/>
                         </a:rPr>
                         <a:t>完了</a:t>
                       </a:r>
                     </a:p>
                   </a:txBody>
-                  <a:tcPr/>
+                  <a:tcPr anchor="ctr"/>
                 </a:tc>
                 <a:extLst>
                   <a:ext uri="{0D108BD9-81ED-4DB2-BD59-A6C34878D82A}">
@@ -8997,19 +9245,19 @@
                     <a:p>
                       <a:pPr algn="r"/>
                       <a:r>
-                        <a:rPr kumimoji="1" lang="en-US" altLang="ja-JP" sz="1400" dirty="0">
-                          <a:latin typeface="+mn-ea"/>
-                          <a:ea typeface="+mn-ea"/>
+                        <a:rPr kumimoji="1" lang="en-US" altLang="ja-JP" sz="1100" dirty="0">
+                          <a:latin typeface="メイリオ" panose="020B0604030504040204" pitchFamily="50" charset="-128"/>
+                          <a:ea typeface="メイリオ" panose="020B0604030504040204" pitchFamily="50" charset="-128"/>
                         </a:rPr>
                         <a:t>12</a:t>
                       </a:r>
-                      <a:endParaRPr kumimoji="1" lang="ja-JP" altLang="en-US" sz="1400" dirty="0">
-                        <a:latin typeface="+mn-ea"/>
-                        <a:ea typeface="+mn-ea"/>
+                      <a:endParaRPr kumimoji="1" lang="ja-JP" altLang="en-US" sz="1100" dirty="0">
+                        <a:latin typeface="メイリオ" panose="020B0604030504040204" pitchFamily="50" charset="-128"/>
+                        <a:ea typeface="メイリオ" panose="020B0604030504040204" pitchFamily="50" charset="-128"/>
                       </a:endParaRPr>
                     </a:p>
                   </a:txBody>
-                  <a:tcPr/>
+                  <a:tcPr anchor="ctr"/>
                 </a:tc>
                 <a:tc>
                   <a:txBody>
@@ -9017,19 +9265,19 @@
                     <a:lstStyle/>
                     <a:p>
                       <a:r>
-                        <a:rPr kumimoji="1" lang="zh-TW" altLang="en-US" sz="1400" dirty="0">
-                          <a:latin typeface="+mn-ea"/>
-                          <a:ea typeface="+mn-ea"/>
+                        <a:rPr kumimoji="1" lang="zh-TW" altLang="en-US" sz="1100" dirty="0">
+                          <a:latin typeface="メイリオ" panose="020B0604030504040204" pitchFamily="50" charset="-128"/>
+                          <a:ea typeface="メイリオ" panose="020B0604030504040204" pitchFamily="50" charset="-128"/>
                         </a:rPr>
                         <a:t>日本漢字能力検定協会</a:t>
                       </a:r>
-                      <a:endParaRPr kumimoji="1" lang="ja-JP" altLang="en-US" sz="1400" dirty="0">
-                        <a:latin typeface="+mn-ea"/>
-                        <a:ea typeface="+mn-ea"/>
+                      <a:endParaRPr kumimoji="1" lang="ja-JP" altLang="en-US" sz="1100" dirty="0">
+                        <a:latin typeface="メイリオ" panose="020B0604030504040204" pitchFamily="50" charset="-128"/>
+                        <a:ea typeface="メイリオ" panose="020B0604030504040204" pitchFamily="50" charset="-128"/>
                       </a:endParaRPr>
                     </a:p>
                   </a:txBody>
-                  <a:tcPr/>
+                  <a:tcPr anchor="ctr"/>
                 </a:tc>
                 <a:tc>
                   <a:txBody>
@@ -9054,15 +9302,15 @@
                         <a:defRPr/>
                       </a:pPr>
                       <a:r>
-                        <a:rPr kumimoji="1" lang="ja-JP" altLang="en-US" sz="1400" dirty="0">
-                          <a:latin typeface="+mn-ea"/>
-                          <a:ea typeface="+mn-ea"/>
+                        <a:rPr kumimoji="1" lang="ja-JP" altLang="en-US" sz="1100" dirty="0">
+                          <a:latin typeface="メイリオ" panose="020B0604030504040204" pitchFamily="50" charset="-128"/>
+                          <a:ea typeface="メイリオ" panose="020B0604030504040204" pitchFamily="50" charset="-128"/>
                         </a:rPr>
                         <a:t>完了</a:t>
                       </a:r>
                     </a:p>
                   </a:txBody>
-                  <a:tcPr/>
+                  <a:tcPr anchor="ctr"/>
                 </a:tc>
                 <a:extLst>
                   <a:ext uri="{0D108BD9-81ED-4DB2-BD59-A6C34878D82A}">
@@ -9078,19 +9326,19 @@
                     <a:p>
                       <a:pPr algn="r"/>
                       <a:r>
-                        <a:rPr kumimoji="1" lang="en-US" altLang="ja-JP" sz="1400" dirty="0">
-                          <a:latin typeface="+mn-ea"/>
-                          <a:ea typeface="+mn-ea"/>
+                        <a:rPr kumimoji="1" lang="en-US" altLang="ja-JP" sz="1100" dirty="0">
+                          <a:latin typeface="メイリオ" panose="020B0604030504040204" pitchFamily="50" charset="-128"/>
+                          <a:ea typeface="メイリオ" panose="020B0604030504040204" pitchFamily="50" charset="-128"/>
                         </a:rPr>
                         <a:t>13</a:t>
                       </a:r>
-                      <a:endParaRPr kumimoji="1" lang="ja-JP" altLang="en-US" sz="1400" dirty="0">
-                        <a:latin typeface="+mn-ea"/>
-                        <a:ea typeface="+mn-ea"/>
+                      <a:endParaRPr kumimoji="1" lang="ja-JP" altLang="en-US" sz="1100" dirty="0">
+                        <a:latin typeface="メイリオ" panose="020B0604030504040204" pitchFamily="50" charset="-128"/>
+                        <a:ea typeface="メイリオ" panose="020B0604030504040204" pitchFamily="50" charset="-128"/>
                       </a:endParaRPr>
                     </a:p>
                   </a:txBody>
-                  <a:tcPr/>
+                  <a:tcPr anchor="ctr"/>
                 </a:tc>
                 <a:tc>
                   <a:txBody>
@@ -9098,15 +9346,15 @@
                     <a:lstStyle/>
                     <a:p>
                       <a:r>
-                        <a:rPr kumimoji="1" lang="ja-JP" altLang="en-US" sz="1400" dirty="0">
-                          <a:latin typeface="+mn-ea"/>
-                          <a:ea typeface="+mn-ea"/>
+                        <a:rPr kumimoji="1" lang="ja-JP" altLang="en-US" sz="1100" dirty="0">
+                          <a:latin typeface="メイリオ" panose="020B0604030504040204" pitchFamily="50" charset="-128"/>
+                          <a:ea typeface="メイリオ" panose="020B0604030504040204" pitchFamily="50" charset="-128"/>
                         </a:rPr>
                         <a:t>ヤーマン</a:t>
                       </a:r>
                     </a:p>
                   </a:txBody>
-                  <a:tcPr/>
+                  <a:tcPr anchor="ctr"/>
                 </a:tc>
                 <a:tc>
                   <a:txBody>
@@ -9131,15 +9379,15 @@
                         <a:defRPr/>
                       </a:pPr>
                       <a:r>
-                        <a:rPr kumimoji="1" lang="ja-JP" altLang="en-US" sz="1400" dirty="0">
-                          <a:latin typeface="+mn-ea"/>
-                          <a:ea typeface="+mn-ea"/>
+                        <a:rPr kumimoji="1" lang="ja-JP" altLang="en-US" sz="1100" dirty="0">
+                          <a:latin typeface="メイリオ" panose="020B0604030504040204" pitchFamily="50" charset="-128"/>
+                          <a:ea typeface="メイリオ" panose="020B0604030504040204" pitchFamily="50" charset="-128"/>
                         </a:rPr>
                         <a:t>完了</a:t>
                       </a:r>
                     </a:p>
                   </a:txBody>
-                  <a:tcPr/>
+                  <a:tcPr anchor="ctr"/>
                 </a:tc>
                 <a:extLst>
                   <a:ext uri="{0D108BD9-81ED-4DB2-BD59-A6C34878D82A}">
@@ -9154,19 +9402,19 @@
                     <a:lstStyle/>
                     <a:p>
                       <a:r>
-                        <a:rPr kumimoji="1" lang="en-US" altLang="ja-JP" sz="1400" dirty="0">
-                          <a:latin typeface="+mn-ea"/>
-                          <a:ea typeface="+mn-ea"/>
+                        <a:rPr kumimoji="1" lang="en-US" altLang="ja-JP" sz="1100" dirty="0">
+                          <a:latin typeface="メイリオ" panose="020B0604030504040204" pitchFamily="50" charset="-128"/>
+                          <a:ea typeface="メイリオ" panose="020B0604030504040204" pitchFamily="50" charset="-128"/>
                         </a:rPr>
                         <a:t>14</a:t>
                       </a:r>
-                      <a:endParaRPr kumimoji="1" lang="ja-JP" altLang="en-US" sz="1400" dirty="0">
-                        <a:latin typeface="+mn-ea"/>
-                        <a:ea typeface="+mn-ea"/>
+                      <a:endParaRPr kumimoji="1" lang="ja-JP" altLang="en-US" sz="1100" dirty="0">
+                        <a:latin typeface="メイリオ" panose="020B0604030504040204" pitchFamily="50" charset="-128"/>
+                        <a:ea typeface="メイリオ" panose="020B0604030504040204" pitchFamily="50" charset="-128"/>
                       </a:endParaRPr>
                     </a:p>
                   </a:txBody>
-                  <a:tcPr/>
+                  <a:tcPr anchor="ctr"/>
                 </a:tc>
                 <a:tc>
                   <a:txBody>
@@ -9174,15 +9422,15 @@
                     <a:lstStyle/>
                     <a:p>
                       <a:r>
-                        <a:rPr kumimoji="1" lang="ja-JP" altLang="en-US" sz="1400" dirty="0">
-                          <a:latin typeface="+mn-ea"/>
-                          <a:ea typeface="+mn-ea"/>
+                        <a:rPr kumimoji="1" lang="ja-JP" altLang="en-US" sz="1100" dirty="0">
+                          <a:latin typeface="メイリオ" panose="020B0604030504040204" pitchFamily="50" charset="-128"/>
+                          <a:ea typeface="メイリオ" panose="020B0604030504040204" pitchFamily="50" charset="-128"/>
                         </a:rPr>
                         <a:t>ニトムズ</a:t>
                       </a:r>
                     </a:p>
                   </a:txBody>
-                  <a:tcPr/>
+                  <a:tcPr anchor="ctr"/>
                 </a:tc>
                 <a:tc>
                   <a:txBody>
@@ -9207,15 +9455,15 @@
                         <a:defRPr/>
                       </a:pPr>
                       <a:r>
-                        <a:rPr kumimoji="1" lang="ja-JP" altLang="en-US" sz="1400" dirty="0">
-                          <a:latin typeface="+mn-ea"/>
-                          <a:ea typeface="+mn-ea"/>
+                        <a:rPr kumimoji="1" lang="ja-JP" altLang="en-US" sz="1100" dirty="0">
+                          <a:latin typeface="メイリオ" panose="020B0604030504040204" pitchFamily="50" charset="-128"/>
+                          <a:ea typeface="メイリオ" panose="020B0604030504040204" pitchFamily="50" charset="-128"/>
                         </a:rPr>
                         <a:t>完了</a:t>
                       </a:r>
                     </a:p>
                   </a:txBody>
-                  <a:tcPr/>
+                  <a:tcPr anchor="ctr"/>
                 </a:tc>
                 <a:extLst>
                   <a:ext uri="{0D108BD9-81ED-4DB2-BD59-A6C34878D82A}">
@@ -9230,19 +9478,19 @@
                     <a:lstStyle/>
                     <a:p>
                       <a:r>
-                        <a:rPr kumimoji="1" lang="en-US" altLang="ja-JP" sz="1400" dirty="0">
-                          <a:latin typeface="+mn-ea"/>
-                          <a:ea typeface="+mn-ea"/>
+                        <a:rPr kumimoji="1" lang="en-US" altLang="ja-JP" sz="1100" dirty="0">
+                          <a:latin typeface="メイリオ" panose="020B0604030504040204" pitchFamily="50" charset="-128"/>
+                          <a:ea typeface="メイリオ" panose="020B0604030504040204" pitchFamily="50" charset="-128"/>
                         </a:rPr>
                         <a:t>15</a:t>
                       </a:r>
-                      <a:endParaRPr kumimoji="1" lang="ja-JP" altLang="en-US" sz="1400" dirty="0">
-                        <a:latin typeface="+mn-ea"/>
-                        <a:ea typeface="+mn-ea"/>
+                      <a:endParaRPr kumimoji="1" lang="ja-JP" altLang="en-US" sz="1100" dirty="0">
+                        <a:latin typeface="メイリオ" panose="020B0604030504040204" pitchFamily="50" charset="-128"/>
+                        <a:ea typeface="メイリオ" panose="020B0604030504040204" pitchFamily="50" charset="-128"/>
                       </a:endParaRPr>
                     </a:p>
                   </a:txBody>
-                  <a:tcPr/>
+                  <a:tcPr anchor="ctr"/>
                 </a:tc>
                 <a:tc>
                   <a:txBody>
@@ -9250,15 +9498,15 @@
                     <a:lstStyle/>
                     <a:p>
                       <a:r>
-                        <a:rPr kumimoji="1" lang="ja-JP" altLang="en-US" sz="1400" dirty="0">
-                          <a:latin typeface="+mn-ea"/>
-                          <a:ea typeface="+mn-ea"/>
+                        <a:rPr kumimoji="1" lang="ja-JP" altLang="en-US" sz="1100" dirty="0">
+                          <a:latin typeface="メイリオ" panose="020B0604030504040204" pitchFamily="50" charset="-128"/>
+                          <a:ea typeface="メイリオ" panose="020B0604030504040204" pitchFamily="50" charset="-128"/>
                         </a:rPr>
                         <a:t>ティーガイア</a:t>
                       </a:r>
                     </a:p>
                   </a:txBody>
-                  <a:tcPr/>
+                  <a:tcPr anchor="ctr"/>
                 </a:tc>
                 <a:tc>
                   <a:txBody>
@@ -9283,15 +9531,15 @@
                         <a:defRPr/>
                       </a:pPr>
                       <a:r>
-                        <a:rPr kumimoji="1" lang="ja-JP" altLang="en-US" sz="1400" dirty="0">
-                          <a:latin typeface="+mn-ea"/>
-                          <a:ea typeface="+mn-ea"/>
+                        <a:rPr kumimoji="1" lang="ja-JP" altLang="en-US" sz="1100" dirty="0">
+                          <a:latin typeface="メイリオ" panose="020B0604030504040204" pitchFamily="50" charset="-128"/>
+                          <a:ea typeface="メイリオ" panose="020B0604030504040204" pitchFamily="50" charset="-128"/>
                         </a:rPr>
                         <a:t>完了</a:t>
                       </a:r>
                     </a:p>
                   </a:txBody>
-                  <a:tcPr/>
+                  <a:tcPr anchor="ctr"/>
                 </a:tc>
                 <a:extLst>
                   <a:ext uri="{0D108BD9-81ED-4DB2-BD59-A6C34878D82A}">
@@ -9306,19 +9554,19 @@
                     <a:lstStyle/>
                     <a:p>
                       <a:r>
-                        <a:rPr kumimoji="1" lang="en-US" altLang="ja-JP" sz="1400" dirty="0">
-                          <a:latin typeface="+mn-ea"/>
-                          <a:ea typeface="+mn-ea"/>
+                        <a:rPr kumimoji="1" lang="en-US" altLang="ja-JP" sz="1100" dirty="0">
+                          <a:latin typeface="メイリオ" panose="020B0604030504040204" pitchFamily="50" charset="-128"/>
+                          <a:ea typeface="メイリオ" panose="020B0604030504040204" pitchFamily="50" charset="-128"/>
                         </a:rPr>
                         <a:t>16</a:t>
                       </a:r>
-                      <a:endParaRPr kumimoji="1" lang="ja-JP" altLang="en-US" sz="1400" dirty="0">
-                        <a:latin typeface="+mn-ea"/>
-                        <a:ea typeface="+mn-ea"/>
+                      <a:endParaRPr kumimoji="1" lang="ja-JP" altLang="en-US" sz="1100" dirty="0">
+                        <a:latin typeface="メイリオ" panose="020B0604030504040204" pitchFamily="50" charset="-128"/>
+                        <a:ea typeface="メイリオ" panose="020B0604030504040204" pitchFamily="50" charset="-128"/>
                       </a:endParaRPr>
                     </a:p>
                   </a:txBody>
-                  <a:tcPr/>
+                  <a:tcPr anchor="ctr"/>
                 </a:tc>
                 <a:tc>
                   <a:txBody>
@@ -9326,15 +9574,15 @@
                     <a:lstStyle/>
                     <a:p>
                       <a:r>
-                        <a:rPr kumimoji="1" lang="ja-JP" altLang="en-US" sz="1400" dirty="0">
-                          <a:latin typeface="+mn-ea"/>
-                          <a:ea typeface="+mn-ea"/>
+                        <a:rPr kumimoji="1" lang="ja-JP" altLang="en-US" sz="1100" dirty="0">
+                          <a:latin typeface="メイリオ" panose="020B0604030504040204" pitchFamily="50" charset="-128"/>
+                          <a:ea typeface="メイリオ" panose="020B0604030504040204" pitchFamily="50" charset="-128"/>
                         </a:rPr>
                         <a:t>アシックス商事</a:t>
                       </a:r>
                     </a:p>
                   </a:txBody>
-                  <a:tcPr/>
+                  <a:tcPr anchor="ctr"/>
                 </a:tc>
                 <a:tc>
                   <a:txBody>
@@ -9359,15 +9607,15 @@
                         <a:defRPr/>
                       </a:pPr>
                       <a:r>
-                        <a:rPr kumimoji="1" lang="ja-JP" altLang="en-US" sz="1400" dirty="0">
-                          <a:latin typeface="+mn-ea"/>
-                          <a:ea typeface="+mn-ea"/>
+                        <a:rPr kumimoji="1" lang="ja-JP" altLang="en-US" sz="1100" dirty="0">
+                          <a:latin typeface="メイリオ" panose="020B0604030504040204" pitchFamily="50" charset="-128"/>
+                          <a:ea typeface="メイリオ" panose="020B0604030504040204" pitchFamily="50" charset="-128"/>
                         </a:rPr>
                         <a:t>完了</a:t>
                       </a:r>
                     </a:p>
                   </a:txBody>
-                  <a:tcPr/>
+                  <a:tcPr anchor="ctr"/>
                 </a:tc>
                 <a:extLst>
                   <a:ext uri="{0D108BD9-81ED-4DB2-BD59-A6C34878D82A}">
@@ -9382,19 +9630,19 @@
                     <a:lstStyle/>
                     <a:p>
                       <a:r>
-                        <a:rPr kumimoji="1" lang="en-US" altLang="ja-JP" sz="1400" dirty="0">
-                          <a:latin typeface="+mn-ea"/>
-                          <a:ea typeface="+mn-ea"/>
+                        <a:rPr kumimoji="1" lang="en-US" altLang="ja-JP" sz="1100" dirty="0">
+                          <a:latin typeface="メイリオ" panose="020B0604030504040204" pitchFamily="50" charset="-128"/>
+                          <a:ea typeface="メイリオ" panose="020B0604030504040204" pitchFamily="50" charset="-128"/>
                         </a:rPr>
                         <a:t>17</a:t>
                       </a:r>
-                      <a:endParaRPr kumimoji="1" lang="ja-JP" altLang="en-US" sz="1400" dirty="0">
-                        <a:latin typeface="+mn-ea"/>
-                        <a:ea typeface="+mn-ea"/>
+                      <a:endParaRPr kumimoji="1" lang="ja-JP" altLang="en-US" sz="1100" dirty="0">
+                        <a:latin typeface="メイリオ" panose="020B0604030504040204" pitchFamily="50" charset="-128"/>
+                        <a:ea typeface="メイリオ" panose="020B0604030504040204" pitchFamily="50" charset="-128"/>
                       </a:endParaRPr>
                     </a:p>
                   </a:txBody>
-                  <a:tcPr/>
+                  <a:tcPr anchor="ctr"/>
                 </a:tc>
                 <a:tc>
                   <a:txBody>
@@ -9419,15 +9667,15 @@
                         <a:defRPr/>
                       </a:pPr>
                       <a:r>
-                        <a:rPr kumimoji="1" lang="ja-JP" altLang="en-US" sz="1400" dirty="0">
-                          <a:latin typeface="+mn-ea"/>
-                          <a:ea typeface="+mn-ea"/>
+                        <a:rPr kumimoji="1" lang="ja-JP" altLang="en-US" sz="1100" dirty="0">
+                          <a:latin typeface="メイリオ" panose="020B0604030504040204" pitchFamily="50" charset="-128"/>
+                          <a:ea typeface="メイリオ" panose="020B0604030504040204" pitchFamily="50" charset="-128"/>
                         </a:rPr>
                         <a:t>パシフィックプロダクツ</a:t>
                       </a:r>
                     </a:p>
                   </a:txBody>
-                  <a:tcPr/>
+                  <a:tcPr anchor="ctr"/>
                 </a:tc>
                 <a:tc>
                   <a:txBody>
@@ -9452,15 +9700,15 @@
                         <a:defRPr/>
                       </a:pPr>
                       <a:r>
-                        <a:rPr kumimoji="1" lang="ja-JP" altLang="en-US" sz="1400" dirty="0">
-                          <a:latin typeface="+mn-ea"/>
-                          <a:ea typeface="+mn-ea"/>
+                        <a:rPr kumimoji="1" lang="ja-JP" altLang="en-US" sz="1100" dirty="0">
+                          <a:latin typeface="メイリオ" panose="020B0604030504040204" pitchFamily="50" charset="-128"/>
+                          <a:ea typeface="メイリオ" panose="020B0604030504040204" pitchFamily="50" charset="-128"/>
                         </a:rPr>
                         <a:t>完了</a:t>
                       </a:r>
                     </a:p>
                   </a:txBody>
-                  <a:tcPr/>
+                  <a:tcPr anchor="ctr"/>
                 </a:tc>
                 <a:extLst>
                   <a:ext uri="{0D108BD9-81ED-4DB2-BD59-A6C34878D82A}">
@@ -9475,19 +9723,19 @@
                     <a:lstStyle/>
                     <a:p>
                       <a:r>
-                        <a:rPr kumimoji="1" lang="en-US" altLang="ja-JP" sz="1400" dirty="0">
-                          <a:latin typeface="+mn-ea"/>
-                          <a:ea typeface="+mn-ea"/>
+                        <a:rPr kumimoji="1" lang="en-US" altLang="ja-JP" sz="1100" dirty="0">
+                          <a:latin typeface="メイリオ" panose="020B0604030504040204" pitchFamily="50" charset="-128"/>
+                          <a:ea typeface="メイリオ" panose="020B0604030504040204" pitchFamily="50" charset="-128"/>
                         </a:rPr>
                         <a:t>18</a:t>
                       </a:r>
-                      <a:endParaRPr kumimoji="1" lang="ja-JP" altLang="en-US" sz="1400" dirty="0">
-                        <a:latin typeface="+mn-ea"/>
-                        <a:ea typeface="+mn-ea"/>
+                      <a:endParaRPr kumimoji="1" lang="ja-JP" altLang="en-US" sz="1100" dirty="0">
+                        <a:latin typeface="メイリオ" panose="020B0604030504040204" pitchFamily="50" charset="-128"/>
+                        <a:ea typeface="メイリオ" panose="020B0604030504040204" pitchFamily="50" charset="-128"/>
                       </a:endParaRPr>
                     </a:p>
                   </a:txBody>
-                  <a:tcPr/>
+                  <a:tcPr anchor="ctr"/>
                 </a:tc>
                 <a:tc>
                   <a:txBody>
@@ -9512,15 +9760,15 @@
                         <a:defRPr/>
                       </a:pPr>
                       <a:r>
-                        <a:rPr kumimoji="1" lang="ja-JP" altLang="en-US" sz="1400" dirty="0">
-                          <a:latin typeface="+mn-ea"/>
-                          <a:ea typeface="+mn-ea"/>
+                        <a:rPr kumimoji="1" lang="ja-JP" altLang="en-US" sz="1100" dirty="0">
+                          <a:latin typeface="メイリオ" panose="020B0604030504040204" pitchFamily="50" charset="-128"/>
+                          <a:ea typeface="メイリオ" panose="020B0604030504040204" pitchFamily="50" charset="-128"/>
                         </a:rPr>
                         <a:t>紀伊國屋書店</a:t>
                       </a:r>
                     </a:p>
                   </a:txBody>
-                  <a:tcPr/>
+                  <a:tcPr anchor="ctr"/>
                 </a:tc>
                 <a:tc>
                   <a:txBody>
@@ -9545,15 +9793,15 @@
                         <a:defRPr/>
                       </a:pPr>
                       <a:r>
-                        <a:rPr kumimoji="1" lang="ja-JP" altLang="en-US" sz="1400" dirty="0">
-                          <a:latin typeface="+mn-ea"/>
-                          <a:ea typeface="+mn-ea"/>
+                        <a:rPr kumimoji="1" lang="ja-JP" altLang="en-US" sz="1100" dirty="0">
+                          <a:latin typeface="メイリオ" panose="020B0604030504040204" pitchFamily="50" charset="-128"/>
+                          <a:ea typeface="メイリオ" panose="020B0604030504040204" pitchFamily="50" charset="-128"/>
                         </a:rPr>
                         <a:t>対象外</a:t>
                       </a:r>
                     </a:p>
                   </a:txBody>
-                  <a:tcPr/>
+                  <a:tcPr anchor="ctr"/>
                 </a:tc>
                 <a:extLst>
                   <a:ext uri="{0D108BD9-81ED-4DB2-BD59-A6C34878D82A}">
@@ -9644,7 +9892,7 @@
         <p:spPr>
           <a:xfrm>
             <a:off x="6105128" y="4869160"/>
-            <a:ext cx="1980681" cy="830997"/>
+            <a:ext cx="1980681" cy="600164"/>
           </a:xfrm>
           <a:prstGeom prst="rect">
             <a:avLst/>
@@ -9658,7 +9906,7 @@
           <a:lstStyle/>
           <a:p>
             <a:r>
-              <a:rPr lang="ja-JP" altLang="en-US" sz="1600" dirty="0">
+              <a:rPr lang="ja-JP" altLang="en-US" sz="1100" dirty="0">
                 <a:latin typeface="メイリオ"/>
                 <a:ea typeface="メイリオ"/>
                 <a:cs typeface="メイリオ"/>
@@ -9666,7 +9914,7 @@
               <a:t>完了：</a:t>
             </a:r>
             <a:r>
-              <a:rPr lang="en-US" altLang="ja-JP" sz="1600" dirty="0">
+              <a:rPr lang="en-US" altLang="ja-JP" sz="1100" dirty="0">
                 <a:latin typeface="メイリオ"/>
                 <a:ea typeface="メイリオ"/>
                 <a:cs typeface="メイリオ"/>
@@ -9676,7 +9924,7 @@
           </a:p>
           <a:p>
             <a:r>
-              <a:rPr lang="ja-JP" altLang="en-US" sz="1600" dirty="0">
+              <a:rPr lang="ja-JP" altLang="en-US" sz="1100" dirty="0">
                 <a:latin typeface="メイリオ"/>
                 <a:ea typeface="メイリオ"/>
                 <a:cs typeface="メイリオ"/>
@@ -9684,7 +9932,7 @@
               <a:t>調整中：</a:t>
             </a:r>
             <a:r>
-              <a:rPr lang="en-US" altLang="ja-JP" sz="1600" dirty="0">
+              <a:rPr lang="en-US" altLang="ja-JP" sz="1100" dirty="0">
                 <a:latin typeface="メイリオ"/>
                 <a:ea typeface="メイリオ"/>
                 <a:cs typeface="メイリオ"/>
@@ -9694,14 +9942,14 @@
           </a:p>
           <a:p>
             <a:r>
-              <a:rPr lang="ja-JP" altLang="en-US" sz="1600" dirty="0">
+              <a:rPr lang="ja-JP" altLang="en-US" sz="1100" dirty="0">
                 <a:latin typeface="メイリオ"/>
                 <a:ea typeface="メイリオ"/>
                 <a:cs typeface="メイリオ"/>
               </a:rPr>
               <a:t>対象外：１</a:t>
             </a:r>
-            <a:endParaRPr lang="en-US" altLang="ja-JP" sz="1600" dirty="0">
+            <a:endParaRPr lang="en-US" altLang="ja-JP" sz="1100" dirty="0">
               <a:latin typeface="メイリオ"/>
               <a:ea typeface="メイリオ"/>
               <a:cs typeface="メイリオ"/>
@@ -9820,7 +10068,7 @@
           <p:nvPr>
             <p:extLst>
               <p:ext uri="{D42A27DB-BD31-4B8C-83A1-F6EECF244321}">
-                <p14:modId xmlns:p14="http://schemas.microsoft.com/office/powerpoint/2010/main" val="2206014324"/>
+                <p14:modId xmlns:p14="http://schemas.microsoft.com/office/powerpoint/2010/main" val="1724449993"/>
               </p:ext>
             </p:extLst>
           </p:nvPr>
@@ -9864,10 +10112,13 @@
                     <a:bodyPr/>
                     <a:lstStyle/>
                     <a:p>
-                      <a:endParaRPr kumimoji="1" lang="ja-JP" altLang="en-US" dirty="0"/>
-                    </a:p>
-                  </a:txBody>
-                  <a:tcPr/>
+                      <a:endParaRPr kumimoji="1" lang="ja-JP" altLang="en-US" sz="1100" dirty="0">
+                        <a:latin typeface="メイリオ" panose="020B0604030504040204" pitchFamily="50" charset="-128"/>
+                        <a:ea typeface="メイリオ" panose="020B0604030504040204" pitchFamily="50" charset="-128"/>
+                      </a:endParaRPr>
+                    </a:p>
+                  </a:txBody>
+                  <a:tcPr anchor="ctr"/>
                 </a:tc>
                 <a:tc>
                   <a:txBody>
@@ -9875,12 +10126,15 @@
                     <a:lstStyle/>
                     <a:p>
                       <a:r>
-                        <a:rPr kumimoji="1" lang="ja-JP" altLang="en-US" sz="1400" dirty="0"/>
+                        <a:rPr kumimoji="1" lang="ja-JP" altLang="en-US" sz="1100" dirty="0">
+                          <a:latin typeface="メイリオ" panose="020B0604030504040204" pitchFamily="50" charset="-128"/>
+                          <a:ea typeface="メイリオ" panose="020B0604030504040204" pitchFamily="50" charset="-128"/>
+                        </a:rPr>
                         <a:t>対象ユーザ</a:t>
                       </a:r>
                     </a:p>
                   </a:txBody>
-                  <a:tcPr/>
+                  <a:tcPr anchor="ctr"/>
                 </a:tc>
                 <a:tc>
                   <a:txBody>
@@ -9888,12 +10142,15 @@
                     <a:lstStyle/>
                     <a:p>
                       <a:r>
-                        <a:rPr kumimoji="1" lang="ja-JP" altLang="en-US" sz="1400" dirty="0"/>
+                        <a:rPr kumimoji="1" lang="ja-JP" altLang="en-US" sz="1100" dirty="0">
+                          <a:latin typeface="メイリオ" panose="020B0604030504040204" pitchFamily="50" charset="-128"/>
+                          <a:ea typeface="メイリオ" panose="020B0604030504040204" pitchFamily="50" charset="-128"/>
+                        </a:rPr>
                         <a:t>対応状況</a:t>
                       </a:r>
                     </a:p>
                   </a:txBody>
-                  <a:tcPr/>
+                  <a:tcPr anchor="ctr"/>
                 </a:tc>
                 <a:extLst>
                   <a:ext uri="{0D108BD9-81ED-4DB2-BD59-A6C34878D82A}">
@@ -9909,19 +10166,19 @@
                     <a:p>
                       <a:pPr algn="r"/>
                       <a:r>
-                        <a:rPr kumimoji="1" lang="en-US" altLang="ja-JP" sz="1400" dirty="0">
-                          <a:latin typeface="+mn-ea"/>
-                          <a:ea typeface="+mn-ea"/>
+                        <a:rPr kumimoji="1" lang="en-US" altLang="ja-JP" sz="1100" dirty="0">
+                          <a:latin typeface="メイリオ" panose="020B0604030504040204" pitchFamily="50" charset="-128"/>
+                          <a:ea typeface="メイリオ" panose="020B0604030504040204" pitchFamily="50" charset="-128"/>
                         </a:rPr>
                         <a:t>1</a:t>
                       </a:r>
-                      <a:endParaRPr kumimoji="1" lang="ja-JP" altLang="en-US" sz="1400" dirty="0">
-                        <a:latin typeface="+mn-ea"/>
-                        <a:ea typeface="+mn-ea"/>
+                      <a:endParaRPr kumimoji="1" lang="ja-JP" altLang="en-US" sz="1100" dirty="0">
+                        <a:latin typeface="メイリオ" panose="020B0604030504040204" pitchFamily="50" charset="-128"/>
+                        <a:ea typeface="メイリオ" panose="020B0604030504040204" pitchFamily="50" charset="-128"/>
                       </a:endParaRPr>
                     </a:p>
                   </a:txBody>
-                  <a:tcPr/>
+                  <a:tcPr anchor="ctr"/>
                 </a:tc>
                 <a:tc>
                   <a:txBody>
@@ -9929,15 +10186,15 @@
                     <a:lstStyle/>
                     <a:p>
                       <a:r>
-                        <a:rPr kumimoji="1" lang="ja-JP" altLang="en-US" sz="1400" dirty="0">
-                          <a:latin typeface="+mn-ea"/>
-                          <a:ea typeface="+mn-ea"/>
+                        <a:rPr kumimoji="1" lang="ja-JP" altLang="en-US" sz="1100" dirty="0">
+                          <a:latin typeface="メイリオ" panose="020B0604030504040204" pitchFamily="50" charset="-128"/>
+                          <a:ea typeface="メイリオ" panose="020B0604030504040204" pitchFamily="50" charset="-128"/>
                         </a:rPr>
                         <a:t>ナイガイ</a:t>
                       </a:r>
                     </a:p>
                   </a:txBody>
-                  <a:tcPr/>
+                  <a:tcPr anchor="ctr"/>
                 </a:tc>
                 <a:tc>
                   <a:txBody>
@@ -9945,15 +10202,15 @@
                     <a:lstStyle/>
                     <a:p>
                       <a:r>
-                        <a:rPr kumimoji="1" lang="ja-JP" altLang="en-US" sz="1400" dirty="0">
-                          <a:latin typeface="+mn-ea"/>
-                          <a:ea typeface="+mn-ea"/>
+                        <a:rPr kumimoji="1" lang="ja-JP" altLang="en-US" sz="1100" dirty="0">
+                          <a:latin typeface="メイリオ" panose="020B0604030504040204" pitchFamily="50" charset="-128"/>
+                          <a:ea typeface="メイリオ" panose="020B0604030504040204" pitchFamily="50" charset="-128"/>
                         </a:rPr>
                         <a:t>完了</a:t>
                       </a:r>
                     </a:p>
                   </a:txBody>
-                  <a:tcPr/>
+                  <a:tcPr anchor="ctr"/>
                 </a:tc>
                 <a:extLst>
                   <a:ext uri="{0D108BD9-81ED-4DB2-BD59-A6C34878D82A}">
@@ -9969,19 +10226,19 @@
                     <a:p>
                       <a:pPr algn="r"/>
                       <a:r>
-                        <a:rPr kumimoji="1" lang="en-US" altLang="ja-JP" sz="1400" dirty="0">
-                          <a:latin typeface="+mn-ea"/>
-                          <a:ea typeface="+mn-ea"/>
+                        <a:rPr kumimoji="1" lang="en-US" altLang="ja-JP" sz="1100" dirty="0">
+                          <a:latin typeface="メイリオ" panose="020B0604030504040204" pitchFamily="50" charset="-128"/>
+                          <a:ea typeface="メイリオ" panose="020B0604030504040204" pitchFamily="50" charset="-128"/>
                         </a:rPr>
                         <a:t>2</a:t>
                       </a:r>
-                      <a:endParaRPr kumimoji="1" lang="ja-JP" altLang="en-US" sz="1400" dirty="0">
-                        <a:latin typeface="+mn-ea"/>
-                        <a:ea typeface="+mn-ea"/>
+                      <a:endParaRPr kumimoji="1" lang="ja-JP" altLang="en-US" sz="1100" dirty="0">
+                        <a:latin typeface="メイリオ" panose="020B0604030504040204" pitchFamily="50" charset="-128"/>
+                        <a:ea typeface="メイリオ" panose="020B0604030504040204" pitchFamily="50" charset="-128"/>
                       </a:endParaRPr>
                     </a:p>
                   </a:txBody>
-                  <a:tcPr/>
+                  <a:tcPr anchor="ctr"/>
                 </a:tc>
                 <a:tc>
                   <a:txBody>
@@ -9989,15 +10246,15 @@
                     <a:lstStyle/>
                     <a:p>
                       <a:r>
-                        <a:rPr kumimoji="1" lang="ja-JP" altLang="en-US" sz="1400" dirty="0">
-                          <a:latin typeface="+mn-ea"/>
-                          <a:ea typeface="+mn-ea"/>
+                        <a:rPr kumimoji="1" lang="ja-JP" altLang="en-US" sz="1100" dirty="0">
+                          <a:latin typeface="メイリオ" panose="020B0604030504040204" pitchFamily="50" charset="-128"/>
+                          <a:ea typeface="メイリオ" panose="020B0604030504040204" pitchFamily="50" charset="-128"/>
                         </a:rPr>
                         <a:t>ジャクソン・ラボラトリー・ジャパン</a:t>
                       </a:r>
                     </a:p>
                   </a:txBody>
-                  <a:tcPr/>
+                  <a:tcPr anchor="ctr"/>
                 </a:tc>
                 <a:tc>
                   <a:txBody>
@@ -10022,15 +10279,15 @@
                         <a:defRPr/>
                       </a:pPr>
                       <a:r>
-                        <a:rPr kumimoji="1" lang="ja-JP" altLang="en-US" sz="1400" dirty="0">
-                          <a:latin typeface="+mn-ea"/>
-                          <a:ea typeface="+mn-ea"/>
+                        <a:rPr kumimoji="1" lang="ja-JP" altLang="en-US" sz="1100" dirty="0">
+                          <a:latin typeface="メイリオ" panose="020B0604030504040204" pitchFamily="50" charset="-128"/>
+                          <a:ea typeface="メイリオ" panose="020B0604030504040204" pitchFamily="50" charset="-128"/>
                         </a:rPr>
                         <a:t>完了</a:t>
                       </a:r>
                     </a:p>
                   </a:txBody>
-                  <a:tcPr/>
+                  <a:tcPr anchor="ctr"/>
                 </a:tc>
                 <a:extLst>
                   <a:ext uri="{0D108BD9-81ED-4DB2-BD59-A6C34878D82A}">
@@ -10046,19 +10303,19 @@
                     <a:p>
                       <a:pPr algn="r"/>
                       <a:r>
-                        <a:rPr kumimoji="1" lang="en-US" altLang="ja-JP" sz="1400" dirty="0">
-                          <a:latin typeface="+mn-ea"/>
-                          <a:ea typeface="+mn-ea"/>
+                        <a:rPr kumimoji="1" lang="en-US" altLang="ja-JP" sz="1100" dirty="0">
+                          <a:latin typeface="メイリオ" panose="020B0604030504040204" pitchFamily="50" charset="-128"/>
+                          <a:ea typeface="メイリオ" panose="020B0604030504040204" pitchFamily="50" charset="-128"/>
                         </a:rPr>
                         <a:t>3</a:t>
                       </a:r>
-                      <a:endParaRPr kumimoji="1" lang="ja-JP" altLang="en-US" sz="1400" dirty="0">
-                        <a:latin typeface="+mn-ea"/>
-                        <a:ea typeface="+mn-ea"/>
+                      <a:endParaRPr kumimoji="1" lang="ja-JP" altLang="en-US" sz="1100" dirty="0">
+                        <a:latin typeface="メイリオ" panose="020B0604030504040204" pitchFamily="50" charset="-128"/>
+                        <a:ea typeface="メイリオ" panose="020B0604030504040204" pitchFamily="50" charset="-128"/>
                       </a:endParaRPr>
                     </a:p>
                   </a:txBody>
-                  <a:tcPr/>
+                  <a:tcPr anchor="ctr"/>
                 </a:tc>
                 <a:tc>
                   <a:txBody>
@@ -10066,15 +10323,15 @@
                     <a:lstStyle/>
                     <a:p>
                       <a:r>
-                        <a:rPr kumimoji="1" lang="ja-JP" altLang="en-US" sz="1400" dirty="0">
-                          <a:latin typeface="+mn-ea"/>
-                          <a:ea typeface="+mn-ea"/>
+                        <a:rPr kumimoji="1" lang="ja-JP" altLang="en-US" sz="1100" dirty="0">
+                          <a:latin typeface="メイリオ" panose="020B0604030504040204" pitchFamily="50" charset="-128"/>
+                          <a:ea typeface="メイリオ" panose="020B0604030504040204" pitchFamily="50" charset="-128"/>
                         </a:rPr>
                         <a:t>タイロテック</a:t>
                       </a:r>
                     </a:p>
                   </a:txBody>
-                  <a:tcPr/>
+                  <a:tcPr anchor="ctr"/>
                 </a:tc>
                 <a:tc>
                   <a:txBody>
@@ -10099,15 +10356,15 @@
                         <a:defRPr/>
                       </a:pPr>
                       <a:r>
-                        <a:rPr kumimoji="1" lang="ja-JP" altLang="en-US" sz="1400" dirty="0">
-                          <a:latin typeface="+mn-ea"/>
-                          <a:ea typeface="+mn-ea"/>
+                        <a:rPr kumimoji="1" lang="ja-JP" altLang="en-US" sz="1100" dirty="0">
+                          <a:latin typeface="メイリオ" panose="020B0604030504040204" pitchFamily="50" charset="-128"/>
+                          <a:ea typeface="メイリオ" panose="020B0604030504040204" pitchFamily="50" charset="-128"/>
                         </a:rPr>
                         <a:t>完了</a:t>
                       </a:r>
                     </a:p>
                   </a:txBody>
-                  <a:tcPr/>
+                  <a:tcPr anchor="ctr"/>
                 </a:tc>
                 <a:extLst>
                   <a:ext uri="{0D108BD9-81ED-4DB2-BD59-A6C34878D82A}">
@@ -10123,19 +10380,19 @@
                     <a:p>
                       <a:pPr algn="r"/>
                       <a:r>
-                        <a:rPr kumimoji="1" lang="en-US" altLang="ja-JP" sz="1400" dirty="0">
-                          <a:latin typeface="+mn-ea"/>
-                          <a:ea typeface="+mn-ea"/>
+                        <a:rPr kumimoji="1" lang="en-US" altLang="ja-JP" sz="1100" dirty="0">
+                          <a:latin typeface="メイリオ" panose="020B0604030504040204" pitchFamily="50" charset="-128"/>
+                          <a:ea typeface="メイリオ" panose="020B0604030504040204" pitchFamily="50" charset="-128"/>
                         </a:rPr>
                         <a:t>4</a:t>
                       </a:r>
-                      <a:endParaRPr kumimoji="1" lang="ja-JP" altLang="en-US" sz="1400" dirty="0">
-                        <a:latin typeface="+mn-ea"/>
-                        <a:ea typeface="+mn-ea"/>
+                      <a:endParaRPr kumimoji="1" lang="ja-JP" altLang="en-US" sz="1100" dirty="0">
+                        <a:latin typeface="メイリオ" panose="020B0604030504040204" pitchFamily="50" charset="-128"/>
+                        <a:ea typeface="メイリオ" panose="020B0604030504040204" pitchFamily="50" charset="-128"/>
                       </a:endParaRPr>
                     </a:p>
                   </a:txBody>
-                  <a:tcPr/>
+                  <a:tcPr anchor="ctr"/>
                 </a:tc>
                 <a:tc>
                   <a:txBody>
@@ -10143,15 +10400,15 @@
                     <a:lstStyle/>
                     <a:p>
                       <a:r>
-                        <a:rPr kumimoji="1" lang="ja-JP" altLang="en-US" sz="1400" dirty="0">
-                          <a:latin typeface="+mn-ea"/>
-                          <a:ea typeface="+mn-ea"/>
+                        <a:rPr kumimoji="1" lang="ja-JP" altLang="en-US" sz="1100" dirty="0">
+                          <a:latin typeface="メイリオ" panose="020B0604030504040204" pitchFamily="50" charset="-128"/>
+                          <a:ea typeface="メイリオ" panose="020B0604030504040204" pitchFamily="50" charset="-128"/>
                         </a:rPr>
                         <a:t>カーコンビニ倶楽部</a:t>
                       </a:r>
                     </a:p>
                   </a:txBody>
-                  <a:tcPr/>
+                  <a:tcPr anchor="ctr"/>
                 </a:tc>
                 <a:tc>
                   <a:txBody>
@@ -10176,15 +10433,15 @@
                         <a:defRPr/>
                       </a:pPr>
                       <a:r>
-                        <a:rPr kumimoji="1" lang="ja-JP" altLang="en-US" sz="1400" dirty="0">
-                          <a:latin typeface="+mn-ea"/>
-                          <a:ea typeface="+mn-ea"/>
+                        <a:rPr kumimoji="1" lang="ja-JP" altLang="en-US" sz="1100" dirty="0">
+                          <a:latin typeface="メイリオ" panose="020B0604030504040204" pitchFamily="50" charset="-128"/>
+                          <a:ea typeface="メイリオ" panose="020B0604030504040204" pitchFamily="50" charset="-128"/>
                         </a:rPr>
                         <a:t>対応中</a:t>
                       </a:r>
                     </a:p>
                   </a:txBody>
-                  <a:tcPr/>
+                  <a:tcPr anchor="ctr"/>
                 </a:tc>
                 <a:extLst>
                   <a:ext uri="{0D108BD9-81ED-4DB2-BD59-A6C34878D82A}">
@@ -10200,19 +10457,19 @@
                     <a:p>
                       <a:pPr algn="r"/>
                       <a:r>
-                        <a:rPr kumimoji="1" lang="en-US" altLang="ja-JP" sz="1400" dirty="0">
-                          <a:latin typeface="+mn-ea"/>
-                          <a:ea typeface="+mn-ea"/>
+                        <a:rPr kumimoji="1" lang="en-US" altLang="ja-JP" sz="1100" dirty="0">
+                          <a:latin typeface="メイリオ" panose="020B0604030504040204" pitchFamily="50" charset="-128"/>
+                          <a:ea typeface="メイリオ" panose="020B0604030504040204" pitchFamily="50" charset="-128"/>
                         </a:rPr>
                         <a:t>5</a:t>
                       </a:r>
-                      <a:endParaRPr kumimoji="1" lang="ja-JP" altLang="en-US" sz="1400" dirty="0">
-                        <a:latin typeface="+mn-ea"/>
-                        <a:ea typeface="+mn-ea"/>
+                      <a:endParaRPr kumimoji="1" lang="ja-JP" altLang="en-US" sz="1100" dirty="0">
+                        <a:latin typeface="メイリオ" panose="020B0604030504040204" pitchFamily="50" charset="-128"/>
+                        <a:ea typeface="メイリオ" panose="020B0604030504040204" pitchFamily="50" charset="-128"/>
                       </a:endParaRPr>
                     </a:p>
                   </a:txBody>
-                  <a:tcPr/>
+                  <a:tcPr anchor="ctr"/>
                 </a:tc>
                 <a:tc>
                   <a:txBody>
@@ -10220,15 +10477,15 @@
                     <a:lstStyle/>
                     <a:p>
                       <a:r>
-                        <a:rPr kumimoji="1" lang="ja-JP" altLang="en-US" sz="1400" dirty="0">
-                          <a:latin typeface="+mn-ea"/>
-                          <a:ea typeface="+mn-ea"/>
+                        <a:rPr kumimoji="1" lang="ja-JP" altLang="en-US" sz="1100" dirty="0">
+                          <a:latin typeface="メイリオ" panose="020B0604030504040204" pitchFamily="50" charset="-128"/>
+                          <a:ea typeface="メイリオ" panose="020B0604030504040204" pitchFamily="50" charset="-128"/>
                         </a:rPr>
                         <a:t>フジキ工芸産業</a:t>
                       </a:r>
                     </a:p>
                   </a:txBody>
-                  <a:tcPr/>
+                  <a:tcPr anchor="ctr"/>
                 </a:tc>
                 <a:tc>
                   <a:txBody>
@@ -10253,15 +10510,15 @@
                         <a:defRPr/>
                       </a:pPr>
                       <a:r>
-                        <a:rPr kumimoji="1" lang="ja-JP" altLang="en-US" sz="1400" dirty="0">
-                          <a:latin typeface="+mn-ea"/>
-                          <a:ea typeface="+mn-ea"/>
+                        <a:rPr kumimoji="1" lang="ja-JP" altLang="en-US" sz="1100" dirty="0">
+                          <a:latin typeface="メイリオ" panose="020B0604030504040204" pitchFamily="50" charset="-128"/>
+                          <a:ea typeface="メイリオ" panose="020B0604030504040204" pitchFamily="50" charset="-128"/>
                         </a:rPr>
                         <a:t>対象外</a:t>
                       </a:r>
                     </a:p>
                   </a:txBody>
-                  <a:tcPr/>
+                  <a:tcPr anchor="ctr"/>
                 </a:tc>
                 <a:extLst>
                   <a:ext uri="{0D108BD9-81ED-4DB2-BD59-A6C34878D82A}">
@@ -10277,19 +10534,19 @@
                     <a:p>
                       <a:pPr algn="r"/>
                       <a:r>
-                        <a:rPr kumimoji="1" lang="en-US" altLang="ja-JP" sz="1400" dirty="0">
-                          <a:latin typeface="+mn-ea"/>
-                          <a:ea typeface="+mn-ea"/>
+                        <a:rPr kumimoji="1" lang="en-US" altLang="ja-JP" sz="1100" dirty="0">
+                          <a:latin typeface="メイリオ" panose="020B0604030504040204" pitchFamily="50" charset="-128"/>
+                          <a:ea typeface="メイリオ" panose="020B0604030504040204" pitchFamily="50" charset="-128"/>
                         </a:rPr>
                         <a:t>6</a:t>
                       </a:r>
-                      <a:endParaRPr kumimoji="1" lang="ja-JP" altLang="en-US" sz="1400" dirty="0">
-                        <a:latin typeface="+mn-ea"/>
-                        <a:ea typeface="+mn-ea"/>
+                      <a:endParaRPr kumimoji="1" lang="ja-JP" altLang="en-US" sz="1100" dirty="0">
+                        <a:latin typeface="メイリオ" panose="020B0604030504040204" pitchFamily="50" charset="-128"/>
+                        <a:ea typeface="メイリオ" panose="020B0604030504040204" pitchFamily="50" charset="-128"/>
                       </a:endParaRPr>
                     </a:p>
                   </a:txBody>
-                  <a:tcPr/>
+                  <a:tcPr anchor="ctr"/>
                 </a:tc>
                 <a:tc>
                   <a:txBody>
@@ -10297,15 +10554,15 @@
                     <a:lstStyle/>
                     <a:p>
                       <a:r>
-                        <a:rPr kumimoji="1" lang="ja-JP" altLang="en-US" sz="1400" dirty="0">
-                          <a:latin typeface="+mn-ea"/>
-                          <a:ea typeface="+mn-ea"/>
+                        <a:rPr kumimoji="1" lang="ja-JP" altLang="en-US" sz="1100" dirty="0">
+                          <a:latin typeface="メイリオ" panose="020B0604030504040204" pitchFamily="50" charset="-128"/>
+                          <a:ea typeface="メイリオ" panose="020B0604030504040204" pitchFamily="50" charset="-128"/>
                         </a:rPr>
                         <a:t>加納コーポレーション</a:t>
                       </a:r>
                     </a:p>
                   </a:txBody>
-                  <a:tcPr/>
+                  <a:tcPr anchor="ctr"/>
                 </a:tc>
                 <a:tc>
                   <a:txBody>
@@ -10330,15 +10587,15 @@
                         <a:defRPr/>
                       </a:pPr>
                       <a:r>
-                        <a:rPr kumimoji="1" lang="ja-JP" altLang="en-US" sz="1400" dirty="0">
-                          <a:latin typeface="+mn-ea"/>
-                          <a:ea typeface="+mn-ea"/>
+                        <a:rPr kumimoji="1" lang="ja-JP" altLang="en-US" sz="1100" dirty="0">
+                          <a:latin typeface="メイリオ" panose="020B0604030504040204" pitchFamily="50" charset="-128"/>
+                          <a:ea typeface="メイリオ" panose="020B0604030504040204" pitchFamily="50" charset="-128"/>
                         </a:rPr>
                         <a:t>完了</a:t>
                       </a:r>
                     </a:p>
                   </a:txBody>
-                  <a:tcPr/>
+                  <a:tcPr anchor="ctr"/>
                 </a:tc>
                 <a:extLst>
                   <a:ext uri="{0D108BD9-81ED-4DB2-BD59-A6C34878D82A}">
@@ -10354,19 +10611,19 @@
                     <a:p>
                       <a:pPr algn="r"/>
                       <a:r>
-                        <a:rPr kumimoji="1" lang="en-US" altLang="ja-JP" sz="1400" dirty="0">
-                          <a:latin typeface="+mn-ea"/>
-                          <a:ea typeface="+mn-ea"/>
+                        <a:rPr kumimoji="1" lang="en-US" altLang="ja-JP" sz="1100" dirty="0">
+                          <a:latin typeface="メイリオ" panose="020B0604030504040204" pitchFamily="50" charset="-128"/>
+                          <a:ea typeface="メイリオ" panose="020B0604030504040204" pitchFamily="50" charset="-128"/>
                         </a:rPr>
                         <a:t>7</a:t>
                       </a:r>
-                      <a:endParaRPr kumimoji="1" lang="ja-JP" altLang="en-US" sz="1400" dirty="0">
-                        <a:latin typeface="+mn-ea"/>
-                        <a:ea typeface="+mn-ea"/>
+                      <a:endParaRPr kumimoji="1" lang="ja-JP" altLang="en-US" sz="1100" dirty="0">
+                        <a:latin typeface="メイリオ" panose="020B0604030504040204" pitchFamily="50" charset="-128"/>
+                        <a:ea typeface="メイリオ" panose="020B0604030504040204" pitchFamily="50" charset="-128"/>
                       </a:endParaRPr>
                     </a:p>
                   </a:txBody>
-                  <a:tcPr/>
+                  <a:tcPr anchor="ctr"/>
                 </a:tc>
                 <a:tc>
                   <a:txBody>
@@ -10374,15 +10631,15 @@
                     <a:lstStyle/>
                     <a:p>
                       <a:r>
-                        <a:rPr kumimoji="1" lang="ja-JP" altLang="en-US" sz="1400" dirty="0">
-                          <a:latin typeface="+mn-ea"/>
-                          <a:ea typeface="+mn-ea"/>
+                        <a:rPr kumimoji="1" lang="ja-JP" altLang="en-US" sz="1100" dirty="0">
+                          <a:latin typeface="メイリオ" panose="020B0604030504040204" pitchFamily="50" charset="-128"/>
+                          <a:ea typeface="メイリオ" panose="020B0604030504040204" pitchFamily="50" charset="-128"/>
                         </a:rPr>
                         <a:t>日本ウエイン</a:t>
                       </a:r>
                     </a:p>
                   </a:txBody>
-                  <a:tcPr/>
+                  <a:tcPr anchor="ctr"/>
                 </a:tc>
                 <a:tc>
                   <a:txBody>
@@ -10390,15 +10647,15 @@
                     <a:lstStyle/>
                     <a:p>
                       <a:r>
-                        <a:rPr kumimoji="1" lang="ja-JP" altLang="en-US" sz="1400" dirty="0">
-                          <a:latin typeface="+mn-ea"/>
-                          <a:ea typeface="+mn-ea"/>
+                        <a:rPr kumimoji="1" lang="ja-JP" altLang="en-US" sz="1100" dirty="0">
+                          <a:latin typeface="メイリオ" panose="020B0604030504040204" pitchFamily="50" charset="-128"/>
+                          <a:ea typeface="メイリオ" panose="020B0604030504040204" pitchFamily="50" charset="-128"/>
                         </a:rPr>
                         <a:t>完了</a:t>
                       </a:r>
                     </a:p>
                   </a:txBody>
-                  <a:tcPr/>
+                  <a:tcPr anchor="ctr"/>
                 </a:tc>
                 <a:extLst>
                   <a:ext uri="{0D108BD9-81ED-4DB2-BD59-A6C34878D82A}">
@@ -10414,19 +10671,19 @@
                     <a:p>
                       <a:pPr algn="r"/>
                       <a:r>
-                        <a:rPr kumimoji="1" lang="en-US" altLang="ja-JP" sz="1400" dirty="0">
-                          <a:latin typeface="+mn-ea"/>
-                          <a:ea typeface="+mn-ea"/>
+                        <a:rPr kumimoji="1" lang="en-US" altLang="ja-JP" sz="1100" dirty="0">
+                          <a:latin typeface="メイリオ" panose="020B0604030504040204" pitchFamily="50" charset="-128"/>
+                          <a:ea typeface="メイリオ" panose="020B0604030504040204" pitchFamily="50" charset="-128"/>
                         </a:rPr>
                         <a:t>8</a:t>
                       </a:r>
-                      <a:endParaRPr kumimoji="1" lang="ja-JP" altLang="en-US" sz="1400" dirty="0">
-                        <a:latin typeface="+mn-ea"/>
-                        <a:ea typeface="+mn-ea"/>
+                      <a:endParaRPr kumimoji="1" lang="ja-JP" altLang="en-US" sz="1100" dirty="0">
+                        <a:latin typeface="メイリオ" panose="020B0604030504040204" pitchFamily="50" charset="-128"/>
+                        <a:ea typeface="メイリオ" panose="020B0604030504040204" pitchFamily="50" charset="-128"/>
                       </a:endParaRPr>
                     </a:p>
                   </a:txBody>
-                  <a:tcPr/>
+                  <a:tcPr anchor="ctr"/>
                 </a:tc>
                 <a:tc>
                   <a:txBody>
@@ -10434,26 +10691,26 @@
                     <a:lstStyle/>
                     <a:p>
                       <a:r>
-                        <a:rPr kumimoji="1" lang="ja-JP" altLang="en-US" sz="1400" dirty="0">
-                          <a:latin typeface="+mn-ea"/>
-                          <a:ea typeface="+mn-ea"/>
+                        <a:rPr kumimoji="1" lang="ja-JP" altLang="en-US" sz="1100" dirty="0">
+                          <a:latin typeface="メイリオ" panose="020B0604030504040204" pitchFamily="50" charset="-128"/>
+                          <a:ea typeface="メイリオ" panose="020B0604030504040204" pitchFamily="50" charset="-128"/>
                         </a:rPr>
                         <a:t>日東電工</a:t>
                       </a:r>
                       <a:r>
-                        <a:rPr kumimoji="1" lang="en-US" altLang="ja-JP" sz="1400" dirty="0">
-                          <a:latin typeface="+mn-ea"/>
-                          <a:ea typeface="+mn-ea"/>
+                        <a:rPr kumimoji="1" lang="en-US" altLang="ja-JP" sz="1100" dirty="0">
+                          <a:latin typeface="メイリオ" panose="020B0604030504040204" pitchFamily="50" charset="-128"/>
+                          <a:ea typeface="メイリオ" panose="020B0604030504040204" pitchFamily="50" charset="-128"/>
                         </a:rPr>
                         <a:t>BM</a:t>
                       </a:r>
-                      <a:endParaRPr kumimoji="1" lang="ja-JP" altLang="en-US" sz="1400" dirty="0">
-                        <a:latin typeface="+mn-ea"/>
-                        <a:ea typeface="+mn-ea"/>
+                      <a:endParaRPr kumimoji="1" lang="ja-JP" altLang="en-US" sz="1100" dirty="0">
+                        <a:latin typeface="メイリオ" panose="020B0604030504040204" pitchFamily="50" charset="-128"/>
+                        <a:ea typeface="メイリオ" panose="020B0604030504040204" pitchFamily="50" charset="-128"/>
                       </a:endParaRPr>
                     </a:p>
                   </a:txBody>
-                  <a:tcPr/>
+                  <a:tcPr anchor="ctr"/>
                 </a:tc>
                 <a:tc>
                   <a:txBody>
@@ -10478,15 +10735,22 @@
                         <a:defRPr/>
                       </a:pPr>
                       <a:r>
-                        <a:rPr kumimoji="1" lang="ja-JP" altLang="en-US" sz="1400" dirty="0">
-                          <a:latin typeface="+mn-ea"/>
-                          <a:ea typeface="+mn-ea"/>
-                        </a:rPr>
-                        <a:t>対応中</a:t>
-                      </a:r>
-                    </a:p>
-                  </a:txBody>
-                  <a:tcPr/>
+                        <a:rPr kumimoji="1" lang="en-US" altLang="ja-JP" sz="1100" dirty="0">
+                          <a:latin typeface="メイリオ" panose="020B0604030504040204" pitchFamily="50" charset="-128"/>
+                          <a:ea typeface="メイリオ" panose="020B0604030504040204" pitchFamily="50" charset="-128"/>
+                        </a:rPr>
+                        <a:t>8/19</a:t>
+                      </a:r>
+                      <a:r>
+                        <a:rPr kumimoji="1" lang="ja-JP" altLang="en-US" sz="1100" dirty="0">
+                          <a:latin typeface="メイリオ" panose="020B0604030504040204" pitchFamily="50" charset="-128"/>
+                          <a:ea typeface="メイリオ" panose="020B0604030504040204" pitchFamily="50" charset="-128"/>
+                        </a:rPr>
+                        <a:t>反映予定</a:t>
+                      </a:r>
+                    </a:p>
+                  </a:txBody>
+                  <a:tcPr anchor="ctr"/>
                 </a:tc>
                 <a:extLst>
                   <a:ext uri="{0D108BD9-81ED-4DB2-BD59-A6C34878D82A}">
@@ -10502,19 +10766,19 @@
                     <a:p>
                       <a:pPr algn="r"/>
                       <a:r>
-                        <a:rPr kumimoji="1" lang="en-US" altLang="ja-JP" sz="1400" dirty="0">
-                          <a:latin typeface="+mn-ea"/>
-                          <a:ea typeface="+mn-ea"/>
+                        <a:rPr kumimoji="1" lang="en-US" altLang="ja-JP" sz="1100" dirty="0">
+                          <a:latin typeface="メイリオ" panose="020B0604030504040204" pitchFamily="50" charset="-128"/>
+                          <a:ea typeface="メイリオ" panose="020B0604030504040204" pitchFamily="50" charset="-128"/>
                         </a:rPr>
                         <a:t>9</a:t>
                       </a:r>
-                      <a:endParaRPr kumimoji="1" lang="ja-JP" altLang="en-US" sz="1400" dirty="0">
-                        <a:latin typeface="+mn-ea"/>
-                        <a:ea typeface="+mn-ea"/>
+                      <a:endParaRPr kumimoji="1" lang="ja-JP" altLang="en-US" sz="1100" dirty="0">
+                        <a:latin typeface="メイリオ" panose="020B0604030504040204" pitchFamily="50" charset="-128"/>
+                        <a:ea typeface="メイリオ" panose="020B0604030504040204" pitchFamily="50" charset="-128"/>
                       </a:endParaRPr>
                     </a:p>
                   </a:txBody>
-                  <a:tcPr/>
+                  <a:tcPr anchor="ctr"/>
                 </a:tc>
                 <a:tc>
                   <a:txBody>
@@ -10522,15 +10786,15 @@
                     <a:lstStyle/>
                     <a:p>
                       <a:r>
-                        <a:rPr kumimoji="1" lang="ja-JP" altLang="en-US" sz="1400" dirty="0">
-                          <a:latin typeface="+mn-ea"/>
-                          <a:ea typeface="+mn-ea"/>
+                        <a:rPr kumimoji="1" lang="ja-JP" altLang="en-US" sz="1100" dirty="0">
+                          <a:latin typeface="メイリオ" panose="020B0604030504040204" pitchFamily="50" charset="-128"/>
+                          <a:ea typeface="メイリオ" panose="020B0604030504040204" pitchFamily="50" charset="-128"/>
                         </a:rPr>
                         <a:t>貴和製作所</a:t>
                       </a:r>
                     </a:p>
                   </a:txBody>
-                  <a:tcPr/>
+                  <a:tcPr anchor="ctr"/>
                 </a:tc>
                 <a:tc>
                   <a:txBody>
@@ -10555,15 +10819,15 @@
                         <a:defRPr/>
                       </a:pPr>
                       <a:r>
-                        <a:rPr kumimoji="1" lang="ja-JP" altLang="en-US" sz="1400" dirty="0">
-                          <a:latin typeface="+mn-ea"/>
-                          <a:ea typeface="+mn-ea"/>
+                        <a:rPr kumimoji="1" lang="ja-JP" altLang="en-US" sz="1100" dirty="0">
+                          <a:latin typeface="メイリオ" panose="020B0604030504040204" pitchFamily="50" charset="-128"/>
+                          <a:ea typeface="メイリオ" panose="020B0604030504040204" pitchFamily="50" charset="-128"/>
                         </a:rPr>
                         <a:t>完了</a:t>
                       </a:r>
                     </a:p>
                   </a:txBody>
-                  <a:tcPr/>
+                  <a:tcPr anchor="ctr"/>
                 </a:tc>
                 <a:extLst>
                   <a:ext uri="{0D108BD9-81ED-4DB2-BD59-A6C34878D82A}">
@@ -10579,19 +10843,19 @@
                     <a:p>
                       <a:pPr algn="r"/>
                       <a:r>
-                        <a:rPr kumimoji="1" lang="en-US" altLang="ja-JP" sz="1400" dirty="0">
-                          <a:latin typeface="+mn-ea"/>
-                          <a:ea typeface="+mn-ea"/>
+                        <a:rPr kumimoji="1" lang="en-US" altLang="ja-JP" sz="1100" dirty="0">
+                          <a:latin typeface="メイリオ" panose="020B0604030504040204" pitchFamily="50" charset="-128"/>
+                          <a:ea typeface="メイリオ" panose="020B0604030504040204" pitchFamily="50" charset="-128"/>
                         </a:rPr>
                         <a:t>10</a:t>
                       </a:r>
-                      <a:endParaRPr kumimoji="1" lang="ja-JP" altLang="en-US" sz="1400" dirty="0">
-                        <a:latin typeface="+mn-ea"/>
-                        <a:ea typeface="+mn-ea"/>
+                      <a:endParaRPr kumimoji="1" lang="ja-JP" altLang="en-US" sz="1100" dirty="0">
+                        <a:latin typeface="メイリオ" panose="020B0604030504040204" pitchFamily="50" charset="-128"/>
+                        <a:ea typeface="メイリオ" panose="020B0604030504040204" pitchFamily="50" charset="-128"/>
                       </a:endParaRPr>
                     </a:p>
                   </a:txBody>
-                  <a:tcPr/>
+                  <a:tcPr anchor="ctr"/>
                 </a:tc>
                 <a:tc>
                   <a:txBody>
@@ -10599,15 +10863,15 @@
                     <a:lstStyle/>
                     <a:p>
                       <a:r>
-                        <a:rPr kumimoji="1" lang="ja-JP" altLang="en-US" sz="1400" dirty="0">
-                          <a:latin typeface="+mn-ea"/>
-                          <a:ea typeface="+mn-ea"/>
+                        <a:rPr kumimoji="1" lang="ja-JP" altLang="en-US" sz="1100" dirty="0">
+                          <a:latin typeface="メイリオ" panose="020B0604030504040204" pitchFamily="50" charset="-128"/>
+                          <a:ea typeface="メイリオ" panose="020B0604030504040204" pitchFamily="50" charset="-128"/>
                         </a:rPr>
                         <a:t>マルサン</a:t>
                       </a:r>
                     </a:p>
                   </a:txBody>
-                  <a:tcPr/>
+                  <a:tcPr anchor="ctr"/>
                 </a:tc>
                 <a:tc>
                   <a:txBody>
@@ -10632,15 +10896,15 @@
                         <a:defRPr/>
                       </a:pPr>
                       <a:r>
-                        <a:rPr kumimoji="1" lang="ja-JP" altLang="en-US" sz="1400" dirty="0">
-                          <a:latin typeface="+mn-ea"/>
-                          <a:ea typeface="+mn-ea"/>
+                        <a:rPr kumimoji="1" lang="ja-JP" altLang="en-US" sz="1100" dirty="0">
+                          <a:latin typeface="メイリオ" panose="020B0604030504040204" pitchFamily="50" charset="-128"/>
+                          <a:ea typeface="メイリオ" panose="020B0604030504040204" pitchFamily="50" charset="-128"/>
                         </a:rPr>
                         <a:t>完了</a:t>
                       </a:r>
                     </a:p>
                   </a:txBody>
-                  <a:tcPr/>
+                  <a:tcPr anchor="ctr"/>
                 </a:tc>
                 <a:extLst>
                   <a:ext uri="{0D108BD9-81ED-4DB2-BD59-A6C34878D82A}">
@@ -10667,7 +10931,7 @@
           <p:nvPr>
             <p:extLst>
               <p:ext uri="{D42A27DB-BD31-4B8C-83A1-F6EECF244321}">
-                <p14:modId xmlns:p14="http://schemas.microsoft.com/office/powerpoint/2010/main" val="3333270034"/>
+                <p14:modId xmlns:p14="http://schemas.microsoft.com/office/powerpoint/2010/main" val="1899502486"/>
               </p:ext>
             </p:extLst>
           </p:nvPr>
@@ -10711,10 +10975,13 @@
                     <a:bodyPr/>
                     <a:lstStyle/>
                     <a:p>
-                      <a:endParaRPr kumimoji="1" lang="ja-JP" altLang="en-US" dirty="0"/>
-                    </a:p>
-                  </a:txBody>
-                  <a:tcPr/>
+                      <a:endParaRPr kumimoji="1" lang="ja-JP" altLang="en-US" sz="1100" dirty="0">
+                        <a:latin typeface="メイリオ" panose="020B0604030504040204" pitchFamily="50" charset="-128"/>
+                        <a:ea typeface="メイリオ" panose="020B0604030504040204" pitchFamily="50" charset="-128"/>
+                      </a:endParaRPr>
+                    </a:p>
+                  </a:txBody>
+                  <a:tcPr anchor="ctr"/>
                 </a:tc>
                 <a:tc>
                   <a:txBody>
@@ -10722,12 +10989,15 @@
                     <a:lstStyle/>
                     <a:p>
                       <a:r>
-                        <a:rPr kumimoji="1" lang="ja-JP" altLang="en-US" sz="1400" dirty="0"/>
+                        <a:rPr kumimoji="1" lang="ja-JP" altLang="en-US" sz="1100" dirty="0">
+                          <a:latin typeface="メイリオ" panose="020B0604030504040204" pitchFamily="50" charset="-128"/>
+                          <a:ea typeface="メイリオ" panose="020B0604030504040204" pitchFamily="50" charset="-128"/>
+                        </a:rPr>
                         <a:t>対象ユーザ</a:t>
                       </a:r>
                     </a:p>
                   </a:txBody>
-                  <a:tcPr/>
+                  <a:tcPr anchor="ctr"/>
                 </a:tc>
                 <a:tc>
                   <a:txBody>
@@ -10735,12 +11005,15 @@
                     <a:lstStyle/>
                     <a:p>
                       <a:r>
-                        <a:rPr kumimoji="1" lang="ja-JP" altLang="en-US" sz="1400" dirty="0"/>
+                        <a:rPr kumimoji="1" lang="ja-JP" altLang="en-US" sz="1100" dirty="0">
+                          <a:latin typeface="メイリオ" panose="020B0604030504040204" pitchFamily="50" charset="-128"/>
+                          <a:ea typeface="メイリオ" panose="020B0604030504040204" pitchFamily="50" charset="-128"/>
+                        </a:rPr>
                         <a:t>対応状況</a:t>
                       </a:r>
                     </a:p>
                   </a:txBody>
-                  <a:tcPr/>
+                  <a:tcPr anchor="ctr"/>
                 </a:tc>
                 <a:extLst>
                   <a:ext uri="{0D108BD9-81ED-4DB2-BD59-A6C34878D82A}">
@@ -10756,19 +11029,19 @@
                     <a:p>
                       <a:pPr algn="r"/>
                       <a:r>
-                        <a:rPr kumimoji="1" lang="en-US" altLang="ja-JP" sz="1400" dirty="0">
-                          <a:latin typeface="+mn-ea"/>
-                          <a:ea typeface="+mn-ea"/>
+                        <a:rPr kumimoji="1" lang="en-US" altLang="ja-JP" sz="1100" dirty="0">
+                          <a:latin typeface="メイリオ" panose="020B0604030504040204" pitchFamily="50" charset="-128"/>
+                          <a:ea typeface="メイリオ" panose="020B0604030504040204" pitchFamily="50" charset="-128"/>
                         </a:rPr>
                         <a:t>11</a:t>
                       </a:r>
-                      <a:endParaRPr kumimoji="1" lang="ja-JP" altLang="en-US" sz="1400" dirty="0">
-                        <a:latin typeface="+mn-ea"/>
-                        <a:ea typeface="+mn-ea"/>
+                      <a:endParaRPr kumimoji="1" lang="ja-JP" altLang="en-US" sz="1100" dirty="0">
+                        <a:latin typeface="メイリオ" panose="020B0604030504040204" pitchFamily="50" charset="-128"/>
+                        <a:ea typeface="メイリオ" panose="020B0604030504040204" pitchFamily="50" charset="-128"/>
                       </a:endParaRPr>
                     </a:p>
                   </a:txBody>
-                  <a:tcPr/>
+                  <a:tcPr anchor="ctr"/>
                 </a:tc>
                 <a:tc>
                   <a:txBody>
@@ -10776,22 +11049,22 @@
                     <a:lstStyle/>
                     <a:p>
                       <a:r>
-                        <a:rPr kumimoji="1" lang="en-US" altLang="ja-JP" sz="1400" dirty="0">
-                          <a:latin typeface="+mn-ea"/>
-                          <a:ea typeface="+mn-ea"/>
+                        <a:rPr kumimoji="1" lang="en-US" altLang="ja-JP" sz="1100" dirty="0">
+                          <a:latin typeface="メイリオ" panose="020B0604030504040204" pitchFamily="50" charset="-128"/>
+                          <a:ea typeface="メイリオ" panose="020B0604030504040204" pitchFamily="50" charset="-128"/>
                         </a:rPr>
                         <a:t>EM</a:t>
                       </a:r>
                       <a:r>
-                        <a:rPr kumimoji="1" lang="ja-JP" altLang="en-US" sz="1400" dirty="0">
-                          <a:latin typeface="+mn-ea"/>
-                          <a:ea typeface="+mn-ea"/>
+                        <a:rPr kumimoji="1" lang="ja-JP" altLang="en-US" sz="1100" dirty="0">
+                          <a:latin typeface="メイリオ" panose="020B0604030504040204" pitchFamily="50" charset="-128"/>
+                          <a:ea typeface="メイリオ" panose="020B0604030504040204" pitchFamily="50" charset="-128"/>
                         </a:rPr>
                         <a:t>システムズ</a:t>
                       </a:r>
                     </a:p>
                   </a:txBody>
-                  <a:tcPr/>
+                  <a:tcPr anchor="ctr"/>
                 </a:tc>
                 <a:tc>
                   <a:txBody>
@@ -10816,15 +11089,15 @@
                         <a:defRPr/>
                       </a:pPr>
                       <a:r>
-                        <a:rPr kumimoji="1" lang="ja-JP" altLang="en-US" sz="1400" dirty="0">
-                          <a:latin typeface="+mn-ea"/>
-                          <a:ea typeface="+mn-ea"/>
+                        <a:rPr kumimoji="1" lang="ja-JP" altLang="en-US" sz="1100" dirty="0">
+                          <a:latin typeface="メイリオ" panose="020B0604030504040204" pitchFamily="50" charset="-128"/>
+                          <a:ea typeface="メイリオ" panose="020B0604030504040204" pitchFamily="50" charset="-128"/>
                         </a:rPr>
                         <a:t>対応中</a:t>
                       </a:r>
                     </a:p>
                   </a:txBody>
-                  <a:tcPr/>
+                  <a:tcPr anchor="ctr"/>
                 </a:tc>
                 <a:extLst>
                   <a:ext uri="{0D108BD9-81ED-4DB2-BD59-A6C34878D82A}">
@@ -10840,19 +11113,19 @@
                     <a:p>
                       <a:pPr algn="r"/>
                       <a:r>
-                        <a:rPr kumimoji="1" lang="en-US" altLang="ja-JP" sz="1400" dirty="0">
-                          <a:latin typeface="+mn-ea"/>
-                          <a:ea typeface="+mn-ea"/>
+                        <a:rPr kumimoji="1" lang="en-US" altLang="ja-JP" sz="1100" dirty="0">
+                          <a:latin typeface="メイリオ" panose="020B0604030504040204" pitchFamily="50" charset="-128"/>
+                          <a:ea typeface="メイリオ" panose="020B0604030504040204" pitchFamily="50" charset="-128"/>
                         </a:rPr>
                         <a:t>12</a:t>
                       </a:r>
-                      <a:endParaRPr kumimoji="1" lang="ja-JP" altLang="en-US" sz="1400" dirty="0">
-                        <a:latin typeface="+mn-ea"/>
-                        <a:ea typeface="+mn-ea"/>
+                      <a:endParaRPr kumimoji="1" lang="ja-JP" altLang="en-US" sz="1100" dirty="0">
+                        <a:latin typeface="メイリオ" panose="020B0604030504040204" pitchFamily="50" charset="-128"/>
+                        <a:ea typeface="メイリオ" panose="020B0604030504040204" pitchFamily="50" charset="-128"/>
                       </a:endParaRPr>
                     </a:p>
                   </a:txBody>
-                  <a:tcPr/>
+                  <a:tcPr anchor="ctr"/>
                 </a:tc>
                 <a:tc>
                   <a:txBody>
@@ -10860,19 +11133,19 @@
                     <a:lstStyle/>
                     <a:p>
                       <a:r>
-                        <a:rPr kumimoji="1" lang="zh-TW" altLang="en-US" sz="1400" dirty="0">
-                          <a:latin typeface="+mn-ea"/>
-                          <a:ea typeface="+mn-ea"/>
+                        <a:rPr kumimoji="1" lang="zh-TW" altLang="en-US" sz="1100" dirty="0">
+                          <a:latin typeface="メイリオ" panose="020B0604030504040204" pitchFamily="50" charset="-128"/>
+                          <a:ea typeface="メイリオ" panose="020B0604030504040204" pitchFamily="50" charset="-128"/>
                         </a:rPr>
                         <a:t>日本漢字能力検定協会</a:t>
                       </a:r>
-                      <a:endParaRPr kumimoji="1" lang="ja-JP" altLang="en-US" sz="1400" dirty="0">
-                        <a:latin typeface="+mn-ea"/>
-                        <a:ea typeface="+mn-ea"/>
+                      <a:endParaRPr kumimoji="1" lang="ja-JP" altLang="en-US" sz="1100" dirty="0">
+                        <a:latin typeface="メイリオ" panose="020B0604030504040204" pitchFamily="50" charset="-128"/>
+                        <a:ea typeface="メイリオ" panose="020B0604030504040204" pitchFamily="50" charset="-128"/>
                       </a:endParaRPr>
                     </a:p>
                   </a:txBody>
-                  <a:tcPr/>
+                  <a:tcPr anchor="ctr"/>
                 </a:tc>
                 <a:tc>
                   <a:txBody>
@@ -10897,15 +11170,15 @@
                         <a:defRPr/>
                       </a:pPr>
                       <a:r>
-                        <a:rPr kumimoji="1" lang="ja-JP" altLang="en-US" sz="1400" dirty="0">
-                          <a:latin typeface="+mn-ea"/>
-                          <a:ea typeface="+mn-ea"/>
+                        <a:rPr kumimoji="1" lang="ja-JP" altLang="en-US" sz="1100" dirty="0">
+                          <a:latin typeface="メイリオ" panose="020B0604030504040204" pitchFamily="50" charset="-128"/>
+                          <a:ea typeface="メイリオ" panose="020B0604030504040204" pitchFamily="50" charset="-128"/>
                         </a:rPr>
                         <a:t>完了</a:t>
                       </a:r>
                     </a:p>
                   </a:txBody>
-                  <a:tcPr/>
+                  <a:tcPr anchor="ctr"/>
                 </a:tc>
                 <a:extLst>
                   <a:ext uri="{0D108BD9-81ED-4DB2-BD59-A6C34878D82A}">
@@ -10921,19 +11194,19 @@
                     <a:p>
                       <a:pPr algn="r"/>
                       <a:r>
-                        <a:rPr kumimoji="1" lang="en-US" altLang="ja-JP" sz="1400" dirty="0">
-                          <a:latin typeface="+mn-ea"/>
-                          <a:ea typeface="+mn-ea"/>
+                        <a:rPr kumimoji="1" lang="en-US" altLang="ja-JP" sz="1100" dirty="0">
+                          <a:latin typeface="メイリオ" panose="020B0604030504040204" pitchFamily="50" charset="-128"/>
+                          <a:ea typeface="メイリオ" panose="020B0604030504040204" pitchFamily="50" charset="-128"/>
                         </a:rPr>
                         <a:t>13</a:t>
                       </a:r>
-                      <a:endParaRPr kumimoji="1" lang="ja-JP" altLang="en-US" sz="1400" dirty="0">
-                        <a:latin typeface="+mn-ea"/>
-                        <a:ea typeface="+mn-ea"/>
+                      <a:endParaRPr kumimoji="1" lang="ja-JP" altLang="en-US" sz="1100" dirty="0">
+                        <a:latin typeface="メイリオ" panose="020B0604030504040204" pitchFamily="50" charset="-128"/>
+                        <a:ea typeface="メイリオ" panose="020B0604030504040204" pitchFamily="50" charset="-128"/>
                       </a:endParaRPr>
                     </a:p>
                   </a:txBody>
-                  <a:tcPr/>
+                  <a:tcPr anchor="ctr"/>
                 </a:tc>
                 <a:tc>
                   <a:txBody>
@@ -10941,15 +11214,15 @@
                     <a:lstStyle/>
                     <a:p>
                       <a:r>
-                        <a:rPr kumimoji="1" lang="ja-JP" altLang="en-US" sz="1400" dirty="0">
-                          <a:latin typeface="+mn-ea"/>
-                          <a:ea typeface="+mn-ea"/>
+                        <a:rPr kumimoji="1" lang="ja-JP" altLang="en-US" sz="1100" dirty="0">
+                          <a:latin typeface="メイリオ" panose="020B0604030504040204" pitchFamily="50" charset="-128"/>
+                          <a:ea typeface="メイリオ" panose="020B0604030504040204" pitchFamily="50" charset="-128"/>
                         </a:rPr>
                         <a:t>ヤーマン</a:t>
                       </a:r>
                     </a:p>
                   </a:txBody>
-                  <a:tcPr/>
+                  <a:tcPr anchor="ctr"/>
                 </a:tc>
                 <a:tc>
                   <a:txBody>
@@ -10974,15 +11247,22 @@
                         <a:defRPr/>
                       </a:pPr>
                       <a:r>
-                        <a:rPr kumimoji="1" lang="ja-JP" altLang="en-US" sz="1400" dirty="0">
-                          <a:latin typeface="+mn-ea"/>
-                          <a:ea typeface="+mn-ea"/>
-                        </a:rPr>
-                        <a:t>完了</a:t>
-                      </a:r>
-                    </a:p>
-                  </a:txBody>
-                  <a:tcPr/>
+                        <a:rPr kumimoji="1" lang="en-US" altLang="ja-JP" sz="1100" dirty="0">
+                          <a:latin typeface="メイリオ" panose="020B0604030504040204" pitchFamily="50" charset="-128"/>
+                          <a:ea typeface="メイリオ" panose="020B0604030504040204" pitchFamily="50" charset="-128"/>
+                        </a:rPr>
+                        <a:t>7/29</a:t>
+                      </a:r>
+                      <a:r>
+                        <a:rPr kumimoji="1" lang="ja-JP" altLang="en-US" sz="1100" dirty="0">
+                          <a:latin typeface="メイリオ" panose="020B0604030504040204" pitchFamily="50" charset="-128"/>
+                          <a:ea typeface="メイリオ" panose="020B0604030504040204" pitchFamily="50" charset="-128"/>
+                        </a:rPr>
+                        <a:t>反映予定</a:t>
+                      </a:r>
+                    </a:p>
+                  </a:txBody>
+                  <a:tcPr anchor="ctr"/>
                 </a:tc>
                 <a:extLst>
                   <a:ext uri="{0D108BD9-81ED-4DB2-BD59-A6C34878D82A}">
@@ -10997,19 +11277,19 @@
                     <a:lstStyle/>
                     <a:p>
                       <a:r>
-                        <a:rPr kumimoji="1" lang="en-US" altLang="ja-JP" sz="1400" dirty="0">
-                          <a:latin typeface="+mn-ea"/>
-                          <a:ea typeface="+mn-ea"/>
+                        <a:rPr kumimoji="1" lang="en-US" altLang="ja-JP" sz="1100" dirty="0">
+                          <a:latin typeface="メイリオ" panose="020B0604030504040204" pitchFamily="50" charset="-128"/>
+                          <a:ea typeface="メイリオ" panose="020B0604030504040204" pitchFamily="50" charset="-128"/>
                         </a:rPr>
                         <a:t>14</a:t>
                       </a:r>
-                      <a:endParaRPr kumimoji="1" lang="ja-JP" altLang="en-US" sz="1400" dirty="0">
-                        <a:latin typeface="+mn-ea"/>
-                        <a:ea typeface="+mn-ea"/>
+                      <a:endParaRPr kumimoji="1" lang="ja-JP" altLang="en-US" sz="1100" dirty="0">
+                        <a:latin typeface="メイリオ" panose="020B0604030504040204" pitchFamily="50" charset="-128"/>
+                        <a:ea typeface="メイリオ" panose="020B0604030504040204" pitchFamily="50" charset="-128"/>
                       </a:endParaRPr>
                     </a:p>
                   </a:txBody>
-                  <a:tcPr/>
+                  <a:tcPr anchor="ctr"/>
                 </a:tc>
                 <a:tc>
                   <a:txBody>
@@ -11017,15 +11297,15 @@
                     <a:lstStyle/>
                     <a:p>
                       <a:r>
-                        <a:rPr kumimoji="1" lang="ja-JP" altLang="en-US" sz="1400" dirty="0">
-                          <a:latin typeface="+mn-ea"/>
-                          <a:ea typeface="+mn-ea"/>
+                        <a:rPr kumimoji="1" lang="ja-JP" altLang="en-US" sz="1100" dirty="0">
+                          <a:latin typeface="メイリオ" panose="020B0604030504040204" pitchFamily="50" charset="-128"/>
+                          <a:ea typeface="メイリオ" panose="020B0604030504040204" pitchFamily="50" charset="-128"/>
                         </a:rPr>
                         <a:t>ニトムズ</a:t>
                       </a:r>
                     </a:p>
                   </a:txBody>
-                  <a:tcPr/>
+                  <a:tcPr anchor="ctr"/>
                 </a:tc>
                 <a:tc>
                   <a:txBody>
@@ -11050,15 +11330,15 @@
                         <a:defRPr/>
                       </a:pPr>
                       <a:r>
-                        <a:rPr kumimoji="1" lang="ja-JP" altLang="en-US" sz="1400" dirty="0">
-                          <a:latin typeface="+mn-ea"/>
-                          <a:ea typeface="+mn-ea"/>
+                        <a:rPr kumimoji="1" lang="ja-JP" altLang="en-US" sz="1100" dirty="0">
+                          <a:latin typeface="メイリオ" panose="020B0604030504040204" pitchFamily="50" charset="-128"/>
+                          <a:ea typeface="メイリオ" panose="020B0604030504040204" pitchFamily="50" charset="-128"/>
                         </a:rPr>
                         <a:t>完了</a:t>
                       </a:r>
                     </a:p>
                   </a:txBody>
-                  <a:tcPr/>
+                  <a:tcPr anchor="ctr"/>
                 </a:tc>
                 <a:extLst>
                   <a:ext uri="{0D108BD9-81ED-4DB2-BD59-A6C34878D82A}">
@@ -11073,19 +11353,19 @@
                     <a:lstStyle/>
                     <a:p>
                       <a:r>
-                        <a:rPr kumimoji="1" lang="en-US" altLang="ja-JP" sz="1400" dirty="0">
-                          <a:latin typeface="+mn-ea"/>
-                          <a:ea typeface="+mn-ea"/>
+                        <a:rPr kumimoji="1" lang="en-US" altLang="ja-JP" sz="1100" dirty="0">
+                          <a:latin typeface="メイリオ" panose="020B0604030504040204" pitchFamily="50" charset="-128"/>
+                          <a:ea typeface="メイリオ" panose="020B0604030504040204" pitchFamily="50" charset="-128"/>
                         </a:rPr>
                         <a:t>15</a:t>
                       </a:r>
-                      <a:endParaRPr kumimoji="1" lang="ja-JP" altLang="en-US" sz="1400" dirty="0">
-                        <a:latin typeface="+mn-ea"/>
-                        <a:ea typeface="+mn-ea"/>
+                      <a:endParaRPr kumimoji="1" lang="ja-JP" altLang="en-US" sz="1100" dirty="0">
+                        <a:latin typeface="メイリオ" panose="020B0604030504040204" pitchFamily="50" charset="-128"/>
+                        <a:ea typeface="メイリオ" panose="020B0604030504040204" pitchFamily="50" charset="-128"/>
                       </a:endParaRPr>
                     </a:p>
                   </a:txBody>
-                  <a:tcPr/>
+                  <a:tcPr anchor="ctr"/>
                 </a:tc>
                 <a:tc>
                   <a:txBody>
@@ -11093,15 +11373,15 @@
                     <a:lstStyle/>
                     <a:p>
                       <a:r>
-                        <a:rPr kumimoji="1" lang="ja-JP" altLang="en-US" sz="1400" dirty="0">
-                          <a:latin typeface="+mn-ea"/>
-                          <a:ea typeface="+mn-ea"/>
+                        <a:rPr kumimoji="1" lang="ja-JP" altLang="en-US" sz="1100" dirty="0">
+                          <a:latin typeface="メイリオ" panose="020B0604030504040204" pitchFamily="50" charset="-128"/>
+                          <a:ea typeface="メイリオ" panose="020B0604030504040204" pitchFamily="50" charset="-128"/>
                         </a:rPr>
                         <a:t>ティーガイア</a:t>
                       </a:r>
                     </a:p>
                   </a:txBody>
-                  <a:tcPr/>
+                  <a:tcPr anchor="ctr"/>
                 </a:tc>
                 <a:tc>
                   <a:txBody>
@@ -11126,15 +11406,15 @@
                         <a:defRPr/>
                       </a:pPr>
                       <a:r>
-                        <a:rPr kumimoji="1" lang="ja-JP" altLang="en-US" sz="1400" dirty="0">
-                          <a:latin typeface="+mn-ea"/>
-                          <a:ea typeface="+mn-ea"/>
+                        <a:rPr kumimoji="1" lang="ja-JP" altLang="en-US" sz="1100" dirty="0">
+                          <a:latin typeface="メイリオ" panose="020B0604030504040204" pitchFamily="50" charset="-128"/>
+                          <a:ea typeface="メイリオ" panose="020B0604030504040204" pitchFamily="50" charset="-128"/>
                         </a:rPr>
                         <a:t>完了</a:t>
                       </a:r>
                     </a:p>
                   </a:txBody>
-                  <a:tcPr/>
+                  <a:tcPr anchor="ctr"/>
                 </a:tc>
                 <a:extLst>
                   <a:ext uri="{0D108BD9-81ED-4DB2-BD59-A6C34878D82A}">
@@ -11149,19 +11429,19 @@
                     <a:lstStyle/>
                     <a:p>
                       <a:r>
-                        <a:rPr kumimoji="1" lang="en-US" altLang="ja-JP" sz="1400" dirty="0">
-                          <a:latin typeface="+mn-ea"/>
-                          <a:ea typeface="+mn-ea"/>
+                        <a:rPr kumimoji="1" lang="en-US" altLang="ja-JP" sz="1100" dirty="0">
+                          <a:latin typeface="メイリオ" panose="020B0604030504040204" pitchFamily="50" charset="-128"/>
+                          <a:ea typeface="メイリオ" panose="020B0604030504040204" pitchFamily="50" charset="-128"/>
                         </a:rPr>
                         <a:t>16</a:t>
                       </a:r>
-                      <a:endParaRPr kumimoji="1" lang="ja-JP" altLang="en-US" sz="1400" dirty="0">
-                        <a:latin typeface="+mn-ea"/>
-                        <a:ea typeface="+mn-ea"/>
+                      <a:endParaRPr kumimoji="1" lang="ja-JP" altLang="en-US" sz="1100" dirty="0">
+                        <a:latin typeface="メイリオ" panose="020B0604030504040204" pitchFamily="50" charset="-128"/>
+                        <a:ea typeface="メイリオ" panose="020B0604030504040204" pitchFamily="50" charset="-128"/>
                       </a:endParaRPr>
                     </a:p>
                   </a:txBody>
-                  <a:tcPr/>
+                  <a:tcPr anchor="ctr"/>
                 </a:tc>
                 <a:tc>
                   <a:txBody>
@@ -11169,15 +11449,15 @@
                     <a:lstStyle/>
                     <a:p>
                       <a:r>
-                        <a:rPr kumimoji="1" lang="ja-JP" altLang="en-US" sz="1400" dirty="0">
-                          <a:latin typeface="+mn-ea"/>
-                          <a:ea typeface="+mn-ea"/>
+                        <a:rPr kumimoji="1" lang="ja-JP" altLang="en-US" sz="1100" dirty="0">
+                          <a:latin typeface="メイリオ" panose="020B0604030504040204" pitchFamily="50" charset="-128"/>
+                          <a:ea typeface="メイリオ" panose="020B0604030504040204" pitchFamily="50" charset="-128"/>
                         </a:rPr>
                         <a:t>アシックス商事</a:t>
                       </a:r>
                     </a:p>
                   </a:txBody>
-                  <a:tcPr/>
+                  <a:tcPr anchor="ctr"/>
                 </a:tc>
                 <a:tc>
                   <a:txBody>
@@ -11202,15 +11482,15 @@
                         <a:defRPr/>
                       </a:pPr>
                       <a:r>
-                        <a:rPr kumimoji="1" lang="ja-JP" altLang="en-US" sz="1400" dirty="0">
-                          <a:latin typeface="+mn-ea"/>
-                          <a:ea typeface="+mn-ea"/>
+                        <a:rPr kumimoji="1" lang="ja-JP" altLang="en-US" sz="1100" dirty="0">
+                          <a:latin typeface="メイリオ" panose="020B0604030504040204" pitchFamily="50" charset="-128"/>
+                          <a:ea typeface="メイリオ" panose="020B0604030504040204" pitchFamily="50" charset="-128"/>
                         </a:rPr>
                         <a:t>対象外</a:t>
                       </a:r>
                     </a:p>
                   </a:txBody>
-                  <a:tcPr/>
+                  <a:tcPr anchor="ctr"/>
                 </a:tc>
                 <a:extLst>
                   <a:ext uri="{0D108BD9-81ED-4DB2-BD59-A6C34878D82A}">
@@ -11225,19 +11505,19 @@
                     <a:lstStyle/>
                     <a:p>
                       <a:r>
-                        <a:rPr kumimoji="1" lang="en-US" altLang="ja-JP" sz="1400" dirty="0">
-                          <a:latin typeface="+mn-ea"/>
-                          <a:ea typeface="+mn-ea"/>
+                        <a:rPr kumimoji="1" lang="en-US" altLang="ja-JP" sz="1100" dirty="0">
+                          <a:latin typeface="メイリオ" panose="020B0604030504040204" pitchFamily="50" charset="-128"/>
+                          <a:ea typeface="メイリオ" panose="020B0604030504040204" pitchFamily="50" charset="-128"/>
                         </a:rPr>
                         <a:t>17</a:t>
                       </a:r>
-                      <a:endParaRPr kumimoji="1" lang="ja-JP" altLang="en-US" sz="1400" dirty="0">
-                        <a:latin typeface="+mn-ea"/>
-                        <a:ea typeface="+mn-ea"/>
+                      <a:endParaRPr kumimoji="1" lang="ja-JP" altLang="en-US" sz="1100" dirty="0">
+                        <a:latin typeface="メイリオ" panose="020B0604030504040204" pitchFamily="50" charset="-128"/>
+                        <a:ea typeface="メイリオ" panose="020B0604030504040204" pitchFamily="50" charset="-128"/>
                       </a:endParaRPr>
                     </a:p>
                   </a:txBody>
-                  <a:tcPr/>
+                  <a:tcPr anchor="ctr"/>
                 </a:tc>
                 <a:tc>
                   <a:txBody>
@@ -11262,15 +11542,15 @@
                         <a:defRPr/>
                       </a:pPr>
                       <a:r>
-                        <a:rPr kumimoji="1" lang="ja-JP" altLang="en-US" sz="1400" dirty="0">
-                          <a:latin typeface="+mn-ea"/>
-                          <a:ea typeface="+mn-ea"/>
+                        <a:rPr kumimoji="1" lang="ja-JP" altLang="en-US" sz="1100" dirty="0">
+                          <a:latin typeface="メイリオ" panose="020B0604030504040204" pitchFamily="50" charset="-128"/>
+                          <a:ea typeface="メイリオ" panose="020B0604030504040204" pitchFamily="50" charset="-128"/>
                         </a:rPr>
                         <a:t>パシフィックプロダクツ</a:t>
                       </a:r>
                     </a:p>
                   </a:txBody>
-                  <a:tcPr/>
+                  <a:tcPr anchor="ctr"/>
                 </a:tc>
                 <a:tc>
                   <a:txBody>
@@ -11295,15 +11575,15 @@
                         <a:defRPr/>
                       </a:pPr>
                       <a:r>
-                        <a:rPr kumimoji="1" lang="ja-JP" altLang="en-US" sz="1400" dirty="0">
-                          <a:latin typeface="+mn-ea"/>
-                          <a:ea typeface="+mn-ea"/>
+                        <a:rPr kumimoji="1" lang="ja-JP" altLang="en-US" sz="1100" dirty="0">
+                          <a:latin typeface="メイリオ" panose="020B0604030504040204" pitchFamily="50" charset="-128"/>
+                          <a:ea typeface="メイリオ" panose="020B0604030504040204" pitchFamily="50" charset="-128"/>
                         </a:rPr>
                         <a:t>完了</a:t>
                       </a:r>
                     </a:p>
                   </a:txBody>
-                  <a:tcPr/>
+                  <a:tcPr anchor="ctr"/>
                 </a:tc>
                 <a:extLst>
                   <a:ext uri="{0D108BD9-81ED-4DB2-BD59-A6C34878D82A}">
@@ -11318,19 +11598,19 @@
                     <a:lstStyle/>
                     <a:p>
                       <a:r>
-                        <a:rPr kumimoji="1" lang="en-US" altLang="ja-JP" sz="1400" dirty="0">
-                          <a:latin typeface="+mn-ea"/>
-                          <a:ea typeface="+mn-ea"/>
+                        <a:rPr kumimoji="1" lang="en-US" altLang="ja-JP" sz="1100" dirty="0">
+                          <a:latin typeface="メイリオ" panose="020B0604030504040204" pitchFamily="50" charset="-128"/>
+                          <a:ea typeface="メイリオ" panose="020B0604030504040204" pitchFamily="50" charset="-128"/>
                         </a:rPr>
                         <a:t>18</a:t>
                       </a:r>
-                      <a:endParaRPr kumimoji="1" lang="ja-JP" altLang="en-US" sz="1400" dirty="0">
-                        <a:latin typeface="+mn-ea"/>
-                        <a:ea typeface="+mn-ea"/>
+                      <a:endParaRPr kumimoji="1" lang="ja-JP" altLang="en-US" sz="1100" dirty="0">
+                        <a:latin typeface="メイリオ" panose="020B0604030504040204" pitchFamily="50" charset="-128"/>
+                        <a:ea typeface="メイリオ" panose="020B0604030504040204" pitchFamily="50" charset="-128"/>
                       </a:endParaRPr>
                     </a:p>
                   </a:txBody>
-                  <a:tcPr/>
+                  <a:tcPr anchor="ctr"/>
                 </a:tc>
                 <a:tc>
                   <a:txBody>
@@ -11355,15 +11635,15 @@
                         <a:defRPr/>
                       </a:pPr>
                       <a:r>
-                        <a:rPr kumimoji="1" lang="ja-JP" altLang="en-US" sz="1400" dirty="0">
-                          <a:latin typeface="+mn-ea"/>
-                          <a:ea typeface="+mn-ea"/>
+                        <a:rPr kumimoji="1" lang="ja-JP" altLang="en-US" sz="1100" dirty="0">
+                          <a:latin typeface="メイリオ" panose="020B0604030504040204" pitchFamily="50" charset="-128"/>
+                          <a:ea typeface="メイリオ" panose="020B0604030504040204" pitchFamily="50" charset="-128"/>
                         </a:rPr>
                         <a:t>紀伊國屋書店</a:t>
                       </a:r>
                     </a:p>
                   </a:txBody>
-                  <a:tcPr/>
+                  <a:tcPr anchor="ctr"/>
                 </a:tc>
                 <a:tc>
                   <a:txBody>
@@ -11388,15 +11668,15 @@
                         <a:defRPr/>
                       </a:pPr>
                       <a:r>
-                        <a:rPr kumimoji="1" lang="ja-JP" altLang="en-US" sz="1400" dirty="0">
-                          <a:latin typeface="+mn-ea"/>
-                          <a:ea typeface="+mn-ea"/>
+                        <a:rPr kumimoji="1" lang="ja-JP" altLang="en-US" sz="1100" dirty="0">
+                          <a:latin typeface="メイリオ" panose="020B0604030504040204" pitchFamily="50" charset="-128"/>
+                          <a:ea typeface="メイリオ" panose="020B0604030504040204" pitchFamily="50" charset="-128"/>
                         </a:rPr>
                         <a:t>対象外</a:t>
                       </a:r>
                     </a:p>
                   </a:txBody>
-                  <a:tcPr/>
+                  <a:tcPr anchor="ctr"/>
                 </a:tc>
                 <a:extLst>
                   <a:ext uri="{0D108BD9-81ED-4DB2-BD59-A6C34878D82A}">
@@ -11487,7 +11767,7 @@
         <p:spPr>
           <a:xfrm>
             <a:off x="6105128" y="4869160"/>
-            <a:ext cx="1980681" cy="830997"/>
+            <a:ext cx="1980681" cy="600164"/>
           </a:xfrm>
           <a:prstGeom prst="rect">
             <a:avLst/>
@@ -11501,7 +11781,7 @@
           <a:lstStyle/>
           <a:p>
             <a:r>
-              <a:rPr lang="ja-JP" altLang="en-US" sz="1600" dirty="0">
+              <a:rPr lang="ja-JP" altLang="en-US" sz="1100" dirty="0">
                 <a:latin typeface="メイリオ"/>
                 <a:ea typeface="メイリオ"/>
                 <a:cs typeface="メイリオ"/>
@@ -11509,7 +11789,7 @@
               <a:t>完了：</a:t>
             </a:r>
             <a:r>
-              <a:rPr lang="en-US" altLang="ja-JP" sz="1600" dirty="0">
+              <a:rPr lang="en-US" altLang="ja-JP" sz="1100" dirty="0">
                 <a:latin typeface="メイリオ"/>
                 <a:ea typeface="メイリオ"/>
                 <a:cs typeface="メイリオ"/>
@@ -11519,7 +11799,7 @@
           </a:p>
           <a:p>
             <a:r>
-              <a:rPr lang="ja-JP" altLang="en-US" sz="1600" dirty="0">
+              <a:rPr lang="ja-JP" altLang="en-US" sz="1100" dirty="0">
                 <a:latin typeface="メイリオ"/>
                 <a:ea typeface="メイリオ"/>
                 <a:cs typeface="メイリオ"/>
@@ -11527,7 +11807,7 @@
               <a:t>対応中：</a:t>
             </a:r>
             <a:r>
-              <a:rPr lang="en-US" altLang="ja-JP" sz="1600" dirty="0">
+              <a:rPr lang="en-US" altLang="ja-JP" sz="1100" dirty="0">
                 <a:latin typeface="メイリオ"/>
                 <a:ea typeface="メイリオ"/>
                 <a:cs typeface="メイリオ"/>
@@ -11537,7 +11817,7 @@
           </a:p>
           <a:p>
             <a:r>
-              <a:rPr lang="ja-JP" altLang="en-US" sz="1600" dirty="0">
+              <a:rPr lang="ja-JP" altLang="en-US" sz="1100" dirty="0">
                 <a:latin typeface="メイリオ"/>
                 <a:ea typeface="メイリオ"/>
                 <a:cs typeface="メイリオ"/>
@@ -11545,7 +11825,7 @@
               <a:t>対象外：</a:t>
             </a:r>
             <a:r>
-              <a:rPr lang="en-US" altLang="ja-JP" sz="1600" dirty="0">
+              <a:rPr lang="en-US" altLang="ja-JP" sz="1100" dirty="0">
                 <a:latin typeface="メイリオ"/>
                 <a:ea typeface="メイリオ"/>
                 <a:cs typeface="メイリオ"/>
@@ -11709,7 +11989,15 @@
             </a:r>
             <a:r>
               <a:rPr lang="ja-JP" altLang="en-US" sz="2000" dirty="0"/>
-              <a:t>バージョンアップ状況について</a:t>
+              <a:t>バージョンアップ状況について（</a:t>
+            </a:r>
+            <a:r>
+              <a:rPr lang="en-US" altLang="ja-JP" sz="2000" dirty="0"/>
+              <a:t>1/2</a:t>
+            </a:r>
+            <a:r>
+              <a:rPr lang="ja-JP" altLang="en-US" sz="2000" dirty="0"/>
+              <a:t>）</a:t>
             </a:r>
             <a:endParaRPr lang="ja-JP" altLang="en-US" sz="2000" dirty="0">
               <a:latin typeface="メイリオ" pitchFamily="50" charset="-128"/>
@@ -11727,7 +12015,7 @@
         </p:nvSpPr>
         <p:spPr>
           <a:xfrm>
-            <a:off x="650000" y="700000"/>
+            <a:off x="560512" y="870956"/>
             <a:ext cx="9000000" cy="260000"/>
           </a:xfrm>
           <a:prstGeom prst="rect">
@@ -11768,10 +12056,16 @@
           <p:cNvGraphicFramePr>
             <a:graphicFrameLocks noGrp="1"/>
           </p:cNvGraphicFramePr>
-          <p:nvPr/>
+          <p:nvPr>
+            <p:extLst>
+              <p:ext uri="{D42A27DB-BD31-4B8C-83A1-F6EECF244321}">
+                <p14:modId xmlns:p14="http://schemas.microsoft.com/office/powerpoint/2010/main" val="417785577"/>
+              </p:ext>
+            </p:extLst>
+          </p:nvPr>
         </p:nvGraphicFramePr>
         <p:xfrm>
-          <a:off x="650000" y="1000000"/>
+          <a:off x="560512" y="1170956"/>
           <a:ext cx="8600000" cy="1400000"/>
         </p:xfrm>
         <a:graphic>
@@ -11781,10 +12075,34 @@
                 <a:tableStyleId>{5C22544A-7EE6-4342-B048-85BDC9FD1C3A}</a:tableStyleId>
               </a:tblPr>
               <a:tblGrid>
-                <a:gridCol w="2150000"/>
-                <a:gridCol w="2150000"/>
-                <a:gridCol w="2150000"/>
-                <a:gridCol w="2150000"/>
+                <a:gridCol w="2150000">
+                  <a:extLst>
+                    <a:ext uri="{9D8B030D-6E8A-4147-A177-3AD203B41FA5}">
+                      <a16:colId xmlns:a16="http://schemas.microsoft.com/office/drawing/2014/main" val="20000"/>
+                    </a:ext>
+                  </a:extLst>
+                </a:gridCol>
+                <a:gridCol w="2150000">
+                  <a:extLst>
+                    <a:ext uri="{9D8B030D-6E8A-4147-A177-3AD203B41FA5}">
+                      <a16:colId xmlns:a16="http://schemas.microsoft.com/office/drawing/2014/main" val="20001"/>
+                    </a:ext>
+                  </a:extLst>
+                </a:gridCol>
+                <a:gridCol w="2150000">
+                  <a:extLst>
+                    <a:ext uri="{9D8B030D-6E8A-4147-A177-3AD203B41FA5}">
+                      <a16:colId xmlns:a16="http://schemas.microsoft.com/office/drawing/2014/main" val="20002"/>
+                    </a:ext>
+                  </a:extLst>
+                </a:gridCol>
+                <a:gridCol w="2150000">
+                  <a:extLst>
+                    <a:ext uri="{9D8B030D-6E8A-4147-A177-3AD203B41FA5}">
+                      <a16:colId xmlns:a16="http://schemas.microsoft.com/office/drawing/2014/main" val="20003"/>
+                    </a:ext>
+                  </a:extLst>
+                </a:gridCol>
               </a:tblGrid>
               <a:tr h="350000">
                 <a:tc>
@@ -11883,6 +12201,11 @@
                     </a:solidFill>
                   </a:tcPr>
                 </a:tc>
+                <a:extLst>
+                  <a:ext uri="{0D108BD9-81ED-4DB2-BD59-A6C34878D82A}">
+                    <a16:rowId xmlns:a16="http://schemas.microsoft.com/office/drawing/2014/main" val="10000"/>
+                  </a:ext>
+                </a:extLst>
               </a:tr>
               <a:tr h="350000">
                 <a:tc>
@@ -11891,6 +12214,26 @@
                     <a:lstStyle/>
                     <a:p>
                       <a:pPr algn="l"/>
+                      <a:r>
+                        <a:rPr sz="1200" b="0" dirty="0">
+                          <a:solidFill>
+                            <a:srgbClr val="333333"/>
+                          </a:solidFill>
+                          <a:latin typeface="メイリオ"/>
+                          <a:ea typeface="メイリオ"/>
+                        </a:rPr>
+                        <a:t>Ruby</a:t>
+                      </a:r>
+                    </a:p>
+                  </a:txBody>
+                  <a:tcPr anchor="ctr"/>
+                </a:tc>
+                <a:tc>
+                  <a:txBody>
+                    <a:bodyPr/>
+                    <a:lstStyle/>
+                    <a:p>
+                      <a:pPr algn="ctr"/>
                       <a:r>
                         <a:rPr sz="1200" b="0">
                           <a:solidFill>
@@ -11899,7 +12242,27 @@
                           <a:latin typeface="メイリオ"/>
                           <a:ea typeface="メイリオ"/>
                         </a:rPr>
-                        <a:t>Ruby</a:t>
+                        <a:t>3.2.2</a:t>
+                      </a:r>
+                    </a:p>
+                  </a:txBody>
+                  <a:tcPr anchor="ctr"/>
+                </a:tc>
+                <a:tc>
+                  <a:txBody>
+                    <a:bodyPr/>
+                    <a:lstStyle/>
+                    <a:p>
+                      <a:pPr algn="ctr"/>
+                      <a:r>
+                        <a:rPr sz="1200" b="1">
+                          <a:solidFill>
+                            <a:srgbClr val="333333"/>
+                          </a:solidFill>
+                          <a:latin typeface="メイリオ"/>
+                          <a:ea typeface="メイリオ"/>
+                        </a:rPr>
+                        <a:t>3.4.9</a:t>
                       </a:r>
                     </a:p>
                   </a:txBody>
@@ -11919,11 +12282,66 @@
                           <a:latin typeface="メイリオ"/>
                           <a:ea typeface="メイリオ"/>
                         </a:rPr>
-                        <a:t>3.2.2</a:t>
+                        <a:t>2028/3/31</a:t>
                       </a:r>
                     </a:p>
                   </a:txBody>
                   <a:tcPr anchor="ctr"/>
+                </a:tc>
+                <a:extLst>
+                  <a:ext uri="{0D108BD9-81ED-4DB2-BD59-A6C34878D82A}">
+                    <a16:rowId xmlns:a16="http://schemas.microsoft.com/office/drawing/2014/main" val="10001"/>
+                  </a:ext>
+                </a:extLst>
+              </a:tr>
+              <a:tr h="350000">
+                <a:tc>
+                  <a:txBody>
+                    <a:bodyPr/>
+                    <a:lstStyle/>
+                    <a:p>
+                      <a:pPr algn="l"/>
+                      <a:r>
+                        <a:rPr sz="1200" b="0">
+                          <a:solidFill>
+                            <a:srgbClr val="333333"/>
+                          </a:solidFill>
+                          <a:latin typeface="メイリオ"/>
+                          <a:ea typeface="メイリオ"/>
+                        </a:rPr>
+                        <a:t>Rails</a:t>
+                      </a:r>
+                    </a:p>
+                  </a:txBody>
+                  <a:tcPr anchor="ctr">
+                    <a:solidFill>
+                      <a:srgbClr val="D6E3F0"/>
+                    </a:solidFill>
+                  </a:tcPr>
+                </a:tc>
+                <a:tc>
+                  <a:txBody>
+                    <a:bodyPr/>
+                    <a:lstStyle/>
+                    <a:p>
+                      <a:pPr algn="ctr"/>
+                      <a:r>
+                        <a:rPr sz="1200" b="0">
+                          <a:solidFill>
+                            <a:srgbClr val="333333"/>
+                          </a:solidFill>
+                          <a:latin typeface="メイリオ"/>
+                          <a:ea typeface="メイリオ"/>
+                        </a:rPr>
+                        <a:t>7.2.2</a:t>
+                      </a:r>
+                    </a:p>
+                  </a:txBody>
+                  <a:tcPr anchor="ctr">
+                    <a:solidFill>
+                      <a:srgbClr val="D6E3F0"/>
+                    </a:solidFill>
+                  </a:tcPr>
                 </a:tc>
                 <a:tc>
                   <a:txBody>
@@ -11939,11 +12357,15 @@
                           <a:latin typeface="メイリオ"/>
                           <a:ea typeface="メイリオ"/>
                         </a:rPr>
-                        <a:t>3.4.9</a:t>
-                      </a:r>
-                    </a:p>
-                  </a:txBody>
-                  <a:tcPr anchor="ctr"/>
+                        <a:t>8.1</a:t>
+                      </a:r>
+                    </a:p>
+                  </a:txBody>
+                  <a:tcPr anchor="ctr">
+                    <a:solidFill>
+                      <a:srgbClr val="D6E3F0"/>
+                    </a:solidFill>
+                  </a:tcPr>
                 </a:tc>
                 <a:tc>
                   <a:txBody>
@@ -11959,12 +12381,21 @@
                           <a:latin typeface="メイリオ"/>
                           <a:ea typeface="メイリオ"/>
                         </a:rPr>
-                        <a:t>2028/3/31</a:t>
-                      </a:r>
-                    </a:p>
-                  </a:txBody>
-                  <a:tcPr anchor="ctr"/>
-                </a:tc>
+                        <a:t>2027/10/10</a:t>
+                      </a:r>
+                    </a:p>
+                  </a:txBody>
+                  <a:tcPr anchor="ctr">
+                    <a:solidFill>
+                      <a:srgbClr val="D6E3F0"/>
+                    </a:solidFill>
+                  </a:tcPr>
+                </a:tc>
+                <a:extLst>
+                  <a:ext uri="{0D108BD9-81ED-4DB2-BD59-A6C34878D82A}">
+                    <a16:rowId xmlns:a16="http://schemas.microsoft.com/office/drawing/2014/main" val="10002"/>
+                  </a:ext>
+                </a:extLst>
               </a:tr>
               <a:tr h="350000">
                 <a:tc>
@@ -11981,15 +12412,11 @@
                           <a:latin typeface="メイリオ"/>
                           <a:ea typeface="メイリオ"/>
                         </a:rPr>
-                        <a:t>Rails</a:t>
-                      </a:r>
-                    </a:p>
-                  </a:txBody>
-                  <a:tcPr anchor="ctr">
-                    <a:solidFill>
-                      <a:srgbClr val="D6E3F0"/>
-                    </a:solidFill>
-                  </a:tcPr>
+                        <a:t>MariaDB</a:t>
+                      </a:r>
+                    </a:p>
+                  </a:txBody>
+                  <a:tcPr anchor="ctr"/>
                 </a:tc>
                 <a:tc>
                   <a:txBody>
@@ -12005,15 +12432,11 @@
                           <a:latin typeface="メイリオ"/>
                           <a:ea typeface="メイリオ"/>
                         </a:rPr>
-                        <a:t>7.2.2</a:t>
-                      </a:r>
-                    </a:p>
-                  </a:txBody>
-                  <a:tcPr anchor="ctr">
-                    <a:solidFill>
-                      <a:srgbClr val="D6E3F0"/>
-                    </a:solidFill>
-                  </a:tcPr>
+                        <a:t>10.6.22</a:t>
+                      </a:r>
+                    </a:p>
+                  </a:txBody>
+                  <a:tcPr anchor="ctr"/>
                 </a:tc>
                 <a:tc>
                   <a:txBody>
@@ -12029,15 +12452,11 @@
                           <a:latin typeface="メイリオ"/>
                           <a:ea typeface="メイリオ"/>
                         </a:rPr>
-                        <a:t>8.1</a:t>
-                      </a:r>
-                    </a:p>
-                  </a:txBody>
-                  <a:tcPr anchor="ctr">
-                    <a:solidFill>
-                      <a:srgbClr val="D6E3F0"/>
-                    </a:solidFill>
-                  </a:tcPr>
+                        <a:t>10.11 LTS</a:t>
+                      </a:r>
+                    </a:p>
+                  </a:txBody>
+                  <a:tcPr anchor="ctr"/>
                 </a:tc>
                 <a:tc>
                   <a:txBody>
@@ -12046,105 +12465,24 @@
                     <a:p>
                       <a:pPr algn="ctr"/>
                       <a:r>
-                        <a:rPr sz="1200" b="0">
+                        <a:rPr sz="1200" b="0" dirty="0">
                           <a:solidFill>
                             <a:srgbClr val="333333"/>
                           </a:solidFill>
                           <a:latin typeface="メイリオ"/>
                           <a:ea typeface="メイリオ"/>
                         </a:rPr>
-                        <a:t>2027/10/10</a:t>
-                      </a:r>
-                    </a:p>
-                  </a:txBody>
-                  <a:tcPr anchor="ctr">
-                    <a:solidFill>
-                      <a:srgbClr val="D6E3F0"/>
-                    </a:solidFill>
-                  </a:tcPr>
-                </a:tc>
-              </a:tr>
-              <a:tr h="350000">
-                <a:tc>
-                  <a:txBody>
-                    <a:bodyPr/>
-                    <a:lstStyle/>
-                    <a:p>
-                      <a:pPr algn="l"/>
-                      <a:r>
-                        <a:rPr sz="1200" b="0">
-                          <a:solidFill>
-                            <a:srgbClr val="333333"/>
-                          </a:solidFill>
-                          <a:latin typeface="メイリオ"/>
-                          <a:ea typeface="メイリオ"/>
-                        </a:rPr>
-                        <a:t>MariaDB</a:t>
+                        <a:t>2028/2/16</a:t>
                       </a:r>
                     </a:p>
                   </a:txBody>
                   <a:tcPr anchor="ctr"/>
                 </a:tc>
-                <a:tc>
-                  <a:txBody>
-                    <a:bodyPr/>
-                    <a:lstStyle/>
-                    <a:p>
-                      <a:pPr algn="ctr"/>
-                      <a:r>
-                        <a:rPr sz="1200" b="0">
-                          <a:solidFill>
-                            <a:srgbClr val="333333"/>
-                          </a:solidFill>
-                          <a:latin typeface="メイリオ"/>
-                          <a:ea typeface="メイリオ"/>
-                        </a:rPr>
-                        <a:t>10.6.22</a:t>
-                      </a:r>
-                    </a:p>
-                  </a:txBody>
-                  <a:tcPr anchor="ctr"/>
-                </a:tc>
-                <a:tc>
-                  <a:txBody>
-                    <a:bodyPr/>
-                    <a:lstStyle/>
-                    <a:p>
-                      <a:pPr algn="ctr"/>
-                      <a:r>
-                        <a:rPr sz="1200" b="1">
-                          <a:solidFill>
-                            <a:srgbClr val="333333"/>
-                          </a:solidFill>
-                          <a:latin typeface="メイリオ"/>
-                          <a:ea typeface="メイリオ"/>
-                        </a:rPr>
-                        <a:t>10.11 LTS</a:t>
-                      </a:r>
-                    </a:p>
-                  </a:txBody>
-                  <a:tcPr anchor="ctr"/>
-                </a:tc>
-                <a:tc>
-                  <a:txBody>
-                    <a:bodyPr/>
-                    <a:lstStyle/>
-                    <a:p>
-                      <a:pPr algn="ctr"/>
-                      <a:r>
-                        <a:rPr sz="1200" b="0">
-                          <a:solidFill>
-                            <a:srgbClr val="333333"/>
-                          </a:solidFill>
-                          <a:latin typeface="メイリオ"/>
-                          <a:ea typeface="メイリオ"/>
-                        </a:rPr>
-                        <a:t>2028/2/16</a:t>
-                      </a:r>
-                    </a:p>
-                  </a:txBody>
-                  <a:tcPr anchor="ctr"/>
-                </a:tc>
+                <a:extLst>
+                  <a:ext uri="{0D108BD9-81ED-4DB2-BD59-A6C34878D82A}">
+                    <a16:rowId xmlns:a16="http://schemas.microsoft.com/office/drawing/2014/main" val="10003"/>
+                  </a:ext>
+                </a:extLst>
               </a:tr>
             </a:tbl>
           </a:graphicData>
@@ -12158,8 +12496,8 @@
         </p:nvSpPr>
         <p:spPr>
           <a:xfrm>
-            <a:off x="650000" y="2600000"/>
-            <a:ext cx="9000000" cy="3200000"/>
+            <a:off x="560512" y="2770956"/>
+            <a:ext cx="9000000" cy="2026196"/>
           </a:xfrm>
           <a:prstGeom prst="rect">
             <a:avLst/>
@@ -12181,7 +12519,7 @@
               </a:spcAft>
             </a:pPr>
             <a:r>
-              <a:rPr sz="1400" b="1">
+              <a:rPr sz="1400" b="1" dirty="0">
                 <a:solidFill>
                   <a:srgbClr val="333333"/>
                 </a:solidFill>
@@ -12201,7 +12539,7 @@
               </a:spcAft>
             </a:pPr>
             <a:r>
-              <a:rPr sz="1300" b="0">
+              <a:rPr sz="1300" b="0" dirty="0">
                 <a:solidFill>
                   <a:srgbClr val="333333"/>
                 </a:solidFill>
@@ -12221,14 +12559,34 @@
               </a:spcAft>
             </a:pPr>
             <a:r>
-              <a:rPr sz="1300" b="0">
+              <a:rPr sz="1300" b="0" dirty="0">
                 <a:solidFill>
                   <a:srgbClr val="333333"/>
                 </a:solidFill>
                 <a:latin typeface="メイリオ"/>
                 <a:ea typeface="メイリオ"/>
               </a:rPr>
-              <a:t>・キャンドゥ／ポディウム：提供準備完了、顧客都合待ち</a:t>
+              <a:t>・キャンドゥ／ポディウム：提供準備完了、</a:t>
+            </a:r>
+            <a:r>
+              <a:rPr lang="ja-JP" altLang="en-US" sz="1300" b="0" dirty="0">
+                <a:solidFill>
+                  <a:srgbClr val="333333"/>
+                </a:solidFill>
+                <a:latin typeface="メイリオ"/>
+                <a:ea typeface="メイリオ"/>
+              </a:rPr>
+              <a:t>提供</a:t>
+            </a:r>
+            <a:r>
+              <a:rPr sz="1300" b="0" dirty="0">
+                <a:solidFill>
+                  <a:srgbClr val="333333"/>
+                </a:solidFill>
+                <a:latin typeface="メイリオ"/>
+                <a:ea typeface="メイリオ"/>
+              </a:rPr>
+              <a:t>待ち</a:t>
             </a:r>
           </a:p>
           <a:p>
@@ -12240,16 +12598,13 @@
                 <a:spcPts val="100"/>
               </a:spcAft>
             </a:pPr>
-            <a:r>
-              <a:rPr sz="800" b="0">
-                <a:solidFill>
-                  <a:srgbClr val="333333"/>
-                </a:solidFill>
-                <a:latin typeface="メイリオ"/>
-                <a:ea typeface="メイリオ"/>
-              </a:rPr>
-              <a:t/>
-            </a:r>
+            <a:endParaRPr sz="1300" b="0" dirty="0">
+              <a:solidFill>
+                <a:srgbClr val="333333"/>
+              </a:solidFill>
+              <a:latin typeface="メイリオ"/>
+              <a:ea typeface="メイリオ"/>
+            </a:endParaRPr>
           </a:p>
           <a:p>
             <a:pPr>
@@ -12261,7 +12616,7 @@
               </a:spcAft>
             </a:pPr>
             <a:r>
-              <a:rPr sz="1400" b="1">
+              <a:rPr sz="1400" b="1" dirty="0">
                 <a:solidFill>
                   <a:srgbClr val="333333"/>
                 </a:solidFill>
@@ -12281,7 +12636,7 @@
               </a:spcAft>
             </a:pPr>
             <a:r>
-              <a:rPr sz="1300" b="0">
+              <a:rPr sz="1300" b="0" dirty="0">
                 <a:solidFill>
                   <a:srgbClr val="333333"/>
                 </a:solidFill>
@@ -12301,7 +12656,7 @@
               </a:spcAft>
             </a:pPr>
             <a:r>
-              <a:rPr sz="1300" b="0">
+              <a:rPr sz="1300" b="0" dirty="0">
                 <a:solidFill>
                   <a:srgbClr val="C00000"/>
                 </a:solidFill>
@@ -12320,16 +12675,13 @@
                 <a:spcPts val="100"/>
               </a:spcAft>
             </a:pPr>
-            <a:r>
-              <a:rPr sz="800" b="0">
-                <a:solidFill>
-                  <a:srgbClr val="333333"/>
-                </a:solidFill>
-                <a:latin typeface="メイリオ"/>
-                <a:ea typeface="メイリオ"/>
-              </a:rPr>
-              <a:t/>
-            </a:r>
+            <a:endParaRPr sz="1300" b="0" dirty="0">
+              <a:solidFill>
+                <a:srgbClr val="C00000"/>
+              </a:solidFill>
+              <a:latin typeface="メイリオ"/>
+              <a:ea typeface="メイリオ"/>
+            </a:endParaRPr>
           </a:p>
           <a:p>
             <a:pPr>
@@ -12341,7 +12693,7 @@
               </a:spcAft>
             </a:pPr>
             <a:r>
-              <a:rPr sz="1300" b="0">
+              <a:rPr sz="1300" b="0" dirty="0">
                 <a:solidFill>
                   <a:srgbClr val="C00000"/>
                 </a:solidFill>
@@ -12367,21 +12719,34 @@
 </file>
 
 <file path=ppt/slides/slide14.xml><?xml version="1.0" encoding="utf-8"?>
-<p:sld xmlns:a="http://schemas.openxmlformats.org/drawingml/2006/main" xmlns:p="http://schemas.openxmlformats.org/presentationml/2006/main" xmlns:r="http://schemas.openxmlformats.org/officeDocument/2006/relationships">
+<p:sld xmlns:a="http://schemas.openxmlformats.org/drawingml/2006/main" xmlns:r="http://schemas.openxmlformats.org/officeDocument/2006/relationships" xmlns:p="http://schemas.openxmlformats.org/presentationml/2006/main">
   <p:cSld>
     <p:spTree>
       <p:nvGrpSpPr>
-        <p:cNvPr id="1" name=""/>
+        <p:cNvPr id="1" name="">
+          <a:extLst>
+            <a:ext uri="{FF2B5EF4-FFF2-40B4-BE49-F238E27FC236}">
+              <a16:creationId xmlns:a16="http://schemas.microsoft.com/office/drawing/2014/main" id="{8D916E8C-3A5A-5673-1F6C-E2675D786C93}"/>
+            </a:ext>
+          </a:extLst>
+        </p:cNvPr>
         <p:cNvGrpSpPr/>
         <p:nvPr/>
       </p:nvGrpSpPr>
-      <p:grpSpPr/>
+      <p:grpSpPr>
+        <a:xfrm>
+          <a:off x="0" y="0"/>
+          <a:ext cx="0" cy="0"/>
+          <a:chOff x="0" y="0"/>
+          <a:chExt cx="0" cy="0"/>
+        </a:xfrm>
+      </p:grpSpPr>
       <p:sp>
         <p:nvSpPr>
           <p:cNvPr id="2" name="Google Shape;152;p7">
             <a:extLst>
               <a:ext uri="{FF2B5EF4-FFF2-40B4-BE49-F238E27FC236}">
-                <a16:creationId xmlns:a16="http://schemas.microsoft.com/office/drawing/2014/main" id="{7C0885C2-88AC-DAC0-C4FE-135C29624CDD}"/>
+                <a16:creationId xmlns:a16="http://schemas.microsoft.com/office/drawing/2014/main" id="{D921DF44-EF51-FC7C-8257-9CEEE25DB1EF}"/>
               </a:ext>
             </a:extLst>
           </p:cNvPr>
@@ -12417,24 +12782,32 @@
               </a:lnSpc>
             </a:pPr>
             <a:r>
-              <a:rPr sz="1800" b="0">
-                <a:solidFill>
-                  <a:srgbClr val="333333"/>
-                </a:solidFill>
-                <a:latin typeface="メイリオ"/>
-                <a:ea typeface="メイリオ"/>
-              </a:rPr>
-              <a:t>5. </a:t>
-            </a:r>
-            <a:r>
-              <a:rPr sz="1600" b="0">
-                <a:solidFill>
-                  <a:srgbClr val="333333"/>
-                </a:solidFill>
-                <a:latin typeface="メイリオ"/>
-                <a:ea typeface="メイリオ"/>
-              </a:rPr>
-              <a:t>新パッケージのバージョンアップ状況について　その２</a:t>
+              <a:rPr lang="en-US" altLang="ja-JP" sz="2000" dirty="0">
+                <a:latin typeface="メイリオ" pitchFamily="50" charset="-128"/>
+                <a:ea typeface="メイリオ" pitchFamily="50" charset="-128"/>
+                <a:cs typeface="メイリオ" pitchFamily="50" charset="-128"/>
+              </a:rPr>
+              <a:t>5.</a:t>
+            </a:r>
+            <a:r>
+              <a:rPr lang="ja-JP" altLang="en-US" sz="2000" dirty="0">
+                <a:latin typeface="メイリオ" pitchFamily="50" charset="-128"/>
+                <a:ea typeface="メイリオ" pitchFamily="50" charset="-128"/>
+                <a:cs typeface="メイリオ" pitchFamily="50" charset="-128"/>
+              </a:rPr>
+              <a:t>新パッケージの</a:t>
+            </a:r>
+            <a:r>
+              <a:rPr lang="ja-JP" altLang="en-US" sz="2000" dirty="0"/>
+              <a:t>バージョンアップ状況について（</a:t>
+            </a:r>
+            <a:r>
+              <a:rPr lang="en-US" altLang="ja-JP" sz="2000" dirty="0"/>
+              <a:t>2/2</a:t>
+            </a:r>
+            <a:r>
+              <a:rPr lang="ja-JP" altLang="en-US" sz="2000" dirty="0"/>
+              <a:t>）</a:t>
             </a:r>
             <a:endParaRPr lang="ja-JP" altLang="en-US" sz="2000" dirty="0">
               <a:latin typeface="メイリオ" pitchFamily="50" charset="-128"/>
@@ -12446,13 +12819,19 @@
       </p:sp>
       <p:sp>
         <p:nvSpPr>
-          <p:cNvPr id="3" name="TextBox 2"/>
+          <p:cNvPr id="7" name="TextBox 2">
+            <a:extLst>
+              <a:ext uri="{FF2B5EF4-FFF2-40B4-BE49-F238E27FC236}">
+                <a16:creationId xmlns:a16="http://schemas.microsoft.com/office/drawing/2014/main" id="{1CF6705B-6939-4690-AEC2-AB6284C25D6E}"/>
+              </a:ext>
+            </a:extLst>
+          </p:cNvPr>
           <p:cNvSpPr txBox="1"/>
           <p:nvPr/>
         </p:nvSpPr>
         <p:spPr>
           <a:xfrm>
-            <a:off x="400000" y="680000"/>
+            <a:off x="400000" y="795746"/>
             <a:ext cx="9200000" cy="260000"/>
           </a:xfrm>
           <a:prstGeom prst="rect">
@@ -12489,15 +12868,27 @@
       </p:sp>
       <p:graphicFrame>
         <p:nvGraphicFramePr>
-          <p:cNvPr id="4" name="Table 3"/>
+          <p:cNvPr id="9" name="Table 3">
+            <a:extLst>
+              <a:ext uri="{FF2B5EF4-FFF2-40B4-BE49-F238E27FC236}">
+                <a16:creationId xmlns:a16="http://schemas.microsoft.com/office/drawing/2014/main" id="{E72E2576-55D4-2C00-185D-F661F1C9A4D6}"/>
+              </a:ext>
+            </a:extLst>
+          </p:cNvPr>
           <p:cNvGraphicFramePr>
             <a:graphicFrameLocks noGrp="1"/>
           </p:cNvGraphicFramePr>
-          <p:nvPr/>
+          <p:nvPr>
+            <p:extLst>
+              <p:ext uri="{D42A27DB-BD31-4B8C-83A1-F6EECF244321}">
+                <p14:modId xmlns:p14="http://schemas.microsoft.com/office/powerpoint/2010/main" val="2186101153"/>
+              </p:ext>
+            </p:extLst>
+          </p:nvPr>
         </p:nvGraphicFramePr>
         <p:xfrm>
-          <a:off x="300000" y="980000"/>
-          <a:ext cx="9300000" cy="4770000"/>
+          <a:off x="400000" y="1118664"/>
+          <a:ext cx="8764148" cy="3800000"/>
         </p:xfrm>
         <a:graphic>
           <a:graphicData uri="http://schemas.openxmlformats.org/drawingml/2006/table">
@@ -12506,10 +12897,34 @@
                 <a:tableStyleId>{5C22544A-7EE6-4342-B048-85BDC9FD1C3A}</a:tableStyleId>
               </a:tblPr>
               <a:tblGrid>
-                <a:gridCol w="1300000"/>
-                <a:gridCol w="2200000"/>
-                <a:gridCol w="3200000"/>
-                <a:gridCol w="2600000"/>
+                <a:gridCol w="1452852">
+                  <a:extLst>
+                    <a:ext uri="{9D8B030D-6E8A-4147-A177-3AD203B41FA5}">
+                      <a16:colId xmlns:a16="http://schemas.microsoft.com/office/drawing/2014/main" val="20000"/>
+                    </a:ext>
+                  </a:extLst>
+                </a:gridCol>
+                <a:gridCol w="1872208">
+                  <a:extLst>
+                    <a:ext uri="{9D8B030D-6E8A-4147-A177-3AD203B41FA5}">
+                      <a16:colId xmlns:a16="http://schemas.microsoft.com/office/drawing/2014/main" val="20001"/>
+                    </a:ext>
+                  </a:extLst>
+                </a:gridCol>
+                <a:gridCol w="2988896">
+                  <a:extLst>
+                    <a:ext uri="{9D8B030D-6E8A-4147-A177-3AD203B41FA5}">
+                      <a16:colId xmlns:a16="http://schemas.microsoft.com/office/drawing/2014/main" val="20002"/>
+                    </a:ext>
+                  </a:extLst>
+                </a:gridCol>
+                <a:gridCol w="2450192">
+                  <a:extLst>
+                    <a:ext uri="{9D8B030D-6E8A-4147-A177-3AD203B41FA5}">
+                      <a16:colId xmlns:a16="http://schemas.microsoft.com/office/drawing/2014/main" val="20003"/>
+                    </a:ext>
+                  </a:extLst>
+                </a:gridCol>
               </a:tblGrid>
               <a:tr h="450000">
                 <a:tc>
@@ -12608,8 +13023,104 @@
                     </a:solidFill>
                   </a:tcPr>
                 </a:tc>
+                <a:extLst>
+                  <a:ext uri="{0D108BD9-81ED-4DB2-BD59-A6C34878D82A}">
+                    <a16:rowId xmlns:a16="http://schemas.microsoft.com/office/drawing/2014/main" val="10000"/>
+                  </a:ext>
+                </a:extLst>
               </a:tr>
-              <a:tr h="780000">
+              <a:tr h="720000">
+                <a:tc>
+                  <a:txBody>
+                    <a:bodyPr/>
+                    <a:lstStyle/>
+                    <a:p>
+                      <a:pPr algn="l"/>
+                      <a:r>
+                        <a:rPr sz="900" b="1" dirty="0">
+                          <a:solidFill>
+                            <a:srgbClr val="333333"/>
+                          </a:solidFill>
+                          <a:latin typeface="メイリオ"/>
+                          <a:ea typeface="メイリオ"/>
+                        </a:rPr>
+                        <a:t>Ruby
+3.2→3.4</a:t>
+                      </a:r>
+                    </a:p>
+                  </a:txBody>
+                  <a:tcPr anchor="ctr"/>
+                </a:tc>
+                <a:tc>
+                  <a:txBody>
+                    <a:bodyPr/>
+                    <a:lstStyle/>
+                    <a:p>
+                      <a:pPr algn="l"/>
+                      <a:r>
+                        <a:rPr sz="900" b="0">
+                          <a:solidFill>
+                            <a:srgbClr val="333333"/>
+                          </a:solidFill>
+                          <a:latin typeface="メイリオ"/>
+                          <a:ea typeface="メイリオ"/>
+                        </a:rPr>
+                        <a:t>外部接続の改善
+(Happy Eyeballs v2)</a:t>
+                      </a:r>
+                    </a:p>
+                  </a:txBody>
+                  <a:tcPr anchor="ctr"/>
+                </a:tc>
+                <a:tc>
+                  <a:txBody>
+                    <a:bodyPr/>
+                    <a:lstStyle/>
+                    <a:p>
+                      <a:pPr algn="l"/>
+                      <a:r>
+                        <a:rPr sz="900" b="0">
+                          <a:solidFill>
+                            <a:srgbClr val="333333"/>
+                          </a:solidFill>
+                          <a:latin typeface="メイリオ"/>
+                          <a:ea typeface="メイリオ"/>
+                        </a:rPr>
+                        <a:t>IPv4/IPv6を並行して接続試行し、
+外部通信の確立をより確実にできる</a:t>
+                      </a:r>
+                    </a:p>
+                  </a:txBody>
+                  <a:tcPr anchor="ctr"/>
+                </a:tc>
+                <a:tc>
+                  <a:txBody>
+                    <a:bodyPr/>
+                    <a:lstStyle/>
+                    <a:p>
+                      <a:pPr algn="l"/>
+                      <a:r>
+                        <a:rPr sz="900" b="0">
+                          <a:solidFill>
+                            <a:srgbClr val="333333"/>
+                          </a:solidFill>
+                          <a:latin typeface="メイリオ"/>
+                          <a:ea typeface="メイリオ"/>
+                        </a:rPr>
+                        <a:t>基幹・決済・配送など外部API連携の
+接続まわりを安定させやすい</a:t>
+                      </a:r>
+                    </a:p>
+                  </a:txBody>
+                  <a:tcPr anchor="ctr"/>
+                </a:tc>
+                <a:extLst>
+                  <a:ext uri="{0D108BD9-81ED-4DB2-BD59-A6C34878D82A}">
+                    <a16:rowId xmlns:a16="http://schemas.microsoft.com/office/drawing/2014/main" val="10001"/>
+                  </a:ext>
+                </a:extLst>
+              </a:tr>
+              <a:tr h="720000">
                 <a:tc>
                   <a:txBody>
                     <a:bodyPr/>
@@ -12624,12 +13135,41 @@
                           <a:latin typeface="メイリオ"/>
                           <a:ea typeface="メイリオ"/>
                         </a:rPr>
-                        <a:t>Ruby
-3.2→3.4</a:t>
-                      </a:r>
-                    </a:p>
-                  </a:txBody>
-                  <a:tcPr anchor="ctr"/>
+                        <a:t>Rails
+7.2→8.1</a:t>
+                      </a:r>
+                    </a:p>
+                  </a:txBody>
+                  <a:tcPr anchor="ctr">
+                    <a:solidFill>
+                      <a:srgbClr val="D6E3F0"/>
+                    </a:solidFill>
+                  </a:tcPr>
+                </a:tc>
+                <a:tc>
+                  <a:txBody>
+                    <a:bodyPr/>
+                    <a:lstStyle/>
+                    <a:p>
+                      <a:pPr algn="l"/>
+                      <a:r>
+                        <a:rPr sz="900" b="0" dirty="0">
+                          <a:solidFill>
+                            <a:srgbClr val="333333"/>
+                          </a:solidFill>
+                          <a:latin typeface="メイリオ"/>
+                          <a:ea typeface="メイリオ"/>
+                        </a:rPr>
+                        <a:t>同じジョブの途中再開
+(Active Job Continuations)</a:t>
+                      </a:r>
+                    </a:p>
+                  </a:txBody>
+                  <a:tcPr anchor="ctr">
+                    <a:solidFill>
+                      <a:srgbClr val="D6E3F0"/>
+                    </a:solidFill>
+                  </a:tcPr>
                 </a:tc>
                 <a:tc>
                   <a:txBody>
@@ -12645,12 +13185,17 @@
                           <a:latin typeface="メイリオ"/>
                           <a:ea typeface="メイリオ"/>
                         </a:rPr>
-                        <a:t>外部接続の改善
-(Happy Eyeballs v2)</a:t>
-                      </a:r>
-                    </a:p>
-                  </a:txBody>
-                  <a:tcPr anchor="ctr"/>
+                        <a:t>長時間ジョブが途中停止しても、
+同じ実行を続きから再開しやすい
+※再実行（新規ジョブ）とは別物</a:t>
+                      </a:r>
+                    </a:p>
+                  </a:txBody>
+                  <a:tcPr anchor="ctr">
+                    <a:solidFill>
+                      <a:srgbClr val="D6E3F0"/>
+                    </a:solidFill>
+                  </a:tcPr>
                 </a:tc>
                 <a:tc>
                   <a:txBody>
@@ -12666,12 +13211,143 @@
                           <a:latin typeface="メイリオ"/>
                           <a:ea typeface="メイリオ"/>
                         </a:rPr>
-                        <a:t>IPv4/IPv6を並行して接続試行し、
-外部通信の確立をより確実にできる</a:t>
+                        <a:t>CSV取込／出力など
+長時間ジョブの安定運用に使える</a:t>
+                      </a:r>
+                    </a:p>
+                  </a:txBody>
+                  <a:tcPr anchor="ctr">
+                    <a:solidFill>
+                      <a:srgbClr val="D6E3F0"/>
+                    </a:solidFill>
+                  </a:tcPr>
+                </a:tc>
+                <a:extLst>
+                  <a:ext uri="{0D108BD9-81ED-4DB2-BD59-A6C34878D82A}">
+                    <a16:rowId xmlns:a16="http://schemas.microsoft.com/office/drawing/2014/main" val="10002"/>
+                  </a:ext>
+                </a:extLst>
+              </a:tr>
+              <a:tr h="720000">
+                <a:tc>
+                  <a:txBody>
+                    <a:bodyPr/>
+                    <a:lstStyle/>
+                    <a:p>
+                      <a:pPr algn="l"/>
+                      <a:r>
+                        <a:rPr sz="900" b="1">
+                          <a:solidFill>
+                            <a:srgbClr val="333333"/>
+                          </a:solidFill>
+                          <a:latin typeface="メイリオ"/>
+                          <a:ea typeface="メイリオ"/>
+                        </a:rPr>
+                        <a:t>Rails
+7.2→8.1</a:t>
                       </a:r>
                     </a:p>
                   </a:txBody>
                   <a:tcPr anchor="ctr"/>
+                </a:tc>
+                <a:tc>
+                  <a:txBody>
+                    <a:bodyPr/>
+                    <a:lstStyle/>
+                    <a:p>
+                      <a:pPr algn="l"/>
+                      <a:r>
+                        <a:rPr sz="900" b="0" dirty="0">
+                          <a:solidFill>
+                            <a:srgbClr val="333333"/>
+                          </a:solidFill>
+                          <a:latin typeface="メイリオ"/>
+                          <a:ea typeface="メイリオ"/>
+                        </a:rPr>
+                        <a:t>構造化イベント通知
+(Rails.event)</a:t>
+                      </a:r>
+                    </a:p>
+                  </a:txBody>
+                  <a:tcPr anchor="ctr"/>
+                </a:tc>
+                <a:tc>
+                  <a:txBody>
+                    <a:bodyPr/>
+                    <a:lstStyle/>
+                    <a:p>
+                      <a:pPr algn="l"/>
+                      <a:r>
+                        <a:rPr sz="800" b="0" dirty="0">
+                          <a:solidFill>
+                            <a:srgbClr val="333333"/>
+                          </a:solidFill>
+                          <a:latin typeface="メイリオ"/>
+                          <a:ea typeface="メイリオ"/>
+                        </a:rPr>
+                        <a:t>以前は logger（人が読むログ）と
+Notifications（内部計測）が中心。
+それらを継続しつつ、業務イベント
+（受注確定・価格変更・CSV取込完了など）を
+同じ形式で出せるようになった</a:t>
+                      </a:r>
+                    </a:p>
+                  </a:txBody>
+                  <a:tcPr anchor="ctr"/>
+                </a:tc>
+                <a:tc>
+                  <a:txBody>
+                    <a:bodyPr/>
+                    <a:lstStyle/>
+                    <a:p>
+                      <a:pPr algn="l"/>
+                      <a:r>
+                        <a:rPr sz="800" b="0">
+                          <a:solidFill>
+                            <a:srgbClr val="333333"/>
+                          </a:solidFill>
+                          <a:latin typeface="メイリオ"/>
+                          <a:ea typeface="メイリオ"/>
+                        </a:rPr>
+                        <a:t>「いつ・誰が・何をした」を
+横断検索しやすくなり、
+障害調査・監査・監視連携がやりやすい</a:t>
+                      </a:r>
+                    </a:p>
+                  </a:txBody>
+                  <a:tcPr anchor="ctr"/>
+                </a:tc>
+                <a:extLst>
+                  <a:ext uri="{0D108BD9-81ED-4DB2-BD59-A6C34878D82A}">
+                    <a16:rowId xmlns:a16="http://schemas.microsoft.com/office/drawing/2014/main" val="10003"/>
+                  </a:ext>
+                </a:extLst>
+              </a:tr>
+              <a:tr h="720000">
+                <a:tc>
+                  <a:txBody>
+                    <a:bodyPr/>
+                    <a:lstStyle/>
+                    <a:p>
+                      <a:pPr algn="l"/>
+                      <a:r>
+                        <a:rPr sz="900" b="1">
+                          <a:solidFill>
+                            <a:srgbClr val="333333"/>
+                          </a:solidFill>
+                          <a:latin typeface="メイリオ"/>
+                          <a:ea typeface="メイリオ"/>
+                        </a:rPr>
+                        <a:t>Rails
+7.2→8.1</a:t>
+                      </a:r>
+                    </a:p>
+                  </a:txBody>
+                  <a:tcPr anchor="ctr">
+                    <a:solidFill>
+                      <a:srgbClr val="D6E3F0"/>
+                    </a:solidFill>
+                  </a:tcPr>
                 </a:tc>
                 <a:tc>
                   <a:txBody>
@@ -12687,15 +13363,73 @@
                           <a:latin typeface="メイリオ"/>
                           <a:ea typeface="メイリオ"/>
                         </a:rPr>
-                        <a:t>基幹・決済・配送など外部API連携の
-接続まわりを安定させやすい</a:t>
-                      </a:r>
-                    </a:p>
-                  </a:txBody>
-                  <a:tcPr anchor="ctr"/>
-                </a:tc>
+                        <a:t>Markdown標準描画</a:t>
+                      </a:r>
+                    </a:p>
+                  </a:txBody>
+                  <a:tcPr anchor="ctr">
+                    <a:solidFill>
+                      <a:srgbClr val="D6E3F0"/>
+                    </a:solidFill>
+                  </a:tcPr>
+                </a:tc>
+                <a:tc>
+                  <a:txBody>
+                    <a:bodyPr/>
+                    <a:lstStyle/>
+                    <a:p>
+                      <a:pPr algn="l"/>
+                      <a:r>
+                        <a:rPr sz="900" b="0" dirty="0">
+                          <a:solidFill>
+                            <a:srgbClr val="333333"/>
+                          </a:solidFill>
+                          <a:latin typeface="メイリオ"/>
+                          <a:ea typeface="メイリオ"/>
+                        </a:rPr>
+                        <a:t>Markdownをそのまま
+画面やAPI応答に使える</a:t>
+                      </a:r>
+                    </a:p>
+                  </a:txBody>
+                  <a:tcPr anchor="ctr">
+                    <a:solidFill>
+                      <a:srgbClr val="D6E3F0"/>
+                    </a:solidFill>
+                  </a:tcPr>
+                </a:tc>
+                <a:tc>
+                  <a:txBody>
+                    <a:bodyPr/>
+                    <a:lstStyle/>
+                    <a:p>
+                      <a:pPr algn="l"/>
+                      <a:r>
+                        <a:rPr sz="900" b="0">
+                          <a:solidFill>
+                            <a:srgbClr val="333333"/>
+                          </a:solidFill>
+                          <a:latin typeface="メイリオ"/>
+                          <a:ea typeface="メイリオ"/>
+                        </a:rPr>
+                        <a:t>ヘルプ・提案資料・AI出力の表示基盤
+（伴走支援の説明にも応用可）</a:t>
+                      </a:r>
+                    </a:p>
+                  </a:txBody>
+                  <a:tcPr anchor="ctr">
+                    <a:solidFill>
+                      <a:srgbClr val="D6E3F0"/>
+                    </a:solidFill>
+                  </a:tcPr>
+                </a:tc>
+                <a:extLst>
+                  <a:ext uri="{0D108BD9-81ED-4DB2-BD59-A6C34878D82A}">
+                    <a16:rowId xmlns:a16="http://schemas.microsoft.com/office/drawing/2014/main" val="10004"/>
+                  </a:ext>
+                </a:extLst>
               </a:tr>
-              <a:tr h="780000">
+              <a:tr h="720000">
                 <a:tc>
                   <a:txBody>
                     <a:bodyPr/>
@@ -12710,16 +13444,12 @@
                           <a:latin typeface="メイリオ"/>
                           <a:ea typeface="メイリオ"/>
                         </a:rPr>
-                        <a:t>Rails
-7.2→8.1</a:t>
-                      </a:r>
-                    </a:p>
-                  </a:txBody>
-                  <a:tcPr anchor="ctr">
-                    <a:solidFill>
-                      <a:srgbClr val="D6E3F0"/>
-                    </a:solidFill>
-                  </a:tcPr>
+                        <a:t>MariaDB
+10.6→10.11</a:t>
+                      </a:r>
+                    </a:p>
+                  </a:txBody>
+                  <a:tcPr anchor="ctr"/>
                 </a:tc>
                 <a:tc>
                   <a:txBody>
@@ -12735,16 +13465,12 @@
                           <a:latin typeface="メイリオ"/>
                           <a:ea typeface="メイリオ"/>
                         </a:rPr>
-                        <a:t>同じジョブの途中再開
-(Active Job Continuations)</a:t>
-                      </a:r>
-                    </a:p>
-                  </a:txBody>
-                  <a:tcPr anchor="ctr">
-                    <a:solidFill>
-                      <a:srgbClr val="D6E3F0"/>
-                    </a:solidFill>
-                  </a:tcPr>
+                        <a:t>UUID型
+／設定の動的変更</a:t>
+                      </a:r>
+                    </a:p>
+                  </a:txBody>
+                  <a:tcPr anchor="ctr"/>
                 </a:tc>
                 <a:tc>
                   <a:txBody>
@@ -12760,17 +13486,12 @@
                           <a:latin typeface="メイリオ"/>
                           <a:ea typeface="メイリオ"/>
                         </a:rPr>
-                        <a:t>長時間ジョブが途中停止しても、
-同じ実行を続きから再開しやすい
-※再実行（新規ジョブ）とは別物</a:t>
-                      </a:r>
-                    </a:p>
-                  </a:txBody>
-                  <a:tcPr anchor="ctr">
-                    <a:solidFill>
-                      <a:srgbClr val="D6E3F0"/>
-                    </a:solidFill>
-                  </a:tcPr>
+                        <a:t>UUIDをDB型で持てる
+一部設定を再起動なしで変更できる</a:t>
+                      </a:r>
+                    </a:p>
+                  </a:txBody>
+                  <a:tcPr anchor="ctr"/>
                 </a:tc>
                 <a:tc>
                   <a:txBody>
@@ -12779,294 +13500,13 @@
                     <a:p>
                       <a:pPr algn="l"/>
                       <a:r>
-                        <a:rPr sz="900" b="0">
+                        <a:rPr sz="900" b="0" dirty="0">
                           <a:solidFill>
                             <a:srgbClr val="333333"/>
                           </a:solidFill>
                           <a:latin typeface="メイリオ"/>
                           <a:ea typeface="メイリオ"/>
                         </a:rPr>
-                        <a:t>CSV取込／出力など
-長時間ジョブの安定運用に使える</a:t>
-                      </a:r>
-                    </a:p>
-                  </a:txBody>
-                  <a:tcPr anchor="ctr">
-                    <a:solidFill>
-                      <a:srgbClr val="D6E3F0"/>
-                    </a:solidFill>
-                  </a:tcPr>
-                </a:tc>
-              </a:tr>
-              <a:tr h="1200000">
-                <a:tc>
-                  <a:txBody>
-                    <a:bodyPr/>
-                    <a:lstStyle/>
-                    <a:p>
-                      <a:pPr algn="l"/>
-                      <a:r>
-                        <a:rPr sz="900" b="1">
-                          <a:solidFill>
-                            <a:srgbClr val="333333"/>
-                          </a:solidFill>
-                          <a:latin typeface="メイリオ"/>
-                          <a:ea typeface="メイリオ"/>
-                        </a:rPr>
-                        <a:t>Rails
-7.2→8.1</a:t>
-                      </a:r>
-                    </a:p>
-                  </a:txBody>
-                  <a:tcPr anchor="ctr"/>
-                </a:tc>
-                <a:tc>
-                  <a:txBody>
-                    <a:bodyPr/>
-                    <a:lstStyle/>
-                    <a:p>
-                      <a:pPr algn="l"/>
-                      <a:r>
-                        <a:rPr sz="900" b="0">
-                          <a:solidFill>
-                            <a:srgbClr val="333333"/>
-                          </a:solidFill>
-                          <a:latin typeface="メイリオ"/>
-                          <a:ea typeface="メイリオ"/>
-                        </a:rPr>
-                        <a:t>構造化イベント通知
-(Rails.event)</a:t>
-                      </a:r>
-                    </a:p>
-                  </a:txBody>
-                  <a:tcPr anchor="ctr"/>
-                </a:tc>
-                <a:tc>
-                  <a:txBody>
-                    <a:bodyPr/>
-                    <a:lstStyle/>
-                    <a:p>
-                      <a:pPr algn="l"/>
-                      <a:r>
-                        <a:rPr sz="800" b="0">
-                          <a:solidFill>
-                            <a:srgbClr val="333333"/>
-                          </a:solidFill>
-                          <a:latin typeface="メイリオ"/>
-                          <a:ea typeface="メイリオ"/>
-                        </a:rPr>
-                        <a:t>以前は logger（人が読むログ）と
-Notifications（内部計測）が中心。
-それらを継続しつつ、業務イベント
-（受注確定・価格変更・CSV取込完了など）を
-同じ形式で出せるようになった</a:t>
-                      </a:r>
-                    </a:p>
-                  </a:txBody>
-                  <a:tcPr anchor="ctr"/>
-                </a:tc>
-                <a:tc>
-                  <a:txBody>
-                    <a:bodyPr/>
-                    <a:lstStyle/>
-                    <a:p>
-                      <a:pPr algn="l"/>
-                      <a:r>
-                        <a:rPr sz="800" b="0">
-                          <a:solidFill>
-                            <a:srgbClr val="333333"/>
-                          </a:solidFill>
-                          <a:latin typeface="メイリオ"/>
-                          <a:ea typeface="メイリオ"/>
-                        </a:rPr>
-                        <a:t>「いつ・誰が・何をした」を
-横断検索しやすくなり、
-障害調査・監査・監視連携がやりやすい</a:t>
-                      </a:r>
-                    </a:p>
-                  </a:txBody>
-                  <a:tcPr anchor="ctr"/>
-                </a:tc>
-              </a:tr>
-              <a:tr h="780000">
-                <a:tc>
-                  <a:txBody>
-                    <a:bodyPr/>
-                    <a:lstStyle/>
-                    <a:p>
-                      <a:pPr algn="l"/>
-                      <a:r>
-                        <a:rPr sz="900" b="1">
-                          <a:solidFill>
-                            <a:srgbClr val="333333"/>
-                          </a:solidFill>
-                          <a:latin typeface="メイリオ"/>
-                          <a:ea typeface="メイリオ"/>
-                        </a:rPr>
-                        <a:t>Rails
-7.2→8.1</a:t>
-                      </a:r>
-                    </a:p>
-                  </a:txBody>
-                  <a:tcPr anchor="ctr">
-                    <a:solidFill>
-                      <a:srgbClr val="D6E3F0"/>
-                    </a:solidFill>
-                  </a:tcPr>
-                </a:tc>
-                <a:tc>
-                  <a:txBody>
-                    <a:bodyPr/>
-                    <a:lstStyle/>
-                    <a:p>
-                      <a:pPr algn="l"/>
-                      <a:r>
-                        <a:rPr sz="900" b="0">
-                          <a:solidFill>
-                            <a:srgbClr val="333333"/>
-                          </a:solidFill>
-                          <a:latin typeface="メイリオ"/>
-                          <a:ea typeface="メイリオ"/>
-                        </a:rPr>
-                        <a:t>Markdown標準描画</a:t>
-                      </a:r>
-                    </a:p>
-                  </a:txBody>
-                  <a:tcPr anchor="ctr">
-                    <a:solidFill>
-                      <a:srgbClr val="D6E3F0"/>
-                    </a:solidFill>
-                  </a:tcPr>
-                </a:tc>
-                <a:tc>
-                  <a:txBody>
-                    <a:bodyPr/>
-                    <a:lstStyle/>
-                    <a:p>
-                      <a:pPr algn="l"/>
-                      <a:r>
-                        <a:rPr sz="900" b="0">
-                          <a:solidFill>
-                            <a:srgbClr val="333333"/>
-                          </a:solidFill>
-                          <a:latin typeface="メイリオ"/>
-                          <a:ea typeface="メイリオ"/>
-                        </a:rPr>
-                        <a:t>Markdownをそのまま
-画面やAPI応答に使える</a:t>
-                      </a:r>
-                    </a:p>
-                  </a:txBody>
-                  <a:tcPr anchor="ctr">
-                    <a:solidFill>
-                      <a:srgbClr val="D6E3F0"/>
-                    </a:solidFill>
-                  </a:tcPr>
-                </a:tc>
-                <a:tc>
-                  <a:txBody>
-                    <a:bodyPr/>
-                    <a:lstStyle/>
-                    <a:p>
-                      <a:pPr algn="l"/>
-                      <a:r>
-                        <a:rPr sz="900" b="0">
-                          <a:solidFill>
-                            <a:srgbClr val="333333"/>
-                          </a:solidFill>
-                          <a:latin typeface="メイリオ"/>
-                          <a:ea typeface="メイリオ"/>
-                        </a:rPr>
-                        <a:t>ヘルプ・提案資料・AI出力の表示基盤
-（伴走支援の説明にも応用可）</a:t>
-                      </a:r>
-                    </a:p>
-                  </a:txBody>
-                  <a:tcPr anchor="ctr">
-                    <a:solidFill>
-                      <a:srgbClr val="D6E3F0"/>
-                    </a:solidFill>
-                  </a:tcPr>
-                </a:tc>
-              </a:tr>
-              <a:tr h="780000">
-                <a:tc>
-                  <a:txBody>
-                    <a:bodyPr/>
-                    <a:lstStyle/>
-                    <a:p>
-                      <a:pPr algn="l"/>
-                      <a:r>
-                        <a:rPr sz="900" b="1">
-                          <a:solidFill>
-                            <a:srgbClr val="333333"/>
-                          </a:solidFill>
-                          <a:latin typeface="メイリオ"/>
-                          <a:ea typeface="メイリオ"/>
-                        </a:rPr>
-                        <a:t>MariaDB
-10.6→10.11</a:t>
-                      </a:r>
-                    </a:p>
-                  </a:txBody>
-                  <a:tcPr anchor="ctr"/>
-                </a:tc>
-                <a:tc>
-                  <a:txBody>
-                    <a:bodyPr/>
-                    <a:lstStyle/>
-                    <a:p>
-                      <a:pPr algn="l"/>
-                      <a:r>
-                        <a:rPr sz="900" b="0">
-                          <a:solidFill>
-                            <a:srgbClr val="333333"/>
-                          </a:solidFill>
-                          <a:latin typeface="メイリオ"/>
-                          <a:ea typeface="メイリオ"/>
-                        </a:rPr>
-                        <a:t>UUID型
-／設定の動的変更</a:t>
-                      </a:r>
-                    </a:p>
-                  </a:txBody>
-                  <a:tcPr anchor="ctr"/>
-                </a:tc>
-                <a:tc>
-                  <a:txBody>
-                    <a:bodyPr/>
-                    <a:lstStyle/>
-                    <a:p>
-                      <a:pPr algn="l"/>
-                      <a:r>
-                        <a:rPr sz="900" b="0">
-                          <a:solidFill>
-                            <a:srgbClr val="333333"/>
-                          </a:solidFill>
-                          <a:latin typeface="メイリオ"/>
-                          <a:ea typeface="メイリオ"/>
-                        </a:rPr>
-                        <a:t>UUIDをDB型で持てる
-一部設定を再起動なしで変更できる</a:t>
-                      </a:r>
-                    </a:p>
-                  </a:txBody>
-                  <a:tcPr anchor="ctr"/>
-                </a:tc>
-                <a:tc>
-                  <a:txBody>
-                    <a:bodyPr/>
-                    <a:lstStyle/>
-                    <a:p>
-                      <a:pPr algn="l"/>
-                      <a:r>
-                        <a:rPr sz="900" b="0">
-                          <a:solidFill>
-                            <a:srgbClr val="333333"/>
-                          </a:solidFill>
-                          <a:latin typeface="メイリオ"/>
-                          <a:ea typeface="メイリオ"/>
-                        </a:rPr>
                         <a:t>基幹連携IDの整備や、ピーク時の
 運用チューニングに使える</a:t>
                       </a:r>
@@ -13074,6 +13514,11 @@
                   </a:txBody>
                   <a:tcPr anchor="ctr"/>
                 </a:tc>
+                <a:extLst>
+                  <a:ext uri="{0D108BD9-81ED-4DB2-BD59-A6C34878D82A}">
+                    <a16:rowId xmlns:a16="http://schemas.microsoft.com/office/drawing/2014/main" val="10005"/>
+                  </a:ext>
+                </a:extLst>
               </a:tr>
             </a:tbl>
           </a:graphicData>
@@ -13081,14 +13526,20 @@
       </p:graphicFrame>
       <p:sp>
         <p:nvSpPr>
-          <p:cNvPr id="5" name="TextBox 4"/>
+          <p:cNvPr id="11" name="TextBox 4">
+            <a:extLst>
+              <a:ext uri="{FF2B5EF4-FFF2-40B4-BE49-F238E27FC236}">
+                <a16:creationId xmlns:a16="http://schemas.microsoft.com/office/drawing/2014/main" id="{C5728ED3-7EFE-C12A-178B-4F7F392B7C8F}"/>
+              </a:ext>
+            </a:extLst>
+          </p:cNvPr>
           <p:cNvSpPr txBox="1"/>
           <p:nvPr/>
         </p:nvSpPr>
         <p:spPr>
           <a:xfrm>
-            <a:off x="400000" y="6350000"/>
-            <a:ext cx="9200000" cy="300000"/>
+            <a:off x="353000" y="5000000"/>
+            <a:ext cx="9200000" cy="900000"/>
           </a:xfrm>
           <a:prstGeom prst="rect">
             <a:avLst/>
@@ -13106,23 +13557,108 @@
                 <a:spcPts val="0"/>
               </a:spcBef>
               <a:spcAft>
-                <a:spcPts val="100"/>
+                <a:spcPts val="200"/>
               </a:spcAft>
             </a:pPr>
             <a:r>
-              <a:rPr sz="1000" b="0">
+              <a:rPr sz="1300" b="1">
                 <a:solidFill>
                   <a:srgbClr val="C00000"/>
                 </a:solidFill>
                 <a:latin typeface="メイリオ"/>
                 <a:ea typeface="メイリオ"/>
               </a:rPr>
-              <a:t>※ いますぐ全部を使う話ではない。今後の機能追加・運用改善で選べる選択肢を増やしたアップデート</a:t>
+              <a:t>■ みんなにお願いしたいこと</a:t>
+            </a:r>
+          </a:p>
+          <a:p>
+            <a:pPr>
+              <a:spcBef>
+                <a:spcPts val="0"/>
+              </a:spcBef>
+              <a:spcAft>
+                <a:spcPts val="200"/>
+              </a:spcAft>
+            </a:pPr>
+            <a:r>
+              <a:rPr sz="1100" b="0">
+                <a:solidFill>
+                  <a:srgbClr val="333333"/>
+                </a:solidFill>
+                <a:latin typeface="メイリオ"/>
+                <a:ea typeface="メイリオ"/>
+              </a:rPr>
+              <a:t>・他社に負けない製品にするため、普段使っているサービスで</a:t>
+            </a:r>
+          </a:p>
+          <a:p>
+            <a:pPr>
+              <a:spcBef>
+                <a:spcPts val="0"/>
+              </a:spcBef>
+              <a:spcAft>
+                <a:spcPts val="200"/>
+              </a:spcAft>
+            </a:pPr>
+            <a:r>
+              <a:rPr sz="1100" b="0">
+                <a:solidFill>
+                  <a:srgbClr val="333333"/>
+                </a:solidFill>
+                <a:latin typeface="メイリオ"/>
+                <a:ea typeface="メイリオ"/>
+              </a:rPr>
+              <a:t>　「Primoに取り入れたい」と思ったものがあれば、ぜひ教えてほしい</a:t>
+            </a:r>
+          </a:p>
+          <a:p>
+            <a:pPr>
+              <a:spcBef>
+                <a:spcPts val="0"/>
+              </a:spcBef>
+              <a:spcAft>
+                <a:spcPts val="200"/>
+              </a:spcAft>
+            </a:pPr>
+            <a:r>
+              <a:rPr sz="1100" b="0">
+                <a:solidFill>
+                  <a:srgbClr val="333333"/>
+                </a:solidFill>
+                <a:latin typeface="メイリオ"/>
+                <a:ea typeface="メイリオ"/>
+              </a:rPr>
+              <a:t>・今回のVUで“使える選択肢”は増えた。みんなの知恵を最大限活かして、</a:t>
+            </a:r>
+          </a:p>
+          <a:p>
+            <a:pPr>
+              <a:spcBef>
+                <a:spcPts val="0"/>
+              </a:spcBef>
+              <a:spcAft>
+                <a:spcPts val="200"/>
+              </a:spcAft>
+            </a:pPr>
+            <a:r>
+              <a:rPr sz="1100" b="0">
+                <a:solidFill>
+                  <a:srgbClr val="333333"/>
+                </a:solidFill>
+                <a:latin typeface="メイリオ"/>
+                <a:ea typeface="メイリオ"/>
+              </a:rPr>
+              <a:t>　より良い製品にしていきたい</a:t>
             </a:r>
           </a:p>
         </p:txBody>
       </p:sp>
     </p:spTree>
+    <p:extLst>
+      <p:ext uri="{BB962C8B-B14F-4D97-AF65-F5344CB8AC3E}">
+        <p14:creationId xmlns:p14="http://schemas.microsoft.com/office/powerpoint/2010/main" val="161047936"/>
+      </p:ext>
+    </p:extLst>
   </p:cSld>
   <p:clrMapOvr>
     <a:masterClrMapping/>
@@ -13287,8 +13823,20 @@
                 <a:tableStyleId>{5C22544A-7EE6-4342-B048-85BDC9FD1C3A}</a:tableStyleId>
               </a:tblPr>
               <a:tblGrid>
-                <a:gridCol w="3200000"/>
-                <a:gridCol w="5150000"/>
+                <a:gridCol w="3200000">
+                  <a:extLst>
+                    <a:ext uri="{9D8B030D-6E8A-4147-A177-3AD203B41FA5}">
+                      <a16:colId xmlns:a16="http://schemas.microsoft.com/office/drawing/2014/main" val="20000"/>
+                    </a:ext>
+                  </a:extLst>
+                </a:gridCol>
+                <a:gridCol w="5150000">
+                  <a:extLst>
+                    <a:ext uri="{9D8B030D-6E8A-4147-A177-3AD203B41FA5}">
+                      <a16:colId xmlns:a16="http://schemas.microsoft.com/office/drawing/2014/main" val="20001"/>
+                    </a:ext>
+                  </a:extLst>
+                </a:gridCol>
               </a:tblGrid>
               <a:tr h="340000">
                 <a:tc>
@@ -13339,6 +13887,11 @@
                     </a:solidFill>
                   </a:tcPr>
                 </a:tc>
+                <a:extLst>
+                  <a:ext uri="{0D108BD9-81ED-4DB2-BD59-A6C34878D82A}">
+                    <a16:rowId xmlns:a16="http://schemas.microsoft.com/office/drawing/2014/main" val="10000"/>
+                  </a:ext>
+                </a:extLst>
               </a:tr>
               <a:tr h="340000">
                 <a:tc>
@@ -13381,6 +13934,11 @@
                   </a:txBody>
                   <a:tcPr anchor="ctr"/>
                 </a:tc>
+                <a:extLst>
+                  <a:ext uri="{0D108BD9-81ED-4DB2-BD59-A6C34878D82A}">
+                    <a16:rowId xmlns:a16="http://schemas.microsoft.com/office/drawing/2014/main" val="10001"/>
+                  </a:ext>
+                </a:extLst>
               </a:tr>
               <a:tr h="340000">
                 <a:tc>
@@ -13431,6 +13989,11 @@
                     </a:solidFill>
                   </a:tcPr>
                 </a:tc>
+                <a:extLst>
+                  <a:ext uri="{0D108BD9-81ED-4DB2-BD59-A6C34878D82A}">
+                    <a16:rowId xmlns:a16="http://schemas.microsoft.com/office/drawing/2014/main" val="10002"/>
+                  </a:ext>
+                </a:extLst>
               </a:tr>
               <a:tr h="340000">
                 <a:tc>
@@ -13473,6 +14036,11 @@
                   </a:txBody>
                   <a:tcPr anchor="ctr"/>
                 </a:tc>
+                <a:extLst>
+                  <a:ext uri="{0D108BD9-81ED-4DB2-BD59-A6C34878D82A}">
+                    <a16:rowId xmlns:a16="http://schemas.microsoft.com/office/drawing/2014/main" val="10003"/>
+                  </a:ext>
+                </a:extLst>
               </a:tr>
               <a:tr h="340000">
                 <a:tc>
@@ -13523,6 +14091,11 @@
                     </a:solidFill>
                   </a:tcPr>
                 </a:tc>
+                <a:extLst>
+                  <a:ext uri="{0D108BD9-81ED-4DB2-BD59-A6C34878D82A}">
+                    <a16:rowId xmlns:a16="http://schemas.microsoft.com/office/drawing/2014/main" val="10004"/>
+                  </a:ext>
+                </a:extLst>
               </a:tr>
             </a:tbl>
           </a:graphicData>
@@ -13537,7 +14110,7 @@
         <p:spPr>
           <a:xfrm>
             <a:off x="776537" y="3000000"/>
-            <a:ext cx="8500000" cy="3500000"/>
+            <a:ext cx="8500000" cy="1990288"/>
           </a:xfrm>
           <a:prstGeom prst="rect">
             <a:avLst/>
@@ -13727,6 +14300,86 @@
                 <a:ea typeface="メイリオ"/>
               </a:rPr>
               <a:t>・立ち上げ期は無償でも寄り添い事例化 → 製品強化へ還流</a:t>
+            </a:r>
+          </a:p>
+          <a:p>
+            <a:pPr>
+              <a:spcBef>
+                <a:spcPts val="0"/>
+              </a:spcBef>
+              <a:spcAft>
+                <a:spcPts val="200"/>
+              </a:spcAft>
+            </a:pPr>
+            <a:r>
+              <a:rPr sz="600" b="0">
+                <a:solidFill>
+                  <a:srgbClr val="333333"/>
+                </a:solidFill>
+                <a:latin typeface="メイリオ"/>
+                <a:ea typeface="メイリオ"/>
+              </a:rPr>
+              <a:t/>
+            </a:r>
+          </a:p>
+          <a:p>
+            <a:pPr>
+              <a:spcBef>
+                <a:spcPts val="0"/>
+              </a:spcBef>
+              <a:spcAft>
+                <a:spcPts val="200"/>
+              </a:spcAft>
+            </a:pPr>
+            <a:r>
+              <a:rPr sz="1300" b="1">
+                <a:solidFill>
+                  <a:srgbClr val="C00000"/>
+                </a:solidFill>
+                <a:latin typeface="メイリオ"/>
+                <a:ea typeface="メイリオ"/>
+              </a:rPr>
+              <a:t>④ 伴走支援・提案検討会へのお願い</a:t>
+            </a:r>
+          </a:p>
+          <a:p>
+            <a:pPr>
+              <a:spcBef>
+                <a:spcPts val="0"/>
+              </a:spcBef>
+              <a:spcAft>
+                <a:spcPts val="200"/>
+              </a:spcAft>
+            </a:pPr>
+            <a:r>
+              <a:rPr sz="1200" b="0">
+                <a:solidFill>
+                  <a:srgbClr val="333333"/>
+                </a:solidFill>
+                <a:latin typeface="メイリオ"/>
+                <a:ea typeface="メイリオ"/>
+              </a:rPr>
+              <a:t>・伴走支援を本格化していく。提案検討会も継続する</a:t>
+            </a:r>
+          </a:p>
+          <a:p>
+            <a:pPr>
+              <a:spcBef>
+                <a:spcPts val="0"/>
+              </a:spcBef>
+              <a:spcAft>
+                <a:spcPts val="200"/>
+              </a:spcAft>
+            </a:pPr>
+            <a:r>
+              <a:rPr sz="1200" b="0">
+                <a:solidFill>
+                  <a:srgbClr val="333333"/>
+                </a:solidFill>
+                <a:latin typeface="メイリオ"/>
+                <a:ea typeface="メイリオ"/>
+              </a:rPr>
+              <a:t>・ぜひ参加して、みんなの知見・経験を活かして力になってほしい</a:t>
             </a:r>
           </a:p>
         </p:txBody>
@@ -14436,7 +15089,7 @@
                 <a:cs typeface="Meiryo"/>
                 <a:sym typeface="Meiryo"/>
               </a:rPr>
-              <a:t>○○さんから報告</a:t>
+              <a:t>浦上さんから報告</a:t>
             </a:r>
             <a:endParaRPr lang="en-US" altLang="ja-JP" sz="1600" dirty="0">
               <a:solidFill>
@@ -14612,7 +15265,15 @@
             </a:r>
             <a:r>
               <a:rPr lang="ja-JP" altLang="en-US" sz="2000" dirty="0"/>
-              <a:t>活用・業務効率化についての共有</a:t>
+              <a:t>活用・業務効率化についての共有（</a:t>
+            </a:r>
+            <a:r>
+              <a:rPr lang="en-US" altLang="ja-JP" sz="2000" dirty="0"/>
+              <a:t>1/2</a:t>
+            </a:r>
+            <a:r>
+              <a:rPr lang="ja-JP" altLang="en-US" sz="2000" dirty="0"/>
+              <a:t>）</a:t>
             </a:r>
             <a:endParaRPr lang="ja-JP" altLang="en-US" sz="2000" dirty="0">
               <a:latin typeface="メイリオ" pitchFamily="50" charset="-128"/>
@@ -14630,8 +15291,8 @@
         </p:nvSpPr>
         <p:spPr>
           <a:xfrm>
-            <a:off x="776537" y="740000"/>
-            <a:ext cx="8500000" cy="5600000"/>
+            <a:off x="703000" y="836712"/>
+            <a:ext cx="8500000" cy="4401205"/>
           </a:xfrm>
           <a:prstGeom prst="rect">
             <a:avLst/>
@@ -14673,14 +15334,14 @@
               </a:spcAft>
             </a:pPr>
             <a:r>
-              <a:rPr sz="1300" b="1">
+              <a:rPr sz="1200" b="0">
                 <a:solidFill>
                   <a:srgbClr val="333333"/>
                 </a:solidFill>
                 <a:latin typeface="メイリオ"/>
                 <a:ea typeface="メイリオ"/>
               </a:rPr>
-              <a:t>【プログラム開発】</a:t>
+              <a:t>【開発】ASIS：Copilot　→　TOBE：Cursor + Claude</a:t>
             </a:r>
           </a:p>
           <a:p>
@@ -14693,14 +15354,14 @@
               </a:spcAft>
             </a:pPr>
             <a:r>
-              <a:rPr sz="1300" b="0">
+              <a:rPr sz="1200" b="0">
                 <a:solidFill>
                   <a:srgbClr val="333333"/>
                 </a:solidFill>
                 <a:latin typeface="メイリオ"/>
                 <a:ea typeface="メイリオ"/>
               </a:rPr>
-              <a:t>・ASIS：VS Code + GitHub Copilot</a:t>
+              <a:t>【業務】ASIS：ChatGPT／Gemini　→　TOBE：Claude</a:t>
             </a:r>
           </a:p>
           <a:p>
@@ -14713,14 +15374,14 @@
               </a:spcAft>
             </a:pPr>
             <a:r>
-              <a:rPr sz="1300" b="0">
+              <a:rPr sz="600" b="0">
                 <a:solidFill>
                   <a:srgbClr val="333333"/>
                 </a:solidFill>
                 <a:latin typeface="メイリオ"/>
                 <a:ea typeface="メイリオ"/>
               </a:rPr>
-              <a:t>・TOBE：Cursor + Claude ／ Claude Desktop + Claude Code</a:t>
+              <a:t/>
             </a:r>
           </a:p>
           <a:p>
@@ -14733,14 +15394,14 @@
               </a:spcAft>
             </a:pPr>
             <a:r>
-              <a:rPr sz="1300" b="1">
+              <a:rPr sz="1400" b="1">
                 <a:solidFill>
-                  <a:srgbClr val="333333"/>
+                  <a:srgbClr val="C00000"/>
                 </a:solidFill>
                 <a:latin typeface="メイリオ"/>
                 <a:ea typeface="メイリオ"/>
               </a:rPr>
-              <a:t>【ビジネス業務（資料作成・業界分析など）】</a:t>
+              <a:t>② ここまでできるようになりたい（目標）</a:t>
             </a:r>
           </a:p>
           <a:p>
@@ -14753,14 +15414,14 @@
               </a:spcAft>
             </a:pPr>
             <a:r>
-              <a:rPr sz="1300" b="0">
+              <a:rPr sz="1200" b="0">
                 <a:solidFill>
                   <a:srgbClr val="333333"/>
                 </a:solidFill>
                 <a:latin typeface="メイリオ"/>
                 <a:ea typeface="メイリオ"/>
               </a:rPr>
-              <a:t>・ASIS：ChatGPT／Gemini</a:t>
+              <a:t>【要件定義】モック最速作成 → お客様がイメージしやすく</a:t>
             </a:r>
           </a:p>
           <a:p>
@@ -14773,14 +15434,14 @@
               </a:spcAft>
             </a:pPr>
             <a:r>
-              <a:rPr sz="1300" b="0">
+              <a:rPr sz="1200" b="0">
                 <a:solidFill>
                   <a:srgbClr val="333333"/>
                 </a:solidFill>
                 <a:latin typeface="メイリオ"/>
                 <a:ea typeface="メイリオ"/>
               </a:rPr>
-              <a:t>・TOBE：Claude（Claude Desktop 等）</a:t>
+              <a:t>【設計】的確な指示で設計書への追記を自動化</a:t>
             </a:r>
           </a:p>
           <a:p>
@@ -14793,14 +15454,14 @@
               </a:spcAft>
             </a:pPr>
             <a:r>
-              <a:rPr sz="800" b="0">
+              <a:rPr sz="1200" b="0">
                 <a:solidFill>
                   <a:srgbClr val="333333"/>
                 </a:solidFill>
                 <a:latin typeface="メイリオ"/>
                 <a:ea typeface="メイリオ"/>
               </a:rPr>
-              <a:t/>
+              <a:t>【開発】設計書ベースでAIと詳細を詰め、ほぼノーコーディング</a:t>
             </a:r>
           </a:p>
           <a:p>
@@ -14813,14 +15474,14 @@
               </a:spcAft>
             </a:pPr>
             <a:r>
-              <a:rPr sz="1400" b="1">
+              <a:rPr sz="1200" b="0">
                 <a:solidFill>
                   <a:srgbClr val="333333"/>
                 </a:solidFill>
                 <a:latin typeface="メイリオ"/>
                 <a:ea typeface="メイリオ"/>
               </a:rPr>
-              <a:t>② 1か月使ってみた所感（Claude）</a:t>
+              <a:t>【テスト】スペックテスト自動化／人手テストの仕様書作成も自動化</a:t>
             </a:r>
           </a:p>
           <a:p>
@@ -14833,14 +15494,14 @@
               </a:spcAft>
             </a:pPr>
             <a:r>
-              <a:rPr sz="1300" b="0">
+              <a:rPr sz="1200" b="0">
                 <a:solidFill>
                   <a:srgbClr val="333333"/>
                 </a:solidFill>
                 <a:latin typeface="メイリオ"/>
                 <a:ea typeface="メイリオ"/>
               </a:rPr>
-              <a:t>・回答精度にかなり優秀さを感じる</a:t>
+              <a:t>　　　　 ブラウザ上のテスト自動化ツールも活用</a:t>
             </a:r>
           </a:p>
           <a:p>
@@ -14853,14 +15514,14 @@
               </a:spcAft>
             </a:pPr>
             <a:r>
-              <a:rPr sz="1300" b="0">
+              <a:rPr sz="600" b="0">
                 <a:solidFill>
                   <a:srgbClr val="333333"/>
                 </a:solidFill>
                 <a:latin typeface="メイリオ"/>
                 <a:ea typeface="メイリオ"/>
               </a:rPr>
-              <a:t>・特に、表面的な答えではなく、前提や理由まで踏み込んだ深い思考の回答が多い印象</a:t>
+              <a:t/>
             </a:r>
           </a:p>
           <a:p>
@@ -14873,14 +15534,14 @@
               </a:spcAft>
             </a:pPr>
             <a:r>
-              <a:rPr sz="1300" b="0">
+              <a:rPr sz="1400" b="1">
                 <a:solidFill>
                   <a:srgbClr val="333333"/>
                 </a:solidFill>
                 <a:latin typeface="メイリオ"/>
                 <a:ea typeface="メイリオ"/>
               </a:rPr>
-              <a:t>・開発：補完中心から、要件〜実装〜レビュー伴走へシフトできる</a:t>
+              <a:t>③ いま進めている取り組み</a:t>
             </a:r>
           </a:p>
           <a:p>
@@ -14893,14 +15554,14 @@
               </a:spcAft>
             </a:pPr>
             <a:r>
-              <a:rPr sz="1300" b="0">
+              <a:rPr sz="1200" b="0">
                 <a:solidFill>
                   <a:srgbClr val="333333"/>
                 </a:solidFill>
                 <a:latin typeface="メイリオ"/>
                 <a:ea typeface="メイリオ"/>
               </a:rPr>
-              <a:t>・業務：資料作成・分析でも、構成と論点を丁寧に組み立ててくれる感覚</a:t>
+              <a:t>・EC-Rider AI（プロンプト／実装ガイド読込）構築中</a:t>
             </a:r>
           </a:p>
           <a:p>
@@ -14913,14 +15574,14 @@
               </a:spcAft>
             </a:pPr>
             <a:r>
-              <a:rPr sz="800" b="0">
+              <a:rPr sz="1200" b="0">
                 <a:solidFill>
                   <a:srgbClr val="333333"/>
                 </a:solidFill>
                 <a:latin typeface="メイリオ"/>
                 <a:ea typeface="メイリオ"/>
               </a:rPr>
-              <a:t/>
+              <a:t>・提案用モックベース整備</a:t>
             </a:r>
           </a:p>
           <a:p>
@@ -14933,14 +15594,14 @@
               </a:spcAft>
             </a:pPr>
             <a:r>
-              <a:rPr sz="1400" b="1">
+              <a:rPr sz="600" b="0">
                 <a:solidFill>
                   <a:srgbClr val="333333"/>
                 </a:solidFill>
                 <a:latin typeface="メイリオ"/>
                 <a:ea typeface="メイリオ"/>
               </a:rPr>
-              <a:t>③ いま進めている取り組み（言及）</a:t>
+              <a:t/>
             </a:r>
           </a:p>
           <a:p>
@@ -14953,74 +15614,14 @@
               </a:spcAft>
             </a:pPr>
             <a:r>
-              <a:rPr sz="1300" b="0">
-                <a:solidFill>
-                  <a:srgbClr val="333333"/>
-                </a:solidFill>
-                <a:latin typeface="メイリオ"/>
-                <a:ea typeface="メイリオ"/>
-              </a:rPr>
-              <a:t>・EC-Rider用プロンプト／実装ガイドを読込 → EC-Rider AI を構築中</a:t>
-            </a:r>
-          </a:p>
-          <a:p>
-            <a:pPr>
-              <a:spcBef>
-                <a:spcPts val="0"/>
-              </a:spcBef>
-              <a:spcAft>
-                <a:spcPts val="200"/>
-              </a:spcAft>
-            </a:pPr>
-            <a:r>
-              <a:rPr sz="1300" b="0">
-                <a:solidFill>
-                  <a:srgbClr val="333333"/>
-                </a:solidFill>
-                <a:latin typeface="メイリオ"/>
-                <a:ea typeface="メイリオ"/>
-              </a:rPr>
-              <a:t>・提案時に使えるモックベースを整備し、お客様へのイメージ共有を容易に</a:t>
-            </a:r>
-          </a:p>
-          <a:p>
-            <a:pPr>
-              <a:spcBef>
-                <a:spcPts val="0"/>
-              </a:spcBef>
-              <a:spcAft>
-                <a:spcPts val="200"/>
-              </a:spcAft>
-            </a:pPr>
-            <a:r>
-              <a:rPr sz="800" b="0">
-                <a:solidFill>
-                  <a:srgbClr val="333333"/>
-                </a:solidFill>
-                <a:latin typeface="メイリオ"/>
-                <a:ea typeface="メイリオ"/>
-              </a:rPr>
-              <a:t/>
-            </a:r>
-          </a:p>
-          <a:p>
-            <a:pPr>
-              <a:spcBef>
-                <a:spcPts val="0"/>
-              </a:spcBef>
-              <a:spcAft>
-                <a:spcPts val="200"/>
-              </a:spcAft>
-            </a:pPr>
-            <a:r>
-              <a:rPr sz="1300" b="0">
+              <a:rPr sz="1200" b="0">
                 <a:solidFill>
                   <a:srgbClr val="C00000"/>
                 </a:solidFill>
                 <a:latin typeface="メイリオ"/>
                 <a:ea typeface="メイリオ"/>
               </a:rPr>
-              <a:t>→ 比較・リスク・加速施策は次ページ</a:t>
+              <a:t>→ 次ページ：比較表／最終判断の線引き</a:t>
             </a:r>
           </a:p>
         </p:txBody>
@@ -15039,21 +15640,34 @@
 </file>
 
 <file path=ppt/slides/slide19.xml><?xml version="1.0" encoding="utf-8"?>
-<p:sld xmlns:a="http://schemas.openxmlformats.org/drawingml/2006/main" xmlns:p="http://schemas.openxmlformats.org/presentationml/2006/main" xmlns:r="http://schemas.openxmlformats.org/officeDocument/2006/relationships">
+<p:sld xmlns:a="http://schemas.openxmlformats.org/drawingml/2006/main" xmlns:r="http://schemas.openxmlformats.org/officeDocument/2006/relationships" xmlns:p="http://schemas.openxmlformats.org/presentationml/2006/main">
   <p:cSld>
     <p:spTree>
       <p:nvGrpSpPr>
-        <p:cNvPr id="1" name=""/>
+        <p:cNvPr id="1" name="">
+          <a:extLst>
+            <a:ext uri="{FF2B5EF4-FFF2-40B4-BE49-F238E27FC236}">
+              <a16:creationId xmlns:a16="http://schemas.microsoft.com/office/drawing/2014/main" id="{E264E053-B35F-FA92-EB03-8BB1B56A1353}"/>
+            </a:ext>
+          </a:extLst>
+        </p:cNvPr>
         <p:cNvGrpSpPr/>
         <p:nvPr/>
       </p:nvGrpSpPr>
-      <p:grpSpPr/>
+      <p:grpSpPr>
+        <a:xfrm>
+          <a:off x="0" y="0"/>
+          <a:ext cx="0" cy="0"/>
+          <a:chOff x="0" y="0"/>
+          <a:chExt cx="0" cy="0"/>
+        </a:xfrm>
+      </p:grpSpPr>
       <p:sp>
         <p:nvSpPr>
           <p:cNvPr id="2" name="Google Shape;152;p7">
             <a:extLst>
               <a:ext uri="{FF2B5EF4-FFF2-40B4-BE49-F238E27FC236}">
-                <a16:creationId xmlns:a16="http://schemas.microsoft.com/office/drawing/2014/main" id="{1AFE031F-7AB4-8AF0-7761-452F8A5F8172}"/>
+                <a16:creationId xmlns:a16="http://schemas.microsoft.com/office/drawing/2014/main" id="{55589BCD-DCD2-B661-9E2D-CDF5DC531B03}"/>
               </a:ext>
             </a:extLst>
           </p:cNvPr>
@@ -15089,24 +15703,20 @@
               </a:lnSpc>
             </a:pPr>
             <a:r>
-              <a:rPr sz="2000" b="0">
-                <a:solidFill>
-                  <a:srgbClr val="333333"/>
-                </a:solidFill>
-                <a:latin typeface="メイリオ"/>
-                <a:ea typeface="メイリオ"/>
-              </a:rPr>
-              <a:t>9. </a:t>
-            </a:r>
-            <a:r>
-              <a:rPr sz="2000" b="0">
-                <a:solidFill>
-                  <a:srgbClr val="333333"/>
-                </a:solidFill>
-                <a:latin typeface="メイリオ"/>
-                <a:ea typeface="メイリオ"/>
-              </a:rPr>
-              <a:t>AI活用・業務効率化についての共有　その２</a:t>
+              <a:rPr lang="en-US" altLang="ja-JP" sz="2000" dirty="0">
+                <a:latin typeface="メイリオ" pitchFamily="50" charset="-128"/>
+                <a:ea typeface="メイリオ" pitchFamily="50" charset="-128"/>
+                <a:cs typeface="メイリオ" pitchFamily="50" charset="-128"/>
+              </a:rPr>
+              <a:t>9.</a:t>
+            </a:r>
+            <a:r>
+              <a:rPr lang="en-US" altLang="ja-JP" sz="2000" dirty="0"/>
+              <a:t> AI</a:t>
+            </a:r>
+            <a:r>
+              <a:rPr lang="ja-JP" altLang="en-US" sz="2000" dirty="0"/>
+              <a:t>活用・業務効率化についての共有</a:t>
             </a:r>
             <a:endParaRPr lang="ja-JP" altLang="en-US" sz="2000" dirty="0">
               <a:latin typeface="メイリオ" pitchFamily="50" charset="-128"/>
@@ -15118,13 +15728,19 @@
       </p:sp>
       <p:sp>
         <p:nvSpPr>
-          <p:cNvPr id="3" name="TextBox 2"/>
+          <p:cNvPr id="5" name="TextBox 2">
+            <a:extLst>
+              <a:ext uri="{FF2B5EF4-FFF2-40B4-BE49-F238E27FC236}">
+                <a16:creationId xmlns:a16="http://schemas.microsoft.com/office/drawing/2014/main" id="{CE3ECE54-AD4C-DCAA-6777-B659EE2E165E}"/>
+              </a:ext>
+            </a:extLst>
+          </p:cNvPr>
           <p:cNvSpPr txBox="1"/>
           <p:nvPr/>
         </p:nvSpPr>
         <p:spPr>
           <a:xfrm>
-            <a:off x="600000" y="700000"/>
+            <a:off x="560512" y="843381"/>
             <a:ext cx="9000000" cy="280000"/>
           </a:xfrm>
           <a:prstGeom prst="rect">
@@ -15161,14 +15777,26 @@
       </p:sp>
       <p:graphicFrame>
         <p:nvGraphicFramePr>
-          <p:cNvPr id="4" name="Table 3"/>
+          <p:cNvPr id="7" name="Table 3">
+            <a:extLst>
+              <a:ext uri="{FF2B5EF4-FFF2-40B4-BE49-F238E27FC236}">
+                <a16:creationId xmlns:a16="http://schemas.microsoft.com/office/drawing/2014/main" id="{AC23D497-251A-B4AD-265E-525FD35FB889}"/>
+              </a:ext>
+            </a:extLst>
+          </p:cNvPr>
           <p:cNvGraphicFramePr>
             <a:graphicFrameLocks noGrp="1"/>
           </p:cNvGraphicFramePr>
-          <p:nvPr/>
+          <p:nvPr>
+            <p:extLst>
+              <p:ext uri="{D42A27DB-BD31-4B8C-83A1-F6EECF244321}">
+                <p14:modId xmlns:p14="http://schemas.microsoft.com/office/powerpoint/2010/main" val="2195794075"/>
+              </p:ext>
+            </p:extLst>
+          </p:nvPr>
         </p:nvGraphicFramePr>
         <p:xfrm>
-          <a:off x="600000" y="2620000"/>
+          <a:off x="560512" y="2972461"/>
           <a:ext cx="8700000" cy="1320000"/>
         </p:xfrm>
         <a:graphic>
@@ -15178,9 +15806,27 @@
                 <a:tableStyleId>{5C22544A-7EE6-4342-B048-85BDC9FD1C3A}</a:tableStyleId>
               </a:tblPr>
               <a:tblGrid>
-                <a:gridCol w="1400000"/>
-                <a:gridCol w="3650000"/>
-                <a:gridCol w="3650000"/>
+                <a:gridCol w="1400000">
+                  <a:extLst>
+                    <a:ext uri="{9D8B030D-6E8A-4147-A177-3AD203B41FA5}">
+                      <a16:colId xmlns:a16="http://schemas.microsoft.com/office/drawing/2014/main" val="20000"/>
+                    </a:ext>
+                  </a:extLst>
+                </a:gridCol>
+                <a:gridCol w="3650000">
+                  <a:extLst>
+                    <a:ext uri="{9D8B030D-6E8A-4147-A177-3AD203B41FA5}">
+                      <a16:colId xmlns:a16="http://schemas.microsoft.com/office/drawing/2014/main" val="20001"/>
+                    </a:ext>
+                  </a:extLst>
+                </a:gridCol>
+                <a:gridCol w="3650000">
+                  <a:extLst>
+                    <a:ext uri="{9D8B030D-6E8A-4147-A177-3AD203B41FA5}">
+                      <a16:colId xmlns:a16="http://schemas.microsoft.com/office/drawing/2014/main" val="20002"/>
+                    </a:ext>
+                  </a:extLst>
+                </a:gridCol>
               </a:tblGrid>
               <a:tr h="330000">
                 <a:tc>
@@ -15255,6 +15901,11 @@
                     </a:solidFill>
                   </a:tcPr>
                 </a:tc>
+                <a:extLst>
+                  <a:ext uri="{0D108BD9-81ED-4DB2-BD59-A6C34878D82A}">
+                    <a16:rowId xmlns:a16="http://schemas.microsoft.com/office/drawing/2014/main" val="10000"/>
+                  </a:ext>
+                </a:extLst>
               </a:tr>
               <a:tr h="330000">
                 <a:tc>
@@ -15317,6 +15968,11 @@
                   </a:txBody>
                   <a:tcPr anchor="ctr"/>
                 </a:tc>
+                <a:extLst>
+                  <a:ext uri="{0D108BD9-81ED-4DB2-BD59-A6C34878D82A}">
+                    <a16:rowId xmlns:a16="http://schemas.microsoft.com/office/drawing/2014/main" val="10001"/>
+                  </a:ext>
+                </a:extLst>
               </a:tr>
               <a:tr h="330000">
                 <a:tc>
@@ -15391,6 +16047,11 @@
                     </a:solidFill>
                   </a:tcPr>
                 </a:tc>
+                <a:extLst>
+                  <a:ext uri="{0D108BD9-81ED-4DB2-BD59-A6C34878D82A}">
+                    <a16:rowId xmlns:a16="http://schemas.microsoft.com/office/drawing/2014/main" val="10002"/>
+                  </a:ext>
+                </a:extLst>
               </a:tr>
               <a:tr h="330000">
                 <a:tc>
@@ -15453,6 +16114,11 @@
                   </a:txBody>
                   <a:tcPr anchor="ctr"/>
                 </a:tc>
+                <a:extLst>
+                  <a:ext uri="{0D108BD9-81ED-4DB2-BD59-A6C34878D82A}">
+                    <a16:rowId xmlns:a16="http://schemas.microsoft.com/office/drawing/2014/main" val="10003"/>
+                  </a:ext>
+                </a:extLst>
               </a:tr>
             </a:tbl>
           </a:graphicData>
@@ -15460,13 +16126,19 @@
       </p:graphicFrame>
       <p:sp>
         <p:nvSpPr>
-          <p:cNvPr id="5" name="TextBox 4"/>
+          <p:cNvPr id="9" name="TextBox 4">
+            <a:extLst>
+              <a:ext uri="{FF2B5EF4-FFF2-40B4-BE49-F238E27FC236}">
+                <a16:creationId xmlns:a16="http://schemas.microsoft.com/office/drawing/2014/main" id="{1272A0DA-E735-8962-1ABC-9C796829947B}"/>
+              </a:ext>
+            </a:extLst>
+          </p:cNvPr>
           <p:cNvSpPr txBox="1"/>
           <p:nvPr/>
         </p:nvSpPr>
         <p:spPr>
           <a:xfrm>
-            <a:off x="600000" y="2360000"/>
+            <a:off x="560512" y="2712461"/>
             <a:ext cx="9000000" cy="260000"/>
           </a:xfrm>
           <a:prstGeom prst="rect">
@@ -15503,15 +16175,27 @@
       </p:sp>
       <p:graphicFrame>
         <p:nvGraphicFramePr>
-          <p:cNvPr id="6" name="Table 5"/>
+          <p:cNvPr id="11" name="Table 5">
+            <a:extLst>
+              <a:ext uri="{FF2B5EF4-FFF2-40B4-BE49-F238E27FC236}">
+                <a16:creationId xmlns:a16="http://schemas.microsoft.com/office/drawing/2014/main" id="{63694319-84BD-76EC-912C-F19AC7CEB965}"/>
+              </a:ext>
+            </a:extLst>
+          </p:cNvPr>
           <p:cNvGraphicFramePr>
             <a:graphicFrameLocks noGrp="1"/>
           </p:cNvGraphicFramePr>
-          <p:nvPr/>
+          <p:nvPr>
+            <p:extLst>
+              <p:ext uri="{D42A27DB-BD31-4B8C-83A1-F6EECF244321}">
+                <p14:modId xmlns:p14="http://schemas.microsoft.com/office/powerpoint/2010/main" val="1250567402"/>
+              </p:ext>
+            </p:extLst>
+          </p:nvPr>
         </p:nvGraphicFramePr>
         <p:xfrm>
-          <a:off x="600000" y="980000"/>
-          <a:ext cx="8700000" cy="1320000"/>
+          <a:off x="560512" y="1123381"/>
+          <a:ext cx="8700000" cy="1518720"/>
         </p:xfrm>
         <a:graphic>
           <a:graphicData uri="http://schemas.openxmlformats.org/drawingml/2006/table">
@@ -15520,10 +16204,34 @@
                 <a:tableStyleId>{5C22544A-7EE6-4342-B048-85BDC9FD1C3A}</a:tableStyleId>
               </a:tblPr>
               <a:tblGrid>
-                <a:gridCol w="2175000"/>
-                <a:gridCol w="2175000"/>
-                <a:gridCol w="2175000"/>
-                <a:gridCol w="2175000"/>
+                <a:gridCol w="2175000">
+                  <a:extLst>
+                    <a:ext uri="{9D8B030D-6E8A-4147-A177-3AD203B41FA5}">
+                      <a16:colId xmlns:a16="http://schemas.microsoft.com/office/drawing/2014/main" val="20000"/>
+                    </a:ext>
+                  </a:extLst>
+                </a:gridCol>
+                <a:gridCol w="2175000">
+                  <a:extLst>
+                    <a:ext uri="{9D8B030D-6E8A-4147-A177-3AD203B41FA5}">
+                      <a16:colId xmlns:a16="http://schemas.microsoft.com/office/drawing/2014/main" val="20001"/>
+                    </a:ext>
+                  </a:extLst>
+                </a:gridCol>
+                <a:gridCol w="2175000">
+                  <a:extLst>
+                    <a:ext uri="{9D8B030D-6E8A-4147-A177-3AD203B41FA5}">
+                      <a16:colId xmlns:a16="http://schemas.microsoft.com/office/drawing/2014/main" val="20002"/>
+                    </a:ext>
+                  </a:extLst>
+                </a:gridCol>
+                <a:gridCol w="2175000">
+                  <a:extLst>
+                    <a:ext uri="{9D8B030D-6E8A-4147-A177-3AD203B41FA5}">
+                      <a16:colId xmlns:a16="http://schemas.microsoft.com/office/drawing/2014/main" val="20003"/>
+                    </a:ext>
+                  </a:extLst>
+                </a:gridCol>
               </a:tblGrid>
               <a:tr h="330000">
                 <a:tc>
@@ -15622,8 +16330,40 @@
                     </a:solidFill>
                   </a:tcPr>
                 </a:tc>
+                <a:extLst>
+                  <a:ext uri="{0D108BD9-81ED-4DB2-BD59-A6C34878D82A}">
+                    <a16:rowId xmlns:a16="http://schemas.microsoft.com/office/drawing/2014/main" val="10000"/>
+                  </a:ext>
+                </a:extLst>
               </a:tr>
               <a:tr h="330000">
+                <a:tc>
+                  <a:txBody>
+                    <a:bodyPr/>
+                    <a:lstStyle/>
+                    <a:p>
+                      <a:pPr algn="l"/>
+                      <a:r>
+                        <a:rPr sz="1000" b="0" dirty="0" err="1">
+                          <a:solidFill>
+                            <a:srgbClr val="333333"/>
+                          </a:solidFill>
+                          <a:latin typeface="メイリオ"/>
+                          <a:ea typeface="メイリオ"/>
+                        </a:rPr>
+                        <a:t>思考の深さ</a:t>
+                      </a:r>
+                      <a:endParaRPr sz="1000" b="0" dirty="0">
+                        <a:solidFill>
+                          <a:srgbClr val="333333"/>
+                        </a:solidFill>
+                        <a:latin typeface="メイリオ"/>
+                        <a:ea typeface="メイリオ"/>
+                      </a:endParaRPr>
+                    </a:p>
+                  </a:txBody>
+                  <a:tcPr anchor="ctr"/>
+                </a:tc>
                 <a:tc>
                   <a:txBody>
                     <a:bodyPr/>
@@ -15638,16 +16378,9 @@
                           <a:latin typeface="メイリオ"/>
                           <a:ea typeface="メイリオ"/>
                         </a:rPr>
-                        <a:t>思考の深さ</a:t>
-                      </a:r>
-                    </a:p>
-                  </a:txBody>
-                  <a:tcPr anchor="ctr"/>
-                </a:tc>
-                <a:tc>
-                  <a:txBody>
-                    <a:bodyPr/>
-                    <a:lstStyle/>
+                        <a:t>幅広いアイデア出しや</a:t>
+                      </a:r>
+                    </a:p>
                     <a:p>
                       <a:pPr algn="l"/>
                       <a:r>
@@ -15658,9 +16391,16 @@
                           <a:latin typeface="メイリオ"/>
                           <a:ea typeface="メイリオ"/>
                         </a:rPr>
-                        <a:t>幅広いアイデア出しや</a:t>
-                      </a:r>
-                    </a:p>
+                        <a:t>壁打ちが得意</a:t>
+                      </a:r>
+                    </a:p>
+                  </a:txBody>
+                  <a:tcPr anchor="ctr"/>
+                </a:tc>
+                <a:tc>
+                  <a:txBody>
+                    <a:bodyPr/>
+                    <a:lstStyle/>
                     <a:p>
                       <a:pPr algn="l"/>
                       <a:r>
@@ -15671,16 +16411,9 @@
                           <a:latin typeface="メイリオ"/>
                           <a:ea typeface="メイリオ"/>
                         </a:rPr>
-                        <a:t>壁打ちが得意</a:t>
-                      </a:r>
-                    </a:p>
-                  </a:txBody>
-                  <a:tcPr anchor="ctr"/>
-                </a:tc>
-                <a:tc>
-                  <a:txBody>
-                    <a:bodyPr/>
-                    <a:lstStyle/>
+                        <a:t>広く拾う・素早い概観が得意</a:t>
+                      </a:r>
+                    </a:p>
                     <a:p>
                       <a:pPr algn="l"/>
                       <a:r>
@@ -15691,9 +16424,16 @@
                           <a:latin typeface="メイリオ"/>
                           <a:ea typeface="メイリオ"/>
                         </a:rPr>
-                        <a:t>広く拾う・素早い概観が得意</a:t>
-                      </a:r>
-                    </a:p>
+                        <a:t>（深さは用途次第）</a:t>
+                      </a:r>
+                    </a:p>
+                  </a:txBody>
+                  <a:tcPr anchor="ctr"/>
+                </a:tc>
+                <a:tc>
+                  <a:txBody>
+                    <a:bodyPr/>
+                    <a:lstStyle/>
                     <a:p>
                       <a:pPr algn="l"/>
                       <a:r>
@@ -15704,16 +16444,9 @@
                           <a:latin typeface="メイリオ"/>
                           <a:ea typeface="メイリオ"/>
                         </a:rPr>
-                        <a:t>（深さは用途次第）</a:t>
-                      </a:r>
-                    </a:p>
-                  </a:txBody>
-                  <a:tcPr anchor="ctr"/>
-                </a:tc>
-                <a:tc>
-                  <a:txBody>
-                    <a:bodyPr/>
-                    <a:lstStyle/>
+                        <a:t>前提・理由まで踏み込む</a:t>
+                      </a:r>
+                    </a:p>
                     <a:p>
                       <a:pPr algn="l"/>
                       <a:r>
@@ -15724,9 +16457,23 @@
                           <a:latin typeface="メイリオ"/>
                           <a:ea typeface="メイリオ"/>
                         </a:rPr>
-                        <a:t>前提・理由まで踏み込む</a:t>
-                      </a:r>
-                    </a:p>
+                        <a:t>丁寧な深掘りが強い</a:t>
+                      </a:r>
+                    </a:p>
+                  </a:txBody>
+                  <a:tcPr anchor="ctr"/>
+                </a:tc>
+                <a:extLst>
+                  <a:ext uri="{0D108BD9-81ED-4DB2-BD59-A6C34878D82A}">
+                    <a16:rowId xmlns:a16="http://schemas.microsoft.com/office/drawing/2014/main" val="10001"/>
+                  </a:ext>
+                </a:extLst>
+              </a:tr>
+              <a:tr h="330000">
+                <a:tc>
+                  <a:txBody>
+                    <a:bodyPr/>
+                    <a:lstStyle/>
                     <a:p>
                       <a:pPr algn="l"/>
                       <a:r>
@@ -15737,14 +16484,16 @@
                           <a:latin typeface="メイリオ"/>
                           <a:ea typeface="メイリオ"/>
                         </a:rPr>
-                        <a:t>丁寧な深掘りが強い</a:t>
-                      </a:r>
-                    </a:p>
-                  </a:txBody>
-                  <a:tcPr anchor="ctr"/>
-                </a:tc>
-              </a:tr>
-              <a:tr h="330000">
+                        <a:t>資料作成</a:t>
+                      </a:r>
+                    </a:p>
+                  </a:txBody>
+                  <a:tcPr anchor="ctr">
+                    <a:solidFill>
+                      <a:srgbClr val="D6E3F0"/>
+                    </a:solidFill>
+                  </a:tcPr>
+                </a:tc>
                 <a:tc>
                   <a:txBody>
                     <a:bodyPr/>
@@ -15759,20 +16508,9 @@
                           <a:latin typeface="メイリオ"/>
                           <a:ea typeface="メイリオ"/>
                         </a:rPr>
-                        <a:t>資料作成</a:t>
-                      </a:r>
-                    </a:p>
-                  </a:txBody>
-                  <a:tcPr anchor="ctr">
-                    <a:solidFill>
-                      <a:srgbClr val="D6E3F0"/>
-                    </a:solidFill>
-                  </a:tcPr>
-                </a:tc>
-                <a:tc>
-                  <a:txBody>
-                    <a:bodyPr/>
-                    <a:lstStyle/>
+                        <a:t>たたき台作成が速く</a:t>
+                      </a:r>
+                    </a:p>
                     <a:p>
                       <a:pPr algn="l"/>
                       <a:r>
@@ -15783,9 +16521,20 @@
                           <a:latin typeface="メイリオ"/>
                           <a:ea typeface="メイリオ"/>
                         </a:rPr>
-                        <a:t>たたき台作成が速く</a:t>
-                      </a:r>
-                    </a:p>
+                        <a:t>表現のバリエーションも豊富</a:t>
+                      </a:r>
+                    </a:p>
+                  </a:txBody>
+                  <a:tcPr anchor="ctr">
+                    <a:solidFill>
+                      <a:srgbClr val="D6E3F0"/>
+                    </a:solidFill>
+                  </a:tcPr>
+                </a:tc>
+                <a:tc>
+                  <a:txBody>
+                    <a:bodyPr/>
+                    <a:lstStyle/>
                     <a:p>
                       <a:pPr algn="l"/>
                       <a:r>
@@ -15796,20 +16545,9 @@
                           <a:latin typeface="メイリオ"/>
                           <a:ea typeface="メイリオ"/>
                         </a:rPr>
-                        <a:t>表現のバリエーションも豊富</a:t>
-                      </a:r>
-                    </a:p>
-                  </a:txBody>
-                  <a:tcPr anchor="ctr">
-                    <a:solidFill>
-                      <a:srgbClr val="D6E3F0"/>
-                    </a:solidFill>
-                  </a:tcPr>
-                </a:tc>
-                <a:tc>
-                  <a:txBody>
-                    <a:bodyPr/>
-                    <a:lstStyle/>
+                        <a:t>草案づくりや要約に強い</a:t>
+                      </a:r>
+                    </a:p>
                     <a:p>
                       <a:pPr algn="l"/>
                       <a:r>
@@ -15820,9 +16558,20 @@
                           <a:latin typeface="メイリオ"/>
                           <a:ea typeface="メイリオ"/>
                         </a:rPr>
-                        <a:t>草案づくりや要約に強い</a:t>
-                      </a:r>
-                    </a:p>
+                        <a:t>Google系資料との相性あり</a:t>
+                      </a:r>
+                    </a:p>
+                  </a:txBody>
+                  <a:tcPr anchor="ctr">
+                    <a:solidFill>
+                      <a:srgbClr val="D6E3F0"/>
+                    </a:solidFill>
+                  </a:tcPr>
+                </a:tc>
+                <a:tc>
+                  <a:txBody>
+                    <a:bodyPr/>
+                    <a:lstStyle/>
                     <a:p>
                       <a:pPr algn="l"/>
                       <a:r>
@@ -15833,20 +16582,9 @@
                           <a:latin typeface="メイリオ"/>
                           <a:ea typeface="メイリオ"/>
                         </a:rPr>
-                        <a:t>Google系資料との相性あり</a:t>
-                      </a:r>
-                    </a:p>
-                  </a:txBody>
-                  <a:tcPr anchor="ctr">
-                    <a:solidFill>
-                      <a:srgbClr val="D6E3F0"/>
-                    </a:solidFill>
-                  </a:tcPr>
-                </a:tc>
-                <a:tc>
-                  <a:txBody>
-                    <a:bodyPr/>
-                    <a:lstStyle/>
+                        <a:t>構成・論点が整理されやすい</a:t>
+                      </a:r>
+                    </a:p>
                     <a:p>
                       <a:pPr algn="l"/>
                       <a:r>
@@ -15857,9 +16595,27 @@
                           <a:latin typeface="メイリオ"/>
                           <a:ea typeface="メイリオ"/>
                         </a:rPr>
-                        <a:t>構成・論点が整理されやすい</a:t>
-                      </a:r>
-                    </a:p>
+                        <a:t>長文でも一貫しやすい</a:t>
+                      </a:r>
+                    </a:p>
+                  </a:txBody>
+                  <a:tcPr anchor="ctr">
+                    <a:solidFill>
+                      <a:srgbClr val="D6E3F0"/>
+                    </a:solidFill>
+                  </a:tcPr>
+                </a:tc>
+                <a:extLst>
+                  <a:ext uri="{0D108BD9-81ED-4DB2-BD59-A6C34878D82A}">
+                    <a16:rowId xmlns:a16="http://schemas.microsoft.com/office/drawing/2014/main" val="10002"/>
+                  </a:ext>
+                </a:extLst>
+              </a:tr>
+              <a:tr h="330000">
+                <a:tc>
+                  <a:txBody>
+                    <a:bodyPr/>
+                    <a:lstStyle/>
                     <a:p>
                       <a:pPr algn="l"/>
                       <a:r>
@@ -15870,18 +16626,12 @@
                           <a:latin typeface="メイリオ"/>
                           <a:ea typeface="メイリオ"/>
                         </a:rPr>
-                        <a:t>長文でも一貫しやすい</a:t>
-                      </a:r>
-                    </a:p>
-                  </a:txBody>
-                  <a:tcPr anchor="ctr">
-                    <a:solidFill>
-                      <a:srgbClr val="D6E3F0"/>
-                    </a:solidFill>
-                  </a:tcPr>
-                </a:tc>
-              </a:tr>
-              <a:tr h="330000">
+                        <a:t>業界分析</a:t>
+                      </a:r>
+                    </a:p>
+                  </a:txBody>
+                  <a:tcPr anchor="ctr"/>
+                </a:tc>
                 <a:tc>
                   <a:txBody>
                     <a:bodyPr/>
@@ -15896,16 +16646,9 @@
                           <a:latin typeface="メイリオ"/>
                           <a:ea typeface="メイリオ"/>
                         </a:rPr>
-                        <a:t>業界分析</a:t>
-                      </a:r>
-                    </a:p>
-                  </a:txBody>
-                  <a:tcPr anchor="ctr"/>
-                </a:tc>
-                <a:tc>
-                  <a:txBody>
-                    <a:bodyPr/>
-                    <a:lstStyle/>
+                        <a:t>多面的な切り口の洗い出し</a:t>
+                      </a:r>
+                    </a:p>
                     <a:p>
                       <a:pPr algn="l"/>
                       <a:r>
@@ -15916,9 +16659,16 @@
                           <a:latin typeface="メイリオ"/>
                           <a:ea typeface="メイリオ"/>
                         </a:rPr>
-                        <a:t>多面的な切り口の洗い出し</a:t>
-                      </a:r>
-                    </a:p>
+                        <a:t>ブレインストーム向き</a:t>
+                      </a:r>
+                    </a:p>
+                  </a:txBody>
+                  <a:tcPr anchor="ctr"/>
+                </a:tc>
+                <a:tc>
+                  <a:txBody>
+                    <a:bodyPr/>
+                    <a:lstStyle/>
                     <a:p>
                       <a:pPr algn="l"/>
                       <a:r>
@@ -15929,16 +16679,9 @@
                           <a:latin typeface="メイリオ"/>
                           <a:ea typeface="メイリオ"/>
                         </a:rPr>
-                        <a:t>ブレインストーム向き</a:t>
-                      </a:r>
-                    </a:p>
-                  </a:txBody>
-                  <a:tcPr anchor="ctr"/>
-                </a:tc>
-                <a:tc>
-                  <a:txBody>
-                    <a:bodyPr/>
-                    <a:lstStyle/>
+                        <a:t>最新情報の拾い上げや</a:t>
+                      </a:r>
+                    </a:p>
                     <a:p>
                       <a:pPr algn="l"/>
                       <a:r>
@@ -15949,58 +16692,64 @@
                           <a:latin typeface="メイリオ"/>
                           <a:ea typeface="メイリオ"/>
                         </a:rPr>
-                        <a:t>最新情報の拾い上げや</a:t>
-                      </a:r>
-                    </a:p>
+                        <a:t>俯瞰整理の入口に向く</a:t>
+                      </a:r>
+                    </a:p>
+                  </a:txBody>
+                  <a:tcPr anchor="ctr"/>
+                </a:tc>
+                <a:tc>
+                  <a:txBody>
+                    <a:bodyPr/>
+                    <a:lstStyle/>
                     <a:p>
                       <a:pPr algn="l"/>
                       <a:r>
-                        <a:rPr sz="1000" b="0">
+                        <a:rPr sz="1000" b="0" dirty="0" err="1">
                           <a:solidFill>
                             <a:srgbClr val="333333"/>
                           </a:solidFill>
                           <a:latin typeface="メイリオ"/>
                           <a:ea typeface="メイリオ"/>
                         </a:rPr>
-                        <a:t>俯瞰整理の入口に向く</a:t>
-                      </a:r>
-                    </a:p>
-                  </a:txBody>
-                  <a:tcPr anchor="ctr"/>
-                </a:tc>
-                <a:tc>
-                  <a:txBody>
-                    <a:bodyPr/>
-                    <a:lstStyle/>
+                        <a:t>仮説→根拠→示唆まで</a:t>
+                      </a:r>
+                      <a:endParaRPr sz="1000" b="0" dirty="0">
+                        <a:solidFill>
+                          <a:srgbClr val="333333"/>
+                        </a:solidFill>
+                        <a:latin typeface="メイリオ"/>
+                        <a:ea typeface="メイリオ"/>
+                      </a:endParaRPr>
+                    </a:p>
                     <a:p>
                       <a:pPr algn="l"/>
                       <a:r>
-                        <a:rPr sz="1000" b="0">
+                        <a:rPr sz="1000" b="0" dirty="0" err="1">
                           <a:solidFill>
                             <a:srgbClr val="333333"/>
                           </a:solidFill>
                           <a:latin typeface="メイリオ"/>
                           <a:ea typeface="メイリオ"/>
                         </a:rPr>
-                        <a:t>仮説→根拠→示唆まで</a:t>
-                      </a:r>
-                    </a:p>
-                    <a:p>
-                      <a:pPr algn="l"/>
-                      <a:r>
-                        <a:rPr sz="1000" b="0">
-                          <a:solidFill>
-                            <a:srgbClr val="333333"/>
-                          </a:solidFill>
-                          <a:latin typeface="メイリオ"/>
-                          <a:ea typeface="メイリオ"/>
-                        </a:rPr>
                         <a:t>一段深く組み立てやすい</a:t>
                       </a:r>
+                      <a:endParaRPr sz="1000" b="0" dirty="0">
+                        <a:solidFill>
+                          <a:srgbClr val="333333"/>
+                        </a:solidFill>
+                        <a:latin typeface="メイリオ"/>
+                        <a:ea typeface="メイリオ"/>
+                      </a:endParaRPr>
                     </a:p>
                   </a:txBody>
                   <a:tcPr anchor="ctr"/>
                 </a:tc>
+                <a:extLst>
+                  <a:ext uri="{0D108BD9-81ED-4DB2-BD59-A6C34878D82A}">
+                    <a16:rowId xmlns:a16="http://schemas.microsoft.com/office/drawing/2014/main" val="10003"/>
+                  </a:ext>
+                </a:extLst>
               </a:tr>
             </a:tbl>
           </a:graphicData>
@@ -16008,14 +16757,20 @@
       </p:graphicFrame>
       <p:sp>
         <p:nvSpPr>
-          <p:cNvPr id="7" name="TextBox 6"/>
+          <p:cNvPr id="13" name="TextBox 6">
+            <a:extLst>
+              <a:ext uri="{FF2B5EF4-FFF2-40B4-BE49-F238E27FC236}">
+                <a16:creationId xmlns:a16="http://schemas.microsoft.com/office/drawing/2014/main" id="{72F9CF1D-BF36-806F-4CC1-0FA05A4D5E6F}"/>
+              </a:ext>
+            </a:extLst>
+          </p:cNvPr>
           <p:cNvSpPr txBox="1"/>
           <p:nvPr/>
         </p:nvSpPr>
         <p:spPr>
           <a:xfrm>
-            <a:off x="600000" y="4020000"/>
-            <a:ext cx="9000000" cy="2500000"/>
+            <a:off x="560512" y="4384749"/>
+            <a:ext cx="9000000" cy="1564531"/>
           </a:xfrm>
           <a:prstGeom prst="rect">
             <a:avLst/>
@@ -16037,14 +16792,14 @@
               </a:spcAft>
             </a:pPr>
             <a:r>
-              <a:rPr sz="1200" b="1">
+              <a:rPr sz="1300" b="1">
                 <a:solidFill>
                   <a:srgbClr val="C00000"/>
                 </a:solidFill>
                 <a:latin typeface="メイリオ"/>
                 <a:ea typeface="メイリオ"/>
               </a:rPr>
-              <a:t>⑤ リスク・注意事項</a:t>
+              <a:t>⑤ 最終的にどこまで人が判断するか（大切）</a:t>
             </a:r>
           </a:p>
           <a:p>
@@ -16057,14 +16812,14 @@
               </a:spcAft>
             </a:pPr>
             <a:r>
-              <a:rPr sz="1000" b="0">
+              <a:rPr sz="1100" b="0">
                 <a:solidFill>
                   <a:srgbClr val="333333"/>
                 </a:solidFill>
                 <a:latin typeface="メイリオ"/>
                 <a:ea typeface="メイリオ"/>
               </a:rPr>
-              <a:t>・オプトアウト設定していても情報漏洩経路はゼロではない → 機密情報はできるだけ載せない</a:t>
+              <a:t>・楽できるところは楽にしていく。ただし「AIがやってくれたはず」は言い訳にならない</a:t>
             </a:r>
           </a:p>
           <a:p>
@@ -16077,14 +16832,14 @@
               </a:spcAft>
             </a:pPr>
             <a:r>
-              <a:rPr sz="1000" b="0">
+              <a:rPr sz="1100" b="0">
                 <a:solidFill>
                   <a:srgbClr val="333333"/>
                 </a:solidFill>
                 <a:latin typeface="メイリオ"/>
                 <a:ea typeface="メイリオ"/>
               </a:rPr>
-              <a:t>・AI実装でもコア部を勝手に書き換えられる可能性 → 最終コミット時は慎重に人が判断</a:t>
+              <a:t>・コミット前・リリース前に、人が見る範囲をチームで決めよう</a:t>
             </a:r>
           </a:p>
           <a:p>
@@ -16097,14 +16852,14 @@
               </a:spcAft>
             </a:pPr>
             <a:r>
-              <a:rPr sz="1000" b="0">
+              <a:rPr sz="400" b="0">
                 <a:solidFill>
                   <a:srgbClr val="333333"/>
                 </a:solidFill>
                 <a:latin typeface="メイリオ"/>
                 <a:ea typeface="メイリオ"/>
               </a:rPr>
-              <a:t>・その他：誤情報、根拠確認不足、チャット残存、属人化</a:t>
+              <a:t/>
             </a:r>
           </a:p>
           <a:p>
@@ -16117,14 +16872,14 @@
               </a:spcAft>
             </a:pPr>
             <a:r>
-              <a:rPr sz="1200" b="1">
+              <a:rPr sz="1300" b="1">
                 <a:solidFill>
                   <a:srgbClr val="333333"/>
                 </a:solidFill>
                 <a:latin typeface="メイリオ"/>
                 <a:ea typeface="メイリオ"/>
               </a:rPr>
-              <a:t>⑥ 爆発的に速くするために</a:t>
+              <a:t>⑥ リスク・注意事項</a:t>
             </a:r>
           </a:p>
           <a:p>
@@ -16144,7 +16899,7 @@
                 <a:latin typeface="メイリオ"/>
                 <a:ea typeface="メイリオ"/>
               </a:rPr>
-              <a:t>・EC-Rider AI（ガイド／プロンプト）の標準化　・AI範囲と人の確認観点の明確化</a:t>
+              <a:t>・機密情報はできるだけ載せない／誤情報・根拠確認不足に注意</a:t>
             </a:r>
           </a:p>
           <a:p>
@@ -16164,12 +16919,97 @@
                 <a:latin typeface="メイリオ"/>
                 <a:ea typeface="メイリオ"/>
               </a:rPr>
-              <a:t>・小さく任せる（1PR=1意図）　・テスト付きで受け取る　・成功プロンプト／失敗事例の部内共有</a:t>
+              <a:t>・チャット残存・属人化にも注意</a:t>
+            </a:r>
+          </a:p>
+          <a:p>
+            <a:pPr>
+              <a:spcBef>
+                <a:spcPts val="0"/>
+              </a:spcBef>
+              <a:spcAft>
+                <a:spcPts val="200"/>
+              </a:spcAft>
+            </a:pPr>
+            <a:r>
+              <a:rPr sz="400" b="0">
+                <a:solidFill>
+                  <a:srgbClr val="333333"/>
+                </a:solidFill>
+                <a:latin typeface="メイリオ"/>
+                <a:ea typeface="メイリオ"/>
+              </a:rPr>
+              <a:t/>
+            </a:r>
+          </a:p>
+          <a:p>
+            <a:pPr>
+              <a:spcBef>
+                <a:spcPts val="0"/>
+              </a:spcBef>
+              <a:spcAft>
+                <a:spcPts val="200"/>
+              </a:spcAft>
+            </a:pPr>
+            <a:r>
+              <a:rPr sz="1300" b="1">
+                <a:solidFill>
+                  <a:srgbClr val="333333"/>
+                </a:solidFill>
+                <a:latin typeface="メイリオ"/>
+                <a:ea typeface="メイリオ"/>
+              </a:rPr>
+              <a:t>⑦ 加速のために</a:t>
+            </a:r>
+          </a:p>
+          <a:p>
+            <a:pPr>
+              <a:spcBef>
+                <a:spcPts val="0"/>
+              </a:spcBef>
+              <a:spcAft>
+                <a:spcPts val="200"/>
+              </a:spcAft>
+            </a:pPr>
+            <a:r>
+              <a:rPr sz="1000" b="0">
+                <a:solidFill>
+                  <a:srgbClr val="333333"/>
+                </a:solidFill>
+                <a:latin typeface="メイリオ"/>
+                <a:ea typeface="メイリオ"/>
+              </a:rPr>
+              <a:t>・EC-Rider AI（ガイド／プロンプト）の標準化</a:t>
+            </a:r>
+          </a:p>
+          <a:p>
+            <a:pPr>
+              <a:spcBef>
+                <a:spcPts val="0"/>
+              </a:spcBef>
+              <a:spcAft>
+                <a:spcPts val="200"/>
+              </a:spcAft>
+            </a:pPr>
+            <a:r>
+              <a:rPr sz="1000" b="0">
+                <a:solidFill>
+                  <a:srgbClr val="333333"/>
+                </a:solidFill>
+                <a:latin typeface="メイリオ"/>
+                <a:ea typeface="メイリオ"/>
+              </a:rPr>
+              <a:t>・AI範囲と人の確認観点の明確化／成功プロンプト・失敗事例の部内共有</a:t>
             </a:r>
           </a:p>
         </p:txBody>
       </p:sp>
     </p:spTree>
+    <p:extLst>
+      <p:ext uri="{BB962C8B-B14F-4D97-AF65-F5344CB8AC3E}">
+        <p14:creationId xmlns:p14="http://schemas.microsoft.com/office/powerpoint/2010/main" val="935210728"/>
+      </p:ext>
+    </p:extLst>
   </p:cSld>
   <p:clrMapOvr>
     <a:masterClrMapping/>
@@ -16865,7 +17705,7 @@
                 <a:ea typeface="メイリオ"/>
                 <a:cs typeface="メイリオ"/>
               </a:rPr>
-              <a:t>に関するアップデートの共有？</a:t>
+              <a:t>に関するアップデートの共有</a:t>
             </a:r>
             <a:endParaRPr lang="en-US" altLang="ja-JP" sz="1600" dirty="0">
               <a:latin typeface="メイリオ"/>
@@ -17581,7 +18421,7 @@
             <a:fld id="{AC0C640D-7A54-CA47-9B56-6FBADECDE454}" type="slidenum">
               <a:rPr kumimoji="1" lang="ja-JP" altLang="en-US" smtClean="0"/>
               <a:pPr/>
-              <a:t>18</a:t>
+              <a:t>20</a:t>
             </a:fld>
             <a:endParaRPr kumimoji="1" lang="ja-JP" altLang="en-US"/>
           </a:p>
@@ -25682,14 +26522,14 @@
           <p:nvPr>
             <p:extLst>
               <p:ext uri="{D42A27DB-BD31-4B8C-83A1-F6EECF244321}">
-                <p14:modId xmlns:p14="http://schemas.microsoft.com/office/powerpoint/2010/main" val="3855426549"/>
+                <p14:modId xmlns:p14="http://schemas.microsoft.com/office/powerpoint/2010/main" val="3224969221"/>
               </p:ext>
             </p:extLst>
           </p:nvPr>
         </p:nvGraphicFramePr>
         <p:xfrm>
           <a:off x="922194" y="1386223"/>
-          <a:ext cx="3814782" cy="4074160"/>
+          <a:ext cx="3814782" cy="4054048"/>
         </p:xfrm>
         <a:graphic>
           <a:graphicData uri="http://schemas.openxmlformats.org/drawingml/2006/table">
@@ -25748,19 +26588,19 @@
                     <a:p>
                       <a:pPr algn="r"/>
                       <a:r>
-                        <a:rPr kumimoji="1" lang="en-US" altLang="ja-JP" dirty="0">
-                          <a:latin typeface="+mn-ea"/>
-                          <a:ea typeface="+mn-ea"/>
+                        <a:rPr kumimoji="1" lang="en-US" altLang="ja-JP" sz="1400" dirty="0">
+                          <a:latin typeface="メイリオ" panose="020B0604030504040204" pitchFamily="50" charset="-128"/>
+                          <a:ea typeface="メイリオ" panose="020B0604030504040204" pitchFamily="50" charset="-128"/>
                         </a:rPr>
                         <a:t>1</a:t>
                       </a:r>
-                      <a:endParaRPr kumimoji="1" lang="ja-JP" altLang="en-US" dirty="0">
-                        <a:latin typeface="+mn-ea"/>
-                        <a:ea typeface="+mn-ea"/>
+                      <a:endParaRPr kumimoji="1" lang="ja-JP" altLang="en-US" sz="1400" dirty="0">
+                        <a:latin typeface="メイリオ" panose="020B0604030504040204" pitchFamily="50" charset="-128"/>
+                        <a:ea typeface="メイリオ" panose="020B0604030504040204" pitchFamily="50" charset="-128"/>
                       </a:endParaRPr>
                     </a:p>
                   </a:txBody>
-                  <a:tcPr/>
+                  <a:tcPr anchor="ctr"/>
                 </a:tc>
                 <a:tc>
                   <a:txBody>
@@ -25768,15 +26608,15 @@
                     <a:lstStyle/>
                     <a:p>
                       <a:r>
-                        <a:rPr kumimoji="1" lang="ja-JP" altLang="en-US" dirty="0">
-                          <a:latin typeface="+mn-ea"/>
-                          <a:ea typeface="+mn-ea"/>
+                        <a:rPr kumimoji="1" lang="ja-JP" altLang="en-US" sz="1400" dirty="0">
+                          <a:latin typeface="メイリオ" panose="020B0604030504040204" pitchFamily="50" charset="-128"/>
+                          <a:ea typeface="メイリオ" panose="020B0604030504040204" pitchFamily="50" charset="-128"/>
                         </a:rPr>
                         <a:t>ナイガイ</a:t>
                       </a:r>
                     </a:p>
                   </a:txBody>
-                  <a:tcPr/>
+                  <a:tcPr anchor="ctr"/>
                 </a:tc>
                 <a:extLst>
                   <a:ext uri="{0D108BD9-81ED-4DB2-BD59-A6C34878D82A}">
@@ -25792,19 +26632,19 @@
                     <a:p>
                       <a:pPr algn="r"/>
                       <a:r>
-                        <a:rPr kumimoji="1" lang="en-US" altLang="ja-JP" dirty="0">
-                          <a:latin typeface="+mn-ea"/>
-                          <a:ea typeface="+mn-ea"/>
+                        <a:rPr kumimoji="1" lang="en-US" altLang="ja-JP" sz="1400" dirty="0">
+                          <a:latin typeface="メイリオ" panose="020B0604030504040204" pitchFamily="50" charset="-128"/>
+                          <a:ea typeface="メイリオ" panose="020B0604030504040204" pitchFamily="50" charset="-128"/>
                         </a:rPr>
                         <a:t>2</a:t>
                       </a:r>
-                      <a:endParaRPr kumimoji="1" lang="ja-JP" altLang="en-US" dirty="0">
-                        <a:latin typeface="+mn-ea"/>
-                        <a:ea typeface="+mn-ea"/>
+                      <a:endParaRPr kumimoji="1" lang="ja-JP" altLang="en-US" sz="1400" dirty="0">
+                        <a:latin typeface="メイリオ" panose="020B0604030504040204" pitchFamily="50" charset="-128"/>
+                        <a:ea typeface="メイリオ" panose="020B0604030504040204" pitchFamily="50" charset="-128"/>
                       </a:endParaRPr>
                     </a:p>
                   </a:txBody>
-                  <a:tcPr/>
+                  <a:tcPr anchor="ctr"/>
                 </a:tc>
                 <a:tc>
                   <a:txBody>
@@ -25812,15 +26652,15 @@
                     <a:lstStyle/>
                     <a:p>
                       <a:r>
-                        <a:rPr kumimoji="1" lang="ja-JP" altLang="en-US" dirty="0">
-                          <a:latin typeface="+mn-ea"/>
-                          <a:ea typeface="+mn-ea"/>
+                        <a:rPr kumimoji="1" lang="ja-JP" altLang="en-US" sz="1400" dirty="0">
+                          <a:latin typeface="メイリオ" panose="020B0604030504040204" pitchFamily="50" charset="-128"/>
+                          <a:ea typeface="メイリオ" panose="020B0604030504040204" pitchFamily="50" charset="-128"/>
                         </a:rPr>
                         <a:t>ジャクソン・ラボラトリー・ジャパン</a:t>
                       </a:r>
                     </a:p>
                   </a:txBody>
-                  <a:tcPr/>
+                  <a:tcPr anchor="ctr"/>
                 </a:tc>
                 <a:extLst>
                   <a:ext uri="{0D108BD9-81ED-4DB2-BD59-A6C34878D82A}">
@@ -25836,19 +26676,19 @@
                     <a:p>
                       <a:pPr algn="r"/>
                       <a:r>
-                        <a:rPr kumimoji="1" lang="en-US" altLang="ja-JP" dirty="0">
-                          <a:latin typeface="+mn-ea"/>
-                          <a:ea typeface="+mn-ea"/>
+                        <a:rPr kumimoji="1" lang="en-US" altLang="ja-JP" sz="1400" dirty="0">
+                          <a:latin typeface="メイリオ" panose="020B0604030504040204" pitchFamily="50" charset="-128"/>
+                          <a:ea typeface="メイリオ" panose="020B0604030504040204" pitchFamily="50" charset="-128"/>
                         </a:rPr>
                         <a:t>3</a:t>
                       </a:r>
-                      <a:endParaRPr kumimoji="1" lang="ja-JP" altLang="en-US" dirty="0">
-                        <a:latin typeface="+mn-ea"/>
-                        <a:ea typeface="+mn-ea"/>
+                      <a:endParaRPr kumimoji="1" lang="ja-JP" altLang="en-US" sz="1400" dirty="0">
+                        <a:latin typeface="メイリオ" panose="020B0604030504040204" pitchFamily="50" charset="-128"/>
+                        <a:ea typeface="メイリオ" panose="020B0604030504040204" pitchFamily="50" charset="-128"/>
                       </a:endParaRPr>
                     </a:p>
                   </a:txBody>
-                  <a:tcPr/>
+                  <a:tcPr anchor="ctr"/>
                 </a:tc>
                 <a:tc>
                   <a:txBody>
@@ -25856,15 +26696,15 @@
                     <a:lstStyle/>
                     <a:p>
                       <a:r>
-                        <a:rPr kumimoji="1" lang="ja-JP" altLang="en-US" dirty="0">
-                          <a:latin typeface="+mn-ea"/>
-                          <a:ea typeface="+mn-ea"/>
+                        <a:rPr kumimoji="1" lang="ja-JP" altLang="en-US" sz="1400" dirty="0">
+                          <a:latin typeface="メイリオ" panose="020B0604030504040204" pitchFamily="50" charset="-128"/>
+                          <a:ea typeface="メイリオ" panose="020B0604030504040204" pitchFamily="50" charset="-128"/>
                         </a:rPr>
                         <a:t>タイロテック</a:t>
                       </a:r>
                     </a:p>
                   </a:txBody>
-                  <a:tcPr/>
+                  <a:tcPr anchor="ctr"/>
                 </a:tc>
                 <a:extLst>
                   <a:ext uri="{0D108BD9-81ED-4DB2-BD59-A6C34878D82A}">
@@ -25880,19 +26720,19 @@
                     <a:p>
                       <a:pPr algn="r"/>
                       <a:r>
-                        <a:rPr kumimoji="1" lang="en-US" altLang="ja-JP" dirty="0">
-                          <a:latin typeface="+mn-ea"/>
-                          <a:ea typeface="+mn-ea"/>
+                        <a:rPr kumimoji="1" lang="en-US" altLang="ja-JP" sz="1400" dirty="0">
+                          <a:latin typeface="メイリオ" panose="020B0604030504040204" pitchFamily="50" charset="-128"/>
+                          <a:ea typeface="メイリオ" panose="020B0604030504040204" pitchFamily="50" charset="-128"/>
                         </a:rPr>
                         <a:t>4</a:t>
                       </a:r>
-                      <a:endParaRPr kumimoji="1" lang="ja-JP" altLang="en-US" dirty="0">
-                        <a:latin typeface="+mn-ea"/>
-                        <a:ea typeface="+mn-ea"/>
+                      <a:endParaRPr kumimoji="1" lang="ja-JP" altLang="en-US" sz="1400" dirty="0">
+                        <a:latin typeface="メイリオ" panose="020B0604030504040204" pitchFamily="50" charset="-128"/>
+                        <a:ea typeface="メイリオ" panose="020B0604030504040204" pitchFamily="50" charset="-128"/>
                       </a:endParaRPr>
                     </a:p>
                   </a:txBody>
-                  <a:tcPr/>
+                  <a:tcPr anchor="ctr"/>
                 </a:tc>
                 <a:tc>
                   <a:txBody>
@@ -25900,15 +26740,15 @@
                     <a:lstStyle/>
                     <a:p>
                       <a:r>
-                        <a:rPr kumimoji="1" lang="ja-JP" altLang="en-US" dirty="0">
-                          <a:latin typeface="+mn-ea"/>
-                          <a:ea typeface="+mn-ea"/>
+                        <a:rPr kumimoji="1" lang="ja-JP" altLang="en-US" sz="1400" dirty="0">
+                          <a:latin typeface="メイリオ" panose="020B0604030504040204" pitchFamily="50" charset="-128"/>
+                          <a:ea typeface="メイリオ" panose="020B0604030504040204" pitchFamily="50" charset="-128"/>
                         </a:rPr>
                         <a:t>カーコンビニ倶楽部</a:t>
                       </a:r>
                     </a:p>
                   </a:txBody>
-                  <a:tcPr/>
+                  <a:tcPr anchor="ctr"/>
                 </a:tc>
                 <a:extLst>
                   <a:ext uri="{0D108BD9-81ED-4DB2-BD59-A6C34878D82A}">
@@ -25924,19 +26764,19 @@
                     <a:p>
                       <a:pPr algn="r"/>
                       <a:r>
-                        <a:rPr kumimoji="1" lang="en-US" altLang="ja-JP" dirty="0">
-                          <a:latin typeface="+mn-ea"/>
-                          <a:ea typeface="+mn-ea"/>
+                        <a:rPr kumimoji="1" lang="en-US" altLang="ja-JP" sz="1400" dirty="0">
+                          <a:latin typeface="メイリオ" panose="020B0604030504040204" pitchFamily="50" charset="-128"/>
+                          <a:ea typeface="メイリオ" panose="020B0604030504040204" pitchFamily="50" charset="-128"/>
                         </a:rPr>
                         <a:t>5</a:t>
                       </a:r>
-                      <a:endParaRPr kumimoji="1" lang="ja-JP" altLang="en-US" dirty="0">
-                        <a:latin typeface="+mn-ea"/>
-                        <a:ea typeface="+mn-ea"/>
+                      <a:endParaRPr kumimoji="1" lang="ja-JP" altLang="en-US" sz="1400" dirty="0">
+                        <a:latin typeface="メイリオ" panose="020B0604030504040204" pitchFamily="50" charset="-128"/>
+                        <a:ea typeface="メイリオ" panose="020B0604030504040204" pitchFamily="50" charset="-128"/>
                       </a:endParaRPr>
                     </a:p>
                   </a:txBody>
-                  <a:tcPr/>
+                  <a:tcPr anchor="ctr"/>
                 </a:tc>
                 <a:tc>
                   <a:txBody>
@@ -25944,35 +26784,35 @@
                     <a:lstStyle/>
                     <a:p>
                       <a:r>
-                        <a:rPr kumimoji="1" lang="ja-JP" altLang="en-US" dirty="0">
-                          <a:latin typeface="+mn-ea"/>
-                          <a:ea typeface="+mn-ea"/>
+                        <a:rPr kumimoji="1" lang="ja-JP" altLang="en-US" sz="1400" dirty="0">
+                          <a:latin typeface="メイリオ" panose="020B0604030504040204" pitchFamily="50" charset="-128"/>
+                          <a:ea typeface="メイリオ" panose="020B0604030504040204" pitchFamily="50" charset="-128"/>
                         </a:rPr>
                         <a:t>フジキ工芸産業　</a:t>
                       </a:r>
                       <a:r>
-                        <a:rPr kumimoji="1" lang="en-US" altLang="ja-JP" sz="1600" dirty="0">
+                        <a:rPr kumimoji="1" lang="en-US" altLang="ja-JP" sz="1400" dirty="0">
                           <a:solidFill>
                             <a:srgbClr val="FF0000"/>
                           </a:solidFill>
-                          <a:latin typeface="+mn-ea"/>
-                          <a:ea typeface="+mn-ea"/>
+                          <a:latin typeface="メイリオ" panose="020B0604030504040204" pitchFamily="50" charset="-128"/>
+                          <a:ea typeface="メイリオ" panose="020B0604030504040204" pitchFamily="50" charset="-128"/>
                         </a:rPr>
                         <a:t>※7</a:t>
                       </a:r>
                       <a:r>
-                        <a:rPr kumimoji="1" lang="ja-JP" altLang="en-US" sz="1600" dirty="0">
+                        <a:rPr kumimoji="1" lang="ja-JP" altLang="en-US" sz="1400" dirty="0">
                           <a:solidFill>
                             <a:srgbClr val="FF0000"/>
                           </a:solidFill>
-                          <a:latin typeface="+mn-ea"/>
-                          <a:ea typeface="+mn-ea"/>
+                          <a:latin typeface="メイリオ" panose="020B0604030504040204" pitchFamily="50" charset="-128"/>
+                          <a:ea typeface="メイリオ" panose="020B0604030504040204" pitchFamily="50" charset="-128"/>
                         </a:rPr>
                         <a:t>月末クローズ</a:t>
                       </a:r>
                     </a:p>
                   </a:txBody>
-                  <a:tcPr/>
+                  <a:tcPr anchor="ctr"/>
                 </a:tc>
                 <a:extLst>
                   <a:ext uri="{0D108BD9-81ED-4DB2-BD59-A6C34878D82A}">
@@ -25988,19 +26828,19 @@
                     <a:p>
                       <a:pPr algn="r"/>
                       <a:r>
-                        <a:rPr kumimoji="1" lang="en-US" altLang="ja-JP" dirty="0">
-                          <a:latin typeface="+mn-ea"/>
-                          <a:ea typeface="+mn-ea"/>
+                        <a:rPr kumimoji="1" lang="en-US" altLang="ja-JP" sz="1400" dirty="0">
+                          <a:latin typeface="メイリオ" panose="020B0604030504040204" pitchFamily="50" charset="-128"/>
+                          <a:ea typeface="メイリオ" panose="020B0604030504040204" pitchFamily="50" charset="-128"/>
                         </a:rPr>
                         <a:t>6</a:t>
                       </a:r>
-                      <a:endParaRPr kumimoji="1" lang="ja-JP" altLang="en-US" dirty="0">
-                        <a:latin typeface="+mn-ea"/>
-                        <a:ea typeface="+mn-ea"/>
+                      <a:endParaRPr kumimoji="1" lang="ja-JP" altLang="en-US" sz="1400" dirty="0">
+                        <a:latin typeface="メイリオ" panose="020B0604030504040204" pitchFamily="50" charset="-128"/>
+                        <a:ea typeface="メイリオ" panose="020B0604030504040204" pitchFamily="50" charset="-128"/>
                       </a:endParaRPr>
                     </a:p>
                   </a:txBody>
-                  <a:tcPr/>
+                  <a:tcPr anchor="ctr"/>
                 </a:tc>
                 <a:tc>
                   <a:txBody>
@@ -26008,15 +26848,15 @@
                     <a:lstStyle/>
                     <a:p>
                       <a:r>
-                        <a:rPr kumimoji="1" lang="ja-JP" altLang="en-US" dirty="0">
-                          <a:latin typeface="+mn-ea"/>
-                          <a:ea typeface="+mn-ea"/>
+                        <a:rPr kumimoji="1" lang="ja-JP" altLang="en-US" sz="1400" dirty="0">
+                          <a:latin typeface="メイリオ" panose="020B0604030504040204" pitchFamily="50" charset="-128"/>
+                          <a:ea typeface="メイリオ" panose="020B0604030504040204" pitchFamily="50" charset="-128"/>
                         </a:rPr>
                         <a:t>加納コーポレーション</a:t>
                       </a:r>
                     </a:p>
                   </a:txBody>
-                  <a:tcPr/>
+                  <a:tcPr anchor="ctr"/>
                 </a:tc>
                 <a:extLst>
                   <a:ext uri="{0D108BD9-81ED-4DB2-BD59-A6C34878D82A}">
@@ -26032,19 +26872,19 @@
                     <a:p>
                       <a:pPr algn="r"/>
                       <a:r>
-                        <a:rPr kumimoji="1" lang="en-US" altLang="ja-JP" dirty="0">
-                          <a:latin typeface="+mn-ea"/>
-                          <a:ea typeface="+mn-ea"/>
+                        <a:rPr kumimoji="1" lang="en-US" altLang="ja-JP" sz="1400" dirty="0">
+                          <a:latin typeface="メイリオ" panose="020B0604030504040204" pitchFamily="50" charset="-128"/>
+                          <a:ea typeface="メイリオ" panose="020B0604030504040204" pitchFamily="50" charset="-128"/>
                         </a:rPr>
                         <a:t>7</a:t>
                       </a:r>
-                      <a:endParaRPr kumimoji="1" lang="ja-JP" altLang="en-US" dirty="0">
-                        <a:latin typeface="+mn-ea"/>
-                        <a:ea typeface="+mn-ea"/>
+                      <a:endParaRPr kumimoji="1" lang="ja-JP" altLang="en-US" sz="1400" dirty="0">
+                        <a:latin typeface="メイリオ" panose="020B0604030504040204" pitchFamily="50" charset="-128"/>
+                        <a:ea typeface="メイリオ" panose="020B0604030504040204" pitchFamily="50" charset="-128"/>
                       </a:endParaRPr>
                     </a:p>
                   </a:txBody>
-                  <a:tcPr/>
+                  <a:tcPr anchor="ctr"/>
                 </a:tc>
                 <a:tc>
                   <a:txBody>
@@ -26052,15 +26892,15 @@
                     <a:lstStyle/>
                     <a:p>
                       <a:r>
-                        <a:rPr kumimoji="1" lang="ja-JP" altLang="en-US" dirty="0">
-                          <a:latin typeface="+mn-ea"/>
-                          <a:ea typeface="+mn-ea"/>
+                        <a:rPr kumimoji="1" lang="ja-JP" altLang="en-US" sz="1400" dirty="0">
+                          <a:latin typeface="メイリオ" panose="020B0604030504040204" pitchFamily="50" charset="-128"/>
+                          <a:ea typeface="メイリオ" panose="020B0604030504040204" pitchFamily="50" charset="-128"/>
                         </a:rPr>
                         <a:t>日本ウエイン</a:t>
                       </a:r>
                     </a:p>
                   </a:txBody>
-                  <a:tcPr/>
+                  <a:tcPr anchor="ctr"/>
                 </a:tc>
                 <a:extLst>
                   <a:ext uri="{0D108BD9-81ED-4DB2-BD59-A6C34878D82A}">
@@ -26076,19 +26916,19 @@
                     <a:p>
                       <a:pPr algn="r"/>
                       <a:r>
-                        <a:rPr kumimoji="1" lang="en-US" altLang="ja-JP" dirty="0">
-                          <a:latin typeface="+mn-ea"/>
-                          <a:ea typeface="+mn-ea"/>
+                        <a:rPr kumimoji="1" lang="en-US" altLang="ja-JP" sz="1400" dirty="0">
+                          <a:latin typeface="メイリオ" panose="020B0604030504040204" pitchFamily="50" charset="-128"/>
+                          <a:ea typeface="メイリオ" panose="020B0604030504040204" pitchFamily="50" charset="-128"/>
                         </a:rPr>
                         <a:t>8</a:t>
                       </a:r>
-                      <a:endParaRPr kumimoji="1" lang="ja-JP" altLang="en-US" dirty="0">
-                        <a:latin typeface="+mn-ea"/>
-                        <a:ea typeface="+mn-ea"/>
+                      <a:endParaRPr kumimoji="1" lang="ja-JP" altLang="en-US" sz="1400" dirty="0">
+                        <a:latin typeface="メイリオ" panose="020B0604030504040204" pitchFamily="50" charset="-128"/>
+                        <a:ea typeface="メイリオ" panose="020B0604030504040204" pitchFamily="50" charset="-128"/>
                       </a:endParaRPr>
                     </a:p>
                   </a:txBody>
-                  <a:tcPr/>
+                  <a:tcPr anchor="ctr"/>
                 </a:tc>
                 <a:tc>
                   <a:txBody>
@@ -26096,26 +26936,26 @@
                     <a:lstStyle/>
                     <a:p>
                       <a:r>
-                        <a:rPr kumimoji="1" lang="ja-JP" altLang="en-US" dirty="0">
-                          <a:latin typeface="+mn-ea"/>
-                          <a:ea typeface="+mn-ea"/>
+                        <a:rPr kumimoji="1" lang="ja-JP" altLang="en-US" sz="1400" dirty="0">
+                          <a:latin typeface="メイリオ" panose="020B0604030504040204" pitchFamily="50" charset="-128"/>
+                          <a:ea typeface="メイリオ" panose="020B0604030504040204" pitchFamily="50" charset="-128"/>
                         </a:rPr>
                         <a:t>日東電工</a:t>
                       </a:r>
                       <a:r>
-                        <a:rPr kumimoji="1" lang="en-US" altLang="ja-JP" dirty="0">
-                          <a:latin typeface="+mn-ea"/>
-                          <a:ea typeface="+mn-ea"/>
+                        <a:rPr kumimoji="1" lang="en-US" altLang="ja-JP" sz="1400" dirty="0">
+                          <a:latin typeface="メイリオ" panose="020B0604030504040204" pitchFamily="50" charset="-128"/>
+                          <a:ea typeface="メイリオ" panose="020B0604030504040204" pitchFamily="50" charset="-128"/>
                         </a:rPr>
                         <a:t>BM</a:t>
                       </a:r>
-                      <a:endParaRPr kumimoji="1" lang="ja-JP" altLang="en-US" dirty="0">
-                        <a:latin typeface="+mn-ea"/>
-                        <a:ea typeface="+mn-ea"/>
+                      <a:endParaRPr kumimoji="1" lang="ja-JP" altLang="en-US" sz="1400" dirty="0">
+                        <a:latin typeface="メイリオ" panose="020B0604030504040204" pitchFamily="50" charset="-128"/>
+                        <a:ea typeface="メイリオ" panose="020B0604030504040204" pitchFamily="50" charset="-128"/>
                       </a:endParaRPr>
                     </a:p>
                   </a:txBody>
-                  <a:tcPr/>
+                  <a:tcPr anchor="ctr"/>
                 </a:tc>
                 <a:extLst>
                   <a:ext uri="{0D108BD9-81ED-4DB2-BD59-A6C34878D82A}">
@@ -26131,19 +26971,19 @@
                     <a:p>
                       <a:pPr algn="r"/>
                       <a:r>
-                        <a:rPr kumimoji="1" lang="en-US" altLang="ja-JP" dirty="0">
-                          <a:latin typeface="+mn-ea"/>
-                          <a:ea typeface="+mn-ea"/>
+                        <a:rPr kumimoji="1" lang="en-US" altLang="ja-JP" sz="1400" dirty="0">
+                          <a:latin typeface="メイリオ" panose="020B0604030504040204" pitchFamily="50" charset="-128"/>
+                          <a:ea typeface="メイリオ" panose="020B0604030504040204" pitchFamily="50" charset="-128"/>
                         </a:rPr>
                         <a:t>9</a:t>
                       </a:r>
-                      <a:endParaRPr kumimoji="1" lang="ja-JP" altLang="en-US" dirty="0">
-                        <a:latin typeface="+mn-ea"/>
-                        <a:ea typeface="+mn-ea"/>
+                      <a:endParaRPr kumimoji="1" lang="ja-JP" altLang="en-US" sz="1400" dirty="0">
+                        <a:latin typeface="メイリオ" panose="020B0604030504040204" pitchFamily="50" charset="-128"/>
+                        <a:ea typeface="メイリオ" panose="020B0604030504040204" pitchFamily="50" charset="-128"/>
                       </a:endParaRPr>
                     </a:p>
                   </a:txBody>
-                  <a:tcPr/>
+                  <a:tcPr anchor="ctr"/>
                 </a:tc>
                 <a:tc>
                   <a:txBody>
@@ -26151,15 +26991,15 @@
                     <a:lstStyle/>
                     <a:p>
                       <a:r>
-                        <a:rPr kumimoji="1" lang="ja-JP" altLang="en-US" dirty="0">
-                          <a:latin typeface="+mn-ea"/>
-                          <a:ea typeface="+mn-ea"/>
+                        <a:rPr kumimoji="1" lang="ja-JP" altLang="en-US" sz="1400" dirty="0">
+                          <a:latin typeface="メイリオ" panose="020B0604030504040204" pitchFamily="50" charset="-128"/>
+                          <a:ea typeface="メイリオ" panose="020B0604030504040204" pitchFamily="50" charset="-128"/>
                         </a:rPr>
                         <a:t>貴和製作所</a:t>
                       </a:r>
                     </a:p>
                   </a:txBody>
-                  <a:tcPr/>
+                  <a:tcPr anchor="ctr"/>
                 </a:tc>
                 <a:extLst>
                   <a:ext uri="{0D108BD9-81ED-4DB2-BD59-A6C34878D82A}">
@@ -26175,19 +27015,19 @@
                     <a:p>
                       <a:pPr algn="r"/>
                       <a:r>
-                        <a:rPr kumimoji="1" lang="en-US" altLang="ja-JP" dirty="0">
-                          <a:latin typeface="+mn-ea"/>
-                          <a:ea typeface="+mn-ea"/>
+                        <a:rPr kumimoji="1" lang="en-US" altLang="ja-JP" sz="1400" dirty="0">
+                          <a:latin typeface="メイリオ" panose="020B0604030504040204" pitchFamily="50" charset="-128"/>
+                          <a:ea typeface="メイリオ" panose="020B0604030504040204" pitchFamily="50" charset="-128"/>
                         </a:rPr>
                         <a:t>10</a:t>
                       </a:r>
-                      <a:endParaRPr kumimoji="1" lang="ja-JP" altLang="en-US" dirty="0">
-                        <a:latin typeface="+mn-ea"/>
-                        <a:ea typeface="+mn-ea"/>
+                      <a:endParaRPr kumimoji="1" lang="ja-JP" altLang="en-US" sz="1400" dirty="0">
+                        <a:latin typeface="メイリオ" panose="020B0604030504040204" pitchFamily="50" charset="-128"/>
+                        <a:ea typeface="メイリオ" panose="020B0604030504040204" pitchFamily="50" charset="-128"/>
                       </a:endParaRPr>
                     </a:p>
                   </a:txBody>
-                  <a:tcPr/>
+                  <a:tcPr anchor="ctr"/>
                 </a:tc>
                 <a:tc>
                   <a:txBody>
@@ -26195,15 +27035,15 @@
                     <a:lstStyle/>
                     <a:p>
                       <a:r>
-                        <a:rPr kumimoji="1" lang="ja-JP" altLang="en-US" dirty="0">
-                          <a:latin typeface="+mn-ea"/>
-                          <a:ea typeface="+mn-ea"/>
+                        <a:rPr kumimoji="1" lang="ja-JP" altLang="en-US" sz="1400" dirty="0">
+                          <a:latin typeface="メイリオ" panose="020B0604030504040204" pitchFamily="50" charset="-128"/>
+                          <a:ea typeface="メイリオ" panose="020B0604030504040204" pitchFamily="50" charset="-128"/>
                         </a:rPr>
                         <a:t>マルサン</a:t>
                       </a:r>
                     </a:p>
                   </a:txBody>
-                  <a:tcPr/>
+                  <a:tcPr anchor="ctr"/>
                 </a:tc>
                 <a:extLst>
                   <a:ext uri="{0D108BD9-81ED-4DB2-BD59-A6C34878D82A}">
@@ -26230,7 +27070,7 @@
           <p:nvPr>
             <p:extLst>
               <p:ext uri="{D42A27DB-BD31-4B8C-83A1-F6EECF244321}">
-                <p14:modId xmlns:p14="http://schemas.microsoft.com/office/powerpoint/2010/main" val="4206389681"/>
+                <p14:modId xmlns:p14="http://schemas.microsoft.com/office/powerpoint/2010/main" val="933450982"/>
               </p:ext>
             </p:extLst>
           </p:nvPr>
@@ -26296,19 +27136,19 @@
                     <a:p>
                       <a:pPr algn="r"/>
                       <a:r>
-                        <a:rPr kumimoji="1" lang="en-US" altLang="ja-JP" dirty="0">
-                          <a:latin typeface="+mn-ea"/>
-                          <a:ea typeface="+mn-ea"/>
+                        <a:rPr kumimoji="1" lang="en-US" altLang="ja-JP" sz="1400" dirty="0">
+                          <a:latin typeface="メイリオ" panose="020B0604030504040204" pitchFamily="50" charset="-128"/>
+                          <a:ea typeface="メイリオ" panose="020B0604030504040204" pitchFamily="50" charset="-128"/>
                         </a:rPr>
                         <a:t>11</a:t>
                       </a:r>
-                      <a:endParaRPr kumimoji="1" lang="ja-JP" altLang="en-US" dirty="0">
-                        <a:latin typeface="+mn-ea"/>
-                        <a:ea typeface="+mn-ea"/>
+                      <a:endParaRPr kumimoji="1" lang="ja-JP" altLang="en-US" sz="1400" dirty="0">
+                        <a:latin typeface="メイリオ" panose="020B0604030504040204" pitchFamily="50" charset="-128"/>
+                        <a:ea typeface="メイリオ" panose="020B0604030504040204" pitchFamily="50" charset="-128"/>
                       </a:endParaRPr>
                     </a:p>
                   </a:txBody>
-                  <a:tcPr/>
+                  <a:tcPr anchor="ctr"/>
                 </a:tc>
                 <a:tc>
                   <a:txBody>
@@ -26333,22 +27173,22 @@
                         <a:defRPr/>
                       </a:pPr>
                       <a:r>
-                        <a:rPr kumimoji="1" lang="en-US" altLang="ja-JP" dirty="0">
-                          <a:latin typeface="+mn-ea"/>
-                          <a:ea typeface="+mn-ea"/>
+                        <a:rPr kumimoji="1" lang="en-US" altLang="ja-JP" sz="1400" dirty="0">
+                          <a:latin typeface="メイリオ" panose="020B0604030504040204" pitchFamily="50" charset="-128"/>
+                          <a:ea typeface="メイリオ" panose="020B0604030504040204" pitchFamily="50" charset="-128"/>
                         </a:rPr>
                         <a:t>EM</a:t>
                       </a:r>
                       <a:r>
-                        <a:rPr kumimoji="1" lang="ja-JP" altLang="en-US" dirty="0">
-                          <a:latin typeface="+mn-ea"/>
-                          <a:ea typeface="+mn-ea"/>
+                        <a:rPr kumimoji="1" lang="ja-JP" altLang="en-US" sz="1400" dirty="0">
+                          <a:latin typeface="メイリオ" panose="020B0604030504040204" pitchFamily="50" charset="-128"/>
+                          <a:ea typeface="メイリオ" panose="020B0604030504040204" pitchFamily="50" charset="-128"/>
                         </a:rPr>
                         <a:t>システムズ</a:t>
                       </a:r>
                     </a:p>
                   </a:txBody>
-                  <a:tcPr/>
+                  <a:tcPr anchor="ctr"/>
                 </a:tc>
                 <a:extLst>
                   <a:ext uri="{0D108BD9-81ED-4DB2-BD59-A6C34878D82A}">
@@ -26364,19 +27204,19 @@
                     <a:p>
                       <a:pPr algn="r"/>
                       <a:r>
-                        <a:rPr kumimoji="1" lang="en-US" altLang="ja-JP" dirty="0">
-                          <a:latin typeface="+mn-ea"/>
-                          <a:ea typeface="+mn-ea"/>
+                        <a:rPr kumimoji="1" lang="en-US" altLang="ja-JP" sz="1400" dirty="0">
+                          <a:latin typeface="メイリオ" panose="020B0604030504040204" pitchFamily="50" charset="-128"/>
+                          <a:ea typeface="メイリオ" panose="020B0604030504040204" pitchFamily="50" charset="-128"/>
                         </a:rPr>
                         <a:t>12</a:t>
                       </a:r>
-                      <a:endParaRPr kumimoji="1" lang="ja-JP" altLang="en-US" dirty="0">
-                        <a:latin typeface="+mn-ea"/>
-                        <a:ea typeface="+mn-ea"/>
+                      <a:endParaRPr kumimoji="1" lang="ja-JP" altLang="en-US" sz="1400" dirty="0">
+                        <a:latin typeface="メイリオ" panose="020B0604030504040204" pitchFamily="50" charset="-128"/>
+                        <a:ea typeface="メイリオ" panose="020B0604030504040204" pitchFamily="50" charset="-128"/>
                       </a:endParaRPr>
                     </a:p>
                   </a:txBody>
-                  <a:tcPr/>
+                  <a:tcPr anchor="ctr"/>
                 </a:tc>
                 <a:tc>
                   <a:txBody>
@@ -26384,19 +27224,19 @@
                     <a:lstStyle/>
                     <a:p>
                       <a:r>
-                        <a:rPr kumimoji="1" lang="zh-TW" altLang="en-US" dirty="0">
-                          <a:latin typeface="+mn-ea"/>
-                          <a:ea typeface="+mn-ea"/>
+                        <a:rPr kumimoji="1" lang="zh-TW" altLang="en-US" sz="1400" dirty="0">
+                          <a:latin typeface="メイリオ" panose="020B0604030504040204" pitchFamily="50" charset="-128"/>
+                          <a:ea typeface="メイリオ" panose="020B0604030504040204" pitchFamily="50" charset="-128"/>
                         </a:rPr>
                         <a:t>日本漢字能力検定協会</a:t>
                       </a:r>
-                      <a:endParaRPr kumimoji="1" lang="ja-JP" altLang="en-US" dirty="0">
-                        <a:latin typeface="+mn-ea"/>
-                        <a:ea typeface="+mn-ea"/>
+                      <a:endParaRPr kumimoji="1" lang="ja-JP" altLang="en-US" sz="1400" dirty="0">
+                        <a:latin typeface="メイリオ" panose="020B0604030504040204" pitchFamily="50" charset="-128"/>
+                        <a:ea typeface="メイリオ" panose="020B0604030504040204" pitchFamily="50" charset="-128"/>
                       </a:endParaRPr>
                     </a:p>
                   </a:txBody>
-                  <a:tcPr/>
+                  <a:tcPr anchor="ctr"/>
                 </a:tc>
                 <a:extLst>
                   <a:ext uri="{0D108BD9-81ED-4DB2-BD59-A6C34878D82A}">
@@ -26412,19 +27252,19 @@
                     <a:p>
                       <a:pPr algn="r"/>
                       <a:r>
-                        <a:rPr kumimoji="1" lang="en-US" altLang="ja-JP" dirty="0">
-                          <a:latin typeface="+mn-ea"/>
-                          <a:ea typeface="+mn-ea"/>
+                        <a:rPr kumimoji="1" lang="en-US" altLang="ja-JP" sz="1400" dirty="0">
+                          <a:latin typeface="メイリオ" panose="020B0604030504040204" pitchFamily="50" charset="-128"/>
+                          <a:ea typeface="メイリオ" panose="020B0604030504040204" pitchFamily="50" charset="-128"/>
                         </a:rPr>
                         <a:t>13</a:t>
                       </a:r>
-                      <a:endParaRPr kumimoji="1" lang="ja-JP" altLang="en-US" dirty="0">
-                        <a:latin typeface="+mn-ea"/>
-                        <a:ea typeface="+mn-ea"/>
+                      <a:endParaRPr kumimoji="1" lang="ja-JP" altLang="en-US" sz="1400" dirty="0">
+                        <a:latin typeface="メイリオ" panose="020B0604030504040204" pitchFamily="50" charset="-128"/>
+                        <a:ea typeface="メイリオ" panose="020B0604030504040204" pitchFamily="50" charset="-128"/>
                       </a:endParaRPr>
                     </a:p>
                   </a:txBody>
-                  <a:tcPr/>
+                  <a:tcPr anchor="ctr"/>
                 </a:tc>
                 <a:tc>
                   <a:txBody>
@@ -26432,15 +27272,15 @@
                     <a:lstStyle/>
                     <a:p>
                       <a:r>
-                        <a:rPr kumimoji="1" lang="ja-JP" altLang="en-US" dirty="0">
-                          <a:latin typeface="+mn-ea"/>
-                          <a:ea typeface="+mn-ea"/>
+                        <a:rPr kumimoji="1" lang="ja-JP" altLang="en-US" sz="1400" dirty="0">
+                          <a:latin typeface="メイリオ" panose="020B0604030504040204" pitchFamily="50" charset="-128"/>
+                          <a:ea typeface="メイリオ" panose="020B0604030504040204" pitchFamily="50" charset="-128"/>
                         </a:rPr>
                         <a:t>ヤーマン</a:t>
                       </a:r>
                     </a:p>
                   </a:txBody>
-                  <a:tcPr/>
+                  <a:tcPr anchor="ctr"/>
                 </a:tc>
                 <a:extLst>
                   <a:ext uri="{0D108BD9-81ED-4DB2-BD59-A6C34878D82A}">
@@ -26455,19 +27295,19 @@
                     <a:lstStyle/>
                     <a:p>
                       <a:r>
-                        <a:rPr kumimoji="1" lang="en-US" altLang="ja-JP" dirty="0">
-                          <a:latin typeface="+mn-ea"/>
-                          <a:ea typeface="+mn-ea"/>
+                        <a:rPr kumimoji="1" lang="en-US" altLang="ja-JP" sz="1400" dirty="0">
+                          <a:latin typeface="メイリオ" panose="020B0604030504040204" pitchFamily="50" charset="-128"/>
+                          <a:ea typeface="メイリオ" panose="020B0604030504040204" pitchFamily="50" charset="-128"/>
                         </a:rPr>
                         <a:t>14</a:t>
                       </a:r>
-                      <a:endParaRPr kumimoji="1" lang="ja-JP" altLang="en-US" dirty="0">
-                        <a:latin typeface="+mn-ea"/>
-                        <a:ea typeface="+mn-ea"/>
+                      <a:endParaRPr kumimoji="1" lang="ja-JP" altLang="en-US" sz="1400" dirty="0">
+                        <a:latin typeface="メイリオ" panose="020B0604030504040204" pitchFamily="50" charset="-128"/>
+                        <a:ea typeface="メイリオ" panose="020B0604030504040204" pitchFamily="50" charset="-128"/>
                       </a:endParaRPr>
                     </a:p>
                   </a:txBody>
-                  <a:tcPr/>
+                  <a:tcPr anchor="ctr"/>
                 </a:tc>
                 <a:tc>
                   <a:txBody>
@@ -26475,15 +27315,15 @@
                     <a:lstStyle/>
                     <a:p>
                       <a:r>
-                        <a:rPr kumimoji="1" lang="ja-JP" altLang="en-US" dirty="0">
-                          <a:latin typeface="+mn-ea"/>
-                          <a:ea typeface="+mn-ea"/>
+                        <a:rPr kumimoji="1" lang="ja-JP" altLang="en-US" sz="1400" dirty="0">
+                          <a:latin typeface="メイリオ" panose="020B0604030504040204" pitchFamily="50" charset="-128"/>
+                          <a:ea typeface="メイリオ" panose="020B0604030504040204" pitchFamily="50" charset="-128"/>
                         </a:rPr>
                         <a:t>ニトムズ</a:t>
                       </a:r>
                     </a:p>
                   </a:txBody>
-                  <a:tcPr/>
+                  <a:tcPr anchor="ctr"/>
                 </a:tc>
                 <a:extLst>
                   <a:ext uri="{0D108BD9-81ED-4DB2-BD59-A6C34878D82A}">
@@ -26498,19 +27338,19 @@
                     <a:lstStyle/>
                     <a:p>
                       <a:r>
-                        <a:rPr kumimoji="1" lang="en-US" altLang="ja-JP" dirty="0">
-                          <a:latin typeface="+mn-ea"/>
-                          <a:ea typeface="+mn-ea"/>
+                        <a:rPr kumimoji="1" lang="en-US" altLang="ja-JP" sz="1400" dirty="0">
+                          <a:latin typeface="メイリオ" panose="020B0604030504040204" pitchFamily="50" charset="-128"/>
+                          <a:ea typeface="メイリオ" panose="020B0604030504040204" pitchFamily="50" charset="-128"/>
                         </a:rPr>
                         <a:t>15</a:t>
                       </a:r>
-                      <a:endParaRPr kumimoji="1" lang="ja-JP" altLang="en-US" dirty="0">
-                        <a:latin typeface="+mn-ea"/>
-                        <a:ea typeface="+mn-ea"/>
+                      <a:endParaRPr kumimoji="1" lang="ja-JP" altLang="en-US" sz="1400" dirty="0">
+                        <a:latin typeface="メイリオ" panose="020B0604030504040204" pitchFamily="50" charset="-128"/>
+                        <a:ea typeface="メイリオ" panose="020B0604030504040204" pitchFamily="50" charset="-128"/>
                       </a:endParaRPr>
                     </a:p>
                   </a:txBody>
-                  <a:tcPr/>
+                  <a:tcPr anchor="ctr"/>
                 </a:tc>
                 <a:tc>
                   <a:txBody>
@@ -26535,15 +27375,15 @@
                         <a:defRPr/>
                       </a:pPr>
                       <a:r>
-                        <a:rPr kumimoji="1" lang="ja-JP" altLang="en-US" dirty="0">
-                          <a:latin typeface="+mn-ea"/>
-                          <a:ea typeface="+mn-ea"/>
+                        <a:rPr kumimoji="1" lang="ja-JP" altLang="en-US" sz="1400" dirty="0">
+                          <a:latin typeface="メイリオ" panose="020B0604030504040204" pitchFamily="50" charset="-128"/>
+                          <a:ea typeface="メイリオ" panose="020B0604030504040204" pitchFamily="50" charset="-128"/>
                         </a:rPr>
                         <a:t>ティーガイア</a:t>
                       </a:r>
                     </a:p>
                   </a:txBody>
-                  <a:tcPr/>
+                  <a:tcPr anchor="ctr"/>
                 </a:tc>
                 <a:extLst>
                   <a:ext uri="{0D108BD9-81ED-4DB2-BD59-A6C34878D82A}">
@@ -26558,19 +27398,19 @@
                     <a:lstStyle/>
                     <a:p>
                       <a:r>
-                        <a:rPr kumimoji="1" lang="en-US" altLang="ja-JP" dirty="0">
-                          <a:latin typeface="+mn-ea"/>
-                          <a:ea typeface="+mn-ea"/>
+                        <a:rPr kumimoji="1" lang="en-US" altLang="ja-JP" sz="1400" dirty="0">
+                          <a:latin typeface="メイリオ" panose="020B0604030504040204" pitchFamily="50" charset="-128"/>
+                          <a:ea typeface="メイリオ" panose="020B0604030504040204" pitchFamily="50" charset="-128"/>
                         </a:rPr>
                         <a:t>16</a:t>
                       </a:r>
-                      <a:endParaRPr kumimoji="1" lang="ja-JP" altLang="en-US" dirty="0">
-                        <a:latin typeface="+mn-ea"/>
-                        <a:ea typeface="+mn-ea"/>
+                      <a:endParaRPr kumimoji="1" lang="ja-JP" altLang="en-US" sz="1400" dirty="0">
+                        <a:latin typeface="メイリオ" panose="020B0604030504040204" pitchFamily="50" charset="-128"/>
+                        <a:ea typeface="メイリオ" panose="020B0604030504040204" pitchFamily="50" charset="-128"/>
                       </a:endParaRPr>
                     </a:p>
                   </a:txBody>
-                  <a:tcPr/>
+                  <a:tcPr anchor="ctr"/>
                 </a:tc>
                 <a:tc>
                   <a:txBody>
@@ -26595,46 +27435,39 @@
                         <a:defRPr/>
                       </a:pPr>
                       <a:r>
-                        <a:rPr kumimoji="1" lang="ja-JP" altLang="en-US" dirty="0">
-                          <a:latin typeface="+mn-ea"/>
-                          <a:ea typeface="+mn-ea"/>
-                        </a:rPr>
-                        <a:t>アシックス商事</a:t>
-                      </a:r>
-                      <a:r>
-                        <a:rPr kumimoji="1" lang="ja-JP" altLang="en-US" sz="1600" dirty="0">
-                          <a:latin typeface="+mn-ea"/>
-                          <a:ea typeface="+mn-ea"/>
-                        </a:rPr>
-                        <a:t>　</a:t>
-                      </a:r>
-                      <a:r>
-                        <a:rPr kumimoji="1" lang="en-US" altLang="ja-JP" sz="1600" dirty="0">
+                        <a:rPr kumimoji="1" lang="ja-JP" altLang="en-US" sz="1400" dirty="0">
+                          <a:latin typeface="メイリオ" panose="020B0604030504040204" pitchFamily="50" charset="-128"/>
+                          <a:ea typeface="メイリオ" panose="020B0604030504040204" pitchFamily="50" charset="-128"/>
+                        </a:rPr>
+                        <a:t>アシックス商事　</a:t>
+                      </a:r>
+                      <a:r>
+                        <a:rPr kumimoji="1" lang="en-US" altLang="ja-JP" sz="1400" dirty="0">
                           <a:solidFill>
                             <a:srgbClr val="FF0000"/>
                           </a:solidFill>
-                          <a:latin typeface="+mn-ea"/>
-                          <a:ea typeface="+mn-ea"/>
+                          <a:latin typeface="メイリオ" panose="020B0604030504040204" pitchFamily="50" charset="-128"/>
+                          <a:ea typeface="メイリオ" panose="020B0604030504040204" pitchFamily="50" charset="-128"/>
                         </a:rPr>
                         <a:t>※9</a:t>
                       </a:r>
                       <a:r>
-                        <a:rPr kumimoji="1" lang="ja-JP" altLang="en-US" sz="1600" dirty="0">
+                        <a:rPr kumimoji="1" lang="ja-JP" altLang="en-US" sz="1400" dirty="0">
                           <a:solidFill>
                             <a:srgbClr val="FF0000"/>
                           </a:solidFill>
-                          <a:latin typeface="+mn-ea"/>
-                          <a:ea typeface="+mn-ea"/>
+                          <a:latin typeface="メイリオ" panose="020B0604030504040204" pitchFamily="50" charset="-128"/>
+                          <a:ea typeface="メイリオ" panose="020B0604030504040204" pitchFamily="50" charset="-128"/>
                         </a:rPr>
                         <a:t>月末クローズ</a:t>
                       </a:r>
-                      <a:endParaRPr kumimoji="1" lang="ja-JP" altLang="en-US" sz="1600" dirty="0">
-                        <a:latin typeface="+mn-ea"/>
-                        <a:ea typeface="+mn-ea"/>
+                      <a:endParaRPr kumimoji="1" lang="ja-JP" altLang="en-US" sz="1400" dirty="0">
+                        <a:latin typeface="メイリオ" panose="020B0604030504040204" pitchFamily="50" charset="-128"/>
+                        <a:ea typeface="メイリオ" panose="020B0604030504040204" pitchFamily="50" charset="-128"/>
                       </a:endParaRPr>
                     </a:p>
                   </a:txBody>
-                  <a:tcPr/>
+                  <a:tcPr anchor="ctr"/>
                 </a:tc>
                 <a:extLst>
                   <a:ext uri="{0D108BD9-81ED-4DB2-BD59-A6C34878D82A}">
@@ -26649,19 +27482,19 @@
                     <a:lstStyle/>
                     <a:p>
                       <a:r>
-                        <a:rPr kumimoji="1" lang="en-US" altLang="ja-JP" dirty="0">
-                          <a:latin typeface="+mn-ea"/>
-                          <a:ea typeface="+mn-ea"/>
+                        <a:rPr kumimoji="1" lang="en-US" altLang="ja-JP" sz="1400" dirty="0">
+                          <a:latin typeface="メイリオ" panose="020B0604030504040204" pitchFamily="50" charset="-128"/>
+                          <a:ea typeface="メイリオ" panose="020B0604030504040204" pitchFamily="50" charset="-128"/>
                         </a:rPr>
                         <a:t>17</a:t>
                       </a:r>
-                      <a:endParaRPr kumimoji="1" lang="ja-JP" altLang="en-US" dirty="0">
-                        <a:latin typeface="+mn-ea"/>
-                        <a:ea typeface="+mn-ea"/>
+                      <a:endParaRPr kumimoji="1" lang="ja-JP" altLang="en-US" sz="1400" dirty="0">
+                        <a:latin typeface="メイリオ" panose="020B0604030504040204" pitchFamily="50" charset="-128"/>
+                        <a:ea typeface="メイリオ" panose="020B0604030504040204" pitchFamily="50" charset="-128"/>
                       </a:endParaRPr>
                     </a:p>
                   </a:txBody>
-                  <a:tcPr/>
+                  <a:tcPr anchor="ctr"/>
                 </a:tc>
                 <a:tc>
                   <a:txBody>
@@ -26686,15 +27519,15 @@
                         <a:defRPr/>
                       </a:pPr>
                       <a:r>
-                        <a:rPr kumimoji="1" lang="ja-JP" altLang="en-US" sz="1600" dirty="0">
-                          <a:latin typeface="+mn-ea"/>
-                          <a:ea typeface="+mn-ea"/>
+                        <a:rPr kumimoji="1" lang="ja-JP" altLang="en-US" sz="1400" dirty="0">
+                          <a:latin typeface="メイリオ" panose="020B0604030504040204" pitchFamily="50" charset="-128"/>
+                          <a:ea typeface="メイリオ" panose="020B0604030504040204" pitchFamily="50" charset="-128"/>
                         </a:rPr>
                         <a:t>パシフィックプロダクツ</a:t>
                       </a:r>
                     </a:p>
                   </a:txBody>
-                  <a:tcPr/>
+                  <a:tcPr anchor="ctr"/>
                 </a:tc>
                 <a:extLst>
                   <a:ext uri="{0D108BD9-81ED-4DB2-BD59-A6C34878D82A}">
@@ -26709,19 +27542,19 @@
                     <a:lstStyle/>
                     <a:p>
                       <a:r>
-                        <a:rPr kumimoji="1" lang="en-US" altLang="ja-JP" dirty="0">
-                          <a:latin typeface="+mn-ea"/>
-                          <a:ea typeface="+mn-ea"/>
+                        <a:rPr kumimoji="1" lang="en-US" altLang="ja-JP" sz="1400" dirty="0">
+                          <a:latin typeface="メイリオ" panose="020B0604030504040204" pitchFamily="50" charset="-128"/>
+                          <a:ea typeface="メイリオ" panose="020B0604030504040204" pitchFamily="50" charset="-128"/>
                         </a:rPr>
                         <a:t>18</a:t>
                       </a:r>
-                      <a:endParaRPr kumimoji="1" lang="ja-JP" altLang="en-US" dirty="0">
-                        <a:latin typeface="+mn-ea"/>
-                        <a:ea typeface="+mn-ea"/>
+                      <a:endParaRPr kumimoji="1" lang="ja-JP" altLang="en-US" sz="1400" dirty="0">
+                        <a:latin typeface="メイリオ" panose="020B0604030504040204" pitchFamily="50" charset="-128"/>
+                        <a:ea typeface="メイリオ" panose="020B0604030504040204" pitchFamily="50" charset="-128"/>
                       </a:endParaRPr>
                     </a:p>
                   </a:txBody>
-                  <a:tcPr/>
+                  <a:tcPr anchor="ctr"/>
                 </a:tc>
                 <a:tc>
                   <a:txBody>
@@ -26746,15 +27579,15 @@
                         <a:defRPr/>
                       </a:pPr>
                       <a:r>
-                        <a:rPr kumimoji="1" lang="ja-JP" altLang="en-US" dirty="0">
-                          <a:latin typeface="+mn-ea"/>
-                          <a:ea typeface="+mn-ea"/>
+                        <a:rPr kumimoji="1" lang="ja-JP" altLang="en-US" sz="1400" dirty="0">
+                          <a:latin typeface="メイリオ" panose="020B0604030504040204" pitchFamily="50" charset="-128"/>
+                          <a:ea typeface="メイリオ" panose="020B0604030504040204" pitchFamily="50" charset="-128"/>
                         </a:rPr>
                         <a:t>紀伊國屋書店</a:t>
                       </a:r>
                     </a:p>
                   </a:txBody>
-                  <a:tcPr/>
+                  <a:tcPr anchor="ctr"/>
                 </a:tc>
                 <a:extLst>
                   <a:ext uri="{0D108BD9-81ED-4DB2-BD59-A6C34878D82A}">
@@ -26769,19 +27602,19 @@
                     <a:lstStyle/>
                     <a:p>
                       <a:r>
-                        <a:rPr kumimoji="1" lang="en-US" altLang="ja-JP" dirty="0">
-                          <a:latin typeface="+mn-ea"/>
-                          <a:ea typeface="+mn-ea"/>
+                        <a:rPr kumimoji="1" lang="en-US" altLang="ja-JP" sz="1400" dirty="0">
+                          <a:latin typeface="メイリオ" panose="020B0604030504040204" pitchFamily="50" charset="-128"/>
+                          <a:ea typeface="メイリオ" panose="020B0604030504040204" pitchFamily="50" charset="-128"/>
                         </a:rPr>
                         <a:t>19</a:t>
                       </a:r>
-                      <a:endParaRPr kumimoji="1" lang="ja-JP" altLang="en-US" dirty="0">
-                        <a:latin typeface="+mn-ea"/>
-                        <a:ea typeface="+mn-ea"/>
+                      <a:endParaRPr kumimoji="1" lang="ja-JP" altLang="en-US" sz="1400" dirty="0">
+                        <a:latin typeface="メイリオ" panose="020B0604030504040204" pitchFamily="50" charset="-128"/>
+                        <a:ea typeface="メイリオ" panose="020B0604030504040204" pitchFamily="50" charset="-128"/>
                       </a:endParaRPr>
                     </a:p>
                   </a:txBody>
-                  <a:tcPr/>
+                  <a:tcPr anchor="ctr"/>
                 </a:tc>
                 <a:tc>
                   <a:txBody>
@@ -26806,35 +27639,35 @@
                         <a:defRPr/>
                       </a:pPr>
                       <a:r>
-                        <a:rPr kumimoji="1" lang="ja-JP" altLang="en-US" dirty="0">
+                        <a:rPr kumimoji="1" lang="ja-JP" altLang="en-US" sz="1400" dirty="0">
                           <a:solidFill>
                             <a:schemeClr val="tx1"/>
                           </a:solidFill>
-                          <a:latin typeface="+mn-ea"/>
-                          <a:ea typeface="+mn-ea"/>
+                          <a:latin typeface="メイリオ" panose="020B0604030504040204" pitchFamily="50" charset="-128"/>
+                          <a:ea typeface="メイリオ" panose="020B0604030504040204" pitchFamily="50" charset="-128"/>
                         </a:rPr>
                         <a:t>キャンドゥ　</a:t>
                       </a:r>
                       <a:r>
-                        <a:rPr kumimoji="1" lang="en-US" altLang="ja-JP" dirty="0">
+                        <a:rPr kumimoji="1" lang="en-US" altLang="ja-JP" sz="1400" dirty="0">
                           <a:solidFill>
                             <a:schemeClr val="tx1"/>
                           </a:solidFill>
-                          <a:latin typeface="+mn-ea"/>
-                          <a:ea typeface="+mn-ea"/>
+                          <a:latin typeface="メイリオ" panose="020B0604030504040204" pitchFamily="50" charset="-128"/>
+                          <a:ea typeface="メイリオ" panose="020B0604030504040204" pitchFamily="50" charset="-128"/>
                         </a:rPr>
                         <a:t>※1</a:t>
                       </a:r>
-                      <a:endParaRPr kumimoji="1" lang="ja-JP" altLang="en-US" dirty="0">
+                      <a:endParaRPr kumimoji="1" lang="ja-JP" altLang="en-US" sz="1400" dirty="0">
                         <a:solidFill>
                           <a:schemeClr val="tx1"/>
                         </a:solidFill>
-                        <a:latin typeface="+mn-ea"/>
-                        <a:ea typeface="+mn-ea"/>
+                        <a:latin typeface="メイリオ" panose="020B0604030504040204" pitchFamily="50" charset="-128"/>
+                        <a:ea typeface="メイリオ" panose="020B0604030504040204" pitchFamily="50" charset="-128"/>
                       </a:endParaRPr>
                     </a:p>
                   </a:txBody>
-                  <a:tcPr/>
+                  <a:tcPr anchor="ctr"/>
                 </a:tc>
                 <a:extLst>
                   <a:ext uri="{0D108BD9-81ED-4DB2-BD59-A6C34878D82A}">
@@ -26849,19 +27682,19 @@
                     <a:lstStyle/>
                     <a:p>
                       <a:r>
-                        <a:rPr kumimoji="1" lang="en-US" altLang="ja-JP" dirty="0">
-                          <a:latin typeface="+mn-ea"/>
-                          <a:ea typeface="+mn-ea"/>
+                        <a:rPr kumimoji="1" lang="en-US" altLang="ja-JP" sz="1400" dirty="0">
+                          <a:latin typeface="メイリオ" panose="020B0604030504040204" pitchFamily="50" charset="-128"/>
+                          <a:ea typeface="メイリオ" panose="020B0604030504040204" pitchFamily="50" charset="-128"/>
                         </a:rPr>
                         <a:t>20</a:t>
                       </a:r>
-                      <a:endParaRPr kumimoji="1" lang="ja-JP" altLang="en-US" dirty="0">
-                        <a:latin typeface="+mn-ea"/>
-                        <a:ea typeface="+mn-ea"/>
+                      <a:endParaRPr kumimoji="1" lang="ja-JP" altLang="en-US" sz="1400" dirty="0">
+                        <a:latin typeface="メイリオ" panose="020B0604030504040204" pitchFamily="50" charset="-128"/>
+                        <a:ea typeface="メイリオ" panose="020B0604030504040204" pitchFamily="50" charset="-128"/>
                       </a:endParaRPr>
                     </a:p>
                   </a:txBody>
-                  <a:tcPr/>
+                  <a:tcPr anchor="ctr"/>
                 </a:tc>
                 <a:tc>
                   <a:txBody>
@@ -26886,35 +27719,35 @@
                         <a:defRPr/>
                       </a:pPr>
                       <a:r>
-                        <a:rPr kumimoji="1" lang="ja-JP" altLang="en-US" dirty="0">
+                        <a:rPr kumimoji="1" lang="ja-JP" altLang="en-US" sz="1400" dirty="0">
                           <a:solidFill>
                             <a:schemeClr val="tx1"/>
                           </a:solidFill>
-                          <a:latin typeface="+mn-ea"/>
-                          <a:ea typeface="+mn-ea"/>
+                          <a:latin typeface="メイリオ" panose="020B0604030504040204" pitchFamily="50" charset="-128"/>
+                          <a:ea typeface="メイリオ" panose="020B0604030504040204" pitchFamily="50" charset="-128"/>
                         </a:rPr>
                         <a:t>ポディウム　</a:t>
                       </a:r>
                       <a:r>
-                        <a:rPr kumimoji="1" lang="en-US" altLang="ja-JP" dirty="0">
+                        <a:rPr kumimoji="1" lang="en-US" altLang="ja-JP" sz="1400" dirty="0">
                           <a:solidFill>
                             <a:schemeClr val="tx1"/>
                           </a:solidFill>
-                          <a:latin typeface="+mn-ea"/>
-                          <a:ea typeface="+mn-ea"/>
+                          <a:latin typeface="メイリオ" panose="020B0604030504040204" pitchFamily="50" charset="-128"/>
+                          <a:ea typeface="メイリオ" panose="020B0604030504040204" pitchFamily="50" charset="-128"/>
                         </a:rPr>
                         <a:t>※1</a:t>
                       </a:r>
-                      <a:endParaRPr kumimoji="1" lang="ja-JP" altLang="en-US" dirty="0">
+                      <a:endParaRPr kumimoji="1" lang="ja-JP" altLang="en-US" sz="1400" dirty="0">
                         <a:solidFill>
                           <a:schemeClr val="tx1"/>
                         </a:solidFill>
-                        <a:latin typeface="+mn-ea"/>
-                        <a:ea typeface="+mn-ea"/>
+                        <a:latin typeface="メイリオ" panose="020B0604030504040204" pitchFamily="50" charset="-128"/>
+                        <a:ea typeface="メイリオ" panose="020B0604030504040204" pitchFamily="50" charset="-128"/>
                       </a:endParaRPr>
                     </a:p>
                   </a:txBody>
-                  <a:tcPr/>
+                  <a:tcPr anchor="ctr"/>
                 </a:tc>
                 <a:extLst>
                   <a:ext uri="{0D108BD9-81ED-4DB2-BD59-A6C34878D82A}">
@@ -26997,7 +27830,7 @@
         <p:spPr>
           <a:xfrm>
             <a:off x="5385048" y="5510324"/>
-            <a:ext cx="2808312" cy="338554"/>
+            <a:ext cx="2808312" cy="307777"/>
           </a:xfrm>
           <a:prstGeom prst="rect">
             <a:avLst/>
@@ -27011,21 +27844,24 @@
           <a:lstStyle/>
           <a:p>
             <a:r>
-              <a:rPr lang="en-US" altLang="ja-JP" sz="1600" dirty="0">
-                <a:latin typeface="+mn-ea"/>
+              <a:rPr lang="en-US" altLang="ja-JP" sz="1400" dirty="0">
+                <a:latin typeface="メイリオ" panose="020B0604030504040204" pitchFamily="50" charset="-128"/>
+                <a:ea typeface="メイリオ" panose="020B0604030504040204" pitchFamily="50" charset="-128"/>
                 <a:cs typeface="メイリオ"/>
               </a:rPr>
               <a:t>※1</a:t>
             </a:r>
             <a:r>
-              <a:rPr lang="ja-JP" altLang="en-US" sz="1600" dirty="0">
-                <a:latin typeface="+mn-ea"/>
+              <a:rPr lang="ja-JP" altLang="en-US" sz="1400" dirty="0">
+                <a:latin typeface="メイリオ" panose="020B0604030504040204" pitchFamily="50" charset="-128"/>
+                <a:ea typeface="メイリオ" panose="020B0604030504040204" pitchFamily="50" charset="-128"/>
                 <a:cs typeface="メイリオ"/>
               </a:rPr>
               <a:t>　新パッケージ</a:t>
             </a:r>
-            <a:endParaRPr lang="en-US" altLang="ja-JP" sz="1600" dirty="0">
-              <a:latin typeface="+mn-ea"/>
+            <a:endParaRPr lang="en-US" altLang="ja-JP" sz="1400" dirty="0">
+              <a:latin typeface="メイリオ" panose="020B0604030504040204" pitchFamily="50" charset="-128"/>
+              <a:ea typeface="メイリオ" panose="020B0604030504040204" pitchFamily="50" charset="-128"/>
               <a:cs typeface="メイリオ"/>
             </a:endParaRPr>
           </a:p>
@@ -27142,7 +27978,7 @@
           <p:nvPr>
             <p:extLst>
               <p:ext uri="{D42A27DB-BD31-4B8C-83A1-F6EECF244321}">
-                <p14:modId xmlns:p14="http://schemas.microsoft.com/office/powerpoint/2010/main" val="1791965045"/>
+                <p14:modId xmlns:p14="http://schemas.microsoft.com/office/powerpoint/2010/main" val="3458039437"/>
               </p:ext>
             </p:extLst>
           </p:nvPr>
@@ -27186,7 +28022,10 @@
                     <a:bodyPr/>
                     <a:lstStyle/>
                     <a:p>
-                      <a:endParaRPr kumimoji="1" lang="ja-JP" altLang="en-US" dirty="0"/>
+                      <a:endParaRPr kumimoji="1" lang="ja-JP" altLang="en-US" sz="1400" dirty="0">
+                        <a:latin typeface="メイリオ" panose="020B0604030504040204" pitchFamily="50" charset="-128"/>
+                        <a:ea typeface="メイリオ" panose="020B0604030504040204" pitchFamily="50" charset="-128"/>
+                      </a:endParaRPr>
                     </a:p>
                   </a:txBody>
                   <a:tcPr/>
@@ -27198,7 +28037,10 @@
                     <a:p>
                       <a:pPr algn="ctr"/>
                       <a:r>
-                        <a:rPr kumimoji="1" lang="ja-JP" altLang="en-US" dirty="0"/>
+                        <a:rPr kumimoji="1" lang="ja-JP" altLang="en-US" sz="1400" dirty="0">
+                          <a:latin typeface="メイリオ" panose="020B0604030504040204" pitchFamily="50" charset="-128"/>
+                          <a:ea typeface="メイリオ" panose="020B0604030504040204" pitchFamily="50" charset="-128"/>
+                        </a:rPr>
                         <a:t>顧客名</a:t>
                       </a:r>
                     </a:p>
@@ -27211,22 +28053,37 @@
                     <a:lstStyle/>
                     <a:p>
                       <a:r>
-                        <a:rPr kumimoji="1" lang="ja-JP" altLang="en-US" dirty="0"/>
+                        <a:rPr kumimoji="1" lang="ja-JP" altLang="en-US" sz="1400" dirty="0">
+                          <a:latin typeface="メイリオ" panose="020B0604030504040204" pitchFamily="50" charset="-128"/>
+                          <a:ea typeface="メイリオ" panose="020B0604030504040204" pitchFamily="50" charset="-128"/>
+                        </a:rPr>
                         <a:t>保守時間</a:t>
                       </a:r>
                       <a:r>
-                        <a:rPr kumimoji="1" lang="en-US" altLang="ja-JP" dirty="0"/>
+                        <a:rPr kumimoji="1" lang="en-US" altLang="ja-JP" sz="1400" dirty="0">
+                          <a:latin typeface="メイリオ" panose="020B0604030504040204" pitchFamily="50" charset="-128"/>
+                          <a:ea typeface="メイリオ" panose="020B0604030504040204" pitchFamily="50" charset="-128"/>
+                        </a:rPr>
                         <a:t>(</a:t>
                       </a:r>
                       <a:r>
-                        <a:rPr kumimoji="1" lang="ja-JP" altLang="en-US" dirty="0"/>
+                        <a:rPr kumimoji="1" lang="ja-JP" altLang="en-US" sz="1400" dirty="0">
+                          <a:latin typeface="メイリオ" panose="020B0604030504040204" pitchFamily="50" charset="-128"/>
+                          <a:ea typeface="メイリオ" panose="020B0604030504040204" pitchFamily="50" charset="-128"/>
+                        </a:rPr>
                         <a:t>月</a:t>
                       </a:r>
                       <a:r>
-                        <a:rPr kumimoji="1" lang="en-US" altLang="ja-JP" dirty="0"/>
+                        <a:rPr kumimoji="1" lang="en-US" altLang="ja-JP" sz="1400" dirty="0">
+                          <a:latin typeface="メイリオ" panose="020B0604030504040204" pitchFamily="50" charset="-128"/>
+                          <a:ea typeface="メイリオ" panose="020B0604030504040204" pitchFamily="50" charset="-128"/>
+                        </a:rPr>
                         <a:t>)</a:t>
                       </a:r>
-                      <a:endParaRPr kumimoji="1" lang="ja-JP" altLang="en-US" dirty="0"/>
+                      <a:endParaRPr kumimoji="1" lang="ja-JP" altLang="en-US" sz="1400" dirty="0">
+                        <a:latin typeface="メイリオ" panose="020B0604030504040204" pitchFamily="50" charset="-128"/>
+                        <a:ea typeface="メイリオ" panose="020B0604030504040204" pitchFamily="50" charset="-128"/>
+                      </a:endParaRPr>
                     </a:p>
                   </a:txBody>
                   <a:tcPr/>
@@ -27245,15 +28102,15 @@
                     <a:p>
                       <a:pPr algn="r"/>
                       <a:r>
-                        <a:rPr kumimoji="1" lang="en-US" altLang="ja-JP" dirty="0">
-                          <a:latin typeface="+mn-ea"/>
-                          <a:ea typeface="+mn-ea"/>
+                        <a:rPr kumimoji="1" lang="en-US" altLang="ja-JP" sz="1400" dirty="0">
+                          <a:latin typeface="メイリオ" panose="020B0604030504040204" pitchFamily="50" charset="-128"/>
+                          <a:ea typeface="メイリオ" panose="020B0604030504040204" pitchFamily="50" charset="-128"/>
                         </a:rPr>
                         <a:t>1</a:t>
                       </a:r>
-                      <a:endParaRPr kumimoji="1" lang="ja-JP" altLang="en-US" dirty="0">
-                        <a:latin typeface="+mn-ea"/>
-                        <a:ea typeface="+mn-ea"/>
+                      <a:endParaRPr kumimoji="1" lang="ja-JP" altLang="en-US" sz="1400" dirty="0">
+                        <a:latin typeface="メイリオ" panose="020B0604030504040204" pitchFamily="50" charset="-128"/>
+                        <a:ea typeface="メイリオ" panose="020B0604030504040204" pitchFamily="50" charset="-128"/>
                       </a:endParaRPr>
                     </a:p>
                   </a:txBody>
@@ -27265,9 +28122,9 @@
                     <a:lstStyle/>
                     <a:p>
                       <a:r>
-                        <a:rPr kumimoji="1" lang="ja-JP" altLang="en-US" dirty="0">
-                          <a:latin typeface="+mn-ea"/>
-                          <a:ea typeface="+mn-ea"/>
+                        <a:rPr kumimoji="1" lang="ja-JP" altLang="en-US" sz="1400" dirty="0">
+                          <a:latin typeface="メイリオ" panose="020B0604030504040204" pitchFamily="50" charset="-128"/>
+                          <a:ea typeface="メイリオ" panose="020B0604030504040204" pitchFamily="50" charset="-128"/>
                         </a:rPr>
                         <a:t>ジャクソン・ラボラトリー・ジャパン</a:t>
                       </a:r>
@@ -27298,22 +28155,22 @@
                         <a:defRPr/>
                       </a:pPr>
                       <a:r>
-                        <a:rPr kumimoji="1" lang="en-US" altLang="ja-JP" dirty="0">
+                        <a:rPr kumimoji="1" lang="en-US" altLang="ja-JP" sz="1400" dirty="0">
                           <a:solidFill>
                             <a:schemeClr val="tx1"/>
                           </a:solidFill>
-                          <a:latin typeface="+mn-ea"/>
-                          <a:ea typeface="+mn-ea"/>
+                          <a:latin typeface="メイリオ" panose="020B0604030504040204" pitchFamily="50" charset="-128"/>
+                          <a:ea typeface="メイリオ" panose="020B0604030504040204" pitchFamily="50" charset="-128"/>
                         </a:rPr>
                         <a:t>16</a:t>
                       </a:r>
                       <a:r>
-                        <a:rPr kumimoji="1" lang="ja-JP" altLang="en-US" dirty="0">
+                        <a:rPr kumimoji="1" lang="ja-JP" altLang="en-US" sz="1400" dirty="0">
                           <a:solidFill>
                             <a:schemeClr val="tx1"/>
                           </a:solidFill>
-                          <a:latin typeface="+mn-ea"/>
-                          <a:ea typeface="+mn-ea"/>
+                          <a:latin typeface="メイリオ" panose="020B0604030504040204" pitchFamily="50" charset="-128"/>
+                          <a:ea typeface="メイリオ" panose="020B0604030504040204" pitchFamily="50" charset="-128"/>
                         </a:rPr>
                         <a:t>時間</a:t>
                       </a:r>
@@ -27335,15 +28192,15 @@
                     <a:p>
                       <a:pPr algn="r"/>
                       <a:r>
-                        <a:rPr kumimoji="1" lang="en-US" altLang="ja-JP" dirty="0">
-                          <a:latin typeface="+mn-ea"/>
-                          <a:ea typeface="+mn-ea"/>
+                        <a:rPr kumimoji="1" lang="en-US" altLang="ja-JP" sz="1400" dirty="0">
+                          <a:latin typeface="メイリオ" panose="020B0604030504040204" pitchFamily="50" charset="-128"/>
+                          <a:ea typeface="メイリオ" panose="020B0604030504040204" pitchFamily="50" charset="-128"/>
                         </a:rPr>
                         <a:t>2</a:t>
                       </a:r>
-                      <a:endParaRPr kumimoji="1" lang="ja-JP" altLang="en-US" dirty="0">
-                        <a:latin typeface="+mn-ea"/>
-                        <a:ea typeface="+mn-ea"/>
+                      <a:endParaRPr kumimoji="1" lang="ja-JP" altLang="en-US" sz="1400" dirty="0">
+                        <a:latin typeface="メイリオ" panose="020B0604030504040204" pitchFamily="50" charset="-128"/>
+                        <a:ea typeface="メイリオ" panose="020B0604030504040204" pitchFamily="50" charset="-128"/>
                       </a:endParaRPr>
                     </a:p>
                   </a:txBody>
@@ -27355,9 +28212,9 @@
                     <a:lstStyle/>
                     <a:p>
                       <a:r>
-                        <a:rPr kumimoji="1" lang="ja-JP" altLang="en-US" dirty="0">
-                          <a:latin typeface="+mn-ea"/>
-                          <a:ea typeface="+mn-ea"/>
+                        <a:rPr kumimoji="1" lang="ja-JP" altLang="en-US" sz="1400" dirty="0">
+                          <a:latin typeface="メイリオ" panose="020B0604030504040204" pitchFamily="50" charset="-128"/>
+                          <a:ea typeface="メイリオ" panose="020B0604030504040204" pitchFamily="50" charset="-128"/>
                         </a:rPr>
                         <a:t>日本ウエイン</a:t>
                       </a:r>
@@ -27388,22 +28245,22 @@
                         <a:defRPr/>
                       </a:pPr>
                       <a:r>
-                        <a:rPr kumimoji="1" lang="en-US" altLang="ja-JP" dirty="0">
+                        <a:rPr kumimoji="1" lang="en-US" altLang="ja-JP" sz="1400" dirty="0">
                           <a:solidFill>
                             <a:schemeClr val="tx1"/>
                           </a:solidFill>
-                          <a:latin typeface="+mn-ea"/>
-                          <a:ea typeface="+mn-ea"/>
+                          <a:latin typeface="メイリオ" panose="020B0604030504040204" pitchFamily="50" charset="-128"/>
+                          <a:ea typeface="メイリオ" panose="020B0604030504040204" pitchFamily="50" charset="-128"/>
                         </a:rPr>
                         <a:t>5</a:t>
                       </a:r>
                       <a:r>
-                        <a:rPr kumimoji="1" lang="ja-JP" altLang="en-US" dirty="0">
+                        <a:rPr kumimoji="1" lang="ja-JP" altLang="en-US" sz="1400" dirty="0">
                           <a:solidFill>
                             <a:schemeClr val="tx1"/>
                           </a:solidFill>
-                          <a:latin typeface="+mn-ea"/>
-                          <a:ea typeface="+mn-ea"/>
+                          <a:latin typeface="メイリオ" panose="020B0604030504040204" pitchFamily="50" charset="-128"/>
+                          <a:ea typeface="メイリオ" panose="020B0604030504040204" pitchFamily="50" charset="-128"/>
                         </a:rPr>
                         <a:t>時間</a:t>
                       </a:r>
@@ -27425,15 +28282,15 @@
                     <a:p>
                       <a:pPr algn="r"/>
                       <a:r>
-                        <a:rPr kumimoji="1" lang="en-US" altLang="ja-JP" dirty="0">
-                          <a:latin typeface="+mn-ea"/>
-                          <a:ea typeface="+mn-ea"/>
+                        <a:rPr kumimoji="1" lang="en-US" altLang="ja-JP" sz="1400" dirty="0">
+                          <a:latin typeface="メイリオ" panose="020B0604030504040204" pitchFamily="50" charset="-128"/>
+                          <a:ea typeface="メイリオ" panose="020B0604030504040204" pitchFamily="50" charset="-128"/>
                         </a:rPr>
                         <a:t>3</a:t>
                       </a:r>
-                      <a:endParaRPr kumimoji="1" lang="ja-JP" altLang="en-US" dirty="0">
-                        <a:latin typeface="+mn-ea"/>
-                        <a:ea typeface="+mn-ea"/>
+                      <a:endParaRPr kumimoji="1" lang="ja-JP" altLang="en-US" sz="1400" dirty="0">
+                        <a:latin typeface="メイリオ" panose="020B0604030504040204" pitchFamily="50" charset="-128"/>
+                        <a:ea typeface="メイリオ" panose="020B0604030504040204" pitchFamily="50" charset="-128"/>
                       </a:endParaRPr>
                     </a:p>
                   </a:txBody>
@@ -27445,22 +28302,22 @@
                     <a:lstStyle/>
                     <a:p>
                       <a:r>
-                        <a:rPr kumimoji="1" lang="ja-JP" altLang="en-US" dirty="0">
-                          <a:latin typeface="+mn-ea"/>
-                          <a:ea typeface="+mn-ea"/>
+                        <a:rPr kumimoji="1" lang="ja-JP" altLang="en-US" sz="1400" dirty="0">
+                          <a:latin typeface="メイリオ" panose="020B0604030504040204" pitchFamily="50" charset="-128"/>
+                          <a:ea typeface="メイリオ" panose="020B0604030504040204" pitchFamily="50" charset="-128"/>
                         </a:rPr>
                         <a:t>日東電工</a:t>
                       </a:r>
                       <a:r>
-                        <a:rPr kumimoji="1" lang="en-US" altLang="ja-JP" dirty="0">
-                          <a:latin typeface="+mn-ea"/>
-                          <a:ea typeface="+mn-ea"/>
+                        <a:rPr kumimoji="1" lang="en-US" altLang="ja-JP" sz="1400" dirty="0">
+                          <a:latin typeface="メイリオ" panose="020B0604030504040204" pitchFamily="50" charset="-128"/>
+                          <a:ea typeface="メイリオ" panose="020B0604030504040204" pitchFamily="50" charset="-128"/>
                         </a:rPr>
                         <a:t>BM</a:t>
                       </a:r>
-                      <a:endParaRPr kumimoji="1" lang="ja-JP" altLang="en-US" dirty="0">
-                        <a:latin typeface="+mn-ea"/>
-                        <a:ea typeface="+mn-ea"/>
+                      <a:endParaRPr kumimoji="1" lang="ja-JP" altLang="en-US" sz="1400" dirty="0">
+                        <a:latin typeface="メイリオ" panose="020B0604030504040204" pitchFamily="50" charset="-128"/>
+                        <a:ea typeface="メイリオ" panose="020B0604030504040204" pitchFamily="50" charset="-128"/>
                       </a:endParaRPr>
                     </a:p>
                   </a:txBody>
@@ -27489,22 +28346,22 @@
                         <a:defRPr/>
                       </a:pPr>
                       <a:r>
-                        <a:rPr kumimoji="1" lang="en-US" altLang="ja-JP" dirty="0">
+                        <a:rPr kumimoji="1" lang="en-US" altLang="ja-JP" sz="1400" dirty="0">
                           <a:solidFill>
                             <a:schemeClr val="tx1"/>
                           </a:solidFill>
-                          <a:latin typeface="+mn-ea"/>
-                          <a:ea typeface="+mn-ea"/>
+                          <a:latin typeface="メイリオ" panose="020B0604030504040204" pitchFamily="50" charset="-128"/>
+                          <a:ea typeface="メイリオ" panose="020B0604030504040204" pitchFamily="50" charset="-128"/>
                         </a:rPr>
                         <a:t>57</a:t>
                       </a:r>
                       <a:r>
-                        <a:rPr kumimoji="1" lang="ja-JP" altLang="en-US" dirty="0">
+                        <a:rPr kumimoji="1" lang="ja-JP" altLang="en-US" sz="1400" dirty="0">
                           <a:solidFill>
                             <a:schemeClr val="tx1"/>
                           </a:solidFill>
-                          <a:latin typeface="+mn-ea"/>
-                          <a:ea typeface="+mn-ea"/>
+                          <a:latin typeface="メイリオ" panose="020B0604030504040204" pitchFamily="50" charset="-128"/>
+                          <a:ea typeface="メイリオ" panose="020B0604030504040204" pitchFamily="50" charset="-128"/>
                         </a:rPr>
                         <a:t>時間</a:t>
                       </a:r>
@@ -27526,15 +28383,15 @@
                     <a:p>
                       <a:pPr algn="r"/>
                       <a:r>
-                        <a:rPr kumimoji="1" lang="en-US" altLang="ja-JP" dirty="0">
-                          <a:latin typeface="+mn-ea"/>
-                          <a:ea typeface="+mn-ea"/>
+                        <a:rPr kumimoji="1" lang="en-US" altLang="ja-JP" sz="1400" dirty="0">
+                          <a:latin typeface="メイリオ" panose="020B0604030504040204" pitchFamily="50" charset="-128"/>
+                          <a:ea typeface="メイリオ" panose="020B0604030504040204" pitchFamily="50" charset="-128"/>
                         </a:rPr>
                         <a:t>4</a:t>
                       </a:r>
-                      <a:endParaRPr kumimoji="1" lang="ja-JP" altLang="en-US" dirty="0">
-                        <a:latin typeface="+mn-ea"/>
-                        <a:ea typeface="+mn-ea"/>
+                      <a:endParaRPr kumimoji="1" lang="ja-JP" altLang="en-US" sz="1400" dirty="0">
+                        <a:latin typeface="メイリオ" panose="020B0604030504040204" pitchFamily="50" charset="-128"/>
+                        <a:ea typeface="メイリオ" panose="020B0604030504040204" pitchFamily="50" charset="-128"/>
                       </a:endParaRPr>
                     </a:p>
                   </a:txBody>
@@ -27546,9 +28403,9 @@
                     <a:lstStyle/>
                     <a:p>
                       <a:r>
-                        <a:rPr kumimoji="1" lang="ja-JP" altLang="en-US" dirty="0">
-                          <a:latin typeface="+mn-ea"/>
-                          <a:ea typeface="+mn-ea"/>
+                        <a:rPr kumimoji="1" lang="ja-JP" altLang="en-US" sz="1400" dirty="0">
+                          <a:latin typeface="メイリオ" panose="020B0604030504040204" pitchFamily="50" charset="-128"/>
+                          <a:ea typeface="メイリオ" panose="020B0604030504040204" pitchFamily="50" charset="-128"/>
                         </a:rPr>
                         <a:t>ティーガイア</a:t>
                       </a:r>
@@ -27579,22 +28436,22 @@
                         <a:defRPr/>
                       </a:pPr>
                       <a:r>
-                        <a:rPr kumimoji="1" lang="en-US" altLang="ja-JP" dirty="0">
+                        <a:rPr kumimoji="1" lang="en-US" altLang="ja-JP" sz="1400" dirty="0">
                           <a:solidFill>
                             <a:schemeClr val="tx1"/>
                           </a:solidFill>
-                          <a:latin typeface="+mn-ea"/>
-                          <a:ea typeface="+mn-ea"/>
+                          <a:latin typeface="メイリオ" panose="020B0604030504040204" pitchFamily="50" charset="-128"/>
+                          <a:ea typeface="メイリオ" panose="020B0604030504040204" pitchFamily="50" charset="-128"/>
                         </a:rPr>
                         <a:t>16</a:t>
                       </a:r>
                       <a:r>
-                        <a:rPr kumimoji="1" lang="ja-JP" altLang="en-US" dirty="0">
+                        <a:rPr kumimoji="1" lang="ja-JP" altLang="en-US" sz="1400" dirty="0">
                           <a:solidFill>
                             <a:schemeClr val="tx1"/>
                           </a:solidFill>
-                          <a:latin typeface="+mn-ea"/>
-                          <a:ea typeface="+mn-ea"/>
+                          <a:latin typeface="メイリオ" panose="020B0604030504040204" pitchFamily="50" charset="-128"/>
+                          <a:ea typeface="メイリオ" panose="020B0604030504040204" pitchFamily="50" charset="-128"/>
                         </a:rPr>
                         <a:t>時間</a:t>
                       </a:r>
@@ -27616,15 +28473,15 @@
                     <a:p>
                       <a:pPr algn="r"/>
                       <a:r>
-                        <a:rPr kumimoji="1" lang="en-US" altLang="ja-JP" dirty="0">
-                          <a:latin typeface="+mn-ea"/>
-                          <a:ea typeface="+mn-ea"/>
+                        <a:rPr kumimoji="1" lang="en-US" altLang="ja-JP" sz="1400" dirty="0">
+                          <a:latin typeface="メイリオ" panose="020B0604030504040204" pitchFamily="50" charset="-128"/>
+                          <a:ea typeface="メイリオ" panose="020B0604030504040204" pitchFamily="50" charset="-128"/>
                         </a:rPr>
                         <a:t>5</a:t>
                       </a:r>
-                      <a:endParaRPr kumimoji="1" lang="ja-JP" altLang="en-US" dirty="0">
-                        <a:latin typeface="+mn-ea"/>
-                        <a:ea typeface="+mn-ea"/>
+                      <a:endParaRPr kumimoji="1" lang="ja-JP" altLang="en-US" sz="1400" dirty="0">
+                        <a:latin typeface="メイリオ" panose="020B0604030504040204" pitchFamily="50" charset="-128"/>
+                        <a:ea typeface="メイリオ" panose="020B0604030504040204" pitchFamily="50" charset="-128"/>
                       </a:endParaRPr>
                     </a:p>
                   </a:txBody>
@@ -27653,18 +28510,18 @@
                         <a:defRPr/>
                       </a:pPr>
                       <a:r>
-                        <a:rPr kumimoji="1" lang="ja-JP" altLang="en-US" dirty="0">
-                          <a:latin typeface="+mn-ea"/>
-                          <a:ea typeface="+mn-ea"/>
+                        <a:rPr kumimoji="1" lang="ja-JP" altLang="en-US" sz="1400" dirty="0">
+                          <a:latin typeface="メイリオ" panose="020B0604030504040204" pitchFamily="50" charset="-128"/>
+                          <a:ea typeface="メイリオ" panose="020B0604030504040204" pitchFamily="50" charset="-128"/>
                         </a:rPr>
                         <a:t>キャンドゥ</a:t>
                       </a:r>
-                      <a:endParaRPr kumimoji="1" lang="ja-JP" altLang="en-US" dirty="0">
+                      <a:endParaRPr kumimoji="1" lang="ja-JP" altLang="en-US" sz="1400" dirty="0">
                         <a:solidFill>
                           <a:srgbClr val="FF0000"/>
                         </a:solidFill>
-                        <a:latin typeface="+mn-ea"/>
-                        <a:ea typeface="+mn-ea"/>
+                        <a:latin typeface="メイリオ" panose="020B0604030504040204" pitchFamily="50" charset="-128"/>
+                        <a:ea typeface="メイリオ" panose="020B0604030504040204" pitchFamily="50" charset="-128"/>
                       </a:endParaRPr>
                     </a:p>
                   </a:txBody>
@@ -27693,22 +28550,22 @@
                         <a:defRPr/>
                       </a:pPr>
                       <a:r>
-                        <a:rPr kumimoji="1" lang="en-US" altLang="ja-JP" dirty="0">
+                        <a:rPr kumimoji="1" lang="en-US" altLang="ja-JP" sz="1400" dirty="0">
                           <a:solidFill>
                             <a:schemeClr val="tx1"/>
                           </a:solidFill>
-                          <a:latin typeface="+mn-ea"/>
-                          <a:ea typeface="+mn-ea"/>
+                          <a:latin typeface="メイリオ" panose="020B0604030504040204" pitchFamily="50" charset="-128"/>
+                          <a:ea typeface="メイリオ" panose="020B0604030504040204" pitchFamily="50" charset="-128"/>
                         </a:rPr>
                         <a:t>3</a:t>
                       </a:r>
                       <a:r>
-                        <a:rPr kumimoji="1" lang="ja-JP" altLang="en-US" dirty="0">
+                        <a:rPr kumimoji="1" lang="ja-JP" altLang="en-US" sz="1400" dirty="0">
                           <a:solidFill>
                             <a:schemeClr val="tx1"/>
                           </a:solidFill>
-                          <a:latin typeface="+mn-ea"/>
-                          <a:ea typeface="+mn-ea"/>
+                          <a:latin typeface="メイリオ" panose="020B0604030504040204" pitchFamily="50" charset="-128"/>
+                          <a:ea typeface="メイリオ" panose="020B0604030504040204" pitchFamily="50" charset="-128"/>
                         </a:rPr>
                         <a:t>時間</a:t>
                       </a:r>
@@ -27730,15 +28587,15 @@
                     <a:p>
                       <a:pPr algn="r"/>
                       <a:r>
-                        <a:rPr kumimoji="1" lang="en-US" altLang="ja-JP" dirty="0">
-                          <a:latin typeface="+mn-ea"/>
-                          <a:ea typeface="+mn-ea"/>
+                        <a:rPr kumimoji="1" lang="en-US" altLang="ja-JP" sz="1400" dirty="0">
+                          <a:latin typeface="メイリオ" panose="020B0604030504040204" pitchFamily="50" charset="-128"/>
+                          <a:ea typeface="メイリオ" panose="020B0604030504040204" pitchFamily="50" charset="-128"/>
                         </a:rPr>
                         <a:t>6</a:t>
                       </a:r>
-                      <a:endParaRPr kumimoji="1" lang="ja-JP" altLang="en-US" dirty="0">
-                        <a:latin typeface="+mn-ea"/>
-                        <a:ea typeface="+mn-ea"/>
+                      <a:endParaRPr kumimoji="1" lang="ja-JP" altLang="en-US" sz="1400" dirty="0">
+                        <a:latin typeface="メイリオ" panose="020B0604030504040204" pitchFamily="50" charset="-128"/>
+                        <a:ea typeface="メイリオ" panose="020B0604030504040204" pitchFamily="50" charset="-128"/>
                       </a:endParaRPr>
                     </a:p>
                   </a:txBody>
@@ -27767,18 +28624,18 @@
                         <a:defRPr/>
                       </a:pPr>
                       <a:r>
-                        <a:rPr kumimoji="1" lang="ja-JP" altLang="en-US" dirty="0">
-                          <a:latin typeface="+mn-ea"/>
-                          <a:ea typeface="+mn-ea"/>
+                        <a:rPr kumimoji="1" lang="ja-JP" altLang="en-US" sz="1400" dirty="0">
+                          <a:latin typeface="メイリオ" panose="020B0604030504040204" pitchFamily="50" charset="-128"/>
+                          <a:ea typeface="メイリオ" panose="020B0604030504040204" pitchFamily="50" charset="-128"/>
                         </a:rPr>
                         <a:t>ポディウム</a:t>
                       </a:r>
-                      <a:endParaRPr kumimoji="1" lang="ja-JP" altLang="en-US" dirty="0">
+                      <a:endParaRPr kumimoji="1" lang="ja-JP" altLang="en-US" sz="1400" dirty="0">
                         <a:solidFill>
                           <a:srgbClr val="FF0000"/>
                         </a:solidFill>
-                        <a:latin typeface="+mn-ea"/>
-                        <a:ea typeface="+mn-ea"/>
+                        <a:latin typeface="メイリオ" panose="020B0604030504040204" pitchFamily="50" charset="-128"/>
+                        <a:ea typeface="メイリオ" panose="020B0604030504040204" pitchFamily="50" charset="-128"/>
                       </a:endParaRPr>
                     </a:p>
                   </a:txBody>
@@ -27807,22 +28664,22 @@
                         <a:defRPr/>
                       </a:pPr>
                       <a:r>
-                        <a:rPr kumimoji="1" lang="en-US" altLang="ja-JP" dirty="0">
+                        <a:rPr kumimoji="1" lang="en-US" altLang="ja-JP" sz="1400" dirty="0">
                           <a:solidFill>
                             <a:schemeClr val="tx1"/>
                           </a:solidFill>
-                          <a:latin typeface="+mn-ea"/>
-                          <a:ea typeface="+mn-ea"/>
+                          <a:latin typeface="メイリオ" panose="020B0604030504040204" pitchFamily="50" charset="-128"/>
+                          <a:ea typeface="メイリオ" panose="020B0604030504040204" pitchFamily="50" charset="-128"/>
                         </a:rPr>
                         <a:t>10</a:t>
                       </a:r>
                       <a:r>
-                        <a:rPr kumimoji="1" lang="ja-JP" altLang="en-US" dirty="0">
+                        <a:rPr kumimoji="1" lang="ja-JP" altLang="en-US" sz="1400" dirty="0">
                           <a:solidFill>
                             <a:schemeClr val="tx1"/>
                           </a:solidFill>
-                          <a:latin typeface="+mn-ea"/>
-                          <a:ea typeface="+mn-ea"/>
+                          <a:latin typeface="メイリオ" panose="020B0604030504040204" pitchFamily="50" charset="-128"/>
+                          <a:ea typeface="メイリオ" panose="020B0604030504040204" pitchFamily="50" charset="-128"/>
                         </a:rPr>
                         <a:t>時間</a:t>
                       </a:r>
@@ -27844,15 +28701,15 @@
                     <a:p>
                       <a:pPr algn="r"/>
                       <a:r>
-                        <a:rPr kumimoji="1" lang="en-US" altLang="ja-JP" dirty="0">
-                          <a:latin typeface="+mn-ea"/>
-                          <a:ea typeface="+mn-ea"/>
+                        <a:rPr kumimoji="1" lang="en-US" altLang="ja-JP" sz="1400" dirty="0">
+                          <a:latin typeface="メイリオ" panose="020B0604030504040204" pitchFamily="50" charset="-128"/>
+                          <a:ea typeface="メイリオ" panose="020B0604030504040204" pitchFamily="50" charset="-128"/>
                         </a:rPr>
                         <a:t>7</a:t>
                       </a:r>
-                      <a:endParaRPr kumimoji="1" lang="ja-JP" altLang="en-US" dirty="0">
-                        <a:latin typeface="+mn-ea"/>
-                        <a:ea typeface="+mn-ea"/>
+                      <a:endParaRPr kumimoji="1" lang="ja-JP" altLang="en-US" sz="1400" dirty="0">
+                        <a:latin typeface="メイリオ" panose="020B0604030504040204" pitchFamily="50" charset="-128"/>
+                        <a:ea typeface="メイリオ" panose="020B0604030504040204" pitchFamily="50" charset="-128"/>
                       </a:endParaRPr>
                     </a:p>
                   </a:txBody>
@@ -27881,9 +28738,9 @@
                         <a:defRPr/>
                       </a:pPr>
                       <a:r>
-                        <a:rPr kumimoji="1" lang="ja-JP" altLang="en-US" dirty="0">
-                          <a:latin typeface="+mn-ea"/>
-                          <a:ea typeface="+mn-ea"/>
+                        <a:rPr kumimoji="1" lang="ja-JP" altLang="en-US" sz="1400" dirty="0">
+                          <a:latin typeface="メイリオ" panose="020B0604030504040204" pitchFamily="50" charset="-128"/>
+                          <a:ea typeface="メイリオ" panose="020B0604030504040204" pitchFamily="50" charset="-128"/>
                         </a:rPr>
                         <a:t>紀伊國屋書店</a:t>
                       </a:r>
@@ -27914,16 +28771,16 @@
                         <a:defRPr/>
                       </a:pPr>
                       <a:r>
-                        <a:rPr kumimoji="1" lang="en-US" altLang="ja-JP" dirty="0">
-                          <a:latin typeface="+mn-ea"/>
-                          <a:ea typeface="+mn-ea"/>
+                        <a:rPr kumimoji="1" lang="en-US" altLang="ja-JP" sz="1400" dirty="0">
+                          <a:latin typeface="メイリオ" panose="020B0604030504040204" pitchFamily="50" charset="-128"/>
+                          <a:ea typeface="メイリオ" panose="020B0604030504040204" pitchFamily="50" charset="-128"/>
                         </a:rPr>
                         <a:t>80</a:t>
                       </a:r>
                       <a:r>
-                        <a:rPr kumimoji="1" lang="ja-JP" altLang="en-US" dirty="0">
-                          <a:latin typeface="+mn-ea"/>
-                          <a:ea typeface="+mn-ea"/>
+                        <a:rPr kumimoji="1" lang="ja-JP" altLang="en-US" sz="1400" dirty="0">
+                          <a:latin typeface="メイリオ" panose="020B0604030504040204" pitchFamily="50" charset="-128"/>
+                          <a:ea typeface="メイリオ" panose="020B0604030504040204" pitchFamily="50" charset="-128"/>
                         </a:rPr>
                         <a:t>時間</a:t>
                       </a:r>
@@ -29150,15 +30007,6 @@
 </file>
 
 <file path=customXml/item1.xml><?xml version="1.0" encoding="utf-8"?>
-<?mso-contentType ?>
-<FormTemplates xmlns="http://schemas.microsoft.com/sharepoint/v3/contenttype/forms">
-  <Display>DocumentLibraryForm</Display>
-  <Edit>DocumentLibraryForm</Edit>
-  <New>DocumentLibraryForm</New>
-</FormTemplates>
-</file>
-
-<file path=customXml/item2.xml><?xml version="1.0" encoding="utf-8"?>
 <ct:contentTypeSchema xmlns:ct="http://schemas.microsoft.com/office/2006/metadata/contentType" xmlns:ma="http://schemas.microsoft.com/office/2006/metadata/properties/metaAttributes" ct:_="" ma:_="" ma:contentTypeName="ドキュメント" ma:contentTypeID="0x010100D35DC5035CF21544854758570D244058" ma:contentTypeVersion="16" ma:contentTypeDescription="新しいドキュメントを作成します。" ma:contentTypeScope="" ma:versionID="3ad7ff9203f977c2019ce874e5898b03">
   <xsd:schema xmlns:xsd="http://www.w3.org/2001/XMLSchema" xmlns:xs="http://www.w3.org/2001/XMLSchema" xmlns:p="http://schemas.microsoft.com/office/2006/metadata/properties" xmlns:ns2="ef49d013-6fe6-434c-8d65-01c2536dc222" xmlns:ns3="fdb0f37b-23a4-4fc9-93ec-5a55c5240f41" targetNamespace="http://schemas.microsoft.com/office/2006/metadata/properties" ma:root="true" ma:fieldsID="a62f3f28b8bccccf368960a2c87b2f94" ns2:_="" ns3:_="">
     <xsd:import namespace="ef49d013-6fe6-434c-8d65-01c2536dc222"/>
@@ -29401,6 +30249,15 @@
 </ct:contentTypeSchema>
 </file>
 
+<file path=customXml/item2.xml><?xml version="1.0" encoding="utf-8"?>
+<?mso-contentType ?>
+<FormTemplates xmlns="http://schemas.microsoft.com/sharepoint/v3/contenttype/forms">
+  <Display>DocumentLibraryForm</Display>
+  <Edit>DocumentLibraryForm</Edit>
+  <New>DocumentLibraryForm</New>
+</FormTemplates>
+</file>
+
 <file path=customXml/item3.xml><?xml version="1.0" encoding="utf-8"?>
 <p:properties xmlns:p="http://schemas.microsoft.com/office/2006/metadata/properties" xmlns:xsi="http://www.w3.org/2001/XMLSchema-instance" xmlns:pc="http://schemas.microsoft.com/office/infopath/2007/PartnerControls">
   <documentManagement>
@@ -29413,14 +30270,6 @@
 </file>
 
 <file path=customXml/itemProps1.xml><?xml version="1.0" encoding="utf-8"?>
-<ds:datastoreItem xmlns:ds="http://schemas.openxmlformats.org/officeDocument/2006/customXml" ds:itemID="{842A590B-F7CA-4792-8F9C-1BA7FA4EC371}">
-  <ds:schemaRefs>
-    <ds:schemaRef ds:uri="http://schemas.microsoft.com/sharepoint/v3/contenttype/forms"/>
-  </ds:schemaRefs>
-</ds:datastoreItem>
-</file>
-
-<file path=customXml/itemProps2.xml><?xml version="1.0" encoding="utf-8"?>
 <ds:datastoreItem xmlns:ds="http://schemas.openxmlformats.org/officeDocument/2006/customXml" ds:itemID="{381AD40B-978E-4378-9E2F-27A32296A845}">
   <ds:schemaRefs>
     <ds:schemaRef ds:uri="http://schemas.microsoft.com/office/2006/metadata/contentType"/>
@@ -29439,6 +30288,14 @@
 </ds:datastoreItem>
 </file>
 
+<file path=customXml/itemProps2.xml><?xml version="1.0" encoding="utf-8"?>
+<ds:datastoreItem xmlns:ds="http://schemas.openxmlformats.org/officeDocument/2006/customXml" ds:itemID="{842A590B-F7CA-4792-8F9C-1BA7FA4EC371}">
+  <ds:schemaRefs>
+    <ds:schemaRef ds:uri="http://schemas.microsoft.com/sharepoint/v3/contenttype/forms"/>
+  </ds:schemaRefs>
+</ds:datastoreItem>
+</file>
+
 <file path=customXml/itemProps3.xml><?xml version="1.0" encoding="utf-8"?>
 <ds:datastoreItem xmlns:ds="http://schemas.openxmlformats.org/officeDocument/2006/customXml" ds:itemID="{2FD64F62-6086-48BA-8D8B-11E73CCD9ADB}">
   <ds:schemaRefs>

--- a/docs/【EC】ECサービス部_2026年7月度部会_Ver1.1.pptx
+++ b/docs/【EC】ECサービス部_2026年7月度部会_Ver1.1.pptx
@@ -22,6 +22,7 @@
     <p:sldId id="1024" r:id="rId16"/>
     <p:sldId id="1026" r:id="rId17"/>
     <p:sldId id="1030" r:id="rId18"/>
+    <p:sldId id="1032" r:id="rId31"/>
     <p:sldId id="264" r:id="rId19"/>
     <p:sldId id="1016" r:id="rId20"/>
     <p:sldId id="1025" r:id="rId21"/>
@@ -11972,32 +11973,24 @@
               </a:lnSpc>
             </a:pPr>
             <a:r>
-              <a:rPr lang="en-US" altLang="ja-JP" sz="2000" dirty="0">
-                <a:latin typeface="メイリオ" pitchFamily="50" charset="-128"/>
-                <a:ea typeface="メイリオ" pitchFamily="50" charset="-128"/>
-                <a:cs typeface="メイリオ" pitchFamily="50" charset="-128"/>
+              <a:rPr sz="2000">
+                <a:solidFill>
+                  <a:srgbClr val="333333"/>
+                </a:solidFill>
+                <a:latin typeface="メイリオ"/>
+                <a:ea typeface="メイリオ"/>
               </a:rPr>
               <a:t>5.</a:t>
             </a:r>
             <a:r>
-              <a:rPr lang="ja-JP" altLang="en-US" sz="2000" dirty="0">
-                <a:latin typeface="メイリオ" pitchFamily="50" charset="-128"/>
-                <a:ea typeface="メイリオ" pitchFamily="50" charset="-128"/>
-                <a:cs typeface="メイリオ" pitchFamily="50" charset="-128"/>
-              </a:rPr>
-              <a:t>新パッケージの</a:t>
-            </a:r>
-            <a:r>
-              <a:rPr lang="ja-JP" altLang="en-US" sz="2000" dirty="0"/>
-              <a:t>バージョンアップ状況について（</a:t>
-            </a:r>
-            <a:r>
-              <a:rPr lang="en-US" altLang="ja-JP" sz="2000" dirty="0"/>
-              <a:t>1/2</a:t>
-            </a:r>
-            <a:r>
-              <a:rPr lang="ja-JP" altLang="en-US" sz="2000" dirty="0"/>
-              <a:t>）</a:t>
+              <a:rPr sz="1600">
+                <a:solidFill>
+                  <a:srgbClr val="333333"/>
+                </a:solidFill>
+                <a:latin typeface="メイリオ"/>
+                <a:ea typeface="メイリオ"/>
+              </a:rPr>
+              <a:t>新パッケージのバージョンアップ状況について（1/3）</a:t>
             </a:r>
             <a:endParaRPr lang="ja-JP" altLang="en-US" sz="2000" dirty="0">
               <a:latin typeface="メイリオ" pitchFamily="50" charset="-128"/>
@@ -12782,32 +12775,24 @@
               </a:lnSpc>
             </a:pPr>
             <a:r>
-              <a:rPr lang="en-US" altLang="ja-JP" sz="2000" dirty="0">
-                <a:latin typeface="メイリオ" pitchFamily="50" charset="-128"/>
-                <a:ea typeface="メイリオ" pitchFamily="50" charset="-128"/>
-                <a:cs typeface="メイリオ" pitchFamily="50" charset="-128"/>
+              <a:rPr sz="2000">
+                <a:solidFill>
+                  <a:srgbClr val="333333"/>
+                </a:solidFill>
+                <a:latin typeface="メイリオ"/>
+                <a:ea typeface="メイリオ"/>
               </a:rPr>
               <a:t>5.</a:t>
             </a:r>
             <a:r>
-              <a:rPr lang="ja-JP" altLang="en-US" sz="2000" dirty="0">
-                <a:latin typeface="メイリオ" pitchFamily="50" charset="-128"/>
-                <a:ea typeface="メイリオ" pitchFamily="50" charset="-128"/>
-                <a:cs typeface="メイリオ" pitchFamily="50" charset="-128"/>
-              </a:rPr>
-              <a:t>新パッケージの</a:t>
-            </a:r>
-            <a:r>
-              <a:rPr lang="ja-JP" altLang="en-US" sz="2000" dirty="0"/>
-              <a:t>バージョンアップ状況について（</a:t>
-            </a:r>
-            <a:r>
-              <a:rPr lang="en-US" altLang="ja-JP" sz="2000" dirty="0"/>
-              <a:t>2/2</a:t>
-            </a:r>
-            <a:r>
-              <a:rPr lang="ja-JP" altLang="en-US" sz="2000" dirty="0"/>
-              <a:t>）</a:t>
+              <a:rPr sz="1600">
+                <a:solidFill>
+                  <a:srgbClr val="333333"/>
+                </a:solidFill>
+                <a:latin typeface="メイリオ"/>
+                <a:ea typeface="メイリオ"/>
+              </a:rPr>
+              <a:t>新パッケージのバージョンアップ状況について（2/3）</a:t>
             </a:r>
             <a:endParaRPr lang="ja-JP" altLang="en-US" sz="2000" dirty="0">
               <a:latin typeface="メイリオ" pitchFamily="50" charset="-128"/>
@@ -12861,669 +12846,11 @@
                 <a:latin typeface="メイリオ"/>
                 <a:ea typeface="メイリオ"/>
               </a:rPr>
-              <a:t>どのアップデートで → 何ができて → 今後どう使えるか</a:t>
+              <a:t>これまで（現状） → これから（バージョンアップ後にできること）</a:t>
             </a:r>
           </a:p>
         </p:txBody>
       </p:sp>
-      <p:graphicFrame>
-        <p:nvGraphicFramePr>
-          <p:cNvPr id="9" name="Table 3">
-            <a:extLst>
-              <a:ext uri="{FF2B5EF4-FFF2-40B4-BE49-F238E27FC236}">
-                <a16:creationId xmlns:a16="http://schemas.microsoft.com/office/drawing/2014/main" id="{E72E2576-55D4-2C00-185D-F661F1C9A4D6}"/>
-              </a:ext>
-            </a:extLst>
-          </p:cNvPr>
-          <p:cNvGraphicFramePr>
-            <a:graphicFrameLocks noGrp="1"/>
-          </p:cNvGraphicFramePr>
-          <p:nvPr>
-            <p:extLst>
-              <p:ext uri="{D42A27DB-BD31-4B8C-83A1-F6EECF244321}">
-                <p14:modId xmlns:p14="http://schemas.microsoft.com/office/powerpoint/2010/main" val="2186101153"/>
-              </p:ext>
-            </p:extLst>
-          </p:nvPr>
-        </p:nvGraphicFramePr>
-        <p:xfrm>
-          <a:off x="400000" y="1118664"/>
-          <a:ext cx="8764148" cy="3800000"/>
-        </p:xfrm>
-        <a:graphic>
-          <a:graphicData uri="http://schemas.openxmlformats.org/drawingml/2006/table">
-            <a:tbl>
-              <a:tblPr firstRow="1" bandRow="1">
-                <a:tableStyleId>{5C22544A-7EE6-4342-B048-85BDC9FD1C3A}</a:tableStyleId>
-              </a:tblPr>
-              <a:tblGrid>
-                <a:gridCol w="1452852">
-                  <a:extLst>
-                    <a:ext uri="{9D8B030D-6E8A-4147-A177-3AD203B41FA5}">
-                      <a16:colId xmlns:a16="http://schemas.microsoft.com/office/drawing/2014/main" val="20000"/>
-                    </a:ext>
-                  </a:extLst>
-                </a:gridCol>
-                <a:gridCol w="1872208">
-                  <a:extLst>
-                    <a:ext uri="{9D8B030D-6E8A-4147-A177-3AD203B41FA5}">
-                      <a16:colId xmlns:a16="http://schemas.microsoft.com/office/drawing/2014/main" val="20001"/>
-                    </a:ext>
-                  </a:extLst>
-                </a:gridCol>
-                <a:gridCol w="2988896">
-                  <a:extLst>
-                    <a:ext uri="{9D8B030D-6E8A-4147-A177-3AD203B41FA5}">
-                      <a16:colId xmlns:a16="http://schemas.microsoft.com/office/drawing/2014/main" val="20002"/>
-                    </a:ext>
-                  </a:extLst>
-                </a:gridCol>
-                <a:gridCol w="2450192">
-                  <a:extLst>
-                    <a:ext uri="{9D8B030D-6E8A-4147-A177-3AD203B41FA5}">
-                      <a16:colId xmlns:a16="http://schemas.microsoft.com/office/drawing/2014/main" val="20003"/>
-                    </a:ext>
-                  </a:extLst>
-                </a:gridCol>
-              </a:tblGrid>
-              <a:tr h="450000">
-                <a:tc>
-                  <a:txBody>
-                    <a:bodyPr/>
-                    <a:lstStyle/>
-                    <a:p>
-                      <a:pPr algn="ctr"/>
-                      <a:r>
-                        <a:rPr sz="1000" b="1">
-                          <a:solidFill>
-                            <a:srgbClr val="FFFFFF"/>
-                          </a:solidFill>
-                          <a:latin typeface="メイリオ"/>
-                          <a:ea typeface="メイリオ"/>
-                        </a:rPr>
-                        <a:t>アップデート</a:t>
-                      </a:r>
-                    </a:p>
-                  </a:txBody>
-                  <a:tcPr anchor="ctr">
-                    <a:solidFill>
-                      <a:srgbClr val="1F4E79"/>
-                    </a:solidFill>
-                  </a:tcPr>
-                </a:tc>
-                <a:tc>
-                  <a:txBody>
-                    <a:bodyPr/>
-                    <a:lstStyle/>
-                    <a:p>
-                      <a:pPr algn="ctr"/>
-                      <a:r>
-                        <a:rPr sz="1000" b="1">
-                          <a:solidFill>
-                            <a:srgbClr val="FFFFFF"/>
-                          </a:solidFill>
-                          <a:latin typeface="メイリオ"/>
-                          <a:ea typeface="メイリオ"/>
-                        </a:rPr>
-                        <a:t>新機能</a:t>
-                      </a:r>
-                    </a:p>
-                  </a:txBody>
-                  <a:tcPr anchor="ctr">
-                    <a:solidFill>
-                      <a:srgbClr val="1F4E79"/>
-                    </a:solidFill>
-                  </a:tcPr>
-                </a:tc>
-                <a:tc>
-                  <a:txBody>
-                    <a:bodyPr/>
-                    <a:lstStyle/>
-                    <a:p>
-                      <a:pPr algn="ctr"/>
-                      <a:r>
-                        <a:rPr sz="1000" b="1">
-                          <a:solidFill>
-                            <a:srgbClr val="FFFFFF"/>
-                          </a:solidFill>
-                          <a:latin typeface="メイリオ"/>
-                          <a:ea typeface="メイリオ"/>
-                        </a:rPr>
-                        <a:t>できるようになること</a:t>
-                      </a:r>
-                    </a:p>
-                  </a:txBody>
-                  <a:tcPr anchor="ctr">
-                    <a:solidFill>
-                      <a:srgbClr val="1F4E79"/>
-                    </a:solidFill>
-                  </a:tcPr>
-                </a:tc>
-                <a:tc>
-                  <a:txBody>
-                    <a:bodyPr/>
-                    <a:lstStyle/>
-                    <a:p>
-                      <a:pPr algn="ctr"/>
-                      <a:r>
-                        <a:rPr sz="1000" b="1">
-                          <a:solidFill>
-                            <a:srgbClr val="FFFFFF"/>
-                          </a:solidFill>
-                          <a:latin typeface="メイリオ"/>
-                          <a:ea typeface="メイリオ"/>
-                        </a:rPr>
-                        <a:t>今後の活用イメージ</a:t>
-                      </a:r>
-                    </a:p>
-                  </a:txBody>
-                  <a:tcPr anchor="ctr">
-                    <a:solidFill>
-                      <a:srgbClr val="1F4E79"/>
-                    </a:solidFill>
-                  </a:tcPr>
-                </a:tc>
-                <a:extLst>
-                  <a:ext uri="{0D108BD9-81ED-4DB2-BD59-A6C34878D82A}">
-                    <a16:rowId xmlns:a16="http://schemas.microsoft.com/office/drawing/2014/main" val="10000"/>
-                  </a:ext>
-                </a:extLst>
-              </a:tr>
-              <a:tr h="720000">
-                <a:tc>
-                  <a:txBody>
-                    <a:bodyPr/>
-                    <a:lstStyle/>
-                    <a:p>
-                      <a:pPr algn="l"/>
-                      <a:r>
-                        <a:rPr sz="900" b="1" dirty="0">
-                          <a:solidFill>
-                            <a:srgbClr val="333333"/>
-                          </a:solidFill>
-                          <a:latin typeface="メイリオ"/>
-                          <a:ea typeface="メイリオ"/>
-                        </a:rPr>
-                        <a:t>Ruby
-3.2→3.4</a:t>
-                      </a:r>
-                    </a:p>
-                  </a:txBody>
-                  <a:tcPr anchor="ctr"/>
-                </a:tc>
-                <a:tc>
-                  <a:txBody>
-                    <a:bodyPr/>
-                    <a:lstStyle/>
-                    <a:p>
-                      <a:pPr algn="l"/>
-                      <a:r>
-                        <a:rPr sz="900" b="0">
-                          <a:solidFill>
-                            <a:srgbClr val="333333"/>
-                          </a:solidFill>
-                          <a:latin typeface="メイリオ"/>
-                          <a:ea typeface="メイリオ"/>
-                        </a:rPr>
-                        <a:t>外部接続の改善
-(Happy Eyeballs v2)</a:t>
-                      </a:r>
-                    </a:p>
-                  </a:txBody>
-                  <a:tcPr anchor="ctr"/>
-                </a:tc>
-                <a:tc>
-                  <a:txBody>
-                    <a:bodyPr/>
-                    <a:lstStyle/>
-                    <a:p>
-                      <a:pPr algn="l"/>
-                      <a:r>
-                        <a:rPr sz="900" b="0">
-                          <a:solidFill>
-                            <a:srgbClr val="333333"/>
-                          </a:solidFill>
-                          <a:latin typeface="メイリオ"/>
-                          <a:ea typeface="メイリオ"/>
-                        </a:rPr>
-                        <a:t>IPv4/IPv6を並行して接続試行し、
-外部通信の確立をより確実にできる</a:t>
-                      </a:r>
-                    </a:p>
-                  </a:txBody>
-                  <a:tcPr anchor="ctr"/>
-                </a:tc>
-                <a:tc>
-                  <a:txBody>
-                    <a:bodyPr/>
-                    <a:lstStyle/>
-                    <a:p>
-                      <a:pPr algn="l"/>
-                      <a:r>
-                        <a:rPr sz="900" b="0">
-                          <a:solidFill>
-                            <a:srgbClr val="333333"/>
-                          </a:solidFill>
-                          <a:latin typeface="メイリオ"/>
-                          <a:ea typeface="メイリオ"/>
-                        </a:rPr>
-                        <a:t>基幹・決済・配送など外部API連携の
-接続まわりを安定させやすい</a:t>
-                      </a:r>
-                    </a:p>
-                  </a:txBody>
-                  <a:tcPr anchor="ctr"/>
-                </a:tc>
-                <a:extLst>
-                  <a:ext uri="{0D108BD9-81ED-4DB2-BD59-A6C34878D82A}">
-                    <a16:rowId xmlns:a16="http://schemas.microsoft.com/office/drawing/2014/main" val="10001"/>
-                  </a:ext>
-                </a:extLst>
-              </a:tr>
-              <a:tr h="720000">
-                <a:tc>
-                  <a:txBody>
-                    <a:bodyPr/>
-                    <a:lstStyle/>
-                    <a:p>
-                      <a:pPr algn="l"/>
-                      <a:r>
-                        <a:rPr sz="900" b="1">
-                          <a:solidFill>
-                            <a:srgbClr val="333333"/>
-                          </a:solidFill>
-                          <a:latin typeface="メイリオ"/>
-                          <a:ea typeface="メイリオ"/>
-                        </a:rPr>
-                        <a:t>Rails
-7.2→8.1</a:t>
-                      </a:r>
-                    </a:p>
-                  </a:txBody>
-                  <a:tcPr anchor="ctr">
-                    <a:solidFill>
-                      <a:srgbClr val="D6E3F0"/>
-                    </a:solidFill>
-                  </a:tcPr>
-                </a:tc>
-                <a:tc>
-                  <a:txBody>
-                    <a:bodyPr/>
-                    <a:lstStyle/>
-                    <a:p>
-                      <a:pPr algn="l"/>
-                      <a:r>
-                        <a:rPr sz="900" b="0" dirty="0">
-                          <a:solidFill>
-                            <a:srgbClr val="333333"/>
-                          </a:solidFill>
-                          <a:latin typeface="メイリオ"/>
-                          <a:ea typeface="メイリオ"/>
-                        </a:rPr>
-                        <a:t>同じジョブの途中再開
-(Active Job Continuations)</a:t>
-                      </a:r>
-                    </a:p>
-                  </a:txBody>
-                  <a:tcPr anchor="ctr">
-                    <a:solidFill>
-                      <a:srgbClr val="D6E3F0"/>
-                    </a:solidFill>
-                  </a:tcPr>
-                </a:tc>
-                <a:tc>
-                  <a:txBody>
-                    <a:bodyPr/>
-                    <a:lstStyle/>
-                    <a:p>
-                      <a:pPr algn="l"/>
-                      <a:r>
-                        <a:rPr sz="900" b="0">
-                          <a:solidFill>
-                            <a:srgbClr val="333333"/>
-                          </a:solidFill>
-                          <a:latin typeface="メイリオ"/>
-                          <a:ea typeface="メイリオ"/>
-                        </a:rPr>
-                        <a:t>長時間ジョブが途中停止しても、
-同じ実行を続きから再開しやすい
-※再実行（新規ジョブ）とは別物</a:t>
-                      </a:r>
-                    </a:p>
-                  </a:txBody>
-                  <a:tcPr anchor="ctr">
-                    <a:solidFill>
-                      <a:srgbClr val="D6E3F0"/>
-                    </a:solidFill>
-                  </a:tcPr>
-                </a:tc>
-                <a:tc>
-                  <a:txBody>
-                    <a:bodyPr/>
-                    <a:lstStyle/>
-                    <a:p>
-                      <a:pPr algn="l"/>
-                      <a:r>
-                        <a:rPr sz="900" b="0">
-                          <a:solidFill>
-                            <a:srgbClr val="333333"/>
-                          </a:solidFill>
-                          <a:latin typeface="メイリオ"/>
-                          <a:ea typeface="メイリオ"/>
-                        </a:rPr>
-                        <a:t>CSV取込／出力など
-長時間ジョブの安定運用に使える</a:t>
-                      </a:r>
-                    </a:p>
-                  </a:txBody>
-                  <a:tcPr anchor="ctr">
-                    <a:solidFill>
-                      <a:srgbClr val="D6E3F0"/>
-                    </a:solidFill>
-                  </a:tcPr>
-                </a:tc>
-                <a:extLst>
-                  <a:ext uri="{0D108BD9-81ED-4DB2-BD59-A6C34878D82A}">
-                    <a16:rowId xmlns:a16="http://schemas.microsoft.com/office/drawing/2014/main" val="10002"/>
-                  </a:ext>
-                </a:extLst>
-              </a:tr>
-              <a:tr h="720000">
-                <a:tc>
-                  <a:txBody>
-                    <a:bodyPr/>
-                    <a:lstStyle/>
-                    <a:p>
-                      <a:pPr algn="l"/>
-                      <a:r>
-                        <a:rPr sz="900" b="1">
-                          <a:solidFill>
-                            <a:srgbClr val="333333"/>
-                          </a:solidFill>
-                          <a:latin typeface="メイリオ"/>
-                          <a:ea typeface="メイリオ"/>
-                        </a:rPr>
-                        <a:t>Rails
-7.2→8.1</a:t>
-                      </a:r>
-                    </a:p>
-                  </a:txBody>
-                  <a:tcPr anchor="ctr"/>
-                </a:tc>
-                <a:tc>
-                  <a:txBody>
-                    <a:bodyPr/>
-                    <a:lstStyle/>
-                    <a:p>
-                      <a:pPr algn="l"/>
-                      <a:r>
-                        <a:rPr sz="900" b="0" dirty="0">
-                          <a:solidFill>
-                            <a:srgbClr val="333333"/>
-                          </a:solidFill>
-                          <a:latin typeface="メイリオ"/>
-                          <a:ea typeface="メイリオ"/>
-                        </a:rPr>
-                        <a:t>構造化イベント通知
-(Rails.event)</a:t>
-                      </a:r>
-                    </a:p>
-                  </a:txBody>
-                  <a:tcPr anchor="ctr"/>
-                </a:tc>
-                <a:tc>
-                  <a:txBody>
-                    <a:bodyPr/>
-                    <a:lstStyle/>
-                    <a:p>
-                      <a:pPr algn="l"/>
-                      <a:r>
-                        <a:rPr sz="800" b="0" dirty="0">
-                          <a:solidFill>
-                            <a:srgbClr val="333333"/>
-                          </a:solidFill>
-                          <a:latin typeface="メイリオ"/>
-                          <a:ea typeface="メイリオ"/>
-                        </a:rPr>
-                        <a:t>以前は logger（人が読むログ）と
-Notifications（内部計測）が中心。
-それらを継続しつつ、業務イベント
-（受注確定・価格変更・CSV取込完了など）を
-同じ形式で出せるようになった</a:t>
-                      </a:r>
-                    </a:p>
-                  </a:txBody>
-                  <a:tcPr anchor="ctr"/>
-                </a:tc>
-                <a:tc>
-                  <a:txBody>
-                    <a:bodyPr/>
-                    <a:lstStyle/>
-                    <a:p>
-                      <a:pPr algn="l"/>
-                      <a:r>
-                        <a:rPr sz="800" b="0">
-                          <a:solidFill>
-                            <a:srgbClr val="333333"/>
-                          </a:solidFill>
-                          <a:latin typeface="メイリオ"/>
-                          <a:ea typeface="メイリオ"/>
-                        </a:rPr>
-                        <a:t>「いつ・誰が・何をした」を
-横断検索しやすくなり、
-障害調査・監査・監視連携がやりやすい</a:t>
-                      </a:r>
-                    </a:p>
-                  </a:txBody>
-                  <a:tcPr anchor="ctr"/>
-                </a:tc>
-                <a:extLst>
-                  <a:ext uri="{0D108BD9-81ED-4DB2-BD59-A6C34878D82A}">
-                    <a16:rowId xmlns:a16="http://schemas.microsoft.com/office/drawing/2014/main" val="10003"/>
-                  </a:ext>
-                </a:extLst>
-              </a:tr>
-              <a:tr h="720000">
-                <a:tc>
-                  <a:txBody>
-                    <a:bodyPr/>
-                    <a:lstStyle/>
-                    <a:p>
-                      <a:pPr algn="l"/>
-                      <a:r>
-                        <a:rPr sz="900" b="1">
-                          <a:solidFill>
-                            <a:srgbClr val="333333"/>
-                          </a:solidFill>
-                          <a:latin typeface="メイリオ"/>
-                          <a:ea typeface="メイリオ"/>
-                        </a:rPr>
-                        <a:t>Rails
-7.2→8.1</a:t>
-                      </a:r>
-                    </a:p>
-                  </a:txBody>
-                  <a:tcPr anchor="ctr">
-                    <a:solidFill>
-                      <a:srgbClr val="D6E3F0"/>
-                    </a:solidFill>
-                  </a:tcPr>
-                </a:tc>
-                <a:tc>
-                  <a:txBody>
-                    <a:bodyPr/>
-                    <a:lstStyle/>
-                    <a:p>
-                      <a:pPr algn="l"/>
-                      <a:r>
-                        <a:rPr sz="900" b="0">
-                          <a:solidFill>
-                            <a:srgbClr val="333333"/>
-                          </a:solidFill>
-                          <a:latin typeface="メイリオ"/>
-                          <a:ea typeface="メイリオ"/>
-                        </a:rPr>
-                        <a:t>Markdown標準描画</a:t>
-                      </a:r>
-                    </a:p>
-                  </a:txBody>
-                  <a:tcPr anchor="ctr">
-                    <a:solidFill>
-                      <a:srgbClr val="D6E3F0"/>
-                    </a:solidFill>
-                  </a:tcPr>
-                </a:tc>
-                <a:tc>
-                  <a:txBody>
-                    <a:bodyPr/>
-                    <a:lstStyle/>
-                    <a:p>
-                      <a:pPr algn="l"/>
-                      <a:r>
-                        <a:rPr sz="900" b="0" dirty="0">
-                          <a:solidFill>
-                            <a:srgbClr val="333333"/>
-                          </a:solidFill>
-                          <a:latin typeface="メイリオ"/>
-                          <a:ea typeface="メイリオ"/>
-                        </a:rPr>
-                        <a:t>Markdownをそのまま
-画面やAPI応答に使える</a:t>
-                      </a:r>
-                    </a:p>
-                  </a:txBody>
-                  <a:tcPr anchor="ctr">
-                    <a:solidFill>
-                      <a:srgbClr val="D6E3F0"/>
-                    </a:solidFill>
-                  </a:tcPr>
-                </a:tc>
-                <a:tc>
-                  <a:txBody>
-                    <a:bodyPr/>
-                    <a:lstStyle/>
-                    <a:p>
-                      <a:pPr algn="l"/>
-                      <a:r>
-                        <a:rPr sz="900" b="0">
-                          <a:solidFill>
-                            <a:srgbClr val="333333"/>
-                          </a:solidFill>
-                          <a:latin typeface="メイリオ"/>
-                          <a:ea typeface="メイリオ"/>
-                        </a:rPr>
-                        <a:t>ヘルプ・提案資料・AI出力の表示基盤
-（伴走支援の説明にも応用可）</a:t>
-                      </a:r>
-                    </a:p>
-                  </a:txBody>
-                  <a:tcPr anchor="ctr">
-                    <a:solidFill>
-                      <a:srgbClr val="D6E3F0"/>
-                    </a:solidFill>
-                  </a:tcPr>
-                </a:tc>
-                <a:extLst>
-                  <a:ext uri="{0D108BD9-81ED-4DB2-BD59-A6C34878D82A}">
-                    <a16:rowId xmlns:a16="http://schemas.microsoft.com/office/drawing/2014/main" val="10004"/>
-                  </a:ext>
-                </a:extLst>
-              </a:tr>
-              <a:tr h="720000">
-                <a:tc>
-                  <a:txBody>
-                    <a:bodyPr/>
-                    <a:lstStyle/>
-                    <a:p>
-                      <a:pPr algn="l"/>
-                      <a:r>
-                        <a:rPr sz="900" b="1">
-                          <a:solidFill>
-                            <a:srgbClr val="333333"/>
-                          </a:solidFill>
-                          <a:latin typeface="メイリオ"/>
-                          <a:ea typeface="メイリオ"/>
-                        </a:rPr>
-                        <a:t>MariaDB
-10.6→10.11</a:t>
-                      </a:r>
-                    </a:p>
-                  </a:txBody>
-                  <a:tcPr anchor="ctr"/>
-                </a:tc>
-                <a:tc>
-                  <a:txBody>
-                    <a:bodyPr/>
-                    <a:lstStyle/>
-                    <a:p>
-                      <a:pPr algn="l"/>
-                      <a:r>
-                        <a:rPr sz="900" b="0">
-                          <a:solidFill>
-                            <a:srgbClr val="333333"/>
-                          </a:solidFill>
-                          <a:latin typeface="メイリオ"/>
-                          <a:ea typeface="メイリオ"/>
-                        </a:rPr>
-                        <a:t>UUID型
-／設定の動的変更</a:t>
-                      </a:r>
-                    </a:p>
-                  </a:txBody>
-                  <a:tcPr anchor="ctr"/>
-                </a:tc>
-                <a:tc>
-                  <a:txBody>
-                    <a:bodyPr/>
-                    <a:lstStyle/>
-                    <a:p>
-                      <a:pPr algn="l"/>
-                      <a:r>
-                        <a:rPr sz="900" b="0">
-                          <a:solidFill>
-                            <a:srgbClr val="333333"/>
-                          </a:solidFill>
-                          <a:latin typeface="メイリオ"/>
-                          <a:ea typeface="メイリオ"/>
-                        </a:rPr>
-                        <a:t>UUIDをDB型で持てる
-一部設定を再起動なしで変更できる</a:t>
-                      </a:r>
-                    </a:p>
-                  </a:txBody>
-                  <a:tcPr anchor="ctr"/>
-                </a:tc>
-                <a:tc>
-                  <a:txBody>
-                    <a:bodyPr/>
-                    <a:lstStyle/>
-                    <a:p>
-                      <a:pPr algn="l"/>
-                      <a:r>
-                        <a:rPr sz="900" b="0" dirty="0">
-                          <a:solidFill>
-                            <a:srgbClr val="333333"/>
-                          </a:solidFill>
-                          <a:latin typeface="メイリオ"/>
-                          <a:ea typeface="メイリオ"/>
-                        </a:rPr>
-                        <a:t>基幹連携IDの整備や、ピーク時の
-運用チューニングに使える</a:t>
-                      </a:r>
-                    </a:p>
-                  </a:txBody>
-                  <a:tcPr anchor="ctr"/>
-                </a:tc>
-                <a:extLst>
-                  <a:ext uri="{0D108BD9-81ED-4DB2-BD59-A6C34878D82A}">
-                    <a16:rowId xmlns:a16="http://schemas.microsoft.com/office/drawing/2014/main" val="10005"/>
-                  </a:ext>
-                </a:extLst>
-              </a:tr>
-            </a:tbl>
-          </a:graphicData>
-        </a:graphic>
-      </p:graphicFrame>
       <p:sp>
         <p:nvSpPr>
           <p:cNvPr id="11" name="TextBox 4">
@@ -13653,6 +12980,740 @@
           </a:p>
         </p:txBody>
       </p:sp>
+      <p:graphicFrame>
+        <p:nvGraphicFramePr>
+          <p:cNvPr id="12" name="Table 11"/>
+          <p:cNvGraphicFramePr>
+            <a:graphicFrameLocks noGrp="1"/>
+          </p:cNvGraphicFramePr>
+          <p:nvPr/>
+        </p:nvGraphicFramePr>
+        <p:xfrm>
+          <a:off x="400000" y="1080000"/>
+          <a:ext cx="9100000" cy="3850000"/>
+        </p:xfrm>
+        <a:graphic>
+          <a:graphicData uri="http://schemas.openxmlformats.org/drawingml/2006/table">
+            <a:tbl>
+              <a:tblPr firstRow="1" bandRow="1">
+                <a:tableStyleId>{5C22544A-7EE6-4342-B048-85BDC9FD1C3A}</a:tableStyleId>
+              </a:tblPr>
+              <a:tblGrid>
+                <a:gridCol w="2050000"/>
+                <a:gridCol w="3450000"/>
+                <a:gridCol w="3600000"/>
+              </a:tblGrid>
+              <a:tr h="641666">
+                <a:tc>
+                  <a:txBody>
+                    <a:bodyPr wrap="square"/>
+                    <a:lstStyle/>
+                    <a:p>
+                      <a:pPr algn="ctr"/>
+                      <a:r>
+                        <a:rPr sz="1000" b="1">
+                          <a:solidFill>
+                            <a:srgbClr val="FFFFFF"/>
+                          </a:solidFill>
+                          <a:latin typeface="メイリオ"/>
+                          <a:ea typeface="メイリオ"/>
+                        </a:rPr>
+                        <a:t>アップデート／新機能</a:t>
+                      </a:r>
+                    </a:p>
+                  </a:txBody>
+                  <a:tcPr anchor="ctr">
+                    <a:solidFill>
+                      <a:srgbClr val="1F4E79"/>
+                    </a:solidFill>
+                  </a:tcPr>
+                </a:tc>
+                <a:tc>
+                  <a:txBody>
+                    <a:bodyPr wrap="square"/>
+                    <a:lstStyle/>
+                    <a:p>
+                      <a:pPr algn="ctr"/>
+                      <a:r>
+                        <a:rPr sz="1000" b="1">
+                          <a:solidFill>
+                            <a:srgbClr val="FFFFFF"/>
+                          </a:solidFill>
+                          <a:latin typeface="メイリオ"/>
+                          <a:ea typeface="メイリオ"/>
+                        </a:rPr>
+                        <a:t>これまで（現状）</a:t>
+                      </a:r>
+                    </a:p>
+                  </a:txBody>
+                  <a:tcPr anchor="ctr">
+                    <a:solidFill>
+                      <a:srgbClr val="1F4E79"/>
+                    </a:solidFill>
+                  </a:tcPr>
+                </a:tc>
+                <a:tc>
+                  <a:txBody>
+                    <a:bodyPr wrap="square"/>
+                    <a:lstStyle/>
+                    <a:p>
+                      <a:pPr algn="ctr"/>
+                      <a:r>
+                        <a:rPr sz="1000" b="1">
+                          <a:solidFill>
+                            <a:srgbClr val="FFFFFF"/>
+                          </a:solidFill>
+                          <a:latin typeface="メイリオ"/>
+                          <a:ea typeface="メイリオ"/>
+                        </a:rPr>
+                        <a:t>これから（バージョンアップ後）</a:t>
+                      </a:r>
+                    </a:p>
+                  </a:txBody>
+                  <a:tcPr anchor="ctr">
+                    <a:solidFill>
+                      <a:srgbClr val="1F4E79"/>
+                    </a:solidFill>
+                  </a:tcPr>
+                </a:tc>
+              </a:tr>
+              <a:tr h="641666">
+                <a:tc>
+                  <a:txBody>
+                    <a:bodyPr wrap="square"/>
+                    <a:lstStyle/>
+                    <a:p>
+                      <a:pPr algn="l"/>
+                      <a:r>
+                        <a:rPr sz="900" b="1">
+                          <a:solidFill>
+                            <a:srgbClr val="333333"/>
+                          </a:solidFill>
+                          <a:latin typeface="メイリオ"/>
+                          <a:ea typeface="メイリオ"/>
+                        </a:rPr>
+                        <a:t>Ruby 3.2→3.4</a:t>
+                      </a:r>
+                    </a:p>
+                    <a:p>
+                      <a:pPr algn="l"/>
+                      <a:r>
+                        <a:rPr sz="900" b="1">
+                          <a:solidFill>
+                            <a:srgbClr val="333333"/>
+                          </a:solidFill>
+                          <a:latin typeface="メイリオ"/>
+                          <a:ea typeface="メイリオ"/>
+                        </a:rPr>
+                        <a:t>外部接続の改善</a:t>
+                      </a:r>
+                    </a:p>
+                    <a:p>
+                      <a:pPr algn="l"/>
+                      <a:r>
+                        <a:rPr sz="900" b="1">
+                          <a:solidFill>
+                            <a:srgbClr val="333333"/>
+                          </a:solidFill>
+                          <a:latin typeface="メイリオ"/>
+                          <a:ea typeface="メイリオ"/>
+                        </a:rPr>
+                        <a:t>(Happy Eyeballs v2)</a:t>
+                      </a:r>
+                    </a:p>
+                  </a:txBody>
+                  <a:tcPr anchor="ctr"/>
+                </a:tc>
+                <a:tc>
+                  <a:txBody>
+                    <a:bodyPr wrap="square"/>
+                    <a:lstStyle/>
+                    <a:p>
+                      <a:pPr algn="l"/>
+                      <a:r>
+                        <a:rPr sz="900" b="0">
+                          <a:solidFill>
+                            <a:srgbClr val="333333"/>
+                          </a:solidFill>
+                          <a:latin typeface="メイリオ"/>
+                          <a:ea typeface="メイリオ"/>
+                        </a:rPr>
+                        <a:t>IPv6→IPv4の順に1つずつ接続を試す。</a:t>
+                      </a:r>
+                    </a:p>
+                    <a:p>
+                      <a:pPr algn="l"/>
+                      <a:r>
+                        <a:rPr sz="900" b="0">
+                          <a:solidFill>
+                            <a:srgbClr val="333333"/>
+                          </a:solidFill>
+                          <a:latin typeface="メイリオ"/>
+                          <a:ea typeface="メイリオ"/>
+                        </a:rPr>
+                        <a:t>片方が遅い／不通だと待たされ、</a:t>
+                      </a:r>
+                    </a:p>
+                    <a:p>
+                      <a:pPr algn="l"/>
+                      <a:r>
+                        <a:rPr sz="900" b="0">
+                          <a:solidFill>
+                            <a:srgbClr val="333333"/>
+                          </a:solidFill>
+                          <a:latin typeface="メイリオ"/>
+                          <a:ea typeface="メイリオ"/>
+                        </a:rPr>
+                        <a:t>接続に時間がかかる・失敗することも</a:t>
+                      </a:r>
+                    </a:p>
+                  </a:txBody>
+                  <a:tcPr anchor="ctr"/>
+                </a:tc>
+                <a:tc>
+                  <a:txBody>
+                    <a:bodyPr wrap="square"/>
+                    <a:lstStyle/>
+                    <a:p>
+                      <a:pPr algn="l"/>
+                      <a:r>
+                        <a:rPr sz="900" b="0">
+                          <a:solidFill>
+                            <a:srgbClr val="333333"/>
+                          </a:solidFill>
+                          <a:latin typeface="メイリオ"/>
+                          <a:ea typeface="メイリオ"/>
+                        </a:rPr>
+                        <a:t>IPv4/IPv6を同時に試し、先に繋がった</a:t>
+                      </a:r>
+                    </a:p>
+                    <a:p>
+                      <a:pPr algn="l"/>
+                      <a:r>
+                        <a:rPr sz="900" b="0">
+                          <a:solidFill>
+                            <a:srgbClr val="333333"/>
+                          </a:solidFill>
+                          <a:latin typeface="メイリオ"/>
+                          <a:ea typeface="メイリオ"/>
+                        </a:rPr>
+                        <a:t>方を採用。外部API（決済・配送・基幹）</a:t>
+                      </a:r>
+                    </a:p>
+                    <a:p>
+                      <a:pPr algn="l"/>
+                      <a:r>
+                        <a:rPr sz="900" b="0">
+                          <a:solidFill>
+                            <a:srgbClr val="333333"/>
+                          </a:solidFill>
+                          <a:latin typeface="メイリオ"/>
+                          <a:ea typeface="メイリオ"/>
+                        </a:rPr>
+                        <a:t>の接続が安定しやすい</a:t>
+                      </a:r>
+                    </a:p>
+                  </a:txBody>
+                  <a:tcPr anchor="ctr"/>
+                </a:tc>
+              </a:tr>
+              <a:tr h="641666">
+                <a:tc>
+                  <a:txBody>
+                    <a:bodyPr wrap="square"/>
+                    <a:lstStyle/>
+                    <a:p>
+                      <a:pPr algn="l"/>
+                      <a:r>
+                        <a:rPr sz="900" b="1">
+                          <a:solidFill>
+                            <a:srgbClr val="333333"/>
+                          </a:solidFill>
+                          <a:latin typeface="メイリオ"/>
+                          <a:ea typeface="メイリオ"/>
+                        </a:rPr>
+                        <a:t>Rails 7.2→8.1</a:t>
+                      </a:r>
+                    </a:p>
+                    <a:p>
+                      <a:pPr algn="l"/>
+                      <a:r>
+                        <a:rPr sz="900" b="1">
+                          <a:solidFill>
+                            <a:srgbClr val="333333"/>
+                          </a:solidFill>
+                          <a:latin typeface="メイリオ"/>
+                          <a:ea typeface="メイリオ"/>
+                        </a:rPr>
+                        <a:t>同じジョブの途中再開</a:t>
+                      </a:r>
+                    </a:p>
+                    <a:p>
+                      <a:pPr algn="l"/>
+                      <a:r>
+                        <a:rPr sz="900" b="1">
+                          <a:solidFill>
+                            <a:srgbClr val="333333"/>
+                          </a:solidFill>
+                          <a:latin typeface="メイリオ"/>
+                          <a:ea typeface="メイリオ"/>
+                        </a:rPr>
+                        <a:t>(Active Job Continuations)</a:t>
+                      </a:r>
+                    </a:p>
+                  </a:txBody>
+                  <a:tcPr anchor="ctr">
+                    <a:solidFill>
+                      <a:srgbClr val="D6E3F0"/>
+                    </a:solidFill>
+                  </a:tcPr>
+                </a:tc>
+                <a:tc>
+                  <a:txBody>
+                    <a:bodyPr wrap="square"/>
+                    <a:lstStyle/>
+                    <a:p>
+                      <a:pPr algn="l"/>
+                      <a:r>
+                        <a:rPr sz="900" b="0">
+                          <a:solidFill>
+                            <a:srgbClr val="333333"/>
+                          </a:solidFill>
+                          <a:latin typeface="メイリオ"/>
+                          <a:ea typeface="メイリオ"/>
+                        </a:rPr>
+                        <a:t>長時間ジョブが中断すると、続き再開は</a:t>
+                      </a:r>
+                    </a:p>
+                    <a:p>
+                      <a:pPr algn="l"/>
+                      <a:r>
+                        <a:rPr sz="900" b="0">
+                          <a:solidFill>
+                            <a:srgbClr val="333333"/>
+                          </a:solidFill>
+                          <a:latin typeface="メイリオ"/>
+                          <a:ea typeface="メイリオ"/>
+                        </a:rPr>
+                        <a:t>自前実装が必要。無ければ最初からやり直し</a:t>
+                      </a:r>
+                    </a:p>
+                  </a:txBody>
+                  <a:tcPr anchor="ctr">
+                    <a:solidFill>
+                      <a:srgbClr val="D6E3F0"/>
+                    </a:solidFill>
+                  </a:tcPr>
+                </a:tc>
+                <a:tc>
+                  <a:txBody>
+                    <a:bodyPr wrap="square"/>
+                    <a:lstStyle/>
+                    <a:p>
+                      <a:pPr algn="l"/>
+                      <a:r>
+                        <a:rPr sz="900" b="0">
+                          <a:solidFill>
+                            <a:srgbClr val="333333"/>
+                          </a:solidFill>
+                          <a:latin typeface="メイリオ"/>
+                          <a:ea typeface="メイリオ"/>
+                        </a:rPr>
+                        <a:t>標準機能で、同じジョブを進捗（何件目）</a:t>
+                      </a:r>
+                    </a:p>
+                    <a:p>
+                      <a:pPr algn="l"/>
+                      <a:r>
+                        <a:rPr sz="900" b="0">
+                          <a:solidFill>
+                            <a:srgbClr val="333333"/>
+                          </a:solidFill>
+                          <a:latin typeface="メイリオ"/>
+                          <a:ea typeface="メイリオ"/>
+                        </a:rPr>
+                        <a:t>から再開できる。CSV取込／出力など</a:t>
+                      </a:r>
+                    </a:p>
+                    <a:p>
+                      <a:pPr algn="l"/>
+                      <a:r>
+                        <a:rPr sz="900" b="0">
+                          <a:solidFill>
+                            <a:srgbClr val="333333"/>
+                          </a:solidFill>
+                          <a:latin typeface="メイリオ"/>
+                          <a:ea typeface="メイリオ"/>
+                        </a:rPr>
+                        <a:t>夜間バッチの安定運用に有効</a:t>
+                      </a:r>
+                    </a:p>
+                  </a:txBody>
+                  <a:tcPr anchor="ctr">
+                    <a:solidFill>
+                      <a:srgbClr val="D6E3F0"/>
+                    </a:solidFill>
+                  </a:tcPr>
+                </a:tc>
+              </a:tr>
+              <a:tr h="641666">
+                <a:tc>
+                  <a:txBody>
+                    <a:bodyPr wrap="square"/>
+                    <a:lstStyle/>
+                    <a:p>
+                      <a:pPr algn="l"/>
+                      <a:r>
+                        <a:rPr sz="900" b="1">
+                          <a:solidFill>
+                            <a:srgbClr val="333333"/>
+                          </a:solidFill>
+                          <a:latin typeface="メイリオ"/>
+                          <a:ea typeface="メイリオ"/>
+                        </a:rPr>
+                        <a:t>Rails 7.2→8.1</a:t>
+                      </a:r>
+                    </a:p>
+                    <a:p>
+                      <a:pPr algn="l"/>
+                      <a:r>
+                        <a:rPr sz="900" b="1">
+                          <a:solidFill>
+                            <a:srgbClr val="333333"/>
+                          </a:solidFill>
+                          <a:latin typeface="メイリオ"/>
+                          <a:ea typeface="メイリオ"/>
+                        </a:rPr>
+                        <a:t>構造化イベント通知</a:t>
+                      </a:r>
+                    </a:p>
+                    <a:p>
+                      <a:pPr algn="l"/>
+                      <a:r>
+                        <a:rPr sz="900" b="1">
+                          <a:solidFill>
+                            <a:srgbClr val="333333"/>
+                          </a:solidFill>
+                          <a:latin typeface="メイリオ"/>
+                          <a:ea typeface="メイリオ"/>
+                        </a:rPr>
+                        <a:t>(Rails.event)</a:t>
+                      </a:r>
+                    </a:p>
+                  </a:txBody>
+                  <a:tcPr anchor="ctr"/>
+                </a:tc>
+                <a:tc>
+                  <a:txBody>
+                    <a:bodyPr wrap="square"/>
+                    <a:lstStyle/>
+                    <a:p>
+                      <a:pPr algn="l"/>
+                      <a:r>
+                        <a:rPr sz="900" b="0">
+                          <a:solidFill>
+                            <a:srgbClr val="333333"/>
+                          </a:solidFill>
+                          <a:latin typeface="メイリオ"/>
+                          <a:ea typeface="メイリオ"/>
+                        </a:rPr>
+                        <a:t>自由文ログ中心で書式がバラバラ。</a:t>
+                      </a:r>
+                    </a:p>
+                    <a:p>
+                      <a:pPr algn="l"/>
+                      <a:r>
+                        <a:rPr sz="900" b="0">
+                          <a:solidFill>
+                            <a:srgbClr val="333333"/>
+                          </a:solidFill>
+                          <a:latin typeface="メイリオ"/>
+                          <a:ea typeface="メイリオ"/>
+                        </a:rPr>
+                        <a:t>後から検索・集計がしにくい</a:t>
+                      </a:r>
+                    </a:p>
+                  </a:txBody>
+                  <a:tcPr anchor="ctr"/>
+                </a:tc>
+                <a:tc>
+                  <a:txBody>
+                    <a:bodyPr wrap="square"/>
+                    <a:lstStyle/>
+                    <a:p>
+                      <a:pPr algn="l"/>
+                      <a:r>
+                        <a:rPr sz="900" b="0">
+                          <a:solidFill>
+                            <a:srgbClr val="333333"/>
+                          </a:solidFill>
+                          <a:latin typeface="メイリオ"/>
+                          <a:ea typeface="メイリオ"/>
+                        </a:rPr>
+                        <a:t>型を決めた業務イベント（受注確定・価格</a:t>
+                      </a:r>
+                    </a:p>
+                    <a:p>
+                      <a:pPr algn="l"/>
+                      <a:r>
+                        <a:rPr sz="900" b="0">
+                          <a:solidFill>
+                            <a:srgbClr val="333333"/>
+                          </a:solidFill>
+                          <a:latin typeface="メイリオ"/>
+                          <a:ea typeface="メイリオ"/>
+                        </a:rPr>
+                        <a:t>変更・取込完了）を同形式で出力。横断</a:t>
+                      </a:r>
+                    </a:p>
+                    <a:p>
+                      <a:pPr algn="l"/>
+                      <a:r>
+                        <a:rPr sz="900" b="0">
+                          <a:solidFill>
+                            <a:srgbClr val="333333"/>
+                          </a:solidFill>
+                          <a:latin typeface="メイリオ"/>
+                          <a:ea typeface="メイリオ"/>
+                        </a:rPr>
+                        <a:t>検索・監視連携が可能 ※詳細は次ページ</a:t>
+                      </a:r>
+                    </a:p>
+                  </a:txBody>
+                  <a:tcPr anchor="ctr"/>
+                </a:tc>
+              </a:tr>
+              <a:tr h="641666">
+                <a:tc>
+                  <a:txBody>
+                    <a:bodyPr wrap="square"/>
+                    <a:lstStyle/>
+                    <a:p>
+                      <a:pPr algn="l"/>
+                      <a:r>
+                        <a:rPr sz="900" b="1">
+                          <a:solidFill>
+                            <a:srgbClr val="333333"/>
+                          </a:solidFill>
+                          <a:latin typeface="メイリオ"/>
+                          <a:ea typeface="メイリオ"/>
+                        </a:rPr>
+                        <a:t>Rails 7.2→8.1</a:t>
+                      </a:r>
+                    </a:p>
+                    <a:p>
+                      <a:pPr algn="l"/>
+                      <a:r>
+                        <a:rPr sz="900" b="1">
+                          <a:solidFill>
+                            <a:srgbClr val="333333"/>
+                          </a:solidFill>
+                          <a:latin typeface="メイリオ"/>
+                          <a:ea typeface="メイリオ"/>
+                        </a:rPr>
+                        <a:t>Markdown標準描画</a:t>
+                      </a:r>
+                    </a:p>
+                  </a:txBody>
+                  <a:tcPr anchor="ctr">
+                    <a:solidFill>
+                      <a:srgbClr val="D6E3F0"/>
+                    </a:solidFill>
+                  </a:tcPr>
+                </a:tc>
+                <a:tc>
+                  <a:txBody>
+                    <a:bodyPr wrap="square"/>
+                    <a:lstStyle/>
+                    <a:p>
+                      <a:pPr algn="l"/>
+                      <a:r>
+                        <a:rPr sz="900" b="0">
+                          <a:solidFill>
+                            <a:srgbClr val="333333"/>
+                          </a:solidFill>
+                          <a:latin typeface="メイリオ"/>
+                          <a:ea typeface="メイリオ"/>
+                        </a:rPr>
+                        <a:t>Markdown表示に変換処理や</a:t>
+                      </a:r>
+                    </a:p>
+                    <a:p>
+                      <a:pPr algn="l"/>
+                      <a:r>
+                        <a:rPr sz="900" b="0">
+                          <a:solidFill>
+                            <a:srgbClr val="333333"/>
+                          </a:solidFill>
+                          <a:latin typeface="メイリオ"/>
+                          <a:ea typeface="メイリオ"/>
+                        </a:rPr>
+                        <a:t>追加ライブラリが必要だった</a:t>
+                      </a:r>
+                    </a:p>
+                  </a:txBody>
+                  <a:tcPr anchor="ctr">
+                    <a:solidFill>
+                      <a:srgbClr val="D6E3F0"/>
+                    </a:solidFill>
+                  </a:tcPr>
+                </a:tc>
+                <a:tc>
+                  <a:txBody>
+                    <a:bodyPr wrap="square"/>
+                    <a:lstStyle/>
+                    <a:p>
+                      <a:pPr algn="l"/>
+                      <a:r>
+                        <a:rPr sz="900" b="0">
+                          <a:solidFill>
+                            <a:srgbClr val="333333"/>
+                          </a:solidFill>
+                          <a:latin typeface="メイリオ"/>
+                          <a:ea typeface="メイリオ"/>
+                        </a:rPr>
+                        <a:t>Markdownをそのまま画面／API応答に</a:t>
+                      </a:r>
+                    </a:p>
+                    <a:p>
+                      <a:pPr algn="l"/>
+                      <a:r>
+                        <a:rPr sz="900" b="0">
+                          <a:solidFill>
+                            <a:srgbClr val="333333"/>
+                          </a:solidFill>
+                          <a:latin typeface="メイリオ"/>
+                          <a:ea typeface="メイリオ"/>
+                        </a:rPr>
+                        <a:t>使える。文書・AI出力の表示基盤になる</a:t>
+                      </a:r>
+                    </a:p>
+                  </a:txBody>
+                  <a:tcPr anchor="ctr">
+                    <a:solidFill>
+                      <a:srgbClr val="D6E3F0"/>
+                    </a:solidFill>
+                  </a:tcPr>
+                </a:tc>
+              </a:tr>
+              <a:tr h="641670">
+                <a:tc>
+                  <a:txBody>
+                    <a:bodyPr wrap="square"/>
+                    <a:lstStyle/>
+                    <a:p>
+                      <a:pPr algn="l"/>
+                      <a:r>
+                        <a:rPr sz="900" b="1">
+                          <a:solidFill>
+                            <a:srgbClr val="333333"/>
+                          </a:solidFill>
+                          <a:latin typeface="メイリオ"/>
+                          <a:ea typeface="メイリオ"/>
+                        </a:rPr>
+                        <a:t>MariaDB 10.6→10.11</a:t>
+                      </a:r>
+                    </a:p>
+                    <a:p>
+                      <a:pPr algn="l"/>
+                      <a:r>
+                        <a:rPr sz="900" b="1">
+                          <a:solidFill>
+                            <a:srgbClr val="333333"/>
+                          </a:solidFill>
+                          <a:latin typeface="メイリオ"/>
+                          <a:ea typeface="メイリオ"/>
+                        </a:rPr>
+                        <a:t>UUID型／設定の動的変更</a:t>
+                      </a:r>
+                    </a:p>
+                  </a:txBody>
+                  <a:tcPr anchor="ctr"/>
+                </a:tc>
+                <a:tc>
+                  <a:txBody>
+                    <a:bodyPr wrap="square"/>
+                    <a:lstStyle/>
+                    <a:p>
+                      <a:pPr algn="l"/>
+                      <a:r>
+                        <a:rPr sz="900" b="0">
+                          <a:solidFill>
+                            <a:srgbClr val="333333"/>
+                          </a:solidFill>
+                          <a:latin typeface="メイリオ"/>
+                          <a:ea typeface="メイリオ"/>
+                        </a:rPr>
+                        <a:t>UUIDは文字列で代用。一部のDB設定</a:t>
+                      </a:r>
+                    </a:p>
+                    <a:p>
+                      <a:pPr algn="l"/>
+                      <a:r>
+                        <a:rPr sz="900" b="0">
+                          <a:solidFill>
+                            <a:srgbClr val="333333"/>
+                          </a:solidFill>
+                          <a:latin typeface="メイリオ"/>
+                          <a:ea typeface="メイリオ"/>
+                        </a:rPr>
+                        <a:t>変更には再起動が必要</a:t>
+                      </a:r>
+                    </a:p>
+                  </a:txBody>
+                  <a:tcPr anchor="ctr"/>
+                </a:tc>
+                <a:tc>
+                  <a:txBody>
+                    <a:bodyPr wrap="square"/>
+                    <a:lstStyle/>
+                    <a:p>
+                      <a:pPr algn="l"/>
+                      <a:r>
+                        <a:rPr sz="900" b="0">
+                          <a:solidFill>
+                            <a:srgbClr val="333333"/>
+                          </a:solidFill>
+                          <a:latin typeface="メイリオ"/>
+                          <a:ea typeface="メイリオ"/>
+                        </a:rPr>
+                        <a:t>UUIDをDB型で保持。一部設定を</a:t>
+                      </a:r>
+                    </a:p>
+                    <a:p>
+                      <a:pPr algn="l"/>
+                      <a:r>
+                        <a:rPr sz="900" b="0">
+                          <a:solidFill>
+                            <a:srgbClr val="333333"/>
+                          </a:solidFill>
+                          <a:latin typeface="メイリオ"/>
+                          <a:ea typeface="メイリオ"/>
+                        </a:rPr>
+                        <a:t>再起動なしで変更でき、負荷時の</a:t>
+                      </a:r>
+                    </a:p>
+                    <a:p>
+                      <a:pPr algn="l"/>
+                      <a:r>
+                        <a:rPr sz="900" b="0">
+                          <a:solidFill>
+                            <a:srgbClr val="333333"/>
+                          </a:solidFill>
+                          <a:latin typeface="メイリオ"/>
+                          <a:ea typeface="メイリオ"/>
+                        </a:rPr>
+                        <a:t>チューニングがしやすい</a:t>
+                      </a:r>
+                    </a:p>
+                  </a:txBody>
+                  <a:tcPr anchor="ctr"/>
+                </a:tc>
+              </a:tr>
+            </a:tbl>
+          </a:graphicData>
+        </a:graphic>
+      </p:graphicFrame>
     </p:spTree>
     <p:extLst>
       <p:ext uri="{BB962C8B-B14F-4D97-AF65-F5344CB8AC3E}">
@@ -13667,6 +13728,1199 @@
 </file>
 
 <file path=ppt/slides/slide15.xml><?xml version="1.0" encoding="utf-8"?>
+<p:sld xmlns:a="http://schemas.openxmlformats.org/drawingml/2006/main" xmlns:p="http://schemas.openxmlformats.org/presentationml/2006/main" xmlns:r="http://schemas.openxmlformats.org/officeDocument/2006/relationships">
+  <p:cSld>
+    <p:spTree>
+      <p:nvGrpSpPr>
+        <p:cNvPr id="1" name=""/>
+        <p:cNvGrpSpPr/>
+        <p:nvPr/>
+      </p:nvGrpSpPr>
+      <p:grpSpPr/>
+      <p:sp>
+        <p:nvSpPr>
+          <p:cNvPr id="2" name="Google Shape;152;p7">
+            <a:extLst>
+              <a:ext uri="{FF2B5EF4-FFF2-40B4-BE49-F238E27FC236}">
+                <a16:creationId xmlns:a16="http://schemas.microsoft.com/office/drawing/2014/main" id="{D921DF44-EF51-FC7C-8257-9CEEE25DB1EF}"/>
+              </a:ext>
+            </a:extLst>
+          </p:cNvPr>
+          <p:cNvSpPr txBox="1">
+            <a:spLocks noGrp="1"/>
+          </p:cNvSpPr>
+          <p:nvPr>
+            <p:ph type="title"/>
+          </p:nvPr>
+        </p:nvSpPr>
+        <p:spPr>
+          <a:xfrm>
+            <a:off x="835852" y="142852"/>
+            <a:ext cx="8915400" cy="582594"/>
+          </a:xfrm>
+          <a:prstGeom prst="rect">
+            <a:avLst/>
+          </a:prstGeom>
+          <a:noFill/>
+          <a:ln>
+            <a:noFill/>
+          </a:ln>
+        </p:spPr>
+        <p:txBody>
+          <a:bodyPr spcFirstLastPara="1" wrap="square" lIns="91425" tIns="45700" rIns="91425" bIns="45700" anchor="b" anchorCtr="0">
+            <a:noAutofit/>
+          </a:bodyPr>
+          <a:lstStyle/>
+          <a:p>
+            <a:pPr>
+              <a:lnSpc>
+                <a:spcPct val="130000"/>
+              </a:lnSpc>
+            </a:pPr>
+            <a:r>
+              <a:rPr sz="2000">
+                <a:solidFill>
+                  <a:srgbClr val="333333"/>
+                </a:solidFill>
+                <a:latin typeface="メイリオ"/>
+                <a:ea typeface="メイリオ"/>
+              </a:rPr>
+              <a:t>5. </a:t>
+            </a:r>
+            <a:r>
+              <a:rPr sz="1400">
+                <a:solidFill>
+                  <a:srgbClr val="333333"/>
+                </a:solidFill>
+                <a:latin typeface="メイリオ"/>
+                <a:ea typeface="メイリオ"/>
+              </a:rPr>
+              <a:t>構造化イベント通知（Rails.event）— 設定と見え方（3/3）</a:t>
+            </a:r>
+            <a:endParaRPr lang="ja-JP" altLang="en-US" sz="2000" dirty="0">
+              <a:latin typeface="メイリオ" pitchFamily="50" charset="-128"/>
+              <a:ea typeface="メイリオ" pitchFamily="50" charset="-128"/>
+              <a:cs typeface="メイリオ" pitchFamily="50" charset="-128"/>
+            </a:endParaRPr>
+          </a:p>
+        </p:txBody>
+      </p:sp>
+      <p:sp>
+        <p:nvSpPr>
+          <p:cNvPr id="3" name="TextBox 2"/>
+          <p:cNvSpPr txBox="1"/>
+          <p:nvPr/>
+        </p:nvSpPr>
+        <p:spPr>
+          <a:xfrm>
+            <a:off x="250000" y="760000"/>
+            <a:ext cx="2950000" cy="300000"/>
+          </a:xfrm>
+          <a:prstGeom prst="rect">
+            <a:avLst/>
+          </a:prstGeom>
+          <a:noFill/>
+        </p:spPr>
+        <p:txBody>
+          <a:bodyPr wrap="square">
+            <a:spAutoFit/>
+          </a:bodyPr>
+          <a:lstStyle/>
+          <a:p>
+            <a:pPr algn="l"/>
+            <a:r>
+              <a:rPr sz="1200" b="1">
+                <a:solidFill>
+                  <a:srgbClr val="1F4E79"/>
+                </a:solidFill>
+                <a:latin typeface="メイリオ"/>
+                <a:ea typeface="メイリオ"/>
+              </a:rPr>
+              <a:t>① こう設定する（コード）</a:t>
+            </a:r>
+          </a:p>
+        </p:txBody>
+      </p:sp>
+      <p:sp>
+        <p:nvSpPr>
+          <p:cNvPr id="4" name="TextBox 3"/>
+          <p:cNvSpPr txBox="1"/>
+          <p:nvPr/>
+        </p:nvSpPr>
+        <p:spPr>
+          <a:xfrm>
+            <a:off x="3380000" y="760000"/>
+            <a:ext cx="2950000" cy="300000"/>
+          </a:xfrm>
+          <a:prstGeom prst="rect">
+            <a:avLst/>
+          </a:prstGeom>
+          <a:noFill/>
+        </p:spPr>
+        <p:txBody>
+          <a:bodyPr wrap="square">
+            <a:spAutoFit/>
+          </a:bodyPr>
+          <a:lstStyle/>
+          <a:p>
+            <a:pPr algn="l"/>
+            <a:r>
+              <a:rPr sz="1200" b="1">
+                <a:solidFill>
+                  <a:srgbClr val="1F4E79"/>
+                </a:solidFill>
+                <a:latin typeface="メイリオ"/>
+                <a:ea typeface="メイリオ"/>
+              </a:rPr>
+              <a:t>② こんなログが出る（JSON）</a:t>
+            </a:r>
+          </a:p>
+        </p:txBody>
+      </p:sp>
+      <p:sp>
+        <p:nvSpPr>
+          <p:cNvPr id="5" name="TextBox 4"/>
+          <p:cNvSpPr txBox="1"/>
+          <p:nvPr/>
+        </p:nvSpPr>
+        <p:spPr>
+          <a:xfrm>
+            <a:off x="6510000" y="760000"/>
+            <a:ext cx="2950000" cy="300000"/>
+          </a:xfrm>
+          <a:prstGeom prst="rect">
+            <a:avLst/>
+          </a:prstGeom>
+          <a:noFill/>
+        </p:spPr>
+        <p:txBody>
+          <a:bodyPr wrap="square">
+            <a:spAutoFit/>
+          </a:bodyPr>
+          <a:lstStyle/>
+          <a:p>
+            <a:pPr algn="l"/>
+            <a:r>
+              <a:rPr sz="1200" b="1">
+                <a:solidFill>
+                  <a:srgbClr val="1F4E79"/>
+                </a:solidFill>
+                <a:latin typeface="メイリオ"/>
+                <a:ea typeface="メイリオ"/>
+              </a:rPr>
+              <a:t>③ こう探せる・使える</a:t>
+            </a:r>
+          </a:p>
+        </p:txBody>
+      </p:sp>
+      <p:sp>
+        <p:nvSpPr>
+          <p:cNvPr id="6" name="Rounded Rectangle 5"/>
+          <p:cNvSpPr/>
+          <p:nvPr/>
+        </p:nvSpPr>
+        <p:spPr>
+          <a:xfrm>
+            <a:off x="250000" y="1090000"/>
+            <a:ext cx="2950000" cy="3550000"/>
+          </a:xfrm>
+          <a:prstGeom prst="roundRect">
+            <a:avLst>
+              <a:gd name="adj" fmla="val 4000"/>
+            </a:avLst>
+          </a:prstGeom>
+          <a:solidFill>
+            <a:srgbClr val="1E1E1E"/>
+          </a:solidFill>
+          <a:ln w="6350">
+            <a:solidFill>
+              <a:srgbClr val="1E1E1E"/>
+            </a:solidFill>
+          </a:ln>
+        </p:spPr>
+        <p:style>
+          <a:lnRef idx="1">
+            <a:schemeClr val="accent1"/>
+          </a:lnRef>
+          <a:fillRef idx="3">
+            <a:schemeClr val="accent1"/>
+          </a:fillRef>
+          <a:effectRef idx="2">
+            <a:schemeClr val="accent1"/>
+          </a:effectRef>
+          <a:fontRef idx="minor">
+            <a:schemeClr val="lt1"/>
+          </a:fontRef>
+        </p:style>
+        <p:txBody>
+          <a:bodyPr rtlCol="0" anchor="ctr" wrap="square" lIns="120000" rIns="80000" tIns="80000" bIns="80000"/>
+          <a:lstStyle/>
+          <a:p>
+            <a:pPr algn="l">
+              <a:spcBef>
+                <a:spcPts val="0"/>
+              </a:spcBef>
+              <a:spcAft>
+                <a:spcPts val="0"/>
+              </a:spcAft>
+            </a:pPr>
+            <a:r>
+              <a:rPr sz="1100" b="0">
+                <a:solidFill>
+                  <a:srgbClr val="EAEAEA"/>
+                </a:solidFill>
+                <a:latin typeface="Consolas"/>
+                <a:ea typeface="Consolas"/>
+              </a:rPr>
+              <a:t>Rails.event.notify(</a:t>
+            </a:r>
+          </a:p>
+          <a:p>
+            <a:pPr algn="l">
+              <a:spcBef>
+                <a:spcPts val="0"/>
+              </a:spcBef>
+              <a:spcAft>
+                <a:spcPts val="0"/>
+              </a:spcAft>
+            </a:pPr>
+            <a:r>
+              <a:rPr sz="1100" b="0">
+                <a:solidFill>
+                  <a:srgbClr val="CE9178"/>
+                </a:solidFill>
+                <a:latin typeface="Consolas"/>
+                <a:ea typeface="Consolas"/>
+              </a:rPr>
+              <a:t>  "order.confirmed",</a:t>
+            </a:r>
+          </a:p>
+          <a:p>
+            <a:pPr algn="l">
+              <a:spcBef>
+                <a:spcPts val="0"/>
+              </a:spcBef>
+              <a:spcAft>
+                <a:spcPts val="0"/>
+              </a:spcAft>
+            </a:pPr>
+            <a:r>
+              <a:rPr sz="1100" b="0">
+                <a:solidFill>
+                  <a:srgbClr val="9CDCFE"/>
+                </a:solidFill>
+                <a:latin typeface="Consolas"/>
+                <a:ea typeface="Consolas"/>
+              </a:rPr>
+              <a:t>  order_id: </a:t>
+            </a:r>
+            <a:r>
+              <a:rPr sz="1100" b="0">
+                <a:solidFill>
+                  <a:srgbClr val="EAEAEA"/>
+                </a:solidFill>
+                <a:latin typeface="Consolas"/>
+                <a:ea typeface="Consolas"/>
+              </a:rPr>
+              <a:t>1234,</a:t>
+            </a:r>
+          </a:p>
+          <a:p>
+            <a:pPr algn="l">
+              <a:spcBef>
+                <a:spcPts val="0"/>
+              </a:spcBef>
+              <a:spcAft>
+                <a:spcPts val="0"/>
+              </a:spcAft>
+            </a:pPr>
+            <a:r>
+              <a:rPr sz="1100" b="0">
+                <a:solidFill>
+                  <a:srgbClr val="9CDCFE"/>
+                </a:solidFill>
+                <a:latin typeface="Consolas"/>
+                <a:ea typeface="Consolas"/>
+              </a:rPr>
+              <a:t>  user_id:  </a:t>
+            </a:r>
+            <a:r>
+              <a:rPr sz="1100" b="0">
+                <a:solidFill>
+                  <a:srgbClr val="EAEAEA"/>
+                </a:solidFill>
+                <a:latin typeface="Consolas"/>
+                <a:ea typeface="Consolas"/>
+              </a:rPr>
+              <a:t>56,</a:t>
+            </a:r>
+          </a:p>
+          <a:p>
+            <a:pPr algn="l">
+              <a:spcBef>
+                <a:spcPts val="0"/>
+              </a:spcBef>
+              <a:spcAft>
+                <a:spcPts val="0"/>
+              </a:spcAft>
+            </a:pPr>
+            <a:r>
+              <a:rPr sz="1100" b="0">
+                <a:solidFill>
+                  <a:srgbClr val="9CDCFE"/>
+                </a:solidFill>
+                <a:latin typeface="Consolas"/>
+                <a:ea typeface="Consolas"/>
+              </a:rPr>
+              <a:t>  amount:   </a:t>
+            </a:r>
+            <a:r>
+              <a:rPr sz="1100" b="0">
+                <a:solidFill>
+                  <a:srgbClr val="EAEAEA"/>
+                </a:solidFill>
+                <a:latin typeface="Consolas"/>
+                <a:ea typeface="Consolas"/>
+              </a:rPr>
+              <a:t>88000</a:t>
+            </a:r>
+          </a:p>
+          <a:p>
+            <a:pPr algn="l">
+              <a:spcBef>
+                <a:spcPts val="0"/>
+              </a:spcBef>
+              <a:spcAft>
+                <a:spcPts val="0"/>
+              </a:spcAft>
+            </a:pPr>
+            <a:r>
+              <a:rPr sz="1100" b="0">
+                <a:solidFill>
+                  <a:srgbClr val="EAEAEA"/>
+                </a:solidFill>
+                <a:latin typeface="Consolas"/>
+                <a:ea typeface="Consolas"/>
+              </a:rPr>
+              <a:t>)</a:t>
+            </a:r>
+          </a:p>
+          <a:p>
+            <a:pPr algn="l">
+              <a:spcBef>
+                <a:spcPts val="0"/>
+              </a:spcBef>
+              <a:spcAft>
+                <a:spcPts val="0"/>
+              </a:spcAft>
+            </a:pPr>
+            <a:r>
+              <a:rPr sz="1100" b="0">
+                <a:solidFill>
+                  <a:srgbClr val="EAEAEA"/>
+                </a:solidFill>
+                <a:latin typeface="Consolas"/>
+                <a:ea typeface="Consolas"/>
+              </a:rPr>
+              <a:t/>
+            </a:r>
+          </a:p>
+          <a:p>
+            <a:pPr algn="l">
+              <a:spcBef>
+                <a:spcPts val="0"/>
+              </a:spcBef>
+              <a:spcAft>
+                <a:spcPts val="0"/>
+              </a:spcAft>
+            </a:pPr>
+            <a:r>
+              <a:rPr sz="1100" b="0">
+                <a:solidFill>
+                  <a:srgbClr val="6A9955"/>
+                </a:solidFill>
+                <a:latin typeface="Consolas"/>
+                <a:ea typeface="Consolas"/>
+              </a:rPr>
+              <a:t># 出したい項目を</a:t>
+            </a:r>
+          </a:p>
+          <a:p>
+            <a:pPr algn="l">
+              <a:spcBef>
+                <a:spcPts val="0"/>
+              </a:spcBef>
+              <a:spcAft>
+                <a:spcPts val="0"/>
+              </a:spcAft>
+            </a:pPr>
+            <a:r>
+              <a:rPr sz="1100" b="0">
+                <a:solidFill>
+                  <a:srgbClr val="6A9955"/>
+                </a:solidFill>
+                <a:latin typeface="Consolas"/>
+                <a:ea typeface="Consolas"/>
+              </a:rPr>
+              <a:t># 決めて渡すだけ</a:t>
+            </a:r>
+          </a:p>
+        </p:txBody>
+      </p:sp>
+      <p:sp>
+        <p:nvSpPr>
+          <p:cNvPr id="7" name="Rounded Rectangle 6"/>
+          <p:cNvSpPr/>
+          <p:nvPr/>
+        </p:nvSpPr>
+        <p:spPr>
+          <a:xfrm>
+            <a:off x="3380000" y="1090000"/>
+            <a:ext cx="2950000" cy="3550000"/>
+          </a:xfrm>
+          <a:prstGeom prst="roundRect">
+            <a:avLst>
+              <a:gd name="adj" fmla="val 4000"/>
+            </a:avLst>
+          </a:prstGeom>
+          <a:solidFill>
+            <a:srgbClr val="1E1E1E"/>
+          </a:solidFill>
+          <a:ln w="6350">
+            <a:solidFill>
+              <a:srgbClr val="1E1E1E"/>
+            </a:solidFill>
+          </a:ln>
+        </p:spPr>
+        <p:style>
+          <a:lnRef idx="1">
+            <a:schemeClr val="accent1"/>
+          </a:lnRef>
+          <a:fillRef idx="3">
+            <a:schemeClr val="accent1"/>
+          </a:fillRef>
+          <a:effectRef idx="2">
+            <a:schemeClr val="accent1"/>
+          </a:effectRef>
+          <a:fontRef idx="minor">
+            <a:schemeClr val="lt1"/>
+          </a:fontRef>
+        </p:style>
+        <p:txBody>
+          <a:bodyPr rtlCol="0" anchor="ctr" wrap="square" lIns="120000" rIns="80000" tIns="80000" bIns="80000"/>
+          <a:lstStyle/>
+          <a:p>
+            <a:pPr algn="l">
+              <a:spcBef>
+                <a:spcPts val="0"/>
+              </a:spcBef>
+              <a:spcAft>
+                <a:spcPts val="0"/>
+              </a:spcAft>
+            </a:pPr>
+            <a:r>
+              <a:rPr sz="950" b="0">
+                <a:solidFill>
+                  <a:srgbClr val="EAEAEA"/>
+                </a:solidFill>
+                <a:latin typeface="Consolas"/>
+                <a:ea typeface="Consolas"/>
+              </a:rPr>
+              <a:t>{</a:t>
+            </a:r>
+          </a:p>
+          <a:p>
+            <a:pPr algn="l">
+              <a:spcBef>
+                <a:spcPts val="0"/>
+              </a:spcBef>
+              <a:spcAft>
+                <a:spcPts val="0"/>
+              </a:spcAft>
+            </a:pPr>
+            <a:r>
+              <a:rPr sz="950" b="0">
+                <a:solidFill>
+                  <a:srgbClr val="9CDCFE"/>
+                </a:solidFill>
+                <a:latin typeface="Consolas"/>
+                <a:ea typeface="Consolas"/>
+              </a:rPr>
+              <a:t>  "name":</a:t>
+            </a:r>
+            <a:r>
+              <a:rPr sz="950" b="0">
+                <a:solidFill>
+                  <a:srgbClr val="CE9178"/>
+                </a:solidFill>
+                <a:latin typeface="Consolas"/>
+                <a:ea typeface="Consolas"/>
+              </a:rPr>
+              <a:t> "order.confirmed",</a:t>
+            </a:r>
+          </a:p>
+          <a:p>
+            <a:pPr algn="l">
+              <a:spcBef>
+                <a:spcPts val="0"/>
+              </a:spcBef>
+              <a:spcAft>
+                <a:spcPts val="0"/>
+              </a:spcAft>
+            </a:pPr>
+            <a:r>
+              <a:rPr sz="950" b="0">
+                <a:solidFill>
+                  <a:srgbClr val="9CDCFE"/>
+                </a:solidFill>
+                <a:latin typeface="Consolas"/>
+                <a:ea typeface="Consolas"/>
+              </a:rPr>
+              <a:t>  "payload": {</a:t>
+            </a:r>
+          </a:p>
+          <a:p>
+            <a:pPr algn="l">
+              <a:spcBef>
+                <a:spcPts val="0"/>
+              </a:spcBef>
+              <a:spcAft>
+                <a:spcPts val="0"/>
+              </a:spcAft>
+            </a:pPr>
+            <a:r>
+              <a:rPr sz="950" b="0">
+                <a:solidFill>
+                  <a:srgbClr val="9CDCFE"/>
+                </a:solidFill>
+                <a:latin typeface="Consolas"/>
+                <a:ea typeface="Consolas"/>
+              </a:rPr>
+              <a:t>    "order_id": </a:t>
+            </a:r>
+            <a:r>
+              <a:rPr sz="950" b="0">
+                <a:solidFill>
+                  <a:srgbClr val="EAEAEA"/>
+                </a:solidFill>
+                <a:latin typeface="Consolas"/>
+                <a:ea typeface="Consolas"/>
+              </a:rPr>
+              <a:t>1234,</a:t>
+            </a:r>
+          </a:p>
+          <a:p>
+            <a:pPr algn="l">
+              <a:spcBef>
+                <a:spcPts val="0"/>
+              </a:spcBef>
+              <a:spcAft>
+                <a:spcPts val="0"/>
+              </a:spcAft>
+            </a:pPr>
+            <a:r>
+              <a:rPr sz="950" b="0">
+                <a:solidFill>
+                  <a:srgbClr val="9CDCFE"/>
+                </a:solidFill>
+                <a:latin typeface="Consolas"/>
+                <a:ea typeface="Consolas"/>
+              </a:rPr>
+              <a:t>    "user_id": </a:t>
+            </a:r>
+            <a:r>
+              <a:rPr sz="950" b="0">
+                <a:solidFill>
+                  <a:srgbClr val="EAEAEA"/>
+                </a:solidFill>
+                <a:latin typeface="Consolas"/>
+                <a:ea typeface="Consolas"/>
+              </a:rPr>
+              <a:t>56,</a:t>
+            </a:r>
+          </a:p>
+          <a:p>
+            <a:pPr algn="l">
+              <a:spcBef>
+                <a:spcPts val="0"/>
+              </a:spcBef>
+              <a:spcAft>
+                <a:spcPts val="0"/>
+              </a:spcAft>
+            </a:pPr>
+            <a:r>
+              <a:rPr sz="950" b="0">
+                <a:solidFill>
+                  <a:srgbClr val="9CDCFE"/>
+                </a:solidFill>
+                <a:latin typeface="Consolas"/>
+                <a:ea typeface="Consolas"/>
+              </a:rPr>
+              <a:t>    "amount": </a:t>
+            </a:r>
+            <a:r>
+              <a:rPr sz="950" b="0">
+                <a:solidFill>
+                  <a:srgbClr val="EAEAEA"/>
+                </a:solidFill>
+                <a:latin typeface="Consolas"/>
+                <a:ea typeface="Consolas"/>
+              </a:rPr>
+              <a:t>88000 },</a:t>
+            </a:r>
+          </a:p>
+          <a:p>
+            <a:pPr algn="l">
+              <a:spcBef>
+                <a:spcPts val="0"/>
+              </a:spcBef>
+              <a:spcAft>
+                <a:spcPts val="0"/>
+              </a:spcAft>
+            </a:pPr>
+            <a:r>
+              <a:rPr sz="950" b="0">
+                <a:solidFill>
+                  <a:srgbClr val="9CDCFE"/>
+                </a:solidFill>
+                <a:latin typeface="Consolas"/>
+                <a:ea typeface="Consolas"/>
+              </a:rPr>
+              <a:t>  "context": {</a:t>
+            </a:r>
+          </a:p>
+          <a:p>
+            <a:pPr algn="l">
+              <a:spcBef>
+                <a:spcPts val="0"/>
+              </a:spcBef>
+              <a:spcAft>
+                <a:spcPts val="0"/>
+              </a:spcAft>
+            </a:pPr>
+            <a:r>
+              <a:rPr sz="950" b="0">
+                <a:solidFill>
+                  <a:srgbClr val="9CDCFE"/>
+                </a:solidFill>
+                <a:latin typeface="Consolas"/>
+                <a:ea typeface="Consolas"/>
+              </a:rPr>
+              <a:t>    "request_id":</a:t>
+            </a:r>
+            <a:r>
+              <a:rPr sz="950" b="0">
+                <a:solidFill>
+                  <a:srgbClr val="CE9178"/>
+                </a:solidFill>
+                <a:latin typeface="Consolas"/>
+                <a:ea typeface="Consolas"/>
+              </a:rPr>
+              <a:t> "ab12"},</a:t>
+            </a:r>
+          </a:p>
+          <a:p>
+            <a:pPr algn="l">
+              <a:spcBef>
+                <a:spcPts val="0"/>
+              </a:spcBef>
+              <a:spcAft>
+                <a:spcPts val="0"/>
+              </a:spcAft>
+            </a:pPr>
+            <a:r>
+              <a:rPr sz="950" b="0">
+                <a:solidFill>
+                  <a:srgbClr val="9CDCFE"/>
+                </a:solidFill>
+                <a:latin typeface="Consolas"/>
+                <a:ea typeface="Consolas"/>
+              </a:rPr>
+              <a:t>  "timestamp":</a:t>
+            </a:r>
+            <a:r>
+              <a:rPr sz="950" b="0">
+                <a:solidFill>
+                  <a:srgbClr val="CE9178"/>
+                </a:solidFill>
+                <a:latin typeface="Consolas"/>
+                <a:ea typeface="Consolas"/>
+              </a:rPr>
+              <a:t> "..."</a:t>
+            </a:r>
+          </a:p>
+          <a:p>
+            <a:pPr algn="l">
+              <a:spcBef>
+                <a:spcPts val="0"/>
+              </a:spcBef>
+              <a:spcAft>
+                <a:spcPts val="0"/>
+              </a:spcAft>
+            </a:pPr>
+            <a:r>
+              <a:rPr sz="950" b="0">
+                <a:solidFill>
+                  <a:srgbClr val="EAEAEA"/>
+                </a:solidFill>
+                <a:latin typeface="Consolas"/>
+                <a:ea typeface="Consolas"/>
+              </a:rPr>
+              <a:t>}</a:t>
+            </a:r>
+          </a:p>
+          <a:p>
+            <a:pPr algn="l">
+              <a:spcBef>
+                <a:spcPts val="0"/>
+              </a:spcBef>
+              <a:spcAft>
+                <a:spcPts val="0"/>
+              </a:spcAft>
+            </a:pPr>
+            <a:r>
+              <a:rPr sz="950" b="0">
+                <a:solidFill>
+                  <a:srgbClr val="EAEAEA"/>
+                </a:solidFill>
+                <a:latin typeface="Consolas"/>
+                <a:ea typeface="Consolas"/>
+              </a:rPr>
+              <a:t/>
+            </a:r>
+          </a:p>
+          <a:p>
+            <a:pPr algn="l">
+              <a:spcBef>
+                <a:spcPts val="0"/>
+              </a:spcBef>
+              <a:spcAft>
+                <a:spcPts val="0"/>
+              </a:spcAft>
+            </a:pPr>
+            <a:r>
+              <a:rPr sz="950" b="0">
+                <a:solidFill>
+                  <a:srgbClr val="6A9955"/>
+                </a:solidFill>
+                <a:latin typeface="Consolas"/>
+                <a:ea typeface="Consolas"/>
+              </a:rPr>
+              <a:t># context / timestamp は</a:t>
+            </a:r>
+          </a:p>
+          <a:p>
+            <a:pPr algn="l">
+              <a:spcBef>
+                <a:spcPts val="0"/>
+              </a:spcBef>
+              <a:spcAft>
+                <a:spcPts val="0"/>
+              </a:spcAft>
+            </a:pPr>
+            <a:r>
+              <a:rPr sz="950" b="0">
+                <a:solidFill>
+                  <a:srgbClr val="6A9955"/>
+                </a:solidFill>
+                <a:latin typeface="Consolas"/>
+                <a:ea typeface="Consolas"/>
+              </a:rPr>
+              <a:t># 自動で付与される</a:t>
+            </a:r>
+          </a:p>
+        </p:txBody>
+      </p:sp>
+      <p:sp>
+        <p:nvSpPr>
+          <p:cNvPr id="8" name="Rounded Rectangle 7"/>
+          <p:cNvSpPr/>
+          <p:nvPr/>
+        </p:nvSpPr>
+        <p:spPr>
+          <a:xfrm>
+            <a:off x="6510000" y="1090000"/>
+            <a:ext cx="2950000" cy="3550000"/>
+          </a:xfrm>
+          <a:prstGeom prst="roundRect">
+            <a:avLst>
+              <a:gd name="adj" fmla="val 4000"/>
+            </a:avLst>
+          </a:prstGeom>
+          <a:solidFill>
+            <a:srgbClr val="EEF3FA"/>
+          </a:solidFill>
+          <a:ln w="12700">
+            <a:solidFill>
+              <a:srgbClr val="1F4E79"/>
+            </a:solidFill>
+          </a:ln>
+        </p:spPr>
+        <p:style>
+          <a:lnRef idx="1">
+            <a:schemeClr val="accent1"/>
+          </a:lnRef>
+          <a:fillRef idx="3">
+            <a:schemeClr val="accent1"/>
+          </a:fillRef>
+          <a:effectRef idx="2">
+            <a:schemeClr val="accent1"/>
+          </a:effectRef>
+          <a:fontRef idx="minor">
+            <a:schemeClr val="lt1"/>
+          </a:fontRef>
+        </p:style>
+        <p:txBody>
+          <a:bodyPr rtlCol="0" anchor="ctr" wrap="square" lIns="120000" rIns="100000" tIns="90000"/>
+          <a:lstStyle/>
+          <a:p>
+            <a:pPr algn="ctr">
+              <a:spcAft>
+                <a:spcPts val="200"/>
+              </a:spcAft>
+            </a:pPr>
+            <a:r>
+              <a:rPr sz="1100" b="1">
+                <a:solidFill>
+                  <a:srgbClr val="1F4E79"/>
+                </a:solidFill>
+                <a:latin typeface="メイリオ"/>
+                <a:ea typeface="メイリオ"/>
+              </a:rPr>
+              <a:t>検索・集計の例</a:t>
+            </a:r>
+          </a:p>
+          <a:p>
+            <a:pPr>
+              <a:spcAft>
+                <a:spcPts val="200"/>
+              </a:spcAft>
+            </a:pPr>
+            <a:r>
+              <a:rPr sz="300" b="0">
+                <a:solidFill>
+                  <a:srgbClr val="333333"/>
+                </a:solidFill>
+                <a:latin typeface="メイリオ"/>
+                <a:ea typeface="メイリオ"/>
+              </a:rPr>
+              <a:t/>
+            </a:r>
+          </a:p>
+          <a:p>
+            <a:pPr>
+              <a:spcAft>
+                <a:spcPts val="200"/>
+              </a:spcAft>
+            </a:pPr>
+            <a:r>
+              <a:rPr sz="1000" b="0">
+                <a:solidFill>
+                  <a:srgbClr val="333333"/>
+                </a:solidFill>
+                <a:latin typeface="メイリオ"/>
+                <a:ea typeface="メイリオ"/>
+              </a:rPr>
+              <a:t>・name = "order.confirmed"</a:t>
+            </a:r>
+          </a:p>
+          <a:p>
+            <a:pPr>
+              <a:spcAft>
+                <a:spcPts val="200"/>
+              </a:spcAft>
+            </a:pPr>
+            <a:r>
+              <a:rPr sz="1000" b="0">
+                <a:solidFill>
+                  <a:srgbClr val="2E7D32"/>
+                </a:solidFill>
+                <a:latin typeface="メイリオ"/>
+                <a:ea typeface="メイリオ"/>
+              </a:rPr>
+              <a:t>　→ 受注確定だけを一覧</a:t>
+            </a:r>
+          </a:p>
+          <a:p>
+            <a:pPr>
+              <a:spcAft>
+                <a:spcPts val="200"/>
+              </a:spcAft>
+            </a:pPr>
+            <a:r>
+              <a:rPr sz="1000" b="0">
+                <a:solidFill>
+                  <a:srgbClr val="333333"/>
+                </a:solidFill>
+                <a:latin typeface="メイリオ"/>
+                <a:ea typeface="メイリオ"/>
+              </a:rPr>
+              <a:t>・user_id = 56 で追う</a:t>
+            </a:r>
+          </a:p>
+          <a:p>
+            <a:pPr>
+              <a:spcAft>
+                <a:spcPts val="200"/>
+              </a:spcAft>
+            </a:pPr>
+            <a:r>
+              <a:rPr sz="1000" b="0">
+                <a:solidFill>
+                  <a:srgbClr val="2E7D32"/>
+                </a:solidFill>
+                <a:latin typeface="メイリオ"/>
+                <a:ea typeface="メイリオ"/>
+              </a:rPr>
+              <a:t>　→ その顧客の動きを時系列で</a:t>
+            </a:r>
+          </a:p>
+          <a:p>
+            <a:pPr>
+              <a:spcAft>
+                <a:spcPts val="200"/>
+              </a:spcAft>
+            </a:pPr>
+            <a:r>
+              <a:rPr sz="1000" b="0">
+                <a:solidFill>
+                  <a:srgbClr val="333333"/>
+                </a:solidFill>
+                <a:latin typeface="メイリオ"/>
+                <a:ea typeface="メイリオ"/>
+              </a:rPr>
+              <a:t>・amount を合計</a:t>
+            </a:r>
+          </a:p>
+          <a:p>
+            <a:pPr>
+              <a:spcAft>
+                <a:spcPts val="200"/>
+              </a:spcAft>
+            </a:pPr>
+            <a:r>
+              <a:rPr sz="1000" b="0">
+                <a:solidFill>
+                  <a:srgbClr val="2E7D32"/>
+                </a:solidFill>
+                <a:latin typeface="メイリオ"/>
+                <a:ea typeface="メイリオ"/>
+              </a:rPr>
+              <a:t>　→ 期間の受注金額を集計</a:t>
+            </a:r>
+          </a:p>
+          <a:p>
+            <a:pPr>
+              <a:spcAft>
+                <a:spcPts val="200"/>
+              </a:spcAft>
+            </a:pPr>
+            <a:r>
+              <a:rPr sz="400" b="0">
+                <a:solidFill>
+                  <a:srgbClr val="333333"/>
+                </a:solidFill>
+                <a:latin typeface="メイリオ"/>
+                <a:ea typeface="メイリオ"/>
+              </a:rPr>
+              <a:t/>
+            </a:r>
+          </a:p>
+          <a:p>
+            <a:pPr>
+              <a:spcAft>
+                <a:spcPts val="200"/>
+              </a:spcAft>
+            </a:pPr>
+            <a:r>
+              <a:rPr sz="1000" b="0">
+                <a:solidFill>
+                  <a:srgbClr val="333333"/>
+                </a:solidFill>
+                <a:latin typeface="メイリオ"/>
+                <a:ea typeface="メイリオ"/>
+              </a:rPr>
+              <a:t>同じ形式なので、ログ基盤や</a:t>
+            </a:r>
+          </a:p>
+          <a:p>
+            <a:pPr>
+              <a:spcAft>
+                <a:spcPts val="200"/>
+              </a:spcAft>
+            </a:pPr>
+            <a:r>
+              <a:rPr sz="1000" b="0">
+                <a:solidFill>
+                  <a:srgbClr val="333333"/>
+                </a:solidFill>
+                <a:latin typeface="メイリオ"/>
+                <a:ea typeface="メイリオ"/>
+              </a:rPr>
+              <a:t>BI（CloudWatch 等）で</a:t>
+            </a:r>
+          </a:p>
+          <a:p>
+            <a:pPr>
+              <a:spcAft>
+                <a:spcPts val="200"/>
+              </a:spcAft>
+            </a:pPr>
+            <a:r>
+              <a:rPr sz="1000" b="0">
+                <a:solidFill>
+                  <a:srgbClr val="333333"/>
+                </a:solidFill>
+                <a:latin typeface="メイリオ"/>
+                <a:ea typeface="メイリオ"/>
+              </a:rPr>
+              <a:t>横断検索・監視・監査に使える</a:t>
+            </a:r>
+          </a:p>
+        </p:txBody>
+      </p:sp>
+      <p:sp>
+        <p:nvSpPr>
+          <p:cNvPr id="9" name="Right Arrow 8"/>
+          <p:cNvSpPr/>
+          <p:nvPr/>
+        </p:nvSpPr>
+        <p:spPr>
+          <a:xfrm>
+            <a:off x="3180000" y="2500000"/>
+            <a:ext cx="180000" cy="360000"/>
+          </a:xfrm>
+          <a:prstGeom prst="rightArrow">
+            <a:avLst/>
+          </a:prstGeom>
+          <a:solidFill>
+            <a:srgbClr val="1F4E79"/>
+          </a:solidFill>
+          <a:ln>
+            <a:noFill/>
+          </a:ln>
+        </p:spPr>
+        <p:style>
+          <a:lnRef idx="1">
+            <a:schemeClr val="accent1"/>
+          </a:lnRef>
+          <a:fillRef idx="3">
+            <a:schemeClr val="accent1"/>
+          </a:fillRef>
+          <a:effectRef idx="2">
+            <a:schemeClr val="accent1"/>
+          </a:effectRef>
+          <a:fontRef idx="minor">
+            <a:schemeClr val="lt1"/>
+          </a:fontRef>
+        </p:style>
+        <p:txBody>
+          <a:bodyPr rtlCol="0" anchor="ctr"/>
+          <a:lstStyle/>
+          <a:p>
+            <a:pPr algn="ctr"/>
+          </a:p>
+        </p:txBody>
+      </p:sp>
+      <p:sp>
+        <p:nvSpPr>
+          <p:cNvPr id="10" name="Right Arrow 9"/>
+          <p:cNvSpPr/>
+          <p:nvPr/>
+        </p:nvSpPr>
+        <p:spPr>
+          <a:xfrm>
+            <a:off x="6310000" y="2500000"/>
+            <a:ext cx="180000" cy="360000"/>
+          </a:xfrm>
+          <a:prstGeom prst="rightArrow">
+            <a:avLst/>
+          </a:prstGeom>
+          <a:solidFill>
+            <a:srgbClr val="1F4E79"/>
+          </a:solidFill>
+          <a:ln>
+            <a:noFill/>
+          </a:ln>
+        </p:spPr>
+        <p:style>
+          <a:lnRef idx="1">
+            <a:schemeClr val="accent1"/>
+          </a:lnRef>
+          <a:fillRef idx="3">
+            <a:schemeClr val="accent1"/>
+          </a:fillRef>
+          <a:effectRef idx="2">
+            <a:schemeClr val="accent1"/>
+          </a:effectRef>
+          <a:fontRef idx="minor">
+            <a:schemeClr val="lt1"/>
+          </a:fontRef>
+        </p:style>
+        <p:txBody>
+          <a:bodyPr rtlCol="0" anchor="ctr"/>
+          <a:lstStyle/>
+          <a:p>
+            <a:pPr algn="ctr"/>
+          </a:p>
+        </p:txBody>
+      </p:sp>
+      <p:sp>
+        <p:nvSpPr>
+          <p:cNvPr id="11" name="TextBox 10"/>
+          <p:cNvSpPr txBox="1"/>
+          <p:nvPr/>
+        </p:nvSpPr>
+        <p:spPr>
+          <a:xfrm>
+            <a:off x="250000" y="4780000"/>
+            <a:ext cx="9300000" cy="700000"/>
+          </a:xfrm>
+          <a:prstGeom prst="rect">
+            <a:avLst/>
+          </a:prstGeom>
+          <a:noFill/>
+        </p:spPr>
+        <p:txBody>
+          <a:bodyPr wrap="square">
+            <a:spAutoFit/>
+          </a:bodyPr>
+          <a:lstStyle/>
+          <a:p>
+            <a:r>
+              <a:rPr sz="1100" b="0">
+                <a:solidFill>
+                  <a:srgbClr val="333333"/>
+                </a:solidFill>
+                <a:latin typeface="メイリオ"/>
+                <a:ea typeface="メイリオ"/>
+              </a:rPr>
+              <a:t>ポイント：自由文ログ（例："受注確定 id=1234"）だと後で探しにくい。</a:t>
+            </a:r>
+          </a:p>
+          <a:p>
+            <a:r>
+              <a:rPr sz="1100" b="1">
+                <a:solidFill>
+                  <a:srgbClr val="C00000"/>
+                </a:solidFill>
+                <a:latin typeface="メイリオ"/>
+                <a:ea typeface="メイリオ"/>
+              </a:rPr>
+              <a:t>解析に使う項目を型として決めて出すと、あとから確実に検索・集計できるのが今回の進化。</a:t>
+            </a:r>
+          </a:p>
+        </p:txBody>
+      </p:sp>
+    </p:spTree>
+  </p:cSld>
+  <p:clrMapOvr>
+    <a:masterClrMapping/>
+  </p:clrMapOvr>
+</p:sld>
+</file>
+
+<file path=ppt/slides/slide16.xml><?xml version="1.0" encoding="utf-8"?>
 <p:sld xmlns:a="http://schemas.openxmlformats.org/drawingml/2006/main" xmlns:r="http://schemas.openxmlformats.org/officeDocument/2006/relationships" xmlns:p="http://schemas.openxmlformats.org/presentationml/2006/main">
   <p:cSld>
     <p:spTree>
@@ -14397,7 +15651,7 @@
 </p:sld>
 </file>
 
-<file path=ppt/slides/slide16.xml><?xml version="1.0" encoding="utf-8"?>
+<file path=ppt/slides/slide17.xml><?xml version="1.0" encoding="utf-8"?>
 <p:sld xmlns:a="http://schemas.openxmlformats.org/drawingml/2006/main" xmlns:r="http://schemas.openxmlformats.org/officeDocument/2006/relationships" xmlns:p="http://schemas.openxmlformats.org/presentationml/2006/main">
   <p:cSld>
     <p:spTree>
@@ -14977,7 +16231,7 @@
 </p:sld>
 </file>
 
-<file path=ppt/slides/slide17.xml><?xml version="1.0" encoding="utf-8"?>
+<file path=ppt/slides/slide18.xml><?xml version="1.0" encoding="utf-8"?>
 <p:sld xmlns:a="http://schemas.openxmlformats.org/drawingml/2006/main" xmlns:r="http://schemas.openxmlformats.org/officeDocument/2006/relationships" xmlns:p="http://schemas.openxmlformats.org/presentationml/2006/main">
   <p:cSld>
     <p:spTree>
@@ -15188,7 +16442,7 @@
 </p:sld>
 </file>
 
-<file path=ppt/slides/slide18.xml><?xml version="1.0" encoding="utf-8"?>
+<file path=ppt/slides/slide19.xml><?xml version="1.0" encoding="utf-8"?>
 <p:sld xmlns:a="http://schemas.openxmlformats.org/drawingml/2006/main" xmlns:r="http://schemas.openxmlformats.org/officeDocument/2006/relationships" xmlns:p="http://schemas.openxmlformats.org/presentationml/2006/main">
   <p:cSld>
     <p:spTree>
@@ -15639,7 +16893,598 @@
 </p:sld>
 </file>
 
-<file path=ppt/slides/slide19.xml><?xml version="1.0" encoding="utf-8"?>
+<file path=ppt/slides/slide2.xml><?xml version="1.0" encoding="utf-8"?>
+<p:sld xmlns:a="http://schemas.openxmlformats.org/drawingml/2006/main" xmlns:r="http://schemas.openxmlformats.org/officeDocument/2006/relationships" xmlns:p="http://schemas.openxmlformats.org/presentationml/2006/main">
+  <p:cSld>
+    <p:spTree>
+      <p:nvGrpSpPr>
+        <p:cNvPr id="1" name=""/>
+        <p:cNvGrpSpPr/>
+        <p:nvPr/>
+      </p:nvGrpSpPr>
+      <p:grpSpPr>
+        <a:xfrm>
+          <a:off x="0" y="0"/>
+          <a:ext cx="0" cy="0"/>
+          <a:chOff x="0" y="0"/>
+          <a:chExt cx="0" cy="0"/>
+        </a:xfrm>
+      </p:grpSpPr>
+      <p:sp>
+        <p:nvSpPr>
+          <p:cNvPr id="6" name="テキスト ボックス 5"/>
+          <p:cNvSpPr txBox="1">
+            <a:spLocks/>
+          </p:cNvSpPr>
+          <p:nvPr/>
+        </p:nvSpPr>
+        <p:spPr>
+          <a:xfrm>
+            <a:off x="1136576" y="188641"/>
+            <a:ext cx="6408712" cy="469359"/>
+          </a:xfrm>
+          <a:prstGeom prst="rect">
+            <a:avLst/>
+          </a:prstGeom>
+          <a:noFill/>
+        </p:spPr>
+        <p:txBody>
+          <a:bodyPr wrap="square" rtlCol="0">
+            <a:spAutoFit/>
+          </a:bodyPr>
+          <a:lstStyle/>
+          <a:p>
+            <a:pPr algn="l">
+              <a:lnSpc>
+                <a:spcPct val="130000"/>
+              </a:lnSpc>
+            </a:pPr>
+            <a:r>
+              <a:rPr lang="en-US" altLang="ja-JP" sz="2000" dirty="0">
+                <a:latin typeface="メイリオ" pitchFamily="50" charset="-128"/>
+                <a:ea typeface="メイリオ" pitchFamily="50" charset="-128"/>
+                <a:cs typeface="メイリオ" pitchFamily="50" charset="-128"/>
+              </a:rPr>
+              <a:t>2026/7/30</a:t>
+            </a:r>
+            <a:r>
+              <a:rPr lang="ja-JP" altLang="en-US" sz="2000" dirty="0">
+                <a:latin typeface="メイリオ" pitchFamily="50" charset="-128"/>
+                <a:ea typeface="メイリオ" pitchFamily="50" charset="-128"/>
+                <a:cs typeface="メイリオ" pitchFamily="50" charset="-128"/>
+              </a:rPr>
+              <a:t>　</a:t>
+            </a:r>
+            <a:r>
+              <a:rPr lang="en-US" altLang="ja-JP" sz="2000" dirty="0">
+                <a:latin typeface="メイリオ" pitchFamily="50" charset="-128"/>
+                <a:ea typeface="メイリオ" pitchFamily="50" charset="-128"/>
+                <a:cs typeface="メイリオ" pitchFamily="50" charset="-128"/>
+              </a:rPr>
+              <a:t>EC</a:t>
+            </a:r>
+            <a:r>
+              <a:rPr lang="ja-JP" altLang="en-US" sz="2000" dirty="0">
+                <a:latin typeface="メイリオ" pitchFamily="50" charset="-128"/>
+                <a:ea typeface="メイリオ" pitchFamily="50" charset="-128"/>
+                <a:cs typeface="メイリオ" pitchFamily="50" charset="-128"/>
+              </a:rPr>
+              <a:t>サービス部部会　アジェンダ</a:t>
+            </a:r>
+          </a:p>
+        </p:txBody>
+      </p:sp>
+      <p:sp>
+        <p:nvSpPr>
+          <p:cNvPr id="38" name="テキスト ボックス 37"/>
+          <p:cNvSpPr txBox="1">
+            <a:spLocks/>
+          </p:cNvSpPr>
+          <p:nvPr/>
+        </p:nvSpPr>
+        <p:spPr>
+          <a:xfrm>
+            <a:off x="1064569" y="856357"/>
+            <a:ext cx="8064895" cy="5109091"/>
+          </a:xfrm>
+          <a:prstGeom prst="rect">
+            <a:avLst/>
+          </a:prstGeom>
+          <a:noFill/>
+        </p:spPr>
+        <p:txBody>
+          <a:bodyPr wrap="square" rtlCol="0">
+            <a:spAutoFit/>
+          </a:bodyPr>
+          <a:lstStyle/>
+          <a:p>
+            <a:r>
+              <a:rPr lang="en-US" altLang="ja-JP" sz="1600" dirty="0">
+                <a:latin typeface="メイリオ"/>
+                <a:ea typeface="メイリオ"/>
+                <a:cs typeface="メイリオ"/>
+              </a:rPr>
+              <a:t>2026</a:t>
+            </a:r>
+            <a:r>
+              <a:rPr lang="ja-JP" altLang="en-US" sz="1600" dirty="0">
+                <a:latin typeface="メイリオ"/>
+                <a:ea typeface="メイリオ"/>
+                <a:cs typeface="メイリオ"/>
+              </a:rPr>
+              <a:t>年</a:t>
+            </a:r>
+            <a:r>
+              <a:rPr lang="en-US" altLang="ja-JP" sz="1600" dirty="0">
+                <a:latin typeface="メイリオ"/>
+                <a:ea typeface="メイリオ"/>
+                <a:cs typeface="メイリオ"/>
+              </a:rPr>
+              <a:t>7</a:t>
+            </a:r>
+            <a:r>
+              <a:rPr lang="ja-JP" altLang="en-US" sz="1600" dirty="0">
+                <a:latin typeface="メイリオ"/>
+                <a:ea typeface="メイリオ"/>
+                <a:cs typeface="メイリオ"/>
+              </a:rPr>
+              <a:t>月</a:t>
+            </a:r>
+            <a:r>
+              <a:rPr lang="en-US" altLang="ja-JP" sz="1600" dirty="0">
+                <a:latin typeface="メイリオ"/>
+                <a:ea typeface="メイリオ"/>
+                <a:cs typeface="メイリオ"/>
+              </a:rPr>
+              <a:t>30</a:t>
+            </a:r>
+            <a:r>
+              <a:rPr lang="ja-JP" altLang="en-US" sz="1600" dirty="0">
+                <a:latin typeface="メイリオ"/>
+                <a:ea typeface="メイリオ"/>
+                <a:cs typeface="メイリオ"/>
+              </a:rPr>
+              <a:t>日 </a:t>
+            </a:r>
+            <a:r>
+              <a:rPr lang="en-US" altLang="ja-JP" sz="1600" dirty="0">
+                <a:latin typeface="メイリオ"/>
+                <a:ea typeface="メイリオ"/>
+                <a:cs typeface="メイリオ"/>
+              </a:rPr>
+              <a:t>17</a:t>
+            </a:r>
+            <a:r>
+              <a:rPr lang="ja-JP" altLang="en-US" sz="1600" dirty="0">
+                <a:latin typeface="メイリオ"/>
+                <a:ea typeface="メイリオ"/>
+                <a:cs typeface="メイリオ"/>
+              </a:rPr>
+              <a:t>：</a:t>
+            </a:r>
+            <a:r>
+              <a:rPr lang="en-US" altLang="ja-JP" sz="1600" dirty="0">
+                <a:latin typeface="メイリオ"/>
+                <a:ea typeface="メイリオ"/>
+                <a:cs typeface="メイリオ"/>
+              </a:rPr>
+              <a:t>00</a:t>
+            </a:r>
+            <a:r>
+              <a:rPr lang="ja-JP" altLang="en-US" sz="1600" dirty="0">
+                <a:latin typeface="メイリオ"/>
+                <a:ea typeface="メイリオ"/>
+                <a:cs typeface="メイリオ"/>
+              </a:rPr>
+              <a:t>～</a:t>
+            </a:r>
+            <a:r>
+              <a:rPr lang="en-US" altLang="ja-JP" sz="1600" dirty="0">
+                <a:latin typeface="メイリオ"/>
+                <a:ea typeface="メイリオ"/>
+                <a:cs typeface="メイリオ"/>
+              </a:rPr>
+              <a:t>18</a:t>
+            </a:r>
+            <a:r>
+              <a:rPr lang="ja-JP" altLang="en-US" sz="1600" dirty="0">
+                <a:latin typeface="メイリオ"/>
+                <a:ea typeface="メイリオ"/>
+                <a:cs typeface="メイリオ"/>
+              </a:rPr>
+              <a:t>：</a:t>
+            </a:r>
+            <a:r>
+              <a:rPr lang="en-US" altLang="ja-JP" sz="1600" dirty="0">
+                <a:latin typeface="メイリオ"/>
+                <a:ea typeface="メイリオ"/>
+                <a:cs typeface="メイリオ"/>
+              </a:rPr>
+              <a:t>00 </a:t>
+            </a:r>
+            <a:r>
+              <a:rPr lang="ja-JP" altLang="en-US" sz="1600" dirty="0">
+                <a:latin typeface="メイリオ"/>
+                <a:ea typeface="メイリオ"/>
+                <a:cs typeface="メイリオ"/>
+              </a:rPr>
+              <a:t>　</a:t>
+            </a:r>
+            <a:r>
+              <a:rPr lang="en-US" altLang="ja-JP" sz="1600" dirty="0">
+                <a:latin typeface="メイリオ" pitchFamily="50" charset="-128"/>
+                <a:ea typeface="メイリオ" pitchFamily="50" charset="-128"/>
+                <a:cs typeface="メイリオ" pitchFamily="50" charset="-128"/>
+              </a:rPr>
+              <a:t> EC</a:t>
+            </a:r>
+            <a:r>
+              <a:rPr lang="ja-JP" altLang="en-US" sz="1600" dirty="0">
+                <a:latin typeface="メイリオ" pitchFamily="50" charset="-128"/>
+                <a:ea typeface="メイリオ" pitchFamily="50" charset="-128"/>
+                <a:cs typeface="メイリオ" pitchFamily="50" charset="-128"/>
+              </a:rPr>
+              <a:t>サービス部部会</a:t>
+            </a:r>
+            <a:endParaRPr lang="en-US" altLang="ja-JP" sz="1600" dirty="0">
+              <a:latin typeface="メイリオ"/>
+              <a:ea typeface="メイリオ"/>
+              <a:cs typeface="メイリオ"/>
+            </a:endParaRPr>
+          </a:p>
+          <a:p>
+            <a:endParaRPr lang="en-US" altLang="ja-JP" sz="1600" dirty="0">
+              <a:latin typeface="メイリオ"/>
+              <a:ea typeface="メイリオ"/>
+              <a:cs typeface="メイリオ"/>
+            </a:endParaRPr>
+          </a:p>
+          <a:p>
+            <a:r>
+              <a:rPr lang="ja-JP" altLang="en-US" sz="1400" dirty="0">
+                <a:latin typeface="メイリオ"/>
+                <a:ea typeface="メイリオ"/>
+                <a:cs typeface="メイリオ"/>
+              </a:rPr>
+              <a:t>　議題①：ＥＣサービス部の現状と今後の展開について</a:t>
+            </a:r>
+            <a:endParaRPr lang="en-US" altLang="zh-TW" sz="1400" dirty="0">
+              <a:latin typeface="メイリオ"/>
+              <a:ea typeface="メイリオ"/>
+              <a:cs typeface="メイリオ"/>
+            </a:endParaRPr>
+          </a:p>
+          <a:p>
+            <a:endParaRPr lang="en-US" altLang="ja-JP" sz="1400" dirty="0">
+              <a:solidFill>
+                <a:srgbClr val="FF0000"/>
+              </a:solidFill>
+              <a:latin typeface="メイリオ"/>
+              <a:ea typeface="メイリオ"/>
+              <a:cs typeface="メイリオ"/>
+            </a:endParaRPr>
+          </a:p>
+          <a:p>
+            <a:r>
+              <a:rPr lang="ja-JP" altLang="en-US" sz="1400" dirty="0">
+                <a:latin typeface="メイリオ"/>
+                <a:ea typeface="メイリオ"/>
+                <a:cs typeface="メイリオ"/>
+              </a:rPr>
+              <a:t>　議題②：既存顧客について</a:t>
+            </a:r>
+            <a:endParaRPr lang="en-US" altLang="ja-JP" sz="1400" dirty="0">
+              <a:latin typeface="メイリオ"/>
+              <a:ea typeface="メイリオ"/>
+              <a:cs typeface="メイリオ"/>
+            </a:endParaRPr>
+          </a:p>
+          <a:p>
+            <a:endParaRPr lang="en-US" altLang="ja-JP" sz="1400" dirty="0">
+              <a:latin typeface="メイリオ"/>
+              <a:ea typeface="メイリオ"/>
+              <a:cs typeface="メイリオ"/>
+            </a:endParaRPr>
+          </a:p>
+          <a:p>
+            <a:r>
+              <a:rPr lang="ja-JP" altLang="en-US" sz="1400" dirty="0">
+                <a:latin typeface="メイリオ"/>
+                <a:ea typeface="メイリオ"/>
+                <a:cs typeface="メイリオ"/>
+              </a:rPr>
+              <a:t>　議題③：旧パッケージの開発案件について</a:t>
+            </a:r>
+            <a:endParaRPr lang="en-US" altLang="ja-JP" sz="1400" dirty="0">
+              <a:latin typeface="メイリオ"/>
+              <a:ea typeface="メイリオ"/>
+              <a:cs typeface="メイリオ"/>
+            </a:endParaRPr>
+          </a:p>
+          <a:p>
+            <a:endParaRPr lang="ja-JP" altLang="en-US" sz="1400" dirty="0">
+              <a:latin typeface="メイリオ"/>
+              <a:ea typeface="メイリオ"/>
+              <a:cs typeface="メイリオ"/>
+            </a:endParaRPr>
+          </a:p>
+          <a:p>
+            <a:r>
+              <a:rPr lang="ja-JP" altLang="en-US" sz="1400" dirty="0">
+                <a:latin typeface="メイリオ"/>
+                <a:ea typeface="メイリオ"/>
+                <a:cs typeface="メイリオ"/>
+              </a:rPr>
+              <a:t>　議題④：セキュリティ強化対応状況について</a:t>
+            </a:r>
+            <a:endParaRPr lang="en-US" altLang="ja-JP" sz="1400" dirty="0">
+              <a:latin typeface="メイリオ"/>
+              <a:ea typeface="メイリオ"/>
+              <a:cs typeface="メイリオ"/>
+            </a:endParaRPr>
+          </a:p>
+          <a:p>
+            <a:endParaRPr lang="en-US" altLang="ja-JP" sz="1400" dirty="0">
+              <a:latin typeface="メイリオ"/>
+              <a:ea typeface="メイリオ"/>
+              <a:cs typeface="メイリオ"/>
+            </a:endParaRPr>
+          </a:p>
+          <a:p>
+            <a:r>
+              <a:rPr lang="ja-JP" altLang="en-US" sz="1400" dirty="0">
+                <a:latin typeface="メイリオ"/>
+                <a:ea typeface="メイリオ"/>
+                <a:cs typeface="メイリオ"/>
+              </a:rPr>
+              <a:t>　議題⑤：新パッケージのバージョンアップ状況について</a:t>
+            </a:r>
+            <a:endParaRPr lang="en-US" altLang="ja-JP" sz="1400" dirty="0">
+              <a:latin typeface="メイリオ"/>
+              <a:ea typeface="メイリオ"/>
+              <a:cs typeface="メイリオ"/>
+            </a:endParaRPr>
+          </a:p>
+          <a:p>
+            <a:endParaRPr lang="en-US" altLang="ja-JP" sz="1400" dirty="0">
+              <a:latin typeface="メイリオ"/>
+              <a:ea typeface="メイリオ"/>
+              <a:cs typeface="メイリオ"/>
+            </a:endParaRPr>
+          </a:p>
+          <a:p>
+            <a:r>
+              <a:rPr lang="ja-JP" altLang="en-US" sz="1400" dirty="0">
+                <a:latin typeface="メイリオ"/>
+                <a:ea typeface="メイリオ"/>
+                <a:cs typeface="メイリオ"/>
+              </a:rPr>
+              <a:t>　議題⑥：</a:t>
+            </a:r>
+            <a:r>
+              <a:rPr lang="en-US" altLang="ja-JP" sz="1400" dirty="0"/>
+              <a:t> </a:t>
+            </a:r>
+            <a:r>
+              <a:rPr lang="en-US" altLang="ja-JP" sz="1400" dirty="0" err="1">
+                <a:latin typeface="メイリオ" panose="020B0604030504040204" pitchFamily="50" charset="-128"/>
+                <a:ea typeface="メイリオ" panose="020B0604030504040204" pitchFamily="50" charset="-128"/>
+              </a:rPr>
+              <a:t>ECRider</a:t>
+            </a:r>
+            <a:r>
+              <a:rPr lang="ja-JP" altLang="en-US" sz="1400" dirty="0">
+                <a:latin typeface="メイリオ" panose="020B0604030504040204" pitchFamily="50" charset="-128"/>
+                <a:ea typeface="メイリオ" panose="020B0604030504040204" pitchFamily="50" charset="-128"/>
+              </a:rPr>
+              <a:t> </a:t>
+            </a:r>
+            <a:r>
+              <a:rPr lang="en-US" altLang="ja-JP" sz="1400" dirty="0">
+                <a:latin typeface="メイリオ" panose="020B0604030504040204" pitchFamily="50" charset="-128"/>
+                <a:ea typeface="メイリオ" panose="020B0604030504040204" pitchFamily="50" charset="-128"/>
+              </a:rPr>
+              <a:t>Primo</a:t>
+            </a:r>
+            <a:r>
+              <a:rPr lang="ja-JP" altLang="en-US" sz="1400" dirty="0">
+                <a:latin typeface="メイリオ" panose="020B0604030504040204" pitchFamily="50" charset="-128"/>
+                <a:ea typeface="メイリオ" panose="020B0604030504040204" pitchFamily="50" charset="-128"/>
+              </a:rPr>
+              <a:t>の受注状況</a:t>
+            </a:r>
+            <a:r>
+              <a:rPr lang="ja-JP" altLang="en-US" sz="1400" dirty="0">
+                <a:latin typeface="メイリオ" panose="020B0604030504040204" pitchFamily="50" charset="-128"/>
+                <a:ea typeface="メイリオ" panose="020B0604030504040204" pitchFamily="50" charset="-128"/>
+                <a:cs typeface="メイリオ"/>
+              </a:rPr>
+              <a:t>について</a:t>
+            </a:r>
+            <a:endParaRPr lang="en-US" altLang="ja-JP" sz="1400" dirty="0">
+              <a:latin typeface="メイリオ" panose="020B0604030504040204" pitchFamily="50" charset="-128"/>
+              <a:ea typeface="メイリオ" panose="020B0604030504040204" pitchFamily="50" charset="-128"/>
+              <a:cs typeface="メイリオ"/>
+            </a:endParaRPr>
+          </a:p>
+          <a:p>
+            <a:endParaRPr lang="en-US" altLang="ja-JP" sz="1400" dirty="0">
+              <a:latin typeface="メイリオ"/>
+              <a:ea typeface="メイリオ"/>
+              <a:cs typeface="メイリオ"/>
+            </a:endParaRPr>
+          </a:p>
+          <a:p>
+            <a:r>
+              <a:rPr lang="ja-JP" altLang="en-US" sz="1400" dirty="0">
+                <a:latin typeface="メイリオ"/>
+                <a:ea typeface="メイリオ"/>
+                <a:cs typeface="メイリオ"/>
+              </a:rPr>
+              <a:t>　議題⑦：営業案件について</a:t>
+            </a:r>
+            <a:endParaRPr lang="en-US" altLang="ja-JP" sz="1400" dirty="0">
+              <a:latin typeface="メイリオ"/>
+              <a:ea typeface="メイリオ"/>
+              <a:cs typeface="メイリオ"/>
+            </a:endParaRPr>
+          </a:p>
+          <a:p>
+            <a:endParaRPr lang="en-US" altLang="ja-JP" sz="1400" dirty="0">
+              <a:latin typeface="メイリオ"/>
+              <a:ea typeface="メイリオ"/>
+              <a:cs typeface="メイリオ"/>
+            </a:endParaRPr>
+          </a:p>
+          <a:p>
+            <a:r>
+              <a:rPr lang="ja-JP" altLang="en-US" sz="1400" dirty="0">
+                <a:latin typeface="メイリオ"/>
+                <a:ea typeface="メイリオ"/>
+                <a:cs typeface="メイリオ"/>
+              </a:rPr>
+              <a:t>　議題⑧：</a:t>
+            </a:r>
+            <a:r>
+              <a:rPr lang="en-US" altLang="ja-JP" sz="1400" dirty="0">
+                <a:latin typeface="メイリオ"/>
+                <a:ea typeface="メイリオ"/>
+                <a:cs typeface="メイリオ"/>
+              </a:rPr>
+              <a:t>AI</a:t>
+            </a:r>
+            <a:r>
+              <a:rPr lang="ja-JP" altLang="en-US" sz="1400" dirty="0">
+                <a:latin typeface="メイリオ"/>
+                <a:ea typeface="メイリオ"/>
+                <a:cs typeface="メイリオ"/>
+              </a:rPr>
+              <a:t>エージェント「</a:t>
+            </a:r>
+            <a:r>
+              <a:rPr lang="en-US" altLang="ja-JP" sz="1400" dirty="0">
+                <a:latin typeface="メイリオ"/>
+                <a:ea typeface="メイリオ"/>
+                <a:cs typeface="メイリオ"/>
+              </a:rPr>
+              <a:t>Kiro</a:t>
+            </a:r>
+            <a:r>
+              <a:rPr lang="ja-JP" altLang="en-US" sz="1400" dirty="0">
+                <a:latin typeface="メイリオ"/>
+                <a:ea typeface="メイリオ"/>
+                <a:cs typeface="メイリオ"/>
+              </a:rPr>
+              <a:t>」セミナー受講報告と社内活用について</a:t>
+            </a:r>
+            <a:endParaRPr lang="en-US" altLang="ja-JP" sz="1400" dirty="0">
+              <a:latin typeface="メイリオ"/>
+              <a:ea typeface="メイリオ"/>
+              <a:cs typeface="メイリオ"/>
+            </a:endParaRPr>
+          </a:p>
+          <a:p>
+            <a:endParaRPr lang="en-US" altLang="ja-JP" sz="1400" dirty="0">
+              <a:latin typeface="メイリオ"/>
+              <a:ea typeface="メイリオ"/>
+              <a:cs typeface="メイリオ"/>
+            </a:endParaRPr>
+          </a:p>
+          <a:p>
+            <a:r>
+              <a:rPr lang="ja-JP" altLang="en-US" sz="1400" dirty="0">
+                <a:latin typeface="メイリオ"/>
+                <a:ea typeface="メイリオ"/>
+                <a:cs typeface="メイリオ"/>
+              </a:rPr>
+              <a:t>　議題⑨：</a:t>
+            </a:r>
+            <a:r>
+              <a:rPr lang="en-US" altLang="ja-JP" sz="1400" dirty="0">
+                <a:latin typeface="メイリオ"/>
+                <a:ea typeface="メイリオ"/>
+                <a:cs typeface="メイリオ"/>
+              </a:rPr>
+              <a:t>AI</a:t>
+            </a:r>
+            <a:r>
+              <a:rPr lang="ja-JP" altLang="en-US" sz="1400" dirty="0">
+                <a:latin typeface="メイリオ"/>
+                <a:ea typeface="メイリオ"/>
+                <a:cs typeface="メイリオ"/>
+              </a:rPr>
+              <a:t>活用・業務効率化についての共有</a:t>
+            </a:r>
+            <a:endParaRPr lang="en-US" altLang="ja-JP" sz="1400" dirty="0">
+              <a:latin typeface="メイリオ"/>
+              <a:ea typeface="メイリオ"/>
+              <a:cs typeface="メイリオ"/>
+            </a:endParaRPr>
+          </a:p>
+          <a:p>
+            <a:endParaRPr lang="en-US" altLang="ja-JP" sz="1400" dirty="0">
+              <a:latin typeface="メイリオ"/>
+              <a:ea typeface="メイリオ"/>
+              <a:cs typeface="メイリオ"/>
+            </a:endParaRPr>
+          </a:p>
+          <a:p>
+            <a:r>
+              <a:rPr lang="ja-JP" altLang="en-US" sz="1400" dirty="0">
+                <a:latin typeface="メイリオ"/>
+                <a:ea typeface="メイリオ"/>
+                <a:cs typeface="メイリオ"/>
+              </a:rPr>
+              <a:t>　議題⑩：</a:t>
+            </a:r>
+            <a:r>
+              <a:rPr lang="ja-JP" altLang="en-US" sz="1400" dirty="0">
+                <a:uFillTx/>
+                <a:latin typeface="メイリオ"/>
+                <a:ea typeface="メイリオ"/>
+                <a:cs typeface="メイリオ"/>
+              </a:rPr>
+              <a:t>ＥＣサービス部部会の今後の予定</a:t>
+            </a:r>
+            <a:endParaRPr lang="en-US" altLang="ja-JP" sz="1400" dirty="0">
+              <a:latin typeface="メイリオ"/>
+              <a:ea typeface="メイリオ"/>
+              <a:cs typeface="メイリオ"/>
+            </a:endParaRPr>
+          </a:p>
+          <a:p>
+            <a:endParaRPr lang="en-US" altLang="ja-JP" sz="1400" dirty="0">
+              <a:latin typeface="メイリオ"/>
+              <a:ea typeface="メイリオ"/>
+              <a:cs typeface="メイリオ"/>
+            </a:endParaRPr>
+          </a:p>
+          <a:p>
+            <a:r>
+              <a:rPr lang="ja-JP" altLang="en-US" sz="1400" dirty="0">
+                <a:latin typeface="メイリオ"/>
+                <a:ea typeface="メイリオ"/>
+                <a:cs typeface="メイリオ"/>
+              </a:rPr>
+              <a:t>　議題⑪：連絡事項</a:t>
+            </a:r>
+            <a:endParaRPr lang="en-US" altLang="ja-JP" sz="1400" dirty="0">
+              <a:latin typeface="メイリオ"/>
+              <a:ea typeface="メイリオ"/>
+              <a:cs typeface="メイリオ"/>
+            </a:endParaRPr>
+          </a:p>
+        </p:txBody>
+      </p:sp>
+    </p:spTree>
+  </p:cSld>
+  <p:clrMapOvr>
+    <a:masterClrMapping/>
+  </p:clrMapOvr>
+</p:sld>
+</file>
+
+<file path=ppt/slides/slide20.xml><?xml version="1.0" encoding="utf-8"?>
 <p:sld xmlns:a="http://schemas.openxmlformats.org/drawingml/2006/main" xmlns:r="http://schemas.openxmlformats.org/officeDocument/2006/relationships" xmlns:p="http://schemas.openxmlformats.org/presentationml/2006/main">
   <p:cSld>
     <p:spTree>
@@ -17017,598 +18862,7 @@
 </p:sld>
 </file>
 
-<file path=ppt/slides/slide2.xml><?xml version="1.0" encoding="utf-8"?>
-<p:sld xmlns:a="http://schemas.openxmlformats.org/drawingml/2006/main" xmlns:r="http://schemas.openxmlformats.org/officeDocument/2006/relationships" xmlns:p="http://schemas.openxmlformats.org/presentationml/2006/main">
-  <p:cSld>
-    <p:spTree>
-      <p:nvGrpSpPr>
-        <p:cNvPr id="1" name=""/>
-        <p:cNvGrpSpPr/>
-        <p:nvPr/>
-      </p:nvGrpSpPr>
-      <p:grpSpPr>
-        <a:xfrm>
-          <a:off x="0" y="0"/>
-          <a:ext cx="0" cy="0"/>
-          <a:chOff x="0" y="0"/>
-          <a:chExt cx="0" cy="0"/>
-        </a:xfrm>
-      </p:grpSpPr>
-      <p:sp>
-        <p:nvSpPr>
-          <p:cNvPr id="6" name="テキスト ボックス 5"/>
-          <p:cNvSpPr txBox="1">
-            <a:spLocks/>
-          </p:cNvSpPr>
-          <p:nvPr/>
-        </p:nvSpPr>
-        <p:spPr>
-          <a:xfrm>
-            <a:off x="1136576" y="188641"/>
-            <a:ext cx="6408712" cy="469359"/>
-          </a:xfrm>
-          <a:prstGeom prst="rect">
-            <a:avLst/>
-          </a:prstGeom>
-          <a:noFill/>
-        </p:spPr>
-        <p:txBody>
-          <a:bodyPr wrap="square" rtlCol="0">
-            <a:spAutoFit/>
-          </a:bodyPr>
-          <a:lstStyle/>
-          <a:p>
-            <a:pPr algn="l">
-              <a:lnSpc>
-                <a:spcPct val="130000"/>
-              </a:lnSpc>
-            </a:pPr>
-            <a:r>
-              <a:rPr lang="en-US" altLang="ja-JP" sz="2000" dirty="0">
-                <a:latin typeface="メイリオ" pitchFamily="50" charset="-128"/>
-                <a:ea typeface="メイリオ" pitchFamily="50" charset="-128"/>
-                <a:cs typeface="メイリオ" pitchFamily="50" charset="-128"/>
-              </a:rPr>
-              <a:t>2026/7/30</a:t>
-            </a:r>
-            <a:r>
-              <a:rPr lang="ja-JP" altLang="en-US" sz="2000" dirty="0">
-                <a:latin typeface="メイリオ" pitchFamily="50" charset="-128"/>
-                <a:ea typeface="メイリオ" pitchFamily="50" charset="-128"/>
-                <a:cs typeface="メイリオ" pitchFamily="50" charset="-128"/>
-              </a:rPr>
-              <a:t>　</a:t>
-            </a:r>
-            <a:r>
-              <a:rPr lang="en-US" altLang="ja-JP" sz="2000" dirty="0">
-                <a:latin typeface="メイリオ" pitchFamily="50" charset="-128"/>
-                <a:ea typeface="メイリオ" pitchFamily="50" charset="-128"/>
-                <a:cs typeface="メイリオ" pitchFamily="50" charset="-128"/>
-              </a:rPr>
-              <a:t>EC</a:t>
-            </a:r>
-            <a:r>
-              <a:rPr lang="ja-JP" altLang="en-US" sz="2000" dirty="0">
-                <a:latin typeface="メイリオ" pitchFamily="50" charset="-128"/>
-                <a:ea typeface="メイリオ" pitchFamily="50" charset="-128"/>
-                <a:cs typeface="メイリオ" pitchFamily="50" charset="-128"/>
-              </a:rPr>
-              <a:t>サービス部部会　アジェンダ</a:t>
-            </a:r>
-          </a:p>
-        </p:txBody>
-      </p:sp>
-      <p:sp>
-        <p:nvSpPr>
-          <p:cNvPr id="38" name="テキスト ボックス 37"/>
-          <p:cNvSpPr txBox="1">
-            <a:spLocks/>
-          </p:cNvSpPr>
-          <p:nvPr/>
-        </p:nvSpPr>
-        <p:spPr>
-          <a:xfrm>
-            <a:off x="1064569" y="856357"/>
-            <a:ext cx="8064895" cy="5109091"/>
-          </a:xfrm>
-          <a:prstGeom prst="rect">
-            <a:avLst/>
-          </a:prstGeom>
-          <a:noFill/>
-        </p:spPr>
-        <p:txBody>
-          <a:bodyPr wrap="square" rtlCol="0">
-            <a:spAutoFit/>
-          </a:bodyPr>
-          <a:lstStyle/>
-          <a:p>
-            <a:r>
-              <a:rPr lang="en-US" altLang="ja-JP" sz="1600" dirty="0">
-                <a:latin typeface="メイリオ"/>
-                <a:ea typeface="メイリオ"/>
-                <a:cs typeface="メイリオ"/>
-              </a:rPr>
-              <a:t>2026</a:t>
-            </a:r>
-            <a:r>
-              <a:rPr lang="ja-JP" altLang="en-US" sz="1600" dirty="0">
-                <a:latin typeface="メイリオ"/>
-                <a:ea typeface="メイリオ"/>
-                <a:cs typeface="メイリオ"/>
-              </a:rPr>
-              <a:t>年</a:t>
-            </a:r>
-            <a:r>
-              <a:rPr lang="en-US" altLang="ja-JP" sz="1600" dirty="0">
-                <a:latin typeface="メイリオ"/>
-                <a:ea typeface="メイリオ"/>
-                <a:cs typeface="メイリオ"/>
-              </a:rPr>
-              <a:t>7</a:t>
-            </a:r>
-            <a:r>
-              <a:rPr lang="ja-JP" altLang="en-US" sz="1600" dirty="0">
-                <a:latin typeface="メイリオ"/>
-                <a:ea typeface="メイリオ"/>
-                <a:cs typeface="メイリオ"/>
-              </a:rPr>
-              <a:t>月</a:t>
-            </a:r>
-            <a:r>
-              <a:rPr lang="en-US" altLang="ja-JP" sz="1600" dirty="0">
-                <a:latin typeface="メイリオ"/>
-                <a:ea typeface="メイリオ"/>
-                <a:cs typeface="メイリオ"/>
-              </a:rPr>
-              <a:t>30</a:t>
-            </a:r>
-            <a:r>
-              <a:rPr lang="ja-JP" altLang="en-US" sz="1600" dirty="0">
-                <a:latin typeface="メイリオ"/>
-                <a:ea typeface="メイリオ"/>
-                <a:cs typeface="メイリオ"/>
-              </a:rPr>
-              <a:t>日 </a:t>
-            </a:r>
-            <a:r>
-              <a:rPr lang="en-US" altLang="ja-JP" sz="1600" dirty="0">
-                <a:latin typeface="メイリオ"/>
-                <a:ea typeface="メイリオ"/>
-                <a:cs typeface="メイリオ"/>
-              </a:rPr>
-              <a:t>17</a:t>
-            </a:r>
-            <a:r>
-              <a:rPr lang="ja-JP" altLang="en-US" sz="1600" dirty="0">
-                <a:latin typeface="メイリオ"/>
-                <a:ea typeface="メイリオ"/>
-                <a:cs typeface="メイリオ"/>
-              </a:rPr>
-              <a:t>：</a:t>
-            </a:r>
-            <a:r>
-              <a:rPr lang="en-US" altLang="ja-JP" sz="1600" dirty="0">
-                <a:latin typeface="メイリオ"/>
-                <a:ea typeface="メイリオ"/>
-                <a:cs typeface="メイリオ"/>
-              </a:rPr>
-              <a:t>00</a:t>
-            </a:r>
-            <a:r>
-              <a:rPr lang="ja-JP" altLang="en-US" sz="1600" dirty="0">
-                <a:latin typeface="メイリオ"/>
-                <a:ea typeface="メイリオ"/>
-                <a:cs typeface="メイリオ"/>
-              </a:rPr>
-              <a:t>～</a:t>
-            </a:r>
-            <a:r>
-              <a:rPr lang="en-US" altLang="ja-JP" sz="1600" dirty="0">
-                <a:latin typeface="メイリオ"/>
-                <a:ea typeface="メイリオ"/>
-                <a:cs typeface="メイリオ"/>
-              </a:rPr>
-              <a:t>18</a:t>
-            </a:r>
-            <a:r>
-              <a:rPr lang="ja-JP" altLang="en-US" sz="1600" dirty="0">
-                <a:latin typeface="メイリオ"/>
-                <a:ea typeface="メイリオ"/>
-                <a:cs typeface="メイリオ"/>
-              </a:rPr>
-              <a:t>：</a:t>
-            </a:r>
-            <a:r>
-              <a:rPr lang="en-US" altLang="ja-JP" sz="1600" dirty="0">
-                <a:latin typeface="メイリオ"/>
-                <a:ea typeface="メイリオ"/>
-                <a:cs typeface="メイリオ"/>
-              </a:rPr>
-              <a:t>00 </a:t>
-            </a:r>
-            <a:r>
-              <a:rPr lang="ja-JP" altLang="en-US" sz="1600" dirty="0">
-                <a:latin typeface="メイリオ"/>
-                <a:ea typeface="メイリオ"/>
-                <a:cs typeface="メイリオ"/>
-              </a:rPr>
-              <a:t>　</a:t>
-            </a:r>
-            <a:r>
-              <a:rPr lang="en-US" altLang="ja-JP" sz="1600" dirty="0">
-                <a:latin typeface="メイリオ" pitchFamily="50" charset="-128"/>
-                <a:ea typeface="メイリオ" pitchFamily="50" charset="-128"/>
-                <a:cs typeface="メイリオ" pitchFamily="50" charset="-128"/>
-              </a:rPr>
-              <a:t> EC</a:t>
-            </a:r>
-            <a:r>
-              <a:rPr lang="ja-JP" altLang="en-US" sz="1600" dirty="0">
-                <a:latin typeface="メイリオ" pitchFamily="50" charset="-128"/>
-                <a:ea typeface="メイリオ" pitchFamily="50" charset="-128"/>
-                <a:cs typeface="メイリオ" pitchFamily="50" charset="-128"/>
-              </a:rPr>
-              <a:t>サービス部部会</a:t>
-            </a:r>
-            <a:endParaRPr lang="en-US" altLang="ja-JP" sz="1600" dirty="0">
-              <a:latin typeface="メイリオ"/>
-              <a:ea typeface="メイリオ"/>
-              <a:cs typeface="メイリオ"/>
-            </a:endParaRPr>
-          </a:p>
-          <a:p>
-            <a:endParaRPr lang="en-US" altLang="ja-JP" sz="1600" dirty="0">
-              <a:latin typeface="メイリオ"/>
-              <a:ea typeface="メイリオ"/>
-              <a:cs typeface="メイリオ"/>
-            </a:endParaRPr>
-          </a:p>
-          <a:p>
-            <a:r>
-              <a:rPr lang="ja-JP" altLang="en-US" sz="1400" dirty="0">
-                <a:latin typeface="メイリオ"/>
-                <a:ea typeface="メイリオ"/>
-                <a:cs typeface="メイリオ"/>
-              </a:rPr>
-              <a:t>　議題①：ＥＣサービス部の現状と今後の展開について</a:t>
-            </a:r>
-            <a:endParaRPr lang="en-US" altLang="zh-TW" sz="1400" dirty="0">
-              <a:latin typeface="メイリオ"/>
-              <a:ea typeface="メイリオ"/>
-              <a:cs typeface="メイリオ"/>
-            </a:endParaRPr>
-          </a:p>
-          <a:p>
-            <a:endParaRPr lang="en-US" altLang="ja-JP" sz="1400" dirty="0">
-              <a:solidFill>
-                <a:srgbClr val="FF0000"/>
-              </a:solidFill>
-              <a:latin typeface="メイリオ"/>
-              <a:ea typeface="メイリオ"/>
-              <a:cs typeface="メイリオ"/>
-            </a:endParaRPr>
-          </a:p>
-          <a:p>
-            <a:r>
-              <a:rPr lang="ja-JP" altLang="en-US" sz="1400" dirty="0">
-                <a:latin typeface="メイリオ"/>
-                <a:ea typeface="メイリオ"/>
-                <a:cs typeface="メイリオ"/>
-              </a:rPr>
-              <a:t>　議題②：既存顧客について</a:t>
-            </a:r>
-            <a:endParaRPr lang="en-US" altLang="ja-JP" sz="1400" dirty="0">
-              <a:latin typeface="メイリオ"/>
-              <a:ea typeface="メイリオ"/>
-              <a:cs typeface="メイリオ"/>
-            </a:endParaRPr>
-          </a:p>
-          <a:p>
-            <a:endParaRPr lang="en-US" altLang="ja-JP" sz="1400" dirty="0">
-              <a:latin typeface="メイリオ"/>
-              <a:ea typeface="メイリオ"/>
-              <a:cs typeface="メイリオ"/>
-            </a:endParaRPr>
-          </a:p>
-          <a:p>
-            <a:r>
-              <a:rPr lang="ja-JP" altLang="en-US" sz="1400" dirty="0">
-                <a:latin typeface="メイリオ"/>
-                <a:ea typeface="メイリオ"/>
-                <a:cs typeface="メイリオ"/>
-              </a:rPr>
-              <a:t>　議題③：旧パッケージの開発案件について</a:t>
-            </a:r>
-            <a:endParaRPr lang="en-US" altLang="ja-JP" sz="1400" dirty="0">
-              <a:latin typeface="メイリオ"/>
-              <a:ea typeface="メイリオ"/>
-              <a:cs typeface="メイリオ"/>
-            </a:endParaRPr>
-          </a:p>
-          <a:p>
-            <a:endParaRPr lang="ja-JP" altLang="en-US" sz="1400" dirty="0">
-              <a:latin typeface="メイリオ"/>
-              <a:ea typeface="メイリオ"/>
-              <a:cs typeface="メイリオ"/>
-            </a:endParaRPr>
-          </a:p>
-          <a:p>
-            <a:r>
-              <a:rPr lang="ja-JP" altLang="en-US" sz="1400" dirty="0">
-                <a:latin typeface="メイリオ"/>
-                <a:ea typeface="メイリオ"/>
-                <a:cs typeface="メイリオ"/>
-              </a:rPr>
-              <a:t>　議題④：セキュリティ強化対応状況について</a:t>
-            </a:r>
-            <a:endParaRPr lang="en-US" altLang="ja-JP" sz="1400" dirty="0">
-              <a:latin typeface="メイリオ"/>
-              <a:ea typeface="メイリオ"/>
-              <a:cs typeface="メイリオ"/>
-            </a:endParaRPr>
-          </a:p>
-          <a:p>
-            <a:endParaRPr lang="en-US" altLang="ja-JP" sz="1400" dirty="0">
-              <a:latin typeface="メイリオ"/>
-              <a:ea typeface="メイリオ"/>
-              <a:cs typeface="メイリオ"/>
-            </a:endParaRPr>
-          </a:p>
-          <a:p>
-            <a:r>
-              <a:rPr lang="ja-JP" altLang="en-US" sz="1400" dirty="0">
-                <a:latin typeface="メイリオ"/>
-                <a:ea typeface="メイリオ"/>
-                <a:cs typeface="メイリオ"/>
-              </a:rPr>
-              <a:t>　議題⑤：新パッケージのバージョンアップ状況について</a:t>
-            </a:r>
-            <a:endParaRPr lang="en-US" altLang="ja-JP" sz="1400" dirty="0">
-              <a:latin typeface="メイリオ"/>
-              <a:ea typeface="メイリオ"/>
-              <a:cs typeface="メイリオ"/>
-            </a:endParaRPr>
-          </a:p>
-          <a:p>
-            <a:endParaRPr lang="en-US" altLang="ja-JP" sz="1400" dirty="0">
-              <a:latin typeface="メイリオ"/>
-              <a:ea typeface="メイリオ"/>
-              <a:cs typeface="メイリオ"/>
-            </a:endParaRPr>
-          </a:p>
-          <a:p>
-            <a:r>
-              <a:rPr lang="ja-JP" altLang="en-US" sz="1400" dirty="0">
-                <a:latin typeface="メイリオ"/>
-                <a:ea typeface="メイリオ"/>
-                <a:cs typeface="メイリオ"/>
-              </a:rPr>
-              <a:t>　議題⑥：</a:t>
-            </a:r>
-            <a:r>
-              <a:rPr lang="en-US" altLang="ja-JP" sz="1400" dirty="0"/>
-              <a:t> </a:t>
-            </a:r>
-            <a:r>
-              <a:rPr lang="en-US" altLang="ja-JP" sz="1400" dirty="0" err="1">
-                <a:latin typeface="メイリオ" panose="020B0604030504040204" pitchFamily="50" charset="-128"/>
-                <a:ea typeface="メイリオ" panose="020B0604030504040204" pitchFamily="50" charset="-128"/>
-              </a:rPr>
-              <a:t>ECRider</a:t>
-            </a:r>
-            <a:r>
-              <a:rPr lang="ja-JP" altLang="en-US" sz="1400" dirty="0">
-                <a:latin typeface="メイリオ" panose="020B0604030504040204" pitchFamily="50" charset="-128"/>
-                <a:ea typeface="メイリオ" panose="020B0604030504040204" pitchFamily="50" charset="-128"/>
-              </a:rPr>
-              <a:t> </a:t>
-            </a:r>
-            <a:r>
-              <a:rPr lang="en-US" altLang="ja-JP" sz="1400" dirty="0">
-                <a:latin typeface="メイリオ" panose="020B0604030504040204" pitchFamily="50" charset="-128"/>
-                <a:ea typeface="メイリオ" panose="020B0604030504040204" pitchFamily="50" charset="-128"/>
-              </a:rPr>
-              <a:t>Primo</a:t>
-            </a:r>
-            <a:r>
-              <a:rPr lang="ja-JP" altLang="en-US" sz="1400" dirty="0">
-                <a:latin typeface="メイリオ" panose="020B0604030504040204" pitchFamily="50" charset="-128"/>
-                <a:ea typeface="メイリオ" panose="020B0604030504040204" pitchFamily="50" charset="-128"/>
-              </a:rPr>
-              <a:t>の受注状況</a:t>
-            </a:r>
-            <a:r>
-              <a:rPr lang="ja-JP" altLang="en-US" sz="1400" dirty="0">
-                <a:latin typeface="メイリオ" panose="020B0604030504040204" pitchFamily="50" charset="-128"/>
-                <a:ea typeface="メイリオ" panose="020B0604030504040204" pitchFamily="50" charset="-128"/>
-                <a:cs typeface="メイリオ"/>
-              </a:rPr>
-              <a:t>について</a:t>
-            </a:r>
-            <a:endParaRPr lang="en-US" altLang="ja-JP" sz="1400" dirty="0">
-              <a:latin typeface="メイリオ" panose="020B0604030504040204" pitchFamily="50" charset="-128"/>
-              <a:ea typeface="メイリオ" panose="020B0604030504040204" pitchFamily="50" charset="-128"/>
-              <a:cs typeface="メイリオ"/>
-            </a:endParaRPr>
-          </a:p>
-          <a:p>
-            <a:endParaRPr lang="en-US" altLang="ja-JP" sz="1400" dirty="0">
-              <a:latin typeface="メイリオ"/>
-              <a:ea typeface="メイリオ"/>
-              <a:cs typeface="メイリオ"/>
-            </a:endParaRPr>
-          </a:p>
-          <a:p>
-            <a:r>
-              <a:rPr lang="ja-JP" altLang="en-US" sz="1400" dirty="0">
-                <a:latin typeface="メイリオ"/>
-                <a:ea typeface="メイリオ"/>
-                <a:cs typeface="メイリオ"/>
-              </a:rPr>
-              <a:t>　議題⑦：営業案件について</a:t>
-            </a:r>
-            <a:endParaRPr lang="en-US" altLang="ja-JP" sz="1400" dirty="0">
-              <a:latin typeface="メイリオ"/>
-              <a:ea typeface="メイリオ"/>
-              <a:cs typeface="メイリオ"/>
-            </a:endParaRPr>
-          </a:p>
-          <a:p>
-            <a:endParaRPr lang="en-US" altLang="ja-JP" sz="1400" dirty="0">
-              <a:latin typeface="メイリオ"/>
-              <a:ea typeface="メイリオ"/>
-              <a:cs typeface="メイリオ"/>
-            </a:endParaRPr>
-          </a:p>
-          <a:p>
-            <a:r>
-              <a:rPr lang="ja-JP" altLang="en-US" sz="1400" dirty="0">
-                <a:latin typeface="メイリオ"/>
-                <a:ea typeface="メイリオ"/>
-                <a:cs typeface="メイリオ"/>
-              </a:rPr>
-              <a:t>　議題⑧：</a:t>
-            </a:r>
-            <a:r>
-              <a:rPr lang="en-US" altLang="ja-JP" sz="1400" dirty="0">
-                <a:latin typeface="メイリオ"/>
-                <a:ea typeface="メイリオ"/>
-                <a:cs typeface="メイリオ"/>
-              </a:rPr>
-              <a:t>AI</a:t>
-            </a:r>
-            <a:r>
-              <a:rPr lang="ja-JP" altLang="en-US" sz="1400" dirty="0">
-                <a:latin typeface="メイリオ"/>
-                <a:ea typeface="メイリオ"/>
-                <a:cs typeface="メイリオ"/>
-              </a:rPr>
-              <a:t>エージェント「</a:t>
-            </a:r>
-            <a:r>
-              <a:rPr lang="en-US" altLang="ja-JP" sz="1400" dirty="0">
-                <a:latin typeface="メイリオ"/>
-                <a:ea typeface="メイリオ"/>
-                <a:cs typeface="メイリオ"/>
-              </a:rPr>
-              <a:t>Kiro</a:t>
-            </a:r>
-            <a:r>
-              <a:rPr lang="ja-JP" altLang="en-US" sz="1400" dirty="0">
-                <a:latin typeface="メイリオ"/>
-                <a:ea typeface="メイリオ"/>
-                <a:cs typeface="メイリオ"/>
-              </a:rPr>
-              <a:t>」セミナー受講報告と社内活用について</a:t>
-            </a:r>
-            <a:endParaRPr lang="en-US" altLang="ja-JP" sz="1400" dirty="0">
-              <a:latin typeface="メイリオ"/>
-              <a:ea typeface="メイリオ"/>
-              <a:cs typeface="メイリオ"/>
-            </a:endParaRPr>
-          </a:p>
-          <a:p>
-            <a:endParaRPr lang="en-US" altLang="ja-JP" sz="1400" dirty="0">
-              <a:latin typeface="メイリオ"/>
-              <a:ea typeface="メイリオ"/>
-              <a:cs typeface="メイリオ"/>
-            </a:endParaRPr>
-          </a:p>
-          <a:p>
-            <a:r>
-              <a:rPr lang="ja-JP" altLang="en-US" sz="1400" dirty="0">
-                <a:latin typeface="メイリオ"/>
-                <a:ea typeface="メイリオ"/>
-                <a:cs typeface="メイリオ"/>
-              </a:rPr>
-              <a:t>　議題⑨：</a:t>
-            </a:r>
-            <a:r>
-              <a:rPr lang="en-US" altLang="ja-JP" sz="1400" dirty="0">
-                <a:latin typeface="メイリオ"/>
-                <a:ea typeface="メイリオ"/>
-                <a:cs typeface="メイリオ"/>
-              </a:rPr>
-              <a:t>AI</a:t>
-            </a:r>
-            <a:r>
-              <a:rPr lang="ja-JP" altLang="en-US" sz="1400" dirty="0">
-                <a:latin typeface="メイリオ"/>
-                <a:ea typeface="メイリオ"/>
-                <a:cs typeface="メイリオ"/>
-              </a:rPr>
-              <a:t>活用・業務効率化についての共有</a:t>
-            </a:r>
-            <a:endParaRPr lang="en-US" altLang="ja-JP" sz="1400" dirty="0">
-              <a:latin typeface="メイリオ"/>
-              <a:ea typeface="メイリオ"/>
-              <a:cs typeface="メイリオ"/>
-            </a:endParaRPr>
-          </a:p>
-          <a:p>
-            <a:endParaRPr lang="en-US" altLang="ja-JP" sz="1400" dirty="0">
-              <a:latin typeface="メイリオ"/>
-              <a:ea typeface="メイリオ"/>
-              <a:cs typeface="メイリオ"/>
-            </a:endParaRPr>
-          </a:p>
-          <a:p>
-            <a:r>
-              <a:rPr lang="ja-JP" altLang="en-US" sz="1400" dirty="0">
-                <a:latin typeface="メイリオ"/>
-                <a:ea typeface="メイリオ"/>
-                <a:cs typeface="メイリオ"/>
-              </a:rPr>
-              <a:t>　議題⑩：</a:t>
-            </a:r>
-            <a:r>
-              <a:rPr lang="ja-JP" altLang="en-US" sz="1400" dirty="0">
-                <a:uFillTx/>
-                <a:latin typeface="メイリオ"/>
-                <a:ea typeface="メイリオ"/>
-                <a:cs typeface="メイリオ"/>
-              </a:rPr>
-              <a:t>ＥＣサービス部部会の今後の予定</a:t>
-            </a:r>
-            <a:endParaRPr lang="en-US" altLang="ja-JP" sz="1400" dirty="0">
-              <a:latin typeface="メイリオ"/>
-              <a:ea typeface="メイリオ"/>
-              <a:cs typeface="メイリオ"/>
-            </a:endParaRPr>
-          </a:p>
-          <a:p>
-            <a:endParaRPr lang="en-US" altLang="ja-JP" sz="1400" dirty="0">
-              <a:latin typeface="メイリオ"/>
-              <a:ea typeface="メイリオ"/>
-              <a:cs typeface="メイリオ"/>
-            </a:endParaRPr>
-          </a:p>
-          <a:p>
-            <a:r>
-              <a:rPr lang="ja-JP" altLang="en-US" sz="1400" dirty="0">
-                <a:latin typeface="メイリオ"/>
-                <a:ea typeface="メイリオ"/>
-                <a:cs typeface="メイリオ"/>
-              </a:rPr>
-              <a:t>　議題⑪：連絡事項</a:t>
-            </a:r>
-            <a:endParaRPr lang="en-US" altLang="ja-JP" sz="1400" dirty="0">
-              <a:latin typeface="メイリオ"/>
-              <a:ea typeface="メイリオ"/>
-              <a:cs typeface="メイリオ"/>
-            </a:endParaRPr>
-          </a:p>
-        </p:txBody>
-      </p:sp>
-    </p:spTree>
-  </p:cSld>
-  <p:clrMapOvr>
-    <a:masterClrMapping/>
-  </p:clrMapOvr>
-</p:sld>
-</file>
-
-<file path=ppt/slides/slide20.xml><?xml version="1.0" encoding="utf-8"?>
+<file path=ppt/slides/slide21.xml><?xml version="1.0" encoding="utf-8"?>
 <p:sld xmlns:a="http://schemas.openxmlformats.org/drawingml/2006/main" xmlns:r="http://schemas.openxmlformats.org/officeDocument/2006/relationships" xmlns:p="http://schemas.openxmlformats.org/presentationml/2006/main">
   <p:cSld>
     <p:spTree>
@@ -17915,7 +19169,7 @@
 </p:sld>
 </file>
 
-<file path=ppt/slides/slide21.xml><?xml version="1.0" encoding="utf-8"?>
+<file path=ppt/slides/slide22.xml><?xml version="1.0" encoding="utf-8"?>
 <p:sld xmlns:a="http://schemas.openxmlformats.org/drawingml/2006/main" xmlns:r="http://schemas.openxmlformats.org/officeDocument/2006/relationships" xmlns:p="http://schemas.openxmlformats.org/presentationml/2006/main">
   <p:cSld>
     <p:spTree>
